--- a/slides/Week3-Tue-User-Testing-II.pptx
+++ b/slides/Week3-Tue-User-Testing-II.pptx
@@ -19,6 +19,8 @@
     <p:sldId id="267" r:id="rId19"/>
     <p:sldId id="268" r:id="rId20"/>
     <p:sldId id="269" r:id="rId21"/>
+    <p:sldId id="270" r:id="rId22"/>
+    <p:sldId id="271" r:id="rId23"/>
   </p:sldIdLst>
   <p:sldSz cx="12191695" cy="6858000" type="screen4x3"/>
   <p:notesSz cx="6858000" cy="9144000"/>
@@ -540,6 +542,76 @@
 </p:notes>
 </file>
 
+<file path=ppt/notesSlides/notesSlide10.xml><?xml version="1.0" encoding="utf-8"?>
+<p:notes xmlns:a="http://schemas.openxmlformats.org/drawingml/2006/main" xmlns:p="http://schemas.openxmlformats.org/presentationml/2006/main" xmlns:r="http://schemas.openxmlformats.org/officeDocument/2006/relationships">
+  <p:cSld>
+    <p:spTree>
+      <p:nvGrpSpPr>
+        <p:cNvPr id="1" name=""/>
+        <p:cNvGrpSpPr/>
+        <p:nvPr/>
+      </p:nvGrpSpPr>
+      <p:grpSpPr>
+        <a:xfrm>
+          <a:off x="0" y="0"/>
+          <a:ext cx="0" cy="0"/>
+          <a:chOff x="0" y="0"/>
+          <a:chExt cx="0" cy="0"/>
+        </a:xfrm>
+      </p:grpSpPr>
+      <p:sp>
+        <p:nvSpPr>
+          <p:cNvPr id="2" name="Slide Image Placeholder 1"/>
+          <p:cNvSpPr>
+            <a:spLocks noGrp="1"/>
+          </p:cNvSpPr>
+          <p:nvPr>
+            <p:ph type="sldImg" idx="2"/>
+          </p:nvPr>
+        </p:nvSpPr>
+        <p:spPr/>
+      </p:sp>
+      <p:sp>
+        <p:nvSpPr>
+          <p:cNvPr id="3" name="Notes Placeholder 2"/>
+          <p:cNvSpPr>
+            <a:spLocks noGrp="1"/>
+          </p:cNvSpPr>
+          <p:nvPr>
+            <p:ph type="body" idx="3" sz="quarter"/>
+          </p:nvPr>
+        </p:nvSpPr>
+        <p:spPr/>
+        <p:txBody>
+          <a:bodyPr/>
+          <a:lstStyle/>
+          <a:p>
+            <a:r>
+              <a:t>The VAP deck's 'most critical finding'. Gives the session intellectual honesty and connects straight to the peer-testing activity.</a:t>
+            </a:r>
+          </a:p>
+        </p:txBody>
+      </p:sp>
+      <p:sp>
+        <p:nvSpPr>
+          <p:cNvPr id="4" name="Slide Number Placeholder 3"/>
+          <p:cNvSpPr>
+            <a:spLocks noGrp="1"/>
+          </p:cNvSpPr>
+          <p:nvPr>
+            <p:ph type="sldNum" idx="5" sz="quarter"/>
+          </p:nvPr>
+        </p:nvSpPr>
+        <p:spPr/>
+      </p:sp>
+    </p:spTree>
+  </p:cSld>
+  <p:clrMapOvr>
+    <a:masterClrMapping/>
+  </p:clrMapOvr>
+</p:notes>
+</file>
+
 <file path=ppt/notesSlides/notesSlide2.xml><?xml version="1.0" encoding="utf-8"?>
 <p:notes xmlns:a="http://schemas.openxmlformats.org/drawingml/2006/main" xmlns:p="http://schemas.openxmlformats.org/presentationml/2006/main" xmlns:r="http://schemas.openxmlformats.org/officeDocument/2006/relationships">
   <p:cSld>
@@ -585,7 +657,7 @@
           <a:lstStyle/>
           <a:p>
             <a:r>
-              <a:t>VAP Discovery heuristic (Ch. 5). Trace each source to the values it carries in.</a:t>
+              <a:t>The session's spine: VAP translated into the vibe-coding workflow. Writing value-centered prompts BEFORE running them is Discovery→Implementation made checkable; the log shows whether you stuck to the plan.</a:t>
             </a:r>
           </a:p>
         </p:txBody>
@@ -655,7 +727,7 @@
           <a:lstStyle/>
           <a:p>
             <a:r>
-              <a:t>Hauke's own PiTech case (YAI). Real example of a genuine value conflict — sets up Implementation.</a:t>
+              <a:t>VAP Discovery heuristic (Ch. 5). Trace each source to the values it carries in.</a:t>
             </a:r>
           </a:p>
         </p:txBody>
@@ -725,7 +797,7 @@
           <a:lstStyle/>
           <a:p>
             <a:r>
-              <a:t>van de Poel / VAP. The goal is to reach for Dissolve first, and to make Trade-offs explicit.</a:t>
+              <a:t>Hauke's own PiTech case (YAI). Real example of a genuine value conflict — sets up Implementation.</a:t>
             </a:r>
           </a:p>
         </p:txBody>
@@ -795,7 +867,7 @@
           <a:lstStyle/>
           <a:p>
             <a:r>
-              <a:t>Three real PiTech resolutions from the VAP deck — one per strategy. Vivid, and each maps to a move.</a:t>
+              <a:t>van de Poel / VAP. The goal is to reach for Dissolve first, and to make Trade-offs explicit.</a:t>
             </a:r>
           </a:p>
         </p:txBody>
@@ -865,7 +937,7 @@
           <a:lstStyle/>
           <a:p>
             <a:r>
-              <a:t>The 'light 3-question check' the syllabus asks for. Adapt each team's project into these three, then verify with a real user.</a:t>
+              <a:t>Three real PiTech resolutions from the VAP deck — one per strategy. Vivid, and each maps to a move.</a:t>
             </a:r>
           </a:p>
         </p:txBody>
@@ -935,7 +1007,7 @@
           <a:lstStyle/>
           <a:p>
             <a:r>
-              <a:t>Repo 7_28 peer-testing round 2 (values). Ties Monday usability + Tuesday values into the final iteration.</a:t>
+              <a:t>Phase 1, in planning.md BEFORE anyone prompts: the three answers, plus the verbatim value-centered prompts the team intends to run for today's iteration. A template is provided in week3/7_28/.</a:t>
             </a:r>
           </a:p>
         </p:txBody>
@@ -1005,7 +1077,77 @@
           <a:lstStyle/>
           <a:p>
             <a:r>
-              <a:t>The VAP deck's 'most critical finding'. Gives the session intellectual honesty and connects straight to the peer-testing activity.</a:t>
+              <a:t>Phase 2: implementation + the reality check. Peer value-test rotation (round 2, after Monday's usability round).</a:t>
+            </a:r>
+          </a:p>
+        </p:txBody>
+      </p:sp>
+      <p:sp>
+        <p:nvSpPr>
+          <p:cNvPr id="4" name="Slide Number Placeholder 3"/>
+          <p:cNvSpPr>
+            <a:spLocks noGrp="1"/>
+          </p:cNvSpPr>
+          <p:nvPr>
+            <p:ph type="sldNum" idx="5" sz="quarter"/>
+          </p:nvPr>
+        </p:nvSpPr>
+        <p:spPr/>
+      </p:sp>
+    </p:spTree>
+  </p:cSld>
+  <p:clrMapOvr>
+    <a:masterClrMapping/>
+  </p:clrMapOvr>
+</p:notes>
+</file>
+
+<file path=ppt/notesSlides/notesSlide9.xml><?xml version="1.0" encoding="utf-8"?>
+<p:notes xmlns:a="http://schemas.openxmlformats.org/drawingml/2006/main" xmlns:p="http://schemas.openxmlformats.org/presentationml/2006/main" xmlns:r="http://schemas.openxmlformats.org/officeDocument/2006/relationships">
+  <p:cSld>
+    <p:spTree>
+      <p:nvGrpSpPr>
+        <p:cNvPr id="1" name=""/>
+        <p:cNvGrpSpPr/>
+        <p:nvPr/>
+      </p:nvGrpSpPr>
+      <p:grpSpPr>
+        <a:xfrm>
+          <a:off x="0" y="0"/>
+          <a:ext cx="0" cy="0"/>
+          <a:chOff x="0" y="0"/>
+          <a:chExt cx="0" cy="0"/>
+        </a:xfrm>
+      </p:grpSpPr>
+      <p:sp>
+        <p:nvSpPr>
+          <p:cNvPr id="2" name="Slide Image Placeholder 1"/>
+          <p:cNvSpPr>
+            <a:spLocks noGrp="1"/>
+          </p:cNvSpPr>
+          <p:nvPr>
+            <p:ph type="sldImg" idx="2"/>
+          </p:nvPr>
+        </p:nvSpPr>
+        <p:spPr/>
+      </p:sp>
+      <p:sp>
+        <p:nvSpPr>
+          <p:cNvPr id="3" name="Notes Placeholder 2"/>
+          <p:cNvSpPr>
+            <a:spLocks noGrp="1"/>
+          </p:cNvSpPr>
+          <p:nvPr>
+            <p:ph type="body" idx="3" sz="quarter"/>
+          </p:nvPr>
+        </p:nvSpPr>
+        <p:spPr/>
+        <p:txBody>
+          <a:bodyPr/>
+          <a:lstStyle/>
+          <a:p>
+            <a:r>
+              <a:t>Phase 3: verification against the written plan — the plan makes the gap measurable, which is the whole reason planning.md exists.</a:t>
             </a:r>
           </a:p>
         </p:txBody>
@@ -4240,7 +4382,7 @@
                 </a:solidFill>
                 <a:latin typeface="Courier New"/>
               </a:rPr>
-              <a:t>WORKED EXAMPLE</a:t>
+              <a:t>VALUE CONFLICTS</a:t>
             </a:r>
           </a:p>
         </p:txBody>
@@ -4298,7 +4440,7 @@
         <p:spPr>
           <a:xfrm>
             <a:off x="640080" y="1188720"/>
-            <a:ext cx="10972800" cy="1097280"/>
+            <a:ext cx="10972800" cy="914400"/>
           </a:xfrm>
           <a:prstGeom prst="rect">
             <a:avLst/>
@@ -4317,27 +4459,115 @@
               </a:lnSpc>
             </a:pPr>
             <a:r>
-              <a:rPr sz="3400" b="1">
+              <a:rPr sz="3200" b="1">
                 <a:solidFill>
                   <a:srgbClr val="F5F7FA"/>
                 </a:solidFill>
                 <a:latin typeface="Arial"/>
               </a:rPr>
-              <a:t>The same conflict, three ways</a:t>
-            </a:r>
-          </a:p>
-        </p:txBody>
-      </p:sp>
-      <p:sp>
-        <p:nvSpPr>
-          <p:cNvPr id="5" name="TextBox 4"/>
+              <a:t>Three ways to resolve a clash</a:t>
+            </a:r>
+          </a:p>
+        </p:txBody>
+      </p:sp>
+      <p:sp>
+        <p:nvSpPr>
+          <p:cNvPr id="5" name="Rounded Rectangle 4"/>
+          <p:cNvSpPr/>
+          <p:nvPr/>
+        </p:nvSpPr>
+        <p:spPr>
+          <a:xfrm>
+            <a:off x="640080" y="2468880"/>
+            <a:ext cx="3393338" cy="3383280"/>
+          </a:xfrm>
+          <a:prstGeom prst="roundRect">
+            <a:avLst/>
+          </a:prstGeom>
+          <a:solidFill>
+            <a:srgbClr val="151B26"/>
+          </a:solidFill>
+          <a:ln>
+            <a:noFill/>
+          </a:ln>
+          <a:effectLst/>
+        </p:spPr>
+        <p:style>
+          <a:lnRef idx="1">
+            <a:schemeClr val="accent1"/>
+          </a:lnRef>
+          <a:fillRef idx="3">
+            <a:schemeClr val="accent1"/>
+          </a:fillRef>
+          <a:effectRef idx="2">
+            <a:schemeClr val="accent1"/>
+          </a:effectRef>
+          <a:fontRef idx="minor">
+            <a:schemeClr val="lt1"/>
+          </a:fontRef>
+        </p:style>
+        <p:txBody>
+          <a:bodyPr rtlCol="0" anchor="ctr"/>
+          <a:lstStyle/>
+          <a:p>
+            <a:pPr algn="ctr"/>
+          </a:p>
+        </p:txBody>
+      </p:sp>
+      <p:sp>
+        <p:nvSpPr>
+          <p:cNvPr id="6" name="Rectangle 5"/>
+          <p:cNvSpPr/>
+          <p:nvPr/>
+        </p:nvSpPr>
+        <p:spPr>
+          <a:xfrm>
+            <a:off x="640080" y="2468880"/>
+            <a:ext cx="3393338" cy="82296"/>
+          </a:xfrm>
+          <a:prstGeom prst="rect">
+            <a:avLst/>
+          </a:prstGeom>
+          <a:solidFill>
+            <a:srgbClr val="00FF41"/>
+          </a:solidFill>
+          <a:ln>
+            <a:noFill/>
+          </a:ln>
+          <a:effectLst/>
+        </p:spPr>
+        <p:style>
+          <a:lnRef idx="1">
+            <a:schemeClr val="accent1"/>
+          </a:lnRef>
+          <a:fillRef idx="3">
+            <a:schemeClr val="accent1"/>
+          </a:fillRef>
+          <a:effectRef idx="2">
+            <a:schemeClr val="accent1"/>
+          </a:effectRef>
+          <a:fontRef idx="minor">
+            <a:schemeClr val="lt1"/>
+          </a:fontRef>
+        </p:style>
+        <p:txBody>
+          <a:bodyPr rtlCol="0" anchor="ctr"/>
+          <a:lstStyle/>
+          <a:p>
+            <a:pPr algn="ctr"/>
+          </a:p>
+        </p:txBody>
+      </p:sp>
+      <p:sp>
+        <p:nvSpPr>
+          <p:cNvPr id="7" name="TextBox 6"/>
           <p:cNvSpPr txBox="1"/>
           <p:nvPr/>
         </p:nvSpPr>
         <p:spPr>
           <a:xfrm>
-            <a:off x="658368" y="2286000"/>
-            <a:ext cx="10881360" cy="3657600"/>
+            <a:off x="914400" y="2788920"/>
+            <a:ext cx="2844698" cy="457200"/>
           </a:xfrm>
           <a:prstGeom prst="rect">
             <a:avLst/>
@@ -4352,115 +4582,512 @@
           <a:p>
             <a:pPr algn="l">
               <a:lnSpc>
-                <a:spcPct val="112000"/>
+                <a:spcPct val="100000"/>
+              </a:lnSpc>
+            </a:pPr>
+            <a:r>
+              <a:rPr sz="1200" b="1">
+                <a:solidFill>
+                  <a:srgbClr val="00FF41"/>
+                </a:solidFill>
+                <a:latin typeface="Courier New"/>
+              </a:rPr>
+              <a:t>DISSOLVE</a:t>
+            </a:r>
+          </a:p>
+        </p:txBody>
+      </p:sp>
+      <p:sp>
+        <p:nvSpPr>
+          <p:cNvPr id="8" name="TextBox 7"/>
+          <p:cNvSpPr txBox="1"/>
+          <p:nvPr/>
+        </p:nvSpPr>
+        <p:spPr>
+          <a:xfrm>
+            <a:off x="914400" y="3246120"/>
+            <a:ext cx="2844698" cy="822960"/>
+          </a:xfrm>
+          <a:prstGeom prst="rect">
+            <a:avLst/>
+          </a:prstGeom>
+          <a:noFill/>
+        </p:spPr>
+        <p:txBody>
+          <a:bodyPr wrap="square" anchor="t">
+            <a:spAutoFit/>
+          </a:bodyPr>
+          <a:lstStyle/>
+          <a:p>
+            <a:pPr algn="l">
+              <a:lnSpc>
+                <a:spcPct val="100000"/>
               </a:lnSpc>
             </a:pPr>
             <a:r>
               <a:rPr sz="2000" b="1">
                 <a:solidFill>
+                  <a:srgbClr val="F5F7FA"/>
+                </a:solidFill>
+                <a:latin typeface="Arial"/>
+              </a:rPr>
+              <a:t>Both, fully</a:t>
+            </a:r>
+          </a:p>
+        </p:txBody>
+      </p:sp>
+      <p:sp>
+        <p:nvSpPr>
+          <p:cNvPr id="9" name="TextBox 8"/>
+          <p:cNvSpPr txBox="1"/>
+          <p:nvPr/>
+        </p:nvSpPr>
+        <p:spPr>
+          <a:xfrm>
+            <a:off x="914400" y="4114800"/>
+            <a:ext cx="2844698" cy="1554480"/>
+          </a:xfrm>
+          <a:prstGeom prst="rect">
+            <a:avLst/>
+          </a:prstGeom>
+          <a:noFill/>
+        </p:spPr>
+        <p:txBody>
+          <a:bodyPr wrap="square" anchor="t">
+            <a:spAutoFit/>
+          </a:bodyPr>
+          <a:lstStyle/>
+          <a:p>
+            <a:pPr algn="l">
+              <a:lnSpc>
+                <a:spcPct val="110000"/>
+              </a:lnSpc>
+            </a:pPr>
+            <a:r>
+              <a:rPr sz="1500" b="0">
+                <a:solidFill>
+                  <a:srgbClr val="8A94A6"/>
+                </a:solidFill>
+                <a:latin typeface="Arial"/>
+              </a:rPr>
+              <a:t>Redesign so the conflict disappears — no one loses.</a:t>
+            </a:r>
+          </a:p>
+        </p:txBody>
+      </p:sp>
+      <p:sp>
+        <p:nvSpPr>
+          <p:cNvPr id="10" name="Rounded Rectangle 9"/>
+          <p:cNvSpPr/>
+          <p:nvPr/>
+        </p:nvSpPr>
+        <p:spPr>
+          <a:xfrm>
+            <a:off x="4399178" y="2468880"/>
+            <a:ext cx="3393338" cy="3383280"/>
+          </a:xfrm>
+          <a:prstGeom prst="roundRect">
+            <a:avLst/>
+          </a:prstGeom>
+          <a:solidFill>
+            <a:srgbClr val="151B26"/>
+          </a:solidFill>
+          <a:ln>
+            <a:noFill/>
+          </a:ln>
+          <a:effectLst/>
+        </p:spPr>
+        <p:style>
+          <a:lnRef idx="1">
+            <a:schemeClr val="accent1"/>
+          </a:lnRef>
+          <a:fillRef idx="3">
+            <a:schemeClr val="accent1"/>
+          </a:fillRef>
+          <a:effectRef idx="2">
+            <a:schemeClr val="accent1"/>
+          </a:effectRef>
+          <a:fontRef idx="minor">
+            <a:schemeClr val="lt1"/>
+          </a:fontRef>
+        </p:style>
+        <p:txBody>
+          <a:bodyPr rtlCol="0" anchor="ctr"/>
+          <a:lstStyle/>
+          <a:p>
+            <a:pPr algn="ctr"/>
+          </a:p>
+        </p:txBody>
+      </p:sp>
+      <p:sp>
+        <p:nvSpPr>
+          <p:cNvPr id="11" name="Rectangle 10"/>
+          <p:cNvSpPr/>
+          <p:nvPr/>
+        </p:nvSpPr>
+        <p:spPr>
+          <a:xfrm>
+            <a:off x="4399178" y="2468880"/>
+            <a:ext cx="3393338" cy="82296"/>
+          </a:xfrm>
+          <a:prstGeom prst="rect">
+            <a:avLst/>
+          </a:prstGeom>
+          <a:solidFill>
+            <a:srgbClr val="00FF41"/>
+          </a:solidFill>
+          <a:ln>
+            <a:noFill/>
+          </a:ln>
+          <a:effectLst/>
+        </p:spPr>
+        <p:style>
+          <a:lnRef idx="1">
+            <a:schemeClr val="accent1"/>
+          </a:lnRef>
+          <a:fillRef idx="3">
+            <a:schemeClr val="accent1"/>
+          </a:fillRef>
+          <a:effectRef idx="2">
+            <a:schemeClr val="accent1"/>
+          </a:effectRef>
+          <a:fontRef idx="minor">
+            <a:schemeClr val="lt1"/>
+          </a:fontRef>
+        </p:style>
+        <p:txBody>
+          <a:bodyPr rtlCol="0" anchor="ctr"/>
+          <a:lstStyle/>
+          <a:p>
+            <a:pPr algn="ctr"/>
+          </a:p>
+        </p:txBody>
+      </p:sp>
+      <p:sp>
+        <p:nvSpPr>
+          <p:cNvPr id="12" name="TextBox 11"/>
+          <p:cNvSpPr txBox="1"/>
+          <p:nvPr/>
+        </p:nvSpPr>
+        <p:spPr>
+          <a:xfrm>
+            <a:off x="4673498" y="2788920"/>
+            <a:ext cx="2844698" cy="457200"/>
+          </a:xfrm>
+          <a:prstGeom prst="rect">
+            <a:avLst/>
+          </a:prstGeom>
+          <a:noFill/>
+        </p:spPr>
+        <p:txBody>
+          <a:bodyPr wrap="square" anchor="t">
+            <a:spAutoFit/>
+          </a:bodyPr>
+          <a:lstStyle/>
+          <a:p>
+            <a:pPr algn="l">
+              <a:lnSpc>
+                <a:spcPct val="100000"/>
+              </a:lnSpc>
+            </a:pPr>
+            <a:r>
+              <a:rPr sz="1200" b="1">
+                <a:solidFill>
                   <a:srgbClr val="00FF41"/>
                 </a:solidFill>
-                <a:latin typeface="Arial"/>
-              </a:rPr>
-              <a:t>Dissolve — YAI</a:t>
-            </a:r>
-            <a:r>
-              <a:rPr sz="1800" b="0">
+                <a:latin typeface="Courier New"/>
+              </a:rPr>
+              <a:t>COMPROMISE</a:t>
+            </a:r>
+          </a:p>
+        </p:txBody>
+      </p:sp>
+      <p:sp>
+        <p:nvSpPr>
+          <p:cNvPr id="13" name="TextBox 12"/>
+          <p:cNvSpPr txBox="1"/>
+          <p:nvPr/>
+        </p:nvSpPr>
+        <p:spPr>
+          <a:xfrm>
+            <a:off x="4673498" y="3246120"/>
+            <a:ext cx="2844698" cy="822960"/>
+          </a:xfrm>
+          <a:prstGeom prst="rect">
+            <a:avLst/>
+          </a:prstGeom>
+          <a:noFill/>
+        </p:spPr>
+        <p:txBody>
+          <a:bodyPr wrap="square" anchor="t">
+            <a:spAutoFit/>
+          </a:bodyPr>
+          <a:lstStyle/>
+          <a:p>
+            <a:pPr algn="l">
+              <a:lnSpc>
+                <a:spcPct val="100000"/>
+              </a:lnSpc>
+            </a:pPr>
+            <a:r>
+              <a:rPr sz="2000" b="1">
                 <a:solidFill>
                   <a:srgbClr val="F5F7FA"/>
                 </a:solidFill>
                 <a:latin typeface="Arial"/>
               </a:rPr>
-              <a:t>: run pose detection on optically blurred images + a rotating blocker that makes the camera’s state legible. Privacy AND function.</a:t>
-            </a:r>
-          </a:p>
-          <a:p>
-            <a:pPr algn="l">
-              <a:lnSpc>
-                <a:spcPct val="112000"/>
-              </a:lnSpc>
-            </a:pPr>
-            <a:r>
-              <a:rPr sz="2000" b="0">
+              <a:t>Both, partly</a:t>
+            </a:r>
+          </a:p>
+        </p:txBody>
+      </p:sp>
+      <p:sp>
+        <p:nvSpPr>
+          <p:cNvPr id="14" name="TextBox 13"/>
+          <p:cNvSpPr txBox="1"/>
+          <p:nvPr/>
+        </p:nvSpPr>
+        <p:spPr>
+          <a:xfrm>
+            <a:off x="4673498" y="4114800"/>
+            <a:ext cx="2844698" cy="1554480"/>
+          </a:xfrm>
+          <a:prstGeom prst="rect">
+            <a:avLst/>
+          </a:prstGeom>
+          <a:noFill/>
+        </p:spPr>
+        <p:txBody>
+          <a:bodyPr wrap="square" anchor="t">
+            <a:spAutoFit/>
+          </a:bodyPr>
+          <a:lstStyle/>
+          <a:p>
+            <a:pPr algn="l">
+              <a:lnSpc>
+                <a:spcPct val="110000"/>
+              </a:lnSpc>
+            </a:pPr>
+            <a:r>
+              <a:rPr sz="1500" b="0">
+                <a:solidFill>
+                  <a:srgbClr val="8A94A6"/>
+                </a:solidFill>
+                <a:latin typeface="Arial"/>
+              </a:rPr>
+              <a:t>Promote each value, but in less than full measure.</a:t>
+            </a:r>
+          </a:p>
+        </p:txBody>
+      </p:sp>
+      <p:sp>
+        <p:nvSpPr>
+          <p:cNvPr id="15" name="Rounded Rectangle 14"/>
+          <p:cNvSpPr/>
+          <p:nvPr/>
+        </p:nvSpPr>
+        <p:spPr>
+          <a:xfrm>
+            <a:off x="8158276" y="2468880"/>
+            <a:ext cx="3393338" cy="3383280"/>
+          </a:xfrm>
+          <a:prstGeom prst="roundRect">
+            <a:avLst/>
+          </a:prstGeom>
+          <a:solidFill>
+            <a:srgbClr val="151B26"/>
+          </a:solidFill>
+          <a:ln>
+            <a:noFill/>
+          </a:ln>
+          <a:effectLst/>
+        </p:spPr>
+        <p:style>
+          <a:lnRef idx="1">
+            <a:schemeClr val="accent1"/>
+          </a:lnRef>
+          <a:fillRef idx="3">
+            <a:schemeClr val="accent1"/>
+          </a:fillRef>
+          <a:effectRef idx="2">
+            <a:schemeClr val="accent1"/>
+          </a:effectRef>
+          <a:fontRef idx="minor">
+            <a:schemeClr val="lt1"/>
+          </a:fontRef>
+        </p:style>
+        <p:txBody>
+          <a:bodyPr rtlCol="0" anchor="ctr"/>
+          <a:lstStyle/>
+          <a:p>
+            <a:pPr algn="ctr"/>
+          </a:p>
+        </p:txBody>
+      </p:sp>
+      <p:sp>
+        <p:nvSpPr>
+          <p:cNvPr id="16" name="Rectangle 15"/>
+          <p:cNvSpPr/>
+          <p:nvPr/>
+        </p:nvSpPr>
+        <p:spPr>
+          <a:xfrm>
+            <a:off x="8158276" y="2468880"/>
+            <a:ext cx="3393338" cy="82296"/>
+          </a:xfrm>
+          <a:prstGeom prst="rect">
+            <a:avLst/>
+          </a:prstGeom>
+          <a:solidFill>
+            <a:srgbClr val="00FF41"/>
+          </a:solidFill>
+          <a:ln>
+            <a:noFill/>
+          </a:ln>
+          <a:effectLst/>
+        </p:spPr>
+        <p:style>
+          <a:lnRef idx="1">
+            <a:schemeClr val="accent1"/>
+          </a:lnRef>
+          <a:fillRef idx="3">
+            <a:schemeClr val="accent1"/>
+          </a:fillRef>
+          <a:effectRef idx="2">
+            <a:schemeClr val="accent1"/>
+          </a:effectRef>
+          <a:fontRef idx="minor">
+            <a:schemeClr val="lt1"/>
+          </a:fontRef>
+        </p:style>
+        <p:txBody>
+          <a:bodyPr rtlCol="0" anchor="ctr"/>
+          <a:lstStyle/>
+          <a:p>
+            <a:pPr algn="ctr"/>
+          </a:p>
+        </p:txBody>
+      </p:sp>
+      <p:sp>
+        <p:nvSpPr>
+          <p:cNvPr id="17" name="TextBox 16"/>
+          <p:cNvSpPr txBox="1"/>
+          <p:nvPr/>
+        </p:nvSpPr>
+        <p:spPr>
+          <a:xfrm>
+            <a:off x="8432596" y="2788920"/>
+            <a:ext cx="2844698" cy="457200"/>
+          </a:xfrm>
+          <a:prstGeom prst="rect">
+            <a:avLst/>
+          </a:prstGeom>
+          <a:noFill/>
+        </p:spPr>
+        <p:txBody>
+          <a:bodyPr wrap="square" anchor="t">
+            <a:spAutoFit/>
+          </a:bodyPr>
+          <a:lstStyle/>
+          <a:p>
+            <a:pPr algn="l">
+              <a:lnSpc>
+                <a:spcPct val="100000"/>
+              </a:lnSpc>
+            </a:pPr>
+            <a:r>
+              <a:rPr sz="1200" b="1">
+                <a:solidFill>
+                  <a:srgbClr val="00FF41"/>
+                </a:solidFill>
+                <a:latin typeface="Courier New"/>
+              </a:rPr>
+              <a:t>TRADE-OFF</a:t>
+            </a:r>
+          </a:p>
+        </p:txBody>
+      </p:sp>
+      <p:sp>
+        <p:nvSpPr>
+          <p:cNvPr id="18" name="TextBox 17"/>
+          <p:cNvSpPr txBox="1"/>
+          <p:nvPr/>
+        </p:nvSpPr>
+        <p:spPr>
+          <a:xfrm>
+            <a:off x="8432596" y="3246120"/>
+            <a:ext cx="2844698" cy="822960"/>
+          </a:xfrm>
+          <a:prstGeom prst="rect">
+            <a:avLst/>
+          </a:prstGeom>
+          <a:noFill/>
+        </p:spPr>
+        <p:txBody>
+          <a:bodyPr wrap="square" anchor="t">
+            <a:spAutoFit/>
+          </a:bodyPr>
+          <a:lstStyle/>
+          <a:p>
+            <a:pPr algn="l">
+              <a:lnSpc>
+                <a:spcPct val="100000"/>
+              </a:lnSpc>
+            </a:pPr>
+            <a:r>
+              <a:rPr sz="2000" b="1">
                 <a:solidFill>
                   <a:srgbClr val="F5F7FA"/>
                 </a:solidFill>
                 <a:latin typeface="Arial"/>
               </a:rPr>
-              <a:t/>
-            </a:r>
-          </a:p>
-          <a:p>
-            <a:pPr algn="l">
-              <a:lnSpc>
-                <a:spcPct val="112000"/>
-              </a:lnSpc>
-            </a:pPr>
-            <a:r>
-              <a:rPr sz="2000" b="1">
-                <a:solidFill>
-                  <a:srgbClr val="00FF41"/>
-                </a:solidFill>
-                <a:latin typeface="Arial"/>
-              </a:rPr>
-              <a:t>Compromise — CFS</a:t>
-            </a:r>
-            <a:r>
-              <a:rPr sz="1800" b="0">
-                <a:solidFill>
-                  <a:srgbClr val="F5F7FA"/>
-                </a:solidFill>
-                <a:latin typeface="Arial"/>
-              </a:rPr>
-              <a:t>: use sensors instead of cameras, and alert the resident first. “As safety expands, dignity expands too.”</a:t>
-            </a:r>
-          </a:p>
-          <a:p>
-            <a:pPr algn="l">
-              <a:lnSpc>
-                <a:spcPct val="112000"/>
-              </a:lnSpc>
-            </a:pPr>
-            <a:r>
-              <a:rPr sz="2000" b="0">
-                <a:solidFill>
-                  <a:srgbClr val="F5F7FA"/>
-                </a:solidFill>
-                <a:latin typeface="Arial"/>
-              </a:rPr>
-              <a:t/>
-            </a:r>
-          </a:p>
-          <a:p>
-            <a:pPr algn="l">
-              <a:lnSpc>
-                <a:spcPct val="112000"/>
-              </a:lnSpc>
-            </a:pPr>
-            <a:r>
-              <a:rPr sz="2000" b="1">
-                <a:solidFill>
-                  <a:srgbClr val="00FF41"/>
-                </a:solidFill>
-                <a:latin typeface="Arial"/>
-              </a:rPr>
-              <a:t>Trade-off — JustFix</a:t>
-            </a:r>
-            <a:r>
-              <a:rPr sz="1800" b="0">
-                <a:solidFill>
-                  <a:srgbClr val="F5F7FA"/>
-                </a:solidFill>
-                <a:latin typeface="Arial"/>
-              </a:rPr>
-              <a:t>: keep the AI but change the use case — from legal advice (hallucination = harm) to emotional support (lower-risk). Cost named.</a:t>
-            </a:r>
-          </a:p>
-        </p:txBody>
-      </p:sp>
-      <p:sp>
-        <p:nvSpPr>
-          <p:cNvPr id="6" name="TextBox 5"/>
+              <a:t>One over another</a:t>
+            </a:r>
+          </a:p>
+        </p:txBody>
+      </p:sp>
+      <p:sp>
+        <p:nvSpPr>
+          <p:cNvPr id="19" name="TextBox 18"/>
+          <p:cNvSpPr txBox="1"/>
+          <p:nvPr/>
+        </p:nvSpPr>
+        <p:spPr>
+          <a:xfrm>
+            <a:off x="8432596" y="4114800"/>
+            <a:ext cx="2844698" cy="1554480"/>
+          </a:xfrm>
+          <a:prstGeom prst="rect">
+            <a:avLst/>
+          </a:prstGeom>
+          <a:noFill/>
+        </p:spPr>
+        <p:txBody>
+          <a:bodyPr wrap="square" anchor="t">
+            <a:spAutoFit/>
+          </a:bodyPr>
+          <a:lstStyle/>
+          <a:p>
+            <a:pPr algn="l">
+              <a:lnSpc>
+                <a:spcPct val="110000"/>
+              </a:lnSpc>
+            </a:pPr>
+            <a:r>
+              <a:rPr sz="1500" b="0">
+                <a:solidFill>
+                  <a:srgbClr val="8A94A6"/>
+                </a:solidFill>
+                <a:latin typeface="Arial"/>
+              </a:rPr>
+              <a:t>Sacrifice one value for another — and name the cost.</a:t>
+            </a:r>
+          </a:p>
+        </p:txBody>
+      </p:sp>
+      <p:sp>
+        <p:nvSpPr>
+          <p:cNvPr id="20" name="TextBox 19"/>
           <p:cNvSpPr txBox="1"/>
           <p:nvPr/>
         </p:nvSpPr>
@@ -4557,7 +5184,7 @@
                 </a:solidFill>
                 <a:latin typeface="Courier New"/>
               </a:rPr>
-              <a:t>VERIFICATION</a:t>
+              <a:t>WORKED EXAMPLE</a:t>
             </a:r>
           </a:p>
         </p:txBody>
@@ -4640,7 +5267,7 @@
                 </a:solidFill>
                 <a:latin typeface="Arial"/>
               </a:rPr>
-              <a:t>Did the value actually land?</a:t>
+              <a:t>The same conflict, three ways</a:t>
             </a:r>
           </a:p>
         </p:txBody>
@@ -4673,13 +5300,22 @@
               </a:lnSpc>
             </a:pPr>
             <a:r>
-              <a:rPr sz="2200" b="0">
+              <a:rPr sz="2000" b="1">
+                <a:solidFill>
+                  <a:srgbClr val="00FF41"/>
+                </a:solidFill>
+                <a:latin typeface="Arial"/>
+              </a:rPr>
+              <a:t>Dissolve — YAI</a:t>
+            </a:r>
+            <a:r>
+              <a:rPr sz="1800" b="0">
                 <a:solidFill>
                   <a:srgbClr val="F5F7FA"/>
                 </a:solidFill>
                 <a:latin typeface="Arial"/>
               </a:rPr>
-              <a:t>Two checks, borrowed from software testing:</a:t>
+              <a:t>: run pose detection on optically blurred images + a rotating blocker that makes the camera’s state legible. Privacy AND function.</a:t>
             </a:r>
           </a:p>
           <a:p>
@@ -4705,14 +5341,46 @@
               </a:lnSpc>
             </a:pPr>
             <a:r>
+              <a:rPr sz="2000" b="1">
+                <a:solidFill>
+                  <a:srgbClr val="00FF41"/>
+                </a:solidFill>
+                <a:latin typeface="Arial"/>
+              </a:rPr>
+              <a:t>Compromise — CFS</a:t>
+            </a:r>
+            <a:r>
+              <a:rPr sz="1800" b="0">
+                <a:solidFill>
+                  <a:srgbClr val="F5F7FA"/>
+                </a:solidFill>
+                <a:latin typeface="Arial"/>
+              </a:rPr>
+              <a:t>: use sensors instead of cameras, and alert the resident first. “As safety expands, dignity expands too.”</a:t>
+            </a:r>
+          </a:p>
+          <a:p>
+            <a:pPr algn="l">
+              <a:lnSpc>
+                <a:spcPct val="112000"/>
+              </a:lnSpc>
+            </a:pPr>
+            <a:r>
               <a:rPr sz="2000" b="0">
                 <a:solidFill>
                   <a:srgbClr val="F5F7FA"/>
                 </a:solidFill>
                 <a:latin typeface="Arial"/>
               </a:rPr>
-              <a:t>Did we build the </a:t>
-            </a:r>
+              <a:t/>
+            </a:r>
+          </a:p>
+          <a:p>
+            <a:pPr algn="l">
+              <a:lnSpc>
+                <a:spcPct val="112000"/>
+              </a:lnSpc>
+            </a:pPr>
             <a:r>
               <a:rPr sz="2000" b="1">
                 <a:solidFill>
@@ -4720,50 +5388,16 @@
                 </a:solidFill>
                 <a:latin typeface="Arial"/>
               </a:rPr>
-              <a:t>right thing</a:t>
-            </a:r>
-            <a:r>
-              <a:rPr sz="2000" b="0">
+              <a:t>Trade-off — JustFix</a:t>
+            </a:r>
+            <a:r>
+              <a:rPr sz="1800" b="0">
                 <a:solidFill>
                   <a:srgbClr val="F5F7FA"/>
                 </a:solidFill>
                 <a:latin typeface="Arial"/>
               </a:rPr>
-              <a:t>? — are the discovered values really in the system?</a:t>
-            </a:r>
-          </a:p>
-          <a:p>
-            <a:pPr algn="l">
-              <a:lnSpc>
-                <a:spcPct val="112000"/>
-              </a:lnSpc>
-            </a:pPr>
-            <a:r>
-              <a:rPr sz="2000" b="0">
-                <a:solidFill>
-                  <a:srgbClr val="F5F7FA"/>
-                </a:solidFill>
-                <a:latin typeface="Arial"/>
-              </a:rPr>
-              <a:t>Did we build it </a:t>
-            </a:r>
-            <a:r>
-              <a:rPr sz="2000" b="1">
-                <a:solidFill>
-                  <a:srgbClr val="00FF41"/>
-                </a:solidFill>
-                <a:latin typeface="Arial"/>
-              </a:rPr>
-              <a:t>right</a:t>
-            </a:r>
-            <a:r>
-              <a:rPr sz="2000" b="0">
-                <a:solidFill>
-                  <a:srgbClr val="F5F7FA"/>
-                </a:solidFill>
-                <a:latin typeface="Arial"/>
-              </a:rPr>
-              <a:t>? — do real people, in real contexts, experience the value?</a:t>
+              <a:t>: keep the AI but change the use case — from legal advice (hallucination = harm) to emotional support (lower-risk). Cost named.</a:t>
             </a:r>
           </a:p>
         </p:txBody>
@@ -4867,7 +5501,7 @@
                 </a:solidFill>
                 <a:latin typeface="Courier New"/>
               </a:rPr>
-              <a:t>THE ACTIVITY</a:t>
+              <a:t>VERIFICATION</a:t>
             </a:r>
           </a:p>
         </p:txBody>
@@ -4925,7 +5559,7 @@
         <p:spPr>
           <a:xfrm>
             <a:off x="640080" y="1188720"/>
-            <a:ext cx="10972800" cy="914400"/>
+            <a:ext cx="10972800" cy="1097280"/>
           </a:xfrm>
           <a:prstGeom prst="rect">
             <a:avLst/>
@@ -4944,13 +5578,13 @@
               </a:lnSpc>
             </a:pPr>
             <a:r>
-              <a:rPr sz="3200" b="1">
+              <a:rPr sz="3400" b="1">
                 <a:solidFill>
                   <a:srgbClr val="F5F7FA"/>
                 </a:solidFill>
                 <a:latin typeface="Arial"/>
               </a:rPr>
-              <a:t>The 3-question values check</a:t>
+              <a:t>Did the value actually land?</a:t>
             </a:r>
           </a:p>
         </p:txBody>
@@ -4963,8 +5597,8 @@
         </p:nvSpPr>
         <p:spPr>
           <a:xfrm>
-            <a:off x="658368" y="2468880"/>
-            <a:ext cx="5394960" cy="3657600"/>
+            <a:off x="658368" y="2286000"/>
+            <a:ext cx="10881360" cy="3657600"/>
           </a:xfrm>
           <a:prstGeom prst="rect">
             <a:avLst/>
@@ -4979,69 +5613,101 @@
           <a:p>
             <a:pPr algn="l">
               <a:lnSpc>
-                <a:spcPct val="135000"/>
-              </a:lnSpc>
-            </a:pPr>
-            <a:r>
-              <a:rPr sz="1500" b="1">
+                <a:spcPct val="112000"/>
+              </a:lnSpc>
+            </a:pPr>
+            <a:r>
+              <a:rPr sz="2200" b="0">
+                <a:solidFill>
+                  <a:srgbClr val="F5F7FA"/>
+                </a:solidFill>
+                <a:latin typeface="Arial"/>
+              </a:rPr>
+              <a:t>Two checks, borrowed from software testing:</a:t>
+            </a:r>
+          </a:p>
+          <a:p>
+            <a:pPr algn="l">
+              <a:lnSpc>
+                <a:spcPct val="112000"/>
+              </a:lnSpc>
+            </a:pPr>
+            <a:r>
+              <a:rPr sz="2000" b="0">
+                <a:solidFill>
+                  <a:srgbClr val="F5F7FA"/>
+                </a:solidFill>
+                <a:latin typeface="Arial"/>
+              </a:rPr>
+              <a:t/>
+            </a:r>
+          </a:p>
+          <a:p>
+            <a:pPr algn="l">
+              <a:lnSpc>
+                <a:spcPct val="112000"/>
+              </a:lnSpc>
+            </a:pPr>
+            <a:r>
+              <a:rPr sz="2000" b="0">
+                <a:solidFill>
+                  <a:srgbClr val="F5F7FA"/>
+                </a:solidFill>
+                <a:latin typeface="Arial"/>
+              </a:rPr>
+              <a:t>Did we build the </a:t>
+            </a:r>
+            <a:r>
+              <a:rPr sz="2000" b="1">
                 <a:solidFill>
                   <a:srgbClr val="00FF41"/>
                 </a:solidFill>
-                <a:latin typeface="Courier New"/>
-              </a:rPr>
-              <a:t>01  </a:t>
-            </a:r>
-            <a:r>
-              <a:rPr sz="1600" b="1">
+                <a:latin typeface="Arial"/>
+              </a:rPr>
+              <a:t>right thing</a:t>
+            </a:r>
+            <a:r>
+              <a:rPr sz="2000" b="0">
                 <a:solidFill>
                   <a:srgbClr val="F5F7FA"/>
                 </a:solidFill>
                 <a:latin typeface="Arial"/>
               </a:rPr>
-              <a:t>What value does it claim?  </a:t>
-            </a:r>
-            <a:r>
-              <a:rPr sz="1400" b="0">
-                <a:solidFill>
-                  <a:srgbClr val="8A94A6"/>
-                </a:solidFill>
-                <a:latin typeface="Arial"/>
-              </a:rPr>
-              <a:t>the value the team says the project serves</a:t>
-            </a:r>
-          </a:p>
-          <a:p>
-            <a:pPr algn="l">
-              <a:lnSpc>
-                <a:spcPct val="135000"/>
-              </a:lnSpc>
-            </a:pPr>
-            <a:r>
-              <a:rPr sz="1500" b="1">
+              <a:t>? — are the discovered values really in the system?</a:t>
+            </a:r>
+          </a:p>
+          <a:p>
+            <a:pPr algn="l">
+              <a:lnSpc>
+                <a:spcPct val="112000"/>
+              </a:lnSpc>
+            </a:pPr>
+            <a:r>
+              <a:rPr sz="2000" b="0">
+                <a:solidFill>
+                  <a:srgbClr val="F5F7FA"/>
+                </a:solidFill>
+                <a:latin typeface="Arial"/>
+              </a:rPr>
+              <a:t>Did we build it </a:t>
+            </a:r>
+            <a:r>
+              <a:rPr sz="2000" b="1">
                 <a:solidFill>
                   <a:srgbClr val="00FF41"/>
                 </a:solidFill>
-                <a:latin typeface="Courier New"/>
-              </a:rPr>
-              <a:t>02  </a:t>
-            </a:r>
-            <a:r>
-              <a:rPr sz="1600" b="1">
+                <a:latin typeface="Arial"/>
+              </a:rPr>
+              <a:t>right</a:t>
+            </a:r>
+            <a:r>
+              <a:rPr sz="2000" b="0">
                 <a:solidFill>
                   <a:srgbClr val="F5F7FA"/>
                 </a:solidFill>
                 <a:latin typeface="Arial"/>
               </a:rPr>
-              <a:t>Who’s it for — who’s left out?  </a:t>
-            </a:r>
-            <a:r>
-              <a:rPr sz="1400" b="0">
-                <a:solidFill>
-                  <a:srgbClr val="8A94A6"/>
-                </a:solidFill>
-                <a:latin typeface="Arial"/>
-              </a:rPr>
-              <a:t>who it serves, and who it could exclude or harm</a:t>
+              <a:t>? — do real people, in real contexts, experience the value?</a:t>
             </a:r>
           </a:p>
         </p:txBody>
@@ -5049,63 +5715,6 @@
       <p:sp>
         <p:nvSpPr>
           <p:cNvPr id="6" name="TextBox 5"/>
-          <p:cNvSpPr txBox="1"/>
-          <p:nvPr/>
-        </p:nvSpPr>
-        <p:spPr>
-          <a:xfrm>
-            <a:off x="6309360" y="2468880"/>
-            <a:ext cx="5394960" cy="3657600"/>
-          </a:xfrm>
-          <a:prstGeom prst="rect">
-            <a:avLst/>
-          </a:prstGeom>
-          <a:noFill/>
-        </p:spPr>
-        <p:txBody>
-          <a:bodyPr wrap="square" anchor="t">
-            <a:spAutoFit/>
-          </a:bodyPr>
-          <a:lstStyle/>
-          <a:p>
-            <a:pPr algn="l">
-              <a:lnSpc>
-                <a:spcPct val="135000"/>
-              </a:lnSpc>
-            </a:pPr>
-            <a:r>
-              <a:rPr sz="1500" b="1">
-                <a:solidFill>
-                  <a:srgbClr val="00FF41"/>
-                </a:solidFill>
-                <a:latin typeface="Courier New"/>
-              </a:rPr>
-              <a:t>03  </a:t>
-            </a:r>
-            <a:r>
-              <a:rPr sz="1600" b="1">
-                <a:solidFill>
-                  <a:srgbClr val="F5F7FA"/>
-                </a:solidFill>
-                <a:latin typeface="Arial"/>
-              </a:rPr>
-              <a:t>How would you know?  </a:t>
-            </a:r>
-            <a:r>
-              <a:rPr sz="1400" b="0">
-                <a:solidFill>
-                  <a:srgbClr val="8A94A6"/>
-                </a:solidFill>
-                <a:latin typeface="Arial"/>
-              </a:rPr>
-              <a:t>the observable tell that the value is being delivered</a:t>
-            </a:r>
-          </a:p>
-        </p:txBody>
-      </p:sp>
-      <p:sp>
-        <p:nvSpPr>
-          <p:cNvPr id="7" name="TextBox 6"/>
           <p:cNvSpPr txBox="1"/>
           <p:nvPr/>
         </p:nvSpPr>
@@ -5202,7 +5811,7 @@
                 </a:solidFill>
                 <a:latin typeface="Courier New"/>
               </a:rPr>
-              <a:t>ACTIVITY · ROUND 2</a:t>
+              <a:t>ACTIVITY · PLAN</a:t>
             </a:r>
           </a:p>
         </p:txBody>
@@ -5260,7 +5869,7 @@
         <p:spPr>
           <a:xfrm>
             <a:off x="640080" y="1188720"/>
-            <a:ext cx="10972800" cy="1097280"/>
+            <a:ext cx="10972800" cy="914400"/>
           </a:xfrm>
           <a:prstGeom prst="rect">
             <a:avLst/>
@@ -5279,13 +5888,13 @@
               </a:lnSpc>
             </a:pPr>
             <a:r>
-              <a:rPr sz="3400" b="1">
+              <a:rPr sz="3200" b="1">
                 <a:solidFill>
                   <a:srgbClr val="F5F7FA"/>
                 </a:solidFill>
                 <a:latin typeface="Arial"/>
               </a:rPr>
-              <a:t>Peer-test for values</a:t>
+              <a:t>planning.md — the 3-question values check + your prompts</a:t>
             </a:r>
           </a:p>
         </p:txBody>
@@ -5298,8 +5907,8 @@
         </p:nvSpPr>
         <p:spPr>
           <a:xfrm>
-            <a:off x="658368" y="2286000"/>
-            <a:ext cx="10881360" cy="3657600"/>
+            <a:off x="658368" y="2468880"/>
+            <a:ext cx="5394960" cy="3657600"/>
           </a:xfrm>
           <a:prstGeom prst="rect">
             <a:avLst/>
@@ -5314,108 +5923,133 @@
           <a:p>
             <a:pPr algn="l">
               <a:lnSpc>
-                <a:spcPct val="112000"/>
-              </a:lnSpc>
-            </a:pPr>
-            <a:r>
-              <a:rPr sz="2000" b="1">
+                <a:spcPct val="135000"/>
+              </a:lnSpc>
+            </a:pPr>
+            <a:r>
+              <a:rPr sz="1500" b="1">
                 <a:solidFill>
                   <a:srgbClr val="00FF41"/>
                 </a:solidFill>
-                <a:latin typeface="Arial"/>
-              </a:rPr>
-              <a:t>•  </a:t>
-            </a:r>
-            <a:r>
-              <a:rPr sz="2000" b="0">
+                <a:latin typeface="Courier New"/>
+              </a:rPr>
+              <a:t>01  </a:t>
+            </a:r>
+            <a:r>
+              <a:rPr sz="1600" b="1">
                 <a:solidFill>
                   <a:srgbClr val="F5F7FA"/>
                 </a:solidFill>
                 <a:latin typeface="Arial"/>
               </a:rPr>
-              <a:t>Swap projects again — run the 3-question check on a classmate’s project.</a:t>
-            </a:r>
-          </a:p>
-          <a:p>
-            <a:pPr algn="l">
-              <a:lnSpc>
-                <a:spcPct val="112000"/>
-              </a:lnSpc>
-            </a:pPr>
-            <a:r>
-              <a:rPr sz="2000" b="1">
+              <a:t>What value does it claim?  </a:t>
+            </a:r>
+            <a:r>
+              <a:rPr sz="1400" b="0">
+                <a:solidFill>
+                  <a:srgbClr val="8A94A6"/>
+                </a:solidFill>
+                <a:latin typeface="Arial"/>
+              </a:rPr>
+              <a:t>the value the team says the project serves</a:t>
+            </a:r>
+          </a:p>
+          <a:p>
+            <a:pPr algn="l">
+              <a:lnSpc>
+                <a:spcPct val="135000"/>
+              </a:lnSpc>
+            </a:pPr>
+            <a:r>
+              <a:rPr sz="1500" b="1">
                 <a:solidFill>
                   <a:srgbClr val="00FF41"/>
                 </a:solidFill>
-                <a:latin typeface="Arial"/>
-              </a:rPr>
-              <a:t>•  </a:t>
-            </a:r>
-            <a:r>
-              <a:rPr sz="2000" b="0">
+                <a:latin typeface="Courier New"/>
+              </a:rPr>
+              <a:t>02  </a:t>
+            </a:r>
+            <a:r>
+              <a:rPr sz="1600" b="1">
                 <a:solidFill>
                   <a:srgbClr val="F5F7FA"/>
                 </a:solidFill>
                 <a:latin typeface="Arial"/>
               </a:rPr>
-              <a:t>Name the values tension you find; suggest a dissolve / compromise / trade-off.</a:t>
-            </a:r>
-          </a:p>
-          <a:p>
-            <a:pPr algn="l">
-              <a:lnSpc>
-                <a:spcPct val="112000"/>
-              </a:lnSpc>
-            </a:pPr>
-            <a:r>
-              <a:rPr sz="2000" b="1">
+              <a:t>Who’s it for — who’s left out?  </a:t>
+            </a:r>
+            <a:r>
+              <a:rPr sz="1400" b="0">
+                <a:solidFill>
+                  <a:srgbClr val="8A94A6"/>
+                </a:solidFill>
+                <a:latin typeface="Arial"/>
+              </a:rPr>
+              <a:t>who it serves, and who it could exclude or harm</a:t>
+            </a:r>
+          </a:p>
+        </p:txBody>
+      </p:sp>
+      <p:sp>
+        <p:nvSpPr>
+          <p:cNvPr id="6" name="TextBox 5"/>
+          <p:cNvSpPr txBox="1"/>
+          <p:nvPr/>
+        </p:nvSpPr>
+        <p:spPr>
+          <a:xfrm>
+            <a:off x="6309360" y="2468880"/>
+            <a:ext cx="5394960" cy="3657600"/>
+          </a:xfrm>
+          <a:prstGeom prst="rect">
+            <a:avLst/>
+          </a:prstGeom>
+          <a:noFill/>
+        </p:spPr>
+        <p:txBody>
+          <a:bodyPr wrap="square" anchor="t">
+            <a:spAutoFit/>
+          </a:bodyPr>
+          <a:lstStyle/>
+          <a:p>
+            <a:pPr algn="l">
+              <a:lnSpc>
+                <a:spcPct val="135000"/>
+              </a:lnSpc>
+            </a:pPr>
+            <a:r>
+              <a:rPr sz="1500" b="1">
                 <a:solidFill>
                   <a:srgbClr val="00FF41"/>
                 </a:solidFill>
-                <a:latin typeface="Arial"/>
-              </a:rPr>
-              <a:t>•  </a:t>
-            </a:r>
-            <a:r>
-              <a:rPr sz="2000" b="0">
+                <a:latin typeface="Courier New"/>
+              </a:rPr>
+              <a:t>03  </a:t>
+            </a:r>
+            <a:r>
+              <a:rPr sz="1600" b="1">
                 <a:solidFill>
                   <a:srgbClr val="F5F7FA"/>
                 </a:solidFill>
                 <a:latin typeface="Arial"/>
               </a:rPr>
-              <a:t>Teams: take the tension back into your build and iterate toward the final.</a:t>
-            </a:r>
-          </a:p>
-          <a:p>
-            <a:pPr algn="l">
-              <a:lnSpc>
-                <a:spcPct val="112000"/>
-              </a:lnSpc>
-            </a:pPr>
-            <a:r>
-              <a:rPr sz="2000" b="1">
-                <a:solidFill>
-                  <a:srgbClr val="00FF41"/>
-                </a:solidFill>
-                <a:latin typeface="Arial"/>
-              </a:rPr>
-              <a:t>•  </a:t>
-            </a:r>
-            <a:r>
-              <a:rPr sz="2000" b="0">
-                <a:solidFill>
-                  <a:srgbClr val="F5F7FA"/>
-                </a:solidFill>
-                <a:latin typeface="Arial"/>
-              </a:rPr>
-              <a:t>Reading: Values at Play, Ch. 5 (Discovery).</a:t>
-            </a:r>
-          </a:p>
-        </p:txBody>
-      </p:sp>
-      <p:sp>
-        <p:nvSpPr>
-          <p:cNvPr id="6" name="TextBox 5"/>
+              <a:t>How would you know?  </a:t>
+            </a:r>
+            <a:r>
+              <a:rPr sz="1400" b="0">
+                <a:solidFill>
+                  <a:srgbClr val="8A94A6"/>
+                </a:solidFill>
+                <a:latin typeface="Arial"/>
+              </a:rPr>
+              <a:t>the observable tell that the value is being delivered</a:t>
+            </a:r>
+          </a:p>
+        </p:txBody>
+      </p:sp>
+      <p:sp>
+        <p:nvSpPr>
+          <p:cNvPr id="7" name="TextBox 6"/>
           <p:cNvSpPr txBox="1"/>
           <p:nvPr/>
         </p:nvSpPr>
@@ -5512,6 +6146,626 @@
                 </a:solidFill>
                 <a:latin typeface="Courier New"/>
               </a:rPr>
+              <a:t>ACTIVITY · RUN</a:t>
+            </a:r>
+          </a:p>
+        </p:txBody>
+      </p:sp>
+      <p:sp>
+        <p:nvSpPr>
+          <p:cNvPr id="3" name="Rectangle 2"/>
+          <p:cNvSpPr/>
+          <p:nvPr/>
+        </p:nvSpPr>
+        <p:spPr>
+          <a:xfrm>
+            <a:off x="640080" y="932688"/>
+            <a:ext cx="822960" cy="73152"/>
+          </a:xfrm>
+          <a:prstGeom prst="rect">
+            <a:avLst/>
+          </a:prstGeom>
+          <a:solidFill>
+            <a:srgbClr val="00FF41"/>
+          </a:solidFill>
+          <a:ln>
+            <a:noFill/>
+          </a:ln>
+          <a:effectLst/>
+        </p:spPr>
+        <p:style>
+          <a:lnRef idx="1">
+            <a:schemeClr val="accent1"/>
+          </a:lnRef>
+          <a:fillRef idx="3">
+            <a:schemeClr val="accent1"/>
+          </a:fillRef>
+          <a:effectRef idx="2">
+            <a:schemeClr val="accent1"/>
+          </a:effectRef>
+          <a:fontRef idx="minor">
+            <a:schemeClr val="lt1"/>
+          </a:fontRef>
+        </p:style>
+        <p:txBody>
+          <a:bodyPr rtlCol="0" anchor="ctr"/>
+          <a:lstStyle/>
+          <a:p>
+            <a:pPr algn="ctr"/>
+          </a:p>
+        </p:txBody>
+      </p:sp>
+      <p:sp>
+        <p:nvSpPr>
+          <p:cNvPr id="4" name="TextBox 3"/>
+          <p:cNvSpPr txBox="1"/>
+          <p:nvPr/>
+        </p:nvSpPr>
+        <p:spPr>
+          <a:xfrm>
+            <a:off x="640080" y="1188720"/>
+            <a:ext cx="10972800" cy="1097280"/>
+          </a:xfrm>
+          <a:prstGeom prst="rect">
+            <a:avLst/>
+          </a:prstGeom>
+          <a:noFill/>
+        </p:spPr>
+        <p:txBody>
+          <a:bodyPr wrap="square" anchor="t">
+            <a:spAutoFit/>
+          </a:bodyPr>
+          <a:lstStyle/>
+          <a:p>
+            <a:pPr algn="l">
+              <a:lnSpc>
+                <a:spcPct val="100000"/>
+              </a:lnSpc>
+            </a:pPr>
+            <a:r>
+              <a:rPr sz="3400" b="1">
+                <a:solidFill>
+                  <a:srgbClr val="F5F7FA"/>
+                </a:solidFill>
+                <a:latin typeface="Arial"/>
+              </a:rPr>
+              <a:t>Execute the plan, then test the value</a:t>
+            </a:r>
+          </a:p>
+        </p:txBody>
+      </p:sp>
+      <p:sp>
+        <p:nvSpPr>
+          <p:cNvPr id="5" name="TextBox 4"/>
+          <p:cNvSpPr txBox="1"/>
+          <p:nvPr/>
+        </p:nvSpPr>
+        <p:spPr>
+          <a:xfrm>
+            <a:off x="658368" y="2286000"/>
+            <a:ext cx="10881360" cy="3657600"/>
+          </a:xfrm>
+          <a:prstGeom prst="rect">
+            <a:avLst/>
+          </a:prstGeom>
+          <a:noFill/>
+        </p:spPr>
+        <p:txBody>
+          <a:bodyPr wrap="square" anchor="t">
+            <a:spAutoFit/>
+          </a:bodyPr>
+          <a:lstStyle/>
+          <a:p>
+            <a:pPr algn="l">
+              <a:lnSpc>
+                <a:spcPct val="112000"/>
+              </a:lnSpc>
+            </a:pPr>
+            <a:r>
+              <a:rPr sz="2000" b="1">
+                <a:solidFill>
+                  <a:srgbClr val="00FF41"/>
+                </a:solidFill>
+                <a:latin typeface="Arial"/>
+              </a:rPr>
+              <a:t>•  </a:t>
+            </a:r>
+            <a:r>
+              <a:rPr sz="2000" b="0">
+                <a:solidFill>
+                  <a:srgbClr val="F5F7FA"/>
+                </a:solidFill>
+                <a:latin typeface="Arial"/>
+              </a:rPr>
+              <a:t>Run your planned prompts unchanged — the auto-log will show whether you drifted.</a:t>
+            </a:r>
+          </a:p>
+          <a:p>
+            <a:pPr algn="l">
+              <a:lnSpc>
+                <a:spcPct val="112000"/>
+              </a:lnSpc>
+            </a:pPr>
+            <a:r>
+              <a:rPr sz="2000" b="1">
+                <a:solidFill>
+                  <a:srgbClr val="00FF41"/>
+                </a:solidFill>
+                <a:latin typeface="Arial"/>
+              </a:rPr>
+              <a:t>•  </a:t>
+            </a:r>
+            <a:r>
+              <a:rPr sz="2000" b="0">
+                <a:solidFill>
+                  <a:srgbClr val="F5F7FA"/>
+                </a:solidFill>
+                <a:latin typeface="Arial"/>
+              </a:rPr>
+              <a:t>Swap projects with another team — they run YOUR 3-question check as real users.</a:t>
+            </a:r>
+          </a:p>
+          <a:p>
+            <a:pPr algn="l">
+              <a:lnSpc>
+                <a:spcPct val="112000"/>
+              </a:lnSpc>
+            </a:pPr>
+            <a:r>
+              <a:rPr sz="2000" b="1">
+                <a:solidFill>
+                  <a:srgbClr val="00FF41"/>
+                </a:solidFill>
+                <a:latin typeface="Arial"/>
+              </a:rPr>
+              <a:t>•  </a:t>
+            </a:r>
+            <a:r>
+              <a:rPr sz="2000" b="0">
+                <a:solidFill>
+                  <a:srgbClr val="F5F7FA"/>
+                </a:solidFill>
+                <a:latin typeface="Arial"/>
+              </a:rPr>
+              <a:t>Testers: does the tool move you toward the value? Did it feel on your side? Who's excluded?</a:t>
+            </a:r>
+          </a:p>
+          <a:p>
+            <a:pPr algn="l">
+              <a:lnSpc>
+                <a:spcPct val="112000"/>
+              </a:lnSpc>
+            </a:pPr>
+            <a:r>
+              <a:rPr sz="2000" b="1">
+                <a:solidFill>
+                  <a:srgbClr val="00FF41"/>
+                </a:solidFill>
+                <a:latin typeface="Arial"/>
+              </a:rPr>
+              <a:t>•  </a:t>
+            </a:r>
+            <a:r>
+              <a:rPr sz="2000" b="0">
+                <a:solidFill>
+                  <a:srgbClr val="F5F7FA"/>
+                </a:solidFill>
+                <a:latin typeface="Arial"/>
+              </a:rPr>
+              <a:t>Name the values tension you find; suggest a dissolve / compromise / trade-off.</a:t>
+            </a:r>
+          </a:p>
+        </p:txBody>
+      </p:sp>
+      <p:sp>
+        <p:nvSpPr>
+          <p:cNvPr id="6" name="TextBox 5"/>
+          <p:cNvSpPr txBox="1"/>
+          <p:nvPr/>
+        </p:nvSpPr>
+        <p:spPr>
+          <a:xfrm>
+            <a:off x="640080" y="6355080"/>
+            <a:ext cx="10972800" cy="365760"/>
+          </a:xfrm>
+          <a:prstGeom prst="rect">
+            <a:avLst/>
+          </a:prstGeom>
+          <a:noFill/>
+        </p:spPr>
+        <p:txBody>
+          <a:bodyPr wrap="square" anchor="t">
+            <a:spAutoFit/>
+          </a:bodyPr>
+          <a:lstStyle/>
+          <a:p>
+            <a:pPr algn="l">
+              <a:lnSpc>
+                <a:spcPct val="100000"/>
+              </a:lnSpc>
+            </a:pPr>
+            <a:r>
+              <a:rPr sz="1000" b="0">
+                <a:solidFill>
+                  <a:srgbClr val="5A6474"/>
+                </a:solidFill>
+                <a:latin typeface="Courier New"/>
+              </a:rPr>
+              <a:t>Good Code, Good Vibes · TECHIE 1121 · Cornell Tech · Summer 2026</a:t>
+            </a:r>
+          </a:p>
+        </p:txBody>
+      </p:sp>
+    </p:spTree>
+  </p:cSld>
+  <p:clrMapOvr>
+    <a:masterClrMapping/>
+  </p:clrMapOvr>
+</p:sld>
+</file>
+
+<file path=ppt/slides/slide15.xml><?xml version="1.0" encoding="utf-8"?>
+<p:sld xmlns:a="http://schemas.openxmlformats.org/drawingml/2006/main" xmlns:p="http://schemas.openxmlformats.org/presentationml/2006/main" xmlns:r="http://schemas.openxmlformats.org/officeDocument/2006/relationships">
+  <p:cSld>
+    <p:bg>
+      <p:bgPr>
+        <a:solidFill>
+          <a:srgbClr val="0B0E14"/>
+        </a:solidFill>
+        <a:effectLst/>
+      </p:bgPr>
+    </p:bg>
+    <p:spTree>
+      <p:nvGrpSpPr>
+        <p:cNvPr id="1" name=""/>
+        <p:cNvGrpSpPr/>
+        <p:nvPr/>
+      </p:nvGrpSpPr>
+      <p:grpSpPr/>
+      <p:sp>
+        <p:nvSpPr>
+          <p:cNvPr id="2" name="TextBox 1"/>
+          <p:cNvSpPr txBox="1"/>
+          <p:nvPr/>
+        </p:nvSpPr>
+        <p:spPr>
+          <a:xfrm>
+            <a:off x="640080" y="502920"/>
+            <a:ext cx="10058400" cy="365760"/>
+          </a:xfrm>
+          <a:prstGeom prst="rect">
+            <a:avLst/>
+          </a:prstGeom>
+          <a:noFill/>
+        </p:spPr>
+        <p:txBody>
+          <a:bodyPr wrap="square" anchor="t">
+            <a:spAutoFit/>
+          </a:bodyPr>
+          <a:lstStyle/>
+          <a:p>
+            <a:pPr algn="l">
+              <a:lnSpc>
+                <a:spcPct val="100000"/>
+              </a:lnSpc>
+            </a:pPr>
+            <a:r>
+              <a:rPr sz="1300" b="1">
+                <a:solidFill>
+                  <a:srgbClr val="00FF41"/>
+                </a:solidFill>
+                <a:latin typeface="Courier New"/>
+              </a:rPr>
+              <a:t>ACTIVITY · VERIFY</a:t>
+            </a:r>
+          </a:p>
+        </p:txBody>
+      </p:sp>
+      <p:sp>
+        <p:nvSpPr>
+          <p:cNvPr id="3" name="Rectangle 2"/>
+          <p:cNvSpPr/>
+          <p:nvPr/>
+        </p:nvSpPr>
+        <p:spPr>
+          <a:xfrm>
+            <a:off x="640080" y="932688"/>
+            <a:ext cx="822960" cy="73152"/>
+          </a:xfrm>
+          <a:prstGeom prst="rect">
+            <a:avLst/>
+          </a:prstGeom>
+          <a:solidFill>
+            <a:srgbClr val="00FF41"/>
+          </a:solidFill>
+          <a:ln>
+            <a:noFill/>
+          </a:ln>
+          <a:effectLst/>
+        </p:spPr>
+        <p:style>
+          <a:lnRef idx="1">
+            <a:schemeClr val="accent1"/>
+          </a:lnRef>
+          <a:fillRef idx="3">
+            <a:schemeClr val="accent1"/>
+          </a:fillRef>
+          <a:effectRef idx="2">
+            <a:schemeClr val="accent1"/>
+          </a:effectRef>
+          <a:fontRef idx="minor">
+            <a:schemeClr val="lt1"/>
+          </a:fontRef>
+        </p:style>
+        <p:txBody>
+          <a:bodyPr rtlCol="0" anchor="ctr"/>
+          <a:lstStyle/>
+          <a:p>
+            <a:pPr algn="ctr"/>
+          </a:p>
+        </p:txBody>
+      </p:sp>
+      <p:sp>
+        <p:nvSpPr>
+          <p:cNvPr id="4" name="TextBox 3"/>
+          <p:cNvSpPr txBox="1"/>
+          <p:nvPr/>
+        </p:nvSpPr>
+        <p:spPr>
+          <a:xfrm>
+            <a:off x="640080" y="1188720"/>
+            <a:ext cx="10972800" cy="1097280"/>
+          </a:xfrm>
+          <a:prstGeom prst="rect">
+            <a:avLst/>
+          </a:prstGeom>
+          <a:noFill/>
+        </p:spPr>
+        <p:txBody>
+          <a:bodyPr wrap="square" anchor="t">
+            <a:spAutoFit/>
+          </a:bodyPr>
+          <a:lstStyle/>
+          <a:p>
+            <a:pPr algn="l">
+              <a:lnSpc>
+                <a:spcPct val="100000"/>
+              </a:lnSpc>
+            </a:pPr>
+            <a:r>
+              <a:rPr sz="3400" b="1">
+                <a:solidFill>
+                  <a:srgbClr val="F5F7FA"/>
+                </a:solidFill>
+                <a:latin typeface="Arial"/>
+              </a:rPr>
+              <a:t>Close the claim-vs-reality gap</a:t>
+            </a:r>
+          </a:p>
+        </p:txBody>
+      </p:sp>
+      <p:sp>
+        <p:nvSpPr>
+          <p:cNvPr id="5" name="TextBox 4"/>
+          <p:cNvSpPr txBox="1"/>
+          <p:nvPr/>
+        </p:nvSpPr>
+        <p:spPr>
+          <a:xfrm>
+            <a:off x="658368" y="2286000"/>
+            <a:ext cx="10881360" cy="3657600"/>
+          </a:xfrm>
+          <a:prstGeom prst="rect">
+            <a:avLst/>
+          </a:prstGeom>
+          <a:noFill/>
+        </p:spPr>
+        <p:txBody>
+          <a:bodyPr wrap="square" anchor="t">
+            <a:spAutoFit/>
+          </a:bodyPr>
+          <a:lstStyle/>
+          <a:p>
+            <a:pPr algn="l">
+              <a:lnSpc>
+                <a:spcPct val="112000"/>
+              </a:lnSpc>
+            </a:pPr>
+            <a:r>
+              <a:rPr sz="2000" b="1">
+                <a:solidFill>
+                  <a:srgbClr val="00FF41"/>
+                </a:solidFill>
+                <a:latin typeface="Arial"/>
+              </a:rPr>
+              <a:t>•  </a:t>
+            </a:r>
+            <a:r>
+              <a:rPr sz="2000" b="0">
+                <a:solidFill>
+                  <a:srgbClr val="F5F7FA"/>
+                </a:solidFill>
+                <a:latin typeface="Arial"/>
+              </a:rPr>
+              <a:t>Compare what testers experienced against your planning.md — where's the biggest gap?</a:t>
+            </a:r>
+          </a:p>
+          <a:p>
+            <a:pPr algn="l">
+              <a:lnSpc>
+                <a:spcPct val="112000"/>
+              </a:lnSpc>
+            </a:pPr>
+            <a:r>
+              <a:rPr sz="2000" b="1">
+                <a:solidFill>
+                  <a:srgbClr val="00FF41"/>
+                </a:solidFill>
+                <a:latin typeface="Arial"/>
+              </a:rPr>
+              <a:t>•  </a:t>
+            </a:r>
+            <a:r>
+              <a:rPr sz="2000" b="0">
+                <a:solidFill>
+                  <a:srgbClr val="F5F7FA"/>
+                </a:solidFill>
+                <a:latin typeface="Arial"/>
+              </a:rPr>
+              <a:t>Where did the AI's defaults bend your value while you weren't looking?</a:t>
+            </a:r>
+          </a:p>
+          <a:p>
+            <a:pPr algn="l">
+              <a:lnSpc>
+                <a:spcPct val="112000"/>
+              </a:lnSpc>
+            </a:pPr>
+            <a:r>
+              <a:rPr sz="2000" b="1">
+                <a:solidFill>
+                  <a:srgbClr val="00FF41"/>
+                </a:solidFill>
+                <a:latin typeface="Arial"/>
+              </a:rPr>
+              <a:t>•  </a:t>
+            </a:r>
+            <a:r>
+              <a:rPr sz="2000" b="0">
+                <a:solidFill>
+                  <a:srgbClr val="F5F7FA"/>
+                </a:solidFill>
+                <a:latin typeface="Arial"/>
+              </a:rPr>
+              <a:t>Close the biggest gap with one commit. Link it in your report.</a:t>
+            </a:r>
+          </a:p>
+          <a:p>
+            <a:pPr algn="l">
+              <a:lnSpc>
+                <a:spcPct val="112000"/>
+              </a:lnSpc>
+            </a:pPr>
+            <a:r>
+              <a:rPr sz="2000" b="1">
+                <a:solidFill>
+                  <a:srgbClr val="00FF41"/>
+                </a:solidFill>
+                <a:latin typeface="Arial"/>
+              </a:rPr>
+              <a:t>•  </a:t>
+            </a:r>
+            <a:r>
+              <a:rPr sz="2000" b="0">
+                <a:solidFill>
+                  <a:srgbClr val="F5F7FA"/>
+                </a:solidFill>
+                <a:latin typeface="Arial"/>
+              </a:rPr>
+              <a:t>Reading: Values at Play, Ch. 5 (Discovery).</a:t>
+            </a:r>
+          </a:p>
+        </p:txBody>
+      </p:sp>
+      <p:sp>
+        <p:nvSpPr>
+          <p:cNvPr id="6" name="TextBox 5"/>
+          <p:cNvSpPr txBox="1"/>
+          <p:nvPr/>
+        </p:nvSpPr>
+        <p:spPr>
+          <a:xfrm>
+            <a:off x="640080" y="6355080"/>
+            <a:ext cx="10972800" cy="365760"/>
+          </a:xfrm>
+          <a:prstGeom prst="rect">
+            <a:avLst/>
+          </a:prstGeom>
+          <a:noFill/>
+        </p:spPr>
+        <p:txBody>
+          <a:bodyPr wrap="square" anchor="t">
+            <a:spAutoFit/>
+          </a:bodyPr>
+          <a:lstStyle/>
+          <a:p>
+            <a:pPr algn="l">
+              <a:lnSpc>
+                <a:spcPct val="100000"/>
+              </a:lnSpc>
+            </a:pPr>
+            <a:r>
+              <a:rPr sz="1000" b="0">
+                <a:solidFill>
+                  <a:srgbClr val="5A6474"/>
+                </a:solidFill>
+                <a:latin typeface="Courier New"/>
+              </a:rPr>
+              <a:t>Good Code, Good Vibes · TECHIE 1121 · Cornell Tech · Summer 2026</a:t>
+            </a:r>
+          </a:p>
+        </p:txBody>
+      </p:sp>
+    </p:spTree>
+  </p:cSld>
+  <p:clrMapOvr>
+    <a:masterClrMapping/>
+  </p:clrMapOvr>
+</p:sld>
+</file>
+
+<file path=ppt/slides/slide16.xml><?xml version="1.0" encoding="utf-8"?>
+<p:sld xmlns:a="http://schemas.openxmlformats.org/drawingml/2006/main" xmlns:p="http://schemas.openxmlformats.org/presentationml/2006/main" xmlns:r="http://schemas.openxmlformats.org/officeDocument/2006/relationships">
+  <p:cSld>
+    <p:bg>
+      <p:bgPr>
+        <a:solidFill>
+          <a:srgbClr val="0B0E14"/>
+        </a:solidFill>
+        <a:effectLst/>
+      </p:bgPr>
+    </p:bg>
+    <p:spTree>
+      <p:nvGrpSpPr>
+        <p:cNvPr id="1" name=""/>
+        <p:cNvGrpSpPr/>
+        <p:nvPr/>
+      </p:nvGrpSpPr>
+      <p:grpSpPr/>
+      <p:sp>
+        <p:nvSpPr>
+          <p:cNvPr id="2" name="TextBox 1"/>
+          <p:cNvSpPr txBox="1"/>
+          <p:nvPr/>
+        </p:nvSpPr>
+        <p:spPr>
+          <a:xfrm>
+            <a:off x="640080" y="502920"/>
+            <a:ext cx="10058400" cy="365760"/>
+          </a:xfrm>
+          <a:prstGeom prst="rect">
+            <a:avLst/>
+          </a:prstGeom>
+          <a:noFill/>
+        </p:spPr>
+        <p:txBody>
+          <a:bodyPr wrap="square" anchor="t">
+            <a:spAutoFit/>
+          </a:bodyPr>
+          <a:lstStyle/>
+          <a:p>
+            <a:pPr algn="l">
+              <a:lnSpc>
+                <a:spcPct val="100000"/>
+              </a:lnSpc>
+            </a:pPr>
+            <a:r>
+              <a:rPr sz="1300" b="1">
+                <a:solidFill>
+                  <a:srgbClr val="00FF41"/>
+                </a:solidFill>
+                <a:latin typeface="Courier New"/>
+              </a:rPr>
               <a:t>A HONEST CAUTION</a:t>
             </a:r>
           </a:p>
@@ -6866,7 +8120,7 @@
                 </a:solidFill>
                 <a:latin typeface="Courier New"/>
               </a:rPr>
-              <a:t>DISCOVERY · SOURCES</a:t>
+              <a:t>TODAY, VIBE-CODED</a:t>
             </a:r>
           </a:p>
         </p:txBody>
@@ -6949,7 +8203,7 @@
                 </a:solidFill>
                 <a:latin typeface="Arial"/>
               </a:rPr>
-              <a:t>Where do values come from? Look at the sources</a:t>
+              <a:t>The three moves become Plan → Run → Verify</a:t>
             </a:r>
           </a:p>
         </p:txBody>
@@ -6963,7 +8217,7 @@
         <p:spPr>
           <a:xfrm>
             <a:off x="640080" y="2468880"/>
-            <a:ext cx="2453563" cy="3383280"/>
+            <a:ext cx="3393338" cy="3383280"/>
           </a:xfrm>
           <a:prstGeom prst="roundRect">
             <a:avLst/>
@@ -7007,7 +8261,7 @@
         <p:spPr>
           <a:xfrm>
             <a:off x="640080" y="2468880"/>
-            <a:ext cx="2453563" cy="82296"/>
+            <a:ext cx="3393338" cy="82296"/>
           </a:xfrm>
           <a:prstGeom prst="rect">
             <a:avLst/>
@@ -7051,7 +8305,7 @@
         <p:spPr>
           <a:xfrm>
             <a:off x="914400" y="2788920"/>
-            <a:ext cx="1904923" cy="457200"/>
+            <a:ext cx="2844698" cy="457200"/>
           </a:xfrm>
           <a:prstGeom prst="rect">
             <a:avLst/>
@@ -7076,7 +8330,7 @@
                 </a:solidFill>
                 <a:latin typeface="Courier New"/>
               </a:rPr>
-              <a:t>FUNCTIONAL</a:t>
+              <a:t>PLAN</a:t>
             </a:r>
           </a:p>
         </p:txBody>
@@ -7090,7 +8344,7 @@
         <p:spPr>
           <a:xfrm>
             <a:off x="914400" y="3246120"/>
-            <a:ext cx="1904923" cy="822960"/>
+            <a:ext cx="2844698" cy="822960"/>
           </a:xfrm>
           <a:prstGeom prst="rect">
             <a:avLst/>
@@ -7115,7 +8369,7 @@
                 </a:solidFill>
                 <a:latin typeface="Arial"/>
               </a:rPr>
-              <a:t>What it’s for</a:t>
+              <a:t>planning.md, before you prompt</a:t>
             </a:r>
           </a:p>
         </p:txBody>
@@ -7129,7 +8383,7 @@
         <p:spPr>
           <a:xfrm>
             <a:off x="914400" y="4114800"/>
-            <a:ext cx="1904923" cy="1554480"/>
+            <a:ext cx="2844698" cy="1554480"/>
           </a:xfrm>
           <a:prstGeom prst="rect">
             <a:avLst/>
@@ -7154,7 +8408,7 @@
                 </a:solidFill>
                 <a:latin typeface="Arial"/>
               </a:rPr>
-              <a:t>The system’s explicit purpose, mission, and promise.</a:t>
+              <a:t>Name the value, who it's for, how you'd know — and write the exact prompts you'll run. Verbatim. Before running them.</a:t>
             </a:r>
           </a:p>
         </p:txBody>
@@ -7167,8 +8421,8 @@
         </p:nvSpPr>
         <p:spPr>
           <a:xfrm>
-            <a:off x="3459403" y="2468880"/>
-            <a:ext cx="2453563" cy="3383280"/>
+            <a:off x="4399178" y="2468880"/>
+            <a:ext cx="3393338" cy="3383280"/>
           </a:xfrm>
           <a:prstGeom prst="roundRect">
             <a:avLst/>
@@ -7211,8 +8465,8 @@
         </p:nvSpPr>
         <p:spPr>
           <a:xfrm>
-            <a:off x="3459403" y="2468880"/>
-            <a:ext cx="2453563" cy="82296"/>
+            <a:off x="4399178" y="2468880"/>
+            <a:ext cx="3393338" cy="82296"/>
           </a:xfrm>
           <a:prstGeom prst="rect">
             <a:avLst/>
@@ -7255,8 +8509,8 @@
         </p:nvSpPr>
         <p:spPr>
           <a:xfrm>
-            <a:off x="3733723" y="2788920"/>
-            <a:ext cx="1904923" cy="457200"/>
+            <a:off x="4673498" y="2788920"/>
+            <a:ext cx="2844698" cy="457200"/>
           </a:xfrm>
           <a:prstGeom prst="rect">
             <a:avLst/>
@@ -7281,7 +8535,7 @@
                 </a:solidFill>
                 <a:latin typeface="Courier New"/>
               </a:rPr>
-              <a:t>ACTORS</a:t>
+              <a:t>RUN</a:t>
             </a:r>
           </a:p>
         </p:txBody>
@@ -7294,8 +8548,8 @@
         </p:nvSpPr>
         <p:spPr>
           <a:xfrm>
-            <a:off x="3733723" y="3246120"/>
-            <a:ext cx="1904923" cy="822960"/>
+            <a:off x="4673498" y="3246120"/>
+            <a:ext cx="2844698" cy="822960"/>
           </a:xfrm>
           <a:prstGeom prst="rect">
             <a:avLst/>
@@ -7320,7 +8574,7 @@
                 </a:solidFill>
                 <a:latin typeface="Arial"/>
               </a:rPr>
-              <a:t>Who’s involved</a:t>
+              <a:t>Prompts + a real test</a:t>
             </a:r>
           </a:p>
         </p:txBody>
@@ -7333,8 +8587,8 @@
         </p:nvSpPr>
         <p:spPr>
           <a:xfrm>
-            <a:off x="3733723" y="4114800"/>
-            <a:ext cx="1904923" cy="1554480"/>
+            <a:off x="4673498" y="4114800"/>
+            <a:ext cx="2844698" cy="1554480"/>
           </a:xfrm>
           <a:prstGeom prst="rect">
             <a:avLst/>
@@ -7359,7 +8613,7 @@
                 </a:solidFill>
                 <a:latin typeface="Arial"/>
               </a:rPr>
-              <a:t>Users, creators, funders — and affected parties who never touch it.</a:t>
+              <a:t>Execute your planned prompts unchanged, then let another team test whether the value survives contact with a user.</a:t>
             </a:r>
           </a:p>
         </p:txBody>
@@ -7372,8 +8626,8 @@
         </p:nvSpPr>
         <p:spPr>
           <a:xfrm>
-            <a:off x="6278726" y="2468880"/>
-            <a:ext cx="2453563" cy="3383280"/>
+            <a:off x="8158276" y="2468880"/>
+            <a:ext cx="3393338" cy="3383280"/>
           </a:xfrm>
           <a:prstGeom prst="roundRect">
             <a:avLst/>
@@ -7416,8 +8670,8 @@
         </p:nvSpPr>
         <p:spPr>
           <a:xfrm>
-            <a:off x="6278726" y="2468880"/>
-            <a:ext cx="2453563" cy="82296"/>
+            <a:off x="8158276" y="2468880"/>
+            <a:ext cx="3393338" cy="82296"/>
           </a:xfrm>
           <a:prstGeom prst="rect">
             <a:avLst/>
@@ -7460,8 +8714,8 @@
         </p:nvSpPr>
         <p:spPr>
           <a:xfrm>
-            <a:off x="6553046" y="2788920"/>
-            <a:ext cx="1904923" cy="457200"/>
+            <a:off x="8432596" y="2788920"/>
+            <a:ext cx="2844698" cy="457200"/>
           </a:xfrm>
           <a:prstGeom prst="rect">
             <a:avLst/>
@@ -7486,7 +8740,7 @@
                 </a:solidFill>
                 <a:latin typeface="Courier New"/>
               </a:rPr>
-              <a:t>CONSTRAINTS</a:t>
+              <a:t>VERIFY</a:t>
             </a:r>
           </a:p>
         </p:txBody>
@@ -7499,8 +8753,8 @@
         </p:nvSpPr>
         <p:spPr>
           <a:xfrm>
-            <a:off x="6553046" y="3246120"/>
-            <a:ext cx="1904923" cy="822960"/>
+            <a:off x="8432596" y="3246120"/>
+            <a:ext cx="2844698" cy="822960"/>
           </a:xfrm>
           <a:prstGeom prst="rect">
             <a:avLst/>
@@ -7525,7 +8779,7 @@
                 </a:solidFill>
                 <a:latin typeface="Arial"/>
               </a:rPr>
-              <a:t>The material</a:t>
+              <a:t>Claim vs. reality</a:t>
             </a:r>
           </a:p>
         </p:txBody>
@@ -7538,8 +8792,8 @@
         </p:nvSpPr>
         <p:spPr>
           <a:xfrm>
-            <a:off x="6553046" y="4114800"/>
-            <a:ext cx="1904923" cy="1554480"/>
+            <a:off x="8432596" y="4114800"/>
+            <a:ext cx="2844698" cy="1554480"/>
           </a:xfrm>
           <a:prstGeom prst="rect">
             <a:avLst/>
@@ -7564,219 +8818,14 @@
                 </a:solidFill>
                 <a:latin typeface="Arial"/>
               </a:rPr>
-              <a:t>What the tech makes easy or hard — screen, sensors, data.</a:t>
-            </a:r>
-          </a:p>
-        </p:txBody>
-      </p:sp>
-      <p:sp>
-        <p:nvSpPr>
-          <p:cNvPr id="20" name="Rounded Rectangle 19"/>
-          <p:cNvSpPr/>
-          <p:nvPr/>
-        </p:nvSpPr>
-        <p:spPr>
-          <a:xfrm>
-            <a:off x="9098049" y="2468880"/>
-            <a:ext cx="2453563" cy="3383280"/>
-          </a:xfrm>
-          <a:prstGeom prst="roundRect">
-            <a:avLst/>
-          </a:prstGeom>
-          <a:solidFill>
-            <a:srgbClr val="151B26"/>
-          </a:solidFill>
-          <a:ln>
-            <a:noFill/>
-          </a:ln>
-          <a:effectLst/>
-        </p:spPr>
-        <p:style>
-          <a:lnRef idx="1">
-            <a:schemeClr val="accent1"/>
-          </a:lnRef>
-          <a:fillRef idx="3">
-            <a:schemeClr val="accent1"/>
-          </a:fillRef>
-          <a:effectRef idx="2">
-            <a:schemeClr val="accent1"/>
-          </a:effectRef>
-          <a:fontRef idx="minor">
-            <a:schemeClr val="lt1"/>
-          </a:fontRef>
-        </p:style>
-        <p:txBody>
-          <a:bodyPr rtlCol="0" anchor="ctr"/>
-          <a:lstStyle/>
-          <a:p>
-            <a:pPr algn="ctr"/>
-          </a:p>
-        </p:txBody>
-      </p:sp>
-      <p:sp>
-        <p:nvSpPr>
-          <p:cNvPr id="21" name="Rectangle 20"/>
-          <p:cNvSpPr/>
-          <p:nvPr/>
-        </p:nvSpPr>
-        <p:spPr>
-          <a:xfrm>
-            <a:off x="9098049" y="2468880"/>
-            <a:ext cx="2453563" cy="82296"/>
-          </a:xfrm>
-          <a:prstGeom prst="rect">
-            <a:avLst/>
-          </a:prstGeom>
-          <a:solidFill>
-            <a:srgbClr val="00FF41"/>
-          </a:solidFill>
-          <a:ln>
-            <a:noFill/>
-          </a:ln>
-          <a:effectLst/>
-        </p:spPr>
-        <p:style>
-          <a:lnRef idx="1">
-            <a:schemeClr val="accent1"/>
-          </a:lnRef>
-          <a:fillRef idx="3">
-            <a:schemeClr val="accent1"/>
-          </a:fillRef>
-          <a:effectRef idx="2">
-            <a:schemeClr val="accent1"/>
-          </a:effectRef>
-          <a:fontRef idx="minor">
-            <a:schemeClr val="lt1"/>
-          </a:fontRef>
-        </p:style>
-        <p:txBody>
-          <a:bodyPr rtlCol="0" anchor="ctr"/>
-          <a:lstStyle/>
-          <a:p>
-            <a:pPr algn="ctr"/>
-          </a:p>
-        </p:txBody>
-      </p:sp>
-      <p:sp>
-        <p:nvSpPr>
-          <p:cNvPr id="22" name="TextBox 21"/>
-          <p:cNvSpPr txBox="1"/>
-          <p:nvPr/>
-        </p:nvSpPr>
-        <p:spPr>
-          <a:xfrm>
-            <a:off x="9372369" y="2788920"/>
-            <a:ext cx="1904923" cy="457200"/>
-          </a:xfrm>
-          <a:prstGeom prst="rect">
-            <a:avLst/>
-          </a:prstGeom>
-          <a:noFill/>
-        </p:spPr>
-        <p:txBody>
-          <a:bodyPr wrap="square" anchor="t">
-            <a:spAutoFit/>
-          </a:bodyPr>
-          <a:lstStyle/>
-          <a:p>
-            <a:pPr algn="l">
-              <a:lnSpc>
-                <a:spcPct val="100000"/>
-              </a:lnSpc>
-            </a:pPr>
-            <a:r>
-              <a:rPr sz="1200" b="1">
-                <a:solidFill>
-                  <a:srgbClr val="00FF41"/>
-                </a:solidFill>
-                <a:latin typeface="Courier New"/>
-              </a:rPr>
-              <a:t>CONTEXT</a:t>
-            </a:r>
-          </a:p>
-        </p:txBody>
-      </p:sp>
-      <p:sp>
-        <p:nvSpPr>
-          <p:cNvPr id="23" name="TextBox 22"/>
-          <p:cNvSpPr txBox="1"/>
-          <p:nvPr/>
-        </p:nvSpPr>
-        <p:spPr>
-          <a:xfrm>
-            <a:off x="9372369" y="3246120"/>
-            <a:ext cx="1904923" cy="822960"/>
-          </a:xfrm>
-          <a:prstGeom prst="rect">
-            <a:avLst/>
-          </a:prstGeom>
-          <a:noFill/>
-        </p:spPr>
-        <p:txBody>
-          <a:bodyPr wrap="square" anchor="t">
-            <a:spAutoFit/>
-          </a:bodyPr>
-          <a:lstStyle/>
-          <a:p>
-            <a:pPr algn="l">
-              <a:lnSpc>
-                <a:spcPct val="100000"/>
-              </a:lnSpc>
-            </a:pPr>
-            <a:r>
-              <a:rPr sz="2000" b="1">
-                <a:solidFill>
-                  <a:srgbClr val="F5F7FA"/>
-                </a:solidFill>
-                <a:latin typeface="Arial"/>
-              </a:rPr>
-              <a:t>The world around it</a:t>
-            </a:r>
-          </a:p>
-        </p:txBody>
-      </p:sp>
-      <p:sp>
-        <p:nvSpPr>
-          <p:cNvPr id="24" name="TextBox 23"/>
-          <p:cNvSpPr txBox="1"/>
-          <p:nvPr/>
-        </p:nvSpPr>
-        <p:spPr>
-          <a:xfrm>
-            <a:off x="9372369" y="4114800"/>
-            <a:ext cx="1904923" cy="1554480"/>
-          </a:xfrm>
-          <a:prstGeom prst="rect">
-            <a:avLst/>
-          </a:prstGeom>
-          <a:noFill/>
-        </p:spPr>
-        <p:txBody>
-          <a:bodyPr wrap="square" anchor="t">
-            <a:spAutoFit/>
-          </a:bodyPr>
-          <a:lstStyle/>
-          <a:p>
-            <a:pPr algn="l">
-              <a:lnSpc>
-                <a:spcPct val="110000"/>
-              </a:lnSpc>
-            </a:pPr>
-            <a:r>
-              <a:rPr sz="1500" b="0">
-                <a:solidFill>
-                  <a:srgbClr val="8A94A6"/>
-                </a:solidFill>
-                <a:latin typeface="Arial"/>
-              </a:rPr>
-              <a:t>Norms, culture, law, and standards it inherits.</a:t>
-            </a:r>
-          </a:p>
-        </p:txBody>
-      </p:sp>
-      <p:sp>
-        <p:nvSpPr>
-          <p:cNvPr id="25" name="TextBox 24"/>
+              <a:t>Find the biggest gap between planning.md and what testers experienced. Close it with one commit.</a:t>
+            </a:r>
+          </a:p>
+        </p:txBody>
+      </p:sp>
+      <p:sp>
+        <p:nvSpPr>
+          <p:cNvPr id="20" name="TextBox 19"/>
           <p:cNvSpPr txBox="1"/>
           <p:nvPr/>
         </p:nvSpPr>
@@ -7873,7 +8922,7 @@
                 </a:solidFill>
                 <a:latin typeface="Courier New"/>
               </a:rPr>
-              <a:t>DISCOVERY · DEFINE</a:t>
+              <a:t>DISCOVERY · SOURCES</a:t>
             </a:r>
           </a:p>
         </p:txBody>
@@ -7931,7 +8980,7 @@
         <p:spPr>
           <a:xfrm>
             <a:off x="640080" y="1188720"/>
-            <a:ext cx="10972800" cy="1097280"/>
+            <a:ext cx="10972800" cy="914400"/>
           </a:xfrm>
           <a:prstGeom prst="rect">
             <a:avLst/>
@@ -7950,27 +8999,115 @@
               </a:lnSpc>
             </a:pPr>
             <a:r>
-              <a:rPr sz="3400" b="1">
+              <a:rPr sz="3200" b="1">
                 <a:solidFill>
                   <a:srgbClr val="F5F7FA"/>
                 </a:solidFill>
                 <a:latin typeface="Arial"/>
               </a:rPr>
-              <a:t>Make abstract values concrete</a:t>
-            </a:r>
-          </a:p>
-        </p:txBody>
-      </p:sp>
-      <p:sp>
-        <p:nvSpPr>
-          <p:cNvPr id="5" name="TextBox 4"/>
+              <a:t>Where do values come from? Look at the sources</a:t>
+            </a:r>
+          </a:p>
+        </p:txBody>
+      </p:sp>
+      <p:sp>
+        <p:nvSpPr>
+          <p:cNvPr id="5" name="Rounded Rectangle 4"/>
+          <p:cNvSpPr/>
+          <p:nvPr/>
+        </p:nvSpPr>
+        <p:spPr>
+          <a:xfrm>
+            <a:off x="640080" y="2468880"/>
+            <a:ext cx="2453563" cy="3383280"/>
+          </a:xfrm>
+          <a:prstGeom prst="roundRect">
+            <a:avLst/>
+          </a:prstGeom>
+          <a:solidFill>
+            <a:srgbClr val="151B26"/>
+          </a:solidFill>
+          <a:ln>
+            <a:noFill/>
+          </a:ln>
+          <a:effectLst/>
+        </p:spPr>
+        <p:style>
+          <a:lnRef idx="1">
+            <a:schemeClr val="accent1"/>
+          </a:lnRef>
+          <a:fillRef idx="3">
+            <a:schemeClr val="accent1"/>
+          </a:fillRef>
+          <a:effectRef idx="2">
+            <a:schemeClr val="accent1"/>
+          </a:effectRef>
+          <a:fontRef idx="minor">
+            <a:schemeClr val="lt1"/>
+          </a:fontRef>
+        </p:style>
+        <p:txBody>
+          <a:bodyPr rtlCol="0" anchor="ctr"/>
+          <a:lstStyle/>
+          <a:p>
+            <a:pPr algn="ctr"/>
+          </a:p>
+        </p:txBody>
+      </p:sp>
+      <p:sp>
+        <p:nvSpPr>
+          <p:cNvPr id="6" name="Rectangle 5"/>
+          <p:cNvSpPr/>
+          <p:nvPr/>
+        </p:nvSpPr>
+        <p:spPr>
+          <a:xfrm>
+            <a:off x="640080" y="2468880"/>
+            <a:ext cx="2453563" cy="82296"/>
+          </a:xfrm>
+          <a:prstGeom prst="rect">
+            <a:avLst/>
+          </a:prstGeom>
+          <a:solidFill>
+            <a:srgbClr val="00FF41"/>
+          </a:solidFill>
+          <a:ln>
+            <a:noFill/>
+          </a:ln>
+          <a:effectLst/>
+        </p:spPr>
+        <p:style>
+          <a:lnRef idx="1">
+            <a:schemeClr val="accent1"/>
+          </a:lnRef>
+          <a:fillRef idx="3">
+            <a:schemeClr val="accent1"/>
+          </a:fillRef>
+          <a:effectRef idx="2">
+            <a:schemeClr val="accent1"/>
+          </a:effectRef>
+          <a:fontRef idx="minor">
+            <a:schemeClr val="lt1"/>
+          </a:fontRef>
+        </p:style>
+        <p:txBody>
+          <a:bodyPr rtlCol="0" anchor="ctr"/>
+          <a:lstStyle/>
+          <a:p>
+            <a:pPr algn="ctr"/>
+          </a:p>
+        </p:txBody>
+      </p:sp>
+      <p:sp>
+        <p:nvSpPr>
+          <p:cNvPr id="7" name="TextBox 6"/>
           <p:cNvSpPr txBox="1"/>
           <p:nvPr/>
         </p:nvSpPr>
         <p:spPr>
           <a:xfrm>
-            <a:off x="658368" y="2286000"/>
-            <a:ext cx="10881360" cy="3657600"/>
+            <a:off x="914400" y="2788920"/>
+            <a:ext cx="1904923" cy="457200"/>
           </a:xfrm>
           <a:prstGeom prst="rect">
             <a:avLst/>
@@ -7985,126 +9122,717 @@
           <a:p>
             <a:pPr algn="l">
               <a:lnSpc>
-                <a:spcPct val="112000"/>
-              </a:lnSpc>
-            </a:pPr>
-            <a:r>
-              <a:rPr sz="2200" b="0">
+                <a:spcPct val="100000"/>
+              </a:lnSpc>
+            </a:pPr>
+            <a:r>
+              <a:rPr sz="1200" b="1">
+                <a:solidFill>
+                  <a:srgbClr val="00FF41"/>
+                </a:solidFill>
+                <a:latin typeface="Courier New"/>
+              </a:rPr>
+              <a:t>FUNCTIONAL</a:t>
+            </a:r>
+          </a:p>
+        </p:txBody>
+      </p:sp>
+      <p:sp>
+        <p:nvSpPr>
+          <p:cNvPr id="8" name="TextBox 7"/>
+          <p:cNvSpPr txBox="1"/>
+          <p:nvPr/>
+        </p:nvSpPr>
+        <p:spPr>
+          <a:xfrm>
+            <a:off x="914400" y="3246120"/>
+            <a:ext cx="1904923" cy="822960"/>
+          </a:xfrm>
+          <a:prstGeom prst="rect">
+            <a:avLst/>
+          </a:prstGeom>
+          <a:noFill/>
+        </p:spPr>
+        <p:txBody>
+          <a:bodyPr wrap="square" anchor="t">
+            <a:spAutoFit/>
+          </a:bodyPr>
+          <a:lstStyle/>
+          <a:p>
+            <a:pPr algn="l">
+              <a:lnSpc>
+                <a:spcPct val="100000"/>
+              </a:lnSpc>
+            </a:pPr>
+            <a:r>
+              <a:rPr sz="2000" b="1">
                 <a:solidFill>
                   <a:srgbClr val="F5F7FA"/>
                 </a:solidFill>
                 <a:latin typeface="Arial"/>
               </a:rPr>
-              <a:t>A value you can’t define, you can’t test. Turn it into operational terms:</a:t>
-            </a:r>
-          </a:p>
-          <a:p>
-            <a:pPr algn="l">
-              <a:lnSpc>
-                <a:spcPct val="112000"/>
-              </a:lnSpc>
-            </a:pPr>
-            <a:r>
-              <a:rPr sz="2000" b="0">
+              <a:t>What it’s for</a:t>
+            </a:r>
+          </a:p>
+        </p:txBody>
+      </p:sp>
+      <p:sp>
+        <p:nvSpPr>
+          <p:cNvPr id="9" name="TextBox 8"/>
+          <p:cNvSpPr txBox="1"/>
+          <p:nvPr/>
+        </p:nvSpPr>
+        <p:spPr>
+          <a:xfrm>
+            <a:off x="914400" y="4114800"/>
+            <a:ext cx="1904923" cy="1554480"/>
+          </a:xfrm>
+          <a:prstGeom prst="rect">
+            <a:avLst/>
+          </a:prstGeom>
+          <a:noFill/>
+        </p:spPr>
+        <p:txBody>
+          <a:bodyPr wrap="square" anchor="t">
+            <a:spAutoFit/>
+          </a:bodyPr>
+          <a:lstStyle/>
+          <a:p>
+            <a:pPr algn="l">
+              <a:lnSpc>
+                <a:spcPct val="110000"/>
+              </a:lnSpc>
+            </a:pPr>
+            <a:r>
+              <a:rPr sz="1500" b="0">
+                <a:solidFill>
+                  <a:srgbClr val="8A94A6"/>
+                </a:solidFill>
+                <a:latin typeface="Arial"/>
+              </a:rPr>
+              <a:t>The system’s explicit purpose, mission, and promise.</a:t>
+            </a:r>
+          </a:p>
+        </p:txBody>
+      </p:sp>
+      <p:sp>
+        <p:nvSpPr>
+          <p:cNvPr id="10" name="Rounded Rectangle 9"/>
+          <p:cNvSpPr/>
+          <p:nvPr/>
+        </p:nvSpPr>
+        <p:spPr>
+          <a:xfrm>
+            <a:off x="3459403" y="2468880"/>
+            <a:ext cx="2453563" cy="3383280"/>
+          </a:xfrm>
+          <a:prstGeom prst="roundRect">
+            <a:avLst/>
+          </a:prstGeom>
+          <a:solidFill>
+            <a:srgbClr val="151B26"/>
+          </a:solidFill>
+          <a:ln>
+            <a:noFill/>
+          </a:ln>
+          <a:effectLst/>
+        </p:spPr>
+        <p:style>
+          <a:lnRef idx="1">
+            <a:schemeClr val="accent1"/>
+          </a:lnRef>
+          <a:fillRef idx="3">
+            <a:schemeClr val="accent1"/>
+          </a:fillRef>
+          <a:effectRef idx="2">
+            <a:schemeClr val="accent1"/>
+          </a:effectRef>
+          <a:fontRef idx="minor">
+            <a:schemeClr val="lt1"/>
+          </a:fontRef>
+        </p:style>
+        <p:txBody>
+          <a:bodyPr rtlCol="0" anchor="ctr"/>
+          <a:lstStyle/>
+          <a:p>
+            <a:pPr algn="ctr"/>
+          </a:p>
+        </p:txBody>
+      </p:sp>
+      <p:sp>
+        <p:nvSpPr>
+          <p:cNvPr id="11" name="Rectangle 10"/>
+          <p:cNvSpPr/>
+          <p:nvPr/>
+        </p:nvSpPr>
+        <p:spPr>
+          <a:xfrm>
+            <a:off x="3459403" y="2468880"/>
+            <a:ext cx="2453563" cy="82296"/>
+          </a:xfrm>
+          <a:prstGeom prst="rect">
+            <a:avLst/>
+          </a:prstGeom>
+          <a:solidFill>
+            <a:srgbClr val="00FF41"/>
+          </a:solidFill>
+          <a:ln>
+            <a:noFill/>
+          </a:ln>
+          <a:effectLst/>
+        </p:spPr>
+        <p:style>
+          <a:lnRef idx="1">
+            <a:schemeClr val="accent1"/>
+          </a:lnRef>
+          <a:fillRef idx="3">
+            <a:schemeClr val="accent1"/>
+          </a:fillRef>
+          <a:effectRef idx="2">
+            <a:schemeClr val="accent1"/>
+          </a:effectRef>
+          <a:fontRef idx="minor">
+            <a:schemeClr val="lt1"/>
+          </a:fontRef>
+        </p:style>
+        <p:txBody>
+          <a:bodyPr rtlCol="0" anchor="ctr"/>
+          <a:lstStyle/>
+          <a:p>
+            <a:pPr algn="ctr"/>
+          </a:p>
+        </p:txBody>
+      </p:sp>
+      <p:sp>
+        <p:nvSpPr>
+          <p:cNvPr id="12" name="TextBox 11"/>
+          <p:cNvSpPr txBox="1"/>
+          <p:nvPr/>
+        </p:nvSpPr>
+        <p:spPr>
+          <a:xfrm>
+            <a:off x="3733723" y="2788920"/>
+            <a:ext cx="1904923" cy="457200"/>
+          </a:xfrm>
+          <a:prstGeom prst="rect">
+            <a:avLst/>
+          </a:prstGeom>
+          <a:noFill/>
+        </p:spPr>
+        <p:txBody>
+          <a:bodyPr wrap="square" anchor="t">
+            <a:spAutoFit/>
+          </a:bodyPr>
+          <a:lstStyle/>
+          <a:p>
+            <a:pPr algn="l">
+              <a:lnSpc>
+                <a:spcPct val="100000"/>
+              </a:lnSpc>
+            </a:pPr>
+            <a:r>
+              <a:rPr sz="1200" b="1">
+                <a:solidFill>
+                  <a:srgbClr val="00FF41"/>
+                </a:solidFill>
+                <a:latin typeface="Courier New"/>
+              </a:rPr>
+              <a:t>ACTORS</a:t>
+            </a:r>
+          </a:p>
+        </p:txBody>
+      </p:sp>
+      <p:sp>
+        <p:nvSpPr>
+          <p:cNvPr id="13" name="TextBox 12"/>
+          <p:cNvSpPr txBox="1"/>
+          <p:nvPr/>
+        </p:nvSpPr>
+        <p:spPr>
+          <a:xfrm>
+            <a:off x="3733723" y="3246120"/>
+            <a:ext cx="1904923" cy="822960"/>
+          </a:xfrm>
+          <a:prstGeom prst="rect">
+            <a:avLst/>
+          </a:prstGeom>
+          <a:noFill/>
+        </p:spPr>
+        <p:txBody>
+          <a:bodyPr wrap="square" anchor="t">
+            <a:spAutoFit/>
+          </a:bodyPr>
+          <a:lstStyle/>
+          <a:p>
+            <a:pPr algn="l">
+              <a:lnSpc>
+                <a:spcPct val="100000"/>
+              </a:lnSpc>
+            </a:pPr>
+            <a:r>
+              <a:rPr sz="2000" b="1">
                 <a:solidFill>
                   <a:srgbClr val="F5F7FA"/>
                 </a:solidFill>
                 <a:latin typeface="Arial"/>
               </a:rPr>
-              <a:t/>
-            </a:r>
-          </a:p>
-          <a:p>
-            <a:pPr algn="l">
-              <a:lnSpc>
-                <a:spcPct val="112000"/>
+              <a:t>Who’s involved</a:t>
+            </a:r>
+          </a:p>
+        </p:txBody>
+      </p:sp>
+      <p:sp>
+        <p:nvSpPr>
+          <p:cNvPr id="14" name="TextBox 13"/>
+          <p:cNvSpPr txBox="1"/>
+          <p:nvPr/>
+        </p:nvSpPr>
+        <p:spPr>
+          <a:xfrm>
+            <a:off x="3733723" y="4114800"/>
+            <a:ext cx="1904923" cy="1554480"/>
+          </a:xfrm>
+          <a:prstGeom prst="rect">
+            <a:avLst/>
+          </a:prstGeom>
+          <a:noFill/>
+        </p:spPr>
+        <p:txBody>
+          <a:bodyPr wrap="square" anchor="t">
+            <a:spAutoFit/>
+          </a:bodyPr>
+          <a:lstStyle/>
+          <a:p>
+            <a:pPr algn="l">
+              <a:lnSpc>
+                <a:spcPct val="110000"/>
+              </a:lnSpc>
+            </a:pPr>
+            <a:r>
+              <a:rPr sz="1500" b="0">
+                <a:solidFill>
+                  <a:srgbClr val="8A94A6"/>
+                </a:solidFill>
+                <a:latin typeface="Arial"/>
+              </a:rPr>
+              <a:t>Users, creators, funders — and affected parties who never touch it.</a:t>
+            </a:r>
+          </a:p>
+        </p:txBody>
+      </p:sp>
+      <p:sp>
+        <p:nvSpPr>
+          <p:cNvPr id="15" name="Rounded Rectangle 14"/>
+          <p:cNvSpPr/>
+          <p:nvPr/>
+        </p:nvSpPr>
+        <p:spPr>
+          <a:xfrm>
+            <a:off x="6278726" y="2468880"/>
+            <a:ext cx="2453563" cy="3383280"/>
+          </a:xfrm>
+          <a:prstGeom prst="roundRect">
+            <a:avLst/>
+          </a:prstGeom>
+          <a:solidFill>
+            <a:srgbClr val="151B26"/>
+          </a:solidFill>
+          <a:ln>
+            <a:noFill/>
+          </a:ln>
+          <a:effectLst/>
+        </p:spPr>
+        <p:style>
+          <a:lnRef idx="1">
+            <a:schemeClr val="accent1"/>
+          </a:lnRef>
+          <a:fillRef idx="3">
+            <a:schemeClr val="accent1"/>
+          </a:fillRef>
+          <a:effectRef idx="2">
+            <a:schemeClr val="accent1"/>
+          </a:effectRef>
+          <a:fontRef idx="minor">
+            <a:schemeClr val="lt1"/>
+          </a:fontRef>
+        </p:style>
+        <p:txBody>
+          <a:bodyPr rtlCol="0" anchor="ctr"/>
+          <a:lstStyle/>
+          <a:p>
+            <a:pPr algn="ctr"/>
+          </a:p>
+        </p:txBody>
+      </p:sp>
+      <p:sp>
+        <p:nvSpPr>
+          <p:cNvPr id="16" name="Rectangle 15"/>
+          <p:cNvSpPr/>
+          <p:nvPr/>
+        </p:nvSpPr>
+        <p:spPr>
+          <a:xfrm>
+            <a:off x="6278726" y="2468880"/>
+            <a:ext cx="2453563" cy="82296"/>
+          </a:xfrm>
+          <a:prstGeom prst="rect">
+            <a:avLst/>
+          </a:prstGeom>
+          <a:solidFill>
+            <a:srgbClr val="00FF41"/>
+          </a:solidFill>
+          <a:ln>
+            <a:noFill/>
+          </a:ln>
+          <a:effectLst/>
+        </p:spPr>
+        <p:style>
+          <a:lnRef idx="1">
+            <a:schemeClr val="accent1"/>
+          </a:lnRef>
+          <a:fillRef idx="3">
+            <a:schemeClr val="accent1"/>
+          </a:fillRef>
+          <a:effectRef idx="2">
+            <a:schemeClr val="accent1"/>
+          </a:effectRef>
+          <a:fontRef idx="minor">
+            <a:schemeClr val="lt1"/>
+          </a:fontRef>
+        </p:style>
+        <p:txBody>
+          <a:bodyPr rtlCol="0" anchor="ctr"/>
+          <a:lstStyle/>
+          <a:p>
+            <a:pPr algn="ctr"/>
+          </a:p>
+        </p:txBody>
+      </p:sp>
+      <p:sp>
+        <p:nvSpPr>
+          <p:cNvPr id="17" name="TextBox 16"/>
+          <p:cNvSpPr txBox="1"/>
+          <p:nvPr/>
+        </p:nvSpPr>
+        <p:spPr>
+          <a:xfrm>
+            <a:off x="6553046" y="2788920"/>
+            <a:ext cx="1904923" cy="457200"/>
+          </a:xfrm>
+          <a:prstGeom prst="rect">
+            <a:avLst/>
+          </a:prstGeom>
+          <a:noFill/>
+        </p:spPr>
+        <p:txBody>
+          <a:bodyPr wrap="square" anchor="t">
+            <a:spAutoFit/>
+          </a:bodyPr>
+          <a:lstStyle/>
+          <a:p>
+            <a:pPr algn="l">
+              <a:lnSpc>
+                <a:spcPct val="100000"/>
+              </a:lnSpc>
+            </a:pPr>
+            <a:r>
+              <a:rPr sz="1200" b="1">
+                <a:solidFill>
+                  <a:srgbClr val="00FF41"/>
+                </a:solidFill>
+                <a:latin typeface="Courier New"/>
+              </a:rPr>
+              <a:t>CONSTRAINTS</a:t>
+            </a:r>
+          </a:p>
+        </p:txBody>
+      </p:sp>
+      <p:sp>
+        <p:nvSpPr>
+          <p:cNvPr id="18" name="TextBox 17"/>
+          <p:cNvSpPr txBox="1"/>
+          <p:nvPr/>
+        </p:nvSpPr>
+        <p:spPr>
+          <a:xfrm>
+            <a:off x="6553046" y="3246120"/>
+            <a:ext cx="1904923" cy="822960"/>
+          </a:xfrm>
+          <a:prstGeom prst="rect">
+            <a:avLst/>
+          </a:prstGeom>
+          <a:noFill/>
+        </p:spPr>
+        <p:txBody>
+          <a:bodyPr wrap="square" anchor="t">
+            <a:spAutoFit/>
+          </a:bodyPr>
+          <a:lstStyle/>
+          <a:p>
+            <a:pPr algn="l">
+              <a:lnSpc>
+                <a:spcPct val="100000"/>
               </a:lnSpc>
             </a:pPr>
             <a:r>
               <a:rPr sz="2000" b="1">
                 <a:solidFill>
+                  <a:srgbClr val="F5F7FA"/>
+                </a:solidFill>
+                <a:latin typeface="Arial"/>
+              </a:rPr>
+              <a:t>The material</a:t>
+            </a:r>
+          </a:p>
+        </p:txBody>
+      </p:sp>
+      <p:sp>
+        <p:nvSpPr>
+          <p:cNvPr id="19" name="TextBox 18"/>
+          <p:cNvSpPr txBox="1"/>
+          <p:nvPr/>
+        </p:nvSpPr>
+        <p:spPr>
+          <a:xfrm>
+            <a:off x="6553046" y="4114800"/>
+            <a:ext cx="1904923" cy="1554480"/>
+          </a:xfrm>
+          <a:prstGeom prst="rect">
+            <a:avLst/>
+          </a:prstGeom>
+          <a:noFill/>
+        </p:spPr>
+        <p:txBody>
+          <a:bodyPr wrap="square" anchor="t">
+            <a:spAutoFit/>
+          </a:bodyPr>
+          <a:lstStyle/>
+          <a:p>
+            <a:pPr algn="l">
+              <a:lnSpc>
+                <a:spcPct val="110000"/>
+              </a:lnSpc>
+            </a:pPr>
+            <a:r>
+              <a:rPr sz="1500" b="0">
+                <a:solidFill>
+                  <a:srgbClr val="8A94A6"/>
+                </a:solidFill>
+                <a:latin typeface="Arial"/>
+              </a:rPr>
+              <a:t>What the tech makes easy or hard — screen, sensors, data.</a:t>
+            </a:r>
+          </a:p>
+        </p:txBody>
+      </p:sp>
+      <p:sp>
+        <p:nvSpPr>
+          <p:cNvPr id="20" name="Rounded Rectangle 19"/>
+          <p:cNvSpPr/>
+          <p:nvPr/>
+        </p:nvSpPr>
+        <p:spPr>
+          <a:xfrm>
+            <a:off x="9098049" y="2468880"/>
+            <a:ext cx="2453563" cy="3383280"/>
+          </a:xfrm>
+          <a:prstGeom prst="roundRect">
+            <a:avLst/>
+          </a:prstGeom>
+          <a:solidFill>
+            <a:srgbClr val="151B26"/>
+          </a:solidFill>
+          <a:ln>
+            <a:noFill/>
+          </a:ln>
+          <a:effectLst/>
+        </p:spPr>
+        <p:style>
+          <a:lnRef idx="1">
+            <a:schemeClr val="accent1"/>
+          </a:lnRef>
+          <a:fillRef idx="3">
+            <a:schemeClr val="accent1"/>
+          </a:fillRef>
+          <a:effectRef idx="2">
+            <a:schemeClr val="accent1"/>
+          </a:effectRef>
+          <a:fontRef idx="minor">
+            <a:schemeClr val="lt1"/>
+          </a:fontRef>
+        </p:style>
+        <p:txBody>
+          <a:bodyPr rtlCol="0" anchor="ctr"/>
+          <a:lstStyle/>
+          <a:p>
+            <a:pPr algn="ctr"/>
+          </a:p>
+        </p:txBody>
+      </p:sp>
+      <p:sp>
+        <p:nvSpPr>
+          <p:cNvPr id="21" name="Rectangle 20"/>
+          <p:cNvSpPr/>
+          <p:nvPr/>
+        </p:nvSpPr>
+        <p:spPr>
+          <a:xfrm>
+            <a:off x="9098049" y="2468880"/>
+            <a:ext cx="2453563" cy="82296"/>
+          </a:xfrm>
+          <a:prstGeom prst="rect">
+            <a:avLst/>
+          </a:prstGeom>
+          <a:solidFill>
+            <a:srgbClr val="00FF41"/>
+          </a:solidFill>
+          <a:ln>
+            <a:noFill/>
+          </a:ln>
+          <a:effectLst/>
+        </p:spPr>
+        <p:style>
+          <a:lnRef idx="1">
+            <a:schemeClr val="accent1"/>
+          </a:lnRef>
+          <a:fillRef idx="3">
+            <a:schemeClr val="accent1"/>
+          </a:fillRef>
+          <a:effectRef idx="2">
+            <a:schemeClr val="accent1"/>
+          </a:effectRef>
+          <a:fontRef idx="minor">
+            <a:schemeClr val="lt1"/>
+          </a:fontRef>
+        </p:style>
+        <p:txBody>
+          <a:bodyPr rtlCol="0" anchor="ctr"/>
+          <a:lstStyle/>
+          <a:p>
+            <a:pPr algn="ctr"/>
+          </a:p>
+        </p:txBody>
+      </p:sp>
+      <p:sp>
+        <p:nvSpPr>
+          <p:cNvPr id="22" name="TextBox 21"/>
+          <p:cNvSpPr txBox="1"/>
+          <p:nvPr/>
+        </p:nvSpPr>
+        <p:spPr>
+          <a:xfrm>
+            <a:off x="9372369" y="2788920"/>
+            <a:ext cx="1904923" cy="457200"/>
+          </a:xfrm>
+          <a:prstGeom prst="rect">
+            <a:avLst/>
+          </a:prstGeom>
+          <a:noFill/>
+        </p:spPr>
+        <p:txBody>
+          <a:bodyPr wrap="square" anchor="t">
+            <a:spAutoFit/>
+          </a:bodyPr>
+          <a:lstStyle/>
+          <a:p>
+            <a:pPr algn="l">
+              <a:lnSpc>
+                <a:spcPct val="100000"/>
+              </a:lnSpc>
+            </a:pPr>
+            <a:r>
+              <a:rPr sz="1200" b="1">
+                <a:solidFill>
                   <a:srgbClr val="00FF41"/>
                 </a:solidFill>
-                <a:latin typeface="Arial"/>
-              </a:rPr>
-              <a:t>Privacy</a:t>
-            </a:r>
-            <a:r>
-              <a:rPr sz="2000" b="0">
+                <a:latin typeface="Courier New"/>
+              </a:rPr>
+              <a:t>CONTEXT</a:t>
+            </a:r>
+          </a:p>
+        </p:txBody>
+      </p:sp>
+      <p:sp>
+        <p:nvSpPr>
+          <p:cNvPr id="23" name="TextBox 22"/>
+          <p:cNvSpPr txBox="1"/>
+          <p:nvPr/>
+        </p:nvSpPr>
+        <p:spPr>
+          <a:xfrm>
+            <a:off x="9372369" y="3246120"/>
+            <a:ext cx="1904923" cy="822960"/>
+          </a:xfrm>
+          <a:prstGeom prst="rect">
+            <a:avLst/>
+          </a:prstGeom>
+          <a:noFill/>
+        </p:spPr>
+        <p:txBody>
+          <a:bodyPr wrap="square" anchor="t">
+            <a:spAutoFit/>
+          </a:bodyPr>
+          <a:lstStyle/>
+          <a:p>
+            <a:pPr algn="l">
+              <a:lnSpc>
+                <a:spcPct val="100000"/>
+              </a:lnSpc>
+            </a:pPr>
+            <a:r>
+              <a:rPr sz="2000" b="1">
                 <a:solidFill>
                   <a:srgbClr val="F5F7FA"/>
                 </a:solidFill>
                 <a:latin typeface="Arial"/>
               </a:rPr>
-              <a:t> → control · secrecy · contextual integrity.    </a:t>
-            </a:r>
-            <a:r>
-              <a:rPr sz="2000" b="1">
-                <a:solidFill>
-                  <a:srgbClr val="00FF41"/>
-                </a:solidFill>
-                <a:latin typeface="Arial"/>
-              </a:rPr>
-              <a:t>Fairness</a:t>
-            </a:r>
-            <a:r>
-              <a:rPr sz="2000" b="0">
-                <a:solidFill>
-                  <a:srgbClr val="F5F7FA"/>
-                </a:solidFill>
-                <a:latin typeface="Arial"/>
-              </a:rPr>
-              <a:t> → equal access.</a:t>
-            </a:r>
-          </a:p>
-          <a:p>
-            <a:pPr algn="l">
-              <a:lnSpc>
-                <a:spcPct val="112000"/>
-              </a:lnSpc>
-            </a:pPr>
-            <a:r>
-              <a:rPr sz="2000" b="1">
-                <a:solidFill>
-                  <a:srgbClr val="00FF41"/>
-                </a:solidFill>
-                <a:latin typeface="Arial"/>
-              </a:rPr>
-              <a:t>Accessibility</a:t>
-            </a:r>
-            <a:r>
-              <a:rPr sz="2000" b="0">
-                <a:solidFill>
-                  <a:srgbClr val="F5F7FA"/>
-                </a:solidFill>
-                <a:latin typeface="Arial"/>
-              </a:rPr>
-              <a:t> → perceivable · operable for every body.    </a:t>
-            </a:r>
-            <a:r>
-              <a:rPr sz="2000" b="1">
-                <a:solidFill>
-                  <a:srgbClr val="00FF41"/>
-                </a:solidFill>
-                <a:latin typeface="Arial"/>
-              </a:rPr>
-              <a:t>Autonomy</a:t>
-            </a:r>
-            <a:r>
-              <a:rPr sz="2000" b="0">
-                <a:solidFill>
-                  <a:srgbClr val="F5F7FA"/>
-                </a:solidFill>
-                <a:latin typeface="Arial"/>
-              </a:rPr>
-              <a:t> → act for your own reasons.</a:t>
-            </a:r>
-          </a:p>
-        </p:txBody>
-      </p:sp>
-      <p:sp>
-        <p:nvSpPr>
-          <p:cNvPr id="6" name="TextBox 5"/>
+              <a:t>The world around it</a:t>
+            </a:r>
+          </a:p>
+        </p:txBody>
+      </p:sp>
+      <p:sp>
+        <p:nvSpPr>
+          <p:cNvPr id="24" name="TextBox 23"/>
+          <p:cNvSpPr txBox="1"/>
+          <p:nvPr/>
+        </p:nvSpPr>
+        <p:spPr>
+          <a:xfrm>
+            <a:off x="9372369" y="4114800"/>
+            <a:ext cx="1904923" cy="1554480"/>
+          </a:xfrm>
+          <a:prstGeom prst="rect">
+            <a:avLst/>
+          </a:prstGeom>
+          <a:noFill/>
+        </p:spPr>
+        <p:txBody>
+          <a:bodyPr wrap="square" anchor="t">
+            <a:spAutoFit/>
+          </a:bodyPr>
+          <a:lstStyle/>
+          <a:p>
+            <a:pPr algn="l">
+              <a:lnSpc>
+                <a:spcPct val="110000"/>
+              </a:lnSpc>
+            </a:pPr>
+            <a:r>
+              <a:rPr sz="1500" b="0">
+                <a:solidFill>
+                  <a:srgbClr val="8A94A6"/>
+                </a:solidFill>
+                <a:latin typeface="Arial"/>
+              </a:rPr>
+              <a:t>Norms, culture, law, and standards it inherits.</a:t>
+            </a:r>
+          </a:p>
+        </p:txBody>
+      </p:sp>
+      <p:sp>
+        <p:nvSpPr>
+          <p:cNvPr id="25" name="TextBox 24"/>
           <p:cNvSpPr txBox="1"/>
           <p:nvPr/>
         </p:nvSpPr>
@@ -8201,7 +9929,7 @@
                 </a:solidFill>
                 <a:latin typeface="Courier New"/>
               </a:rPr>
-              <a:t>EXAMPLE · YOUR BUILD</a:t>
+              <a:t>DISCOVERY · DEFINE</a:t>
             </a:r>
           </a:p>
         </p:txBody>
@@ -8284,7 +10012,7 @@
                 </a:solidFill>
                 <a:latin typeface="Arial"/>
               </a:rPr>
-              <a:t>Discovery on a vibe-coded app</a:t>
+              <a:t>Make abstract values concrete</a:t>
             </a:r>
           </a:p>
         </p:txBody>
@@ -8317,13 +10045,13 @@
               </a:lnSpc>
             </a:pPr>
             <a:r>
-              <a:rPr sz="2200" b="1">
+              <a:rPr sz="2200" b="0">
                 <a:solidFill>
                   <a:srgbClr val="F5F7FA"/>
                 </a:solidFill>
                 <a:latin typeface="Arial"/>
               </a:rPr>
-              <a:t>An accessible event sign-up form.</a:t>
+              <a:t>A value you can’t define, you can’t test. Turn it into operational terms:</a:t>
             </a:r>
           </a:p>
           <a:p>
@@ -8349,13 +10077,22 @@
               </a:lnSpc>
             </a:pPr>
             <a:r>
+              <a:rPr sz="2000" b="1">
+                <a:solidFill>
+                  <a:srgbClr val="00FF41"/>
+                </a:solidFill>
+                <a:latin typeface="Arial"/>
+              </a:rPr>
+              <a:t>Privacy</a:t>
+            </a:r>
+            <a:r>
               <a:rPr sz="2000" b="0">
                 <a:solidFill>
                   <a:srgbClr val="F5F7FA"/>
                 </a:solidFill>
                 <a:latin typeface="Arial"/>
               </a:rPr>
-              <a:t>Sources → values: the </a:t>
+              <a:t> → control · secrecy · contextual integrity.    </a:t>
             </a:r>
             <a:r>
               <a:rPr sz="2000" b="1">
@@ -8364,7 +10101,7 @@
                 </a:solidFill>
                 <a:latin typeface="Arial"/>
               </a:rPr>
-              <a:t>purpose</a:t>
+              <a:t>Fairness</a:t>
             </a:r>
             <a:r>
               <a:rPr sz="2000" b="0">
@@ -8373,8 +10110,15 @@
                 </a:solidFill>
                 <a:latin typeface="Arial"/>
               </a:rPr>
-              <a:t> (let anyone RSVP) → access; the </a:t>
-            </a:r>
+              <a:t> → equal access.</a:t>
+            </a:r>
+          </a:p>
+          <a:p>
+            <a:pPr algn="l">
+              <a:lnSpc>
+                <a:spcPct val="112000"/>
+              </a:lnSpc>
+            </a:pPr>
             <a:r>
               <a:rPr sz="2000" b="1">
                 <a:solidFill>
@@ -8382,7 +10126,7 @@
                 </a:solidFill>
                 <a:latin typeface="Arial"/>
               </a:rPr>
-              <a:t>actors</a:t>
+              <a:t>Accessibility</a:t>
             </a:r>
             <a:r>
               <a:rPr sz="2000" b="0">
@@ -8391,7 +10135,7 @@
                 </a:solidFill>
                 <a:latin typeface="Arial"/>
               </a:rPr>
-              <a:t> (screen-reader users) → dignity; the </a:t>
+              <a:t> → perceivable · operable for every body.    </a:t>
             </a:r>
             <a:r>
               <a:rPr sz="2000" b="1">
@@ -8400,7 +10144,7 @@
                 </a:solidFill>
                 <a:latin typeface="Arial"/>
               </a:rPr>
-              <a:t>context</a:t>
+              <a:t>Autonomy</a:t>
             </a:r>
             <a:r>
               <a:rPr sz="2000" b="0">
@@ -8409,7 +10153,7 @@
                 </a:solidFill>
                 <a:latin typeface="Arial"/>
               </a:rPr>
-              <a:t> (you collect names) → privacy.</a:t>
+              <a:t> → act for your own reasons.</a:t>
             </a:r>
           </a:p>
         </p:txBody>
@@ -8513,7 +10257,7 @@
                 </a:solidFill>
                 <a:latin typeface="Courier New"/>
               </a:rPr>
-              <a:t>EXAMPLE · REAL WORLD</a:t>
+              <a:t>EXAMPLE · YOUR BUILD</a:t>
             </a:r>
           </a:p>
         </p:txBody>
@@ -8596,7 +10340,7 @@
                 </a:solidFill>
                 <a:latin typeface="Arial"/>
               </a:rPr>
-              <a:t>Discovery on a real system (YAI)</a:t>
+              <a:t>Discovery on a vibe-coded app</a:t>
             </a:r>
           </a:p>
         </p:txBody>
@@ -8629,13 +10373,13 @@
               </a:lnSpc>
             </a:pPr>
             <a:r>
-              <a:rPr sz="2200" b="0">
+              <a:rPr sz="2200" b="1">
                 <a:solidFill>
                   <a:srgbClr val="F5F7FA"/>
                 </a:solidFill>
                 <a:latin typeface="Arial"/>
               </a:rPr>
-              <a:t>A computer-vision tool that watches for seizures for people with disabilities.</a:t>
+              <a:t>An accessible event sign-up form.</a:t>
             </a:r>
           </a:p>
           <a:p>
@@ -8667,7 +10411,7 @@
                 </a:solidFill>
                 <a:latin typeface="Arial"/>
               </a:rPr>
-              <a:t>Values in tension: </a:t>
+              <a:t>Sources → values: the </a:t>
             </a:r>
             <a:r>
               <a:rPr sz="2000" b="1">
@@ -8676,7 +10420,7 @@
                 </a:solidFill>
                 <a:latin typeface="Arial"/>
               </a:rPr>
-              <a:t>safety</a:t>
+              <a:t>purpose</a:t>
             </a:r>
             <a:r>
               <a:rPr sz="2000" b="0">
@@ -8685,7 +10429,7 @@
                 </a:solidFill>
                 <a:latin typeface="Arial"/>
               </a:rPr>
-              <a:t> (catch the seizure) vs. </a:t>
+              <a:t> (let anyone RSVP) → access; the </a:t>
             </a:r>
             <a:r>
               <a:rPr sz="2000" b="1">
@@ -8694,7 +10438,7 @@
                 </a:solidFill>
                 <a:latin typeface="Arial"/>
               </a:rPr>
-              <a:t>privacy &amp; dignity</a:t>
+              <a:t>actors</a:t>
             </a:r>
             <a:r>
               <a:rPr sz="2000" b="0">
@@ -8703,7 +10447,25 @@
                 </a:solidFill>
                 <a:latin typeface="Arial"/>
               </a:rPr>
-              <a:t> (a camera always watching a person in their home).</a:t>
+              <a:t> (screen-reader users) → dignity; the </a:t>
+            </a:r>
+            <a:r>
+              <a:rPr sz="2000" b="1">
+                <a:solidFill>
+                  <a:srgbClr val="00FF41"/>
+                </a:solidFill>
+                <a:latin typeface="Arial"/>
+              </a:rPr>
+              <a:t>context</a:t>
+            </a:r>
+            <a:r>
+              <a:rPr sz="2000" b="0">
+                <a:solidFill>
+                  <a:srgbClr val="F5F7FA"/>
+                </a:solidFill>
+                <a:latin typeface="Arial"/>
+              </a:rPr>
+              <a:t> (you collect names) → privacy.</a:t>
             </a:r>
           </a:p>
         </p:txBody>
@@ -8807,7 +10569,7 @@
                 </a:solidFill>
                 <a:latin typeface="Courier New"/>
               </a:rPr>
-              <a:t>IMPLEMENTATION</a:t>
+              <a:t>EXAMPLE · REAL WORLD</a:t>
             </a:r>
           </a:p>
         </p:txBody>
@@ -8890,7 +10652,7 @@
                 </a:solidFill>
                 <a:latin typeface="Arial"/>
               </a:rPr>
-              <a:t>Translate values into the build</a:t>
+              <a:t>Discovery on a real system (YAI)</a:t>
             </a:r>
           </a:p>
         </p:txBody>
@@ -8929,16 +10691,75 @@
                 </a:solidFill>
                 <a:latin typeface="Arial"/>
               </a:rPr>
-              <a:t>Discovery names the values. Implementation puts them into features, architecture, and lines of code — and forces the hard part: </a:t>
-            </a:r>
-            <a:r>
-              <a:rPr sz="2200" b="1">
+              <a:t>A computer-vision tool that watches for seizures for people with disabilities.</a:t>
+            </a:r>
+          </a:p>
+          <a:p>
+            <a:pPr algn="l">
+              <a:lnSpc>
+                <a:spcPct val="112000"/>
+              </a:lnSpc>
+            </a:pPr>
+            <a:r>
+              <a:rPr sz="2000" b="0">
+                <a:solidFill>
+                  <a:srgbClr val="F5F7FA"/>
+                </a:solidFill>
+                <a:latin typeface="Arial"/>
+              </a:rPr>
+              <a:t/>
+            </a:r>
+          </a:p>
+          <a:p>
+            <a:pPr algn="l">
+              <a:lnSpc>
+                <a:spcPct val="112000"/>
+              </a:lnSpc>
+            </a:pPr>
+            <a:r>
+              <a:rPr sz="2000" b="0">
+                <a:solidFill>
+                  <a:srgbClr val="F5F7FA"/>
+                </a:solidFill>
+                <a:latin typeface="Arial"/>
+              </a:rPr>
+              <a:t>Values in tension: </a:t>
+            </a:r>
+            <a:r>
+              <a:rPr sz="2000" b="1">
                 <a:solidFill>
                   <a:srgbClr val="00FF41"/>
                 </a:solidFill>
                 <a:latin typeface="Arial"/>
               </a:rPr>
-              <a:t>what happens when two values collide?</a:t>
+              <a:t>safety</a:t>
+            </a:r>
+            <a:r>
+              <a:rPr sz="2000" b="0">
+                <a:solidFill>
+                  <a:srgbClr val="F5F7FA"/>
+                </a:solidFill>
+                <a:latin typeface="Arial"/>
+              </a:rPr>
+              <a:t> (catch the seizure) vs. </a:t>
+            </a:r>
+            <a:r>
+              <a:rPr sz="2000" b="1">
+                <a:solidFill>
+                  <a:srgbClr val="00FF41"/>
+                </a:solidFill>
+                <a:latin typeface="Arial"/>
+              </a:rPr>
+              <a:t>privacy &amp; dignity</a:t>
+            </a:r>
+            <a:r>
+              <a:rPr sz="2000" b="0">
+                <a:solidFill>
+                  <a:srgbClr val="F5F7FA"/>
+                </a:solidFill>
+                <a:latin typeface="Arial"/>
+              </a:rPr>
+              <a:t> (a camera always watching a person in their home).</a:t>
             </a:r>
           </a:p>
         </p:txBody>
@@ -9042,7 +10863,7 @@
                 </a:solidFill>
                 <a:latin typeface="Courier New"/>
               </a:rPr>
-              <a:t>VALUE CONFLICTS</a:t>
+              <a:t>IMPLEMENTATION</a:t>
             </a:r>
           </a:p>
         </p:txBody>
@@ -9100,7 +10921,7 @@
         <p:spPr>
           <a:xfrm>
             <a:off x="640080" y="1188720"/>
-            <a:ext cx="10972800" cy="914400"/>
+            <a:ext cx="10972800" cy="1097280"/>
           </a:xfrm>
           <a:prstGeom prst="rect">
             <a:avLst/>
@@ -9119,115 +10940,27 @@
               </a:lnSpc>
             </a:pPr>
             <a:r>
-              <a:rPr sz="3200" b="1">
+              <a:rPr sz="3400" b="1">
                 <a:solidFill>
                   <a:srgbClr val="F5F7FA"/>
                 </a:solidFill>
                 <a:latin typeface="Arial"/>
               </a:rPr>
-              <a:t>Three ways to resolve a clash</a:t>
-            </a:r>
-          </a:p>
-        </p:txBody>
-      </p:sp>
-      <p:sp>
-        <p:nvSpPr>
-          <p:cNvPr id="5" name="Rounded Rectangle 4"/>
-          <p:cNvSpPr/>
-          <p:nvPr/>
-        </p:nvSpPr>
-        <p:spPr>
-          <a:xfrm>
-            <a:off x="640080" y="2468880"/>
-            <a:ext cx="3393338" cy="3383280"/>
-          </a:xfrm>
-          <a:prstGeom prst="roundRect">
-            <a:avLst/>
-          </a:prstGeom>
-          <a:solidFill>
-            <a:srgbClr val="151B26"/>
-          </a:solidFill>
-          <a:ln>
-            <a:noFill/>
-          </a:ln>
-          <a:effectLst/>
-        </p:spPr>
-        <p:style>
-          <a:lnRef idx="1">
-            <a:schemeClr val="accent1"/>
-          </a:lnRef>
-          <a:fillRef idx="3">
-            <a:schemeClr val="accent1"/>
-          </a:fillRef>
-          <a:effectRef idx="2">
-            <a:schemeClr val="accent1"/>
-          </a:effectRef>
-          <a:fontRef idx="minor">
-            <a:schemeClr val="lt1"/>
-          </a:fontRef>
-        </p:style>
-        <p:txBody>
-          <a:bodyPr rtlCol="0" anchor="ctr"/>
-          <a:lstStyle/>
-          <a:p>
-            <a:pPr algn="ctr"/>
-          </a:p>
-        </p:txBody>
-      </p:sp>
-      <p:sp>
-        <p:nvSpPr>
-          <p:cNvPr id="6" name="Rectangle 5"/>
-          <p:cNvSpPr/>
-          <p:nvPr/>
-        </p:nvSpPr>
-        <p:spPr>
-          <a:xfrm>
-            <a:off x="640080" y="2468880"/>
-            <a:ext cx="3393338" cy="82296"/>
-          </a:xfrm>
-          <a:prstGeom prst="rect">
-            <a:avLst/>
-          </a:prstGeom>
-          <a:solidFill>
-            <a:srgbClr val="00FF41"/>
-          </a:solidFill>
-          <a:ln>
-            <a:noFill/>
-          </a:ln>
-          <a:effectLst/>
-        </p:spPr>
-        <p:style>
-          <a:lnRef idx="1">
-            <a:schemeClr val="accent1"/>
-          </a:lnRef>
-          <a:fillRef idx="3">
-            <a:schemeClr val="accent1"/>
-          </a:fillRef>
-          <a:effectRef idx="2">
-            <a:schemeClr val="accent1"/>
-          </a:effectRef>
-          <a:fontRef idx="minor">
-            <a:schemeClr val="lt1"/>
-          </a:fontRef>
-        </p:style>
-        <p:txBody>
-          <a:bodyPr rtlCol="0" anchor="ctr"/>
-          <a:lstStyle/>
-          <a:p>
-            <a:pPr algn="ctr"/>
-          </a:p>
-        </p:txBody>
-      </p:sp>
-      <p:sp>
-        <p:nvSpPr>
-          <p:cNvPr id="7" name="TextBox 6"/>
+              <a:t>Translate values into the build</a:t>
+            </a:r>
+          </a:p>
+        </p:txBody>
+      </p:sp>
+      <p:sp>
+        <p:nvSpPr>
+          <p:cNvPr id="5" name="TextBox 4"/>
           <p:cNvSpPr txBox="1"/>
           <p:nvPr/>
         </p:nvSpPr>
         <p:spPr>
           <a:xfrm>
-            <a:off x="914400" y="2788920"/>
-            <a:ext cx="2844698" cy="457200"/>
+            <a:off x="658368" y="2286000"/>
+            <a:ext cx="10881360" cy="3657600"/>
           </a:xfrm>
           <a:prstGeom prst="rect">
             <a:avLst/>
@@ -9242,512 +10975,33 @@
           <a:p>
             <a:pPr algn="l">
               <a:lnSpc>
-                <a:spcPct val="100000"/>
-              </a:lnSpc>
-            </a:pPr>
-            <a:r>
-              <a:rPr sz="1200" b="1">
+                <a:spcPct val="112000"/>
+              </a:lnSpc>
+            </a:pPr>
+            <a:r>
+              <a:rPr sz="2200" b="0">
+                <a:solidFill>
+                  <a:srgbClr val="F5F7FA"/>
+                </a:solidFill>
+                <a:latin typeface="Arial"/>
+              </a:rPr>
+              <a:t>Discovery names the values. Implementation puts them into features, architecture, and lines of code — and forces the hard part: </a:t>
+            </a:r>
+            <a:r>
+              <a:rPr sz="2200" b="1">
                 <a:solidFill>
                   <a:srgbClr val="00FF41"/>
                 </a:solidFill>
-                <a:latin typeface="Courier New"/>
-              </a:rPr>
-              <a:t>DISSOLVE</a:t>
-            </a:r>
-          </a:p>
-        </p:txBody>
-      </p:sp>
-      <p:sp>
-        <p:nvSpPr>
-          <p:cNvPr id="8" name="TextBox 7"/>
-          <p:cNvSpPr txBox="1"/>
-          <p:nvPr/>
-        </p:nvSpPr>
-        <p:spPr>
-          <a:xfrm>
-            <a:off x="914400" y="3246120"/>
-            <a:ext cx="2844698" cy="822960"/>
-          </a:xfrm>
-          <a:prstGeom prst="rect">
-            <a:avLst/>
-          </a:prstGeom>
-          <a:noFill/>
-        </p:spPr>
-        <p:txBody>
-          <a:bodyPr wrap="square" anchor="t">
-            <a:spAutoFit/>
-          </a:bodyPr>
-          <a:lstStyle/>
-          <a:p>
-            <a:pPr algn="l">
-              <a:lnSpc>
-                <a:spcPct val="100000"/>
-              </a:lnSpc>
-            </a:pPr>
-            <a:r>
-              <a:rPr sz="2000" b="1">
-                <a:solidFill>
-                  <a:srgbClr val="F5F7FA"/>
-                </a:solidFill>
-                <a:latin typeface="Arial"/>
-              </a:rPr>
-              <a:t>Both, fully</a:t>
-            </a:r>
-          </a:p>
-        </p:txBody>
-      </p:sp>
-      <p:sp>
-        <p:nvSpPr>
-          <p:cNvPr id="9" name="TextBox 8"/>
-          <p:cNvSpPr txBox="1"/>
-          <p:nvPr/>
-        </p:nvSpPr>
-        <p:spPr>
-          <a:xfrm>
-            <a:off x="914400" y="4114800"/>
-            <a:ext cx="2844698" cy="1554480"/>
-          </a:xfrm>
-          <a:prstGeom prst="rect">
-            <a:avLst/>
-          </a:prstGeom>
-          <a:noFill/>
-        </p:spPr>
-        <p:txBody>
-          <a:bodyPr wrap="square" anchor="t">
-            <a:spAutoFit/>
-          </a:bodyPr>
-          <a:lstStyle/>
-          <a:p>
-            <a:pPr algn="l">
-              <a:lnSpc>
-                <a:spcPct val="110000"/>
-              </a:lnSpc>
-            </a:pPr>
-            <a:r>
-              <a:rPr sz="1500" b="0">
-                <a:solidFill>
-                  <a:srgbClr val="8A94A6"/>
-                </a:solidFill>
-                <a:latin typeface="Arial"/>
-              </a:rPr>
-              <a:t>Redesign so the conflict disappears — no one loses.</a:t>
-            </a:r>
-          </a:p>
-        </p:txBody>
-      </p:sp>
-      <p:sp>
-        <p:nvSpPr>
-          <p:cNvPr id="10" name="Rounded Rectangle 9"/>
-          <p:cNvSpPr/>
-          <p:nvPr/>
-        </p:nvSpPr>
-        <p:spPr>
-          <a:xfrm>
-            <a:off x="4399178" y="2468880"/>
-            <a:ext cx="3393338" cy="3383280"/>
-          </a:xfrm>
-          <a:prstGeom prst="roundRect">
-            <a:avLst/>
-          </a:prstGeom>
-          <a:solidFill>
-            <a:srgbClr val="151B26"/>
-          </a:solidFill>
-          <a:ln>
-            <a:noFill/>
-          </a:ln>
-          <a:effectLst/>
-        </p:spPr>
-        <p:style>
-          <a:lnRef idx="1">
-            <a:schemeClr val="accent1"/>
-          </a:lnRef>
-          <a:fillRef idx="3">
-            <a:schemeClr val="accent1"/>
-          </a:fillRef>
-          <a:effectRef idx="2">
-            <a:schemeClr val="accent1"/>
-          </a:effectRef>
-          <a:fontRef idx="minor">
-            <a:schemeClr val="lt1"/>
-          </a:fontRef>
-        </p:style>
-        <p:txBody>
-          <a:bodyPr rtlCol="0" anchor="ctr"/>
-          <a:lstStyle/>
-          <a:p>
-            <a:pPr algn="ctr"/>
-          </a:p>
-        </p:txBody>
-      </p:sp>
-      <p:sp>
-        <p:nvSpPr>
-          <p:cNvPr id="11" name="Rectangle 10"/>
-          <p:cNvSpPr/>
-          <p:nvPr/>
-        </p:nvSpPr>
-        <p:spPr>
-          <a:xfrm>
-            <a:off x="4399178" y="2468880"/>
-            <a:ext cx="3393338" cy="82296"/>
-          </a:xfrm>
-          <a:prstGeom prst="rect">
-            <a:avLst/>
-          </a:prstGeom>
-          <a:solidFill>
-            <a:srgbClr val="00FF41"/>
-          </a:solidFill>
-          <a:ln>
-            <a:noFill/>
-          </a:ln>
-          <a:effectLst/>
-        </p:spPr>
-        <p:style>
-          <a:lnRef idx="1">
-            <a:schemeClr val="accent1"/>
-          </a:lnRef>
-          <a:fillRef idx="3">
-            <a:schemeClr val="accent1"/>
-          </a:fillRef>
-          <a:effectRef idx="2">
-            <a:schemeClr val="accent1"/>
-          </a:effectRef>
-          <a:fontRef idx="minor">
-            <a:schemeClr val="lt1"/>
-          </a:fontRef>
-        </p:style>
-        <p:txBody>
-          <a:bodyPr rtlCol="0" anchor="ctr"/>
-          <a:lstStyle/>
-          <a:p>
-            <a:pPr algn="ctr"/>
-          </a:p>
-        </p:txBody>
-      </p:sp>
-      <p:sp>
-        <p:nvSpPr>
-          <p:cNvPr id="12" name="TextBox 11"/>
-          <p:cNvSpPr txBox="1"/>
-          <p:nvPr/>
-        </p:nvSpPr>
-        <p:spPr>
-          <a:xfrm>
-            <a:off x="4673498" y="2788920"/>
-            <a:ext cx="2844698" cy="457200"/>
-          </a:xfrm>
-          <a:prstGeom prst="rect">
-            <a:avLst/>
-          </a:prstGeom>
-          <a:noFill/>
-        </p:spPr>
-        <p:txBody>
-          <a:bodyPr wrap="square" anchor="t">
-            <a:spAutoFit/>
-          </a:bodyPr>
-          <a:lstStyle/>
-          <a:p>
-            <a:pPr algn="l">
-              <a:lnSpc>
-                <a:spcPct val="100000"/>
-              </a:lnSpc>
-            </a:pPr>
-            <a:r>
-              <a:rPr sz="1200" b="1">
-                <a:solidFill>
-                  <a:srgbClr val="00FF41"/>
-                </a:solidFill>
-                <a:latin typeface="Courier New"/>
-              </a:rPr>
-              <a:t>COMPROMISE</a:t>
-            </a:r>
-          </a:p>
-        </p:txBody>
-      </p:sp>
-      <p:sp>
-        <p:nvSpPr>
-          <p:cNvPr id="13" name="TextBox 12"/>
-          <p:cNvSpPr txBox="1"/>
-          <p:nvPr/>
-        </p:nvSpPr>
-        <p:spPr>
-          <a:xfrm>
-            <a:off x="4673498" y="3246120"/>
-            <a:ext cx="2844698" cy="822960"/>
-          </a:xfrm>
-          <a:prstGeom prst="rect">
-            <a:avLst/>
-          </a:prstGeom>
-          <a:noFill/>
-        </p:spPr>
-        <p:txBody>
-          <a:bodyPr wrap="square" anchor="t">
-            <a:spAutoFit/>
-          </a:bodyPr>
-          <a:lstStyle/>
-          <a:p>
-            <a:pPr algn="l">
-              <a:lnSpc>
-                <a:spcPct val="100000"/>
-              </a:lnSpc>
-            </a:pPr>
-            <a:r>
-              <a:rPr sz="2000" b="1">
-                <a:solidFill>
-                  <a:srgbClr val="F5F7FA"/>
-                </a:solidFill>
-                <a:latin typeface="Arial"/>
-              </a:rPr>
-              <a:t>Both, partly</a:t>
-            </a:r>
-          </a:p>
-        </p:txBody>
-      </p:sp>
-      <p:sp>
-        <p:nvSpPr>
-          <p:cNvPr id="14" name="TextBox 13"/>
-          <p:cNvSpPr txBox="1"/>
-          <p:nvPr/>
-        </p:nvSpPr>
-        <p:spPr>
-          <a:xfrm>
-            <a:off x="4673498" y="4114800"/>
-            <a:ext cx="2844698" cy="1554480"/>
-          </a:xfrm>
-          <a:prstGeom prst="rect">
-            <a:avLst/>
-          </a:prstGeom>
-          <a:noFill/>
-        </p:spPr>
-        <p:txBody>
-          <a:bodyPr wrap="square" anchor="t">
-            <a:spAutoFit/>
-          </a:bodyPr>
-          <a:lstStyle/>
-          <a:p>
-            <a:pPr algn="l">
-              <a:lnSpc>
-                <a:spcPct val="110000"/>
-              </a:lnSpc>
-            </a:pPr>
-            <a:r>
-              <a:rPr sz="1500" b="0">
-                <a:solidFill>
-                  <a:srgbClr val="8A94A6"/>
-                </a:solidFill>
-                <a:latin typeface="Arial"/>
-              </a:rPr>
-              <a:t>Promote each value, but in less than full measure.</a:t>
-            </a:r>
-          </a:p>
-        </p:txBody>
-      </p:sp>
-      <p:sp>
-        <p:nvSpPr>
-          <p:cNvPr id="15" name="Rounded Rectangle 14"/>
-          <p:cNvSpPr/>
-          <p:nvPr/>
-        </p:nvSpPr>
-        <p:spPr>
-          <a:xfrm>
-            <a:off x="8158276" y="2468880"/>
-            <a:ext cx="3393338" cy="3383280"/>
-          </a:xfrm>
-          <a:prstGeom prst="roundRect">
-            <a:avLst/>
-          </a:prstGeom>
-          <a:solidFill>
-            <a:srgbClr val="151B26"/>
-          </a:solidFill>
-          <a:ln>
-            <a:noFill/>
-          </a:ln>
-          <a:effectLst/>
-        </p:spPr>
-        <p:style>
-          <a:lnRef idx="1">
-            <a:schemeClr val="accent1"/>
-          </a:lnRef>
-          <a:fillRef idx="3">
-            <a:schemeClr val="accent1"/>
-          </a:fillRef>
-          <a:effectRef idx="2">
-            <a:schemeClr val="accent1"/>
-          </a:effectRef>
-          <a:fontRef idx="minor">
-            <a:schemeClr val="lt1"/>
-          </a:fontRef>
-        </p:style>
-        <p:txBody>
-          <a:bodyPr rtlCol="0" anchor="ctr"/>
-          <a:lstStyle/>
-          <a:p>
-            <a:pPr algn="ctr"/>
-          </a:p>
-        </p:txBody>
-      </p:sp>
-      <p:sp>
-        <p:nvSpPr>
-          <p:cNvPr id="16" name="Rectangle 15"/>
-          <p:cNvSpPr/>
-          <p:nvPr/>
-        </p:nvSpPr>
-        <p:spPr>
-          <a:xfrm>
-            <a:off x="8158276" y="2468880"/>
-            <a:ext cx="3393338" cy="82296"/>
-          </a:xfrm>
-          <a:prstGeom prst="rect">
-            <a:avLst/>
-          </a:prstGeom>
-          <a:solidFill>
-            <a:srgbClr val="00FF41"/>
-          </a:solidFill>
-          <a:ln>
-            <a:noFill/>
-          </a:ln>
-          <a:effectLst/>
-        </p:spPr>
-        <p:style>
-          <a:lnRef idx="1">
-            <a:schemeClr val="accent1"/>
-          </a:lnRef>
-          <a:fillRef idx="3">
-            <a:schemeClr val="accent1"/>
-          </a:fillRef>
-          <a:effectRef idx="2">
-            <a:schemeClr val="accent1"/>
-          </a:effectRef>
-          <a:fontRef idx="minor">
-            <a:schemeClr val="lt1"/>
-          </a:fontRef>
-        </p:style>
-        <p:txBody>
-          <a:bodyPr rtlCol="0" anchor="ctr"/>
-          <a:lstStyle/>
-          <a:p>
-            <a:pPr algn="ctr"/>
-          </a:p>
-        </p:txBody>
-      </p:sp>
-      <p:sp>
-        <p:nvSpPr>
-          <p:cNvPr id="17" name="TextBox 16"/>
-          <p:cNvSpPr txBox="1"/>
-          <p:nvPr/>
-        </p:nvSpPr>
-        <p:spPr>
-          <a:xfrm>
-            <a:off x="8432596" y="2788920"/>
-            <a:ext cx="2844698" cy="457200"/>
-          </a:xfrm>
-          <a:prstGeom prst="rect">
-            <a:avLst/>
-          </a:prstGeom>
-          <a:noFill/>
-        </p:spPr>
-        <p:txBody>
-          <a:bodyPr wrap="square" anchor="t">
-            <a:spAutoFit/>
-          </a:bodyPr>
-          <a:lstStyle/>
-          <a:p>
-            <a:pPr algn="l">
-              <a:lnSpc>
-                <a:spcPct val="100000"/>
-              </a:lnSpc>
-            </a:pPr>
-            <a:r>
-              <a:rPr sz="1200" b="1">
-                <a:solidFill>
-                  <a:srgbClr val="00FF41"/>
-                </a:solidFill>
-                <a:latin typeface="Courier New"/>
-              </a:rPr>
-              <a:t>TRADE-OFF</a:t>
-            </a:r>
-          </a:p>
-        </p:txBody>
-      </p:sp>
-      <p:sp>
-        <p:nvSpPr>
-          <p:cNvPr id="18" name="TextBox 17"/>
-          <p:cNvSpPr txBox="1"/>
-          <p:nvPr/>
-        </p:nvSpPr>
-        <p:spPr>
-          <a:xfrm>
-            <a:off x="8432596" y="3246120"/>
-            <a:ext cx="2844698" cy="822960"/>
-          </a:xfrm>
-          <a:prstGeom prst="rect">
-            <a:avLst/>
-          </a:prstGeom>
-          <a:noFill/>
-        </p:spPr>
-        <p:txBody>
-          <a:bodyPr wrap="square" anchor="t">
-            <a:spAutoFit/>
-          </a:bodyPr>
-          <a:lstStyle/>
-          <a:p>
-            <a:pPr algn="l">
-              <a:lnSpc>
-                <a:spcPct val="100000"/>
-              </a:lnSpc>
-            </a:pPr>
-            <a:r>
-              <a:rPr sz="2000" b="1">
-                <a:solidFill>
-                  <a:srgbClr val="F5F7FA"/>
-                </a:solidFill>
-                <a:latin typeface="Arial"/>
-              </a:rPr>
-              <a:t>One over another</a:t>
-            </a:r>
-          </a:p>
-        </p:txBody>
-      </p:sp>
-      <p:sp>
-        <p:nvSpPr>
-          <p:cNvPr id="19" name="TextBox 18"/>
-          <p:cNvSpPr txBox="1"/>
-          <p:nvPr/>
-        </p:nvSpPr>
-        <p:spPr>
-          <a:xfrm>
-            <a:off x="8432596" y="4114800"/>
-            <a:ext cx="2844698" cy="1554480"/>
-          </a:xfrm>
-          <a:prstGeom prst="rect">
-            <a:avLst/>
-          </a:prstGeom>
-          <a:noFill/>
-        </p:spPr>
-        <p:txBody>
-          <a:bodyPr wrap="square" anchor="t">
-            <a:spAutoFit/>
-          </a:bodyPr>
-          <a:lstStyle/>
-          <a:p>
-            <a:pPr algn="l">
-              <a:lnSpc>
-                <a:spcPct val="110000"/>
-              </a:lnSpc>
-            </a:pPr>
-            <a:r>
-              <a:rPr sz="1500" b="0">
-                <a:solidFill>
-                  <a:srgbClr val="8A94A6"/>
-                </a:solidFill>
-                <a:latin typeface="Arial"/>
-              </a:rPr>
-              <a:t>Sacrifice one value for another — and name the cost.</a:t>
-            </a:r>
-          </a:p>
-        </p:txBody>
-      </p:sp>
-      <p:sp>
-        <p:nvSpPr>
-          <p:cNvPr id="20" name="TextBox 19"/>
+                <a:latin typeface="Arial"/>
+              </a:rPr>
+              <a:t>what happens when two values collide?</a:t>
+            </a:r>
+          </a:p>
+        </p:txBody>
+      </p:sp>
+      <p:sp>
+        <p:nvSpPr>
+          <p:cNvPr id="6" name="TextBox 5"/>
           <p:cNvSpPr txBox="1"/>
           <p:nvPr/>
         </p:nvSpPr>

--- a/slides/Week3-Tue-User-Testing-II.pptx
+++ b/slides/Week3-Tue-User-Testing-II.pptx
@@ -1007,7 +1007,7 @@
           <a:lstStyle/>
           <a:p>
             <a:r>
-              <a:t>Phase 1, in planning.md BEFORE anyone prompts: the three answers, plus the verbatim value-centered prompts the team intends to run for today's iteration. A template is provided in week3/7_28/.</a:t>
+              <a:t>Phase 1, in planning.md BEFORE anyone prompts. Operationalization is the move students skip: the same value word means different things, and the definition has to go INTO the prompt or the AI supplies its own. Template in week3/7_28/planning-template.md.</a:t>
             </a:r>
           </a:p>
         </p:txBody>
@@ -5894,7 +5894,7 @@
                 </a:solidFill>
                 <a:latin typeface="Arial"/>
               </a:rPr>
-              <a:t>planning.md — the 3-question values check + your prompts</a:t>
+              <a:t>planning.md — the values check + your prompts</a:t>
             </a:r>
           </a:p>
         </p:txBody>
@@ -5976,7 +5976,7 @@
                 </a:solidFill>
                 <a:latin typeface="Arial"/>
               </a:rPr>
-              <a:t>Who’s it for — who’s left out?  </a:t>
+              <a:t>What does it MEAN here?  </a:t>
             </a:r>
             <a:r>
               <a:rPr sz="1400" b="0">
@@ -5985,7 +5985,7 @@
                 </a:solidFill>
                 <a:latin typeface="Arial"/>
               </a:rPr>
-              <a:t>who it serves, and who it could exclude or harm</a:t>
+              <a:t>operationalize it — privacy as control? secrecy? contextual integrity?</a:t>
             </a:r>
           </a:p>
         </p:txBody>
@@ -6025,6 +6025,40 @@
                 <a:latin typeface="Courier New"/>
               </a:rPr>
               <a:t>03  </a:t>
+            </a:r>
+            <a:r>
+              <a:rPr sz="1600" b="1">
+                <a:solidFill>
+                  <a:srgbClr val="F5F7FA"/>
+                </a:solidFill>
+                <a:latin typeface="Arial"/>
+              </a:rPr>
+              <a:t>Who’s it for — who’s left out?  </a:t>
+            </a:r>
+            <a:r>
+              <a:rPr sz="1400" b="0">
+                <a:solidFill>
+                  <a:srgbClr val="8A94A6"/>
+                </a:solidFill>
+                <a:latin typeface="Arial"/>
+              </a:rPr>
+              <a:t>who it serves, and who it could exclude or harm</a:t>
+            </a:r>
+          </a:p>
+          <a:p>
+            <a:pPr algn="l">
+              <a:lnSpc>
+                <a:spcPct val="135000"/>
+              </a:lnSpc>
+            </a:pPr>
+            <a:r>
+              <a:rPr sz="1500" b="1">
+                <a:solidFill>
+                  <a:srgbClr val="00FF41"/>
+                </a:solidFill>
+                <a:latin typeface="Courier New"/>
+              </a:rPr>
+              <a:t>04  </a:t>
             </a:r>
             <a:r>
               <a:rPr sz="1600" b="1">
@@ -8408,7 +8442,7 @@
                 </a:solidFill>
                 <a:latin typeface="Arial"/>
               </a:rPr>
-              <a:t>Name the value, who it's for, how you'd know — and write the exact prompts you'll run. Verbatim. Before running them.</a:t>
+              <a:t>Name the value, define what it MEANS here, who it's for, how you'd know — and write the exact prompts you'll run. Verbatim. Before running them.</a:t>
             </a:r>
           </a:p>
         </p:txBody>

--- a/slides/Week3-Tue-User-Testing-II.pptx
+++ b/slides/Week3-Tue-User-Testing-II.pptx
@@ -8,19 +8,17 @@
     <p:sldId id="256" r:id="rId7"/>
     <p:sldId id="257" r:id="rId8"/>
     <p:sldId id="258" r:id="rId9"/>
-    <p:sldId id="259" r:id="rId11"/>
-    <p:sldId id="260" r:id="rId12"/>
-    <p:sldId id="261" r:id="rId13"/>
-    <p:sldId id="262" r:id="rId14"/>
-    <p:sldId id="263" r:id="rId15"/>
-    <p:sldId id="264" r:id="rId16"/>
-    <p:sldId id="265" r:id="rId17"/>
-    <p:sldId id="266" r:id="rId18"/>
-    <p:sldId id="267" r:id="rId19"/>
-    <p:sldId id="268" r:id="rId20"/>
+    <p:sldId id="259" r:id="rId10"/>
+    <p:sldId id="260" r:id="rId11"/>
+    <p:sldId id="261" r:id="rId12"/>
+    <p:sldId id="262" r:id="rId13"/>
+    <p:sldId id="263" r:id="rId14"/>
+    <p:sldId id="264" r:id="rId15"/>
+    <p:sldId id="265" r:id="rId16"/>
+    <p:sldId id="266" r:id="rId17"/>
+    <p:sldId id="267" r:id="rId18"/>
+    <p:sldId id="268" r:id="rId19"/>
     <p:sldId id="269" r:id="rId21"/>
-    <p:sldId id="270" r:id="rId22"/>
-    <p:sldId id="271" r:id="rId23"/>
   </p:sldIdLst>
   <p:sldSz cx="12191695" cy="6858000" type="screen4x3"/>
   <p:notesSz cx="6858000" cy="9144000"/>
@@ -517,637 +515,7 @@
           <a:lstStyle/>
           <a:p>
             <a:r>
-              <a:t>Recap from Week 2 Monday's teaser — now we go deeper on Discovery and Implementation.</a:t>
-            </a:r>
-          </a:p>
-        </p:txBody>
-      </p:sp>
-      <p:sp>
-        <p:nvSpPr>
-          <p:cNvPr id="4" name="Slide Number Placeholder 3"/>
-          <p:cNvSpPr>
-            <a:spLocks noGrp="1"/>
-          </p:cNvSpPr>
-          <p:nvPr>
-            <p:ph type="sldNum" idx="5" sz="quarter"/>
-          </p:nvPr>
-        </p:nvSpPr>
-        <p:spPr/>
-      </p:sp>
-    </p:spTree>
-  </p:cSld>
-  <p:clrMapOvr>
-    <a:masterClrMapping/>
-  </p:clrMapOvr>
-</p:notes>
-</file>
-
-<file path=ppt/notesSlides/notesSlide10.xml><?xml version="1.0" encoding="utf-8"?>
-<p:notes xmlns:a="http://schemas.openxmlformats.org/drawingml/2006/main" xmlns:p="http://schemas.openxmlformats.org/presentationml/2006/main" xmlns:r="http://schemas.openxmlformats.org/officeDocument/2006/relationships">
-  <p:cSld>
-    <p:spTree>
-      <p:nvGrpSpPr>
-        <p:cNvPr id="1" name=""/>
-        <p:cNvGrpSpPr/>
-        <p:nvPr/>
-      </p:nvGrpSpPr>
-      <p:grpSpPr>
-        <a:xfrm>
-          <a:off x="0" y="0"/>
-          <a:ext cx="0" cy="0"/>
-          <a:chOff x="0" y="0"/>
-          <a:chExt cx="0" cy="0"/>
-        </a:xfrm>
-      </p:grpSpPr>
-      <p:sp>
-        <p:nvSpPr>
-          <p:cNvPr id="2" name="Slide Image Placeholder 1"/>
-          <p:cNvSpPr>
-            <a:spLocks noGrp="1"/>
-          </p:cNvSpPr>
-          <p:nvPr>
-            <p:ph type="sldImg" idx="2"/>
-          </p:nvPr>
-        </p:nvSpPr>
-        <p:spPr/>
-      </p:sp>
-      <p:sp>
-        <p:nvSpPr>
-          <p:cNvPr id="3" name="Notes Placeholder 2"/>
-          <p:cNvSpPr>
-            <a:spLocks noGrp="1"/>
-          </p:cNvSpPr>
-          <p:nvPr>
-            <p:ph type="body" idx="3" sz="quarter"/>
-          </p:nvPr>
-        </p:nvSpPr>
-        <p:spPr/>
-        <p:txBody>
-          <a:bodyPr/>
-          <a:lstStyle/>
-          <a:p>
-            <a:r>
-              <a:t>The VAP deck's 'most critical finding'. Gives the session intellectual honesty and connects straight to the peer-testing activity.</a:t>
-            </a:r>
-          </a:p>
-        </p:txBody>
-      </p:sp>
-      <p:sp>
-        <p:nvSpPr>
-          <p:cNvPr id="4" name="Slide Number Placeholder 3"/>
-          <p:cNvSpPr>
-            <a:spLocks noGrp="1"/>
-          </p:cNvSpPr>
-          <p:nvPr>
-            <p:ph type="sldNum" idx="5" sz="quarter"/>
-          </p:nvPr>
-        </p:nvSpPr>
-        <p:spPr/>
-      </p:sp>
-    </p:spTree>
-  </p:cSld>
-  <p:clrMapOvr>
-    <a:masterClrMapping/>
-  </p:clrMapOvr>
-</p:notes>
-</file>
-
-<file path=ppt/notesSlides/notesSlide2.xml><?xml version="1.0" encoding="utf-8"?>
-<p:notes xmlns:a="http://schemas.openxmlformats.org/drawingml/2006/main" xmlns:p="http://schemas.openxmlformats.org/presentationml/2006/main" xmlns:r="http://schemas.openxmlformats.org/officeDocument/2006/relationships">
-  <p:cSld>
-    <p:spTree>
-      <p:nvGrpSpPr>
-        <p:cNvPr id="1" name=""/>
-        <p:cNvGrpSpPr/>
-        <p:nvPr/>
-      </p:nvGrpSpPr>
-      <p:grpSpPr>
-        <a:xfrm>
-          <a:off x="0" y="0"/>
-          <a:ext cx="0" cy="0"/>
-          <a:chOff x="0" y="0"/>
-          <a:chExt cx="0" cy="0"/>
-        </a:xfrm>
-      </p:grpSpPr>
-      <p:sp>
-        <p:nvSpPr>
-          <p:cNvPr id="2" name="Slide Image Placeholder 1"/>
-          <p:cNvSpPr>
-            <a:spLocks noGrp="1"/>
-          </p:cNvSpPr>
-          <p:nvPr>
-            <p:ph type="sldImg" idx="2"/>
-          </p:nvPr>
-        </p:nvSpPr>
-        <p:spPr/>
-      </p:sp>
-      <p:sp>
-        <p:nvSpPr>
-          <p:cNvPr id="3" name="Notes Placeholder 2"/>
-          <p:cNvSpPr>
-            <a:spLocks noGrp="1"/>
-          </p:cNvSpPr>
-          <p:nvPr>
-            <p:ph type="body" idx="3" sz="quarter"/>
-          </p:nvPr>
-        </p:nvSpPr>
-        <p:spPr/>
-        <p:txBody>
-          <a:bodyPr/>
-          <a:lstStyle/>
-          <a:p>
-            <a:r>
-              <a:t>The session's spine: VAP translated into the vibe-coding workflow. Writing value-centered prompts BEFORE running them is Discovery→Implementation made checkable; the log shows whether you stuck to the plan.</a:t>
-            </a:r>
-          </a:p>
-        </p:txBody>
-      </p:sp>
-      <p:sp>
-        <p:nvSpPr>
-          <p:cNvPr id="4" name="Slide Number Placeholder 3"/>
-          <p:cNvSpPr>
-            <a:spLocks noGrp="1"/>
-          </p:cNvSpPr>
-          <p:nvPr>
-            <p:ph type="sldNum" idx="5" sz="quarter"/>
-          </p:nvPr>
-        </p:nvSpPr>
-        <p:spPr/>
-      </p:sp>
-    </p:spTree>
-  </p:cSld>
-  <p:clrMapOvr>
-    <a:masterClrMapping/>
-  </p:clrMapOvr>
-</p:notes>
-</file>
-
-<file path=ppt/notesSlides/notesSlide3.xml><?xml version="1.0" encoding="utf-8"?>
-<p:notes xmlns:a="http://schemas.openxmlformats.org/drawingml/2006/main" xmlns:p="http://schemas.openxmlformats.org/presentationml/2006/main" xmlns:r="http://schemas.openxmlformats.org/officeDocument/2006/relationships">
-  <p:cSld>
-    <p:spTree>
-      <p:nvGrpSpPr>
-        <p:cNvPr id="1" name=""/>
-        <p:cNvGrpSpPr/>
-        <p:nvPr/>
-      </p:nvGrpSpPr>
-      <p:grpSpPr>
-        <a:xfrm>
-          <a:off x="0" y="0"/>
-          <a:ext cx="0" cy="0"/>
-          <a:chOff x="0" y="0"/>
-          <a:chExt cx="0" cy="0"/>
-        </a:xfrm>
-      </p:grpSpPr>
-      <p:sp>
-        <p:nvSpPr>
-          <p:cNvPr id="2" name="Slide Image Placeholder 1"/>
-          <p:cNvSpPr>
-            <a:spLocks noGrp="1"/>
-          </p:cNvSpPr>
-          <p:nvPr>
-            <p:ph type="sldImg" idx="2"/>
-          </p:nvPr>
-        </p:nvSpPr>
-        <p:spPr/>
-      </p:sp>
-      <p:sp>
-        <p:nvSpPr>
-          <p:cNvPr id="3" name="Notes Placeholder 2"/>
-          <p:cNvSpPr>
-            <a:spLocks noGrp="1"/>
-          </p:cNvSpPr>
-          <p:nvPr>
-            <p:ph type="body" idx="3" sz="quarter"/>
-          </p:nvPr>
-        </p:nvSpPr>
-        <p:spPr/>
-        <p:txBody>
-          <a:bodyPr/>
-          <a:lstStyle/>
-          <a:p>
-            <a:r>
-              <a:t>VAP Discovery heuristic (Ch. 5). Trace each source to the values it carries in.</a:t>
-            </a:r>
-          </a:p>
-        </p:txBody>
-      </p:sp>
-      <p:sp>
-        <p:nvSpPr>
-          <p:cNvPr id="4" name="Slide Number Placeholder 3"/>
-          <p:cNvSpPr>
-            <a:spLocks noGrp="1"/>
-          </p:cNvSpPr>
-          <p:nvPr>
-            <p:ph type="sldNum" idx="5" sz="quarter"/>
-          </p:nvPr>
-        </p:nvSpPr>
-        <p:spPr/>
-      </p:sp>
-    </p:spTree>
-  </p:cSld>
-  <p:clrMapOvr>
-    <a:masterClrMapping/>
-  </p:clrMapOvr>
-</p:notes>
-</file>
-
-<file path=ppt/notesSlides/notesSlide4.xml><?xml version="1.0" encoding="utf-8"?>
-<p:notes xmlns:a="http://schemas.openxmlformats.org/drawingml/2006/main" xmlns:p="http://schemas.openxmlformats.org/presentationml/2006/main" xmlns:r="http://schemas.openxmlformats.org/officeDocument/2006/relationships">
-  <p:cSld>
-    <p:spTree>
-      <p:nvGrpSpPr>
-        <p:cNvPr id="1" name=""/>
-        <p:cNvGrpSpPr/>
-        <p:nvPr/>
-      </p:nvGrpSpPr>
-      <p:grpSpPr>
-        <a:xfrm>
-          <a:off x="0" y="0"/>
-          <a:ext cx="0" cy="0"/>
-          <a:chOff x="0" y="0"/>
-          <a:chExt cx="0" cy="0"/>
-        </a:xfrm>
-      </p:grpSpPr>
-      <p:sp>
-        <p:nvSpPr>
-          <p:cNvPr id="2" name="Slide Image Placeholder 1"/>
-          <p:cNvSpPr>
-            <a:spLocks noGrp="1"/>
-          </p:cNvSpPr>
-          <p:nvPr>
-            <p:ph type="sldImg" idx="2"/>
-          </p:nvPr>
-        </p:nvSpPr>
-        <p:spPr/>
-      </p:sp>
-      <p:sp>
-        <p:nvSpPr>
-          <p:cNvPr id="3" name="Notes Placeholder 2"/>
-          <p:cNvSpPr>
-            <a:spLocks noGrp="1"/>
-          </p:cNvSpPr>
-          <p:nvPr>
-            <p:ph type="body" idx="3" sz="quarter"/>
-          </p:nvPr>
-        </p:nvSpPr>
-        <p:spPr/>
-        <p:txBody>
-          <a:bodyPr/>
-          <a:lstStyle/>
-          <a:p>
-            <a:r>
-              <a:t>Hauke's own PiTech case (YAI). Real example of a genuine value conflict — sets up Implementation.</a:t>
-            </a:r>
-          </a:p>
-        </p:txBody>
-      </p:sp>
-      <p:sp>
-        <p:nvSpPr>
-          <p:cNvPr id="4" name="Slide Number Placeholder 3"/>
-          <p:cNvSpPr>
-            <a:spLocks noGrp="1"/>
-          </p:cNvSpPr>
-          <p:nvPr>
-            <p:ph type="sldNum" idx="5" sz="quarter"/>
-          </p:nvPr>
-        </p:nvSpPr>
-        <p:spPr/>
-      </p:sp>
-    </p:spTree>
-  </p:cSld>
-  <p:clrMapOvr>
-    <a:masterClrMapping/>
-  </p:clrMapOvr>
-</p:notes>
-</file>
-
-<file path=ppt/notesSlides/notesSlide5.xml><?xml version="1.0" encoding="utf-8"?>
-<p:notes xmlns:a="http://schemas.openxmlformats.org/drawingml/2006/main" xmlns:p="http://schemas.openxmlformats.org/presentationml/2006/main" xmlns:r="http://schemas.openxmlformats.org/officeDocument/2006/relationships">
-  <p:cSld>
-    <p:spTree>
-      <p:nvGrpSpPr>
-        <p:cNvPr id="1" name=""/>
-        <p:cNvGrpSpPr/>
-        <p:nvPr/>
-      </p:nvGrpSpPr>
-      <p:grpSpPr>
-        <a:xfrm>
-          <a:off x="0" y="0"/>
-          <a:ext cx="0" cy="0"/>
-          <a:chOff x="0" y="0"/>
-          <a:chExt cx="0" cy="0"/>
-        </a:xfrm>
-      </p:grpSpPr>
-      <p:sp>
-        <p:nvSpPr>
-          <p:cNvPr id="2" name="Slide Image Placeholder 1"/>
-          <p:cNvSpPr>
-            <a:spLocks noGrp="1"/>
-          </p:cNvSpPr>
-          <p:nvPr>
-            <p:ph type="sldImg" idx="2"/>
-          </p:nvPr>
-        </p:nvSpPr>
-        <p:spPr/>
-      </p:sp>
-      <p:sp>
-        <p:nvSpPr>
-          <p:cNvPr id="3" name="Notes Placeholder 2"/>
-          <p:cNvSpPr>
-            <a:spLocks noGrp="1"/>
-          </p:cNvSpPr>
-          <p:nvPr>
-            <p:ph type="body" idx="3" sz="quarter"/>
-          </p:nvPr>
-        </p:nvSpPr>
-        <p:spPr/>
-        <p:txBody>
-          <a:bodyPr/>
-          <a:lstStyle/>
-          <a:p>
-            <a:r>
-              <a:t>van de Poel / VAP. The goal is to reach for Dissolve first, and to make Trade-offs explicit.</a:t>
-            </a:r>
-          </a:p>
-        </p:txBody>
-      </p:sp>
-      <p:sp>
-        <p:nvSpPr>
-          <p:cNvPr id="4" name="Slide Number Placeholder 3"/>
-          <p:cNvSpPr>
-            <a:spLocks noGrp="1"/>
-          </p:cNvSpPr>
-          <p:nvPr>
-            <p:ph type="sldNum" idx="5" sz="quarter"/>
-          </p:nvPr>
-        </p:nvSpPr>
-        <p:spPr/>
-      </p:sp>
-    </p:spTree>
-  </p:cSld>
-  <p:clrMapOvr>
-    <a:masterClrMapping/>
-  </p:clrMapOvr>
-</p:notes>
-</file>
-
-<file path=ppt/notesSlides/notesSlide6.xml><?xml version="1.0" encoding="utf-8"?>
-<p:notes xmlns:a="http://schemas.openxmlformats.org/drawingml/2006/main" xmlns:p="http://schemas.openxmlformats.org/presentationml/2006/main" xmlns:r="http://schemas.openxmlformats.org/officeDocument/2006/relationships">
-  <p:cSld>
-    <p:spTree>
-      <p:nvGrpSpPr>
-        <p:cNvPr id="1" name=""/>
-        <p:cNvGrpSpPr/>
-        <p:nvPr/>
-      </p:nvGrpSpPr>
-      <p:grpSpPr>
-        <a:xfrm>
-          <a:off x="0" y="0"/>
-          <a:ext cx="0" cy="0"/>
-          <a:chOff x="0" y="0"/>
-          <a:chExt cx="0" cy="0"/>
-        </a:xfrm>
-      </p:grpSpPr>
-      <p:sp>
-        <p:nvSpPr>
-          <p:cNvPr id="2" name="Slide Image Placeholder 1"/>
-          <p:cNvSpPr>
-            <a:spLocks noGrp="1"/>
-          </p:cNvSpPr>
-          <p:nvPr>
-            <p:ph type="sldImg" idx="2"/>
-          </p:nvPr>
-        </p:nvSpPr>
-        <p:spPr/>
-      </p:sp>
-      <p:sp>
-        <p:nvSpPr>
-          <p:cNvPr id="3" name="Notes Placeholder 2"/>
-          <p:cNvSpPr>
-            <a:spLocks noGrp="1"/>
-          </p:cNvSpPr>
-          <p:nvPr>
-            <p:ph type="body" idx="3" sz="quarter"/>
-          </p:nvPr>
-        </p:nvSpPr>
-        <p:spPr/>
-        <p:txBody>
-          <a:bodyPr/>
-          <a:lstStyle/>
-          <a:p>
-            <a:r>
-              <a:t>Three real PiTech resolutions from the VAP deck — one per strategy. Vivid, and each maps to a move.</a:t>
-            </a:r>
-          </a:p>
-        </p:txBody>
-      </p:sp>
-      <p:sp>
-        <p:nvSpPr>
-          <p:cNvPr id="4" name="Slide Number Placeholder 3"/>
-          <p:cNvSpPr>
-            <a:spLocks noGrp="1"/>
-          </p:cNvSpPr>
-          <p:nvPr>
-            <p:ph type="sldNum" idx="5" sz="quarter"/>
-          </p:nvPr>
-        </p:nvSpPr>
-        <p:spPr/>
-      </p:sp>
-    </p:spTree>
-  </p:cSld>
-  <p:clrMapOvr>
-    <a:masterClrMapping/>
-  </p:clrMapOvr>
-</p:notes>
-</file>
-
-<file path=ppt/notesSlides/notesSlide7.xml><?xml version="1.0" encoding="utf-8"?>
-<p:notes xmlns:a="http://schemas.openxmlformats.org/drawingml/2006/main" xmlns:p="http://schemas.openxmlformats.org/presentationml/2006/main" xmlns:r="http://schemas.openxmlformats.org/officeDocument/2006/relationships">
-  <p:cSld>
-    <p:spTree>
-      <p:nvGrpSpPr>
-        <p:cNvPr id="1" name=""/>
-        <p:cNvGrpSpPr/>
-        <p:nvPr/>
-      </p:nvGrpSpPr>
-      <p:grpSpPr>
-        <a:xfrm>
-          <a:off x="0" y="0"/>
-          <a:ext cx="0" cy="0"/>
-          <a:chOff x="0" y="0"/>
-          <a:chExt cx="0" cy="0"/>
-        </a:xfrm>
-      </p:grpSpPr>
-      <p:sp>
-        <p:nvSpPr>
-          <p:cNvPr id="2" name="Slide Image Placeholder 1"/>
-          <p:cNvSpPr>
-            <a:spLocks noGrp="1"/>
-          </p:cNvSpPr>
-          <p:nvPr>
-            <p:ph type="sldImg" idx="2"/>
-          </p:nvPr>
-        </p:nvSpPr>
-        <p:spPr/>
-      </p:sp>
-      <p:sp>
-        <p:nvSpPr>
-          <p:cNvPr id="3" name="Notes Placeholder 2"/>
-          <p:cNvSpPr>
-            <a:spLocks noGrp="1"/>
-          </p:cNvSpPr>
-          <p:nvPr>
-            <p:ph type="body" idx="3" sz="quarter"/>
-          </p:nvPr>
-        </p:nvSpPr>
-        <p:spPr/>
-        <p:txBody>
-          <a:bodyPr/>
-          <a:lstStyle/>
-          <a:p>
-            <a:r>
-              <a:t>Phase 1, in planning.md BEFORE anyone prompts. Operationalization is the move students skip: the same value word means different things, and the definition has to go INTO the prompt or the AI supplies its own. Template in week3/7_28/planning-template.md.</a:t>
-            </a:r>
-          </a:p>
-        </p:txBody>
-      </p:sp>
-      <p:sp>
-        <p:nvSpPr>
-          <p:cNvPr id="4" name="Slide Number Placeholder 3"/>
-          <p:cNvSpPr>
-            <a:spLocks noGrp="1"/>
-          </p:cNvSpPr>
-          <p:nvPr>
-            <p:ph type="sldNum" idx="5" sz="quarter"/>
-          </p:nvPr>
-        </p:nvSpPr>
-        <p:spPr/>
-      </p:sp>
-    </p:spTree>
-  </p:cSld>
-  <p:clrMapOvr>
-    <a:masterClrMapping/>
-  </p:clrMapOvr>
-</p:notes>
-</file>
-
-<file path=ppt/notesSlides/notesSlide8.xml><?xml version="1.0" encoding="utf-8"?>
-<p:notes xmlns:a="http://schemas.openxmlformats.org/drawingml/2006/main" xmlns:p="http://schemas.openxmlformats.org/presentationml/2006/main" xmlns:r="http://schemas.openxmlformats.org/officeDocument/2006/relationships">
-  <p:cSld>
-    <p:spTree>
-      <p:nvGrpSpPr>
-        <p:cNvPr id="1" name=""/>
-        <p:cNvGrpSpPr/>
-        <p:nvPr/>
-      </p:nvGrpSpPr>
-      <p:grpSpPr>
-        <a:xfrm>
-          <a:off x="0" y="0"/>
-          <a:ext cx="0" cy="0"/>
-          <a:chOff x="0" y="0"/>
-          <a:chExt cx="0" cy="0"/>
-        </a:xfrm>
-      </p:grpSpPr>
-      <p:sp>
-        <p:nvSpPr>
-          <p:cNvPr id="2" name="Slide Image Placeholder 1"/>
-          <p:cNvSpPr>
-            <a:spLocks noGrp="1"/>
-          </p:cNvSpPr>
-          <p:nvPr>
-            <p:ph type="sldImg" idx="2"/>
-          </p:nvPr>
-        </p:nvSpPr>
-        <p:spPr/>
-      </p:sp>
-      <p:sp>
-        <p:nvSpPr>
-          <p:cNvPr id="3" name="Notes Placeholder 2"/>
-          <p:cNvSpPr>
-            <a:spLocks noGrp="1"/>
-          </p:cNvSpPr>
-          <p:nvPr>
-            <p:ph type="body" idx="3" sz="quarter"/>
-          </p:nvPr>
-        </p:nvSpPr>
-        <p:spPr/>
-        <p:txBody>
-          <a:bodyPr/>
-          <a:lstStyle/>
-          <a:p>
-            <a:r>
-              <a:t>Phase 2: implementation + the reality check. Peer value-test rotation (round 2, after Monday's usability round).</a:t>
-            </a:r>
-          </a:p>
-        </p:txBody>
-      </p:sp>
-      <p:sp>
-        <p:nvSpPr>
-          <p:cNvPr id="4" name="Slide Number Placeholder 3"/>
-          <p:cNvSpPr>
-            <a:spLocks noGrp="1"/>
-          </p:cNvSpPr>
-          <p:nvPr>
-            <p:ph type="sldNum" idx="5" sz="quarter"/>
-          </p:nvPr>
-        </p:nvSpPr>
-        <p:spPr/>
-      </p:sp>
-    </p:spTree>
-  </p:cSld>
-  <p:clrMapOvr>
-    <a:masterClrMapping/>
-  </p:clrMapOvr>
-</p:notes>
-</file>
-
-<file path=ppt/notesSlides/notesSlide9.xml><?xml version="1.0" encoding="utf-8"?>
-<p:notes xmlns:a="http://schemas.openxmlformats.org/drawingml/2006/main" xmlns:p="http://schemas.openxmlformats.org/presentationml/2006/main" xmlns:r="http://schemas.openxmlformats.org/officeDocument/2006/relationships">
-  <p:cSld>
-    <p:spTree>
-      <p:nvGrpSpPr>
-        <p:cNvPr id="1" name=""/>
-        <p:cNvGrpSpPr/>
-        <p:nvPr/>
-      </p:nvGrpSpPr>
-      <p:grpSpPr>
-        <a:xfrm>
-          <a:off x="0" y="0"/>
-          <a:ext cx="0" cy="0"/>
-          <a:chOff x="0" y="0"/>
-          <a:chExt cx="0" cy="0"/>
-        </a:xfrm>
-      </p:grpSpPr>
-      <p:sp>
-        <p:nvSpPr>
-          <p:cNvPr id="2" name="Slide Image Placeholder 1"/>
-          <p:cNvSpPr>
-            <a:spLocks noGrp="1"/>
-          </p:cNvSpPr>
-          <p:nvPr>
-            <p:ph type="sldImg" idx="2"/>
-          </p:nvPr>
-        </p:nvSpPr>
-        <p:spPr/>
-      </p:sp>
-      <p:sp>
-        <p:nvSpPr>
-          <p:cNvPr id="3" name="Notes Placeholder 2"/>
-          <p:cNvSpPr>
-            <a:spLocks noGrp="1"/>
-          </p:cNvSpPr>
-          <p:nvPr>
-            <p:ph type="body" idx="3" sz="quarter"/>
-          </p:nvPr>
-        </p:nvSpPr>
-        <p:spPr/>
-        <p:txBody>
-          <a:bodyPr/>
-          <a:lstStyle/>
-          <a:p>
-            <a:r>
-              <a:t>Phase 3: verification against the written plan — the plan makes the gap measurable, which is the whole reason planning.md exists.</a:t>
+              <a:t>Individual, on the shared Project 2 prototype. No coding required. Accessibility guest lecture today; Wed/Thu are the final project.</a:t>
             </a:r>
           </a:p>
         </p:txBody>
@@ -4239,7 +3607,7 @@
                 </a:solidFill>
                 <a:latin typeface="Courier New"/>
               </a:rPr>
-              <a:t>WEEK 3 · TUESDAY</a:t>
+              <a:t>WEEK 3 - TUESDAY</a:t>
             </a:r>
           </a:p>
         </p:txBody>
@@ -4278,7 +3646,7 @@
                 </a:solidFill>
                 <a:latin typeface="Arial"/>
               </a:rPr>
-              <a:t>User Testing II: Does It Do the Right Thing?</a:t>
+              <a:t>Value Verification: Does It Do the Right Thing?</a:t>
             </a:r>
           </a:p>
         </p:txBody>
@@ -4317,7 +3685,7 @@
                 </a:solidFill>
                 <a:latin typeface="Arial"/>
               </a:rPr>
-              <a:t>Values at Play — the ethics of what you built</a:t>
+              <a:t>Values at Play - verifying the value you claimed</a:t>
             </a:r>
           </a:p>
         </p:txBody>
@@ -4382,7 +3750,7 @@
                 </a:solidFill>
                 <a:latin typeface="Courier New"/>
               </a:rPr>
-              <a:t>VALUE CONFLICTS</a:t>
+              <a:t>WHY MEASURE BEYOND USABILITY</a:t>
             </a:r>
           </a:p>
         </p:txBody>
@@ -4440,7 +3808,7 @@
         <p:spPr>
           <a:xfrm>
             <a:off x="640080" y="1188720"/>
-            <a:ext cx="10972800" cy="914400"/>
+            <a:ext cx="10972800" cy="1097280"/>
           </a:xfrm>
           <a:prstGeom prst="rect">
             <a:avLst/>
@@ -4459,115 +3827,27 @@
               </a:lnSpc>
             </a:pPr>
             <a:r>
-              <a:rPr sz="3200" b="1">
+              <a:rPr sz="3400" b="1">
                 <a:solidFill>
                   <a:srgbClr val="F5F7FA"/>
                 </a:solidFill>
                 <a:latin typeface="Arial"/>
               </a:rPr>
-              <a:t>Three ways to resolve a clash</a:t>
-            </a:r>
-          </a:p>
-        </p:txBody>
-      </p:sp>
-      <p:sp>
-        <p:nvSpPr>
-          <p:cNvPr id="5" name="Rounded Rectangle 4"/>
-          <p:cNvSpPr/>
-          <p:nvPr/>
-        </p:nvSpPr>
-        <p:spPr>
-          <a:xfrm>
-            <a:off x="640080" y="2468880"/>
-            <a:ext cx="3393338" cy="3383280"/>
-          </a:xfrm>
-          <a:prstGeom prst="roundRect">
-            <a:avLst/>
-          </a:prstGeom>
-          <a:solidFill>
-            <a:srgbClr val="151B26"/>
-          </a:solidFill>
-          <a:ln>
-            <a:noFill/>
-          </a:ln>
-          <a:effectLst/>
-        </p:spPr>
-        <p:style>
-          <a:lnRef idx="1">
-            <a:schemeClr val="accent1"/>
-          </a:lnRef>
-          <a:fillRef idx="3">
-            <a:schemeClr val="accent1"/>
-          </a:fillRef>
-          <a:effectRef idx="2">
-            <a:schemeClr val="accent1"/>
-          </a:effectRef>
-          <a:fontRef idx="minor">
-            <a:schemeClr val="lt1"/>
-          </a:fontRef>
-        </p:style>
-        <p:txBody>
-          <a:bodyPr rtlCol="0" anchor="ctr"/>
-          <a:lstStyle/>
-          <a:p>
-            <a:pPr algn="ctr"/>
-          </a:p>
-        </p:txBody>
-      </p:sp>
-      <p:sp>
-        <p:nvSpPr>
-          <p:cNvPr id="6" name="Rectangle 5"/>
-          <p:cNvSpPr/>
-          <p:nvPr/>
-        </p:nvSpPr>
-        <p:spPr>
-          <a:xfrm>
-            <a:off x="640080" y="2468880"/>
-            <a:ext cx="3393338" cy="82296"/>
-          </a:xfrm>
-          <a:prstGeom prst="rect">
-            <a:avLst/>
-          </a:prstGeom>
-          <a:solidFill>
-            <a:srgbClr val="00FF41"/>
-          </a:solidFill>
-          <a:ln>
-            <a:noFill/>
-          </a:ln>
-          <a:effectLst/>
-        </p:spPr>
-        <p:style>
-          <a:lnRef idx="1">
-            <a:schemeClr val="accent1"/>
-          </a:lnRef>
-          <a:fillRef idx="3">
-            <a:schemeClr val="accent1"/>
-          </a:fillRef>
-          <a:effectRef idx="2">
-            <a:schemeClr val="accent1"/>
-          </a:effectRef>
-          <a:fontRef idx="minor">
-            <a:schemeClr val="lt1"/>
-          </a:fontRef>
-        </p:style>
-        <p:txBody>
-          <a:bodyPr rtlCol="0" anchor="ctr"/>
-          <a:lstStyle/>
-          <a:p>
-            <a:pPr algn="ctr"/>
-          </a:p>
-        </p:txBody>
-      </p:sp>
-      <p:sp>
-        <p:nvSpPr>
-          <p:cNvPr id="7" name="TextBox 6"/>
+              <a:t>"Usable but conventional"</a:t>
+            </a:r>
+          </a:p>
+        </p:txBody>
+      </p:sp>
+      <p:sp>
+        <p:nvSpPr>
+          <p:cNvPr id="5" name="TextBox 4"/>
           <p:cNvSpPr txBox="1"/>
           <p:nvPr/>
         </p:nvSpPr>
         <p:spPr>
           <a:xfrm>
-            <a:off x="914400" y="2788920"/>
-            <a:ext cx="2844698" cy="457200"/>
+            <a:off x="658368" y="2286000"/>
+            <a:ext cx="10881360" cy="3657600"/>
           </a:xfrm>
           <a:prstGeom prst="rect">
             <a:avLst/>
@@ -4582,512 +3862,122 @@
           <a:p>
             <a:pPr algn="l">
               <a:lnSpc>
-                <a:spcPct val="100000"/>
-              </a:lnSpc>
-            </a:pPr>
-            <a:r>
-              <a:rPr sz="1200" b="1">
+                <a:spcPct val="112000"/>
+              </a:lnSpc>
+            </a:pPr>
+            <a:r>
+              <a:rPr sz="2000" b="0">
+                <a:solidFill>
+                  <a:srgbClr val="F5F7FA"/>
+                </a:solidFill>
+                <a:latin typeface="Arial"/>
+              </a:rPr>
+              <a:t>A 2026 study (Romero et al.) compared AI-generated and human interface prototypes with the UEQ:</a:t>
+            </a:r>
+          </a:p>
+          <a:p>
+            <a:pPr algn="l">
+              <a:lnSpc>
+                <a:spcPct val="112000"/>
+              </a:lnSpc>
+            </a:pPr>
+            <a:r>
+              <a:rPr sz="2000" b="0">
+                <a:solidFill>
+                  <a:srgbClr val="F5F7FA"/>
+                </a:solidFill>
+                <a:latin typeface="Arial"/>
+              </a:rPr>
+              <a:t/>
+            </a:r>
+          </a:p>
+          <a:p>
+            <a:pPr algn="l">
+              <a:lnSpc>
+                <a:spcPct val="112000"/>
+              </a:lnSpc>
+            </a:pPr>
+            <a:r>
+              <a:rPr sz="1900" b="0">
+                <a:solidFill>
+                  <a:srgbClr val="F5F7FA"/>
+                </a:solidFill>
+                <a:latin typeface="Arial"/>
+              </a:rPr>
+              <a:t>Pragmatic quality (usability): </a:t>
+            </a:r>
+            <a:r>
+              <a:rPr sz="1900" b="1">
                 <a:solidFill>
                   <a:srgbClr val="00FF41"/>
                 </a:solidFill>
-                <a:latin typeface="Courier New"/>
-              </a:rPr>
-              <a:t>DISSOLVE</a:t>
-            </a:r>
-          </a:p>
-        </p:txBody>
-      </p:sp>
-      <p:sp>
-        <p:nvSpPr>
-          <p:cNvPr id="8" name="TextBox 7"/>
-          <p:cNvSpPr txBox="1"/>
-          <p:nvPr/>
-        </p:nvSpPr>
-        <p:spPr>
-          <a:xfrm>
-            <a:off x="914400" y="3246120"/>
-            <a:ext cx="2844698" cy="822960"/>
-          </a:xfrm>
-          <a:prstGeom prst="rect">
-            <a:avLst/>
-          </a:prstGeom>
-          <a:noFill/>
-        </p:spPr>
-        <p:txBody>
-          <a:bodyPr wrap="square" anchor="t">
-            <a:spAutoFit/>
-          </a:bodyPr>
-          <a:lstStyle/>
-          <a:p>
-            <a:pPr algn="l">
-              <a:lnSpc>
-                <a:spcPct val="100000"/>
-              </a:lnSpc>
-            </a:pPr>
-            <a:r>
-              <a:rPr sz="2000" b="1">
+                <a:latin typeface="Arial"/>
+              </a:rPr>
+              <a:t>fine.</a:t>
+            </a:r>
+          </a:p>
+          <a:p>
+            <a:pPr algn="l">
+              <a:lnSpc>
+                <a:spcPct val="112000"/>
+              </a:lnSpc>
+            </a:pPr>
+            <a:r>
+              <a:rPr sz="1900" b="0">
                 <a:solidFill>
                   <a:srgbClr val="F5F7FA"/>
                 </a:solidFill>
                 <a:latin typeface="Arial"/>
               </a:rPr>
-              <a:t>Both, fully</a:t>
-            </a:r>
-          </a:p>
-        </p:txBody>
-      </p:sp>
-      <p:sp>
-        <p:nvSpPr>
-          <p:cNvPr id="9" name="TextBox 8"/>
-          <p:cNvSpPr txBox="1"/>
-          <p:nvPr/>
-        </p:nvSpPr>
-        <p:spPr>
-          <a:xfrm>
-            <a:off x="914400" y="4114800"/>
-            <a:ext cx="2844698" cy="1554480"/>
-          </a:xfrm>
-          <a:prstGeom prst="rect">
-            <a:avLst/>
-          </a:prstGeom>
-          <a:noFill/>
-        </p:spPr>
-        <p:txBody>
-          <a:bodyPr wrap="square" anchor="t">
-            <a:spAutoFit/>
-          </a:bodyPr>
-          <a:lstStyle/>
-          <a:p>
-            <a:pPr algn="l">
-              <a:lnSpc>
-                <a:spcPct val="110000"/>
-              </a:lnSpc>
-            </a:pPr>
-            <a:r>
-              <a:rPr sz="1500" b="0">
+              <a:t>Hedonic quality (novelty, originality): </a:t>
+            </a:r>
+            <a:r>
+              <a:rPr sz="1900" b="1">
+                <a:solidFill>
+                  <a:srgbClr val="FF4D4D"/>
+                </a:solidFill>
+                <a:latin typeface="Arial"/>
+              </a:rPr>
+              <a:t>neutral to negative.</a:t>
+            </a:r>
+          </a:p>
+          <a:p>
+            <a:pPr algn="l">
+              <a:lnSpc>
+                <a:spcPct val="112000"/>
+              </a:lnSpc>
+            </a:pPr>
+            <a:r>
+              <a:rPr sz="2000" b="0">
+                <a:solidFill>
+                  <a:srgbClr val="F5F7FA"/>
+                </a:solidFill>
+                <a:latin typeface="Arial"/>
+              </a:rPr>
+              <a:t/>
+            </a:r>
+          </a:p>
+          <a:p>
+            <a:pPr algn="l">
+              <a:lnSpc>
+                <a:spcPct val="112000"/>
+              </a:lnSpc>
+            </a:pPr>
+            <a:r>
+              <a:rPr sz="1700" b="0">
                 <a:solidFill>
                   <a:srgbClr val="8A94A6"/>
                 </a:solidFill>
                 <a:latin typeface="Arial"/>
               </a:rPr>
-              <a:t>Redesign so the conflict disappears — no one loses.</a:t>
-            </a:r>
-          </a:p>
-        </p:txBody>
-      </p:sp>
-      <p:sp>
-        <p:nvSpPr>
-          <p:cNvPr id="10" name="Rounded Rectangle 9"/>
-          <p:cNvSpPr/>
-          <p:nvPr/>
-        </p:nvSpPr>
-        <p:spPr>
-          <a:xfrm>
-            <a:off x="4399178" y="2468880"/>
-            <a:ext cx="3393338" cy="3383280"/>
-          </a:xfrm>
-          <a:prstGeom prst="roundRect">
-            <a:avLst/>
-          </a:prstGeom>
-          <a:solidFill>
-            <a:srgbClr val="151B26"/>
-          </a:solidFill>
-          <a:ln>
-            <a:noFill/>
-          </a:ln>
-          <a:effectLst/>
-        </p:spPr>
-        <p:style>
-          <a:lnRef idx="1">
-            <a:schemeClr val="accent1"/>
-          </a:lnRef>
-          <a:fillRef idx="3">
-            <a:schemeClr val="accent1"/>
-          </a:fillRef>
-          <a:effectRef idx="2">
-            <a:schemeClr val="accent1"/>
-          </a:effectRef>
-          <a:fontRef idx="minor">
-            <a:schemeClr val="lt1"/>
-          </a:fontRef>
-        </p:style>
-        <p:txBody>
-          <a:bodyPr rtlCol="0" anchor="ctr"/>
-          <a:lstStyle/>
-          <a:p>
-            <a:pPr algn="ctr"/>
-          </a:p>
-        </p:txBody>
-      </p:sp>
-      <p:sp>
-        <p:nvSpPr>
-          <p:cNvPr id="11" name="Rectangle 10"/>
-          <p:cNvSpPr/>
-          <p:nvPr/>
-        </p:nvSpPr>
-        <p:spPr>
-          <a:xfrm>
-            <a:off x="4399178" y="2468880"/>
-            <a:ext cx="3393338" cy="82296"/>
-          </a:xfrm>
-          <a:prstGeom prst="rect">
-            <a:avLst/>
-          </a:prstGeom>
-          <a:solidFill>
-            <a:srgbClr val="00FF41"/>
-          </a:solidFill>
-          <a:ln>
-            <a:noFill/>
-          </a:ln>
-          <a:effectLst/>
-        </p:spPr>
-        <p:style>
-          <a:lnRef idx="1">
-            <a:schemeClr val="accent1"/>
-          </a:lnRef>
-          <a:fillRef idx="3">
-            <a:schemeClr val="accent1"/>
-          </a:fillRef>
-          <a:effectRef idx="2">
-            <a:schemeClr val="accent1"/>
-          </a:effectRef>
-          <a:fontRef idx="minor">
-            <a:schemeClr val="lt1"/>
-          </a:fontRef>
-        </p:style>
-        <p:txBody>
-          <a:bodyPr rtlCol="0" anchor="ctr"/>
-          <a:lstStyle/>
-          <a:p>
-            <a:pPr algn="ctr"/>
-          </a:p>
-        </p:txBody>
-      </p:sp>
-      <p:sp>
-        <p:nvSpPr>
-          <p:cNvPr id="12" name="TextBox 11"/>
-          <p:cNvSpPr txBox="1"/>
-          <p:nvPr/>
-        </p:nvSpPr>
-        <p:spPr>
-          <a:xfrm>
-            <a:off x="4673498" y="2788920"/>
-            <a:ext cx="2844698" cy="457200"/>
-          </a:xfrm>
-          <a:prstGeom prst="rect">
-            <a:avLst/>
-          </a:prstGeom>
-          <a:noFill/>
-        </p:spPr>
-        <p:txBody>
-          <a:bodyPr wrap="square" anchor="t">
-            <a:spAutoFit/>
-          </a:bodyPr>
-          <a:lstStyle/>
-          <a:p>
-            <a:pPr algn="l">
-              <a:lnSpc>
-                <a:spcPct val="100000"/>
-              </a:lnSpc>
-            </a:pPr>
-            <a:r>
-              <a:rPr sz="1200" b="1">
-                <a:solidFill>
-                  <a:srgbClr val="00FF41"/>
-                </a:solidFill>
-                <a:latin typeface="Courier New"/>
-              </a:rPr>
-              <a:t>COMPROMISE</a:t>
-            </a:r>
-          </a:p>
-        </p:txBody>
-      </p:sp>
-      <p:sp>
-        <p:nvSpPr>
-          <p:cNvPr id="13" name="TextBox 12"/>
-          <p:cNvSpPr txBox="1"/>
-          <p:nvPr/>
-        </p:nvSpPr>
-        <p:spPr>
-          <a:xfrm>
-            <a:off x="4673498" y="3246120"/>
-            <a:ext cx="2844698" cy="822960"/>
-          </a:xfrm>
-          <a:prstGeom prst="rect">
-            <a:avLst/>
-          </a:prstGeom>
-          <a:noFill/>
-        </p:spPr>
-        <p:txBody>
-          <a:bodyPr wrap="square" anchor="t">
-            <a:spAutoFit/>
-          </a:bodyPr>
-          <a:lstStyle/>
-          <a:p>
-            <a:pPr algn="l">
-              <a:lnSpc>
-                <a:spcPct val="100000"/>
-              </a:lnSpc>
-            </a:pPr>
-            <a:r>
-              <a:rPr sz="2000" b="1">
-                <a:solidFill>
-                  <a:srgbClr val="F5F7FA"/>
-                </a:solidFill>
-                <a:latin typeface="Arial"/>
-              </a:rPr>
-              <a:t>Both, partly</a:t>
-            </a:r>
-          </a:p>
-        </p:txBody>
-      </p:sp>
-      <p:sp>
-        <p:nvSpPr>
-          <p:cNvPr id="14" name="TextBox 13"/>
-          <p:cNvSpPr txBox="1"/>
-          <p:nvPr/>
-        </p:nvSpPr>
-        <p:spPr>
-          <a:xfrm>
-            <a:off x="4673498" y="4114800"/>
-            <a:ext cx="2844698" cy="1554480"/>
-          </a:xfrm>
-          <a:prstGeom prst="rect">
-            <a:avLst/>
-          </a:prstGeom>
-          <a:noFill/>
-        </p:spPr>
-        <p:txBody>
-          <a:bodyPr wrap="square" anchor="t">
-            <a:spAutoFit/>
-          </a:bodyPr>
-          <a:lstStyle/>
-          <a:p>
-            <a:pPr algn="l">
-              <a:lnSpc>
-                <a:spcPct val="110000"/>
-              </a:lnSpc>
-            </a:pPr>
-            <a:r>
-              <a:rPr sz="1500" b="0">
-                <a:solidFill>
-                  <a:srgbClr val="8A94A6"/>
-                </a:solidFill>
-                <a:latin typeface="Arial"/>
-              </a:rPr>
-              <a:t>Promote each value, but in less than full measure.</a:t>
-            </a:r>
-          </a:p>
-        </p:txBody>
-      </p:sp>
-      <p:sp>
-        <p:nvSpPr>
-          <p:cNvPr id="15" name="Rounded Rectangle 14"/>
-          <p:cNvSpPr/>
-          <p:nvPr/>
-        </p:nvSpPr>
-        <p:spPr>
-          <a:xfrm>
-            <a:off x="8158276" y="2468880"/>
-            <a:ext cx="3393338" cy="3383280"/>
-          </a:xfrm>
-          <a:prstGeom prst="roundRect">
-            <a:avLst/>
-          </a:prstGeom>
-          <a:solidFill>
-            <a:srgbClr val="151B26"/>
-          </a:solidFill>
-          <a:ln>
-            <a:noFill/>
-          </a:ln>
-          <a:effectLst/>
-        </p:spPr>
-        <p:style>
-          <a:lnRef idx="1">
-            <a:schemeClr val="accent1"/>
-          </a:lnRef>
-          <a:fillRef idx="3">
-            <a:schemeClr val="accent1"/>
-          </a:fillRef>
-          <a:effectRef idx="2">
-            <a:schemeClr val="accent1"/>
-          </a:effectRef>
-          <a:fontRef idx="minor">
-            <a:schemeClr val="lt1"/>
-          </a:fontRef>
-        </p:style>
-        <p:txBody>
-          <a:bodyPr rtlCol="0" anchor="ctr"/>
-          <a:lstStyle/>
-          <a:p>
-            <a:pPr algn="ctr"/>
-          </a:p>
-        </p:txBody>
-      </p:sp>
-      <p:sp>
-        <p:nvSpPr>
-          <p:cNvPr id="16" name="Rectangle 15"/>
-          <p:cNvSpPr/>
-          <p:nvPr/>
-        </p:nvSpPr>
-        <p:spPr>
-          <a:xfrm>
-            <a:off x="8158276" y="2468880"/>
-            <a:ext cx="3393338" cy="82296"/>
-          </a:xfrm>
-          <a:prstGeom prst="rect">
-            <a:avLst/>
-          </a:prstGeom>
-          <a:solidFill>
-            <a:srgbClr val="00FF41"/>
-          </a:solidFill>
-          <a:ln>
-            <a:noFill/>
-          </a:ln>
-          <a:effectLst/>
-        </p:spPr>
-        <p:style>
-          <a:lnRef idx="1">
-            <a:schemeClr val="accent1"/>
-          </a:lnRef>
-          <a:fillRef idx="3">
-            <a:schemeClr val="accent1"/>
-          </a:fillRef>
-          <a:effectRef idx="2">
-            <a:schemeClr val="accent1"/>
-          </a:effectRef>
-          <a:fontRef idx="minor">
-            <a:schemeClr val="lt1"/>
-          </a:fontRef>
-        </p:style>
-        <p:txBody>
-          <a:bodyPr rtlCol="0" anchor="ctr"/>
-          <a:lstStyle/>
-          <a:p>
-            <a:pPr algn="ctr"/>
-          </a:p>
-        </p:txBody>
-      </p:sp>
-      <p:sp>
-        <p:nvSpPr>
-          <p:cNvPr id="17" name="TextBox 16"/>
-          <p:cNvSpPr txBox="1"/>
-          <p:nvPr/>
-        </p:nvSpPr>
-        <p:spPr>
-          <a:xfrm>
-            <a:off x="8432596" y="2788920"/>
-            <a:ext cx="2844698" cy="457200"/>
-          </a:xfrm>
-          <a:prstGeom prst="rect">
-            <a:avLst/>
-          </a:prstGeom>
-          <a:noFill/>
-        </p:spPr>
-        <p:txBody>
-          <a:bodyPr wrap="square" anchor="t">
-            <a:spAutoFit/>
-          </a:bodyPr>
-          <a:lstStyle/>
-          <a:p>
-            <a:pPr algn="l">
-              <a:lnSpc>
-                <a:spcPct val="100000"/>
-              </a:lnSpc>
-            </a:pPr>
-            <a:r>
-              <a:rPr sz="1200" b="1">
-                <a:solidFill>
-                  <a:srgbClr val="00FF41"/>
-                </a:solidFill>
-                <a:latin typeface="Courier New"/>
-              </a:rPr>
-              <a:t>TRADE-OFF</a:t>
-            </a:r>
-          </a:p>
-        </p:txBody>
-      </p:sp>
-      <p:sp>
-        <p:nvSpPr>
-          <p:cNvPr id="18" name="TextBox 17"/>
-          <p:cNvSpPr txBox="1"/>
-          <p:nvPr/>
-        </p:nvSpPr>
-        <p:spPr>
-          <a:xfrm>
-            <a:off x="8432596" y="3246120"/>
-            <a:ext cx="2844698" cy="822960"/>
-          </a:xfrm>
-          <a:prstGeom prst="rect">
-            <a:avLst/>
-          </a:prstGeom>
-          <a:noFill/>
-        </p:spPr>
-        <p:txBody>
-          <a:bodyPr wrap="square" anchor="t">
-            <a:spAutoFit/>
-          </a:bodyPr>
-          <a:lstStyle/>
-          <a:p>
-            <a:pPr algn="l">
-              <a:lnSpc>
-                <a:spcPct val="100000"/>
-              </a:lnSpc>
-            </a:pPr>
-            <a:r>
-              <a:rPr sz="2000" b="1">
-                <a:solidFill>
-                  <a:srgbClr val="F5F7FA"/>
-                </a:solidFill>
-                <a:latin typeface="Arial"/>
-              </a:rPr>
-              <a:t>One over another</a:t>
-            </a:r>
-          </a:p>
-        </p:txBody>
-      </p:sp>
-      <p:sp>
-        <p:nvSpPr>
-          <p:cNvPr id="19" name="TextBox 18"/>
-          <p:cNvSpPr txBox="1"/>
-          <p:nvPr/>
-        </p:nvSpPr>
-        <p:spPr>
-          <a:xfrm>
-            <a:off x="8432596" y="4114800"/>
-            <a:ext cx="2844698" cy="1554480"/>
-          </a:xfrm>
-          <a:prstGeom prst="rect">
-            <a:avLst/>
-          </a:prstGeom>
-          <a:noFill/>
-        </p:spPr>
-        <p:txBody>
-          <a:bodyPr wrap="square" anchor="t">
-            <a:spAutoFit/>
-          </a:bodyPr>
-          <a:lstStyle/>
-          <a:p>
-            <a:pPr algn="l">
-              <a:lnSpc>
-                <a:spcPct val="110000"/>
-              </a:lnSpc>
-            </a:pPr>
-            <a:r>
-              <a:rPr sz="1500" b="0">
-                <a:solidFill>
-                  <a:srgbClr val="8A94A6"/>
-                </a:solidFill>
-                <a:latin typeface="Arial"/>
-              </a:rPr>
-              <a:t>Sacrifice one value for another — and name the cost.</a:t>
-            </a:r>
-          </a:p>
-        </p:txBody>
-      </p:sp>
-      <p:sp>
-        <p:nvSpPr>
-          <p:cNvPr id="20" name="TextBox 19"/>
+              <a:t>AI makes things usable but generic. Usability alone would miss it - which is why you verify the value, not just the flow.</a:t>
+            </a:r>
+          </a:p>
+        </p:txBody>
+      </p:sp>
+      <p:sp>
+        <p:nvSpPr>
+          <p:cNvPr id="6" name="TextBox 5"/>
           <p:cNvSpPr txBox="1"/>
           <p:nvPr/>
         </p:nvSpPr>
@@ -5184,7 +4074,7 @@
                 </a:solidFill>
                 <a:latin typeface="Courier New"/>
               </a:rPr>
-              <a:t>WORKED EXAMPLE</a:t>
+              <a:t>WHEN VERIFICATION FINDS A CONFLICT</a:t>
             </a:r>
           </a:p>
         </p:txBody>
@@ -5242,7 +4132,7 @@
         <p:spPr>
           <a:xfrm>
             <a:off x="640080" y="1188720"/>
-            <a:ext cx="10972800" cy="1097280"/>
+            <a:ext cx="10972800" cy="914400"/>
           </a:xfrm>
           <a:prstGeom prst="rect">
             <a:avLst/>
@@ -5261,27 +4151,115 @@
               </a:lnSpc>
             </a:pPr>
             <a:r>
-              <a:rPr sz="3400" b="1">
+              <a:rPr sz="3200" b="1">
                 <a:solidFill>
                   <a:srgbClr val="F5F7FA"/>
                 </a:solidFill>
                 <a:latin typeface="Arial"/>
               </a:rPr>
-              <a:t>The same conflict, three ways</a:t>
-            </a:r>
-          </a:p>
-        </p:txBody>
-      </p:sp>
-      <p:sp>
-        <p:nvSpPr>
-          <p:cNvPr id="5" name="TextBox 4"/>
+              <a:t>Two values collide - name the resolution</a:t>
+            </a:r>
+          </a:p>
+        </p:txBody>
+      </p:sp>
+      <p:sp>
+        <p:nvSpPr>
+          <p:cNvPr id="5" name="Rounded Rectangle 4"/>
+          <p:cNvSpPr/>
+          <p:nvPr/>
+        </p:nvSpPr>
+        <p:spPr>
+          <a:xfrm>
+            <a:off x="640080" y="2468880"/>
+            <a:ext cx="3393338" cy="3383280"/>
+          </a:xfrm>
+          <a:prstGeom prst="roundRect">
+            <a:avLst/>
+          </a:prstGeom>
+          <a:solidFill>
+            <a:srgbClr val="151B26"/>
+          </a:solidFill>
+          <a:ln>
+            <a:noFill/>
+          </a:ln>
+          <a:effectLst/>
+        </p:spPr>
+        <p:style>
+          <a:lnRef idx="1">
+            <a:schemeClr val="accent1"/>
+          </a:lnRef>
+          <a:fillRef idx="3">
+            <a:schemeClr val="accent1"/>
+          </a:fillRef>
+          <a:effectRef idx="2">
+            <a:schemeClr val="accent1"/>
+          </a:effectRef>
+          <a:fontRef idx="minor">
+            <a:schemeClr val="lt1"/>
+          </a:fontRef>
+        </p:style>
+        <p:txBody>
+          <a:bodyPr rtlCol="0" anchor="ctr"/>
+          <a:lstStyle/>
+          <a:p>
+            <a:pPr algn="ctr"/>
+          </a:p>
+        </p:txBody>
+      </p:sp>
+      <p:sp>
+        <p:nvSpPr>
+          <p:cNvPr id="6" name="Rectangle 5"/>
+          <p:cNvSpPr/>
+          <p:nvPr/>
+        </p:nvSpPr>
+        <p:spPr>
+          <a:xfrm>
+            <a:off x="640080" y="2468880"/>
+            <a:ext cx="3393338" cy="82296"/>
+          </a:xfrm>
+          <a:prstGeom prst="rect">
+            <a:avLst/>
+          </a:prstGeom>
+          <a:solidFill>
+            <a:srgbClr val="00FF41"/>
+          </a:solidFill>
+          <a:ln>
+            <a:noFill/>
+          </a:ln>
+          <a:effectLst/>
+        </p:spPr>
+        <p:style>
+          <a:lnRef idx="1">
+            <a:schemeClr val="accent1"/>
+          </a:lnRef>
+          <a:fillRef idx="3">
+            <a:schemeClr val="accent1"/>
+          </a:fillRef>
+          <a:effectRef idx="2">
+            <a:schemeClr val="accent1"/>
+          </a:effectRef>
+          <a:fontRef idx="minor">
+            <a:schemeClr val="lt1"/>
+          </a:fontRef>
+        </p:style>
+        <p:txBody>
+          <a:bodyPr rtlCol="0" anchor="ctr"/>
+          <a:lstStyle/>
+          <a:p>
+            <a:pPr algn="ctr"/>
+          </a:p>
+        </p:txBody>
+      </p:sp>
+      <p:sp>
+        <p:nvSpPr>
+          <p:cNvPr id="7" name="TextBox 6"/>
           <p:cNvSpPr txBox="1"/>
           <p:nvPr/>
         </p:nvSpPr>
         <p:spPr>
           <a:xfrm>
-            <a:off x="658368" y="2286000"/>
-            <a:ext cx="10881360" cy="3657600"/>
+            <a:off x="914400" y="2788920"/>
+            <a:ext cx="2844698" cy="457200"/>
           </a:xfrm>
           <a:prstGeom prst="rect">
             <a:avLst/>
@@ -5296,115 +4274,512 @@
           <a:p>
             <a:pPr algn="l">
               <a:lnSpc>
-                <a:spcPct val="112000"/>
+                <a:spcPct val="100000"/>
+              </a:lnSpc>
+            </a:pPr>
+            <a:r>
+              <a:rPr sz="1200" b="1">
+                <a:solidFill>
+                  <a:srgbClr val="00FF41"/>
+                </a:solidFill>
+                <a:latin typeface="Courier New"/>
+              </a:rPr>
+              <a:t>DISSOLVE</a:t>
+            </a:r>
+          </a:p>
+        </p:txBody>
+      </p:sp>
+      <p:sp>
+        <p:nvSpPr>
+          <p:cNvPr id="8" name="TextBox 7"/>
+          <p:cNvSpPr txBox="1"/>
+          <p:nvPr/>
+        </p:nvSpPr>
+        <p:spPr>
+          <a:xfrm>
+            <a:off x="914400" y="3246120"/>
+            <a:ext cx="2844698" cy="822960"/>
+          </a:xfrm>
+          <a:prstGeom prst="rect">
+            <a:avLst/>
+          </a:prstGeom>
+          <a:noFill/>
+        </p:spPr>
+        <p:txBody>
+          <a:bodyPr wrap="square" anchor="t">
+            <a:spAutoFit/>
+          </a:bodyPr>
+          <a:lstStyle/>
+          <a:p>
+            <a:pPr algn="l">
+              <a:lnSpc>
+                <a:spcPct val="100000"/>
               </a:lnSpc>
             </a:pPr>
             <a:r>
               <a:rPr sz="2000" b="1">
                 <a:solidFill>
+                  <a:srgbClr val="F5F7FA"/>
+                </a:solidFill>
+                <a:latin typeface="Arial"/>
+              </a:rPr>
+              <a:t>Redesign around it</a:t>
+            </a:r>
+          </a:p>
+        </p:txBody>
+      </p:sp>
+      <p:sp>
+        <p:nvSpPr>
+          <p:cNvPr id="9" name="TextBox 8"/>
+          <p:cNvSpPr txBox="1"/>
+          <p:nvPr/>
+        </p:nvSpPr>
+        <p:spPr>
+          <a:xfrm>
+            <a:off x="914400" y="4114800"/>
+            <a:ext cx="2844698" cy="1554480"/>
+          </a:xfrm>
+          <a:prstGeom prst="rect">
+            <a:avLst/>
+          </a:prstGeom>
+          <a:noFill/>
+        </p:spPr>
+        <p:txBody>
+          <a:bodyPr wrap="square" anchor="t">
+            <a:spAutoFit/>
+          </a:bodyPr>
+          <a:lstStyle/>
+          <a:p>
+            <a:pPr algn="l">
+              <a:lnSpc>
+                <a:spcPct val="110000"/>
+              </a:lnSpc>
+            </a:pPr>
+            <a:r>
+              <a:rPr sz="1500" b="0">
+                <a:solidFill>
+                  <a:srgbClr val="8A94A6"/>
+                </a:solidFill>
+                <a:latin typeface="Arial"/>
+              </a:rPr>
+              <a:t>A design where the clash disappears and BOTH values hold. (Vacuum: on-device maps, nothing to the cloud.)</a:t>
+            </a:r>
+          </a:p>
+        </p:txBody>
+      </p:sp>
+      <p:sp>
+        <p:nvSpPr>
+          <p:cNvPr id="10" name="Rounded Rectangle 9"/>
+          <p:cNvSpPr/>
+          <p:nvPr/>
+        </p:nvSpPr>
+        <p:spPr>
+          <a:xfrm>
+            <a:off x="4399178" y="2468880"/>
+            <a:ext cx="3393338" cy="3383280"/>
+          </a:xfrm>
+          <a:prstGeom prst="roundRect">
+            <a:avLst/>
+          </a:prstGeom>
+          <a:solidFill>
+            <a:srgbClr val="151B26"/>
+          </a:solidFill>
+          <a:ln>
+            <a:noFill/>
+          </a:ln>
+          <a:effectLst/>
+        </p:spPr>
+        <p:style>
+          <a:lnRef idx="1">
+            <a:schemeClr val="accent1"/>
+          </a:lnRef>
+          <a:fillRef idx="3">
+            <a:schemeClr val="accent1"/>
+          </a:fillRef>
+          <a:effectRef idx="2">
+            <a:schemeClr val="accent1"/>
+          </a:effectRef>
+          <a:fontRef idx="minor">
+            <a:schemeClr val="lt1"/>
+          </a:fontRef>
+        </p:style>
+        <p:txBody>
+          <a:bodyPr rtlCol="0" anchor="ctr"/>
+          <a:lstStyle/>
+          <a:p>
+            <a:pPr algn="ctr"/>
+          </a:p>
+        </p:txBody>
+      </p:sp>
+      <p:sp>
+        <p:nvSpPr>
+          <p:cNvPr id="11" name="Rectangle 10"/>
+          <p:cNvSpPr/>
+          <p:nvPr/>
+        </p:nvSpPr>
+        <p:spPr>
+          <a:xfrm>
+            <a:off x="4399178" y="2468880"/>
+            <a:ext cx="3393338" cy="82296"/>
+          </a:xfrm>
+          <a:prstGeom prst="rect">
+            <a:avLst/>
+          </a:prstGeom>
+          <a:solidFill>
+            <a:srgbClr val="00FF41"/>
+          </a:solidFill>
+          <a:ln>
+            <a:noFill/>
+          </a:ln>
+          <a:effectLst/>
+        </p:spPr>
+        <p:style>
+          <a:lnRef idx="1">
+            <a:schemeClr val="accent1"/>
+          </a:lnRef>
+          <a:fillRef idx="3">
+            <a:schemeClr val="accent1"/>
+          </a:fillRef>
+          <a:effectRef idx="2">
+            <a:schemeClr val="accent1"/>
+          </a:effectRef>
+          <a:fontRef idx="minor">
+            <a:schemeClr val="lt1"/>
+          </a:fontRef>
+        </p:style>
+        <p:txBody>
+          <a:bodyPr rtlCol="0" anchor="ctr"/>
+          <a:lstStyle/>
+          <a:p>
+            <a:pPr algn="ctr"/>
+          </a:p>
+        </p:txBody>
+      </p:sp>
+      <p:sp>
+        <p:nvSpPr>
+          <p:cNvPr id="12" name="TextBox 11"/>
+          <p:cNvSpPr txBox="1"/>
+          <p:nvPr/>
+        </p:nvSpPr>
+        <p:spPr>
+          <a:xfrm>
+            <a:off x="4673498" y="2788920"/>
+            <a:ext cx="2844698" cy="457200"/>
+          </a:xfrm>
+          <a:prstGeom prst="rect">
+            <a:avLst/>
+          </a:prstGeom>
+          <a:noFill/>
+        </p:spPr>
+        <p:txBody>
+          <a:bodyPr wrap="square" anchor="t">
+            <a:spAutoFit/>
+          </a:bodyPr>
+          <a:lstStyle/>
+          <a:p>
+            <a:pPr algn="l">
+              <a:lnSpc>
+                <a:spcPct val="100000"/>
+              </a:lnSpc>
+            </a:pPr>
+            <a:r>
+              <a:rPr sz="1200" b="1">
+                <a:solidFill>
                   <a:srgbClr val="00FF41"/>
                 </a:solidFill>
-                <a:latin typeface="Arial"/>
-              </a:rPr>
-              <a:t>Dissolve — YAI</a:t>
-            </a:r>
-            <a:r>
-              <a:rPr sz="1800" b="0">
+                <a:latin typeface="Courier New"/>
+              </a:rPr>
+              <a:t>COMPROMISE</a:t>
+            </a:r>
+          </a:p>
+        </p:txBody>
+      </p:sp>
+      <p:sp>
+        <p:nvSpPr>
+          <p:cNvPr id="13" name="TextBox 12"/>
+          <p:cNvSpPr txBox="1"/>
+          <p:nvPr/>
+        </p:nvSpPr>
+        <p:spPr>
+          <a:xfrm>
+            <a:off x="4673498" y="3246120"/>
+            <a:ext cx="2844698" cy="822960"/>
+          </a:xfrm>
+          <a:prstGeom prst="rect">
+            <a:avLst/>
+          </a:prstGeom>
+          <a:noFill/>
+        </p:spPr>
+        <p:txBody>
+          <a:bodyPr wrap="square" anchor="t">
+            <a:spAutoFit/>
+          </a:bodyPr>
+          <a:lstStyle/>
+          <a:p>
+            <a:pPr algn="l">
+              <a:lnSpc>
+                <a:spcPct val="100000"/>
+              </a:lnSpc>
+            </a:pPr>
+            <a:r>
+              <a:rPr sz="2000" b="1">
                 <a:solidFill>
                   <a:srgbClr val="F5F7FA"/>
                 </a:solidFill>
                 <a:latin typeface="Arial"/>
               </a:rPr>
-              <a:t>: run pose detection on optically blurred images + a rotating blocker that makes the camera’s state legible. Privacy AND function.</a:t>
-            </a:r>
-          </a:p>
-          <a:p>
-            <a:pPr algn="l">
-              <a:lnSpc>
-                <a:spcPct val="112000"/>
-              </a:lnSpc>
-            </a:pPr>
-            <a:r>
-              <a:rPr sz="2000" b="0">
+              <a:t>Each in part</a:t>
+            </a:r>
+          </a:p>
+        </p:txBody>
+      </p:sp>
+      <p:sp>
+        <p:nvSpPr>
+          <p:cNvPr id="14" name="TextBox 13"/>
+          <p:cNvSpPr txBox="1"/>
+          <p:nvPr/>
+        </p:nvSpPr>
+        <p:spPr>
+          <a:xfrm>
+            <a:off x="4673498" y="4114800"/>
+            <a:ext cx="2844698" cy="1554480"/>
+          </a:xfrm>
+          <a:prstGeom prst="rect">
+            <a:avLst/>
+          </a:prstGeom>
+          <a:noFill/>
+        </p:spPr>
+        <p:txBody>
+          <a:bodyPr wrap="square" anchor="t">
+            <a:spAutoFit/>
+          </a:bodyPr>
+          <a:lstStyle/>
+          <a:p>
+            <a:pPr algn="l">
+              <a:lnSpc>
+                <a:spcPct val="110000"/>
+              </a:lnSpc>
+            </a:pPr>
+            <a:r>
+              <a:rPr sz="1500" b="0">
+                <a:solidFill>
+                  <a:srgbClr val="8A94A6"/>
+                </a:solidFill>
+                <a:latin typeface="Arial"/>
+              </a:rPr>
+              <a:t>Promote each value in less than full measure. (Vacuum: cloud data, but anonymized + opt-out.)</a:t>
+            </a:r>
+          </a:p>
+        </p:txBody>
+      </p:sp>
+      <p:sp>
+        <p:nvSpPr>
+          <p:cNvPr id="15" name="Rounded Rectangle 14"/>
+          <p:cNvSpPr/>
+          <p:nvPr/>
+        </p:nvSpPr>
+        <p:spPr>
+          <a:xfrm>
+            <a:off x="8158276" y="2468880"/>
+            <a:ext cx="3393338" cy="3383280"/>
+          </a:xfrm>
+          <a:prstGeom prst="roundRect">
+            <a:avLst/>
+          </a:prstGeom>
+          <a:solidFill>
+            <a:srgbClr val="151B26"/>
+          </a:solidFill>
+          <a:ln>
+            <a:noFill/>
+          </a:ln>
+          <a:effectLst/>
+        </p:spPr>
+        <p:style>
+          <a:lnRef idx="1">
+            <a:schemeClr val="accent1"/>
+          </a:lnRef>
+          <a:fillRef idx="3">
+            <a:schemeClr val="accent1"/>
+          </a:fillRef>
+          <a:effectRef idx="2">
+            <a:schemeClr val="accent1"/>
+          </a:effectRef>
+          <a:fontRef idx="minor">
+            <a:schemeClr val="lt1"/>
+          </a:fontRef>
+        </p:style>
+        <p:txBody>
+          <a:bodyPr rtlCol="0" anchor="ctr"/>
+          <a:lstStyle/>
+          <a:p>
+            <a:pPr algn="ctr"/>
+          </a:p>
+        </p:txBody>
+      </p:sp>
+      <p:sp>
+        <p:nvSpPr>
+          <p:cNvPr id="16" name="Rectangle 15"/>
+          <p:cNvSpPr/>
+          <p:nvPr/>
+        </p:nvSpPr>
+        <p:spPr>
+          <a:xfrm>
+            <a:off x="8158276" y="2468880"/>
+            <a:ext cx="3393338" cy="82296"/>
+          </a:xfrm>
+          <a:prstGeom prst="rect">
+            <a:avLst/>
+          </a:prstGeom>
+          <a:solidFill>
+            <a:srgbClr val="00FF41"/>
+          </a:solidFill>
+          <a:ln>
+            <a:noFill/>
+          </a:ln>
+          <a:effectLst/>
+        </p:spPr>
+        <p:style>
+          <a:lnRef idx="1">
+            <a:schemeClr val="accent1"/>
+          </a:lnRef>
+          <a:fillRef idx="3">
+            <a:schemeClr val="accent1"/>
+          </a:fillRef>
+          <a:effectRef idx="2">
+            <a:schemeClr val="accent1"/>
+          </a:effectRef>
+          <a:fontRef idx="minor">
+            <a:schemeClr val="lt1"/>
+          </a:fontRef>
+        </p:style>
+        <p:txBody>
+          <a:bodyPr rtlCol="0" anchor="ctr"/>
+          <a:lstStyle/>
+          <a:p>
+            <a:pPr algn="ctr"/>
+          </a:p>
+        </p:txBody>
+      </p:sp>
+      <p:sp>
+        <p:nvSpPr>
+          <p:cNvPr id="17" name="TextBox 16"/>
+          <p:cNvSpPr txBox="1"/>
+          <p:nvPr/>
+        </p:nvSpPr>
+        <p:spPr>
+          <a:xfrm>
+            <a:off x="8432596" y="2788920"/>
+            <a:ext cx="2844698" cy="457200"/>
+          </a:xfrm>
+          <a:prstGeom prst="rect">
+            <a:avLst/>
+          </a:prstGeom>
+          <a:noFill/>
+        </p:spPr>
+        <p:txBody>
+          <a:bodyPr wrap="square" anchor="t">
+            <a:spAutoFit/>
+          </a:bodyPr>
+          <a:lstStyle/>
+          <a:p>
+            <a:pPr algn="l">
+              <a:lnSpc>
+                <a:spcPct val="100000"/>
+              </a:lnSpc>
+            </a:pPr>
+            <a:r>
+              <a:rPr sz="1200" b="1">
+                <a:solidFill>
+                  <a:srgbClr val="00FF41"/>
+                </a:solidFill>
+                <a:latin typeface="Courier New"/>
+              </a:rPr>
+              <a:t>TRADE-OFF</a:t>
+            </a:r>
+          </a:p>
+        </p:txBody>
+      </p:sp>
+      <p:sp>
+        <p:nvSpPr>
+          <p:cNvPr id="18" name="TextBox 17"/>
+          <p:cNvSpPr txBox="1"/>
+          <p:nvPr/>
+        </p:nvSpPr>
+        <p:spPr>
+          <a:xfrm>
+            <a:off x="8432596" y="3246120"/>
+            <a:ext cx="2844698" cy="822960"/>
+          </a:xfrm>
+          <a:prstGeom prst="rect">
+            <a:avLst/>
+          </a:prstGeom>
+          <a:noFill/>
+        </p:spPr>
+        <p:txBody>
+          <a:bodyPr wrap="square" anchor="t">
+            <a:spAutoFit/>
+          </a:bodyPr>
+          <a:lstStyle/>
+          <a:p>
+            <a:pPr algn="l">
+              <a:lnSpc>
+                <a:spcPct val="100000"/>
+              </a:lnSpc>
+            </a:pPr>
+            <a:r>
+              <a:rPr sz="2000" b="1">
                 <a:solidFill>
                   <a:srgbClr val="F5F7FA"/>
                 </a:solidFill>
                 <a:latin typeface="Arial"/>
               </a:rPr>
-              <a:t/>
-            </a:r>
-          </a:p>
-          <a:p>
-            <a:pPr algn="l">
-              <a:lnSpc>
-                <a:spcPct val="112000"/>
-              </a:lnSpc>
-            </a:pPr>
-            <a:r>
-              <a:rPr sz="2000" b="1">
-                <a:solidFill>
-                  <a:srgbClr val="00FF41"/>
-                </a:solidFill>
-                <a:latin typeface="Arial"/>
-              </a:rPr>
-              <a:t>Compromise — CFS</a:t>
-            </a:r>
-            <a:r>
-              <a:rPr sz="1800" b="0">
-                <a:solidFill>
-                  <a:srgbClr val="F5F7FA"/>
-                </a:solidFill>
-                <a:latin typeface="Arial"/>
-              </a:rPr>
-              <a:t>: use sensors instead of cameras, and alert the resident first. “As safety expands, dignity expands too.”</a:t>
-            </a:r>
-          </a:p>
-          <a:p>
-            <a:pPr algn="l">
-              <a:lnSpc>
-                <a:spcPct val="112000"/>
-              </a:lnSpc>
-            </a:pPr>
-            <a:r>
-              <a:rPr sz="2000" b="0">
-                <a:solidFill>
-                  <a:srgbClr val="F5F7FA"/>
-                </a:solidFill>
-                <a:latin typeface="Arial"/>
-              </a:rPr>
-              <a:t/>
-            </a:r>
-          </a:p>
-          <a:p>
-            <a:pPr algn="l">
-              <a:lnSpc>
-                <a:spcPct val="112000"/>
-              </a:lnSpc>
-            </a:pPr>
-            <a:r>
-              <a:rPr sz="2000" b="1">
-                <a:solidFill>
-                  <a:srgbClr val="00FF41"/>
-                </a:solidFill>
-                <a:latin typeface="Arial"/>
-              </a:rPr>
-              <a:t>Trade-off — JustFix</a:t>
-            </a:r>
-            <a:r>
-              <a:rPr sz="1800" b="0">
-                <a:solidFill>
-                  <a:srgbClr val="F5F7FA"/>
-                </a:solidFill>
-                <a:latin typeface="Arial"/>
-              </a:rPr>
-              <a:t>: keep the AI but change the use case — from legal advice (hallucination = harm) to emotional support (lower-risk). Cost named.</a:t>
-            </a:r>
-          </a:p>
-        </p:txBody>
-      </p:sp>
-      <p:sp>
-        <p:nvSpPr>
-          <p:cNvPr id="6" name="TextBox 5"/>
+              <a:t>Sacrifice one</a:t>
+            </a:r>
+          </a:p>
+        </p:txBody>
+      </p:sp>
+      <p:sp>
+        <p:nvSpPr>
+          <p:cNvPr id="19" name="TextBox 18"/>
+          <p:cNvSpPr txBox="1"/>
+          <p:nvPr/>
+        </p:nvSpPr>
+        <p:spPr>
+          <a:xfrm>
+            <a:off x="8432596" y="4114800"/>
+            <a:ext cx="2844698" cy="1554480"/>
+          </a:xfrm>
+          <a:prstGeom prst="rect">
+            <a:avLst/>
+          </a:prstGeom>
+          <a:noFill/>
+        </p:spPr>
+        <p:txBody>
+          <a:bodyPr wrap="square" anchor="t">
+            <a:spAutoFit/>
+          </a:bodyPr>
+          <a:lstStyle/>
+          <a:p>
+            <a:pPr algn="l">
+              <a:lnSpc>
+                <a:spcPct val="110000"/>
+              </a:lnSpc>
+            </a:pPr>
+            <a:r>
+              <a:rPr sz="1500" b="0">
+                <a:solidFill>
+                  <a:srgbClr val="8A94A6"/>
+                </a:solidFill>
+                <a:latin typeface="Arial"/>
+              </a:rPr>
+              <a:t>One value is given up for another - say so honestly. (Vacuum: full collection for max automation.)</a:t>
+            </a:r>
+          </a:p>
+        </p:txBody>
+      </p:sp>
+      <p:sp>
+        <p:nvSpPr>
+          <p:cNvPr id="20" name="TextBox 19"/>
           <p:cNvSpPr txBox="1"/>
           <p:nvPr/>
         </p:nvSpPr>
@@ -5501,7 +4876,7 @@
                 </a:solidFill>
                 <a:latin typeface="Courier New"/>
               </a:rPr>
-              <a:t>VERIFICATION</a:t>
+              <a:t>TODAY'S GUEST - ACCESSIBILITY</a:t>
             </a:r>
           </a:p>
         </p:txBody>
@@ -5584,7 +4959,7 @@
                 </a:solidFill>
                 <a:latin typeface="Arial"/>
               </a:rPr>
-              <a:t>Did the value actually land?</a:t>
+              <a:t>Accessibility is a value you can verify</a:t>
             </a:r>
           </a:p>
         </p:txBody>
@@ -5617,13 +4992,13 @@
               </a:lnSpc>
             </a:pPr>
             <a:r>
-              <a:rPr sz="2200" b="0">
+              <a:rPr sz="2000" b="0">
                 <a:solidFill>
                   <a:srgbClr val="F5F7FA"/>
                 </a:solidFill>
                 <a:latin typeface="Arial"/>
               </a:rPr>
-              <a:t>Two checks, borrowed from software testing:</a:t>
+              <a:t>Accessibility runs cleanly through all three lenses:</a:t>
             </a:r>
           </a:p>
           <a:p>
@@ -5649,31 +5024,88 @@
               </a:lnSpc>
             </a:pPr>
             <a:r>
+              <a:rPr sz="1900" b="1">
+                <a:solidFill>
+                  <a:srgbClr val="00FF41"/>
+                </a:solidFill>
+                <a:latin typeface="Arial"/>
+              </a:rPr>
+              <a:t>Behavior</a:t>
+            </a:r>
+            <a:r>
+              <a:rPr sz="1900" b="0">
+                <a:solidFill>
+                  <a:srgbClr val="F5F7FA"/>
+                </a:solidFill>
+                <a:latin typeface="Arial"/>
+              </a:rPr>
+              <a:t> - can a screen-reader user actually complete the task?</a:t>
+            </a:r>
+          </a:p>
+          <a:p>
+            <a:pPr algn="l">
+              <a:lnSpc>
+                <a:spcPct val="112000"/>
+              </a:lnSpc>
+            </a:pPr>
+            <a:r>
+              <a:rPr sz="1900" b="1">
+                <a:solidFill>
+                  <a:srgbClr val="00FF41"/>
+                </a:solidFill>
+                <a:latin typeface="Arial"/>
+              </a:rPr>
+              <a:t>Understanding</a:t>
+            </a:r>
+            <a:r>
+              <a:rPr sz="1900" b="0">
+                <a:solidFill>
+                  <a:srgbClr val="F5F7FA"/>
+                </a:solidFill>
+                <a:latin typeface="Arial"/>
+              </a:rPr>
+              <a:t> - are labels, states, and errors legible to everyone?</a:t>
+            </a:r>
+          </a:p>
+          <a:p>
+            <a:pPr algn="l">
+              <a:lnSpc>
+                <a:spcPct val="112000"/>
+              </a:lnSpc>
+            </a:pPr>
+            <a:r>
+              <a:rPr sz="1900" b="1">
+                <a:solidFill>
+                  <a:srgbClr val="00FF41"/>
+                </a:solidFill>
+                <a:latin typeface="Arial"/>
+              </a:rPr>
+              <a:t>Affect</a:t>
+            </a:r>
+            <a:r>
+              <a:rPr sz="1900" b="0">
+                <a:solidFill>
+                  <a:srgbClr val="F5F7FA"/>
+                </a:solidFill>
+                <a:latin typeface="Arial"/>
+              </a:rPr>
+              <a:t> - does the design respect the user, or work around them?</a:t>
+            </a:r>
+          </a:p>
+          <a:p>
+            <a:pPr algn="l">
+              <a:lnSpc>
+                <a:spcPct val="112000"/>
+              </a:lnSpc>
+            </a:pPr>
+            <a:r>
               <a:rPr sz="2000" b="0">
                 <a:solidFill>
                   <a:srgbClr val="F5F7FA"/>
                 </a:solidFill>
                 <a:latin typeface="Arial"/>
               </a:rPr>
-              <a:t>Did we build the </a:t>
-            </a:r>
-            <a:r>
-              <a:rPr sz="2000" b="1">
-                <a:solidFill>
-                  <a:srgbClr val="00FF41"/>
-                </a:solidFill>
-                <a:latin typeface="Arial"/>
-              </a:rPr>
-              <a:t>right thing</a:t>
-            </a:r>
-            <a:r>
-              <a:rPr sz="2000" b="0">
-                <a:solidFill>
-                  <a:srgbClr val="F5F7FA"/>
-                </a:solidFill>
-                <a:latin typeface="Arial"/>
-              </a:rPr>
-              <a:t>? — are the discovered values really in the system?</a:t>
+              <a:t/>
             </a:r>
           </a:p>
           <a:p>
@@ -5683,31 +5115,13 @@
               </a:lnSpc>
             </a:pPr>
             <a:r>
-              <a:rPr sz="2000" b="0">
-                <a:solidFill>
-                  <a:srgbClr val="F5F7FA"/>
-                </a:solidFill>
-                <a:latin typeface="Arial"/>
-              </a:rPr>
-              <a:t>Did we build it </a:t>
-            </a:r>
-            <a:r>
-              <a:rPr sz="2000" b="1">
-                <a:solidFill>
-                  <a:srgbClr val="00FF41"/>
-                </a:solidFill>
-                <a:latin typeface="Arial"/>
-              </a:rPr>
-              <a:t>right</a:t>
-            </a:r>
-            <a:r>
-              <a:rPr sz="2000" b="0">
-                <a:solidFill>
-                  <a:srgbClr val="F5F7FA"/>
-                </a:solidFill>
-                <a:latin typeface="Arial"/>
-              </a:rPr>
-              <a:t>? — do real people, in real contexts, experience the value?</a:t>
+              <a:rPr sz="1700" b="0">
+                <a:solidFill>
+                  <a:srgbClr val="8A94A6"/>
+                </a:solidFill>
+                <a:latin typeface="Arial"/>
+              </a:rPr>
+              <a:t>Borrow today's guest lecture as a lens - even if your value is something else.</a:t>
             </a:r>
           </a:p>
         </p:txBody>
@@ -5811,7 +5225,7 @@
                 </a:solidFill>
                 <a:latin typeface="Courier New"/>
               </a:rPr>
-              <a:t>ACTIVITY · PLAN</a:t>
+              <a:t>ACTIVITY - TODAY</a:t>
             </a:r>
           </a:p>
         </p:txBody>
@@ -5868,8 +5282,8 @@
         </p:nvSpPr>
         <p:spPr>
           <a:xfrm>
-            <a:off x="640080" y="1188720"/>
-            <a:ext cx="10972800" cy="914400"/>
+            <a:off x="640080" y="1325880"/>
+            <a:ext cx="10972800" cy="1828800"/>
           </a:xfrm>
           <a:prstGeom prst="rect">
             <a:avLst/>
@@ -5884,17 +5298,17 @@
           <a:p>
             <a:pPr algn="l">
               <a:lnSpc>
-                <a:spcPct val="100000"/>
-              </a:lnSpc>
-            </a:pPr>
-            <a:r>
-              <a:rPr sz="3200" b="1">
+                <a:spcPct val="105000"/>
+              </a:lnSpc>
+            </a:pPr>
+            <a:r>
+              <a:rPr sz="3800" b="1">
                 <a:solidFill>
                   <a:srgbClr val="F5F7FA"/>
                 </a:solidFill>
                 <a:latin typeface="Arial"/>
               </a:rPr>
-              <a:t>planning.md — the values check + your prompts</a:t>
+              <a:t>Verify the value your Project 2 claims - on your own.</a:t>
             </a:r>
           </a:p>
         </p:txBody>
@@ -5907,8 +5321,8 @@
         </p:nvSpPr>
         <p:spPr>
           <a:xfrm>
-            <a:off x="658368" y="2468880"/>
-            <a:ext cx="5394960" cy="3657600"/>
+            <a:off x="658368" y="3611880"/>
+            <a:ext cx="10972800" cy="1737360"/>
           </a:xfrm>
           <a:prstGeom prst="rect">
             <a:avLst/>
@@ -5927,31 +5341,22 @@
               </a:lnSpc>
             </a:pPr>
             <a:r>
-              <a:rPr sz="1500" b="1">
+              <a:rPr sz="1900" b="1">
                 <a:solidFill>
                   <a:srgbClr val="00FF41"/>
                 </a:solidFill>
-                <a:latin typeface="Courier New"/>
-              </a:rPr>
-              <a:t>01  </a:t>
-            </a:r>
-            <a:r>
-              <a:rPr sz="1600" b="1">
-                <a:solidFill>
-                  <a:srgbClr val="F5F7FA"/>
-                </a:solidFill>
-                <a:latin typeface="Arial"/>
-              </a:rPr>
-              <a:t>What value does it claim?  </a:t>
-            </a:r>
-            <a:r>
-              <a:rPr sz="1400" b="0">
+                <a:latin typeface="Arial"/>
+              </a:rPr>
+              <a:t>→  </a:t>
+            </a:r>
+            <a:r>
+              <a:rPr sz="1900" b="0">
                 <a:solidFill>
                   <a:srgbClr val="8A94A6"/>
                 </a:solidFill>
                 <a:latin typeface="Arial"/>
               </a:rPr>
-              <a:t>the value the team says the project serves</a:t>
+              <a:t>Operationalize the value your team claimed - what is concretely true if it is present?</a:t>
             </a:r>
           </a:p>
           <a:p>
@@ -5961,45 +5366,107 @@
               </a:lnSpc>
             </a:pPr>
             <a:r>
-              <a:rPr sz="1500" b="1">
+              <a:rPr sz="1900" b="1">
                 <a:solidFill>
                   <a:srgbClr val="00FF41"/>
                 </a:solidFill>
-                <a:latin typeface="Courier New"/>
-              </a:rPr>
-              <a:t>02  </a:t>
-            </a:r>
-            <a:r>
-              <a:rPr sz="1600" b="1">
-                <a:solidFill>
-                  <a:srgbClr val="F5F7FA"/>
-                </a:solidFill>
-                <a:latin typeface="Arial"/>
-              </a:rPr>
-              <a:t>What does it MEAN here?  </a:t>
-            </a:r>
-            <a:r>
-              <a:rPr sz="1400" b="0">
+                <a:latin typeface="Arial"/>
+              </a:rPr>
+              <a:t>→  </a:t>
+            </a:r>
+            <a:r>
+              <a:rPr sz="1900" b="0">
                 <a:solidFill>
                   <a:srgbClr val="8A94A6"/>
                 </a:solidFill>
                 <a:latin typeface="Arial"/>
               </a:rPr>
-              <a:t>operationalize it — privacy as control? secrecy? contextual integrity?</a:t>
-            </a:r>
-          </a:p>
-        </p:txBody>
-      </p:sp>
-      <p:sp>
-        <p:nvSpPr>
-          <p:cNvPr id="6" name="TextBox 5"/>
+              <a:t>Pick a lens (behavior / understanding / affect) + one validated instrument, and run a small check.</a:t>
+            </a:r>
+          </a:p>
+          <a:p>
+            <a:pPr algn="l">
+              <a:lnSpc>
+                <a:spcPct val="135000"/>
+              </a:lnSpc>
+            </a:pPr>
+            <a:r>
+              <a:rPr sz="1900" b="1">
+                <a:solidFill>
+                  <a:srgbClr val="00FF41"/>
+                </a:solidFill>
+                <a:latin typeface="Arial"/>
+              </a:rPr>
+              <a:t>→  </a:t>
+            </a:r>
+            <a:r>
+              <a:rPr sz="1900" b="0">
+                <a:solidFill>
+                  <a:srgbClr val="8A94A6"/>
+                </a:solidFill>
+                <a:latin typeface="Arial"/>
+              </a:rPr>
+              <a:t>Verdict: does it deliver? For whom? Who is excluded? Then the ONE fix you would make.</a:t>
+            </a:r>
+          </a:p>
+        </p:txBody>
+      </p:sp>
+      <p:sp>
+        <p:nvSpPr>
+          <p:cNvPr id="6" name="Rounded Rectangle 5"/>
+          <p:cNvSpPr/>
+          <p:nvPr/>
+        </p:nvSpPr>
+        <p:spPr>
+          <a:xfrm>
+            <a:off x="640080" y="5532120"/>
+            <a:ext cx="10911535" cy="658368"/>
+          </a:xfrm>
+          <a:prstGeom prst="roundRect">
+            <a:avLst/>
+          </a:prstGeom>
+          <a:solidFill>
+            <a:srgbClr val="151B26"/>
+          </a:solidFill>
+          <a:ln w="19050">
+            <a:solidFill>
+              <a:srgbClr val="00FF41"/>
+            </a:solidFill>
+          </a:ln>
+          <a:effectLst/>
+        </p:spPr>
+        <p:style>
+          <a:lnRef idx="1">
+            <a:schemeClr val="accent1"/>
+          </a:lnRef>
+          <a:fillRef idx="3">
+            <a:schemeClr val="accent1"/>
+          </a:fillRef>
+          <a:effectRef idx="2">
+            <a:schemeClr val="accent1"/>
+          </a:effectRef>
+          <a:fontRef idx="minor">
+            <a:schemeClr val="lt1"/>
+          </a:fontRef>
+        </p:style>
+        <p:txBody>
+          <a:bodyPr rtlCol="0" anchor="ctr"/>
+          <a:lstStyle/>
+          <a:p>
+            <a:pPr algn="ctr"/>
+          </a:p>
+        </p:txBody>
+      </p:sp>
+      <p:sp>
+        <p:nvSpPr>
+          <p:cNvPr id="7" name="TextBox 6"/>
           <p:cNvSpPr txBox="1"/>
           <p:nvPr/>
         </p:nvSpPr>
         <p:spPr>
           <a:xfrm>
-            <a:off x="6309360" y="2468880"/>
-            <a:ext cx="5394960" cy="3657600"/>
+            <a:off x="914400" y="5532120"/>
+            <a:ext cx="10362895" cy="658368"/>
           </a:xfrm>
           <a:prstGeom prst="rect">
             <a:avLst/>
@@ -6007,24 +5474,24 @@
           <a:noFill/>
         </p:spPr>
         <p:txBody>
-          <a:bodyPr wrap="square" anchor="t">
+          <a:bodyPr wrap="square" anchor="ctr">
             <a:spAutoFit/>
           </a:bodyPr>
           <a:lstStyle/>
           <a:p>
             <a:pPr algn="l">
               <a:lnSpc>
-                <a:spcPct val="135000"/>
-              </a:lnSpc>
-            </a:pPr>
-            <a:r>
-              <a:rPr sz="1500" b="1">
+                <a:spcPct val="100000"/>
+              </a:lnSpc>
+            </a:pPr>
+            <a:r>
+              <a:rPr sz="1600" b="1">
                 <a:solidFill>
                   <a:srgbClr val="00FF41"/>
                 </a:solidFill>
-                <a:latin typeface="Courier New"/>
-              </a:rPr>
-              <a:t>03  </a:t>
+                <a:latin typeface="Arial"/>
+              </a:rPr>
+              <a:t>▶  </a:t>
             </a:r>
             <a:r>
               <a:rPr sz="1600" b="1">
@@ -6033,57 +5500,14 @@
                 </a:solidFill>
                 <a:latin typeface="Arial"/>
               </a:rPr>
-              <a:t>Who’s it for — who’s left out?  </a:t>
-            </a:r>
-            <a:r>
-              <a:rPr sz="1400" b="0">
-                <a:solidFill>
-                  <a:srgbClr val="8A94A6"/>
-                </a:solidFill>
-                <a:latin typeface="Arial"/>
-              </a:rPr>
-              <a:t>who it serves, and who it could exclude or harm</a:t>
-            </a:r>
-          </a:p>
-          <a:p>
-            <a:pPr algn="l">
-              <a:lnSpc>
-                <a:spcPct val="135000"/>
-              </a:lnSpc>
-            </a:pPr>
-            <a:r>
-              <a:rPr sz="1500" b="1">
-                <a:solidFill>
-                  <a:srgbClr val="00FF41"/>
-                </a:solidFill>
-                <a:latin typeface="Courier New"/>
-              </a:rPr>
-              <a:t>04  </a:t>
-            </a:r>
-            <a:r>
-              <a:rPr sz="1600" b="1">
-                <a:solidFill>
-                  <a:srgbClr val="F5F7FA"/>
-                </a:solidFill>
-                <a:latin typeface="Arial"/>
-              </a:rPr>
-              <a:t>How would you know?  </a:t>
-            </a:r>
-            <a:r>
-              <a:rPr sz="1400" b="0">
-                <a:solidFill>
-                  <a:srgbClr val="8A94A6"/>
-                </a:solidFill>
-                <a:latin typeface="Arial"/>
-              </a:rPr>
-              <a:t>the observable tell that the value is being delivered</a:t>
-            </a:r>
-          </a:p>
-        </p:txBody>
-      </p:sp>
-      <p:sp>
-        <p:nvSpPr>
-          <p:cNvPr id="7" name="TextBox 6"/>
+              <a:t>Individual - on the group's Project 2 - deliverable = your value-verification report (vibe-report.md)</a:t>
+            </a:r>
+          </a:p>
+        </p:txBody>
+      </p:sp>
+      <p:sp>
+        <p:nvSpPr>
+          <p:cNvPr id="8" name="TextBox 7"/>
           <p:cNvSpPr txBox="1"/>
           <p:nvPr/>
         </p:nvSpPr>
@@ -6180,7 +5604,7 @@
                 </a:solidFill>
                 <a:latin typeface="Courier New"/>
               </a:rPr>
-              <a:t>ACTIVITY · RUN</a:t>
+              <a:t>SOURCES</a:t>
             </a:r>
           </a:p>
         </p:txBody>
@@ -6237,8 +5661,8 @@
         </p:nvSpPr>
         <p:spPr>
           <a:xfrm>
-            <a:off x="640080" y="1188720"/>
-            <a:ext cx="10972800" cy="1097280"/>
+            <a:off x="640080" y="1024128"/>
+            <a:ext cx="10972800" cy="731520"/>
           </a:xfrm>
           <a:prstGeom prst="rect">
             <a:avLst/>
@@ -6257,13 +5681,13 @@
               </a:lnSpc>
             </a:pPr>
             <a:r>
-              <a:rPr sz="3400" b="1">
+              <a:rPr sz="2800" b="1">
                 <a:solidFill>
                   <a:srgbClr val="F5F7FA"/>
                 </a:solidFill>
                 <a:latin typeface="Arial"/>
               </a:rPr>
-              <a:t>Execute the plan, then test the value</a:t>
+              <a:t>Verify, cite</a:t>
             </a:r>
           </a:p>
         </p:txBody>
@@ -6276,8 +5700,8 @@
         </p:nvSpPr>
         <p:spPr>
           <a:xfrm>
-            <a:off x="658368" y="2286000"/>
-            <a:ext cx="10881360" cy="3657600"/>
+            <a:off x="640080" y="1874519"/>
+            <a:ext cx="10911535" cy="402336"/>
           </a:xfrm>
           <a:prstGeom prst="rect">
             <a:avLst/>
@@ -6292,101 +5716,26 @@
           <a:p>
             <a:pPr algn="l">
               <a:lnSpc>
-                <a:spcPct val="112000"/>
-              </a:lnSpc>
-            </a:pPr>
-            <a:r>
-              <a:rPr sz="2000" b="1">
+                <a:spcPct val="100000"/>
+              </a:lnSpc>
+            </a:pPr>
+            <a:r>
+              <a:rPr sz="1250" b="1">
+                <a:solidFill>
+                  <a:srgbClr val="F5F7FA"/>
+                </a:solidFill>
+                <a:latin typeface="Arial"/>
+              </a:rPr>
+              <a:t>Flanagan &amp; Nissenbaum - Values at Play in Digital Games (MIT Press, 2014)  —  </a:t>
+            </a:r>
+            <a:r>
+              <a:rPr sz="1100" b="0">
                 <a:solidFill>
                   <a:srgbClr val="00FF41"/>
                 </a:solidFill>
-                <a:latin typeface="Arial"/>
-              </a:rPr>
-              <a:t>•  </a:t>
-            </a:r>
-            <a:r>
-              <a:rPr sz="2000" b="0">
-                <a:solidFill>
-                  <a:srgbClr val="F5F7FA"/>
-                </a:solidFill>
-                <a:latin typeface="Arial"/>
-              </a:rPr>
-              <a:t>Run your planned prompts unchanged — the auto-log will show whether you drifted.</a:t>
-            </a:r>
-          </a:p>
-          <a:p>
-            <a:pPr algn="l">
-              <a:lnSpc>
-                <a:spcPct val="112000"/>
-              </a:lnSpc>
-            </a:pPr>
-            <a:r>
-              <a:rPr sz="2000" b="1">
-                <a:solidFill>
-                  <a:srgbClr val="00FF41"/>
-                </a:solidFill>
-                <a:latin typeface="Arial"/>
-              </a:rPr>
-              <a:t>•  </a:t>
-            </a:r>
-            <a:r>
-              <a:rPr sz="2000" b="0">
-                <a:solidFill>
-                  <a:srgbClr val="F5F7FA"/>
-                </a:solidFill>
-                <a:latin typeface="Arial"/>
-              </a:rPr>
-              <a:t>Swap projects with another team — they run YOUR 3-question check as real users.</a:t>
-            </a:r>
-          </a:p>
-          <a:p>
-            <a:pPr algn="l">
-              <a:lnSpc>
-                <a:spcPct val="112000"/>
-              </a:lnSpc>
-            </a:pPr>
-            <a:r>
-              <a:rPr sz="2000" b="1">
-                <a:solidFill>
-                  <a:srgbClr val="00FF41"/>
-                </a:solidFill>
-                <a:latin typeface="Arial"/>
-              </a:rPr>
-              <a:t>•  </a:t>
-            </a:r>
-            <a:r>
-              <a:rPr sz="2000" b="0">
-                <a:solidFill>
-                  <a:srgbClr val="F5F7FA"/>
-                </a:solidFill>
-                <a:latin typeface="Arial"/>
-              </a:rPr>
-              <a:t>Testers: does the tool move you toward the value? Did it feel on your side? Who's excluded?</a:t>
-            </a:r>
-          </a:p>
-          <a:p>
-            <a:pPr algn="l">
-              <a:lnSpc>
-                <a:spcPct val="112000"/>
-              </a:lnSpc>
-            </a:pPr>
-            <a:r>
-              <a:rPr sz="2000" b="1">
-                <a:solidFill>
-                  <a:srgbClr val="00FF41"/>
-                </a:solidFill>
-                <a:latin typeface="Arial"/>
-              </a:rPr>
-              <a:t>•  </a:t>
-            </a:r>
-            <a:r>
-              <a:rPr sz="2000" b="0">
-                <a:solidFill>
-                  <a:srgbClr val="F5F7FA"/>
-                </a:solidFill>
-                <a:latin typeface="Arial"/>
-              </a:rPr>
-              <a:t>Name the values tension you find; suggest a dissolve / compromise / trade-off.</a:t>
+                <a:latin typeface="Courier New"/>
+              </a:rPr>
+              <a:t>mitpress.mit.edu</a:t>
             </a:r>
           </a:p>
         </p:txBody>
@@ -6399,8 +5748,8 @@
         </p:nvSpPr>
         <p:spPr>
           <a:xfrm>
-            <a:off x="640080" y="6355080"/>
-            <a:ext cx="10972800" cy="365760"/>
+            <a:off x="640080" y="2276855"/>
+            <a:ext cx="10911535" cy="402336"/>
           </a:xfrm>
           <a:prstGeom prst="rect">
             <a:avLst/>
@@ -6419,53 +5768,36 @@
               </a:lnSpc>
             </a:pPr>
             <a:r>
-              <a:rPr sz="1000" b="0">
-                <a:solidFill>
-                  <a:srgbClr val="5A6474"/>
+              <a:rPr sz="1250" b="1">
+                <a:solidFill>
+                  <a:srgbClr val="F5F7FA"/>
+                </a:solidFill>
+                <a:latin typeface="Arial"/>
+              </a:rPr>
+              <a:t>VAP verification framework - S. Engelmann &amp; H. Nissenbaum  —  </a:t>
+            </a:r>
+            <a:r>
+              <a:rPr sz="1100" b="0">
+                <a:solidFill>
+                  <a:srgbClr val="00FF41"/>
                 </a:solidFill>
                 <a:latin typeface="Courier New"/>
               </a:rPr>
-              <a:t>Good Code, Good Vibes · TECHIE 1121 · Cornell Tech · Summer 2026</a:t>
-            </a:r>
-          </a:p>
-        </p:txBody>
-      </p:sp>
-    </p:spTree>
-  </p:cSld>
-  <p:clrMapOvr>
-    <a:masterClrMapping/>
-  </p:clrMapOvr>
-</p:sld>
-</file>
-
-<file path=ppt/slides/slide15.xml><?xml version="1.0" encoding="utf-8"?>
-<p:sld xmlns:a="http://schemas.openxmlformats.org/drawingml/2006/main" xmlns:p="http://schemas.openxmlformats.org/presentationml/2006/main" xmlns:r="http://schemas.openxmlformats.org/officeDocument/2006/relationships">
-  <p:cSld>
-    <p:bg>
-      <p:bgPr>
-        <a:solidFill>
-          <a:srgbClr val="0B0E14"/>
-        </a:solidFill>
-        <a:effectLst/>
-      </p:bgPr>
-    </p:bg>
-    <p:spTree>
-      <p:nvGrpSpPr>
-        <p:cNvPr id="1" name=""/>
-        <p:cNvGrpSpPr/>
-        <p:nvPr/>
-      </p:nvGrpSpPr>
-      <p:grpSpPr/>
-      <p:sp>
-        <p:nvSpPr>
-          <p:cNvPr id="2" name="TextBox 1"/>
+              <a:t>Cornell Tech - INFO 5010 (PiTech Ethics)</a:t>
+            </a:r>
+          </a:p>
+        </p:txBody>
+      </p:sp>
+      <p:sp>
+        <p:nvSpPr>
+          <p:cNvPr id="7" name="TextBox 6"/>
           <p:cNvSpPr txBox="1"/>
           <p:nvPr/>
         </p:nvSpPr>
         <p:spPr>
           <a:xfrm>
-            <a:off x="640080" y="502920"/>
-            <a:ext cx="10058400" cy="365760"/>
+            <a:off x="640080" y="2679191"/>
+            <a:ext cx="10911535" cy="402336"/>
           </a:xfrm>
           <a:prstGeom prst="rect">
             <a:avLst/>
@@ -6484,71 +5816,36 @@
               </a:lnSpc>
             </a:pPr>
             <a:r>
-              <a:rPr sz="1300" b="1">
+              <a:rPr sz="1250" b="1">
+                <a:solidFill>
+                  <a:srgbClr val="F5F7FA"/>
+                </a:solidFill>
+                <a:latin typeface="Arial"/>
+              </a:rPr>
+              <a:t>UEQ - User Experience Questionnaire  —  </a:t>
+            </a:r>
+            <a:r>
+              <a:rPr sz="1100" b="0">
                 <a:solidFill>
                   <a:srgbClr val="00FF41"/>
                 </a:solidFill>
                 <a:latin typeface="Courier New"/>
               </a:rPr>
-              <a:t>ACTIVITY · VERIFY</a:t>
-            </a:r>
-          </a:p>
-        </p:txBody>
-      </p:sp>
-      <p:sp>
-        <p:nvSpPr>
-          <p:cNvPr id="3" name="Rectangle 2"/>
-          <p:cNvSpPr/>
-          <p:nvPr/>
-        </p:nvSpPr>
-        <p:spPr>
-          <a:xfrm>
-            <a:off x="640080" y="932688"/>
-            <a:ext cx="822960" cy="73152"/>
-          </a:xfrm>
-          <a:prstGeom prst="rect">
-            <a:avLst/>
-          </a:prstGeom>
-          <a:solidFill>
-            <a:srgbClr val="00FF41"/>
-          </a:solidFill>
-          <a:ln>
-            <a:noFill/>
-          </a:ln>
-          <a:effectLst/>
-        </p:spPr>
-        <p:style>
-          <a:lnRef idx="1">
-            <a:schemeClr val="accent1"/>
-          </a:lnRef>
-          <a:fillRef idx="3">
-            <a:schemeClr val="accent1"/>
-          </a:fillRef>
-          <a:effectRef idx="2">
-            <a:schemeClr val="accent1"/>
-          </a:effectRef>
-          <a:fontRef idx="minor">
-            <a:schemeClr val="lt1"/>
-          </a:fontRef>
-        </p:style>
-        <p:txBody>
-          <a:bodyPr rtlCol="0" anchor="ctr"/>
-          <a:lstStyle/>
-          <a:p>
-            <a:pPr algn="ctr"/>
-          </a:p>
-        </p:txBody>
-      </p:sp>
-      <p:sp>
-        <p:nvSpPr>
-          <p:cNvPr id="4" name="TextBox 3"/>
+              <a:t>ueq-online.org</a:t>
+            </a:r>
+          </a:p>
+        </p:txBody>
+      </p:sp>
+      <p:sp>
+        <p:nvSpPr>
+          <p:cNvPr id="8" name="TextBox 7"/>
           <p:cNvSpPr txBox="1"/>
           <p:nvPr/>
         </p:nvSpPr>
         <p:spPr>
           <a:xfrm>
-            <a:off x="640080" y="1188720"/>
-            <a:ext cx="10972800" cy="1097280"/>
+            <a:off x="640080" y="3081527"/>
+            <a:ext cx="10911535" cy="402336"/>
           </a:xfrm>
           <a:prstGeom prst="rect">
             <a:avLst/>
@@ -6567,27 +5864,36 @@
               </a:lnSpc>
             </a:pPr>
             <a:r>
-              <a:rPr sz="3400" b="1">
+              <a:rPr sz="1250" b="1">
                 <a:solidFill>
                   <a:srgbClr val="F5F7FA"/>
                 </a:solidFill>
                 <a:latin typeface="Arial"/>
               </a:rPr>
-              <a:t>Close the claim-vs-reality gap</a:t>
-            </a:r>
-          </a:p>
-        </p:txBody>
-      </p:sp>
-      <p:sp>
-        <p:nvSpPr>
-          <p:cNvPr id="5" name="TextBox 4"/>
+              <a:t>HRI Scale Database - Finding the Perfect Scale  —  </a:t>
+            </a:r>
+            <a:r>
+              <a:rPr sz="1100" b="0">
+                <a:solidFill>
+                  <a:srgbClr val="00FF41"/>
+                </a:solidFill>
+                <a:latin typeface="Courier New"/>
+              </a:rPr>
+              <a:t>hriscaledatabase.psychology.gmu.edu</a:t>
+            </a:r>
+          </a:p>
+        </p:txBody>
+      </p:sp>
+      <p:sp>
+        <p:nvSpPr>
+          <p:cNvPr id="9" name="TextBox 8"/>
           <p:cNvSpPr txBox="1"/>
           <p:nvPr/>
         </p:nvSpPr>
         <p:spPr>
           <a:xfrm>
-            <a:off x="658368" y="2286000"/>
-            <a:ext cx="10881360" cy="3657600"/>
+            <a:off x="640080" y="3483863"/>
+            <a:ext cx="10911535" cy="402336"/>
           </a:xfrm>
           <a:prstGeom prst="rect">
             <a:avLst/>
@@ -6602,115 +5908,40 @@
           <a:p>
             <a:pPr algn="l">
               <a:lnSpc>
-                <a:spcPct val="112000"/>
-              </a:lnSpc>
-            </a:pPr>
-            <a:r>
-              <a:rPr sz="2000" b="1">
+                <a:spcPct val="100000"/>
+              </a:lnSpc>
+            </a:pPr>
+            <a:r>
+              <a:rPr sz="1250" b="1">
+                <a:solidFill>
+                  <a:srgbClr val="F5F7FA"/>
+                </a:solidFill>
+                <a:latin typeface="Arial"/>
+              </a:rPr>
+              <a:t>METUX / Self-Determination scales  —  </a:t>
+            </a:r>
+            <a:r>
+              <a:rPr sz="1100" b="0">
                 <a:solidFill>
                   <a:srgbClr val="00FF41"/>
                 </a:solidFill>
-                <a:latin typeface="Arial"/>
-              </a:rPr>
-              <a:t>•  </a:t>
-            </a:r>
-            <a:r>
-              <a:rPr sz="2000" b="0">
-                <a:solidFill>
-                  <a:srgbClr val="F5F7FA"/>
-                </a:solidFill>
-                <a:latin typeface="Arial"/>
-              </a:rPr>
-              <a:t>Compare what testers experienced against your planning.md — where's the biggest gap?</a:t>
-            </a:r>
-          </a:p>
-          <a:p>
-            <a:pPr algn="l">
-              <a:lnSpc>
-                <a:spcPct val="112000"/>
-              </a:lnSpc>
-            </a:pPr>
-            <a:r>
-              <a:rPr sz="2000" b="1">
-                <a:solidFill>
-                  <a:srgbClr val="00FF41"/>
-                </a:solidFill>
-                <a:latin typeface="Arial"/>
-              </a:rPr>
-              <a:t>•  </a:t>
-            </a:r>
-            <a:r>
-              <a:rPr sz="2000" b="0">
-                <a:solidFill>
-                  <a:srgbClr val="F5F7FA"/>
-                </a:solidFill>
-                <a:latin typeface="Arial"/>
-              </a:rPr>
-              <a:t>Where did the AI's defaults bend your value while you weren't looking?</a:t>
-            </a:r>
-          </a:p>
-          <a:p>
-            <a:pPr algn="l">
-              <a:lnSpc>
-                <a:spcPct val="112000"/>
-              </a:lnSpc>
-            </a:pPr>
-            <a:r>
-              <a:rPr sz="2000" b="1">
-                <a:solidFill>
-                  <a:srgbClr val="00FF41"/>
-                </a:solidFill>
-                <a:latin typeface="Arial"/>
-              </a:rPr>
-              <a:t>•  </a:t>
-            </a:r>
-            <a:r>
-              <a:rPr sz="2000" b="0">
-                <a:solidFill>
-                  <a:srgbClr val="F5F7FA"/>
-                </a:solidFill>
-                <a:latin typeface="Arial"/>
-              </a:rPr>
-              <a:t>Close the biggest gap with one commit. Link it in your report.</a:t>
-            </a:r>
-          </a:p>
-          <a:p>
-            <a:pPr algn="l">
-              <a:lnSpc>
-                <a:spcPct val="112000"/>
-              </a:lnSpc>
-            </a:pPr>
-            <a:r>
-              <a:rPr sz="2000" b="1">
-                <a:solidFill>
-                  <a:srgbClr val="00FF41"/>
-                </a:solidFill>
-                <a:latin typeface="Arial"/>
-              </a:rPr>
-              <a:t>•  </a:t>
-            </a:r>
-            <a:r>
-              <a:rPr sz="2000" b="0">
-                <a:solidFill>
-                  <a:srgbClr val="F5F7FA"/>
-                </a:solidFill>
-                <a:latin typeface="Arial"/>
-              </a:rPr>
-              <a:t>Reading: Values at Play, Ch. 5 (Discovery).</a:t>
-            </a:r>
-          </a:p>
-        </p:txBody>
-      </p:sp>
-      <p:sp>
-        <p:nvSpPr>
-          <p:cNvPr id="6" name="TextBox 5"/>
+                <a:latin typeface="Courier New"/>
+              </a:rPr>
+              <a:t>selfdeterminationtheory.org/metux-scales</a:t>
+            </a:r>
+          </a:p>
+        </p:txBody>
+      </p:sp>
+      <p:sp>
+        <p:nvSpPr>
+          <p:cNvPr id="10" name="TextBox 9"/>
           <p:cNvSpPr txBox="1"/>
           <p:nvPr/>
         </p:nvSpPr>
         <p:spPr>
           <a:xfrm>
-            <a:off x="640080" y="6355080"/>
-            <a:ext cx="10972800" cy="365760"/>
+            <a:off x="640080" y="3886199"/>
+            <a:ext cx="10911535" cy="402336"/>
           </a:xfrm>
           <a:prstGeom prst="rect">
             <a:avLst/>
@@ -6729,53 +5960,36 @@
               </a:lnSpc>
             </a:pPr>
             <a:r>
-              <a:rPr sz="1000" b="0">
-                <a:solidFill>
-                  <a:srgbClr val="5A6474"/>
+              <a:rPr sz="1250" b="1">
+                <a:solidFill>
+                  <a:srgbClr val="F5F7FA"/>
+                </a:solidFill>
+                <a:latin typeface="Arial"/>
+              </a:rPr>
+              <a:t>Vibed Slop Detector + impeccable.style slop rules  —  </a:t>
+            </a:r>
+            <a:r>
+              <a:rPr sz="1100" b="0">
+                <a:solidFill>
+                  <a:srgbClr val="00FF41"/>
                 </a:solidFill>
                 <a:latin typeface="Courier New"/>
               </a:rPr>
-              <a:t>Good Code, Good Vibes · TECHIE 1121 · Cornell Tech · Summer 2026</a:t>
-            </a:r>
-          </a:p>
-        </p:txBody>
-      </p:sp>
-    </p:spTree>
-  </p:cSld>
-  <p:clrMapOvr>
-    <a:masterClrMapping/>
-  </p:clrMapOvr>
-</p:sld>
-</file>
-
-<file path=ppt/slides/slide16.xml><?xml version="1.0" encoding="utf-8"?>
-<p:sld xmlns:a="http://schemas.openxmlformats.org/drawingml/2006/main" xmlns:p="http://schemas.openxmlformats.org/presentationml/2006/main" xmlns:r="http://schemas.openxmlformats.org/officeDocument/2006/relationships">
-  <p:cSld>
-    <p:bg>
-      <p:bgPr>
-        <a:solidFill>
-          <a:srgbClr val="0B0E14"/>
-        </a:solidFill>
-        <a:effectLst/>
-      </p:bgPr>
-    </p:bg>
-    <p:spTree>
-      <p:nvGrpSpPr>
-        <p:cNvPr id="1" name=""/>
-        <p:cNvGrpSpPr/>
-        <p:nvPr/>
-      </p:nvGrpSpPr>
-      <p:grpSpPr/>
-      <p:sp>
-        <p:nvSpPr>
-          <p:cNvPr id="2" name="TextBox 1"/>
+              <a:t>github.com/HaukeCornell/Vibed-Slop-Detector</a:t>
+            </a:r>
+          </a:p>
+        </p:txBody>
+      </p:sp>
+      <p:sp>
+        <p:nvSpPr>
+          <p:cNvPr id="11" name="TextBox 10"/>
           <p:cNvSpPr txBox="1"/>
           <p:nvPr/>
         </p:nvSpPr>
         <p:spPr>
           <a:xfrm>
-            <a:off x="640080" y="502920"/>
-            <a:ext cx="10058400" cy="365760"/>
+            <a:off x="640080" y="4288535"/>
+            <a:ext cx="10911535" cy="402336"/>
           </a:xfrm>
           <a:prstGeom prst="rect">
             <a:avLst/>
@@ -6794,71 +6008,36 @@
               </a:lnSpc>
             </a:pPr>
             <a:r>
-              <a:rPr sz="1300" b="1">
+              <a:rPr sz="1250" b="1">
+                <a:solidFill>
+                  <a:srgbClr val="F5F7FA"/>
+                </a:solidFill>
+                <a:latin typeface="Arial"/>
+              </a:rPr>
+              <a:t>Romero et al. 2026 - Usable but Conventional (UEQ-S)  —  </a:t>
+            </a:r>
+            <a:r>
+              <a:rPr sz="1100" b="0">
                 <a:solidFill>
                   <a:srgbClr val="00FF41"/>
                 </a:solidFill>
                 <a:latin typeface="Courier New"/>
               </a:rPr>
-              <a:t>A HONEST CAUTION</a:t>
-            </a:r>
-          </a:p>
-        </p:txBody>
-      </p:sp>
-      <p:sp>
-        <p:nvSpPr>
-          <p:cNvPr id="3" name="Rectangle 2"/>
-          <p:cNvSpPr/>
-          <p:nvPr/>
-        </p:nvSpPr>
-        <p:spPr>
-          <a:xfrm>
-            <a:off x="640080" y="932688"/>
-            <a:ext cx="822960" cy="73152"/>
-          </a:xfrm>
-          <a:prstGeom prst="rect">
-            <a:avLst/>
-          </a:prstGeom>
-          <a:solidFill>
-            <a:srgbClr val="00FF41"/>
-          </a:solidFill>
-          <a:ln>
-            <a:noFill/>
-          </a:ln>
-          <a:effectLst/>
-        </p:spPr>
-        <p:style>
-          <a:lnRef idx="1">
-            <a:schemeClr val="accent1"/>
-          </a:lnRef>
-          <a:fillRef idx="3">
-            <a:schemeClr val="accent1"/>
-          </a:fillRef>
-          <a:effectRef idx="2">
-            <a:schemeClr val="accent1"/>
-          </a:effectRef>
-          <a:fontRef idx="minor">
-            <a:schemeClr val="lt1"/>
-          </a:fontRef>
-        </p:style>
-        <p:txBody>
-          <a:bodyPr rtlCol="0" anchor="ctr"/>
-          <a:lstStyle/>
-          <a:p>
-            <a:pPr algn="ctr"/>
-          </a:p>
-        </p:txBody>
-      </p:sp>
-      <p:sp>
-        <p:nvSpPr>
-          <p:cNvPr id="4" name="TextBox 3"/>
+              <a:t>arxiv.org/abs/2605.15124</a:t>
+            </a:r>
+          </a:p>
+        </p:txBody>
+      </p:sp>
+      <p:sp>
+        <p:nvSpPr>
+          <p:cNvPr id="12" name="TextBox 11"/>
           <p:cNvSpPr txBox="1"/>
           <p:nvPr/>
         </p:nvSpPr>
         <p:spPr>
           <a:xfrm>
-            <a:off x="640080" y="1188720"/>
-            <a:ext cx="10972800" cy="1097280"/>
+            <a:off x="640080" y="4690871"/>
+            <a:ext cx="10911535" cy="402336"/>
           </a:xfrm>
           <a:prstGeom prst="rect">
             <a:avLst/>
@@ -6877,109 +6056,29 @@
               </a:lnSpc>
             </a:pPr>
             <a:r>
-              <a:rPr sz="3400" b="1">
+              <a:rPr sz="1250" b="1">
                 <a:solidFill>
                   <a:srgbClr val="F5F7FA"/>
                 </a:solidFill>
                 <a:latin typeface="Arial"/>
               </a:rPr>
-              <a:t>VAP runs in your head — so bring real people in</a:t>
-            </a:r>
-          </a:p>
-        </p:txBody>
-      </p:sp>
-      <p:sp>
-        <p:nvSpPr>
-          <p:cNvPr id="5" name="TextBox 4"/>
-          <p:cNvSpPr txBox="1"/>
-          <p:nvPr/>
-        </p:nvSpPr>
-        <p:spPr>
-          <a:xfrm>
-            <a:off x="658368" y="2286000"/>
-            <a:ext cx="10881360" cy="3657600"/>
-          </a:xfrm>
-          <a:prstGeom prst="rect">
-            <a:avLst/>
-          </a:prstGeom>
-          <a:noFill/>
-        </p:spPr>
-        <p:txBody>
-          <a:bodyPr wrap="square" anchor="t">
-            <a:spAutoFit/>
-          </a:bodyPr>
-          <a:lstStyle/>
-          <a:p>
-            <a:pPr algn="l">
-              <a:lnSpc>
-                <a:spcPct val="112000"/>
-              </a:lnSpc>
-            </a:pPr>
-            <a:r>
-              <a:rPr sz="2100" b="0">
-                <a:solidFill>
-                  <a:srgbClr val="F5F7FA"/>
-                </a:solidFill>
-                <a:latin typeface="Arial"/>
-              </a:rPr>
-              <a:t>The framework’s blind spot: reflection and specification both happen in the designer’s mind. But the people affected — your users — aren’t in that loop.</a:t>
-            </a:r>
-          </a:p>
-          <a:p>
-            <a:pPr algn="l">
-              <a:lnSpc>
-                <a:spcPct val="112000"/>
-              </a:lnSpc>
-            </a:pPr>
-            <a:r>
-              <a:rPr sz="2000" b="0">
-                <a:solidFill>
-                  <a:srgbClr val="F5F7FA"/>
-                </a:solidFill>
-                <a:latin typeface="Arial"/>
-              </a:rPr>
-              <a:t/>
-            </a:r>
-          </a:p>
-          <a:p>
-            <a:pPr algn="l">
-              <a:lnSpc>
-                <a:spcPct val="112000"/>
-              </a:lnSpc>
-            </a:pPr>
-            <a:r>
-              <a:rPr sz="2000" b="0">
-                <a:solidFill>
-                  <a:srgbClr val="F5F7FA"/>
-                </a:solidFill>
-                <a:latin typeface="Arial"/>
-              </a:rPr>
-              <a:t>So pair VAP with real testing. Be a </a:t>
-            </a:r>
-            <a:r>
-              <a:rPr sz="2000" b="1">
+              <a:t>Sandhaus, Rhomberg, Nissenbaum 2026 - Indecent Persuasion (CHIWORK)  —  </a:t>
+            </a:r>
+            <a:r>
+              <a:rPr sz="1100" b="0">
                 <a:solidFill>
                   <a:srgbClr val="00FF41"/>
                 </a:solidFill>
-                <a:latin typeface="Arial"/>
-              </a:rPr>
-              <a:t>value mediator</a:t>
-            </a:r>
-            <a:r>
-              <a:rPr sz="2000" b="0">
-                <a:solidFill>
-                  <a:srgbClr val="F5F7FA"/>
-                </a:solidFill>
-                <a:latin typeface="Arial"/>
-              </a:rPr>
-              <a:t> — surface the values your users hold — not just a value selector.</a:t>
-            </a:r>
-          </a:p>
-        </p:txBody>
-      </p:sp>
-      <p:sp>
-        <p:nvSpPr>
-          <p:cNvPr id="6" name="TextBox 5"/>
+                <a:latin typeface="Courier New"/>
+              </a:rPr>
+              <a:t>osf.io/nw2tj</a:t>
+            </a:r>
+          </a:p>
+        </p:txBody>
+      </p:sp>
+      <p:sp>
+        <p:nvSpPr>
+          <p:cNvPr id="13" name="TextBox 12"/>
           <p:cNvSpPr txBox="1"/>
           <p:nvPr/>
         </p:nvSpPr>
@@ -7159,7 +6258,7 @@
                 </a:solidFill>
                 <a:latin typeface="Arial"/>
               </a:rPr>
-              <a:t>Usable ≠ right</a:t>
+              <a:t>Usable is not the same as right</a:t>
             </a:r>
           </a:p>
         </p:txBody>
@@ -7198,7 +6297,43 @@
                 </a:solidFill>
                 <a:latin typeface="Arial"/>
               </a:rPr>
-              <a:t>A dark pattern can be beautifully usable. “Does it work?” and “does it do the right thing?” are different questions.</a:t>
+              <a:t>Yesterday: can people </a:t>
+            </a:r>
+            <a:r>
+              <a:rPr sz="2200" b="1">
+                <a:solidFill>
+                  <a:srgbClr val="00FF41"/>
+                </a:solidFill>
+                <a:latin typeface="Arial"/>
+              </a:rPr>
+              <a:t>use</a:t>
+            </a:r>
+            <a:r>
+              <a:rPr sz="2200" b="0">
+                <a:solidFill>
+                  <a:srgbClr val="F5F7FA"/>
+                </a:solidFill>
+                <a:latin typeface="Arial"/>
+              </a:rPr>
+              <a:t> your Project 2? Today: does it deliver the </a:t>
+            </a:r>
+            <a:r>
+              <a:rPr sz="2200" b="1">
+                <a:solidFill>
+                  <a:srgbClr val="00FF41"/>
+                </a:solidFill>
+                <a:latin typeface="Arial"/>
+              </a:rPr>
+              <a:t>value your team claimed</a:t>
+            </a:r>
+            <a:r>
+              <a:rPr sz="2200" b="0">
+                <a:solidFill>
+                  <a:srgbClr val="F5F7FA"/>
+                </a:solidFill>
+                <a:latin typeface="Arial"/>
+              </a:rPr>
+              <a:t> - for the person you claimed to serve?</a:t>
             </a:r>
           </a:p>
           <a:p>
@@ -7224,31 +6359,13 @@
               </a:lnSpc>
             </a:pPr>
             <a:r>
-              <a:rPr sz="2000" b="0">
-                <a:solidFill>
-                  <a:srgbClr val="F5F7FA"/>
-                </a:solidFill>
-                <a:latin typeface="Arial"/>
-              </a:rPr>
-              <a:t>Today we test the second one — with a framework: </a:t>
-            </a:r>
-            <a:r>
-              <a:rPr sz="2000" b="1">
-                <a:solidFill>
-                  <a:srgbClr val="00FF41"/>
-                </a:solidFill>
-                <a:latin typeface="Arial"/>
-              </a:rPr>
-              <a:t>Values at Play</a:t>
-            </a:r>
-            <a:r>
-              <a:rPr sz="2000" b="0">
-                <a:solidFill>
-                  <a:srgbClr val="F5F7FA"/>
-                </a:solidFill>
-                <a:latin typeface="Arial"/>
-              </a:rPr>
-              <a:t> (Flanagan &amp; Nissenbaum).</a:t>
+              <a:rPr sz="1900" b="0">
+                <a:solidFill>
+                  <a:srgbClr val="8A94A6"/>
+                </a:solidFill>
+                <a:latin typeface="Arial"/>
+              </a:rPr>
+              <a:t>A tool can be flawless to use and still fail its value - quietly nudging, excluding, or manipulating the very person it says it helps.</a:t>
             </a:r>
           </a:p>
         </p:txBody>
@@ -7401,16 +6518,41 @@
           </a:p>
         </p:txBody>
       </p:sp>
-      <p:sp>
-        <p:nvSpPr>
-          <p:cNvPr id="4" name="TextBox 3"/>
+      <p:pic>
+        <p:nvPicPr>
+          <p:cNvPr id="4" name="Picture 3" descr="vap_book.png"/>
+          <p:cNvPicPr>
+            <a:picLocks noChangeAspect="1"/>
+          </p:cNvPicPr>
+          <p:nvPr/>
+        </p:nvPicPr>
+        <p:blipFill>
+          <a:blip r:embed="rId2"/>
+          <a:srcRect t="5896" b="5896"/>
+          <a:stretch>
+            <a:fillRect/>
+          </a:stretch>
+        </p:blipFill>
+        <p:spPr>
+          <a:xfrm>
+            <a:off x="7071055" y="0"/>
+            <a:ext cx="5120640" cy="6858000"/>
+          </a:xfrm>
+          <a:prstGeom prst="rect">
+            <a:avLst/>
+          </a:prstGeom>
+        </p:spPr>
+      </p:pic>
+      <p:sp>
+        <p:nvSpPr>
+          <p:cNvPr id="5" name="TextBox 4"/>
           <p:cNvSpPr txBox="1"/>
           <p:nvPr/>
         </p:nvSpPr>
         <p:spPr>
           <a:xfrm>
             <a:off x="640080" y="1188720"/>
-            <a:ext cx="10972800" cy="914400"/>
+            <a:ext cx="6019495" cy="1280160"/>
           </a:xfrm>
           <a:prstGeom prst="rect">
             <a:avLst/>
@@ -7429,33 +6571,163 @@
               </a:lnSpc>
             </a:pPr>
             <a:r>
-              <a:rPr sz="3200" b="1">
+              <a:rPr sz="3000" b="1">
                 <a:solidFill>
                   <a:srgbClr val="F5F7FA"/>
                 </a:solidFill>
                 <a:latin typeface="Arial"/>
               </a:rPr>
-              <a:t>Values at Play — three moves</a:t>
-            </a:r>
-          </a:p>
-        </p:txBody>
-      </p:sp>
-      <p:sp>
-        <p:nvSpPr>
-          <p:cNvPr id="5" name="Rounded Rectangle 4"/>
+              <a:t>Discovery -&gt; Implementation -&gt; Verification</a:t>
+            </a:r>
+          </a:p>
+        </p:txBody>
+      </p:sp>
+      <p:sp>
+        <p:nvSpPr>
+          <p:cNvPr id="6" name="TextBox 5"/>
+          <p:cNvSpPr txBox="1"/>
+          <p:nvPr/>
+        </p:nvSpPr>
+        <p:spPr>
+          <a:xfrm>
+            <a:off x="640080" y="2560320"/>
+            <a:ext cx="6019495" cy="3108960"/>
+          </a:xfrm>
+          <a:prstGeom prst="rect">
+            <a:avLst/>
+          </a:prstGeom>
+          <a:noFill/>
+        </p:spPr>
+        <p:txBody>
+          <a:bodyPr wrap="square" anchor="t">
+            <a:spAutoFit/>
+          </a:bodyPr>
+          <a:lstStyle/>
+          <a:p>
+            <a:pPr algn="l">
+              <a:lnSpc>
+                <a:spcPct val="116000"/>
+              </a:lnSpc>
+            </a:pPr>
+            <a:r>
+              <a:rPr sz="1900" b="1">
+                <a:solidFill>
+                  <a:srgbClr val="00FF41"/>
+                </a:solidFill>
+                <a:latin typeface="Arial"/>
+              </a:rPr>
+              <a:t>Discovery</a:t>
+            </a:r>
+            <a:r>
+              <a:rPr sz="1800" b="0">
+                <a:solidFill>
+                  <a:srgbClr val="F5F7FA"/>
+                </a:solidFill>
+                <a:latin typeface="Arial"/>
+              </a:rPr>
+              <a:t> - what values, and what do they mean here?</a:t>
+            </a:r>
+          </a:p>
+          <a:p>
+            <a:pPr algn="l">
+              <a:lnSpc>
+                <a:spcPct val="116000"/>
+              </a:lnSpc>
+            </a:pPr>
+            <a:r>
+              <a:rPr sz="1900" b="1">
+                <a:solidFill>
+                  <a:srgbClr val="00FF41"/>
+                </a:solidFill>
+                <a:latin typeface="Arial"/>
+              </a:rPr>
+              <a:t>Implementation</a:t>
+            </a:r>
+            <a:r>
+              <a:rPr sz="1800" b="0">
+                <a:solidFill>
+                  <a:srgbClr val="F5F7FA"/>
+                </a:solidFill>
+                <a:latin typeface="Arial"/>
+              </a:rPr>
+              <a:t> - translate values into features; resolve conflicts.</a:t>
+            </a:r>
+          </a:p>
+          <a:p>
+            <a:pPr algn="l">
+              <a:lnSpc>
+                <a:spcPct val="116000"/>
+              </a:lnSpc>
+            </a:pPr>
+            <a:r>
+              <a:rPr sz="1900" b="1">
+                <a:solidFill>
+                  <a:srgbClr val="00FF41"/>
+                </a:solidFill>
+                <a:latin typeface="Arial"/>
+              </a:rPr>
+              <a:t>Verification</a:t>
+            </a:r>
+            <a:r>
+              <a:rPr sz="1800" b="0">
+                <a:solidFill>
+                  <a:srgbClr val="F5F7FA"/>
+                </a:solidFill>
+                <a:latin typeface="Arial"/>
+              </a:rPr>
+              <a:t> - did it work? That is today.</a:t>
+            </a:r>
+          </a:p>
+          <a:p>
+            <a:pPr algn="l">
+              <a:lnSpc>
+                <a:spcPct val="116000"/>
+              </a:lnSpc>
+            </a:pPr>
+            <a:r>
+              <a:rPr sz="1900" b="0">
+                <a:solidFill>
+                  <a:srgbClr val="F5F7FA"/>
+                </a:solidFill>
+                <a:latin typeface="Arial"/>
+              </a:rPr>
+              <a:t/>
+            </a:r>
+          </a:p>
+          <a:p>
+            <a:pPr algn="l">
+              <a:lnSpc>
+                <a:spcPct val="116000"/>
+              </a:lnSpc>
+            </a:pPr>
+            <a:r>
+              <a:rPr sz="1500" b="0">
+                <a:solidFill>
+                  <a:srgbClr val="8A94A6"/>
+                </a:solidFill>
+                <a:latin typeface="Arial"/>
+              </a:rPr>
+              <a:t>"Assessing whether efforts to integrate values have succeeded." Cyclical - ask at every step.</a:t>
+            </a:r>
+          </a:p>
+        </p:txBody>
+      </p:sp>
+      <p:sp>
+        <p:nvSpPr>
+          <p:cNvPr id="7" name="Rectangle 6"/>
           <p:cNvSpPr/>
           <p:nvPr/>
         </p:nvSpPr>
         <p:spPr>
           <a:xfrm>
-            <a:off x="640080" y="2468880"/>
-            <a:ext cx="3393338" cy="3383280"/>
-          </a:xfrm>
-          <a:prstGeom prst="roundRect">
+            <a:off x="7071055" y="6547104"/>
+            <a:ext cx="5120640" cy="310896"/>
+          </a:xfrm>
+          <a:prstGeom prst="rect">
             <a:avLst/>
           </a:prstGeom>
           <a:solidFill>
-            <a:srgbClr val="151B26"/>
+            <a:srgbClr val="0B0E14"/>
           </a:solidFill>
           <a:ln>
             <a:noFill/>
@@ -7486,58 +6758,14 @@
       </p:sp>
       <p:sp>
         <p:nvSpPr>
-          <p:cNvPr id="6" name="Rectangle 5"/>
-          <p:cNvSpPr/>
-          <p:nvPr/>
-        </p:nvSpPr>
-        <p:spPr>
-          <a:xfrm>
-            <a:off x="640080" y="2468880"/>
-            <a:ext cx="3393338" cy="82296"/>
-          </a:xfrm>
-          <a:prstGeom prst="rect">
-            <a:avLst/>
-          </a:prstGeom>
-          <a:solidFill>
-            <a:srgbClr val="00FF41"/>
-          </a:solidFill>
-          <a:ln>
-            <a:noFill/>
-          </a:ln>
-          <a:effectLst/>
-        </p:spPr>
-        <p:style>
-          <a:lnRef idx="1">
-            <a:schemeClr val="accent1"/>
-          </a:lnRef>
-          <a:fillRef idx="3">
-            <a:schemeClr val="accent1"/>
-          </a:fillRef>
-          <a:effectRef idx="2">
-            <a:schemeClr val="accent1"/>
-          </a:effectRef>
-          <a:fontRef idx="minor">
-            <a:schemeClr val="lt1"/>
-          </a:fontRef>
-        </p:style>
-        <p:txBody>
-          <a:bodyPr rtlCol="0" anchor="ctr"/>
-          <a:lstStyle/>
-          <a:p>
-            <a:pPr algn="ctr"/>
-          </a:p>
-        </p:txBody>
-      </p:sp>
-      <p:sp>
-        <p:nvSpPr>
-          <p:cNvPr id="7" name="TextBox 6"/>
+          <p:cNvPr id="8" name="TextBox 7"/>
           <p:cNvSpPr txBox="1"/>
           <p:nvPr/>
         </p:nvSpPr>
         <p:spPr>
           <a:xfrm>
-            <a:off x="914400" y="2788920"/>
-            <a:ext cx="2844698" cy="457200"/>
+            <a:off x="7208215" y="6565392"/>
+            <a:ext cx="4846320" cy="274320"/>
           </a:xfrm>
           <a:prstGeom prst="rect">
             <a:avLst/>
@@ -7556,52 +6784,13 @@
               </a:lnSpc>
             </a:pPr>
             <a:r>
-              <a:rPr sz="1200" b="1">
-                <a:solidFill>
-                  <a:srgbClr val="00FF41"/>
+              <a:rPr sz="850" b="0">
+                <a:solidFill>
+                  <a:srgbClr val="8A94A6"/>
                 </a:solidFill>
                 <a:latin typeface="Courier New"/>
               </a:rPr>
-              <a:t>01 · DISCOVERY</a:t>
-            </a:r>
-          </a:p>
-        </p:txBody>
-      </p:sp>
-      <p:sp>
-        <p:nvSpPr>
-          <p:cNvPr id="8" name="TextBox 7"/>
-          <p:cNvSpPr txBox="1"/>
-          <p:nvPr/>
-        </p:nvSpPr>
-        <p:spPr>
-          <a:xfrm>
-            <a:off x="914400" y="3246120"/>
-            <a:ext cx="2844698" cy="822960"/>
-          </a:xfrm>
-          <a:prstGeom prst="rect">
-            <a:avLst/>
-          </a:prstGeom>
-          <a:noFill/>
-        </p:spPr>
-        <p:txBody>
-          <a:bodyPr wrap="square" anchor="t">
-            <a:spAutoFit/>
-          </a:bodyPr>
-          <a:lstStyle/>
-          <a:p>
-            <a:pPr algn="l">
-              <a:lnSpc>
-                <a:spcPct val="100000"/>
-              </a:lnSpc>
-            </a:pPr>
-            <a:r>
-              <a:rPr sz="2000" b="1">
-                <a:solidFill>
-                  <a:srgbClr val="F5F7FA"/>
-                </a:solidFill>
-                <a:latin typeface="Arial"/>
-              </a:rPr>
-              <a:t>What values?</a:t>
+              <a:t>Flanagan &amp; Nissenbaum, Values at Play (MIT Press) - VAP course, Engelmann &amp; Nissenbaum, Cornell Tech</a:t>
             </a:r>
           </a:p>
         </p:txBody>
@@ -7609,455 +6798,6 @@
       <p:sp>
         <p:nvSpPr>
           <p:cNvPr id="9" name="TextBox 8"/>
-          <p:cNvSpPr txBox="1"/>
-          <p:nvPr/>
-        </p:nvSpPr>
-        <p:spPr>
-          <a:xfrm>
-            <a:off x="914400" y="4114800"/>
-            <a:ext cx="2844698" cy="1554480"/>
-          </a:xfrm>
-          <a:prstGeom prst="rect">
-            <a:avLst/>
-          </a:prstGeom>
-          <a:noFill/>
-        </p:spPr>
-        <p:txBody>
-          <a:bodyPr wrap="square" anchor="t">
-            <a:spAutoFit/>
-          </a:bodyPr>
-          <a:lstStyle/>
-          <a:p>
-            <a:pPr algn="l">
-              <a:lnSpc>
-                <a:spcPct val="110000"/>
-              </a:lnSpc>
-            </a:pPr>
-            <a:r>
-              <a:rPr sz="1500" b="0">
-                <a:solidFill>
-                  <a:srgbClr val="8A94A6"/>
-                </a:solidFill>
-                <a:latin typeface="Arial"/>
-              </a:rPr>
-              <a:t>Find the values at play; define them in concrete terms.</a:t>
-            </a:r>
-          </a:p>
-        </p:txBody>
-      </p:sp>
-      <p:sp>
-        <p:nvSpPr>
-          <p:cNvPr id="10" name="Rounded Rectangle 9"/>
-          <p:cNvSpPr/>
-          <p:nvPr/>
-        </p:nvSpPr>
-        <p:spPr>
-          <a:xfrm>
-            <a:off x="4399178" y="2468880"/>
-            <a:ext cx="3393338" cy="3383280"/>
-          </a:xfrm>
-          <a:prstGeom prst="roundRect">
-            <a:avLst/>
-          </a:prstGeom>
-          <a:solidFill>
-            <a:srgbClr val="151B26"/>
-          </a:solidFill>
-          <a:ln>
-            <a:noFill/>
-          </a:ln>
-          <a:effectLst/>
-        </p:spPr>
-        <p:style>
-          <a:lnRef idx="1">
-            <a:schemeClr val="accent1"/>
-          </a:lnRef>
-          <a:fillRef idx="3">
-            <a:schemeClr val="accent1"/>
-          </a:fillRef>
-          <a:effectRef idx="2">
-            <a:schemeClr val="accent1"/>
-          </a:effectRef>
-          <a:fontRef idx="minor">
-            <a:schemeClr val="lt1"/>
-          </a:fontRef>
-        </p:style>
-        <p:txBody>
-          <a:bodyPr rtlCol="0" anchor="ctr"/>
-          <a:lstStyle/>
-          <a:p>
-            <a:pPr algn="ctr"/>
-          </a:p>
-        </p:txBody>
-      </p:sp>
-      <p:sp>
-        <p:nvSpPr>
-          <p:cNvPr id="11" name="Rectangle 10"/>
-          <p:cNvSpPr/>
-          <p:nvPr/>
-        </p:nvSpPr>
-        <p:spPr>
-          <a:xfrm>
-            <a:off x="4399178" y="2468880"/>
-            <a:ext cx="3393338" cy="82296"/>
-          </a:xfrm>
-          <a:prstGeom prst="rect">
-            <a:avLst/>
-          </a:prstGeom>
-          <a:solidFill>
-            <a:srgbClr val="00FF41"/>
-          </a:solidFill>
-          <a:ln>
-            <a:noFill/>
-          </a:ln>
-          <a:effectLst/>
-        </p:spPr>
-        <p:style>
-          <a:lnRef idx="1">
-            <a:schemeClr val="accent1"/>
-          </a:lnRef>
-          <a:fillRef idx="3">
-            <a:schemeClr val="accent1"/>
-          </a:fillRef>
-          <a:effectRef idx="2">
-            <a:schemeClr val="accent1"/>
-          </a:effectRef>
-          <a:fontRef idx="minor">
-            <a:schemeClr val="lt1"/>
-          </a:fontRef>
-        </p:style>
-        <p:txBody>
-          <a:bodyPr rtlCol="0" anchor="ctr"/>
-          <a:lstStyle/>
-          <a:p>
-            <a:pPr algn="ctr"/>
-          </a:p>
-        </p:txBody>
-      </p:sp>
-      <p:sp>
-        <p:nvSpPr>
-          <p:cNvPr id="12" name="TextBox 11"/>
-          <p:cNvSpPr txBox="1"/>
-          <p:nvPr/>
-        </p:nvSpPr>
-        <p:spPr>
-          <a:xfrm>
-            <a:off x="4673498" y="2788920"/>
-            <a:ext cx="2844698" cy="457200"/>
-          </a:xfrm>
-          <a:prstGeom prst="rect">
-            <a:avLst/>
-          </a:prstGeom>
-          <a:noFill/>
-        </p:spPr>
-        <p:txBody>
-          <a:bodyPr wrap="square" anchor="t">
-            <a:spAutoFit/>
-          </a:bodyPr>
-          <a:lstStyle/>
-          <a:p>
-            <a:pPr algn="l">
-              <a:lnSpc>
-                <a:spcPct val="100000"/>
-              </a:lnSpc>
-            </a:pPr>
-            <a:r>
-              <a:rPr sz="1200" b="1">
-                <a:solidFill>
-                  <a:srgbClr val="00FF41"/>
-                </a:solidFill>
-                <a:latin typeface="Courier New"/>
-              </a:rPr>
-              <a:t>02 · IMPLEMENTATION</a:t>
-            </a:r>
-          </a:p>
-        </p:txBody>
-      </p:sp>
-      <p:sp>
-        <p:nvSpPr>
-          <p:cNvPr id="13" name="TextBox 12"/>
-          <p:cNvSpPr txBox="1"/>
-          <p:nvPr/>
-        </p:nvSpPr>
-        <p:spPr>
-          <a:xfrm>
-            <a:off x="4673498" y="3246120"/>
-            <a:ext cx="2844698" cy="822960"/>
-          </a:xfrm>
-          <a:prstGeom prst="rect">
-            <a:avLst/>
-          </a:prstGeom>
-          <a:noFill/>
-        </p:spPr>
-        <p:txBody>
-          <a:bodyPr wrap="square" anchor="t">
-            <a:spAutoFit/>
-          </a:bodyPr>
-          <a:lstStyle/>
-          <a:p>
-            <a:pPr algn="l">
-              <a:lnSpc>
-                <a:spcPct val="100000"/>
-              </a:lnSpc>
-            </a:pPr>
-            <a:r>
-              <a:rPr sz="2000" b="1">
-                <a:solidFill>
-                  <a:srgbClr val="F5F7FA"/>
-                </a:solidFill>
-                <a:latin typeface="Arial"/>
-              </a:rPr>
-              <a:t>Build them in</a:t>
-            </a:r>
-          </a:p>
-        </p:txBody>
-      </p:sp>
-      <p:sp>
-        <p:nvSpPr>
-          <p:cNvPr id="14" name="TextBox 13"/>
-          <p:cNvSpPr txBox="1"/>
-          <p:nvPr/>
-        </p:nvSpPr>
-        <p:spPr>
-          <a:xfrm>
-            <a:off x="4673498" y="4114800"/>
-            <a:ext cx="2844698" cy="1554480"/>
-          </a:xfrm>
-          <a:prstGeom prst="rect">
-            <a:avLst/>
-          </a:prstGeom>
-          <a:noFill/>
-        </p:spPr>
-        <p:txBody>
-          <a:bodyPr wrap="square" anchor="t">
-            <a:spAutoFit/>
-          </a:bodyPr>
-          <a:lstStyle/>
-          <a:p>
-            <a:pPr algn="l">
-              <a:lnSpc>
-                <a:spcPct val="110000"/>
-              </a:lnSpc>
-            </a:pPr>
-            <a:r>
-              <a:rPr sz="1500" b="0">
-                <a:solidFill>
-                  <a:srgbClr val="8A94A6"/>
-                </a:solidFill>
-                <a:latin typeface="Arial"/>
-              </a:rPr>
-              <a:t>Turn values into features; resolve the clashes.</a:t>
-            </a:r>
-          </a:p>
-        </p:txBody>
-      </p:sp>
-      <p:sp>
-        <p:nvSpPr>
-          <p:cNvPr id="15" name="Rounded Rectangle 14"/>
-          <p:cNvSpPr/>
-          <p:nvPr/>
-        </p:nvSpPr>
-        <p:spPr>
-          <a:xfrm>
-            <a:off x="8158276" y="2468880"/>
-            <a:ext cx="3393338" cy="3383280"/>
-          </a:xfrm>
-          <a:prstGeom prst="roundRect">
-            <a:avLst/>
-          </a:prstGeom>
-          <a:solidFill>
-            <a:srgbClr val="151B26"/>
-          </a:solidFill>
-          <a:ln>
-            <a:noFill/>
-          </a:ln>
-          <a:effectLst/>
-        </p:spPr>
-        <p:style>
-          <a:lnRef idx="1">
-            <a:schemeClr val="accent1"/>
-          </a:lnRef>
-          <a:fillRef idx="3">
-            <a:schemeClr val="accent1"/>
-          </a:fillRef>
-          <a:effectRef idx="2">
-            <a:schemeClr val="accent1"/>
-          </a:effectRef>
-          <a:fontRef idx="minor">
-            <a:schemeClr val="lt1"/>
-          </a:fontRef>
-        </p:style>
-        <p:txBody>
-          <a:bodyPr rtlCol="0" anchor="ctr"/>
-          <a:lstStyle/>
-          <a:p>
-            <a:pPr algn="ctr"/>
-          </a:p>
-        </p:txBody>
-      </p:sp>
-      <p:sp>
-        <p:nvSpPr>
-          <p:cNvPr id="16" name="Rectangle 15"/>
-          <p:cNvSpPr/>
-          <p:nvPr/>
-        </p:nvSpPr>
-        <p:spPr>
-          <a:xfrm>
-            <a:off x="8158276" y="2468880"/>
-            <a:ext cx="3393338" cy="82296"/>
-          </a:xfrm>
-          <a:prstGeom prst="rect">
-            <a:avLst/>
-          </a:prstGeom>
-          <a:solidFill>
-            <a:srgbClr val="00FF41"/>
-          </a:solidFill>
-          <a:ln>
-            <a:noFill/>
-          </a:ln>
-          <a:effectLst/>
-        </p:spPr>
-        <p:style>
-          <a:lnRef idx="1">
-            <a:schemeClr val="accent1"/>
-          </a:lnRef>
-          <a:fillRef idx="3">
-            <a:schemeClr val="accent1"/>
-          </a:fillRef>
-          <a:effectRef idx="2">
-            <a:schemeClr val="accent1"/>
-          </a:effectRef>
-          <a:fontRef idx="minor">
-            <a:schemeClr val="lt1"/>
-          </a:fontRef>
-        </p:style>
-        <p:txBody>
-          <a:bodyPr rtlCol="0" anchor="ctr"/>
-          <a:lstStyle/>
-          <a:p>
-            <a:pPr algn="ctr"/>
-          </a:p>
-        </p:txBody>
-      </p:sp>
-      <p:sp>
-        <p:nvSpPr>
-          <p:cNvPr id="17" name="TextBox 16"/>
-          <p:cNvSpPr txBox="1"/>
-          <p:nvPr/>
-        </p:nvSpPr>
-        <p:spPr>
-          <a:xfrm>
-            <a:off x="8432596" y="2788920"/>
-            <a:ext cx="2844698" cy="457200"/>
-          </a:xfrm>
-          <a:prstGeom prst="rect">
-            <a:avLst/>
-          </a:prstGeom>
-          <a:noFill/>
-        </p:spPr>
-        <p:txBody>
-          <a:bodyPr wrap="square" anchor="t">
-            <a:spAutoFit/>
-          </a:bodyPr>
-          <a:lstStyle/>
-          <a:p>
-            <a:pPr algn="l">
-              <a:lnSpc>
-                <a:spcPct val="100000"/>
-              </a:lnSpc>
-            </a:pPr>
-            <a:r>
-              <a:rPr sz="1200" b="1">
-                <a:solidFill>
-                  <a:srgbClr val="00FF41"/>
-                </a:solidFill>
-                <a:latin typeface="Courier New"/>
-              </a:rPr>
-              <a:t>03 · VERIFICATION</a:t>
-            </a:r>
-          </a:p>
-        </p:txBody>
-      </p:sp>
-      <p:sp>
-        <p:nvSpPr>
-          <p:cNvPr id="18" name="TextBox 17"/>
-          <p:cNvSpPr txBox="1"/>
-          <p:nvPr/>
-        </p:nvSpPr>
-        <p:spPr>
-          <a:xfrm>
-            <a:off x="8432596" y="3246120"/>
-            <a:ext cx="2844698" cy="822960"/>
-          </a:xfrm>
-          <a:prstGeom prst="rect">
-            <a:avLst/>
-          </a:prstGeom>
-          <a:noFill/>
-        </p:spPr>
-        <p:txBody>
-          <a:bodyPr wrap="square" anchor="t">
-            <a:spAutoFit/>
-          </a:bodyPr>
-          <a:lstStyle/>
-          <a:p>
-            <a:pPr algn="l">
-              <a:lnSpc>
-                <a:spcPct val="100000"/>
-              </a:lnSpc>
-            </a:pPr>
-            <a:r>
-              <a:rPr sz="2000" b="1">
-                <a:solidFill>
-                  <a:srgbClr val="F5F7FA"/>
-                </a:solidFill>
-                <a:latin typeface="Arial"/>
-              </a:rPr>
-              <a:t>Did it work?</a:t>
-            </a:r>
-          </a:p>
-        </p:txBody>
-      </p:sp>
-      <p:sp>
-        <p:nvSpPr>
-          <p:cNvPr id="19" name="TextBox 18"/>
-          <p:cNvSpPr txBox="1"/>
-          <p:nvPr/>
-        </p:nvSpPr>
-        <p:spPr>
-          <a:xfrm>
-            <a:off x="8432596" y="4114800"/>
-            <a:ext cx="2844698" cy="1554480"/>
-          </a:xfrm>
-          <a:prstGeom prst="rect">
-            <a:avLst/>
-          </a:prstGeom>
-          <a:noFill/>
-        </p:spPr>
-        <p:txBody>
-          <a:bodyPr wrap="square" anchor="t">
-            <a:spAutoFit/>
-          </a:bodyPr>
-          <a:lstStyle/>
-          <a:p>
-            <a:pPr algn="l">
-              <a:lnSpc>
-                <a:spcPct val="110000"/>
-              </a:lnSpc>
-            </a:pPr>
-            <a:r>
-              <a:rPr sz="1500" b="0">
-                <a:solidFill>
-                  <a:srgbClr val="8A94A6"/>
-                </a:solidFill>
-                <a:latin typeface="Arial"/>
-              </a:rPr>
-              <a:t>Check whether the built thing delivers the value.</a:t>
-            </a:r>
-          </a:p>
-        </p:txBody>
-      </p:sp>
-      <p:sp>
-        <p:nvSpPr>
-          <p:cNvPr id="20" name="TextBox 19"/>
           <p:cNvSpPr txBox="1"/>
           <p:nvPr/>
         </p:nvSpPr>
@@ -8154,7 +6894,7 @@
                 </a:solidFill>
                 <a:latin typeface="Courier New"/>
               </a:rPr>
-              <a:t>TODAY, VIBE-CODED</a:t>
+              <a:t>STEP 1 - OPERATIONALIZE</a:t>
             </a:r>
           </a:p>
         </p:txBody>
@@ -8212,7 +6952,7 @@
         <p:spPr>
           <a:xfrm>
             <a:off x="640080" y="1188720"/>
-            <a:ext cx="10972800" cy="914400"/>
+            <a:ext cx="10972800" cy="1097280"/>
           </a:xfrm>
           <a:prstGeom prst="rect">
             <a:avLst/>
@@ -8231,115 +6971,27 @@
               </a:lnSpc>
             </a:pPr>
             <a:r>
-              <a:rPr sz="3200" b="1">
+              <a:rPr sz="3400" b="1">
                 <a:solidFill>
                   <a:srgbClr val="F5F7FA"/>
                 </a:solidFill>
                 <a:latin typeface="Arial"/>
               </a:rPr>
-              <a:t>The three moves become Plan → Run → Verify</a:t>
-            </a:r>
-          </a:p>
-        </p:txBody>
-      </p:sp>
-      <p:sp>
-        <p:nvSpPr>
-          <p:cNvPr id="5" name="Rounded Rectangle 4"/>
-          <p:cNvSpPr/>
-          <p:nvPr/>
-        </p:nvSpPr>
-        <p:spPr>
-          <a:xfrm>
-            <a:off x="640080" y="2468880"/>
-            <a:ext cx="3393338" cy="3383280"/>
-          </a:xfrm>
-          <a:prstGeom prst="roundRect">
-            <a:avLst/>
-          </a:prstGeom>
-          <a:solidFill>
-            <a:srgbClr val="151B26"/>
-          </a:solidFill>
-          <a:ln>
-            <a:noFill/>
-          </a:ln>
-          <a:effectLst/>
-        </p:spPr>
-        <p:style>
-          <a:lnRef idx="1">
-            <a:schemeClr val="accent1"/>
-          </a:lnRef>
-          <a:fillRef idx="3">
-            <a:schemeClr val="accent1"/>
-          </a:fillRef>
-          <a:effectRef idx="2">
-            <a:schemeClr val="accent1"/>
-          </a:effectRef>
-          <a:fontRef idx="minor">
-            <a:schemeClr val="lt1"/>
-          </a:fontRef>
-        </p:style>
-        <p:txBody>
-          <a:bodyPr rtlCol="0" anchor="ctr"/>
-          <a:lstStyle/>
-          <a:p>
-            <a:pPr algn="ctr"/>
-          </a:p>
-        </p:txBody>
-      </p:sp>
-      <p:sp>
-        <p:nvSpPr>
-          <p:cNvPr id="6" name="Rectangle 5"/>
-          <p:cNvSpPr/>
-          <p:nvPr/>
-        </p:nvSpPr>
-        <p:spPr>
-          <a:xfrm>
-            <a:off x="640080" y="2468880"/>
-            <a:ext cx="3393338" cy="82296"/>
-          </a:xfrm>
-          <a:prstGeom prst="rect">
-            <a:avLst/>
-          </a:prstGeom>
-          <a:solidFill>
-            <a:srgbClr val="00FF41"/>
-          </a:solidFill>
-          <a:ln>
-            <a:noFill/>
-          </a:ln>
-          <a:effectLst/>
-        </p:spPr>
-        <p:style>
-          <a:lnRef idx="1">
-            <a:schemeClr val="accent1"/>
-          </a:lnRef>
-          <a:fillRef idx="3">
-            <a:schemeClr val="accent1"/>
-          </a:fillRef>
-          <a:effectRef idx="2">
-            <a:schemeClr val="accent1"/>
-          </a:effectRef>
-          <a:fontRef idx="minor">
-            <a:schemeClr val="lt1"/>
-          </a:fontRef>
-        </p:style>
-        <p:txBody>
-          <a:bodyPr rtlCol="0" anchor="ctr"/>
-          <a:lstStyle/>
-          <a:p>
-            <a:pPr algn="ctr"/>
-          </a:p>
-        </p:txBody>
-      </p:sp>
-      <p:sp>
-        <p:nvSpPr>
-          <p:cNvPr id="7" name="TextBox 6"/>
+              <a:t>You can't verify a value you haven't defined</a:t>
+            </a:r>
+          </a:p>
+        </p:txBody>
+      </p:sp>
+      <p:sp>
+        <p:nvSpPr>
+          <p:cNvPr id="5" name="TextBox 4"/>
           <p:cNvSpPr txBox="1"/>
           <p:nvPr/>
         </p:nvSpPr>
         <p:spPr>
           <a:xfrm>
-            <a:off x="914400" y="2788920"/>
-            <a:ext cx="2844698" cy="457200"/>
+            <a:off x="658368" y="2286000"/>
+            <a:ext cx="10881360" cy="3657600"/>
           </a:xfrm>
           <a:prstGeom prst="rect">
             <a:avLst/>
@@ -8354,512 +7006,147 @@
           <a:p>
             <a:pPr algn="l">
               <a:lnSpc>
-                <a:spcPct val="100000"/>
-              </a:lnSpc>
-            </a:pPr>
-            <a:r>
-              <a:rPr sz="1200" b="1">
+                <a:spcPct val="112000"/>
+              </a:lnSpc>
+            </a:pPr>
+            <a:r>
+              <a:rPr sz="2000" b="0">
+                <a:solidFill>
+                  <a:srgbClr val="F5F7FA"/>
+                </a:solidFill>
+                <a:latin typeface="Arial"/>
+              </a:rPr>
+              <a:t>A value is too abstract to test directly. Define it in operational terms first - say what is concretely true if it is present:</a:t>
+            </a:r>
+          </a:p>
+          <a:p>
+            <a:pPr algn="l">
+              <a:lnSpc>
+                <a:spcPct val="112000"/>
+              </a:lnSpc>
+            </a:pPr>
+            <a:r>
+              <a:rPr sz="2000" b="0">
+                <a:solidFill>
+                  <a:srgbClr val="F5F7FA"/>
+                </a:solidFill>
+                <a:latin typeface="Arial"/>
+              </a:rPr>
+              <a:t/>
+            </a:r>
+          </a:p>
+          <a:p>
+            <a:pPr algn="l">
+              <a:lnSpc>
+                <a:spcPct val="112000"/>
+              </a:lnSpc>
+            </a:pPr>
+            <a:r>
+              <a:rPr sz="1900" b="1">
                 <a:solidFill>
                   <a:srgbClr val="00FF41"/>
                 </a:solidFill>
-                <a:latin typeface="Courier New"/>
-              </a:rPr>
-              <a:t>PLAN</a:t>
-            </a:r>
-          </a:p>
-        </p:txBody>
-      </p:sp>
-      <p:sp>
-        <p:nvSpPr>
-          <p:cNvPr id="8" name="TextBox 7"/>
-          <p:cNvSpPr txBox="1"/>
-          <p:nvPr/>
-        </p:nvSpPr>
-        <p:spPr>
-          <a:xfrm>
-            <a:off x="914400" y="3246120"/>
-            <a:ext cx="2844698" cy="822960"/>
-          </a:xfrm>
-          <a:prstGeom prst="rect">
-            <a:avLst/>
-          </a:prstGeom>
-          <a:noFill/>
-        </p:spPr>
-        <p:txBody>
-          <a:bodyPr wrap="square" anchor="t">
-            <a:spAutoFit/>
-          </a:bodyPr>
-          <a:lstStyle/>
-          <a:p>
-            <a:pPr algn="l">
-              <a:lnSpc>
-                <a:spcPct val="100000"/>
-              </a:lnSpc>
-            </a:pPr>
-            <a:r>
-              <a:rPr sz="2000" b="1">
+                <a:latin typeface="Arial"/>
+              </a:rPr>
+              <a:t>Privacy</a:t>
+            </a:r>
+            <a:r>
+              <a:rPr sz="1900" b="0">
                 <a:solidFill>
                   <a:srgbClr val="F5F7FA"/>
                 </a:solidFill>
                 <a:latin typeface="Arial"/>
               </a:rPr>
-              <a:t>planning.md, before you prompt</a:t>
-            </a:r>
-          </a:p>
-        </p:txBody>
-      </p:sp>
-      <p:sp>
-        <p:nvSpPr>
-          <p:cNvPr id="9" name="TextBox 8"/>
-          <p:cNvSpPr txBox="1"/>
-          <p:nvPr/>
-        </p:nvSpPr>
-        <p:spPr>
-          <a:xfrm>
-            <a:off x="914400" y="4114800"/>
-            <a:ext cx="2844698" cy="1554480"/>
-          </a:xfrm>
-          <a:prstGeom prst="rect">
-            <a:avLst/>
-          </a:prstGeom>
-          <a:noFill/>
-        </p:spPr>
-        <p:txBody>
-          <a:bodyPr wrap="square" anchor="t">
-            <a:spAutoFit/>
-          </a:bodyPr>
-          <a:lstStyle/>
-          <a:p>
-            <a:pPr algn="l">
-              <a:lnSpc>
-                <a:spcPct val="110000"/>
-              </a:lnSpc>
-            </a:pPr>
-            <a:r>
-              <a:rPr sz="1500" b="0">
+              <a:t> = control?  secrecy?  contextual integrity?</a:t>
+            </a:r>
+          </a:p>
+          <a:p>
+            <a:pPr algn="l">
+              <a:lnSpc>
+                <a:spcPct val="112000"/>
+              </a:lnSpc>
+            </a:pPr>
+            <a:r>
+              <a:rPr sz="1900" b="1">
+                <a:solidFill>
+                  <a:srgbClr val="00FF41"/>
+                </a:solidFill>
+                <a:latin typeface="Arial"/>
+              </a:rPr>
+              <a:t>Fairness</a:t>
+            </a:r>
+            <a:r>
+              <a:rPr sz="1900" b="0">
+                <a:solidFill>
+                  <a:srgbClr val="F5F7FA"/>
+                </a:solidFill>
+                <a:latin typeface="Arial"/>
+              </a:rPr>
+              <a:t> = equal access?  or equal outcome?</a:t>
+            </a:r>
+          </a:p>
+          <a:p>
+            <a:pPr algn="l">
+              <a:lnSpc>
+                <a:spcPct val="112000"/>
+              </a:lnSpc>
+            </a:pPr>
+            <a:r>
+              <a:rPr sz="1900" b="1">
+                <a:solidFill>
+                  <a:srgbClr val="00FF41"/>
+                </a:solidFill>
+                <a:latin typeface="Arial"/>
+              </a:rPr>
+              <a:t>Autonomy</a:t>
+            </a:r>
+            <a:r>
+              <a:rPr sz="1900" b="0">
+                <a:solidFill>
+                  <a:srgbClr val="F5F7FA"/>
+                </a:solidFill>
+                <a:latin typeface="Arial"/>
+              </a:rPr>
+              <a:t> = real choices?  no manipulation?  the freedom to leave?</a:t>
+            </a:r>
+          </a:p>
+          <a:p>
+            <a:pPr algn="l">
+              <a:lnSpc>
+                <a:spcPct val="112000"/>
+              </a:lnSpc>
+            </a:pPr>
+            <a:r>
+              <a:rPr sz="2000" b="0">
+                <a:solidFill>
+                  <a:srgbClr val="F5F7FA"/>
+                </a:solidFill>
+                <a:latin typeface="Arial"/>
+              </a:rPr>
+              <a:t/>
+            </a:r>
+          </a:p>
+          <a:p>
+            <a:pPr algn="l">
+              <a:lnSpc>
+                <a:spcPct val="112000"/>
+              </a:lnSpc>
+            </a:pPr>
+            <a:r>
+              <a:rPr sz="1700" b="0">
                 <a:solidFill>
                   <a:srgbClr val="8A94A6"/>
                 </a:solidFill>
                 <a:latin typeface="Arial"/>
               </a:rPr>
-              <a:t>Name the value, define what it MEANS here, who it's for, how you'd know — and write the exact prompts you'll run. Verbatim. Before running them.</a:t>
-            </a:r>
-          </a:p>
-        </p:txBody>
-      </p:sp>
-      <p:sp>
-        <p:nvSpPr>
-          <p:cNvPr id="10" name="Rounded Rectangle 9"/>
-          <p:cNvSpPr/>
-          <p:nvPr/>
-        </p:nvSpPr>
-        <p:spPr>
-          <a:xfrm>
-            <a:off x="4399178" y="2468880"/>
-            <a:ext cx="3393338" cy="3383280"/>
-          </a:xfrm>
-          <a:prstGeom prst="roundRect">
-            <a:avLst/>
-          </a:prstGeom>
-          <a:solidFill>
-            <a:srgbClr val="151B26"/>
-          </a:solidFill>
-          <a:ln>
-            <a:noFill/>
-          </a:ln>
-          <a:effectLst/>
-        </p:spPr>
-        <p:style>
-          <a:lnRef idx="1">
-            <a:schemeClr val="accent1"/>
-          </a:lnRef>
-          <a:fillRef idx="3">
-            <a:schemeClr val="accent1"/>
-          </a:fillRef>
-          <a:effectRef idx="2">
-            <a:schemeClr val="accent1"/>
-          </a:effectRef>
-          <a:fontRef idx="minor">
-            <a:schemeClr val="lt1"/>
-          </a:fontRef>
-        </p:style>
-        <p:txBody>
-          <a:bodyPr rtlCol="0" anchor="ctr"/>
-          <a:lstStyle/>
-          <a:p>
-            <a:pPr algn="ctr"/>
-          </a:p>
-        </p:txBody>
-      </p:sp>
-      <p:sp>
-        <p:nvSpPr>
-          <p:cNvPr id="11" name="Rectangle 10"/>
-          <p:cNvSpPr/>
-          <p:nvPr/>
-        </p:nvSpPr>
-        <p:spPr>
-          <a:xfrm>
-            <a:off x="4399178" y="2468880"/>
-            <a:ext cx="3393338" cy="82296"/>
-          </a:xfrm>
-          <a:prstGeom prst="rect">
-            <a:avLst/>
-          </a:prstGeom>
-          <a:solidFill>
-            <a:srgbClr val="00FF41"/>
-          </a:solidFill>
-          <a:ln>
-            <a:noFill/>
-          </a:ln>
-          <a:effectLst/>
-        </p:spPr>
-        <p:style>
-          <a:lnRef idx="1">
-            <a:schemeClr val="accent1"/>
-          </a:lnRef>
-          <a:fillRef idx="3">
-            <a:schemeClr val="accent1"/>
-          </a:fillRef>
-          <a:effectRef idx="2">
-            <a:schemeClr val="accent1"/>
-          </a:effectRef>
-          <a:fontRef idx="minor">
-            <a:schemeClr val="lt1"/>
-          </a:fontRef>
-        </p:style>
-        <p:txBody>
-          <a:bodyPr rtlCol="0" anchor="ctr"/>
-          <a:lstStyle/>
-          <a:p>
-            <a:pPr algn="ctr"/>
-          </a:p>
-        </p:txBody>
-      </p:sp>
-      <p:sp>
-        <p:nvSpPr>
-          <p:cNvPr id="12" name="TextBox 11"/>
-          <p:cNvSpPr txBox="1"/>
-          <p:nvPr/>
-        </p:nvSpPr>
-        <p:spPr>
-          <a:xfrm>
-            <a:off x="4673498" y="2788920"/>
-            <a:ext cx="2844698" cy="457200"/>
-          </a:xfrm>
-          <a:prstGeom prst="rect">
-            <a:avLst/>
-          </a:prstGeom>
-          <a:noFill/>
-        </p:spPr>
-        <p:txBody>
-          <a:bodyPr wrap="square" anchor="t">
-            <a:spAutoFit/>
-          </a:bodyPr>
-          <a:lstStyle/>
-          <a:p>
-            <a:pPr algn="l">
-              <a:lnSpc>
-                <a:spcPct val="100000"/>
-              </a:lnSpc>
-            </a:pPr>
-            <a:r>
-              <a:rPr sz="1200" b="1">
-                <a:solidFill>
-                  <a:srgbClr val="00FF41"/>
-                </a:solidFill>
-                <a:latin typeface="Courier New"/>
-              </a:rPr>
-              <a:t>RUN</a:t>
-            </a:r>
-          </a:p>
-        </p:txBody>
-      </p:sp>
-      <p:sp>
-        <p:nvSpPr>
-          <p:cNvPr id="13" name="TextBox 12"/>
-          <p:cNvSpPr txBox="1"/>
-          <p:nvPr/>
-        </p:nvSpPr>
-        <p:spPr>
-          <a:xfrm>
-            <a:off x="4673498" y="3246120"/>
-            <a:ext cx="2844698" cy="822960"/>
-          </a:xfrm>
-          <a:prstGeom prst="rect">
-            <a:avLst/>
-          </a:prstGeom>
-          <a:noFill/>
-        </p:spPr>
-        <p:txBody>
-          <a:bodyPr wrap="square" anchor="t">
-            <a:spAutoFit/>
-          </a:bodyPr>
-          <a:lstStyle/>
-          <a:p>
-            <a:pPr algn="l">
-              <a:lnSpc>
-                <a:spcPct val="100000"/>
-              </a:lnSpc>
-            </a:pPr>
-            <a:r>
-              <a:rPr sz="2000" b="1">
-                <a:solidFill>
-                  <a:srgbClr val="F5F7FA"/>
-                </a:solidFill>
-                <a:latin typeface="Arial"/>
-              </a:rPr>
-              <a:t>Prompts + a real test</a:t>
-            </a:r>
-          </a:p>
-        </p:txBody>
-      </p:sp>
-      <p:sp>
-        <p:nvSpPr>
-          <p:cNvPr id="14" name="TextBox 13"/>
-          <p:cNvSpPr txBox="1"/>
-          <p:nvPr/>
-        </p:nvSpPr>
-        <p:spPr>
-          <a:xfrm>
-            <a:off x="4673498" y="4114800"/>
-            <a:ext cx="2844698" cy="1554480"/>
-          </a:xfrm>
-          <a:prstGeom prst="rect">
-            <a:avLst/>
-          </a:prstGeom>
-          <a:noFill/>
-        </p:spPr>
-        <p:txBody>
-          <a:bodyPr wrap="square" anchor="t">
-            <a:spAutoFit/>
-          </a:bodyPr>
-          <a:lstStyle/>
-          <a:p>
-            <a:pPr algn="l">
-              <a:lnSpc>
-                <a:spcPct val="110000"/>
-              </a:lnSpc>
-            </a:pPr>
-            <a:r>
-              <a:rPr sz="1500" b="0">
-                <a:solidFill>
-                  <a:srgbClr val="8A94A6"/>
-                </a:solidFill>
-                <a:latin typeface="Arial"/>
-              </a:rPr>
-              <a:t>Execute your planned prompts unchanged, then let another team test whether the value survives contact with a user.</a:t>
-            </a:r>
-          </a:p>
-        </p:txBody>
-      </p:sp>
-      <p:sp>
-        <p:nvSpPr>
-          <p:cNvPr id="15" name="Rounded Rectangle 14"/>
-          <p:cNvSpPr/>
-          <p:nvPr/>
-        </p:nvSpPr>
-        <p:spPr>
-          <a:xfrm>
-            <a:off x="8158276" y="2468880"/>
-            <a:ext cx="3393338" cy="3383280"/>
-          </a:xfrm>
-          <a:prstGeom prst="roundRect">
-            <a:avLst/>
-          </a:prstGeom>
-          <a:solidFill>
-            <a:srgbClr val="151B26"/>
-          </a:solidFill>
-          <a:ln>
-            <a:noFill/>
-          </a:ln>
-          <a:effectLst/>
-        </p:spPr>
-        <p:style>
-          <a:lnRef idx="1">
-            <a:schemeClr val="accent1"/>
-          </a:lnRef>
-          <a:fillRef idx="3">
-            <a:schemeClr val="accent1"/>
-          </a:fillRef>
-          <a:effectRef idx="2">
-            <a:schemeClr val="accent1"/>
-          </a:effectRef>
-          <a:fontRef idx="minor">
-            <a:schemeClr val="lt1"/>
-          </a:fontRef>
-        </p:style>
-        <p:txBody>
-          <a:bodyPr rtlCol="0" anchor="ctr"/>
-          <a:lstStyle/>
-          <a:p>
-            <a:pPr algn="ctr"/>
-          </a:p>
-        </p:txBody>
-      </p:sp>
-      <p:sp>
-        <p:nvSpPr>
-          <p:cNvPr id="16" name="Rectangle 15"/>
-          <p:cNvSpPr/>
-          <p:nvPr/>
-        </p:nvSpPr>
-        <p:spPr>
-          <a:xfrm>
-            <a:off x="8158276" y="2468880"/>
-            <a:ext cx="3393338" cy="82296"/>
-          </a:xfrm>
-          <a:prstGeom prst="rect">
-            <a:avLst/>
-          </a:prstGeom>
-          <a:solidFill>
-            <a:srgbClr val="00FF41"/>
-          </a:solidFill>
-          <a:ln>
-            <a:noFill/>
-          </a:ln>
-          <a:effectLst/>
-        </p:spPr>
-        <p:style>
-          <a:lnRef idx="1">
-            <a:schemeClr val="accent1"/>
-          </a:lnRef>
-          <a:fillRef idx="3">
-            <a:schemeClr val="accent1"/>
-          </a:fillRef>
-          <a:effectRef idx="2">
-            <a:schemeClr val="accent1"/>
-          </a:effectRef>
-          <a:fontRef idx="minor">
-            <a:schemeClr val="lt1"/>
-          </a:fontRef>
-        </p:style>
-        <p:txBody>
-          <a:bodyPr rtlCol="0" anchor="ctr"/>
-          <a:lstStyle/>
-          <a:p>
-            <a:pPr algn="ctr"/>
-          </a:p>
-        </p:txBody>
-      </p:sp>
-      <p:sp>
-        <p:nvSpPr>
-          <p:cNvPr id="17" name="TextBox 16"/>
-          <p:cNvSpPr txBox="1"/>
-          <p:nvPr/>
-        </p:nvSpPr>
-        <p:spPr>
-          <a:xfrm>
-            <a:off x="8432596" y="2788920"/>
-            <a:ext cx="2844698" cy="457200"/>
-          </a:xfrm>
-          <a:prstGeom prst="rect">
-            <a:avLst/>
-          </a:prstGeom>
-          <a:noFill/>
-        </p:spPr>
-        <p:txBody>
-          <a:bodyPr wrap="square" anchor="t">
-            <a:spAutoFit/>
-          </a:bodyPr>
-          <a:lstStyle/>
-          <a:p>
-            <a:pPr algn="l">
-              <a:lnSpc>
-                <a:spcPct val="100000"/>
-              </a:lnSpc>
-            </a:pPr>
-            <a:r>
-              <a:rPr sz="1200" b="1">
-                <a:solidFill>
-                  <a:srgbClr val="00FF41"/>
-                </a:solidFill>
-                <a:latin typeface="Courier New"/>
-              </a:rPr>
-              <a:t>VERIFY</a:t>
-            </a:r>
-          </a:p>
-        </p:txBody>
-      </p:sp>
-      <p:sp>
-        <p:nvSpPr>
-          <p:cNvPr id="18" name="TextBox 17"/>
-          <p:cNvSpPr txBox="1"/>
-          <p:nvPr/>
-        </p:nvSpPr>
-        <p:spPr>
-          <a:xfrm>
-            <a:off x="8432596" y="3246120"/>
-            <a:ext cx="2844698" cy="822960"/>
-          </a:xfrm>
-          <a:prstGeom prst="rect">
-            <a:avLst/>
-          </a:prstGeom>
-          <a:noFill/>
-        </p:spPr>
-        <p:txBody>
-          <a:bodyPr wrap="square" anchor="t">
-            <a:spAutoFit/>
-          </a:bodyPr>
-          <a:lstStyle/>
-          <a:p>
-            <a:pPr algn="l">
-              <a:lnSpc>
-                <a:spcPct val="100000"/>
-              </a:lnSpc>
-            </a:pPr>
-            <a:r>
-              <a:rPr sz="2000" b="1">
-                <a:solidFill>
-                  <a:srgbClr val="F5F7FA"/>
-                </a:solidFill>
-                <a:latin typeface="Arial"/>
-              </a:rPr>
-              <a:t>Claim vs. reality</a:t>
-            </a:r>
-          </a:p>
-        </p:txBody>
-      </p:sp>
-      <p:sp>
-        <p:nvSpPr>
-          <p:cNvPr id="19" name="TextBox 18"/>
-          <p:cNvSpPr txBox="1"/>
-          <p:nvPr/>
-        </p:nvSpPr>
-        <p:spPr>
-          <a:xfrm>
-            <a:off x="8432596" y="4114800"/>
-            <a:ext cx="2844698" cy="1554480"/>
-          </a:xfrm>
-          <a:prstGeom prst="rect">
-            <a:avLst/>
-          </a:prstGeom>
-          <a:noFill/>
-        </p:spPr>
-        <p:txBody>
-          <a:bodyPr wrap="square" anchor="t">
-            <a:spAutoFit/>
-          </a:bodyPr>
-          <a:lstStyle/>
-          <a:p>
-            <a:pPr algn="l">
-              <a:lnSpc>
-                <a:spcPct val="110000"/>
-              </a:lnSpc>
-            </a:pPr>
-            <a:r>
-              <a:rPr sz="1500" b="0">
-                <a:solidFill>
-                  <a:srgbClr val="8A94A6"/>
-                </a:solidFill>
-                <a:latin typeface="Arial"/>
-              </a:rPr>
-              <a:t>Find the biggest gap between planning.md and what testers experienced. Close it with one commit.</a:t>
-            </a:r>
-          </a:p>
-        </p:txBody>
-      </p:sp>
-      <p:sp>
-        <p:nvSpPr>
-          <p:cNvPr id="20" name="TextBox 19"/>
+              <a:t>Pick your reading. If you don't, the AI's default definition wins.</a:t>
+            </a:r>
+          </a:p>
+        </p:txBody>
+      </p:sp>
+      <p:sp>
+        <p:nvSpPr>
+          <p:cNvPr id="6" name="TextBox 5"/>
           <p:cNvSpPr txBox="1"/>
           <p:nvPr/>
         </p:nvSpPr>
@@ -8956,65 +7243,21 @@
                 </a:solidFill>
                 <a:latin typeface="Courier New"/>
               </a:rPr>
-              <a:t>DISCOVERY · SOURCES</a:t>
-            </a:r>
-          </a:p>
-        </p:txBody>
-      </p:sp>
-      <p:sp>
-        <p:nvSpPr>
-          <p:cNvPr id="3" name="Rectangle 2"/>
-          <p:cNvSpPr/>
-          <p:nvPr/>
-        </p:nvSpPr>
-        <p:spPr>
-          <a:xfrm>
-            <a:off x="640080" y="932688"/>
-            <a:ext cx="822960" cy="73152"/>
-          </a:xfrm>
-          <a:prstGeom prst="rect">
-            <a:avLst/>
-          </a:prstGeom>
-          <a:solidFill>
-            <a:srgbClr val="00FF41"/>
-          </a:solidFill>
-          <a:ln>
-            <a:noFill/>
-          </a:ln>
-          <a:effectLst/>
-        </p:spPr>
-        <p:style>
-          <a:lnRef idx="1">
-            <a:schemeClr val="accent1"/>
-          </a:lnRef>
-          <a:fillRef idx="3">
-            <a:schemeClr val="accent1"/>
-          </a:fillRef>
-          <a:effectRef idx="2">
-            <a:schemeClr val="accent1"/>
-          </a:effectRef>
-          <a:fontRef idx="minor">
-            <a:schemeClr val="lt1"/>
-          </a:fontRef>
-        </p:style>
-        <p:txBody>
-          <a:bodyPr rtlCol="0" anchor="ctr"/>
-          <a:lstStyle/>
-          <a:p>
-            <a:pPr algn="ctr"/>
-          </a:p>
-        </p:txBody>
-      </p:sp>
-      <p:sp>
-        <p:nvSpPr>
-          <p:cNvPr id="4" name="TextBox 3"/>
+              <a:t>STEP 2 - VERIFY</a:t>
+            </a:r>
+          </a:p>
+        </p:txBody>
+      </p:sp>
+      <p:sp>
+        <p:nvSpPr>
+          <p:cNvPr id="3" name="TextBox 2"/>
           <p:cNvSpPr txBox="1"/>
           <p:nvPr/>
         </p:nvSpPr>
         <p:spPr>
           <a:xfrm>
-            <a:off x="640080" y="1188720"/>
-            <a:ext cx="10972800" cy="914400"/>
+            <a:off x="1097280" y="548640"/>
+            <a:ext cx="2743200" cy="1828800"/>
           </a:xfrm>
           <a:prstGeom prst="rect">
             <a:avLst/>
@@ -9033,115 +7276,27 @@
               </a:lnSpc>
             </a:pPr>
             <a:r>
-              <a:rPr sz="3200" b="1">
-                <a:solidFill>
-                  <a:srgbClr val="F5F7FA"/>
-                </a:solidFill>
-                <a:latin typeface="Arial"/>
-              </a:rPr>
-              <a:t>Where do values come from? Look at the sources</a:t>
-            </a:r>
-          </a:p>
-        </p:txBody>
-      </p:sp>
-      <p:sp>
-        <p:nvSpPr>
-          <p:cNvPr id="5" name="Rounded Rectangle 4"/>
-          <p:cNvSpPr/>
-          <p:nvPr/>
-        </p:nvSpPr>
-        <p:spPr>
-          <a:xfrm>
-            <a:off x="640080" y="2468880"/>
-            <a:ext cx="2453563" cy="3383280"/>
-          </a:xfrm>
-          <a:prstGeom prst="roundRect">
-            <a:avLst/>
-          </a:prstGeom>
-          <a:solidFill>
-            <a:srgbClr val="151B26"/>
-          </a:solidFill>
-          <a:ln>
-            <a:noFill/>
-          </a:ln>
-          <a:effectLst/>
-        </p:spPr>
-        <p:style>
-          <a:lnRef idx="1">
-            <a:schemeClr val="accent1"/>
-          </a:lnRef>
-          <a:fillRef idx="3">
-            <a:schemeClr val="accent1"/>
-          </a:fillRef>
-          <a:effectRef idx="2">
-            <a:schemeClr val="accent1"/>
-          </a:effectRef>
-          <a:fontRef idx="minor">
-            <a:schemeClr val="lt1"/>
-          </a:fontRef>
-        </p:style>
-        <p:txBody>
-          <a:bodyPr rtlCol="0" anchor="ctr"/>
-          <a:lstStyle/>
-          <a:p>
-            <a:pPr algn="ctr"/>
-          </a:p>
-        </p:txBody>
-      </p:sp>
-      <p:sp>
-        <p:nvSpPr>
-          <p:cNvPr id="6" name="Rectangle 5"/>
-          <p:cNvSpPr/>
-          <p:nvPr/>
-        </p:nvSpPr>
-        <p:spPr>
-          <a:xfrm>
-            <a:off x="640080" y="2468880"/>
-            <a:ext cx="2453563" cy="82296"/>
-          </a:xfrm>
-          <a:prstGeom prst="rect">
-            <a:avLst/>
-          </a:prstGeom>
-          <a:solidFill>
-            <a:srgbClr val="00FF41"/>
-          </a:solidFill>
-          <a:ln>
-            <a:noFill/>
-          </a:ln>
-          <a:effectLst/>
-        </p:spPr>
-        <p:style>
-          <a:lnRef idx="1">
-            <a:schemeClr val="accent1"/>
-          </a:lnRef>
-          <a:fillRef idx="3">
-            <a:schemeClr val="accent1"/>
-          </a:fillRef>
-          <a:effectRef idx="2">
-            <a:schemeClr val="accent1"/>
-          </a:effectRef>
-          <a:fontRef idx="minor">
-            <a:schemeClr val="lt1"/>
-          </a:fontRef>
-        </p:style>
-        <p:txBody>
-          <a:bodyPr rtlCol="0" anchor="ctr"/>
-          <a:lstStyle/>
-          <a:p>
-            <a:pPr algn="ctr"/>
-          </a:p>
-        </p:txBody>
-      </p:sp>
-      <p:sp>
-        <p:nvSpPr>
-          <p:cNvPr id="7" name="TextBox 6"/>
+              <a:rPr sz="12000" b="1">
+                <a:solidFill>
+                  <a:srgbClr val="00FF41"/>
+                </a:solidFill>
+                <a:latin typeface="Arial"/>
+              </a:rPr>
+              <a:t>?</a:t>
+            </a:r>
+          </a:p>
+        </p:txBody>
+      </p:sp>
+      <p:sp>
+        <p:nvSpPr>
+          <p:cNvPr id="4" name="TextBox 3"/>
           <p:cNvSpPr txBox="1"/>
           <p:nvPr/>
         </p:nvSpPr>
         <p:spPr>
           <a:xfrm>
-            <a:off x="914400" y="2788920"/>
-            <a:ext cx="1904923" cy="457200"/>
+            <a:off x="1097280" y="2743200"/>
+            <a:ext cx="10058400" cy="3108960"/>
           </a:xfrm>
           <a:prstGeom prst="rect">
             <a:avLst/>
@@ -9156,717 +7311,56 @@
           <a:p>
             <a:pPr algn="l">
               <a:lnSpc>
-                <a:spcPct val="100000"/>
-              </a:lnSpc>
-            </a:pPr>
-            <a:r>
-              <a:rPr sz="1200" b="1">
-                <a:solidFill>
-                  <a:srgbClr val="00FF41"/>
-                </a:solidFill>
-                <a:latin typeface="Courier New"/>
-              </a:rPr>
-              <a:t>FUNCTIONAL</a:t>
-            </a:r>
-          </a:p>
-        </p:txBody>
-      </p:sp>
-      <p:sp>
-        <p:nvSpPr>
-          <p:cNvPr id="8" name="TextBox 7"/>
-          <p:cNvSpPr txBox="1"/>
-          <p:nvPr/>
-        </p:nvSpPr>
-        <p:spPr>
-          <a:xfrm>
-            <a:off x="914400" y="3246120"/>
-            <a:ext cx="1904923" cy="822960"/>
-          </a:xfrm>
-          <a:prstGeom prst="rect">
-            <a:avLst/>
-          </a:prstGeom>
-          <a:noFill/>
-        </p:spPr>
-        <p:txBody>
-          <a:bodyPr wrap="square" anchor="t">
-            <a:spAutoFit/>
-          </a:bodyPr>
-          <a:lstStyle/>
-          <a:p>
-            <a:pPr algn="l">
-              <a:lnSpc>
-                <a:spcPct val="100000"/>
-              </a:lnSpc>
-            </a:pPr>
-            <a:r>
-              <a:rPr sz="2000" b="1">
+                <a:spcPct val="112000"/>
+              </a:lnSpc>
+            </a:pPr>
+            <a:r>
+              <a:rPr sz="3000" b="1">
                 <a:solidFill>
                   <a:srgbClr val="F5F7FA"/>
                 </a:solidFill>
                 <a:latin typeface="Arial"/>
               </a:rPr>
-              <a:t>What it’s for</a:t>
-            </a:r>
-          </a:p>
-        </p:txBody>
-      </p:sp>
-      <p:sp>
-        <p:nvSpPr>
-          <p:cNvPr id="9" name="TextBox 8"/>
-          <p:cNvSpPr txBox="1"/>
-          <p:nvPr/>
-        </p:nvSpPr>
-        <p:spPr>
-          <a:xfrm>
-            <a:off x="914400" y="4114800"/>
-            <a:ext cx="1904923" cy="1554480"/>
-          </a:xfrm>
-          <a:prstGeom prst="rect">
-            <a:avLst/>
-          </a:prstGeom>
-          <a:noFill/>
-        </p:spPr>
-        <p:txBody>
-          <a:bodyPr wrap="square" anchor="t">
-            <a:spAutoFit/>
-          </a:bodyPr>
-          <a:lstStyle/>
-          <a:p>
-            <a:pPr algn="l">
-              <a:lnSpc>
-                <a:spcPct val="110000"/>
-              </a:lnSpc>
-            </a:pPr>
-            <a:r>
-              <a:rPr sz="1500" b="0">
-                <a:solidFill>
-                  <a:srgbClr val="8A94A6"/>
-                </a:solidFill>
-                <a:latin typeface="Arial"/>
-              </a:rPr>
-              <a:t>The system’s explicit purpose, mission, and promise.</a:t>
-            </a:r>
-          </a:p>
-        </p:txBody>
-      </p:sp>
-      <p:sp>
-        <p:nvSpPr>
-          <p:cNvPr id="10" name="Rounded Rectangle 9"/>
-          <p:cNvSpPr/>
-          <p:nvPr/>
-        </p:nvSpPr>
-        <p:spPr>
-          <a:xfrm>
-            <a:off x="3459403" y="2468880"/>
-            <a:ext cx="2453563" cy="3383280"/>
-          </a:xfrm>
-          <a:prstGeom prst="roundRect">
-            <a:avLst/>
-          </a:prstGeom>
-          <a:solidFill>
-            <a:srgbClr val="151B26"/>
-          </a:solidFill>
-          <a:ln>
-            <a:noFill/>
-          </a:ln>
-          <a:effectLst/>
-        </p:spPr>
-        <p:style>
-          <a:lnRef idx="1">
-            <a:schemeClr val="accent1"/>
-          </a:lnRef>
-          <a:fillRef idx="3">
-            <a:schemeClr val="accent1"/>
-          </a:fillRef>
-          <a:effectRef idx="2">
-            <a:schemeClr val="accent1"/>
-          </a:effectRef>
-          <a:fontRef idx="minor">
-            <a:schemeClr val="lt1"/>
-          </a:fontRef>
-        </p:style>
-        <p:txBody>
-          <a:bodyPr rtlCol="0" anchor="ctr"/>
-          <a:lstStyle/>
-          <a:p>
-            <a:pPr algn="ctr"/>
-          </a:p>
-        </p:txBody>
-      </p:sp>
-      <p:sp>
-        <p:nvSpPr>
-          <p:cNvPr id="11" name="Rectangle 10"/>
-          <p:cNvSpPr/>
-          <p:nvPr/>
-        </p:nvSpPr>
-        <p:spPr>
-          <a:xfrm>
-            <a:off x="3459403" y="2468880"/>
-            <a:ext cx="2453563" cy="82296"/>
-          </a:xfrm>
-          <a:prstGeom prst="rect">
-            <a:avLst/>
-          </a:prstGeom>
-          <a:solidFill>
-            <a:srgbClr val="00FF41"/>
-          </a:solidFill>
-          <a:ln>
-            <a:noFill/>
-          </a:ln>
-          <a:effectLst/>
-        </p:spPr>
-        <p:style>
-          <a:lnRef idx="1">
-            <a:schemeClr val="accent1"/>
-          </a:lnRef>
-          <a:fillRef idx="3">
-            <a:schemeClr val="accent1"/>
-          </a:fillRef>
-          <a:effectRef idx="2">
-            <a:schemeClr val="accent1"/>
-          </a:effectRef>
-          <a:fontRef idx="minor">
-            <a:schemeClr val="lt1"/>
-          </a:fontRef>
-        </p:style>
-        <p:txBody>
-          <a:bodyPr rtlCol="0" anchor="ctr"/>
-          <a:lstStyle/>
-          <a:p>
-            <a:pPr algn="ctr"/>
-          </a:p>
-        </p:txBody>
-      </p:sp>
-      <p:sp>
-        <p:nvSpPr>
-          <p:cNvPr id="12" name="TextBox 11"/>
-          <p:cNvSpPr txBox="1"/>
-          <p:nvPr/>
-        </p:nvSpPr>
-        <p:spPr>
-          <a:xfrm>
-            <a:off x="3733723" y="2788920"/>
-            <a:ext cx="1904923" cy="457200"/>
-          </a:xfrm>
-          <a:prstGeom prst="rect">
-            <a:avLst/>
-          </a:prstGeom>
-          <a:noFill/>
-        </p:spPr>
-        <p:txBody>
-          <a:bodyPr wrap="square" anchor="t">
-            <a:spAutoFit/>
-          </a:bodyPr>
-          <a:lstStyle/>
-          <a:p>
-            <a:pPr algn="l">
-              <a:lnSpc>
-                <a:spcPct val="100000"/>
-              </a:lnSpc>
-            </a:pPr>
-            <a:r>
-              <a:rPr sz="1200" b="1">
-                <a:solidFill>
-                  <a:srgbClr val="00FF41"/>
-                </a:solidFill>
-                <a:latin typeface="Courier New"/>
-              </a:rPr>
-              <a:t>ACTORS</a:t>
-            </a:r>
-          </a:p>
-        </p:txBody>
-      </p:sp>
-      <p:sp>
-        <p:nvSpPr>
-          <p:cNvPr id="13" name="TextBox 12"/>
-          <p:cNvSpPr txBox="1"/>
-          <p:nvPr/>
-        </p:nvSpPr>
-        <p:spPr>
-          <a:xfrm>
-            <a:off x="3733723" y="3246120"/>
-            <a:ext cx="1904923" cy="822960"/>
-          </a:xfrm>
-          <a:prstGeom prst="rect">
-            <a:avLst/>
-          </a:prstGeom>
-          <a:noFill/>
-        </p:spPr>
-        <p:txBody>
-          <a:bodyPr wrap="square" anchor="t">
-            <a:spAutoFit/>
-          </a:bodyPr>
-          <a:lstStyle/>
-          <a:p>
-            <a:pPr algn="l">
-              <a:lnSpc>
-                <a:spcPct val="100000"/>
-              </a:lnSpc>
-            </a:pPr>
-            <a:r>
-              <a:rPr sz="2000" b="1">
+              <a:t>Did it work?</a:t>
+            </a:r>
+          </a:p>
+          <a:p>
+            <a:pPr algn="l">
+              <a:lnSpc>
+                <a:spcPct val="112000"/>
+              </a:lnSpc>
+            </a:pPr>
+            <a:r>
+              <a:rPr sz="3000" b="1">
                 <a:solidFill>
                   <a:srgbClr val="F5F7FA"/>
                 </a:solidFill>
                 <a:latin typeface="Arial"/>
               </a:rPr>
-              <a:t>Who’s involved</a:t>
-            </a:r>
-          </a:p>
-        </p:txBody>
-      </p:sp>
-      <p:sp>
-        <p:nvSpPr>
-          <p:cNvPr id="14" name="TextBox 13"/>
-          <p:cNvSpPr txBox="1"/>
-          <p:nvPr/>
-        </p:nvSpPr>
-        <p:spPr>
-          <a:xfrm>
-            <a:off x="3733723" y="4114800"/>
-            <a:ext cx="1904923" cy="1554480"/>
-          </a:xfrm>
-          <a:prstGeom prst="rect">
-            <a:avLst/>
-          </a:prstGeom>
-          <a:noFill/>
-        </p:spPr>
-        <p:txBody>
-          <a:bodyPr wrap="square" anchor="t">
-            <a:spAutoFit/>
-          </a:bodyPr>
-          <a:lstStyle/>
-          <a:p>
-            <a:pPr algn="l">
-              <a:lnSpc>
-                <a:spcPct val="110000"/>
-              </a:lnSpc>
-            </a:pPr>
-            <a:r>
-              <a:rPr sz="1500" b="0">
-                <a:solidFill>
-                  <a:srgbClr val="8A94A6"/>
-                </a:solidFill>
-                <a:latin typeface="Arial"/>
-              </a:rPr>
-              <a:t>Users, creators, funders — and affected parties who never touch it.</a:t>
-            </a:r>
-          </a:p>
-        </p:txBody>
-      </p:sp>
-      <p:sp>
-        <p:nvSpPr>
-          <p:cNvPr id="15" name="Rounded Rectangle 14"/>
-          <p:cNvSpPr/>
-          <p:nvPr/>
-        </p:nvSpPr>
-        <p:spPr>
-          <a:xfrm>
-            <a:off x="6278726" y="2468880"/>
-            <a:ext cx="2453563" cy="3383280"/>
-          </a:xfrm>
-          <a:prstGeom prst="roundRect">
-            <a:avLst/>
-          </a:prstGeom>
-          <a:solidFill>
-            <a:srgbClr val="151B26"/>
-          </a:solidFill>
-          <a:ln>
-            <a:noFill/>
-          </a:ln>
-          <a:effectLst/>
-        </p:spPr>
-        <p:style>
-          <a:lnRef idx="1">
-            <a:schemeClr val="accent1"/>
-          </a:lnRef>
-          <a:fillRef idx="3">
-            <a:schemeClr val="accent1"/>
-          </a:fillRef>
-          <a:effectRef idx="2">
-            <a:schemeClr val="accent1"/>
-          </a:effectRef>
-          <a:fontRef idx="minor">
-            <a:schemeClr val="lt1"/>
-          </a:fontRef>
-        </p:style>
-        <p:txBody>
-          <a:bodyPr rtlCol="0" anchor="ctr"/>
-          <a:lstStyle/>
-          <a:p>
-            <a:pPr algn="ctr"/>
-          </a:p>
-        </p:txBody>
-      </p:sp>
-      <p:sp>
-        <p:nvSpPr>
-          <p:cNvPr id="16" name="Rectangle 15"/>
-          <p:cNvSpPr/>
-          <p:nvPr/>
-        </p:nvSpPr>
-        <p:spPr>
-          <a:xfrm>
-            <a:off x="6278726" y="2468880"/>
-            <a:ext cx="2453563" cy="82296"/>
-          </a:xfrm>
-          <a:prstGeom prst="rect">
-            <a:avLst/>
-          </a:prstGeom>
-          <a:solidFill>
-            <a:srgbClr val="00FF41"/>
-          </a:solidFill>
-          <a:ln>
-            <a:noFill/>
-          </a:ln>
-          <a:effectLst/>
-        </p:spPr>
-        <p:style>
-          <a:lnRef idx="1">
-            <a:schemeClr val="accent1"/>
-          </a:lnRef>
-          <a:fillRef idx="3">
-            <a:schemeClr val="accent1"/>
-          </a:fillRef>
-          <a:effectRef idx="2">
-            <a:schemeClr val="accent1"/>
-          </a:effectRef>
-          <a:fontRef idx="minor">
-            <a:schemeClr val="lt1"/>
-          </a:fontRef>
-        </p:style>
-        <p:txBody>
-          <a:bodyPr rtlCol="0" anchor="ctr"/>
-          <a:lstStyle/>
-          <a:p>
-            <a:pPr algn="ctr"/>
-          </a:p>
-        </p:txBody>
-      </p:sp>
-      <p:sp>
-        <p:nvSpPr>
-          <p:cNvPr id="17" name="TextBox 16"/>
-          <p:cNvSpPr txBox="1"/>
-          <p:nvPr/>
-        </p:nvSpPr>
-        <p:spPr>
-          <a:xfrm>
-            <a:off x="6553046" y="2788920"/>
-            <a:ext cx="1904923" cy="457200"/>
-          </a:xfrm>
-          <a:prstGeom prst="rect">
-            <a:avLst/>
-          </a:prstGeom>
-          <a:noFill/>
-        </p:spPr>
-        <p:txBody>
-          <a:bodyPr wrap="square" anchor="t">
-            <a:spAutoFit/>
-          </a:bodyPr>
-          <a:lstStyle/>
-          <a:p>
-            <a:pPr algn="l">
-              <a:lnSpc>
-                <a:spcPct val="100000"/>
-              </a:lnSpc>
-            </a:pPr>
-            <a:r>
-              <a:rPr sz="1200" b="1">
-                <a:solidFill>
-                  <a:srgbClr val="00FF41"/>
-                </a:solidFill>
-                <a:latin typeface="Courier New"/>
-              </a:rPr>
-              <a:t>CONSTRAINTS</a:t>
-            </a:r>
-          </a:p>
-        </p:txBody>
-      </p:sp>
-      <p:sp>
-        <p:nvSpPr>
-          <p:cNvPr id="18" name="TextBox 17"/>
-          <p:cNvSpPr txBox="1"/>
-          <p:nvPr/>
-        </p:nvSpPr>
-        <p:spPr>
-          <a:xfrm>
-            <a:off x="6553046" y="3246120"/>
-            <a:ext cx="1904923" cy="822960"/>
-          </a:xfrm>
-          <a:prstGeom prst="rect">
-            <a:avLst/>
-          </a:prstGeom>
-          <a:noFill/>
-        </p:spPr>
-        <p:txBody>
-          <a:bodyPr wrap="square" anchor="t">
-            <a:spAutoFit/>
-          </a:bodyPr>
-          <a:lstStyle/>
-          <a:p>
-            <a:pPr algn="l">
-              <a:lnSpc>
-                <a:spcPct val="100000"/>
-              </a:lnSpc>
-            </a:pPr>
-            <a:r>
-              <a:rPr sz="2000" b="1">
+              <a:t>Three ways to ask:</a:t>
+            </a:r>
+          </a:p>
+          <a:p>
+            <a:pPr algn="l">
+              <a:lnSpc>
+                <a:spcPct val="112000"/>
+              </a:lnSpc>
+            </a:pPr>
+            <a:r>
+              <a:rPr sz="3000" b="1">
                 <a:solidFill>
                   <a:srgbClr val="F5F7FA"/>
                 </a:solidFill>
                 <a:latin typeface="Arial"/>
               </a:rPr>
-              <a:t>The material</a:t>
-            </a:r>
-          </a:p>
-        </p:txBody>
-      </p:sp>
-      <p:sp>
-        <p:nvSpPr>
-          <p:cNvPr id="19" name="TextBox 18"/>
-          <p:cNvSpPr txBox="1"/>
-          <p:nvPr/>
-        </p:nvSpPr>
-        <p:spPr>
-          <a:xfrm>
-            <a:off x="6553046" y="4114800"/>
-            <a:ext cx="1904923" cy="1554480"/>
-          </a:xfrm>
-          <a:prstGeom prst="rect">
-            <a:avLst/>
-          </a:prstGeom>
-          <a:noFill/>
-        </p:spPr>
-        <p:txBody>
-          <a:bodyPr wrap="square" anchor="t">
-            <a:spAutoFit/>
-          </a:bodyPr>
-          <a:lstStyle/>
-          <a:p>
-            <a:pPr algn="l">
-              <a:lnSpc>
-                <a:spcPct val="110000"/>
-              </a:lnSpc>
-            </a:pPr>
-            <a:r>
-              <a:rPr sz="1500" b="0">
-                <a:solidFill>
-                  <a:srgbClr val="8A94A6"/>
-                </a:solidFill>
-                <a:latin typeface="Arial"/>
-              </a:rPr>
-              <a:t>What the tech makes easy or hard — screen, sensors, data.</a:t>
-            </a:r>
-          </a:p>
-        </p:txBody>
-      </p:sp>
-      <p:sp>
-        <p:nvSpPr>
-          <p:cNvPr id="20" name="Rounded Rectangle 19"/>
-          <p:cNvSpPr/>
-          <p:nvPr/>
-        </p:nvSpPr>
-        <p:spPr>
-          <a:xfrm>
-            <a:off x="9098049" y="2468880"/>
-            <a:ext cx="2453563" cy="3383280"/>
-          </a:xfrm>
-          <a:prstGeom prst="roundRect">
-            <a:avLst/>
-          </a:prstGeom>
-          <a:solidFill>
-            <a:srgbClr val="151B26"/>
-          </a:solidFill>
-          <a:ln>
-            <a:noFill/>
-          </a:ln>
-          <a:effectLst/>
-        </p:spPr>
-        <p:style>
-          <a:lnRef idx="1">
-            <a:schemeClr val="accent1"/>
-          </a:lnRef>
-          <a:fillRef idx="3">
-            <a:schemeClr val="accent1"/>
-          </a:fillRef>
-          <a:effectRef idx="2">
-            <a:schemeClr val="accent1"/>
-          </a:effectRef>
-          <a:fontRef idx="minor">
-            <a:schemeClr val="lt1"/>
-          </a:fontRef>
-        </p:style>
-        <p:txBody>
-          <a:bodyPr rtlCol="0" anchor="ctr"/>
-          <a:lstStyle/>
-          <a:p>
-            <a:pPr algn="ctr"/>
-          </a:p>
-        </p:txBody>
-      </p:sp>
-      <p:sp>
-        <p:nvSpPr>
-          <p:cNvPr id="21" name="Rectangle 20"/>
-          <p:cNvSpPr/>
-          <p:nvPr/>
-        </p:nvSpPr>
-        <p:spPr>
-          <a:xfrm>
-            <a:off x="9098049" y="2468880"/>
-            <a:ext cx="2453563" cy="82296"/>
-          </a:xfrm>
-          <a:prstGeom prst="rect">
-            <a:avLst/>
-          </a:prstGeom>
-          <a:solidFill>
-            <a:srgbClr val="00FF41"/>
-          </a:solidFill>
-          <a:ln>
-            <a:noFill/>
-          </a:ln>
-          <a:effectLst/>
-        </p:spPr>
-        <p:style>
-          <a:lnRef idx="1">
-            <a:schemeClr val="accent1"/>
-          </a:lnRef>
-          <a:fillRef idx="3">
-            <a:schemeClr val="accent1"/>
-          </a:fillRef>
-          <a:effectRef idx="2">
-            <a:schemeClr val="accent1"/>
-          </a:effectRef>
-          <a:fontRef idx="minor">
-            <a:schemeClr val="lt1"/>
-          </a:fontRef>
-        </p:style>
-        <p:txBody>
-          <a:bodyPr rtlCol="0" anchor="ctr"/>
-          <a:lstStyle/>
-          <a:p>
-            <a:pPr algn="ctr"/>
-          </a:p>
-        </p:txBody>
-      </p:sp>
-      <p:sp>
-        <p:nvSpPr>
-          <p:cNvPr id="22" name="TextBox 21"/>
-          <p:cNvSpPr txBox="1"/>
-          <p:nvPr/>
-        </p:nvSpPr>
-        <p:spPr>
-          <a:xfrm>
-            <a:off x="9372369" y="2788920"/>
-            <a:ext cx="1904923" cy="457200"/>
-          </a:xfrm>
-          <a:prstGeom prst="rect">
-            <a:avLst/>
-          </a:prstGeom>
-          <a:noFill/>
-        </p:spPr>
-        <p:txBody>
-          <a:bodyPr wrap="square" anchor="t">
-            <a:spAutoFit/>
-          </a:bodyPr>
-          <a:lstStyle/>
-          <a:p>
-            <a:pPr algn="l">
-              <a:lnSpc>
-                <a:spcPct val="100000"/>
-              </a:lnSpc>
-            </a:pPr>
-            <a:r>
-              <a:rPr sz="1200" b="1">
-                <a:solidFill>
-                  <a:srgbClr val="00FF41"/>
-                </a:solidFill>
-                <a:latin typeface="Courier New"/>
-              </a:rPr>
-              <a:t>CONTEXT</a:t>
-            </a:r>
-          </a:p>
-        </p:txBody>
-      </p:sp>
-      <p:sp>
-        <p:nvSpPr>
-          <p:cNvPr id="23" name="TextBox 22"/>
-          <p:cNvSpPr txBox="1"/>
-          <p:nvPr/>
-        </p:nvSpPr>
-        <p:spPr>
-          <a:xfrm>
-            <a:off x="9372369" y="3246120"/>
-            <a:ext cx="1904923" cy="822960"/>
-          </a:xfrm>
-          <a:prstGeom prst="rect">
-            <a:avLst/>
-          </a:prstGeom>
-          <a:noFill/>
-        </p:spPr>
-        <p:txBody>
-          <a:bodyPr wrap="square" anchor="t">
-            <a:spAutoFit/>
-          </a:bodyPr>
-          <a:lstStyle/>
-          <a:p>
-            <a:pPr algn="l">
-              <a:lnSpc>
-                <a:spcPct val="100000"/>
-              </a:lnSpc>
-            </a:pPr>
-            <a:r>
-              <a:rPr sz="2000" b="1">
-                <a:solidFill>
-                  <a:srgbClr val="F5F7FA"/>
-                </a:solidFill>
-                <a:latin typeface="Arial"/>
-              </a:rPr>
-              <a:t>The world around it</a:t>
-            </a:r>
-          </a:p>
-        </p:txBody>
-      </p:sp>
-      <p:sp>
-        <p:nvSpPr>
-          <p:cNvPr id="24" name="TextBox 23"/>
-          <p:cNvSpPr txBox="1"/>
-          <p:nvPr/>
-        </p:nvSpPr>
-        <p:spPr>
-          <a:xfrm>
-            <a:off x="9372369" y="4114800"/>
-            <a:ext cx="1904923" cy="1554480"/>
-          </a:xfrm>
-          <a:prstGeom prst="rect">
-            <a:avLst/>
-          </a:prstGeom>
-          <a:noFill/>
-        </p:spPr>
-        <p:txBody>
-          <a:bodyPr wrap="square" anchor="t">
-            <a:spAutoFit/>
-          </a:bodyPr>
-          <a:lstStyle/>
-          <a:p>
-            <a:pPr algn="l">
-              <a:lnSpc>
-                <a:spcPct val="110000"/>
-              </a:lnSpc>
-            </a:pPr>
-            <a:r>
-              <a:rPr sz="1500" b="0">
-                <a:solidFill>
-                  <a:srgbClr val="8A94A6"/>
-                </a:solidFill>
-                <a:latin typeface="Arial"/>
-              </a:rPr>
-              <a:t>Norms, culture, law, and standards it inherits.</a:t>
-            </a:r>
-          </a:p>
-        </p:txBody>
-      </p:sp>
-      <p:sp>
-        <p:nvSpPr>
-          <p:cNvPr id="25" name="TextBox 24"/>
+              <a:t>behavior - understanding - affect.</a:t>
+            </a:r>
+          </a:p>
+        </p:txBody>
+      </p:sp>
+      <p:sp>
+        <p:nvSpPr>
+          <p:cNvPr id="5" name="TextBox 4"/>
           <p:cNvSpPr txBox="1"/>
           <p:nvPr/>
         </p:nvSpPr>
@@ -9963,7 +7457,7 @@
                 </a:solidFill>
                 <a:latin typeface="Courier New"/>
               </a:rPr>
-              <a:t>DISCOVERY · DEFINE</a:t>
+              <a:t>THE THREE LENSES</a:t>
             </a:r>
           </a:p>
         </p:txBody>
@@ -10021,7 +7515,7 @@
         <p:spPr>
           <a:xfrm>
             <a:off x="640080" y="1188720"/>
-            <a:ext cx="10972800" cy="1097280"/>
+            <a:ext cx="10972800" cy="914400"/>
           </a:xfrm>
           <a:prstGeom prst="rect">
             <a:avLst/>
@@ -10040,27 +7534,115 @@
               </a:lnSpc>
             </a:pPr>
             <a:r>
-              <a:rPr sz="3400" b="1">
+              <a:rPr sz="3200" b="1">
                 <a:solidFill>
                   <a:srgbClr val="F5F7FA"/>
                 </a:solidFill>
                 <a:latin typeface="Arial"/>
               </a:rPr>
-              <a:t>Make abstract values concrete</a:t>
-            </a:r>
-          </a:p>
-        </p:txBody>
-      </p:sp>
-      <p:sp>
-        <p:nvSpPr>
-          <p:cNvPr id="5" name="TextBox 4"/>
+              <a:t>Verify a value three ways</a:t>
+            </a:r>
+          </a:p>
+        </p:txBody>
+      </p:sp>
+      <p:sp>
+        <p:nvSpPr>
+          <p:cNvPr id="5" name="Rounded Rectangle 4"/>
+          <p:cNvSpPr/>
+          <p:nvPr/>
+        </p:nvSpPr>
+        <p:spPr>
+          <a:xfrm>
+            <a:off x="640080" y="2468880"/>
+            <a:ext cx="3393338" cy="3383280"/>
+          </a:xfrm>
+          <a:prstGeom prst="roundRect">
+            <a:avLst/>
+          </a:prstGeom>
+          <a:solidFill>
+            <a:srgbClr val="151B26"/>
+          </a:solidFill>
+          <a:ln>
+            <a:noFill/>
+          </a:ln>
+          <a:effectLst/>
+        </p:spPr>
+        <p:style>
+          <a:lnRef idx="1">
+            <a:schemeClr val="accent1"/>
+          </a:lnRef>
+          <a:fillRef idx="3">
+            <a:schemeClr val="accent1"/>
+          </a:fillRef>
+          <a:effectRef idx="2">
+            <a:schemeClr val="accent1"/>
+          </a:effectRef>
+          <a:fontRef idx="minor">
+            <a:schemeClr val="lt1"/>
+          </a:fontRef>
+        </p:style>
+        <p:txBody>
+          <a:bodyPr rtlCol="0" anchor="ctr"/>
+          <a:lstStyle/>
+          <a:p>
+            <a:pPr algn="ctr"/>
+          </a:p>
+        </p:txBody>
+      </p:sp>
+      <p:sp>
+        <p:nvSpPr>
+          <p:cNvPr id="6" name="Rectangle 5"/>
+          <p:cNvSpPr/>
+          <p:nvPr/>
+        </p:nvSpPr>
+        <p:spPr>
+          <a:xfrm>
+            <a:off x="640080" y="2468880"/>
+            <a:ext cx="3393338" cy="82296"/>
+          </a:xfrm>
+          <a:prstGeom prst="rect">
+            <a:avLst/>
+          </a:prstGeom>
+          <a:solidFill>
+            <a:srgbClr val="00FF41"/>
+          </a:solidFill>
+          <a:ln>
+            <a:noFill/>
+          </a:ln>
+          <a:effectLst/>
+        </p:spPr>
+        <p:style>
+          <a:lnRef idx="1">
+            <a:schemeClr val="accent1"/>
+          </a:lnRef>
+          <a:fillRef idx="3">
+            <a:schemeClr val="accent1"/>
+          </a:fillRef>
+          <a:effectRef idx="2">
+            <a:schemeClr val="accent1"/>
+          </a:effectRef>
+          <a:fontRef idx="minor">
+            <a:schemeClr val="lt1"/>
+          </a:fontRef>
+        </p:style>
+        <p:txBody>
+          <a:bodyPr rtlCol="0" anchor="ctr"/>
+          <a:lstStyle/>
+          <a:p>
+            <a:pPr algn="ctr"/>
+          </a:p>
+        </p:txBody>
+      </p:sp>
+      <p:sp>
+        <p:nvSpPr>
+          <p:cNvPr id="7" name="TextBox 6"/>
           <p:cNvSpPr txBox="1"/>
           <p:nvPr/>
         </p:nvSpPr>
         <p:spPr>
           <a:xfrm>
-            <a:off x="658368" y="2286000"/>
-            <a:ext cx="10881360" cy="3657600"/>
+            <a:off x="914400" y="2788920"/>
+            <a:ext cx="2844698" cy="457200"/>
           </a:xfrm>
           <a:prstGeom prst="rect">
             <a:avLst/>
@@ -10075,133 +7657,31 @@
           <a:p>
             <a:pPr algn="l">
               <a:lnSpc>
-                <a:spcPct val="112000"/>
-              </a:lnSpc>
-            </a:pPr>
-            <a:r>
-              <a:rPr sz="2200" b="0">
-                <a:solidFill>
-                  <a:srgbClr val="F5F7FA"/>
-                </a:solidFill>
-                <a:latin typeface="Arial"/>
-              </a:rPr>
-              <a:t>A value you can’t define, you can’t test. Turn it into operational terms:</a:t>
-            </a:r>
-          </a:p>
-          <a:p>
-            <a:pPr algn="l">
-              <a:lnSpc>
-                <a:spcPct val="112000"/>
-              </a:lnSpc>
-            </a:pPr>
-            <a:r>
-              <a:rPr sz="2000" b="0">
-                <a:solidFill>
-                  <a:srgbClr val="F5F7FA"/>
-                </a:solidFill>
-                <a:latin typeface="Arial"/>
-              </a:rPr>
-              <a:t/>
-            </a:r>
-          </a:p>
-          <a:p>
-            <a:pPr algn="l">
-              <a:lnSpc>
-                <a:spcPct val="112000"/>
-              </a:lnSpc>
-            </a:pPr>
-            <a:r>
-              <a:rPr sz="2000" b="1">
+                <a:spcPct val="100000"/>
+              </a:lnSpc>
+            </a:pPr>
+            <a:r>
+              <a:rPr sz="1200" b="1">
                 <a:solidFill>
                   <a:srgbClr val="00FF41"/>
                 </a:solidFill>
-                <a:latin typeface="Arial"/>
-              </a:rPr>
-              <a:t>Privacy</a:t>
-            </a:r>
-            <a:r>
-              <a:rPr sz="2000" b="0">
-                <a:solidFill>
-                  <a:srgbClr val="F5F7FA"/>
-                </a:solidFill>
-                <a:latin typeface="Arial"/>
-              </a:rPr>
-              <a:t> → control · secrecy · contextual integrity.    </a:t>
-            </a:r>
-            <a:r>
-              <a:rPr sz="2000" b="1">
-                <a:solidFill>
-                  <a:srgbClr val="00FF41"/>
-                </a:solidFill>
-                <a:latin typeface="Arial"/>
-              </a:rPr>
-              <a:t>Fairness</a:t>
-            </a:r>
-            <a:r>
-              <a:rPr sz="2000" b="0">
-                <a:solidFill>
-                  <a:srgbClr val="F5F7FA"/>
-                </a:solidFill>
-                <a:latin typeface="Arial"/>
-              </a:rPr>
-              <a:t> → equal access.</a:t>
-            </a:r>
-          </a:p>
-          <a:p>
-            <a:pPr algn="l">
-              <a:lnSpc>
-                <a:spcPct val="112000"/>
-              </a:lnSpc>
-            </a:pPr>
-            <a:r>
-              <a:rPr sz="2000" b="1">
-                <a:solidFill>
-                  <a:srgbClr val="00FF41"/>
-                </a:solidFill>
-                <a:latin typeface="Arial"/>
-              </a:rPr>
-              <a:t>Accessibility</a:t>
-            </a:r>
-            <a:r>
-              <a:rPr sz="2000" b="0">
-                <a:solidFill>
-                  <a:srgbClr val="F5F7FA"/>
-                </a:solidFill>
-                <a:latin typeface="Arial"/>
-              </a:rPr>
-              <a:t> → perceivable · operable for every body.    </a:t>
-            </a:r>
-            <a:r>
-              <a:rPr sz="2000" b="1">
-                <a:solidFill>
-                  <a:srgbClr val="00FF41"/>
-                </a:solidFill>
-                <a:latin typeface="Arial"/>
-              </a:rPr>
-              <a:t>Autonomy</a:t>
-            </a:r>
-            <a:r>
-              <a:rPr sz="2000" b="0">
-                <a:solidFill>
-                  <a:srgbClr val="F5F7FA"/>
-                </a:solidFill>
-                <a:latin typeface="Arial"/>
-              </a:rPr>
-              <a:t> → act for your own reasons.</a:t>
-            </a:r>
-          </a:p>
-        </p:txBody>
-      </p:sp>
-      <p:sp>
-        <p:nvSpPr>
-          <p:cNvPr id="6" name="TextBox 5"/>
+                <a:latin typeface="Courier New"/>
+              </a:rPr>
+              <a:t>BEHAVIOR</a:t>
+            </a:r>
+          </a:p>
+        </p:txBody>
+      </p:sp>
+      <p:sp>
+        <p:nvSpPr>
+          <p:cNvPr id="8" name="TextBox 7"/>
           <p:cNvSpPr txBox="1"/>
           <p:nvPr/>
         </p:nvSpPr>
         <p:spPr>
           <a:xfrm>
-            <a:off x="640080" y="6355080"/>
-            <a:ext cx="10972800" cy="365760"/>
+            <a:off x="914400" y="3246120"/>
+            <a:ext cx="2844698" cy="822960"/>
           </a:xfrm>
           <a:prstGeom prst="rect">
             <a:avLst/>
@@ -10220,6 +7700,494 @@
               </a:lnSpc>
             </a:pPr>
             <a:r>
+              <a:rPr sz="2000" b="1">
+                <a:solidFill>
+                  <a:srgbClr val="F5F7FA"/>
+                </a:solidFill>
+                <a:latin typeface="Arial"/>
+              </a:rPr>
+              <a:t>Do they ACT differently?</a:t>
+            </a:r>
+          </a:p>
+        </p:txBody>
+      </p:sp>
+      <p:sp>
+        <p:nvSpPr>
+          <p:cNvPr id="9" name="TextBox 8"/>
+          <p:cNvSpPr txBox="1"/>
+          <p:nvPr/>
+        </p:nvSpPr>
+        <p:spPr>
+          <a:xfrm>
+            <a:off x="914400" y="4114800"/>
+            <a:ext cx="2844698" cy="1554480"/>
+          </a:xfrm>
+          <a:prstGeom prst="rect">
+            <a:avLst/>
+          </a:prstGeom>
+          <a:noFill/>
+        </p:spPr>
+        <p:txBody>
+          <a:bodyPr wrap="square" anchor="t">
+            <a:spAutoFit/>
+          </a:bodyPr>
+          <a:lstStyle/>
+          <a:p>
+            <a:pPr algn="l">
+              <a:lnSpc>
+                <a:spcPct val="110000"/>
+              </a:lnSpc>
+            </a:pPr>
+            <a:r>
+              <a:rPr sz="1500" b="0">
+                <a:solidFill>
+                  <a:srgbClr val="8A94A6"/>
+                </a:solidFill>
+                <a:latin typeface="Arial"/>
+              </a:rPr>
+              <a:t>Action, decision, practice, outcome. Does the design change what people actually do?</a:t>
+            </a:r>
+          </a:p>
+        </p:txBody>
+      </p:sp>
+      <p:sp>
+        <p:nvSpPr>
+          <p:cNvPr id="10" name="Rounded Rectangle 9"/>
+          <p:cNvSpPr/>
+          <p:nvPr/>
+        </p:nvSpPr>
+        <p:spPr>
+          <a:xfrm>
+            <a:off x="4399178" y="2468880"/>
+            <a:ext cx="3393338" cy="3383280"/>
+          </a:xfrm>
+          <a:prstGeom prst="roundRect">
+            <a:avLst/>
+          </a:prstGeom>
+          <a:solidFill>
+            <a:srgbClr val="151B26"/>
+          </a:solidFill>
+          <a:ln>
+            <a:noFill/>
+          </a:ln>
+          <a:effectLst/>
+        </p:spPr>
+        <p:style>
+          <a:lnRef idx="1">
+            <a:schemeClr val="accent1"/>
+          </a:lnRef>
+          <a:fillRef idx="3">
+            <a:schemeClr val="accent1"/>
+          </a:fillRef>
+          <a:effectRef idx="2">
+            <a:schemeClr val="accent1"/>
+          </a:effectRef>
+          <a:fontRef idx="minor">
+            <a:schemeClr val="lt1"/>
+          </a:fontRef>
+        </p:style>
+        <p:txBody>
+          <a:bodyPr rtlCol="0" anchor="ctr"/>
+          <a:lstStyle/>
+          <a:p>
+            <a:pPr algn="ctr"/>
+          </a:p>
+        </p:txBody>
+      </p:sp>
+      <p:sp>
+        <p:nvSpPr>
+          <p:cNvPr id="11" name="Rectangle 10"/>
+          <p:cNvSpPr/>
+          <p:nvPr/>
+        </p:nvSpPr>
+        <p:spPr>
+          <a:xfrm>
+            <a:off x="4399178" y="2468880"/>
+            <a:ext cx="3393338" cy="82296"/>
+          </a:xfrm>
+          <a:prstGeom prst="rect">
+            <a:avLst/>
+          </a:prstGeom>
+          <a:solidFill>
+            <a:srgbClr val="00FF41"/>
+          </a:solidFill>
+          <a:ln>
+            <a:noFill/>
+          </a:ln>
+          <a:effectLst/>
+        </p:spPr>
+        <p:style>
+          <a:lnRef idx="1">
+            <a:schemeClr val="accent1"/>
+          </a:lnRef>
+          <a:fillRef idx="3">
+            <a:schemeClr val="accent1"/>
+          </a:fillRef>
+          <a:effectRef idx="2">
+            <a:schemeClr val="accent1"/>
+          </a:effectRef>
+          <a:fontRef idx="minor">
+            <a:schemeClr val="lt1"/>
+          </a:fontRef>
+        </p:style>
+        <p:txBody>
+          <a:bodyPr rtlCol="0" anchor="ctr"/>
+          <a:lstStyle/>
+          <a:p>
+            <a:pPr algn="ctr"/>
+          </a:p>
+        </p:txBody>
+      </p:sp>
+      <p:sp>
+        <p:nvSpPr>
+          <p:cNvPr id="12" name="TextBox 11"/>
+          <p:cNvSpPr txBox="1"/>
+          <p:nvPr/>
+        </p:nvSpPr>
+        <p:spPr>
+          <a:xfrm>
+            <a:off x="4673498" y="2788920"/>
+            <a:ext cx="2844698" cy="457200"/>
+          </a:xfrm>
+          <a:prstGeom prst="rect">
+            <a:avLst/>
+          </a:prstGeom>
+          <a:noFill/>
+        </p:spPr>
+        <p:txBody>
+          <a:bodyPr wrap="square" anchor="t">
+            <a:spAutoFit/>
+          </a:bodyPr>
+          <a:lstStyle/>
+          <a:p>
+            <a:pPr algn="l">
+              <a:lnSpc>
+                <a:spcPct val="100000"/>
+              </a:lnSpc>
+            </a:pPr>
+            <a:r>
+              <a:rPr sz="1200" b="1">
+                <a:solidFill>
+                  <a:srgbClr val="00FF41"/>
+                </a:solidFill>
+                <a:latin typeface="Courier New"/>
+              </a:rPr>
+              <a:t>UNDERSTANDING</a:t>
+            </a:r>
+          </a:p>
+        </p:txBody>
+      </p:sp>
+      <p:sp>
+        <p:nvSpPr>
+          <p:cNvPr id="13" name="TextBox 12"/>
+          <p:cNvSpPr txBox="1"/>
+          <p:nvPr/>
+        </p:nvSpPr>
+        <p:spPr>
+          <a:xfrm>
+            <a:off x="4673498" y="3246120"/>
+            <a:ext cx="2844698" cy="822960"/>
+          </a:xfrm>
+          <a:prstGeom prst="rect">
+            <a:avLst/>
+          </a:prstGeom>
+          <a:noFill/>
+        </p:spPr>
+        <p:txBody>
+          <a:bodyPr wrap="square" anchor="t">
+            <a:spAutoFit/>
+          </a:bodyPr>
+          <a:lstStyle/>
+          <a:p>
+            <a:pPr algn="l">
+              <a:lnSpc>
+                <a:spcPct val="100000"/>
+              </a:lnSpc>
+            </a:pPr>
+            <a:r>
+              <a:rPr sz="2000" b="1">
+                <a:solidFill>
+                  <a:srgbClr val="F5F7FA"/>
+                </a:solidFill>
+                <a:latin typeface="Arial"/>
+              </a:rPr>
+              <a:t>Do they GRASP it better?</a:t>
+            </a:r>
+          </a:p>
+        </p:txBody>
+      </p:sp>
+      <p:sp>
+        <p:nvSpPr>
+          <p:cNvPr id="14" name="TextBox 13"/>
+          <p:cNvSpPr txBox="1"/>
+          <p:nvPr/>
+        </p:nvSpPr>
+        <p:spPr>
+          <a:xfrm>
+            <a:off x="4673498" y="4114800"/>
+            <a:ext cx="2844698" cy="1554480"/>
+          </a:xfrm>
+          <a:prstGeom prst="rect">
+            <a:avLst/>
+          </a:prstGeom>
+          <a:noFill/>
+        </p:spPr>
+        <p:txBody>
+          <a:bodyPr wrap="square" anchor="t">
+            <a:spAutoFit/>
+          </a:bodyPr>
+          <a:lstStyle/>
+          <a:p>
+            <a:pPr algn="l">
+              <a:lnSpc>
+                <a:spcPct val="110000"/>
+              </a:lnSpc>
+            </a:pPr>
+            <a:r>
+              <a:rPr sz="1500" b="0">
+                <a:solidFill>
+                  <a:srgbClr val="8A94A6"/>
+                </a:solidFill>
+                <a:latin typeface="Arial"/>
+              </a:rPr>
+              <a:t>Cognition achieved, augmented, deepened. Does using it deepen understanding of the value or the harm?</a:t>
+            </a:r>
+          </a:p>
+        </p:txBody>
+      </p:sp>
+      <p:sp>
+        <p:nvSpPr>
+          <p:cNvPr id="15" name="Rounded Rectangle 14"/>
+          <p:cNvSpPr/>
+          <p:nvPr/>
+        </p:nvSpPr>
+        <p:spPr>
+          <a:xfrm>
+            <a:off x="8158276" y="2468880"/>
+            <a:ext cx="3393338" cy="3383280"/>
+          </a:xfrm>
+          <a:prstGeom prst="roundRect">
+            <a:avLst/>
+          </a:prstGeom>
+          <a:solidFill>
+            <a:srgbClr val="151B26"/>
+          </a:solidFill>
+          <a:ln>
+            <a:noFill/>
+          </a:ln>
+          <a:effectLst/>
+        </p:spPr>
+        <p:style>
+          <a:lnRef idx="1">
+            <a:schemeClr val="accent1"/>
+          </a:lnRef>
+          <a:fillRef idx="3">
+            <a:schemeClr val="accent1"/>
+          </a:fillRef>
+          <a:effectRef idx="2">
+            <a:schemeClr val="accent1"/>
+          </a:effectRef>
+          <a:fontRef idx="minor">
+            <a:schemeClr val="lt1"/>
+          </a:fontRef>
+        </p:style>
+        <p:txBody>
+          <a:bodyPr rtlCol="0" anchor="ctr"/>
+          <a:lstStyle/>
+          <a:p>
+            <a:pPr algn="ctr"/>
+          </a:p>
+        </p:txBody>
+      </p:sp>
+      <p:sp>
+        <p:nvSpPr>
+          <p:cNvPr id="16" name="Rectangle 15"/>
+          <p:cNvSpPr/>
+          <p:nvPr/>
+        </p:nvSpPr>
+        <p:spPr>
+          <a:xfrm>
+            <a:off x="8158276" y="2468880"/>
+            <a:ext cx="3393338" cy="82296"/>
+          </a:xfrm>
+          <a:prstGeom prst="rect">
+            <a:avLst/>
+          </a:prstGeom>
+          <a:solidFill>
+            <a:srgbClr val="00FF41"/>
+          </a:solidFill>
+          <a:ln>
+            <a:noFill/>
+          </a:ln>
+          <a:effectLst/>
+        </p:spPr>
+        <p:style>
+          <a:lnRef idx="1">
+            <a:schemeClr val="accent1"/>
+          </a:lnRef>
+          <a:fillRef idx="3">
+            <a:schemeClr val="accent1"/>
+          </a:fillRef>
+          <a:effectRef idx="2">
+            <a:schemeClr val="accent1"/>
+          </a:effectRef>
+          <a:fontRef idx="minor">
+            <a:schemeClr val="lt1"/>
+          </a:fontRef>
+        </p:style>
+        <p:txBody>
+          <a:bodyPr rtlCol="0" anchor="ctr"/>
+          <a:lstStyle/>
+          <a:p>
+            <a:pPr algn="ctr"/>
+          </a:p>
+        </p:txBody>
+      </p:sp>
+      <p:sp>
+        <p:nvSpPr>
+          <p:cNvPr id="17" name="TextBox 16"/>
+          <p:cNvSpPr txBox="1"/>
+          <p:nvPr/>
+        </p:nvSpPr>
+        <p:spPr>
+          <a:xfrm>
+            <a:off x="8432596" y="2788920"/>
+            <a:ext cx="2844698" cy="457200"/>
+          </a:xfrm>
+          <a:prstGeom prst="rect">
+            <a:avLst/>
+          </a:prstGeom>
+          <a:noFill/>
+        </p:spPr>
+        <p:txBody>
+          <a:bodyPr wrap="square" anchor="t">
+            <a:spAutoFit/>
+          </a:bodyPr>
+          <a:lstStyle/>
+          <a:p>
+            <a:pPr algn="l">
+              <a:lnSpc>
+                <a:spcPct val="100000"/>
+              </a:lnSpc>
+            </a:pPr>
+            <a:r>
+              <a:rPr sz="1200" b="1">
+                <a:solidFill>
+                  <a:srgbClr val="00FF41"/>
+                </a:solidFill>
+                <a:latin typeface="Courier New"/>
+              </a:rPr>
+              <a:t>AFFECT</a:t>
+            </a:r>
+          </a:p>
+        </p:txBody>
+      </p:sp>
+      <p:sp>
+        <p:nvSpPr>
+          <p:cNvPr id="18" name="TextBox 17"/>
+          <p:cNvSpPr txBox="1"/>
+          <p:nvPr/>
+        </p:nvSpPr>
+        <p:spPr>
+          <a:xfrm>
+            <a:off x="8432596" y="3246120"/>
+            <a:ext cx="2844698" cy="822960"/>
+          </a:xfrm>
+          <a:prstGeom prst="rect">
+            <a:avLst/>
+          </a:prstGeom>
+          <a:noFill/>
+        </p:spPr>
+        <p:txBody>
+          <a:bodyPr wrap="square" anchor="t">
+            <a:spAutoFit/>
+          </a:bodyPr>
+          <a:lstStyle/>
+          <a:p>
+            <a:pPr algn="l">
+              <a:lnSpc>
+                <a:spcPct val="100000"/>
+              </a:lnSpc>
+            </a:pPr>
+            <a:r>
+              <a:rPr sz="2000" b="1">
+                <a:solidFill>
+                  <a:srgbClr val="F5F7FA"/>
+                </a:solidFill>
+                <a:latin typeface="Arial"/>
+              </a:rPr>
+              <a:t>Do they FEEL differently?</a:t>
+            </a:r>
+          </a:p>
+        </p:txBody>
+      </p:sp>
+      <p:sp>
+        <p:nvSpPr>
+          <p:cNvPr id="19" name="TextBox 18"/>
+          <p:cNvSpPr txBox="1"/>
+          <p:nvPr/>
+        </p:nvSpPr>
+        <p:spPr>
+          <a:xfrm>
+            <a:off x="8432596" y="4114800"/>
+            <a:ext cx="2844698" cy="1554480"/>
+          </a:xfrm>
+          <a:prstGeom prst="rect">
+            <a:avLst/>
+          </a:prstGeom>
+          <a:noFill/>
+        </p:spPr>
+        <p:txBody>
+          <a:bodyPr wrap="square" anchor="t">
+            <a:spAutoFit/>
+          </a:bodyPr>
+          <a:lstStyle/>
+          <a:p>
+            <a:pPr algn="l">
+              <a:lnSpc>
+                <a:spcPct val="110000"/>
+              </a:lnSpc>
+            </a:pPr>
+            <a:r>
+              <a:rPr sz="1500" b="0">
+                <a:solidFill>
+                  <a:srgbClr val="8A94A6"/>
+                </a:solidFill>
+                <a:latin typeface="Arial"/>
+              </a:rPr>
+              <a:t>Attitude, empathy, preference. Does it shift how people feel or judge?</a:t>
+            </a:r>
+          </a:p>
+        </p:txBody>
+      </p:sp>
+      <p:sp>
+        <p:nvSpPr>
+          <p:cNvPr id="20" name="TextBox 19"/>
+          <p:cNvSpPr txBox="1"/>
+          <p:nvPr/>
+        </p:nvSpPr>
+        <p:spPr>
+          <a:xfrm>
+            <a:off x="640080" y="6355080"/>
+            <a:ext cx="10972800" cy="365760"/>
+          </a:xfrm>
+          <a:prstGeom prst="rect">
+            <a:avLst/>
+          </a:prstGeom>
+          <a:noFill/>
+        </p:spPr>
+        <p:txBody>
+          <a:bodyPr wrap="square" anchor="t">
+            <a:spAutoFit/>
+          </a:bodyPr>
+          <a:lstStyle/>
+          <a:p>
+            <a:pPr algn="l">
+              <a:lnSpc>
+                <a:spcPct val="100000"/>
+              </a:lnSpc>
+            </a:pPr>
+            <a:r>
               <a:rPr sz="1000" b="0">
                 <a:solidFill>
                   <a:srgbClr val="5A6474"/>
@@ -10227,6 +8195,45 @@
                 <a:latin typeface="Courier New"/>
               </a:rPr>
               <a:t>Good Code, Good Vibes · TECHIE 1121 · Cornell Tech · Summer 2026</a:t>
+            </a:r>
+          </a:p>
+        </p:txBody>
+      </p:sp>
+      <p:sp>
+        <p:nvSpPr>
+          <p:cNvPr id="21" name="TextBox 20"/>
+          <p:cNvSpPr txBox="1"/>
+          <p:nvPr/>
+        </p:nvSpPr>
+        <p:spPr>
+          <a:xfrm>
+            <a:off x="640080" y="6053328"/>
+            <a:ext cx="10972800" cy="292608"/>
+          </a:xfrm>
+          <a:prstGeom prst="rect">
+            <a:avLst/>
+          </a:prstGeom>
+          <a:noFill/>
+        </p:spPr>
+        <p:txBody>
+          <a:bodyPr wrap="square" anchor="t">
+            <a:spAutoFit/>
+          </a:bodyPr>
+          <a:lstStyle/>
+          <a:p>
+            <a:pPr algn="l">
+              <a:lnSpc>
+                <a:spcPct val="100000"/>
+              </a:lnSpc>
+            </a:pPr>
+            <a:r>
+              <a:rPr sz="950" b="0">
+                <a:solidFill>
+                  <a:srgbClr val="5A6474"/>
+                </a:solidFill>
+                <a:latin typeface="Courier New"/>
+              </a:rPr>
+              <a:t>Verification lenses adapted from Values at Play - VAP course, Engelmann &amp; Nissenbaum (Cornell Tech)</a:t>
             </a:r>
           </a:p>
         </p:txBody>
@@ -10291,7 +8298,7 @@
                 </a:solidFill>
                 <a:latin typeface="Courier New"/>
               </a:rPr>
-              <a:t>EXAMPLE · YOUR BUILD</a:t>
+              <a:t>LENS 1 - BEHAVIOR</a:t>
             </a:r>
           </a:p>
         </p:txBody>
@@ -10340,16 +8347,41 @@
           </a:p>
         </p:txBody>
       </p:sp>
-      <p:sp>
-        <p:nvSpPr>
-          <p:cNvPr id="4" name="TextBox 3"/>
+      <p:pic>
+        <p:nvPicPr>
+          <p:cNvPr id="4" name="Picture 3" descr="smart_meter.jpg"/>
+          <p:cNvPicPr>
+            <a:picLocks noChangeAspect="1"/>
+          </p:cNvPicPr>
+          <p:nvPr/>
+        </p:nvPicPr>
+        <p:blipFill>
+          <a:blip r:embed="rId2"/>
+          <a:srcRect l="25111" r="25111"/>
+          <a:stretch>
+            <a:fillRect/>
+          </a:stretch>
+        </p:blipFill>
+        <p:spPr>
+          <a:xfrm>
+            <a:off x="7071055" y="0"/>
+            <a:ext cx="5120640" cy="6858000"/>
+          </a:xfrm>
+          <a:prstGeom prst="rect">
+            <a:avLst/>
+          </a:prstGeom>
+        </p:spPr>
+      </p:pic>
+      <p:sp>
+        <p:nvSpPr>
+          <p:cNvPr id="5" name="TextBox 4"/>
           <p:cNvSpPr txBox="1"/>
           <p:nvPr/>
         </p:nvSpPr>
         <p:spPr>
           <a:xfrm>
             <a:off x="640080" y="1188720"/>
-            <a:ext cx="10972800" cy="1097280"/>
+            <a:ext cx="6019495" cy="1280160"/>
           </a:xfrm>
           <a:prstGeom prst="rect">
             <a:avLst/>
@@ -10368,27 +8400,27 @@
               </a:lnSpc>
             </a:pPr>
             <a:r>
-              <a:rPr sz="3400" b="1">
+              <a:rPr sz="3000" b="1">
                 <a:solidFill>
                   <a:srgbClr val="F5F7FA"/>
                 </a:solidFill>
                 <a:latin typeface="Arial"/>
               </a:rPr>
-              <a:t>Discovery on a vibe-coded app</a:t>
-            </a:r>
-          </a:p>
-        </p:txBody>
-      </p:sp>
-      <p:sp>
-        <p:nvSpPr>
-          <p:cNvPr id="5" name="TextBox 4"/>
+              <a:t>Does the design change what people DO?</a:t>
+            </a:r>
+          </a:p>
+        </p:txBody>
+      </p:sp>
+      <p:sp>
+        <p:nvSpPr>
+          <p:cNvPr id="6" name="TextBox 5"/>
           <p:cNvSpPr txBox="1"/>
           <p:nvPr/>
         </p:nvSpPr>
         <p:spPr>
           <a:xfrm>
-            <a:off x="658368" y="2286000"/>
-            <a:ext cx="10881360" cy="3657600"/>
+            <a:off x="640080" y="2560320"/>
+            <a:ext cx="6019495" cy="3108960"/>
           </a:xfrm>
           <a:prstGeom prst="rect">
             <a:avLst/>
@@ -10403,110 +8435,173 @@
           <a:p>
             <a:pPr algn="l">
               <a:lnSpc>
-                <a:spcPct val="112000"/>
-              </a:lnSpc>
-            </a:pPr>
-            <a:r>
-              <a:rPr sz="2200" b="1">
+                <a:spcPct val="116000"/>
+              </a:lnSpc>
+            </a:pPr>
+            <a:r>
+              <a:rPr sz="1800" b="0">
                 <a:solidFill>
                   <a:srgbClr val="F5F7FA"/>
                 </a:solidFill>
                 <a:latin typeface="Arial"/>
               </a:rPr>
-              <a:t>An accessible event sign-up form.</a:t>
-            </a:r>
-          </a:p>
-          <a:p>
-            <a:pPr algn="l">
-              <a:lnSpc>
-                <a:spcPct val="112000"/>
-              </a:lnSpc>
-            </a:pPr>
-            <a:r>
-              <a:rPr sz="2000" b="0">
+              <a:t>The sharpest test. A smart meter that shows live energy use only "works" for sustainability if people </a:t>
+            </a:r>
+            <a:r>
+              <a:rPr sz="1800" b="1">
+                <a:solidFill>
+                  <a:srgbClr val="00FF41"/>
+                </a:solidFill>
+                <a:latin typeface="Arial"/>
+              </a:rPr>
+              <a:t>use less</a:t>
+            </a:r>
+            <a:r>
+              <a:rPr sz="1800" b="0">
                 <a:solidFill>
                   <a:srgbClr val="F5F7FA"/>
                 </a:solidFill>
                 <a:latin typeface="Arial"/>
               </a:rPr>
+              <a:t>.</a:t>
+            </a:r>
+          </a:p>
+          <a:p>
+            <a:pPr algn="l">
+              <a:lnSpc>
+                <a:spcPct val="116000"/>
+              </a:lnSpc>
+            </a:pPr>
+            <a:r>
+              <a:rPr sz="1900" b="0">
+                <a:solidFill>
+                  <a:srgbClr val="F5F7FA"/>
+                </a:solidFill>
+                <a:latin typeface="Arial"/>
+              </a:rPr>
               <a:t/>
             </a:r>
           </a:p>
           <a:p>
             <a:pPr algn="l">
               <a:lnSpc>
-                <a:spcPct val="112000"/>
-              </a:lnSpc>
-            </a:pPr>
-            <a:r>
-              <a:rPr sz="2000" b="0">
-                <a:solidFill>
-                  <a:srgbClr val="F5F7FA"/>
-                </a:solidFill>
-                <a:latin typeface="Arial"/>
-              </a:rPr>
-              <a:t>Sources → values: the </a:t>
-            </a:r>
-            <a:r>
-              <a:rPr sz="2000" b="1">
+                <a:spcPct val="116000"/>
+              </a:lnSpc>
+            </a:pPr>
+            <a:r>
+              <a:rPr sz="1700" b="1">
                 <a:solidFill>
                   <a:srgbClr val="00FF41"/>
                 </a:solidFill>
                 <a:latin typeface="Arial"/>
               </a:rPr>
-              <a:t>purpose</a:t>
-            </a:r>
-            <a:r>
-              <a:rPr sz="2000" b="0">
-                <a:solidFill>
-                  <a:srgbClr val="F5F7FA"/>
-                </a:solidFill>
-                <a:latin typeface="Arial"/>
-              </a:rPr>
-              <a:t> (let anyone RSVP) → access; the </a:t>
-            </a:r>
-            <a:r>
-              <a:rPr sz="2000" b="1">
-                <a:solidFill>
-                  <a:srgbClr val="00FF41"/>
-                </a:solidFill>
-                <a:latin typeface="Arial"/>
-              </a:rPr>
-              <a:t>actors</a:t>
-            </a:r>
-            <a:r>
-              <a:rPr sz="2000" b="0">
-                <a:solidFill>
-                  <a:srgbClr val="F5F7FA"/>
-                </a:solidFill>
-                <a:latin typeface="Arial"/>
-              </a:rPr>
-              <a:t> (screen-reader users) → dignity; the </a:t>
-            </a:r>
-            <a:r>
-              <a:rPr sz="2000" b="1">
-                <a:solidFill>
-                  <a:srgbClr val="00FF41"/>
-                </a:solidFill>
-                <a:latin typeface="Arial"/>
-              </a:rPr>
-              <a:t>context</a:t>
-            </a:r>
-            <a:r>
-              <a:rPr sz="2000" b="0">
-                <a:solidFill>
-                  <a:srgbClr val="F5F7FA"/>
-                </a:solidFill>
-                <a:latin typeface="Arial"/>
-              </a:rPr>
-              <a:t> (you collect names) → privacy.</a:t>
-            </a:r>
-          </a:p>
-        </p:txBody>
-      </p:sp>
-      <p:sp>
-        <p:nvSpPr>
-          <p:cNvPr id="6" name="TextBox 5"/>
+              <a:t>Verify how:</a:t>
+            </a:r>
+          </a:p>
+          <a:p>
+            <a:pPr algn="l">
+              <a:lnSpc>
+                <a:spcPct val="116000"/>
+              </a:lnSpc>
+            </a:pPr>
+            <a:r>
+              <a:rPr sz="1600" b="0">
+                <a:solidFill>
+                  <a:srgbClr val="8A94A6"/>
+                </a:solidFill>
+                <a:latin typeface="Arial"/>
+              </a:rPr>
+              <a:t>prototype - user study - before/after - A/B two versions - task completion</a:t>
+            </a:r>
+          </a:p>
+        </p:txBody>
+      </p:sp>
+      <p:sp>
+        <p:nvSpPr>
+          <p:cNvPr id="7" name="Rectangle 6"/>
+          <p:cNvSpPr/>
+          <p:nvPr/>
+        </p:nvSpPr>
+        <p:spPr>
+          <a:xfrm>
+            <a:off x="7071055" y="6547104"/>
+            <a:ext cx="5120640" cy="310896"/>
+          </a:xfrm>
+          <a:prstGeom prst="rect">
+            <a:avLst/>
+          </a:prstGeom>
+          <a:solidFill>
+            <a:srgbClr val="0B0E14"/>
+          </a:solidFill>
+          <a:ln>
+            <a:noFill/>
+          </a:ln>
+          <a:effectLst/>
+        </p:spPr>
+        <p:style>
+          <a:lnRef idx="1">
+            <a:schemeClr val="accent1"/>
+          </a:lnRef>
+          <a:fillRef idx="3">
+            <a:schemeClr val="accent1"/>
+          </a:fillRef>
+          <a:effectRef idx="2">
+            <a:schemeClr val="accent1"/>
+          </a:effectRef>
+          <a:fontRef idx="minor">
+            <a:schemeClr val="lt1"/>
+          </a:fontRef>
+        </p:style>
+        <p:txBody>
+          <a:bodyPr rtlCol="0" anchor="ctr"/>
+          <a:lstStyle/>
+          <a:p>
+            <a:pPr algn="ctr"/>
+          </a:p>
+        </p:txBody>
+      </p:sp>
+      <p:sp>
+        <p:nvSpPr>
+          <p:cNvPr id="8" name="TextBox 7"/>
+          <p:cNvSpPr txBox="1"/>
+          <p:nvPr/>
+        </p:nvSpPr>
+        <p:spPr>
+          <a:xfrm>
+            <a:off x="7208215" y="6565392"/>
+            <a:ext cx="4846320" cy="274320"/>
+          </a:xfrm>
+          <a:prstGeom prst="rect">
+            <a:avLst/>
+          </a:prstGeom>
+          <a:noFill/>
+        </p:spPr>
+        <p:txBody>
+          <a:bodyPr wrap="square" anchor="t">
+            <a:spAutoFit/>
+          </a:bodyPr>
+          <a:lstStyle/>
+          <a:p>
+            <a:pPr algn="l">
+              <a:lnSpc>
+                <a:spcPct val="100000"/>
+              </a:lnSpc>
+            </a:pPr>
+            <a:r>
+              <a:rPr sz="850" b="0">
+                <a:solidFill>
+                  <a:srgbClr val="8A94A6"/>
+                </a:solidFill>
+                <a:latin typeface="Courier New"/>
+              </a:rPr>
+              <a:t>Behavior verification (Values at Play) - smart-meter image, educational use</a:t>
+            </a:r>
+          </a:p>
+        </p:txBody>
+      </p:sp>
+      <p:sp>
+        <p:nvSpPr>
+          <p:cNvPr id="9" name="TextBox 8"/>
           <p:cNvSpPr txBox="1"/>
           <p:nvPr/>
         </p:nvSpPr>
@@ -10603,7 +8698,7 @@
                 </a:solidFill>
                 <a:latin typeface="Courier New"/>
               </a:rPr>
-              <a:t>EXAMPLE · REAL WORLD</a:t>
+              <a:t>LENSES 2 &amp; 3 - VERIFY HOW</a:t>
             </a:r>
           </a:p>
         </p:txBody>
@@ -10661,7 +8756,7 @@
         <p:spPr>
           <a:xfrm>
             <a:off x="640080" y="1188720"/>
-            <a:ext cx="10972800" cy="1097280"/>
+            <a:ext cx="10972800" cy="914400"/>
           </a:xfrm>
           <a:prstGeom prst="rect">
             <a:avLst/>
@@ -10680,27 +8775,115 @@
               </a:lnSpc>
             </a:pPr>
             <a:r>
-              <a:rPr sz="3400" b="1">
+              <a:rPr sz="3200" b="1">
                 <a:solidFill>
                   <a:srgbClr val="F5F7FA"/>
                 </a:solidFill>
                 <a:latin typeface="Arial"/>
               </a:rPr>
-              <a:t>Discovery on a real system (YAI)</a:t>
-            </a:r>
-          </a:p>
-        </p:txBody>
-      </p:sp>
-      <p:sp>
-        <p:nvSpPr>
-          <p:cNvPr id="5" name="TextBox 4"/>
+              <a:t>Understanding &amp; affect</a:t>
+            </a:r>
+          </a:p>
+        </p:txBody>
+      </p:sp>
+      <p:sp>
+        <p:nvSpPr>
+          <p:cNvPr id="5" name="Rounded Rectangle 4"/>
+          <p:cNvSpPr/>
+          <p:nvPr/>
+        </p:nvSpPr>
+        <p:spPr>
+          <a:xfrm>
+            <a:off x="640080" y="2468880"/>
+            <a:ext cx="3393338" cy="3383280"/>
+          </a:xfrm>
+          <a:prstGeom prst="roundRect">
+            <a:avLst/>
+          </a:prstGeom>
+          <a:solidFill>
+            <a:srgbClr val="151B26"/>
+          </a:solidFill>
+          <a:ln>
+            <a:noFill/>
+          </a:ln>
+          <a:effectLst/>
+        </p:spPr>
+        <p:style>
+          <a:lnRef idx="1">
+            <a:schemeClr val="accent1"/>
+          </a:lnRef>
+          <a:fillRef idx="3">
+            <a:schemeClr val="accent1"/>
+          </a:fillRef>
+          <a:effectRef idx="2">
+            <a:schemeClr val="accent1"/>
+          </a:effectRef>
+          <a:fontRef idx="minor">
+            <a:schemeClr val="lt1"/>
+          </a:fontRef>
+        </p:style>
+        <p:txBody>
+          <a:bodyPr rtlCol="0" anchor="ctr"/>
+          <a:lstStyle/>
+          <a:p>
+            <a:pPr algn="ctr"/>
+          </a:p>
+        </p:txBody>
+      </p:sp>
+      <p:sp>
+        <p:nvSpPr>
+          <p:cNvPr id="6" name="Rectangle 5"/>
+          <p:cNvSpPr/>
+          <p:nvPr/>
+        </p:nvSpPr>
+        <p:spPr>
+          <a:xfrm>
+            <a:off x="640080" y="2468880"/>
+            <a:ext cx="3393338" cy="82296"/>
+          </a:xfrm>
+          <a:prstGeom prst="rect">
+            <a:avLst/>
+          </a:prstGeom>
+          <a:solidFill>
+            <a:srgbClr val="00FF41"/>
+          </a:solidFill>
+          <a:ln>
+            <a:noFill/>
+          </a:ln>
+          <a:effectLst/>
+        </p:spPr>
+        <p:style>
+          <a:lnRef idx="1">
+            <a:schemeClr val="accent1"/>
+          </a:lnRef>
+          <a:fillRef idx="3">
+            <a:schemeClr val="accent1"/>
+          </a:fillRef>
+          <a:effectRef idx="2">
+            <a:schemeClr val="accent1"/>
+          </a:effectRef>
+          <a:fontRef idx="minor">
+            <a:schemeClr val="lt1"/>
+          </a:fontRef>
+        </p:style>
+        <p:txBody>
+          <a:bodyPr rtlCol="0" anchor="ctr"/>
+          <a:lstStyle/>
+          <a:p>
+            <a:pPr algn="ctr"/>
+          </a:p>
+        </p:txBody>
+      </p:sp>
+      <p:sp>
+        <p:nvSpPr>
+          <p:cNvPr id="7" name="TextBox 6"/>
           <p:cNvSpPr txBox="1"/>
           <p:nvPr/>
         </p:nvSpPr>
         <p:spPr>
           <a:xfrm>
-            <a:off x="658368" y="2286000"/>
-            <a:ext cx="10881360" cy="3657600"/>
+            <a:off x="914400" y="2788920"/>
+            <a:ext cx="2844698" cy="457200"/>
           </a:xfrm>
           <a:prstGeom prst="rect">
             <a:avLst/>
@@ -10715,92 +8898,512 @@
           <a:p>
             <a:pPr algn="l">
               <a:lnSpc>
-                <a:spcPct val="112000"/>
-              </a:lnSpc>
-            </a:pPr>
-            <a:r>
-              <a:rPr sz="2200" b="0">
+                <a:spcPct val="100000"/>
+              </a:lnSpc>
+            </a:pPr>
+            <a:r>
+              <a:rPr sz="1200" b="1">
+                <a:solidFill>
+                  <a:srgbClr val="00FF41"/>
+                </a:solidFill>
+                <a:latin typeface="Courier New"/>
+              </a:rPr>
+              <a:t>UNDERSTANDING</a:t>
+            </a:r>
+          </a:p>
+        </p:txBody>
+      </p:sp>
+      <p:sp>
+        <p:nvSpPr>
+          <p:cNvPr id="8" name="TextBox 7"/>
+          <p:cNvSpPr txBox="1"/>
+          <p:nvPr/>
+        </p:nvSpPr>
+        <p:spPr>
+          <a:xfrm>
+            <a:off x="914400" y="3246120"/>
+            <a:ext cx="2844698" cy="822960"/>
+          </a:xfrm>
+          <a:prstGeom prst="rect">
+            <a:avLst/>
+          </a:prstGeom>
+          <a:noFill/>
+        </p:spPr>
+        <p:txBody>
+          <a:bodyPr wrap="square" anchor="t">
+            <a:spAutoFit/>
+          </a:bodyPr>
+          <a:lstStyle/>
+          <a:p>
+            <a:pPr algn="l">
+              <a:lnSpc>
+                <a:spcPct val="100000"/>
+              </a:lnSpc>
+            </a:pPr>
+            <a:r>
+              <a:rPr sz="2000" b="1">
                 <a:solidFill>
                   <a:srgbClr val="F5F7FA"/>
                 </a:solidFill>
                 <a:latin typeface="Arial"/>
               </a:rPr>
-              <a:t>A computer-vision tool that watches for seizures for people with disabilities.</a:t>
-            </a:r>
-          </a:p>
-          <a:p>
-            <a:pPr algn="l">
-              <a:lnSpc>
-                <a:spcPct val="112000"/>
-              </a:lnSpc>
-            </a:pPr>
-            <a:r>
-              <a:rPr sz="2000" b="0">
+              <a:t>Test comprehension</a:t>
+            </a:r>
+          </a:p>
+        </p:txBody>
+      </p:sp>
+      <p:sp>
+        <p:nvSpPr>
+          <p:cNvPr id="9" name="TextBox 8"/>
+          <p:cNvSpPr txBox="1"/>
+          <p:nvPr/>
+        </p:nvSpPr>
+        <p:spPr>
+          <a:xfrm>
+            <a:off x="914400" y="4114800"/>
+            <a:ext cx="2844698" cy="1554480"/>
+          </a:xfrm>
+          <a:prstGeom prst="rect">
+            <a:avLst/>
+          </a:prstGeom>
+          <a:noFill/>
+        </p:spPr>
+        <p:txBody>
+          <a:bodyPr wrap="square" anchor="t">
+            <a:spAutoFit/>
+          </a:bodyPr>
+          <a:lstStyle/>
+          <a:p>
+            <a:pPr algn="l">
+              <a:lnSpc>
+                <a:spcPct val="110000"/>
+              </a:lnSpc>
+            </a:pPr>
+            <a:r>
+              <a:rPr sz="1500" b="0">
+                <a:solidFill>
+                  <a:srgbClr val="8A94A6"/>
+                </a:solidFill>
+                <a:latin typeface="Arial"/>
+              </a:rPr>
+              <a:t>Survey, interview, think-aloud, scenario question, knowledge-transfer task. Do they understand the value better after using it?</a:t>
+            </a:r>
+          </a:p>
+        </p:txBody>
+      </p:sp>
+      <p:sp>
+        <p:nvSpPr>
+          <p:cNvPr id="10" name="Rounded Rectangle 9"/>
+          <p:cNvSpPr/>
+          <p:nvPr/>
+        </p:nvSpPr>
+        <p:spPr>
+          <a:xfrm>
+            <a:off x="4399178" y="2468880"/>
+            <a:ext cx="3393338" cy="3383280"/>
+          </a:xfrm>
+          <a:prstGeom prst="roundRect">
+            <a:avLst/>
+          </a:prstGeom>
+          <a:solidFill>
+            <a:srgbClr val="151B26"/>
+          </a:solidFill>
+          <a:ln>
+            <a:noFill/>
+          </a:ln>
+          <a:effectLst/>
+        </p:spPr>
+        <p:style>
+          <a:lnRef idx="1">
+            <a:schemeClr val="accent1"/>
+          </a:lnRef>
+          <a:fillRef idx="3">
+            <a:schemeClr val="accent1"/>
+          </a:fillRef>
+          <a:effectRef idx="2">
+            <a:schemeClr val="accent1"/>
+          </a:effectRef>
+          <a:fontRef idx="minor">
+            <a:schemeClr val="lt1"/>
+          </a:fontRef>
+        </p:style>
+        <p:txBody>
+          <a:bodyPr rtlCol="0" anchor="ctr"/>
+          <a:lstStyle/>
+          <a:p>
+            <a:pPr algn="ctr"/>
+          </a:p>
+        </p:txBody>
+      </p:sp>
+      <p:sp>
+        <p:nvSpPr>
+          <p:cNvPr id="11" name="Rectangle 10"/>
+          <p:cNvSpPr/>
+          <p:nvPr/>
+        </p:nvSpPr>
+        <p:spPr>
+          <a:xfrm>
+            <a:off x="4399178" y="2468880"/>
+            <a:ext cx="3393338" cy="82296"/>
+          </a:xfrm>
+          <a:prstGeom prst="rect">
+            <a:avLst/>
+          </a:prstGeom>
+          <a:solidFill>
+            <a:srgbClr val="00FF41"/>
+          </a:solidFill>
+          <a:ln>
+            <a:noFill/>
+          </a:ln>
+          <a:effectLst/>
+        </p:spPr>
+        <p:style>
+          <a:lnRef idx="1">
+            <a:schemeClr val="accent1"/>
+          </a:lnRef>
+          <a:fillRef idx="3">
+            <a:schemeClr val="accent1"/>
+          </a:fillRef>
+          <a:effectRef idx="2">
+            <a:schemeClr val="accent1"/>
+          </a:effectRef>
+          <a:fontRef idx="minor">
+            <a:schemeClr val="lt1"/>
+          </a:fontRef>
+        </p:style>
+        <p:txBody>
+          <a:bodyPr rtlCol="0" anchor="ctr"/>
+          <a:lstStyle/>
+          <a:p>
+            <a:pPr algn="ctr"/>
+          </a:p>
+        </p:txBody>
+      </p:sp>
+      <p:sp>
+        <p:nvSpPr>
+          <p:cNvPr id="12" name="TextBox 11"/>
+          <p:cNvSpPr txBox="1"/>
+          <p:nvPr/>
+        </p:nvSpPr>
+        <p:spPr>
+          <a:xfrm>
+            <a:off x="4673498" y="2788920"/>
+            <a:ext cx="2844698" cy="457200"/>
+          </a:xfrm>
+          <a:prstGeom prst="rect">
+            <a:avLst/>
+          </a:prstGeom>
+          <a:noFill/>
+        </p:spPr>
+        <p:txBody>
+          <a:bodyPr wrap="square" anchor="t">
+            <a:spAutoFit/>
+          </a:bodyPr>
+          <a:lstStyle/>
+          <a:p>
+            <a:pPr algn="l">
+              <a:lnSpc>
+                <a:spcPct val="100000"/>
+              </a:lnSpc>
+            </a:pPr>
+            <a:r>
+              <a:rPr sz="1200" b="1">
+                <a:solidFill>
+                  <a:srgbClr val="00FF41"/>
+                </a:solidFill>
+                <a:latin typeface="Courier New"/>
+              </a:rPr>
+              <a:t>AFFECT</a:t>
+            </a:r>
+          </a:p>
+        </p:txBody>
+      </p:sp>
+      <p:sp>
+        <p:nvSpPr>
+          <p:cNvPr id="13" name="TextBox 12"/>
+          <p:cNvSpPr txBox="1"/>
+          <p:nvPr/>
+        </p:nvSpPr>
+        <p:spPr>
+          <a:xfrm>
+            <a:off x="4673498" y="3246120"/>
+            <a:ext cx="2844698" cy="822960"/>
+          </a:xfrm>
+          <a:prstGeom prst="rect">
+            <a:avLst/>
+          </a:prstGeom>
+          <a:noFill/>
+        </p:spPr>
+        <p:txBody>
+          <a:bodyPr wrap="square" anchor="t">
+            <a:spAutoFit/>
+          </a:bodyPr>
+          <a:lstStyle/>
+          <a:p>
+            <a:pPr algn="l">
+              <a:lnSpc>
+                <a:spcPct val="100000"/>
+              </a:lnSpc>
+            </a:pPr>
+            <a:r>
+              <a:rPr sz="2000" b="1">
                 <a:solidFill>
                   <a:srgbClr val="F5F7FA"/>
                 </a:solidFill>
                 <a:latin typeface="Arial"/>
               </a:rPr>
-              <a:t/>
-            </a:r>
-          </a:p>
-          <a:p>
-            <a:pPr algn="l">
-              <a:lnSpc>
-                <a:spcPct val="112000"/>
-              </a:lnSpc>
-            </a:pPr>
-            <a:r>
-              <a:rPr sz="2000" b="0">
+              <a:t>Test feeling</a:t>
+            </a:r>
+          </a:p>
+        </p:txBody>
+      </p:sp>
+      <p:sp>
+        <p:nvSpPr>
+          <p:cNvPr id="14" name="TextBox 13"/>
+          <p:cNvSpPr txBox="1"/>
+          <p:nvPr/>
+        </p:nvSpPr>
+        <p:spPr>
+          <a:xfrm>
+            <a:off x="4673498" y="4114800"/>
+            <a:ext cx="2844698" cy="1554480"/>
+          </a:xfrm>
+          <a:prstGeom prst="rect">
+            <a:avLst/>
+          </a:prstGeom>
+          <a:noFill/>
+        </p:spPr>
+        <p:txBody>
+          <a:bodyPr wrap="square" anchor="t">
+            <a:spAutoFit/>
+          </a:bodyPr>
+          <a:lstStyle/>
+          <a:p>
+            <a:pPr algn="l">
+              <a:lnSpc>
+                <a:spcPct val="110000"/>
+              </a:lnSpc>
+            </a:pPr>
+            <a:r>
+              <a:rPr sz="1500" b="0">
+                <a:solidFill>
+                  <a:srgbClr val="8A94A6"/>
+                </a:solidFill>
+                <a:latin typeface="Arial"/>
+              </a:rPr>
+              <a:t>Interview, attitude survey (pre/post), diary, empathy map, choice under pressure. Did attitudes actually move?</a:t>
+            </a:r>
+          </a:p>
+        </p:txBody>
+      </p:sp>
+      <p:sp>
+        <p:nvSpPr>
+          <p:cNvPr id="15" name="Rounded Rectangle 14"/>
+          <p:cNvSpPr/>
+          <p:nvPr/>
+        </p:nvSpPr>
+        <p:spPr>
+          <a:xfrm>
+            <a:off x="8158276" y="2468880"/>
+            <a:ext cx="3393338" cy="3383280"/>
+          </a:xfrm>
+          <a:prstGeom prst="roundRect">
+            <a:avLst/>
+          </a:prstGeom>
+          <a:solidFill>
+            <a:srgbClr val="151B26"/>
+          </a:solidFill>
+          <a:ln>
+            <a:noFill/>
+          </a:ln>
+          <a:effectLst/>
+        </p:spPr>
+        <p:style>
+          <a:lnRef idx="1">
+            <a:schemeClr val="accent1"/>
+          </a:lnRef>
+          <a:fillRef idx="3">
+            <a:schemeClr val="accent1"/>
+          </a:fillRef>
+          <a:effectRef idx="2">
+            <a:schemeClr val="accent1"/>
+          </a:effectRef>
+          <a:fontRef idx="minor">
+            <a:schemeClr val="lt1"/>
+          </a:fontRef>
+        </p:style>
+        <p:txBody>
+          <a:bodyPr rtlCol="0" anchor="ctr"/>
+          <a:lstStyle/>
+          <a:p>
+            <a:pPr algn="ctr"/>
+          </a:p>
+        </p:txBody>
+      </p:sp>
+      <p:sp>
+        <p:nvSpPr>
+          <p:cNvPr id="16" name="Rectangle 15"/>
+          <p:cNvSpPr/>
+          <p:nvPr/>
+        </p:nvSpPr>
+        <p:spPr>
+          <a:xfrm>
+            <a:off x="8158276" y="2468880"/>
+            <a:ext cx="3393338" cy="82296"/>
+          </a:xfrm>
+          <a:prstGeom prst="rect">
+            <a:avLst/>
+          </a:prstGeom>
+          <a:solidFill>
+            <a:srgbClr val="00FF41"/>
+          </a:solidFill>
+          <a:ln>
+            <a:noFill/>
+          </a:ln>
+          <a:effectLst/>
+        </p:spPr>
+        <p:style>
+          <a:lnRef idx="1">
+            <a:schemeClr val="accent1"/>
+          </a:lnRef>
+          <a:fillRef idx="3">
+            <a:schemeClr val="accent1"/>
+          </a:fillRef>
+          <a:effectRef idx="2">
+            <a:schemeClr val="accent1"/>
+          </a:effectRef>
+          <a:fontRef idx="minor">
+            <a:schemeClr val="lt1"/>
+          </a:fontRef>
+        </p:style>
+        <p:txBody>
+          <a:bodyPr rtlCol="0" anchor="ctr"/>
+          <a:lstStyle/>
+          <a:p>
+            <a:pPr algn="ctr"/>
+          </a:p>
+        </p:txBody>
+      </p:sp>
+      <p:sp>
+        <p:nvSpPr>
+          <p:cNvPr id="17" name="TextBox 16"/>
+          <p:cNvSpPr txBox="1"/>
+          <p:nvPr/>
+        </p:nvSpPr>
+        <p:spPr>
+          <a:xfrm>
+            <a:off x="8432596" y="2788920"/>
+            <a:ext cx="2844698" cy="457200"/>
+          </a:xfrm>
+          <a:prstGeom prst="rect">
+            <a:avLst/>
+          </a:prstGeom>
+          <a:noFill/>
+        </p:spPr>
+        <p:txBody>
+          <a:bodyPr wrap="square" anchor="t">
+            <a:spAutoFit/>
+          </a:bodyPr>
+          <a:lstStyle/>
+          <a:p>
+            <a:pPr algn="l">
+              <a:lnSpc>
+                <a:spcPct val="100000"/>
+              </a:lnSpc>
+            </a:pPr>
+            <a:r>
+              <a:rPr sz="1200" b="1">
+                <a:solidFill>
+                  <a:srgbClr val="00FF41"/>
+                </a:solidFill>
+                <a:latin typeface="Courier New"/>
+              </a:rPr>
+              <a:t>EVIDENCE</a:t>
+            </a:r>
+          </a:p>
+        </p:txBody>
+      </p:sp>
+      <p:sp>
+        <p:nvSpPr>
+          <p:cNvPr id="18" name="TextBox 17"/>
+          <p:cNvSpPr txBox="1"/>
+          <p:nvPr/>
+        </p:nvSpPr>
+        <p:spPr>
+          <a:xfrm>
+            <a:off x="8432596" y="3246120"/>
+            <a:ext cx="2844698" cy="822960"/>
+          </a:xfrm>
+          <a:prstGeom prst="rect">
+            <a:avLst/>
+          </a:prstGeom>
+          <a:noFill/>
+        </p:spPr>
+        <p:txBody>
+          <a:bodyPr wrap="square" anchor="t">
+            <a:spAutoFit/>
+          </a:bodyPr>
+          <a:lstStyle/>
+          <a:p>
+            <a:pPr algn="l">
+              <a:lnSpc>
+                <a:spcPct val="100000"/>
+              </a:lnSpc>
+            </a:pPr>
+            <a:r>
+              <a:rPr sz="2000" b="1">
                 <a:solidFill>
                   <a:srgbClr val="F5F7FA"/>
                 </a:solidFill>
                 <a:latin typeface="Arial"/>
               </a:rPr>
-              <a:t>Values in tension: </a:t>
-            </a:r>
-            <a:r>
-              <a:rPr sz="2000" b="1">
-                <a:solidFill>
-                  <a:srgbClr val="00FF41"/>
-                </a:solidFill>
-                <a:latin typeface="Arial"/>
-              </a:rPr>
-              <a:t>safety</a:t>
-            </a:r>
-            <a:r>
-              <a:rPr sz="2000" b="0">
-                <a:solidFill>
-                  <a:srgbClr val="F5F7FA"/>
-                </a:solidFill>
-                <a:latin typeface="Arial"/>
-              </a:rPr>
-              <a:t> (catch the seizure) vs. </a:t>
-            </a:r>
-            <a:r>
-              <a:rPr sz="2000" b="1">
-                <a:solidFill>
-                  <a:srgbClr val="00FF41"/>
-                </a:solidFill>
-                <a:latin typeface="Arial"/>
-              </a:rPr>
-              <a:t>privacy &amp; dignity</a:t>
-            </a:r>
-            <a:r>
-              <a:rPr sz="2000" b="0">
-                <a:solidFill>
-                  <a:srgbClr val="F5F7FA"/>
-                </a:solidFill>
-                <a:latin typeface="Arial"/>
-              </a:rPr>
-              <a:t> (a camera always watching a person in their home).</a:t>
-            </a:r>
-          </a:p>
-        </p:txBody>
-      </p:sp>
-      <p:sp>
-        <p:nvSpPr>
-          <p:cNvPr id="6" name="TextBox 5"/>
+              <a:t>Not opinion</a:t>
+            </a:r>
+          </a:p>
+        </p:txBody>
+      </p:sp>
+      <p:sp>
+        <p:nvSpPr>
+          <p:cNvPr id="19" name="TextBox 18"/>
+          <p:cNvSpPr txBox="1"/>
+          <p:nvPr/>
+        </p:nvSpPr>
+        <p:spPr>
+          <a:xfrm>
+            <a:off x="8432596" y="4114800"/>
+            <a:ext cx="2844698" cy="1554480"/>
+          </a:xfrm>
+          <a:prstGeom prst="rect">
+            <a:avLst/>
+          </a:prstGeom>
+          <a:noFill/>
+        </p:spPr>
+        <p:txBody>
+          <a:bodyPr wrap="square" anchor="t">
+            <a:spAutoFit/>
+          </a:bodyPr>
+          <a:lstStyle/>
+          <a:p>
+            <a:pPr algn="l">
+              <a:lnSpc>
+                <a:spcPct val="110000"/>
+              </a:lnSpc>
+            </a:pPr>
+            <a:r>
+              <a:rPr sz="1500" b="0">
+                <a:solidFill>
+                  <a:srgbClr val="8A94A6"/>
+                </a:solidFill>
+                <a:latin typeface="Arial"/>
+              </a:rPr>
+              <a:t>Record what they DID or what you measured - not "they said they liked it." A hopeful yes is not evidence.</a:t>
+            </a:r>
+          </a:p>
+        </p:txBody>
+      </p:sp>
+      <p:sp>
+        <p:nvSpPr>
+          <p:cNvPr id="20" name="TextBox 19"/>
           <p:cNvSpPr txBox="1"/>
           <p:nvPr/>
         </p:nvSpPr>
@@ -10897,7 +9500,7 @@
                 </a:solidFill>
                 <a:latin typeface="Courier New"/>
               </a:rPr>
-              <a:t>IMPLEMENTATION</a:t>
+              <a:t>STEP 3 - USE A VALIDATED INSTRUMENT</a:t>
             </a:r>
           </a:p>
         </p:txBody>
@@ -10980,7 +9583,7 @@
                 </a:solidFill>
                 <a:latin typeface="Arial"/>
               </a:rPr>
-              <a:t>Translate values into the build</a:t>
+              <a:t>Don't invent the questions</a:t>
             </a:r>
           </a:p>
         </p:txBody>
@@ -11013,22 +9616,122 @@
               </a:lnSpc>
             </a:pPr>
             <a:r>
-              <a:rPr sz="2200" b="0">
+              <a:rPr sz="2000" b="1">
+                <a:solidFill>
+                  <a:srgbClr val="00FF41"/>
+                </a:solidFill>
+                <a:latin typeface="Arial"/>
+              </a:rPr>
+              <a:t>•  </a:t>
+            </a:r>
+            <a:r>
+              <a:rPr sz="2000" b="0">
                 <a:solidFill>
                   <a:srgbClr val="F5F7FA"/>
                 </a:solidFill>
                 <a:latin typeface="Arial"/>
               </a:rPr>
-              <a:t>Discovery names the values. Implementation puts them into features, architecture, and lines of code — and forces the hard part: </a:t>
-            </a:r>
-            <a:r>
-              <a:rPr sz="2200" b="1">
+              <a:t>UEQ - measures UX beyond usability: attractiveness, novelty, stimulation. For delight / trust / craft.</a:t>
+            </a:r>
+          </a:p>
+          <a:p>
+            <a:pPr algn="l">
+              <a:lnSpc>
+                <a:spcPct val="112000"/>
+              </a:lnSpc>
+            </a:pPr>
+            <a:r>
+              <a:rPr sz="2000" b="1">
                 <a:solidFill>
                   <a:srgbClr val="00FF41"/>
                 </a:solidFill>
                 <a:latin typeface="Arial"/>
               </a:rPr>
-              <a:t>what happens when two values collide?</a:t>
+              <a:t>•  </a:t>
+            </a:r>
+            <a:r>
+              <a:rPr sz="2000" b="0">
+                <a:solidFill>
+                  <a:srgbClr val="F5F7FA"/>
+                </a:solidFill>
+                <a:latin typeface="Arial"/>
+              </a:rPr>
+              <a:t>HRI Scale Database (George Mason) - browse validated scales (trust, warmth, competence, safety), rated for quality.</a:t>
+            </a:r>
+          </a:p>
+          <a:p>
+            <a:pPr algn="l">
+              <a:lnSpc>
+                <a:spcPct val="112000"/>
+              </a:lnSpc>
+            </a:pPr>
+            <a:r>
+              <a:rPr sz="2000" b="1">
+                <a:solidFill>
+                  <a:srgbClr val="00FF41"/>
+                </a:solidFill>
+                <a:latin typeface="Arial"/>
+              </a:rPr>
+              <a:t>•  </a:t>
+            </a:r>
+            <a:r>
+              <a:rPr sz="2000" b="0">
+                <a:solidFill>
+                  <a:srgbClr val="F5F7FA"/>
+                </a:solidFill>
+                <a:latin typeface="Arial"/>
+              </a:rPr>
+              <a:t>METUX / Self-Determination scales - autonomy, competence, relatedness. For wellbeing &amp; empowerment values.</a:t>
+            </a:r>
+          </a:p>
+          <a:p>
+            <a:pPr algn="l">
+              <a:lnSpc>
+                <a:spcPct val="112000"/>
+              </a:lnSpc>
+            </a:pPr>
+            <a:r>
+              <a:rPr sz="2000" b="1">
+                <a:solidFill>
+                  <a:srgbClr val="00FF41"/>
+                </a:solidFill>
+                <a:latin typeface="Arial"/>
+              </a:rPr>
+              <a:t>•  </a:t>
+            </a:r>
+            <a:r>
+              <a:rPr sz="2000" b="0">
+                <a:solidFill>
+                  <a:srgbClr val="F5F7FA"/>
+                </a:solidFill>
+                <a:latin typeface="Arial"/>
+              </a:rPr>
+              <a:t>Vibed Slop Detector (impeccable.style rules) - generic AI "slop" is evidence craft &amp; originality didn't get in.</a:t>
+            </a:r>
+          </a:p>
+          <a:p>
+            <a:pPr algn="l">
+              <a:lnSpc>
+                <a:spcPct val="112000"/>
+              </a:lnSpc>
+            </a:pPr>
+            <a:r>
+              <a:rPr sz="2000" b="1">
+                <a:solidFill>
+                  <a:srgbClr val="00FF41"/>
+                </a:solidFill>
+                <a:latin typeface="Arial"/>
+              </a:rPr>
+              <a:t>•  </a:t>
+            </a:r>
+            <a:r>
+              <a:rPr sz="2000" b="0">
+                <a:solidFill>
+                  <a:srgbClr val="F5F7FA"/>
+                </a:solidFill>
+                <a:latin typeface="Arial"/>
+              </a:rPr>
+              <a:t>Match the instrument to the value - run the RIGHT one, not all of them.</a:t>
             </a:r>
           </a:p>
         </p:txBody>

--- a/slides/Week3-Tue-User-Testing-II.pptx
+++ b/slides/Week3-Tue-User-Testing-II.pptx
@@ -10,15 +10,17 @@
     <p:sldId id="258" r:id="rId9"/>
     <p:sldId id="259" r:id="rId10"/>
     <p:sldId id="260" r:id="rId11"/>
-    <p:sldId id="261" r:id="rId12"/>
-    <p:sldId id="262" r:id="rId13"/>
-    <p:sldId id="263" r:id="rId14"/>
-    <p:sldId id="264" r:id="rId15"/>
-    <p:sldId id="265" r:id="rId16"/>
-    <p:sldId id="266" r:id="rId17"/>
-    <p:sldId id="267" r:id="rId18"/>
-    <p:sldId id="268" r:id="rId19"/>
+    <p:sldId id="261" r:id="rId13"/>
+    <p:sldId id="262" r:id="rId14"/>
+    <p:sldId id="263" r:id="rId15"/>
+    <p:sldId id="264" r:id="rId16"/>
+    <p:sldId id="265" r:id="rId17"/>
+    <p:sldId id="266" r:id="rId18"/>
+    <p:sldId id="267" r:id="rId19"/>
+    <p:sldId id="268" r:id="rId20"/>
     <p:sldId id="269" r:id="rId21"/>
+    <p:sldId id="270" r:id="rId22"/>
+    <p:sldId id="271" r:id="rId23"/>
   </p:sldIdLst>
   <p:sldSz cx="12191695" cy="6858000" type="screen4x3"/>
   <p:notesSz cx="6858000" cy="9144000"/>
@@ -515,7 +517,147 @@
           <a:lstStyle/>
           <a:p>
             <a:r>
-              <a:t>Individual, on the shared Project 2 prototype. No coding required. Accessibility guest lecture today; Wed/Thu are the final project.</a:t>
+              <a:t>The key teaching beat. Same word, three readings, three completely different studies. Ask the room which reading their Project 2 designed for.</a:t>
+            </a:r>
+          </a:p>
+        </p:txBody>
+      </p:sp>
+      <p:sp>
+        <p:nvSpPr>
+          <p:cNvPr id="4" name="Slide Number Placeholder 3"/>
+          <p:cNvSpPr>
+            <a:spLocks noGrp="1"/>
+          </p:cNvSpPr>
+          <p:nvPr>
+            <p:ph type="sldNum" idx="5" sz="quarter"/>
+          </p:nvPr>
+        </p:nvSpPr>
+        <p:spPr/>
+      </p:sp>
+    </p:spTree>
+  </p:cSld>
+  <p:clrMapOvr>
+    <a:masterClrMapping/>
+  </p:clrMapOvr>
+</p:notes>
+</file>
+
+<file path=ppt/notesSlides/notesSlide2.xml><?xml version="1.0" encoding="utf-8"?>
+<p:notes xmlns:a="http://schemas.openxmlformats.org/drawingml/2006/main" xmlns:p="http://schemas.openxmlformats.org/presentationml/2006/main" xmlns:r="http://schemas.openxmlformats.org/officeDocument/2006/relationships">
+  <p:cSld>
+    <p:spTree>
+      <p:nvGrpSpPr>
+        <p:cNvPr id="1" name=""/>
+        <p:cNvGrpSpPr/>
+        <p:nvPr/>
+      </p:nvGrpSpPr>
+      <p:grpSpPr>
+        <a:xfrm>
+          <a:off x="0" y="0"/>
+          <a:ext cx="0" cy="0"/>
+          <a:chOff x="0" y="0"/>
+          <a:chExt cx="0" cy="0"/>
+        </a:xfrm>
+      </p:grpSpPr>
+      <p:sp>
+        <p:nvSpPr>
+          <p:cNvPr id="2" name="Slide Image Placeholder 1"/>
+          <p:cNvSpPr>
+            <a:spLocks noGrp="1"/>
+          </p:cNvSpPr>
+          <p:nvPr>
+            <p:ph type="sldImg" idx="2"/>
+          </p:nvPr>
+        </p:nvSpPr>
+        <p:spPr/>
+      </p:sp>
+      <p:sp>
+        <p:nvSpPr>
+          <p:cNvPr id="3" name="Notes Placeholder 2"/>
+          <p:cNvSpPr>
+            <a:spLocks noGrp="1"/>
+          </p:cNvSpPr>
+          <p:nvPr>
+            <p:ph type="body" idx="3" sz="quarter"/>
+          </p:nvPr>
+        </p:nvSpPr>
+        <p:spPr/>
+        <p:txBody>
+          <a:bodyPr/>
+          <a:lstStyle/>
+          <a:p>
+            <a:r>
+              <a:t>This is the step that stops students inventing a metric that measures nothing. Never invent a citation - real sources only.</a:t>
+            </a:r>
+          </a:p>
+        </p:txBody>
+      </p:sp>
+      <p:sp>
+        <p:nvSpPr>
+          <p:cNvPr id="4" name="Slide Number Placeholder 3"/>
+          <p:cNvSpPr>
+            <a:spLocks noGrp="1"/>
+          </p:cNvSpPr>
+          <p:nvPr>
+            <p:ph type="sldNum" idx="5" sz="quarter"/>
+          </p:nvPr>
+        </p:nvSpPr>
+        <p:spPr/>
+      </p:sp>
+    </p:spTree>
+  </p:cSld>
+  <p:clrMapOvr>
+    <a:masterClrMapping/>
+  </p:clrMapOvr>
+</p:notes>
+</file>
+
+<file path=ppt/notesSlides/notesSlide3.xml><?xml version="1.0" encoding="utf-8"?>
+<p:notes xmlns:a="http://schemas.openxmlformats.org/drawingml/2006/main" xmlns:p="http://schemas.openxmlformats.org/presentationml/2006/main" xmlns:r="http://schemas.openxmlformats.org/officeDocument/2006/relationships">
+  <p:cSld>
+    <p:spTree>
+      <p:nvGrpSpPr>
+        <p:cNvPr id="1" name=""/>
+        <p:cNvGrpSpPr/>
+        <p:nvPr/>
+      </p:nvGrpSpPr>
+      <p:grpSpPr>
+        <a:xfrm>
+          <a:off x="0" y="0"/>
+          <a:ext cx="0" cy="0"/>
+          <a:chOff x="0" y="0"/>
+          <a:chExt cx="0" cy="0"/>
+        </a:xfrm>
+      </p:grpSpPr>
+      <p:sp>
+        <p:nvSpPr>
+          <p:cNvPr id="2" name="Slide Image Placeholder 1"/>
+          <p:cNvSpPr>
+            <a:spLocks noGrp="1"/>
+          </p:cNvSpPr>
+          <p:nvPr>
+            <p:ph type="sldImg" idx="2"/>
+          </p:nvPr>
+        </p:nvSpPr>
+        <p:spPr/>
+      </p:sp>
+      <p:sp>
+        <p:nvSpPr>
+          <p:cNvPr id="3" name="Notes Placeholder 2"/>
+          <p:cNvSpPr>
+            <a:spLocks noGrp="1"/>
+          </p:cNvSpPr>
+          <p:nvPr>
+            <p:ph type="body" idx="3" sz="quarter"/>
+          </p:nvPr>
+        </p:nvSpPr>
+        <p:spPr/>
+        <p:txBody>
+          <a:bodyPr/>
+          <a:lstStyle/>
+          <a:p>
+            <a:r>
+              <a:t>Team activity on the shared Project 2. One FigJam board per team; each student writes their own vibe-report reflection. Output feeds Wednesday's final-project planning.</a:t>
             </a:r>
           </a:p>
         </p:txBody>
@@ -3646,7 +3788,7 @@
                 </a:solidFill>
                 <a:latin typeface="Arial"/>
               </a:rPr>
-              <a:t>Value Verification: Does It Do the Right Thing?</a:t>
+              <a:t>Value Verification: Does the Design Actually Change Anything?</a:t>
             </a:r>
           </a:p>
         </p:txBody>
@@ -3685,7 +3827,7 @@
                 </a:solidFill>
                 <a:latin typeface="Arial"/>
               </a:rPr>
-              <a:t>Values at Play - verifying the value you claimed</a:t>
+              <a:t>Monday closed a cycle. Today opens the next one.</a:t>
             </a:r>
           </a:p>
         </p:txBody>
@@ -3750,7 +3892,7 @@
                 </a:solidFill>
                 <a:latin typeface="Courier New"/>
               </a:rPr>
-              <a:t>WHY MEASURE BEYOND USABILITY</a:t>
+              <a:t>STEP 3 - USE A VALIDATED INSTRUMENT</a:t>
             </a:r>
           </a:p>
         </p:txBody>
@@ -3833,7 +3975,7 @@
                 </a:solidFill>
                 <a:latin typeface="Arial"/>
               </a:rPr>
-              <a:t>"Usable but conventional"</a:t>
+              <a:t>Don't invent the questions</a:t>
             </a:r>
           </a:p>
         </p:txBody>
@@ -3866,13 +4008,22 @@
               </a:lnSpc>
             </a:pPr>
             <a:r>
+              <a:rPr sz="2000" b="1">
+                <a:solidFill>
+                  <a:srgbClr val="00FF41"/>
+                </a:solidFill>
+                <a:latin typeface="Arial"/>
+              </a:rPr>
+              <a:t>•  </a:t>
+            </a:r>
+            <a:r>
               <a:rPr sz="2000" b="0">
                 <a:solidFill>
                   <a:srgbClr val="F5F7FA"/>
                 </a:solidFill>
                 <a:latin typeface="Arial"/>
               </a:rPr>
-              <a:t>A 2026 study (Romero et al.) compared AI-generated and human interface prototypes with the UEQ:</a:t>
+              <a:t>UEQ - UX beyond usability: attractiveness, novelty, stimulation. For delight / trust / craft.</a:t>
             </a:r>
           </a:p>
           <a:p>
@@ -3882,13 +4033,22 @@
               </a:lnSpc>
             </a:pPr>
             <a:r>
+              <a:rPr sz="2000" b="1">
+                <a:solidFill>
+                  <a:srgbClr val="00FF41"/>
+                </a:solidFill>
+                <a:latin typeface="Arial"/>
+              </a:rPr>
+              <a:t>•  </a:t>
+            </a:r>
+            <a:r>
               <a:rPr sz="2000" b="0">
                 <a:solidFill>
                   <a:srgbClr val="F5F7FA"/>
                 </a:solidFill>
                 <a:latin typeface="Arial"/>
               </a:rPr>
-              <a:t/>
+              <a:t>HRI Scale Database (George Mason) - validated scales (trust, warmth, competence), rated for quality.</a:t>
             </a:r>
           </a:p>
           <a:p>
@@ -3898,22 +4058,47 @@
               </a:lnSpc>
             </a:pPr>
             <a:r>
-              <a:rPr sz="1900" b="0">
+              <a:rPr sz="2000" b="1">
+                <a:solidFill>
+                  <a:srgbClr val="00FF41"/>
+                </a:solidFill>
+                <a:latin typeface="Arial"/>
+              </a:rPr>
+              <a:t>•  </a:t>
+            </a:r>
+            <a:r>
+              <a:rPr sz="2000" b="0">
                 <a:solidFill>
                   <a:srgbClr val="F5F7FA"/>
                 </a:solidFill>
                 <a:latin typeface="Arial"/>
               </a:rPr>
-              <a:t>Pragmatic quality (usability): </a:t>
-            </a:r>
-            <a:r>
-              <a:rPr sz="1900" b="1">
+              <a:t>METUX / Self-Determination scales - autonomy, competence, relatedness. For wellbeing values.</a:t>
+            </a:r>
+          </a:p>
+          <a:p>
+            <a:pPr algn="l">
+              <a:lnSpc>
+                <a:spcPct val="112000"/>
+              </a:lnSpc>
+            </a:pPr>
+            <a:r>
+              <a:rPr sz="2000" b="1">
                 <a:solidFill>
                   <a:srgbClr val="00FF41"/>
                 </a:solidFill>
                 <a:latin typeface="Arial"/>
               </a:rPr>
-              <a:t>fine.</a:t>
+              <a:t>•  </a:t>
+            </a:r>
+            <a:r>
+              <a:rPr sz="2000" b="0">
+                <a:solidFill>
+                  <a:srgbClr val="F5F7FA"/>
+                </a:solidFill>
+                <a:latin typeface="Arial"/>
+              </a:rPr>
+              <a:t>Vibed Slop Detector (impeccable.style rules) - generic AI "slop" is evidence craft didn't get in.</a:t>
             </a:r>
           </a:p>
           <a:p>
@@ -3923,54 +4108,22 @@
               </a:lnSpc>
             </a:pPr>
             <a:r>
-              <a:rPr sz="1900" b="0">
+              <a:rPr sz="2000" b="1">
+                <a:solidFill>
+                  <a:srgbClr val="00FF41"/>
+                </a:solidFill>
+                <a:latin typeface="Arial"/>
+              </a:rPr>
+              <a:t>•  </a:t>
+            </a:r>
+            <a:r>
+              <a:rPr sz="2000" b="0">
                 <a:solidFill>
                   <a:srgbClr val="F5F7FA"/>
                 </a:solidFill>
                 <a:latin typeface="Arial"/>
               </a:rPr>
-              <a:t>Hedonic quality (novelty, originality): </a:t>
-            </a:r>
-            <a:r>
-              <a:rPr sz="1900" b="1">
-                <a:solidFill>
-                  <a:srgbClr val="FF4D4D"/>
-                </a:solidFill>
-                <a:latin typeface="Arial"/>
-              </a:rPr>
-              <a:t>neutral to negative.</a:t>
-            </a:r>
-          </a:p>
-          <a:p>
-            <a:pPr algn="l">
-              <a:lnSpc>
-                <a:spcPct val="112000"/>
-              </a:lnSpc>
-            </a:pPr>
-            <a:r>
-              <a:rPr sz="2000" b="0">
-                <a:solidFill>
-                  <a:srgbClr val="F5F7FA"/>
-                </a:solidFill>
-                <a:latin typeface="Arial"/>
-              </a:rPr>
-              <a:t/>
-            </a:r>
-          </a:p>
-          <a:p>
-            <a:pPr algn="l">
-              <a:lnSpc>
-                <a:spcPct val="112000"/>
-              </a:lnSpc>
-            </a:pPr>
-            <a:r>
-              <a:rPr sz="1700" b="0">
-                <a:solidFill>
-                  <a:srgbClr val="8A94A6"/>
-                </a:solidFill>
-                <a:latin typeface="Arial"/>
-              </a:rPr>
-              <a:t>AI makes things usable but generic. Usability alone would miss it - which is why you verify the value, not just the flow.</a:t>
+              <a:t>Match the instrument to your reading - run the RIGHT one, well.</a:t>
             </a:r>
           </a:p>
         </p:txBody>
@@ -4074,7 +4227,7 @@
                 </a:solidFill>
                 <a:latin typeface="Courier New"/>
               </a:rPr>
-              <a:t>WHEN VERIFICATION FINDS A CONFLICT</a:t>
+              <a:t>WHY MEASURE BEYOND USABILITY</a:t>
             </a:r>
           </a:p>
         </p:txBody>
@@ -4132,7 +4285,7 @@
         <p:spPr>
           <a:xfrm>
             <a:off x="640080" y="1188720"/>
-            <a:ext cx="10972800" cy="914400"/>
+            <a:ext cx="10972800" cy="1097280"/>
           </a:xfrm>
           <a:prstGeom prst="rect">
             <a:avLst/>
@@ -4151,115 +4304,27 @@
               </a:lnSpc>
             </a:pPr>
             <a:r>
-              <a:rPr sz="3200" b="1">
+              <a:rPr sz="3400" b="1">
                 <a:solidFill>
                   <a:srgbClr val="F5F7FA"/>
                 </a:solidFill>
                 <a:latin typeface="Arial"/>
               </a:rPr>
-              <a:t>Two values collide - name the resolution</a:t>
-            </a:r>
-          </a:p>
-        </p:txBody>
-      </p:sp>
-      <p:sp>
-        <p:nvSpPr>
-          <p:cNvPr id="5" name="Rounded Rectangle 4"/>
-          <p:cNvSpPr/>
-          <p:nvPr/>
-        </p:nvSpPr>
-        <p:spPr>
-          <a:xfrm>
-            <a:off x="640080" y="2468880"/>
-            <a:ext cx="3393338" cy="3383280"/>
-          </a:xfrm>
-          <a:prstGeom prst="roundRect">
-            <a:avLst/>
-          </a:prstGeom>
-          <a:solidFill>
-            <a:srgbClr val="151B26"/>
-          </a:solidFill>
-          <a:ln>
-            <a:noFill/>
-          </a:ln>
-          <a:effectLst/>
-        </p:spPr>
-        <p:style>
-          <a:lnRef idx="1">
-            <a:schemeClr val="accent1"/>
-          </a:lnRef>
-          <a:fillRef idx="3">
-            <a:schemeClr val="accent1"/>
-          </a:fillRef>
-          <a:effectRef idx="2">
-            <a:schemeClr val="accent1"/>
-          </a:effectRef>
-          <a:fontRef idx="minor">
-            <a:schemeClr val="lt1"/>
-          </a:fontRef>
-        </p:style>
-        <p:txBody>
-          <a:bodyPr rtlCol="0" anchor="ctr"/>
-          <a:lstStyle/>
-          <a:p>
-            <a:pPr algn="ctr"/>
-          </a:p>
-        </p:txBody>
-      </p:sp>
-      <p:sp>
-        <p:nvSpPr>
-          <p:cNvPr id="6" name="Rectangle 5"/>
-          <p:cNvSpPr/>
-          <p:nvPr/>
-        </p:nvSpPr>
-        <p:spPr>
-          <a:xfrm>
-            <a:off x="640080" y="2468880"/>
-            <a:ext cx="3393338" cy="82296"/>
-          </a:xfrm>
-          <a:prstGeom prst="rect">
-            <a:avLst/>
-          </a:prstGeom>
-          <a:solidFill>
-            <a:srgbClr val="00FF41"/>
-          </a:solidFill>
-          <a:ln>
-            <a:noFill/>
-          </a:ln>
-          <a:effectLst/>
-        </p:spPr>
-        <p:style>
-          <a:lnRef idx="1">
-            <a:schemeClr val="accent1"/>
-          </a:lnRef>
-          <a:fillRef idx="3">
-            <a:schemeClr val="accent1"/>
-          </a:fillRef>
-          <a:effectRef idx="2">
-            <a:schemeClr val="accent1"/>
-          </a:effectRef>
-          <a:fontRef idx="minor">
-            <a:schemeClr val="lt1"/>
-          </a:fontRef>
-        </p:style>
-        <p:txBody>
-          <a:bodyPr rtlCol="0" anchor="ctr"/>
-          <a:lstStyle/>
-          <a:p>
-            <a:pPr algn="ctr"/>
-          </a:p>
-        </p:txBody>
-      </p:sp>
-      <p:sp>
-        <p:nvSpPr>
-          <p:cNvPr id="7" name="TextBox 6"/>
+              <a:t>"Usable but conventional"</a:t>
+            </a:r>
+          </a:p>
+        </p:txBody>
+      </p:sp>
+      <p:sp>
+        <p:nvSpPr>
+          <p:cNvPr id="5" name="TextBox 4"/>
           <p:cNvSpPr txBox="1"/>
           <p:nvPr/>
         </p:nvSpPr>
         <p:spPr>
           <a:xfrm>
-            <a:off x="914400" y="2788920"/>
-            <a:ext cx="2844698" cy="457200"/>
+            <a:off x="658368" y="2286000"/>
+            <a:ext cx="10881360" cy="3657600"/>
           </a:xfrm>
           <a:prstGeom prst="rect">
             <a:avLst/>
@@ -4274,512 +4339,122 @@
           <a:p>
             <a:pPr algn="l">
               <a:lnSpc>
-                <a:spcPct val="100000"/>
-              </a:lnSpc>
-            </a:pPr>
-            <a:r>
-              <a:rPr sz="1200" b="1">
+                <a:spcPct val="112000"/>
+              </a:lnSpc>
+            </a:pPr>
+            <a:r>
+              <a:rPr sz="2000" b="0">
+                <a:solidFill>
+                  <a:srgbClr val="F5F7FA"/>
+                </a:solidFill>
+                <a:latin typeface="Arial"/>
+              </a:rPr>
+              <a:t>A 2026 study (Romero et al.) compared AI-generated and human interface prototypes with the UEQ:</a:t>
+            </a:r>
+          </a:p>
+          <a:p>
+            <a:pPr algn="l">
+              <a:lnSpc>
+                <a:spcPct val="112000"/>
+              </a:lnSpc>
+            </a:pPr>
+            <a:r>
+              <a:rPr sz="2000" b="0">
+                <a:solidFill>
+                  <a:srgbClr val="F5F7FA"/>
+                </a:solidFill>
+                <a:latin typeface="Arial"/>
+              </a:rPr>
+              <a:t/>
+            </a:r>
+          </a:p>
+          <a:p>
+            <a:pPr algn="l">
+              <a:lnSpc>
+                <a:spcPct val="112000"/>
+              </a:lnSpc>
+            </a:pPr>
+            <a:r>
+              <a:rPr sz="1900" b="0">
+                <a:solidFill>
+                  <a:srgbClr val="F5F7FA"/>
+                </a:solidFill>
+                <a:latin typeface="Arial"/>
+              </a:rPr>
+              <a:t>Pragmatic quality (usability): </a:t>
+            </a:r>
+            <a:r>
+              <a:rPr sz="1900" b="1">
                 <a:solidFill>
                   <a:srgbClr val="00FF41"/>
                 </a:solidFill>
-                <a:latin typeface="Courier New"/>
-              </a:rPr>
-              <a:t>DISSOLVE</a:t>
-            </a:r>
-          </a:p>
-        </p:txBody>
-      </p:sp>
-      <p:sp>
-        <p:nvSpPr>
-          <p:cNvPr id="8" name="TextBox 7"/>
-          <p:cNvSpPr txBox="1"/>
-          <p:nvPr/>
-        </p:nvSpPr>
-        <p:spPr>
-          <a:xfrm>
-            <a:off x="914400" y="3246120"/>
-            <a:ext cx="2844698" cy="822960"/>
-          </a:xfrm>
-          <a:prstGeom prst="rect">
-            <a:avLst/>
-          </a:prstGeom>
-          <a:noFill/>
-        </p:spPr>
-        <p:txBody>
-          <a:bodyPr wrap="square" anchor="t">
-            <a:spAutoFit/>
-          </a:bodyPr>
-          <a:lstStyle/>
-          <a:p>
-            <a:pPr algn="l">
-              <a:lnSpc>
-                <a:spcPct val="100000"/>
-              </a:lnSpc>
-            </a:pPr>
-            <a:r>
-              <a:rPr sz="2000" b="1">
+                <a:latin typeface="Arial"/>
+              </a:rPr>
+              <a:t>fine.</a:t>
+            </a:r>
+          </a:p>
+          <a:p>
+            <a:pPr algn="l">
+              <a:lnSpc>
+                <a:spcPct val="112000"/>
+              </a:lnSpc>
+            </a:pPr>
+            <a:r>
+              <a:rPr sz="1900" b="0">
                 <a:solidFill>
                   <a:srgbClr val="F5F7FA"/>
                 </a:solidFill>
                 <a:latin typeface="Arial"/>
               </a:rPr>
-              <a:t>Redesign around it</a:t>
-            </a:r>
-          </a:p>
-        </p:txBody>
-      </p:sp>
-      <p:sp>
-        <p:nvSpPr>
-          <p:cNvPr id="9" name="TextBox 8"/>
-          <p:cNvSpPr txBox="1"/>
-          <p:nvPr/>
-        </p:nvSpPr>
-        <p:spPr>
-          <a:xfrm>
-            <a:off x="914400" y="4114800"/>
-            <a:ext cx="2844698" cy="1554480"/>
-          </a:xfrm>
-          <a:prstGeom prst="rect">
-            <a:avLst/>
-          </a:prstGeom>
-          <a:noFill/>
-        </p:spPr>
-        <p:txBody>
-          <a:bodyPr wrap="square" anchor="t">
-            <a:spAutoFit/>
-          </a:bodyPr>
-          <a:lstStyle/>
-          <a:p>
-            <a:pPr algn="l">
-              <a:lnSpc>
-                <a:spcPct val="110000"/>
-              </a:lnSpc>
-            </a:pPr>
-            <a:r>
-              <a:rPr sz="1500" b="0">
+              <a:t>Hedonic quality (novelty, originality): </a:t>
+            </a:r>
+            <a:r>
+              <a:rPr sz="1900" b="1">
+                <a:solidFill>
+                  <a:srgbClr val="FF4D4D"/>
+                </a:solidFill>
+                <a:latin typeface="Arial"/>
+              </a:rPr>
+              <a:t>neutral to negative.</a:t>
+            </a:r>
+          </a:p>
+          <a:p>
+            <a:pPr algn="l">
+              <a:lnSpc>
+                <a:spcPct val="112000"/>
+              </a:lnSpc>
+            </a:pPr>
+            <a:r>
+              <a:rPr sz="2000" b="0">
+                <a:solidFill>
+                  <a:srgbClr val="F5F7FA"/>
+                </a:solidFill>
+                <a:latin typeface="Arial"/>
+              </a:rPr>
+              <a:t/>
+            </a:r>
+          </a:p>
+          <a:p>
+            <a:pPr algn="l">
+              <a:lnSpc>
+                <a:spcPct val="112000"/>
+              </a:lnSpc>
+            </a:pPr>
+            <a:r>
+              <a:rPr sz="1700" b="0">
                 <a:solidFill>
                   <a:srgbClr val="8A94A6"/>
                 </a:solidFill>
                 <a:latin typeface="Arial"/>
               </a:rPr>
-              <a:t>A design where the clash disappears and BOTH values hold. (Vacuum: on-device maps, nothing to the cloud.)</a:t>
-            </a:r>
-          </a:p>
-        </p:txBody>
-      </p:sp>
-      <p:sp>
-        <p:nvSpPr>
-          <p:cNvPr id="10" name="Rounded Rectangle 9"/>
-          <p:cNvSpPr/>
-          <p:nvPr/>
-        </p:nvSpPr>
-        <p:spPr>
-          <a:xfrm>
-            <a:off x="4399178" y="2468880"/>
-            <a:ext cx="3393338" cy="3383280"/>
-          </a:xfrm>
-          <a:prstGeom prst="roundRect">
-            <a:avLst/>
-          </a:prstGeom>
-          <a:solidFill>
-            <a:srgbClr val="151B26"/>
-          </a:solidFill>
-          <a:ln>
-            <a:noFill/>
-          </a:ln>
-          <a:effectLst/>
-        </p:spPr>
-        <p:style>
-          <a:lnRef idx="1">
-            <a:schemeClr val="accent1"/>
-          </a:lnRef>
-          <a:fillRef idx="3">
-            <a:schemeClr val="accent1"/>
-          </a:fillRef>
-          <a:effectRef idx="2">
-            <a:schemeClr val="accent1"/>
-          </a:effectRef>
-          <a:fontRef idx="minor">
-            <a:schemeClr val="lt1"/>
-          </a:fontRef>
-        </p:style>
-        <p:txBody>
-          <a:bodyPr rtlCol="0" anchor="ctr"/>
-          <a:lstStyle/>
-          <a:p>
-            <a:pPr algn="ctr"/>
-          </a:p>
-        </p:txBody>
-      </p:sp>
-      <p:sp>
-        <p:nvSpPr>
-          <p:cNvPr id="11" name="Rectangle 10"/>
-          <p:cNvSpPr/>
-          <p:nvPr/>
-        </p:nvSpPr>
-        <p:spPr>
-          <a:xfrm>
-            <a:off x="4399178" y="2468880"/>
-            <a:ext cx="3393338" cy="82296"/>
-          </a:xfrm>
-          <a:prstGeom prst="rect">
-            <a:avLst/>
-          </a:prstGeom>
-          <a:solidFill>
-            <a:srgbClr val="00FF41"/>
-          </a:solidFill>
-          <a:ln>
-            <a:noFill/>
-          </a:ln>
-          <a:effectLst/>
-        </p:spPr>
-        <p:style>
-          <a:lnRef idx="1">
-            <a:schemeClr val="accent1"/>
-          </a:lnRef>
-          <a:fillRef idx="3">
-            <a:schemeClr val="accent1"/>
-          </a:fillRef>
-          <a:effectRef idx="2">
-            <a:schemeClr val="accent1"/>
-          </a:effectRef>
-          <a:fontRef idx="minor">
-            <a:schemeClr val="lt1"/>
-          </a:fontRef>
-        </p:style>
-        <p:txBody>
-          <a:bodyPr rtlCol="0" anchor="ctr"/>
-          <a:lstStyle/>
-          <a:p>
-            <a:pPr algn="ctr"/>
-          </a:p>
-        </p:txBody>
-      </p:sp>
-      <p:sp>
-        <p:nvSpPr>
-          <p:cNvPr id="12" name="TextBox 11"/>
-          <p:cNvSpPr txBox="1"/>
-          <p:nvPr/>
-        </p:nvSpPr>
-        <p:spPr>
-          <a:xfrm>
-            <a:off x="4673498" y="2788920"/>
-            <a:ext cx="2844698" cy="457200"/>
-          </a:xfrm>
-          <a:prstGeom prst="rect">
-            <a:avLst/>
-          </a:prstGeom>
-          <a:noFill/>
-        </p:spPr>
-        <p:txBody>
-          <a:bodyPr wrap="square" anchor="t">
-            <a:spAutoFit/>
-          </a:bodyPr>
-          <a:lstStyle/>
-          <a:p>
-            <a:pPr algn="l">
-              <a:lnSpc>
-                <a:spcPct val="100000"/>
-              </a:lnSpc>
-            </a:pPr>
-            <a:r>
-              <a:rPr sz="1200" b="1">
-                <a:solidFill>
-                  <a:srgbClr val="00FF41"/>
-                </a:solidFill>
-                <a:latin typeface="Courier New"/>
-              </a:rPr>
-              <a:t>COMPROMISE</a:t>
-            </a:r>
-          </a:p>
-        </p:txBody>
-      </p:sp>
-      <p:sp>
-        <p:nvSpPr>
-          <p:cNvPr id="13" name="TextBox 12"/>
-          <p:cNvSpPr txBox="1"/>
-          <p:nvPr/>
-        </p:nvSpPr>
-        <p:spPr>
-          <a:xfrm>
-            <a:off x="4673498" y="3246120"/>
-            <a:ext cx="2844698" cy="822960"/>
-          </a:xfrm>
-          <a:prstGeom prst="rect">
-            <a:avLst/>
-          </a:prstGeom>
-          <a:noFill/>
-        </p:spPr>
-        <p:txBody>
-          <a:bodyPr wrap="square" anchor="t">
-            <a:spAutoFit/>
-          </a:bodyPr>
-          <a:lstStyle/>
-          <a:p>
-            <a:pPr algn="l">
-              <a:lnSpc>
-                <a:spcPct val="100000"/>
-              </a:lnSpc>
-            </a:pPr>
-            <a:r>
-              <a:rPr sz="2000" b="1">
-                <a:solidFill>
-                  <a:srgbClr val="F5F7FA"/>
-                </a:solidFill>
-                <a:latin typeface="Arial"/>
-              </a:rPr>
-              <a:t>Each in part</a:t>
-            </a:r>
-          </a:p>
-        </p:txBody>
-      </p:sp>
-      <p:sp>
-        <p:nvSpPr>
-          <p:cNvPr id="14" name="TextBox 13"/>
-          <p:cNvSpPr txBox="1"/>
-          <p:nvPr/>
-        </p:nvSpPr>
-        <p:spPr>
-          <a:xfrm>
-            <a:off x="4673498" y="4114800"/>
-            <a:ext cx="2844698" cy="1554480"/>
-          </a:xfrm>
-          <a:prstGeom prst="rect">
-            <a:avLst/>
-          </a:prstGeom>
-          <a:noFill/>
-        </p:spPr>
-        <p:txBody>
-          <a:bodyPr wrap="square" anchor="t">
-            <a:spAutoFit/>
-          </a:bodyPr>
-          <a:lstStyle/>
-          <a:p>
-            <a:pPr algn="l">
-              <a:lnSpc>
-                <a:spcPct val="110000"/>
-              </a:lnSpc>
-            </a:pPr>
-            <a:r>
-              <a:rPr sz="1500" b="0">
-                <a:solidFill>
-                  <a:srgbClr val="8A94A6"/>
-                </a:solidFill>
-                <a:latin typeface="Arial"/>
-              </a:rPr>
-              <a:t>Promote each value in less than full measure. (Vacuum: cloud data, but anonymized + opt-out.)</a:t>
-            </a:r>
-          </a:p>
-        </p:txBody>
-      </p:sp>
-      <p:sp>
-        <p:nvSpPr>
-          <p:cNvPr id="15" name="Rounded Rectangle 14"/>
-          <p:cNvSpPr/>
-          <p:nvPr/>
-        </p:nvSpPr>
-        <p:spPr>
-          <a:xfrm>
-            <a:off x="8158276" y="2468880"/>
-            <a:ext cx="3393338" cy="3383280"/>
-          </a:xfrm>
-          <a:prstGeom prst="roundRect">
-            <a:avLst/>
-          </a:prstGeom>
-          <a:solidFill>
-            <a:srgbClr val="151B26"/>
-          </a:solidFill>
-          <a:ln>
-            <a:noFill/>
-          </a:ln>
-          <a:effectLst/>
-        </p:spPr>
-        <p:style>
-          <a:lnRef idx="1">
-            <a:schemeClr val="accent1"/>
-          </a:lnRef>
-          <a:fillRef idx="3">
-            <a:schemeClr val="accent1"/>
-          </a:fillRef>
-          <a:effectRef idx="2">
-            <a:schemeClr val="accent1"/>
-          </a:effectRef>
-          <a:fontRef idx="minor">
-            <a:schemeClr val="lt1"/>
-          </a:fontRef>
-        </p:style>
-        <p:txBody>
-          <a:bodyPr rtlCol="0" anchor="ctr"/>
-          <a:lstStyle/>
-          <a:p>
-            <a:pPr algn="ctr"/>
-          </a:p>
-        </p:txBody>
-      </p:sp>
-      <p:sp>
-        <p:nvSpPr>
-          <p:cNvPr id="16" name="Rectangle 15"/>
-          <p:cNvSpPr/>
-          <p:nvPr/>
-        </p:nvSpPr>
-        <p:spPr>
-          <a:xfrm>
-            <a:off x="8158276" y="2468880"/>
-            <a:ext cx="3393338" cy="82296"/>
-          </a:xfrm>
-          <a:prstGeom prst="rect">
-            <a:avLst/>
-          </a:prstGeom>
-          <a:solidFill>
-            <a:srgbClr val="00FF41"/>
-          </a:solidFill>
-          <a:ln>
-            <a:noFill/>
-          </a:ln>
-          <a:effectLst/>
-        </p:spPr>
-        <p:style>
-          <a:lnRef idx="1">
-            <a:schemeClr val="accent1"/>
-          </a:lnRef>
-          <a:fillRef idx="3">
-            <a:schemeClr val="accent1"/>
-          </a:fillRef>
-          <a:effectRef idx="2">
-            <a:schemeClr val="accent1"/>
-          </a:effectRef>
-          <a:fontRef idx="minor">
-            <a:schemeClr val="lt1"/>
-          </a:fontRef>
-        </p:style>
-        <p:txBody>
-          <a:bodyPr rtlCol="0" anchor="ctr"/>
-          <a:lstStyle/>
-          <a:p>
-            <a:pPr algn="ctr"/>
-          </a:p>
-        </p:txBody>
-      </p:sp>
-      <p:sp>
-        <p:nvSpPr>
-          <p:cNvPr id="17" name="TextBox 16"/>
-          <p:cNvSpPr txBox="1"/>
-          <p:nvPr/>
-        </p:nvSpPr>
-        <p:spPr>
-          <a:xfrm>
-            <a:off x="8432596" y="2788920"/>
-            <a:ext cx="2844698" cy="457200"/>
-          </a:xfrm>
-          <a:prstGeom prst="rect">
-            <a:avLst/>
-          </a:prstGeom>
-          <a:noFill/>
-        </p:spPr>
-        <p:txBody>
-          <a:bodyPr wrap="square" anchor="t">
-            <a:spAutoFit/>
-          </a:bodyPr>
-          <a:lstStyle/>
-          <a:p>
-            <a:pPr algn="l">
-              <a:lnSpc>
-                <a:spcPct val="100000"/>
-              </a:lnSpc>
-            </a:pPr>
-            <a:r>
-              <a:rPr sz="1200" b="1">
-                <a:solidFill>
-                  <a:srgbClr val="00FF41"/>
-                </a:solidFill>
-                <a:latin typeface="Courier New"/>
-              </a:rPr>
-              <a:t>TRADE-OFF</a:t>
-            </a:r>
-          </a:p>
-        </p:txBody>
-      </p:sp>
-      <p:sp>
-        <p:nvSpPr>
-          <p:cNvPr id="18" name="TextBox 17"/>
-          <p:cNvSpPr txBox="1"/>
-          <p:nvPr/>
-        </p:nvSpPr>
-        <p:spPr>
-          <a:xfrm>
-            <a:off x="8432596" y="3246120"/>
-            <a:ext cx="2844698" cy="822960"/>
-          </a:xfrm>
-          <a:prstGeom prst="rect">
-            <a:avLst/>
-          </a:prstGeom>
-          <a:noFill/>
-        </p:spPr>
-        <p:txBody>
-          <a:bodyPr wrap="square" anchor="t">
-            <a:spAutoFit/>
-          </a:bodyPr>
-          <a:lstStyle/>
-          <a:p>
-            <a:pPr algn="l">
-              <a:lnSpc>
-                <a:spcPct val="100000"/>
-              </a:lnSpc>
-            </a:pPr>
-            <a:r>
-              <a:rPr sz="2000" b="1">
-                <a:solidFill>
-                  <a:srgbClr val="F5F7FA"/>
-                </a:solidFill>
-                <a:latin typeface="Arial"/>
-              </a:rPr>
-              <a:t>Sacrifice one</a:t>
-            </a:r>
-          </a:p>
-        </p:txBody>
-      </p:sp>
-      <p:sp>
-        <p:nvSpPr>
-          <p:cNvPr id="19" name="TextBox 18"/>
-          <p:cNvSpPr txBox="1"/>
-          <p:nvPr/>
-        </p:nvSpPr>
-        <p:spPr>
-          <a:xfrm>
-            <a:off x="8432596" y="4114800"/>
-            <a:ext cx="2844698" cy="1554480"/>
-          </a:xfrm>
-          <a:prstGeom prst="rect">
-            <a:avLst/>
-          </a:prstGeom>
-          <a:noFill/>
-        </p:spPr>
-        <p:txBody>
-          <a:bodyPr wrap="square" anchor="t">
-            <a:spAutoFit/>
-          </a:bodyPr>
-          <a:lstStyle/>
-          <a:p>
-            <a:pPr algn="l">
-              <a:lnSpc>
-                <a:spcPct val="110000"/>
-              </a:lnSpc>
-            </a:pPr>
-            <a:r>
-              <a:rPr sz="1500" b="0">
-                <a:solidFill>
-                  <a:srgbClr val="8A94A6"/>
-                </a:solidFill>
-                <a:latin typeface="Arial"/>
-              </a:rPr>
-              <a:t>One value is given up for another - say so honestly. (Vacuum: full collection for max automation.)</a:t>
-            </a:r>
-          </a:p>
-        </p:txBody>
-      </p:sp>
-      <p:sp>
-        <p:nvSpPr>
-          <p:cNvPr id="20" name="TextBox 19"/>
+              <a:t>AI makes things usable but generic. Usability alone would miss it - which is why you verify the value, not just the flow.</a:t>
+            </a:r>
+          </a:p>
+        </p:txBody>
+      </p:sp>
+      <p:sp>
+        <p:nvSpPr>
+          <p:cNvPr id="6" name="TextBox 5"/>
           <p:cNvSpPr txBox="1"/>
           <p:nvPr/>
         </p:nvSpPr>
@@ -4876,7 +4551,7 @@
                 </a:solidFill>
                 <a:latin typeface="Courier New"/>
               </a:rPr>
-              <a:t>TODAY'S GUEST - ACCESSIBILITY</a:t>
+              <a:t>WHEN VALUES COLLIDE</a:t>
             </a:r>
           </a:p>
         </p:txBody>
@@ -4934,7 +4609,7 @@
         <p:spPr>
           <a:xfrm>
             <a:off x="640080" y="1188720"/>
-            <a:ext cx="10972800" cy="1097280"/>
+            <a:ext cx="10972800" cy="914400"/>
           </a:xfrm>
           <a:prstGeom prst="rect">
             <a:avLst/>
@@ -4953,27 +4628,115 @@
               </a:lnSpc>
             </a:pPr>
             <a:r>
-              <a:rPr sz="3400" b="1">
+              <a:rPr sz="3200" b="1">
                 <a:solidFill>
                   <a:srgbClr val="F5F7FA"/>
                 </a:solidFill>
                 <a:latin typeface="Arial"/>
               </a:rPr>
-              <a:t>Accessibility is a value you can verify</a:t>
-            </a:r>
-          </a:p>
-        </p:txBody>
-      </p:sp>
-      <p:sp>
-        <p:nvSpPr>
-          <p:cNvPr id="5" name="TextBox 4"/>
+              <a:t>Name the resolution honestly</a:t>
+            </a:r>
+          </a:p>
+        </p:txBody>
+      </p:sp>
+      <p:sp>
+        <p:nvSpPr>
+          <p:cNvPr id="5" name="Rounded Rectangle 4"/>
+          <p:cNvSpPr/>
+          <p:nvPr/>
+        </p:nvSpPr>
+        <p:spPr>
+          <a:xfrm>
+            <a:off x="640080" y="2468880"/>
+            <a:ext cx="3393338" cy="3383280"/>
+          </a:xfrm>
+          <a:prstGeom prst="roundRect">
+            <a:avLst/>
+          </a:prstGeom>
+          <a:solidFill>
+            <a:srgbClr val="151B26"/>
+          </a:solidFill>
+          <a:ln>
+            <a:noFill/>
+          </a:ln>
+          <a:effectLst/>
+        </p:spPr>
+        <p:style>
+          <a:lnRef idx="1">
+            <a:schemeClr val="accent1"/>
+          </a:lnRef>
+          <a:fillRef idx="3">
+            <a:schemeClr val="accent1"/>
+          </a:fillRef>
+          <a:effectRef idx="2">
+            <a:schemeClr val="accent1"/>
+          </a:effectRef>
+          <a:fontRef idx="minor">
+            <a:schemeClr val="lt1"/>
+          </a:fontRef>
+        </p:style>
+        <p:txBody>
+          <a:bodyPr rtlCol="0" anchor="ctr"/>
+          <a:lstStyle/>
+          <a:p>
+            <a:pPr algn="ctr"/>
+          </a:p>
+        </p:txBody>
+      </p:sp>
+      <p:sp>
+        <p:nvSpPr>
+          <p:cNvPr id="6" name="Rectangle 5"/>
+          <p:cNvSpPr/>
+          <p:nvPr/>
+        </p:nvSpPr>
+        <p:spPr>
+          <a:xfrm>
+            <a:off x="640080" y="2468880"/>
+            <a:ext cx="3393338" cy="82296"/>
+          </a:xfrm>
+          <a:prstGeom prst="rect">
+            <a:avLst/>
+          </a:prstGeom>
+          <a:solidFill>
+            <a:srgbClr val="00FF41"/>
+          </a:solidFill>
+          <a:ln>
+            <a:noFill/>
+          </a:ln>
+          <a:effectLst/>
+        </p:spPr>
+        <p:style>
+          <a:lnRef idx="1">
+            <a:schemeClr val="accent1"/>
+          </a:lnRef>
+          <a:fillRef idx="3">
+            <a:schemeClr val="accent1"/>
+          </a:fillRef>
+          <a:effectRef idx="2">
+            <a:schemeClr val="accent1"/>
+          </a:effectRef>
+          <a:fontRef idx="minor">
+            <a:schemeClr val="lt1"/>
+          </a:fontRef>
+        </p:style>
+        <p:txBody>
+          <a:bodyPr rtlCol="0" anchor="ctr"/>
+          <a:lstStyle/>
+          <a:p>
+            <a:pPr algn="ctr"/>
+          </a:p>
+        </p:txBody>
+      </p:sp>
+      <p:sp>
+        <p:nvSpPr>
+          <p:cNvPr id="7" name="TextBox 6"/>
           <p:cNvSpPr txBox="1"/>
           <p:nvPr/>
         </p:nvSpPr>
         <p:spPr>
           <a:xfrm>
-            <a:off x="658368" y="2286000"/>
-            <a:ext cx="10881360" cy="3657600"/>
+            <a:off x="914400" y="2788920"/>
+            <a:ext cx="2844698" cy="457200"/>
           </a:xfrm>
           <a:prstGeom prst="rect">
             <a:avLst/>
@@ -4988,147 +4751,512 @@
           <a:p>
             <a:pPr algn="l">
               <a:lnSpc>
-                <a:spcPct val="112000"/>
-              </a:lnSpc>
-            </a:pPr>
-            <a:r>
-              <a:rPr sz="2000" b="0">
+                <a:spcPct val="100000"/>
+              </a:lnSpc>
+            </a:pPr>
+            <a:r>
+              <a:rPr sz="1200" b="1">
+                <a:solidFill>
+                  <a:srgbClr val="00FF41"/>
+                </a:solidFill>
+                <a:latin typeface="Courier New"/>
+              </a:rPr>
+              <a:t>DISSOLVE</a:t>
+            </a:r>
+          </a:p>
+        </p:txBody>
+      </p:sp>
+      <p:sp>
+        <p:nvSpPr>
+          <p:cNvPr id="8" name="TextBox 7"/>
+          <p:cNvSpPr txBox="1"/>
+          <p:nvPr/>
+        </p:nvSpPr>
+        <p:spPr>
+          <a:xfrm>
+            <a:off x="914400" y="3246120"/>
+            <a:ext cx="2844698" cy="822960"/>
+          </a:xfrm>
+          <a:prstGeom prst="rect">
+            <a:avLst/>
+          </a:prstGeom>
+          <a:noFill/>
+        </p:spPr>
+        <p:txBody>
+          <a:bodyPr wrap="square" anchor="t">
+            <a:spAutoFit/>
+          </a:bodyPr>
+          <a:lstStyle/>
+          <a:p>
+            <a:pPr algn="l">
+              <a:lnSpc>
+                <a:spcPct val="100000"/>
+              </a:lnSpc>
+            </a:pPr>
+            <a:r>
+              <a:rPr sz="2000" b="1">
                 <a:solidFill>
                   <a:srgbClr val="F5F7FA"/>
                 </a:solidFill>
                 <a:latin typeface="Arial"/>
               </a:rPr>
-              <a:t>Accessibility runs cleanly through all three lenses:</a:t>
-            </a:r>
-          </a:p>
-          <a:p>
-            <a:pPr algn="l">
-              <a:lnSpc>
-                <a:spcPct val="112000"/>
-              </a:lnSpc>
-            </a:pPr>
-            <a:r>
-              <a:rPr sz="2000" b="0">
+              <a:t>Redesign around it</a:t>
+            </a:r>
+          </a:p>
+        </p:txBody>
+      </p:sp>
+      <p:sp>
+        <p:nvSpPr>
+          <p:cNvPr id="9" name="TextBox 8"/>
+          <p:cNvSpPr txBox="1"/>
+          <p:nvPr/>
+        </p:nvSpPr>
+        <p:spPr>
+          <a:xfrm>
+            <a:off x="914400" y="4114800"/>
+            <a:ext cx="2844698" cy="1554480"/>
+          </a:xfrm>
+          <a:prstGeom prst="rect">
+            <a:avLst/>
+          </a:prstGeom>
+          <a:noFill/>
+        </p:spPr>
+        <p:txBody>
+          <a:bodyPr wrap="square" anchor="t">
+            <a:spAutoFit/>
+          </a:bodyPr>
+          <a:lstStyle/>
+          <a:p>
+            <a:pPr algn="l">
+              <a:lnSpc>
+                <a:spcPct val="110000"/>
+              </a:lnSpc>
+            </a:pPr>
+            <a:r>
+              <a:rPr sz="1500" b="0">
+                <a:solidFill>
+                  <a:srgbClr val="8A94A6"/>
+                </a:solidFill>
+                <a:latin typeface="Arial"/>
+              </a:rPr>
+              <a:t>A design where the clash disappears and BOTH values hold. (Vacuum: on-device maps, nothing to the cloud.)</a:t>
+            </a:r>
+          </a:p>
+        </p:txBody>
+      </p:sp>
+      <p:sp>
+        <p:nvSpPr>
+          <p:cNvPr id="10" name="Rounded Rectangle 9"/>
+          <p:cNvSpPr/>
+          <p:nvPr/>
+        </p:nvSpPr>
+        <p:spPr>
+          <a:xfrm>
+            <a:off x="4399178" y="2468880"/>
+            <a:ext cx="3393338" cy="3383280"/>
+          </a:xfrm>
+          <a:prstGeom prst="roundRect">
+            <a:avLst/>
+          </a:prstGeom>
+          <a:solidFill>
+            <a:srgbClr val="151B26"/>
+          </a:solidFill>
+          <a:ln>
+            <a:noFill/>
+          </a:ln>
+          <a:effectLst/>
+        </p:spPr>
+        <p:style>
+          <a:lnRef idx="1">
+            <a:schemeClr val="accent1"/>
+          </a:lnRef>
+          <a:fillRef idx="3">
+            <a:schemeClr val="accent1"/>
+          </a:fillRef>
+          <a:effectRef idx="2">
+            <a:schemeClr val="accent1"/>
+          </a:effectRef>
+          <a:fontRef idx="minor">
+            <a:schemeClr val="lt1"/>
+          </a:fontRef>
+        </p:style>
+        <p:txBody>
+          <a:bodyPr rtlCol="0" anchor="ctr"/>
+          <a:lstStyle/>
+          <a:p>
+            <a:pPr algn="ctr"/>
+          </a:p>
+        </p:txBody>
+      </p:sp>
+      <p:sp>
+        <p:nvSpPr>
+          <p:cNvPr id="11" name="Rectangle 10"/>
+          <p:cNvSpPr/>
+          <p:nvPr/>
+        </p:nvSpPr>
+        <p:spPr>
+          <a:xfrm>
+            <a:off x="4399178" y="2468880"/>
+            <a:ext cx="3393338" cy="82296"/>
+          </a:xfrm>
+          <a:prstGeom prst="rect">
+            <a:avLst/>
+          </a:prstGeom>
+          <a:solidFill>
+            <a:srgbClr val="00FF41"/>
+          </a:solidFill>
+          <a:ln>
+            <a:noFill/>
+          </a:ln>
+          <a:effectLst/>
+        </p:spPr>
+        <p:style>
+          <a:lnRef idx="1">
+            <a:schemeClr val="accent1"/>
+          </a:lnRef>
+          <a:fillRef idx="3">
+            <a:schemeClr val="accent1"/>
+          </a:fillRef>
+          <a:effectRef idx="2">
+            <a:schemeClr val="accent1"/>
+          </a:effectRef>
+          <a:fontRef idx="minor">
+            <a:schemeClr val="lt1"/>
+          </a:fontRef>
+        </p:style>
+        <p:txBody>
+          <a:bodyPr rtlCol="0" anchor="ctr"/>
+          <a:lstStyle/>
+          <a:p>
+            <a:pPr algn="ctr"/>
+          </a:p>
+        </p:txBody>
+      </p:sp>
+      <p:sp>
+        <p:nvSpPr>
+          <p:cNvPr id="12" name="TextBox 11"/>
+          <p:cNvSpPr txBox="1"/>
+          <p:nvPr/>
+        </p:nvSpPr>
+        <p:spPr>
+          <a:xfrm>
+            <a:off x="4673498" y="2788920"/>
+            <a:ext cx="2844698" cy="457200"/>
+          </a:xfrm>
+          <a:prstGeom prst="rect">
+            <a:avLst/>
+          </a:prstGeom>
+          <a:noFill/>
+        </p:spPr>
+        <p:txBody>
+          <a:bodyPr wrap="square" anchor="t">
+            <a:spAutoFit/>
+          </a:bodyPr>
+          <a:lstStyle/>
+          <a:p>
+            <a:pPr algn="l">
+              <a:lnSpc>
+                <a:spcPct val="100000"/>
+              </a:lnSpc>
+            </a:pPr>
+            <a:r>
+              <a:rPr sz="1200" b="1">
+                <a:solidFill>
+                  <a:srgbClr val="00FF41"/>
+                </a:solidFill>
+                <a:latin typeface="Courier New"/>
+              </a:rPr>
+              <a:t>COMPROMISE</a:t>
+            </a:r>
+          </a:p>
+        </p:txBody>
+      </p:sp>
+      <p:sp>
+        <p:nvSpPr>
+          <p:cNvPr id="13" name="TextBox 12"/>
+          <p:cNvSpPr txBox="1"/>
+          <p:nvPr/>
+        </p:nvSpPr>
+        <p:spPr>
+          <a:xfrm>
+            <a:off x="4673498" y="3246120"/>
+            <a:ext cx="2844698" cy="822960"/>
+          </a:xfrm>
+          <a:prstGeom prst="rect">
+            <a:avLst/>
+          </a:prstGeom>
+          <a:noFill/>
+        </p:spPr>
+        <p:txBody>
+          <a:bodyPr wrap="square" anchor="t">
+            <a:spAutoFit/>
+          </a:bodyPr>
+          <a:lstStyle/>
+          <a:p>
+            <a:pPr algn="l">
+              <a:lnSpc>
+                <a:spcPct val="100000"/>
+              </a:lnSpc>
+            </a:pPr>
+            <a:r>
+              <a:rPr sz="2000" b="1">
                 <a:solidFill>
                   <a:srgbClr val="F5F7FA"/>
                 </a:solidFill>
                 <a:latin typeface="Arial"/>
               </a:rPr>
-              <a:t/>
-            </a:r>
-          </a:p>
-          <a:p>
-            <a:pPr algn="l">
-              <a:lnSpc>
-                <a:spcPct val="112000"/>
-              </a:lnSpc>
-            </a:pPr>
-            <a:r>
-              <a:rPr sz="1900" b="1">
+              <a:t>Each in part</a:t>
+            </a:r>
+          </a:p>
+        </p:txBody>
+      </p:sp>
+      <p:sp>
+        <p:nvSpPr>
+          <p:cNvPr id="14" name="TextBox 13"/>
+          <p:cNvSpPr txBox="1"/>
+          <p:nvPr/>
+        </p:nvSpPr>
+        <p:spPr>
+          <a:xfrm>
+            <a:off x="4673498" y="4114800"/>
+            <a:ext cx="2844698" cy="1554480"/>
+          </a:xfrm>
+          <a:prstGeom prst="rect">
+            <a:avLst/>
+          </a:prstGeom>
+          <a:noFill/>
+        </p:spPr>
+        <p:txBody>
+          <a:bodyPr wrap="square" anchor="t">
+            <a:spAutoFit/>
+          </a:bodyPr>
+          <a:lstStyle/>
+          <a:p>
+            <a:pPr algn="l">
+              <a:lnSpc>
+                <a:spcPct val="110000"/>
+              </a:lnSpc>
+            </a:pPr>
+            <a:r>
+              <a:rPr sz="1500" b="0">
+                <a:solidFill>
+                  <a:srgbClr val="8A94A6"/>
+                </a:solidFill>
+                <a:latin typeface="Arial"/>
+              </a:rPr>
+              <a:t>Promote each value in less than full measure. (Vacuum: cloud data, but anonymized + opt-out.)</a:t>
+            </a:r>
+          </a:p>
+        </p:txBody>
+      </p:sp>
+      <p:sp>
+        <p:nvSpPr>
+          <p:cNvPr id="15" name="Rounded Rectangle 14"/>
+          <p:cNvSpPr/>
+          <p:nvPr/>
+        </p:nvSpPr>
+        <p:spPr>
+          <a:xfrm>
+            <a:off x="8158276" y="2468880"/>
+            <a:ext cx="3393338" cy="3383280"/>
+          </a:xfrm>
+          <a:prstGeom prst="roundRect">
+            <a:avLst/>
+          </a:prstGeom>
+          <a:solidFill>
+            <a:srgbClr val="151B26"/>
+          </a:solidFill>
+          <a:ln>
+            <a:noFill/>
+          </a:ln>
+          <a:effectLst/>
+        </p:spPr>
+        <p:style>
+          <a:lnRef idx="1">
+            <a:schemeClr val="accent1"/>
+          </a:lnRef>
+          <a:fillRef idx="3">
+            <a:schemeClr val="accent1"/>
+          </a:fillRef>
+          <a:effectRef idx="2">
+            <a:schemeClr val="accent1"/>
+          </a:effectRef>
+          <a:fontRef idx="minor">
+            <a:schemeClr val="lt1"/>
+          </a:fontRef>
+        </p:style>
+        <p:txBody>
+          <a:bodyPr rtlCol="0" anchor="ctr"/>
+          <a:lstStyle/>
+          <a:p>
+            <a:pPr algn="ctr"/>
+          </a:p>
+        </p:txBody>
+      </p:sp>
+      <p:sp>
+        <p:nvSpPr>
+          <p:cNvPr id="16" name="Rectangle 15"/>
+          <p:cNvSpPr/>
+          <p:nvPr/>
+        </p:nvSpPr>
+        <p:spPr>
+          <a:xfrm>
+            <a:off x="8158276" y="2468880"/>
+            <a:ext cx="3393338" cy="82296"/>
+          </a:xfrm>
+          <a:prstGeom prst="rect">
+            <a:avLst/>
+          </a:prstGeom>
+          <a:solidFill>
+            <a:srgbClr val="00FF41"/>
+          </a:solidFill>
+          <a:ln>
+            <a:noFill/>
+          </a:ln>
+          <a:effectLst/>
+        </p:spPr>
+        <p:style>
+          <a:lnRef idx="1">
+            <a:schemeClr val="accent1"/>
+          </a:lnRef>
+          <a:fillRef idx="3">
+            <a:schemeClr val="accent1"/>
+          </a:fillRef>
+          <a:effectRef idx="2">
+            <a:schemeClr val="accent1"/>
+          </a:effectRef>
+          <a:fontRef idx="minor">
+            <a:schemeClr val="lt1"/>
+          </a:fontRef>
+        </p:style>
+        <p:txBody>
+          <a:bodyPr rtlCol="0" anchor="ctr"/>
+          <a:lstStyle/>
+          <a:p>
+            <a:pPr algn="ctr"/>
+          </a:p>
+        </p:txBody>
+      </p:sp>
+      <p:sp>
+        <p:nvSpPr>
+          <p:cNvPr id="17" name="TextBox 16"/>
+          <p:cNvSpPr txBox="1"/>
+          <p:nvPr/>
+        </p:nvSpPr>
+        <p:spPr>
+          <a:xfrm>
+            <a:off x="8432596" y="2788920"/>
+            <a:ext cx="2844698" cy="457200"/>
+          </a:xfrm>
+          <a:prstGeom prst="rect">
+            <a:avLst/>
+          </a:prstGeom>
+          <a:noFill/>
+        </p:spPr>
+        <p:txBody>
+          <a:bodyPr wrap="square" anchor="t">
+            <a:spAutoFit/>
+          </a:bodyPr>
+          <a:lstStyle/>
+          <a:p>
+            <a:pPr algn="l">
+              <a:lnSpc>
+                <a:spcPct val="100000"/>
+              </a:lnSpc>
+            </a:pPr>
+            <a:r>
+              <a:rPr sz="1200" b="1">
                 <a:solidFill>
                   <a:srgbClr val="00FF41"/>
                 </a:solidFill>
-                <a:latin typeface="Arial"/>
-              </a:rPr>
-              <a:t>Behavior</a:t>
-            </a:r>
-            <a:r>
-              <a:rPr sz="1900" b="0">
+                <a:latin typeface="Courier New"/>
+              </a:rPr>
+              <a:t>TRADE-OFF</a:t>
+            </a:r>
+          </a:p>
+        </p:txBody>
+      </p:sp>
+      <p:sp>
+        <p:nvSpPr>
+          <p:cNvPr id="18" name="TextBox 17"/>
+          <p:cNvSpPr txBox="1"/>
+          <p:nvPr/>
+        </p:nvSpPr>
+        <p:spPr>
+          <a:xfrm>
+            <a:off x="8432596" y="3246120"/>
+            <a:ext cx="2844698" cy="822960"/>
+          </a:xfrm>
+          <a:prstGeom prst="rect">
+            <a:avLst/>
+          </a:prstGeom>
+          <a:noFill/>
+        </p:spPr>
+        <p:txBody>
+          <a:bodyPr wrap="square" anchor="t">
+            <a:spAutoFit/>
+          </a:bodyPr>
+          <a:lstStyle/>
+          <a:p>
+            <a:pPr algn="l">
+              <a:lnSpc>
+                <a:spcPct val="100000"/>
+              </a:lnSpc>
+            </a:pPr>
+            <a:r>
+              <a:rPr sz="2000" b="1">
                 <a:solidFill>
                   <a:srgbClr val="F5F7FA"/>
                 </a:solidFill>
                 <a:latin typeface="Arial"/>
               </a:rPr>
-              <a:t> - can a screen-reader user actually complete the task?</a:t>
-            </a:r>
-          </a:p>
-          <a:p>
-            <a:pPr algn="l">
-              <a:lnSpc>
-                <a:spcPct val="112000"/>
-              </a:lnSpc>
-            </a:pPr>
-            <a:r>
-              <a:rPr sz="1900" b="1">
-                <a:solidFill>
-                  <a:srgbClr val="00FF41"/>
-                </a:solidFill>
-                <a:latin typeface="Arial"/>
-              </a:rPr>
-              <a:t>Understanding</a:t>
-            </a:r>
-            <a:r>
-              <a:rPr sz="1900" b="0">
-                <a:solidFill>
-                  <a:srgbClr val="F5F7FA"/>
-                </a:solidFill>
-                <a:latin typeface="Arial"/>
-              </a:rPr>
-              <a:t> - are labels, states, and errors legible to everyone?</a:t>
-            </a:r>
-          </a:p>
-          <a:p>
-            <a:pPr algn="l">
-              <a:lnSpc>
-                <a:spcPct val="112000"/>
-              </a:lnSpc>
-            </a:pPr>
-            <a:r>
-              <a:rPr sz="1900" b="1">
-                <a:solidFill>
-                  <a:srgbClr val="00FF41"/>
-                </a:solidFill>
-                <a:latin typeface="Arial"/>
-              </a:rPr>
-              <a:t>Affect</a:t>
-            </a:r>
-            <a:r>
-              <a:rPr sz="1900" b="0">
-                <a:solidFill>
-                  <a:srgbClr val="F5F7FA"/>
-                </a:solidFill>
-                <a:latin typeface="Arial"/>
-              </a:rPr>
-              <a:t> - does the design respect the user, or work around them?</a:t>
-            </a:r>
-          </a:p>
-          <a:p>
-            <a:pPr algn="l">
-              <a:lnSpc>
-                <a:spcPct val="112000"/>
-              </a:lnSpc>
-            </a:pPr>
-            <a:r>
-              <a:rPr sz="2000" b="0">
-                <a:solidFill>
-                  <a:srgbClr val="F5F7FA"/>
-                </a:solidFill>
-                <a:latin typeface="Arial"/>
-              </a:rPr>
-              <a:t/>
-            </a:r>
-          </a:p>
-          <a:p>
-            <a:pPr algn="l">
-              <a:lnSpc>
-                <a:spcPct val="112000"/>
-              </a:lnSpc>
-            </a:pPr>
-            <a:r>
-              <a:rPr sz="1700" b="0">
+              <a:t>Sacrifice one</a:t>
+            </a:r>
+          </a:p>
+        </p:txBody>
+      </p:sp>
+      <p:sp>
+        <p:nvSpPr>
+          <p:cNvPr id="19" name="TextBox 18"/>
+          <p:cNvSpPr txBox="1"/>
+          <p:nvPr/>
+        </p:nvSpPr>
+        <p:spPr>
+          <a:xfrm>
+            <a:off x="8432596" y="4114800"/>
+            <a:ext cx="2844698" cy="1554480"/>
+          </a:xfrm>
+          <a:prstGeom prst="rect">
+            <a:avLst/>
+          </a:prstGeom>
+          <a:noFill/>
+        </p:spPr>
+        <p:txBody>
+          <a:bodyPr wrap="square" anchor="t">
+            <a:spAutoFit/>
+          </a:bodyPr>
+          <a:lstStyle/>
+          <a:p>
+            <a:pPr algn="l">
+              <a:lnSpc>
+                <a:spcPct val="110000"/>
+              </a:lnSpc>
+            </a:pPr>
+            <a:r>
+              <a:rPr sz="1500" b="0">
                 <a:solidFill>
                   <a:srgbClr val="8A94A6"/>
                 </a:solidFill>
                 <a:latin typeface="Arial"/>
               </a:rPr>
-              <a:t>Borrow today's guest lecture as a lens - even if your value is something else.</a:t>
-            </a:r>
-          </a:p>
-        </p:txBody>
-      </p:sp>
-      <p:sp>
-        <p:nvSpPr>
-          <p:cNvPr id="6" name="TextBox 5"/>
+              <a:t>One value is given up for another - say so out loud. (Vacuum: full collection for max automation.)</a:t>
+            </a:r>
+          </a:p>
+        </p:txBody>
+      </p:sp>
+      <p:sp>
+        <p:nvSpPr>
+          <p:cNvPr id="20" name="TextBox 19"/>
           <p:cNvSpPr txBox="1"/>
           <p:nvPr/>
         </p:nvSpPr>
@@ -5225,7 +5353,7 @@
                 </a:solidFill>
                 <a:latin typeface="Courier New"/>
               </a:rPr>
-              <a:t>ACTIVITY - TODAY</a:t>
+              <a:t>STEP 4 - OPEN THE NEXT CYCLE</a:t>
             </a:r>
           </a:p>
         </p:txBody>
@@ -5282,8 +5410,8 @@
         </p:nvSpPr>
         <p:spPr>
           <a:xfrm>
-            <a:off x="640080" y="1325880"/>
-            <a:ext cx="10972800" cy="1828800"/>
+            <a:off x="640080" y="1188720"/>
+            <a:ext cx="10972800" cy="1097280"/>
           </a:xfrm>
           <a:prstGeom prst="rect">
             <a:avLst/>
@@ -5298,17 +5426,17 @@
           <a:p>
             <a:pPr algn="l">
               <a:lnSpc>
-                <a:spcPct val="105000"/>
-              </a:lnSpc>
-            </a:pPr>
-            <a:r>
-              <a:rPr sz="3800" b="1">
+                <a:spcPct val="100000"/>
+              </a:lnSpc>
+            </a:pPr>
+            <a:r>
+              <a:rPr sz="3400" b="1">
                 <a:solidFill>
                   <a:srgbClr val="F5F7FA"/>
                 </a:solidFill>
                 <a:latin typeface="Arial"/>
               </a:rPr>
-              <a:t>Verify the value your Project 2 claims - on your own.</a:t>
+              <a:t>Verification is a beginning, not a verdict</a:t>
             </a:r>
           </a:p>
         </p:txBody>
@@ -5321,8 +5449,8 @@
         </p:nvSpPr>
         <p:spPr>
           <a:xfrm>
-            <a:off x="658368" y="3611880"/>
-            <a:ext cx="10972800" cy="1737360"/>
+            <a:off x="658368" y="2286000"/>
+            <a:ext cx="10881360" cy="3657600"/>
           </a:xfrm>
           <a:prstGeom prst="rect">
             <a:avLst/>
@@ -5337,7 +5465,39 @@
           <a:p>
             <a:pPr algn="l">
               <a:lnSpc>
-                <a:spcPct val="135000"/>
+                <a:spcPct val="112000"/>
+              </a:lnSpc>
+            </a:pPr>
+            <a:r>
+              <a:rPr sz="2100" b="0">
+                <a:solidFill>
+                  <a:srgbClr val="F5F7FA"/>
+                </a:solidFill>
+                <a:latin typeface="Arial"/>
+              </a:rPr>
+              <a:t>If the design does not produce the value change, that is not a failure - it is your next design brief.</a:t>
+            </a:r>
+          </a:p>
+          <a:p>
+            <a:pPr algn="l">
+              <a:lnSpc>
+                <a:spcPct val="112000"/>
+              </a:lnSpc>
+            </a:pPr>
+            <a:r>
+              <a:rPr sz="2000" b="0">
+                <a:solidFill>
+                  <a:srgbClr val="F5F7FA"/>
+                </a:solidFill>
+                <a:latin typeface="Arial"/>
+              </a:rPr>
+              <a:t/>
+            </a:r>
+          </a:p>
+          <a:p>
+            <a:pPr algn="l">
+              <a:lnSpc>
+                <a:spcPct val="112000"/>
               </a:lnSpc>
             </a:pPr>
             <a:r>
@@ -5347,167 +5507,105 @@
                 </a:solidFill>
                 <a:latin typeface="Arial"/>
               </a:rPr>
-              <a:t>→  </a:t>
+              <a:t>Monday</a:t>
             </a:r>
             <a:r>
               <a:rPr sz="1900" b="0">
                 <a:solidFill>
+                  <a:srgbClr val="F5F7FA"/>
+                </a:solidFill>
+                <a:latin typeface="Arial"/>
+              </a:rPr>
+              <a:t> closed the Project 2 cycle - the nitty-gritty to fix.</a:t>
+            </a:r>
+          </a:p>
+          <a:p>
+            <a:pPr algn="l">
+              <a:lnSpc>
+                <a:spcPct val="112000"/>
+              </a:lnSpc>
+            </a:pPr>
+            <a:r>
+              <a:rPr sz="1900" b="1">
+                <a:solidFill>
+                  <a:srgbClr val="00FF41"/>
+                </a:solidFill>
+                <a:latin typeface="Arial"/>
+              </a:rPr>
+              <a:t>Today</a:t>
+            </a:r>
+            <a:r>
+              <a:rPr sz="1900" b="0">
+                <a:solidFill>
+                  <a:srgbClr val="F5F7FA"/>
+                </a:solidFill>
+                <a:latin typeface="Arial"/>
+              </a:rPr>
+              <a:t> opens the next - what OTHER design could achieve this value?</a:t>
+            </a:r>
+          </a:p>
+          <a:p>
+            <a:pPr algn="l">
+              <a:lnSpc>
+                <a:spcPct val="112000"/>
+              </a:lnSpc>
+            </a:pPr>
+            <a:r>
+              <a:rPr sz="1900" b="1">
+                <a:solidFill>
+                  <a:srgbClr val="00FF41"/>
+                </a:solidFill>
+                <a:latin typeface="Arial"/>
+              </a:rPr>
+              <a:t>Wed + Thu</a:t>
+            </a:r>
+            <a:r>
+              <a:rPr sz="1900" b="0">
+                <a:solidFill>
+                  <a:srgbClr val="F5F7FA"/>
+                </a:solidFill>
+                <a:latin typeface="Arial"/>
+              </a:rPr>
+              <a:t> are that iteration - same value, better design.</a:t>
+            </a:r>
+          </a:p>
+          <a:p>
+            <a:pPr algn="l">
+              <a:lnSpc>
+                <a:spcPct val="112000"/>
+              </a:lnSpc>
+            </a:pPr>
+            <a:r>
+              <a:rPr sz="2000" b="0">
+                <a:solidFill>
+                  <a:srgbClr val="F5F7FA"/>
+                </a:solidFill>
+                <a:latin typeface="Arial"/>
+              </a:rPr>
+              <a:t/>
+            </a:r>
+          </a:p>
+          <a:p>
+            <a:pPr algn="l">
+              <a:lnSpc>
+                <a:spcPct val="112000"/>
+              </a:lnSpc>
+            </a:pPr>
+            <a:r>
+              <a:rPr sz="1700" b="0">
+                <a:solidFill>
                   <a:srgbClr val="8A94A6"/>
                 </a:solidFill>
                 <a:latin typeface="Arial"/>
               </a:rPr>
-              <a:t>Operationalize the value your team claimed - what is concretely true if it is present?</a:t>
-            </a:r>
-          </a:p>
-          <a:p>
-            <a:pPr algn="l">
-              <a:lnSpc>
-                <a:spcPct val="135000"/>
-              </a:lnSpc>
-            </a:pPr>
-            <a:r>
-              <a:rPr sz="1900" b="1">
-                <a:solidFill>
-                  <a:srgbClr val="00FF41"/>
-                </a:solidFill>
-                <a:latin typeface="Arial"/>
-              </a:rPr>
-              <a:t>→  </a:t>
-            </a:r>
-            <a:r>
-              <a:rPr sz="1900" b="0">
-                <a:solidFill>
-                  <a:srgbClr val="8A94A6"/>
-                </a:solidFill>
-                <a:latin typeface="Arial"/>
-              </a:rPr>
-              <a:t>Pick a lens (behavior / understanding / affect) + one validated instrument, and run a small check.</a:t>
-            </a:r>
-          </a:p>
-          <a:p>
-            <a:pPr algn="l">
-              <a:lnSpc>
-                <a:spcPct val="135000"/>
-              </a:lnSpc>
-            </a:pPr>
-            <a:r>
-              <a:rPr sz="1900" b="1">
-                <a:solidFill>
-                  <a:srgbClr val="00FF41"/>
-                </a:solidFill>
-                <a:latin typeface="Arial"/>
-              </a:rPr>
-              <a:t>→  </a:t>
-            </a:r>
-            <a:r>
-              <a:rPr sz="1900" b="0">
-                <a:solidFill>
-                  <a:srgbClr val="8A94A6"/>
-                </a:solidFill>
-                <a:latin typeface="Arial"/>
-              </a:rPr>
-              <a:t>Verdict: does it deliver? For whom? Who is excluded? Then the ONE fix you would make.</a:t>
-            </a:r>
-          </a:p>
-        </p:txBody>
-      </p:sp>
-      <p:sp>
-        <p:nvSpPr>
-          <p:cNvPr id="6" name="Rounded Rectangle 5"/>
-          <p:cNvSpPr/>
-          <p:nvPr/>
-        </p:nvSpPr>
-        <p:spPr>
-          <a:xfrm>
-            <a:off x="640080" y="5532120"/>
-            <a:ext cx="10911535" cy="658368"/>
-          </a:xfrm>
-          <a:prstGeom prst="roundRect">
-            <a:avLst/>
-          </a:prstGeom>
-          <a:solidFill>
-            <a:srgbClr val="151B26"/>
-          </a:solidFill>
-          <a:ln w="19050">
-            <a:solidFill>
-              <a:srgbClr val="00FF41"/>
-            </a:solidFill>
-          </a:ln>
-          <a:effectLst/>
-        </p:spPr>
-        <p:style>
-          <a:lnRef idx="1">
-            <a:schemeClr val="accent1"/>
-          </a:lnRef>
-          <a:fillRef idx="3">
-            <a:schemeClr val="accent1"/>
-          </a:fillRef>
-          <a:effectRef idx="2">
-            <a:schemeClr val="accent1"/>
-          </a:effectRef>
-          <a:fontRef idx="minor">
-            <a:schemeClr val="lt1"/>
-          </a:fontRef>
-        </p:style>
-        <p:txBody>
-          <a:bodyPr rtlCol="0" anchor="ctr"/>
-          <a:lstStyle/>
-          <a:p>
-            <a:pPr algn="ctr"/>
-          </a:p>
-        </p:txBody>
-      </p:sp>
-      <p:sp>
-        <p:nvSpPr>
-          <p:cNvPr id="7" name="TextBox 6"/>
-          <p:cNvSpPr txBox="1"/>
-          <p:nvPr/>
-        </p:nvSpPr>
-        <p:spPr>
-          <a:xfrm>
-            <a:off x="914400" y="5532120"/>
-            <a:ext cx="10362895" cy="658368"/>
-          </a:xfrm>
-          <a:prstGeom prst="rect">
-            <a:avLst/>
-          </a:prstGeom>
-          <a:noFill/>
-        </p:spPr>
-        <p:txBody>
-          <a:bodyPr wrap="square" anchor="ctr">
-            <a:spAutoFit/>
-          </a:bodyPr>
-          <a:lstStyle/>
-          <a:p>
-            <a:pPr algn="l">
-              <a:lnSpc>
-                <a:spcPct val="100000"/>
-              </a:lnSpc>
-            </a:pPr>
-            <a:r>
-              <a:rPr sz="1600" b="1">
-                <a:solidFill>
-                  <a:srgbClr val="00FF41"/>
-                </a:solidFill>
-                <a:latin typeface="Arial"/>
-              </a:rPr>
-              <a:t>▶  </a:t>
-            </a:r>
-            <a:r>
-              <a:rPr sz="1600" b="1">
-                <a:solidFill>
-                  <a:srgbClr val="F5F7FA"/>
-                </a:solidFill>
-                <a:latin typeface="Arial"/>
-              </a:rPr>
-              <a:t>Individual - on the group's Project 2 - deliverable = your value-verification report (vibe-report.md)</a:t>
-            </a:r>
-          </a:p>
-        </p:txBody>
-      </p:sp>
-      <p:sp>
-        <p:nvSpPr>
-          <p:cNvPr id="8" name="TextBox 7"/>
+              <a:t>You keep your value all the way to the end of the summer school. Change the design, not the commitment.</a:t>
+            </a:r>
+          </a:p>
+        </p:txBody>
+      </p:sp>
+      <p:sp>
+        <p:nvSpPr>
+          <p:cNvPr id="6" name="TextBox 5"/>
           <p:cNvSpPr txBox="1"/>
           <p:nvPr/>
         </p:nvSpPr>
@@ -5604,7 +5702,7 @@
                 </a:solidFill>
                 <a:latin typeface="Courier New"/>
               </a:rPr>
-              <a:t>SOURCES</a:t>
+              <a:t>TODAY'S GUEST - ACCESSIBILITY</a:t>
             </a:r>
           </a:p>
         </p:txBody>
@@ -5661,8 +5759,8 @@
         </p:nvSpPr>
         <p:spPr>
           <a:xfrm>
-            <a:off x="640080" y="1024128"/>
-            <a:ext cx="10972800" cy="731520"/>
+            <a:off x="640080" y="1188720"/>
+            <a:ext cx="10972800" cy="1097280"/>
           </a:xfrm>
           <a:prstGeom prst="rect">
             <a:avLst/>
@@ -5681,13 +5779,13 @@
               </a:lnSpc>
             </a:pPr>
             <a:r>
-              <a:rPr sz="2800" b="1">
+              <a:rPr sz="3400" b="1">
                 <a:solidFill>
                   <a:srgbClr val="F5F7FA"/>
                 </a:solidFill>
                 <a:latin typeface="Arial"/>
               </a:rPr>
-              <a:t>Verify, cite</a:t>
+              <a:t>Accessibility is a value you can verify</a:t>
             </a:r>
           </a:p>
         </p:txBody>
@@ -5700,8 +5798,8 @@
         </p:nvSpPr>
         <p:spPr>
           <a:xfrm>
-            <a:off x="640080" y="1874519"/>
-            <a:ext cx="10911535" cy="402336"/>
+            <a:off x="658368" y="2286000"/>
+            <a:ext cx="10881360" cy="3657600"/>
           </a:xfrm>
           <a:prstGeom prst="rect">
             <a:avLst/>
@@ -5716,26 +5814,140 @@
           <a:p>
             <a:pPr algn="l">
               <a:lnSpc>
-                <a:spcPct val="100000"/>
-              </a:lnSpc>
-            </a:pPr>
-            <a:r>
-              <a:rPr sz="1250" b="1">
+                <a:spcPct val="112000"/>
+              </a:lnSpc>
+            </a:pPr>
+            <a:r>
+              <a:rPr sz="1900" b="0">
                 <a:solidFill>
                   <a:srgbClr val="F5F7FA"/>
                 </a:solidFill>
                 <a:latin typeface="Arial"/>
               </a:rPr>
-              <a:t>Flanagan &amp; Nissenbaum - Values at Play in Digital Games (MIT Press, 2014)  —  </a:t>
-            </a:r>
-            <a:r>
-              <a:rPr sz="1100" b="0">
+              <a:t>Accessibility runs cleanly through all three lenses - and shows how a value becomes concrete, testable requirements:</a:t>
+            </a:r>
+          </a:p>
+          <a:p>
+            <a:pPr algn="l">
+              <a:lnSpc>
+                <a:spcPct val="112000"/>
+              </a:lnSpc>
+            </a:pPr>
+            <a:r>
+              <a:rPr sz="2000" b="0">
+                <a:solidFill>
+                  <a:srgbClr val="F5F7FA"/>
+                </a:solidFill>
+                <a:latin typeface="Arial"/>
+              </a:rPr>
+              <a:t/>
+            </a:r>
+          </a:p>
+          <a:p>
+            <a:pPr algn="l">
+              <a:lnSpc>
+                <a:spcPct val="112000"/>
+              </a:lnSpc>
+            </a:pPr>
+            <a:r>
+              <a:rPr sz="1900" b="1">
                 <a:solidFill>
                   <a:srgbClr val="00FF41"/>
                 </a:solidFill>
-                <a:latin typeface="Courier New"/>
-              </a:rPr>
-              <a:t>mitpress.mit.edu</a:t>
+                <a:latin typeface="Arial"/>
+              </a:rPr>
+              <a:t>Behavior</a:t>
+            </a:r>
+            <a:r>
+              <a:rPr sz="1900" b="0">
+                <a:solidFill>
+                  <a:srgbClr val="F5F7FA"/>
+                </a:solidFill>
+                <a:latin typeface="Arial"/>
+              </a:rPr>
+              <a:t> - can a screen-reader user actually complete the task?</a:t>
+            </a:r>
+          </a:p>
+          <a:p>
+            <a:pPr algn="l">
+              <a:lnSpc>
+                <a:spcPct val="112000"/>
+              </a:lnSpc>
+            </a:pPr>
+            <a:r>
+              <a:rPr sz="1900" b="1">
+                <a:solidFill>
+                  <a:srgbClr val="00FF41"/>
+                </a:solidFill>
+                <a:latin typeface="Arial"/>
+              </a:rPr>
+              <a:t>Understanding</a:t>
+            </a:r>
+            <a:r>
+              <a:rPr sz="1900" b="0">
+                <a:solidFill>
+                  <a:srgbClr val="F5F7FA"/>
+                </a:solidFill>
+                <a:latin typeface="Arial"/>
+              </a:rPr>
+              <a:t> - are labels, states, and errors legible to everyone?</a:t>
+            </a:r>
+          </a:p>
+          <a:p>
+            <a:pPr algn="l">
+              <a:lnSpc>
+                <a:spcPct val="112000"/>
+              </a:lnSpc>
+            </a:pPr>
+            <a:r>
+              <a:rPr sz="1900" b="1">
+                <a:solidFill>
+                  <a:srgbClr val="00FF41"/>
+                </a:solidFill>
+                <a:latin typeface="Arial"/>
+              </a:rPr>
+              <a:t>Affect</a:t>
+            </a:r>
+            <a:r>
+              <a:rPr sz="1900" b="0">
+                <a:solidFill>
+                  <a:srgbClr val="F5F7FA"/>
+                </a:solidFill>
+                <a:latin typeface="Arial"/>
+              </a:rPr>
+              <a:t> - does the design respect the user, or work around them?</a:t>
+            </a:r>
+          </a:p>
+          <a:p>
+            <a:pPr algn="l">
+              <a:lnSpc>
+                <a:spcPct val="112000"/>
+              </a:lnSpc>
+            </a:pPr>
+            <a:r>
+              <a:rPr sz="2000" b="0">
+                <a:solidFill>
+                  <a:srgbClr val="F5F7FA"/>
+                </a:solidFill>
+                <a:latin typeface="Arial"/>
+              </a:rPr>
+              <a:t/>
+            </a:r>
+          </a:p>
+          <a:p>
+            <a:pPr algn="l">
+              <a:lnSpc>
+                <a:spcPct val="112000"/>
+              </a:lnSpc>
+            </a:pPr>
+            <a:r>
+              <a:rPr sz="1700" b="0">
+                <a:solidFill>
+                  <a:srgbClr val="8A94A6"/>
+                </a:solidFill>
+                <a:latin typeface="Arial"/>
+              </a:rPr>
+              <a:t>Borrow today's guest lecture as a lens - even if your value is something else.</a:t>
             </a:r>
           </a:p>
         </p:txBody>
@@ -5748,8 +5960,8 @@
         </p:nvSpPr>
         <p:spPr>
           <a:xfrm>
-            <a:off x="640080" y="2276855"/>
-            <a:ext cx="10911535" cy="402336"/>
+            <a:off x="640080" y="6355080"/>
+            <a:ext cx="10972800" cy="365760"/>
           </a:xfrm>
           <a:prstGeom prst="rect">
             <a:avLst/>
@@ -5768,36 +5980,53 @@
               </a:lnSpc>
             </a:pPr>
             <a:r>
-              <a:rPr sz="1250" b="1">
-                <a:solidFill>
-                  <a:srgbClr val="F5F7FA"/>
-                </a:solidFill>
-                <a:latin typeface="Arial"/>
-              </a:rPr>
-              <a:t>VAP verification framework - S. Engelmann &amp; H. Nissenbaum  —  </a:t>
-            </a:r>
-            <a:r>
-              <a:rPr sz="1100" b="0">
-                <a:solidFill>
-                  <a:srgbClr val="00FF41"/>
+              <a:rPr sz="1000" b="0">
+                <a:solidFill>
+                  <a:srgbClr val="5A6474"/>
                 </a:solidFill>
                 <a:latin typeface="Courier New"/>
               </a:rPr>
-              <a:t>Cornell Tech - INFO 5010 (PiTech Ethics)</a:t>
-            </a:r>
-          </a:p>
-        </p:txBody>
-      </p:sp>
-      <p:sp>
-        <p:nvSpPr>
-          <p:cNvPr id="7" name="TextBox 6"/>
+              <a:t>Good Code, Good Vibes · TECHIE 1121 · Cornell Tech · Summer 2026</a:t>
+            </a:r>
+          </a:p>
+        </p:txBody>
+      </p:sp>
+    </p:spTree>
+  </p:cSld>
+  <p:clrMapOvr>
+    <a:masterClrMapping/>
+  </p:clrMapOvr>
+</p:sld>
+</file>
+
+<file path=ppt/slides/slide15.xml><?xml version="1.0" encoding="utf-8"?>
+<p:sld xmlns:a="http://schemas.openxmlformats.org/drawingml/2006/main" xmlns:p="http://schemas.openxmlformats.org/presentationml/2006/main" xmlns:r="http://schemas.openxmlformats.org/officeDocument/2006/relationships">
+  <p:cSld>
+    <p:bg>
+      <p:bgPr>
+        <a:solidFill>
+          <a:srgbClr val="0B0E14"/>
+        </a:solidFill>
+        <a:effectLst/>
+      </p:bgPr>
+    </p:bg>
+    <p:spTree>
+      <p:nvGrpSpPr>
+        <p:cNvPr id="1" name=""/>
+        <p:cNvGrpSpPr/>
+        <p:nvPr/>
+      </p:nvGrpSpPr>
+      <p:grpSpPr/>
+      <p:sp>
+        <p:nvSpPr>
+          <p:cNvPr id="2" name="TextBox 1"/>
           <p:cNvSpPr txBox="1"/>
           <p:nvPr/>
         </p:nvSpPr>
         <p:spPr>
           <a:xfrm>
-            <a:off x="640080" y="2679191"/>
-            <a:ext cx="10911535" cy="402336"/>
+            <a:off x="640080" y="502920"/>
+            <a:ext cx="10058400" cy="365760"/>
           </a:xfrm>
           <a:prstGeom prst="rect">
             <a:avLst/>
@@ -5816,36 +6045,71 @@
               </a:lnSpc>
             </a:pPr>
             <a:r>
-              <a:rPr sz="1250" b="1">
-                <a:solidFill>
-                  <a:srgbClr val="F5F7FA"/>
-                </a:solidFill>
-                <a:latin typeface="Arial"/>
-              </a:rPr>
-              <a:t>UEQ - User Experience Questionnaire  —  </a:t>
-            </a:r>
-            <a:r>
-              <a:rPr sz="1100" b="0">
+              <a:rPr sz="1300" b="1">
                 <a:solidFill>
                   <a:srgbClr val="00FF41"/>
                 </a:solidFill>
                 <a:latin typeface="Courier New"/>
               </a:rPr>
-              <a:t>ueq-online.org</a:t>
-            </a:r>
-          </a:p>
-        </p:txBody>
-      </p:sp>
-      <p:sp>
-        <p:nvSpPr>
-          <p:cNvPr id="8" name="TextBox 7"/>
+              <a:t>ACTIVITY - TODAY (TEAM)</a:t>
+            </a:r>
+          </a:p>
+        </p:txBody>
+      </p:sp>
+      <p:sp>
+        <p:nvSpPr>
+          <p:cNvPr id="3" name="Rectangle 2"/>
+          <p:cNvSpPr/>
+          <p:nvPr/>
+        </p:nvSpPr>
+        <p:spPr>
+          <a:xfrm>
+            <a:off x="640080" y="932688"/>
+            <a:ext cx="822960" cy="73152"/>
+          </a:xfrm>
+          <a:prstGeom prst="rect">
+            <a:avLst/>
+          </a:prstGeom>
+          <a:solidFill>
+            <a:srgbClr val="00FF41"/>
+          </a:solidFill>
+          <a:ln>
+            <a:noFill/>
+          </a:ln>
+          <a:effectLst/>
+        </p:spPr>
+        <p:style>
+          <a:lnRef idx="1">
+            <a:schemeClr val="accent1"/>
+          </a:lnRef>
+          <a:fillRef idx="3">
+            <a:schemeClr val="accent1"/>
+          </a:fillRef>
+          <a:effectRef idx="2">
+            <a:schemeClr val="accent1"/>
+          </a:effectRef>
+          <a:fontRef idx="minor">
+            <a:schemeClr val="lt1"/>
+          </a:fontRef>
+        </p:style>
+        <p:txBody>
+          <a:bodyPr rtlCol="0" anchor="ctr"/>
+          <a:lstStyle/>
+          <a:p>
+            <a:pPr algn="ctr"/>
+          </a:p>
+        </p:txBody>
+      </p:sp>
+      <p:sp>
+        <p:nvSpPr>
+          <p:cNvPr id="4" name="TextBox 3"/>
           <p:cNvSpPr txBox="1"/>
           <p:nvPr/>
         </p:nvSpPr>
         <p:spPr>
           <a:xfrm>
-            <a:off x="640080" y="3081527"/>
-            <a:ext cx="10911535" cy="402336"/>
+            <a:off x="640080" y="1325880"/>
+            <a:ext cx="10972800" cy="1828800"/>
           </a:xfrm>
           <a:prstGeom prst="rect">
             <a:avLst/>
@@ -5860,40 +6124,31 @@
           <a:p>
             <a:pPr algn="l">
               <a:lnSpc>
-                <a:spcPct val="100000"/>
-              </a:lnSpc>
-            </a:pPr>
-            <a:r>
-              <a:rPr sz="1250" b="1">
+                <a:spcPct val="105000"/>
+              </a:lnSpc>
+            </a:pPr>
+            <a:r>
+              <a:rPr sz="3800" b="1">
                 <a:solidFill>
                   <a:srgbClr val="F5F7FA"/>
                 </a:solidFill>
                 <a:latin typeface="Arial"/>
               </a:rPr>
-              <a:t>HRI Scale Database - Finding the Perfect Scale  —  </a:t>
-            </a:r>
-            <a:r>
-              <a:rPr sz="1100" b="0">
-                <a:solidFill>
-                  <a:srgbClr val="00FF41"/>
-                </a:solidFill>
-                <a:latin typeface="Courier New"/>
-              </a:rPr>
-              <a:t>hriscaledatabase.psychology.gmu.edu</a:t>
-            </a:r>
-          </a:p>
-        </p:txBody>
-      </p:sp>
-      <p:sp>
-        <p:nvSpPr>
-          <p:cNvPr id="9" name="TextBox 8"/>
+              <a:t>Verify the value your Project 2 claims - together.</a:t>
+            </a:r>
+          </a:p>
+        </p:txBody>
+      </p:sp>
+      <p:sp>
+        <p:nvSpPr>
+          <p:cNvPr id="5" name="TextBox 4"/>
           <p:cNvSpPr txBox="1"/>
           <p:nvPr/>
         </p:nvSpPr>
         <p:spPr>
           <a:xfrm>
-            <a:off x="640080" y="3483863"/>
-            <a:ext cx="10911535" cy="402336"/>
+            <a:off x="658368" y="3611880"/>
+            <a:ext cx="10972800" cy="1737360"/>
           </a:xfrm>
           <a:prstGeom prst="rect">
             <a:avLst/>
@@ -5908,40 +6163,209 @@
           <a:p>
             <a:pPr algn="l">
               <a:lnSpc>
+                <a:spcPct val="135000"/>
+              </a:lnSpc>
+            </a:pPr>
+            <a:r>
+              <a:rPr sz="1900" b="1">
+                <a:solidFill>
+                  <a:srgbClr val="00FF41"/>
+                </a:solidFill>
+                <a:latin typeface="Arial"/>
+              </a:rPr>
+              <a:t>→  </a:t>
+            </a:r>
+            <a:r>
+              <a:rPr sz="1900" b="0">
+                <a:solidFill>
+                  <a:srgbClr val="8A94A6"/>
+                </a:solidFill>
+                <a:latin typeface="Arial"/>
+              </a:rPr>
+              <a:t>Which reading did you actually design for? List 3+ readings, pick the one you built.</a:t>
+            </a:r>
+          </a:p>
+          <a:p>
+            <a:pPr algn="l">
+              <a:lnSpc>
+                <a:spcPct val="135000"/>
+              </a:lnSpc>
+            </a:pPr>
+            <a:r>
+              <a:rPr sz="1900" b="1">
+                <a:solidFill>
+                  <a:srgbClr val="00FF41"/>
+                </a:solidFill>
+                <a:latin typeface="Arial"/>
+              </a:rPr>
+              <a:t>→  </a:t>
+            </a:r>
+            <a:r>
+              <a:rPr sz="1900" b="0">
+                <a:solidFill>
+                  <a:srgbClr val="8A94A6"/>
+                </a:solidFill>
+                <a:latin typeface="Arial"/>
+              </a:rPr>
+              <a:t>Research it: what has been tried, what worked, what FAILED. Bring 2-3 real sources.</a:t>
+            </a:r>
+          </a:p>
+          <a:p>
+            <a:pPr algn="l">
+              <a:lnSpc>
+                <a:spcPct val="135000"/>
+              </a:lnSpc>
+            </a:pPr>
+            <a:r>
+              <a:rPr sz="1900" b="1">
+                <a:solidFill>
+                  <a:srgbClr val="00FF41"/>
+                </a:solidFill>
+                <a:latin typeface="Arial"/>
+              </a:rPr>
+              <a:t>→  </a:t>
+            </a:r>
+            <a:r>
+              <a:rPr sz="1900" b="0">
+                <a:solidFill>
+                  <a:srgbClr val="8A94A6"/>
+                </a:solidFill>
+                <a:latin typeface="Arial"/>
+              </a:rPr>
+              <a:t>Run the check your reading demands - capture what you observed, not what you hoped.</a:t>
+            </a:r>
+          </a:p>
+          <a:p>
+            <a:pPr algn="l">
+              <a:lnSpc>
+                <a:spcPct val="135000"/>
+              </a:lnSpc>
+            </a:pPr>
+            <a:r>
+              <a:rPr sz="1900" b="1">
+                <a:solidFill>
+                  <a:srgbClr val="00FF41"/>
+                </a:solidFill>
+                <a:latin typeface="Arial"/>
+              </a:rPr>
+              <a:t>→  </a:t>
+            </a:r>
+            <a:r>
+              <a:rPr sz="1900" b="0">
+                <a:solidFill>
+                  <a:srgbClr val="8A94A6"/>
+                </a:solidFill>
+                <a:latin typeface="Arial"/>
+              </a:rPr>
+              <a:t>Then: what OTHER design could achieve the value, and what should the next cycle discover?</a:t>
+            </a:r>
+          </a:p>
+        </p:txBody>
+      </p:sp>
+      <p:sp>
+        <p:nvSpPr>
+          <p:cNvPr id="6" name="Rounded Rectangle 5"/>
+          <p:cNvSpPr/>
+          <p:nvPr/>
+        </p:nvSpPr>
+        <p:spPr>
+          <a:xfrm>
+            <a:off x="640080" y="5532120"/>
+            <a:ext cx="10911535" cy="658368"/>
+          </a:xfrm>
+          <a:prstGeom prst="roundRect">
+            <a:avLst/>
+          </a:prstGeom>
+          <a:solidFill>
+            <a:srgbClr val="151B26"/>
+          </a:solidFill>
+          <a:ln w="19050">
+            <a:solidFill>
+              <a:srgbClr val="00FF41"/>
+            </a:solidFill>
+          </a:ln>
+          <a:effectLst/>
+        </p:spPr>
+        <p:style>
+          <a:lnRef idx="1">
+            <a:schemeClr val="accent1"/>
+          </a:lnRef>
+          <a:fillRef idx="3">
+            <a:schemeClr val="accent1"/>
+          </a:fillRef>
+          <a:effectRef idx="2">
+            <a:schemeClr val="accent1"/>
+          </a:effectRef>
+          <a:fontRef idx="minor">
+            <a:schemeClr val="lt1"/>
+          </a:fontRef>
+        </p:style>
+        <p:txBody>
+          <a:bodyPr rtlCol="0" anchor="ctr"/>
+          <a:lstStyle/>
+          <a:p>
+            <a:pPr algn="ctr"/>
+          </a:p>
+        </p:txBody>
+      </p:sp>
+      <p:sp>
+        <p:nvSpPr>
+          <p:cNvPr id="7" name="TextBox 6"/>
+          <p:cNvSpPr txBox="1"/>
+          <p:nvPr/>
+        </p:nvSpPr>
+        <p:spPr>
+          <a:xfrm>
+            <a:off x="914400" y="5532120"/>
+            <a:ext cx="10362895" cy="658368"/>
+          </a:xfrm>
+          <a:prstGeom prst="rect">
+            <a:avLst/>
+          </a:prstGeom>
+          <a:noFill/>
+        </p:spPr>
+        <p:txBody>
+          <a:bodyPr wrap="square" anchor="ctr">
+            <a:spAutoFit/>
+          </a:bodyPr>
+          <a:lstStyle/>
+          <a:p>
+            <a:pPr algn="l">
+              <a:lnSpc>
                 <a:spcPct val="100000"/>
               </a:lnSpc>
             </a:pPr>
             <a:r>
-              <a:rPr sz="1250" b="1">
+              <a:rPr sz="1600" b="1">
+                <a:solidFill>
+                  <a:srgbClr val="00FF41"/>
+                </a:solidFill>
+                <a:latin typeface="Arial"/>
+              </a:rPr>
+              <a:t>▶  </a:t>
+            </a:r>
+            <a:r>
+              <a:rPr sz="1600" b="1">
                 <a:solidFill>
                   <a:srgbClr val="F5F7FA"/>
                 </a:solidFill>
                 <a:latin typeface="Arial"/>
               </a:rPr>
-              <a:t>METUX / Self-Determination scales  —  </a:t>
-            </a:r>
-            <a:r>
-              <a:rPr sz="1100" b="0">
-                <a:solidFill>
-                  <a:srgbClr val="00FF41"/>
-                </a:solidFill>
-                <a:latin typeface="Courier New"/>
-              </a:rPr>
-              <a:t>selfdeterminationtheory.org/metux-scales</a:t>
-            </a:r>
-          </a:p>
-        </p:txBody>
-      </p:sp>
-      <p:sp>
-        <p:nvSpPr>
-          <p:cNvPr id="10" name="TextBox 9"/>
+              <a:t>Team board + everyone writes their own reflection - you carry this value into the final project</a:t>
+            </a:r>
+          </a:p>
+        </p:txBody>
+      </p:sp>
+      <p:sp>
+        <p:nvSpPr>
+          <p:cNvPr id="8" name="TextBox 7"/>
           <p:cNvSpPr txBox="1"/>
           <p:nvPr/>
         </p:nvSpPr>
         <p:spPr>
           <a:xfrm>
-            <a:off x="640080" y="3886199"/>
-            <a:ext cx="10911535" cy="402336"/>
+            <a:off x="640080" y="6355080"/>
+            <a:ext cx="10972800" cy="365760"/>
           </a:xfrm>
           <a:prstGeom prst="rect">
             <a:avLst/>
@@ -5960,36 +6384,53 @@
               </a:lnSpc>
             </a:pPr>
             <a:r>
-              <a:rPr sz="1250" b="1">
-                <a:solidFill>
-                  <a:srgbClr val="F5F7FA"/>
-                </a:solidFill>
-                <a:latin typeface="Arial"/>
-              </a:rPr>
-              <a:t>Vibed Slop Detector + impeccable.style slop rules  —  </a:t>
-            </a:r>
-            <a:r>
-              <a:rPr sz="1100" b="0">
-                <a:solidFill>
-                  <a:srgbClr val="00FF41"/>
+              <a:rPr sz="1000" b="0">
+                <a:solidFill>
+                  <a:srgbClr val="5A6474"/>
                 </a:solidFill>
                 <a:latin typeface="Courier New"/>
               </a:rPr>
-              <a:t>github.com/HaukeCornell/Vibed-Slop-Detector</a:t>
-            </a:r>
-          </a:p>
-        </p:txBody>
-      </p:sp>
-      <p:sp>
-        <p:nvSpPr>
-          <p:cNvPr id="11" name="TextBox 10"/>
+              <a:t>Good Code, Good Vibes · TECHIE 1121 · Cornell Tech · Summer 2026</a:t>
+            </a:r>
+          </a:p>
+        </p:txBody>
+      </p:sp>
+    </p:spTree>
+  </p:cSld>
+  <p:clrMapOvr>
+    <a:masterClrMapping/>
+  </p:clrMapOvr>
+</p:sld>
+</file>
+
+<file path=ppt/slides/slide16.xml><?xml version="1.0" encoding="utf-8"?>
+<p:sld xmlns:a="http://schemas.openxmlformats.org/drawingml/2006/main" xmlns:p="http://schemas.openxmlformats.org/presentationml/2006/main" xmlns:r="http://schemas.openxmlformats.org/officeDocument/2006/relationships">
+  <p:cSld>
+    <p:bg>
+      <p:bgPr>
+        <a:solidFill>
+          <a:srgbClr val="0B0E14"/>
+        </a:solidFill>
+        <a:effectLst/>
+      </p:bgPr>
+    </p:bg>
+    <p:spTree>
+      <p:nvGrpSpPr>
+        <p:cNvPr id="1" name=""/>
+        <p:cNvGrpSpPr/>
+        <p:nvPr/>
+      </p:nvGrpSpPr>
+      <p:grpSpPr/>
+      <p:sp>
+        <p:nvSpPr>
+          <p:cNvPr id="2" name="TextBox 1"/>
           <p:cNvSpPr txBox="1"/>
           <p:nvPr/>
         </p:nvSpPr>
         <p:spPr>
           <a:xfrm>
-            <a:off x="640080" y="4288535"/>
-            <a:ext cx="10911535" cy="402336"/>
+            <a:off x="640080" y="502920"/>
+            <a:ext cx="10058400" cy="365760"/>
           </a:xfrm>
           <a:prstGeom prst="rect">
             <a:avLst/>
@@ -6008,36 +6449,71 @@
               </a:lnSpc>
             </a:pPr>
             <a:r>
-              <a:rPr sz="1250" b="1">
-                <a:solidFill>
-                  <a:srgbClr val="F5F7FA"/>
-                </a:solidFill>
-                <a:latin typeface="Arial"/>
-              </a:rPr>
-              <a:t>Romero et al. 2026 - Usable but Conventional (UEQ-S)  —  </a:t>
-            </a:r>
-            <a:r>
-              <a:rPr sz="1100" b="0">
+              <a:rPr sz="1300" b="1">
                 <a:solidFill>
                   <a:srgbClr val="00FF41"/>
                 </a:solidFill>
                 <a:latin typeface="Courier New"/>
               </a:rPr>
-              <a:t>arxiv.org/abs/2605.15124</a:t>
-            </a:r>
-          </a:p>
-        </p:txBody>
-      </p:sp>
-      <p:sp>
-        <p:nvSpPr>
-          <p:cNvPr id="12" name="TextBox 11"/>
+              <a:t>SOURCES</a:t>
+            </a:r>
+          </a:p>
+        </p:txBody>
+      </p:sp>
+      <p:sp>
+        <p:nvSpPr>
+          <p:cNvPr id="3" name="Rectangle 2"/>
+          <p:cNvSpPr/>
+          <p:nvPr/>
+        </p:nvSpPr>
+        <p:spPr>
+          <a:xfrm>
+            <a:off x="640080" y="932688"/>
+            <a:ext cx="822960" cy="73152"/>
+          </a:xfrm>
+          <a:prstGeom prst="rect">
+            <a:avLst/>
+          </a:prstGeom>
+          <a:solidFill>
+            <a:srgbClr val="00FF41"/>
+          </a:solidFill>
+          <a:ln>
+            <a:noFill/>
+          </a:ln>
+          <a:effectLst/>
+        </p:spPr>
+        <p:style>
+          <a:lnRef idx="1">
+            <a:schemeClr val="accent1"/>
+          </a:lnRef>
+          <a:fillRef idx="3">
+            <a:schemeClr val="accent1"/>
+          </a:fillRef>
+          <a:effectRef idx="2">
+            <a:schemeClr val="accent1"/>
+          </a:effectRef>
+          <a:fontRef idx="minor">
+            <a:schemeClr val="lt1"/>
+          </a:fontRef>
+        </p:style>
+        <p:txBody>
+          <a:bodyPr rtlCol="0" anchor="ctr"/>
+          <a:lstStyle/>
+          <a:p>
+            <a:pPr algn="ctr"/>
+          </a:p>
+        </p:txBody>
+      </p:sp>
+      <p:sp>
+        <p:nvSpPr>
+          <p:cNvPr id="4" name="TextBox 3"/>
           <p:cNvSpPr txBox="1"/>
           <p:nvPr/>
         </p:nvSpPr>
         <p:spPr>
           <a:xfrm>
-            <a:off x="640080" y="4690871"/>
-            <a:ext cx="10911535" cy="402336"/>
+            <a:off x="640080" y="1024128"/>
+            <a:ext cx="10972800" cy="731520"/>
           </a:xfrm>
           <a:prstGeom prst="rect">
             <a:avLst/>
@@ -6056,13 +6532,52 @@
               </a:lnSpc>
             </a:pPr>
             <a:r>
+              <a:rPr sz="2800" b="1">
+                <a:solidFill>
+                  <a:srgbClr val="F5F7FA"/>
+                </a:solidFill>
+                <a:latin typeface="Arial"/>
+              </a:rPr>
+              <a:t>Verify, cite</a:t>
+            </a:r>
+          </a:p>
+        </p:txBody>
+      </p:sp>
+      <p:sp>
+        <p:nvSpPr>
+          <p:cNvPr id="5" name="TextBox 4"/>
+          <p:cNvSpPr txBox="1"/>
+          <p:nvPr/>
+        </p:nvSpPr>
+        <p:spPr>
+          <a:xfrm>
+            <a:off x="640080" y="1874519"/>
+            <a:ext cx="10911535" cy="402336"/>
+          </a:xfrm>
+          <a:prstGeom prst="rect">
+            <a:avLst/>
+          </a:prstGeom>
+          <a:noFill/>
+        </p:spPr>
+        <p:txBody>
+          <a:bodyPr wrap="square" anchor="t">
+            <a:spAutoFit/>
+          </a:bodyPr>
+          <a:lstStyle/>
+          <a:p>
+            <a:pPr algn="l">
+              <a:lnSpc>
+                <a:spcPct val="100000"/>
+              </a:lnSpc>
+            </a:pPr>
+            <a:r>
               <a:rPr sz="1250" b="1">
                 <a:solidFill>
                   <a:srgbClr val="F5F7FA"/>
                 </a:solidFill>
                 <a:latin typeface="Arial"/>
               </a:rPr>
-              <a:t>Sandhaus, Rhomberg, Nissenbaum 2026 - Indecent Persuasion (CHIWORK)  —  </a:t>
+              <a:t>Flanagan &amp; Nissenbaum - Values at Play in Digital Games (MIT Press, 2014)  —  </a:t>
             </a:r>
             <a:r>
               <a:rPr sz="1100" b="0">
@@ -6071,7 +6586,343 @@
                 </a:solidFill>
                 <a:latin typeface="Courier New"/>
               </a:rPr>
-              <a:t>osf.io/nw2tj</a:t>
+              <a:t>mitpress.mit.edu</a:t>
+            </a:r>
+          </a:p>
+        </p:txBody>
+      </p:sp>
+      <p:sp>
+        <p:nvSpPr>
+          <p:cNvPr id="6" name="TextBox 5"/>
+          <p:cNvSpPr txBox="1"/>
+          <p:nvPr/>
+        </p:nvSpPr>
+        <p:spPr>
+          <a:xfrm>
+            <a:off x="640080" y="2276855"/>
+            <a:ext cx="10911535" cy="402336"/>
+          </a:xfrm>
+          <a:prstGeom prst="rect">
+            <a:avLst/>
+          </a:prstGeom>
+          <a:noFill/>
+        </p:spPr>
+        <p:txBody>
+          <a:bodyPr wrap="square" anchor="t">
+            <a:spAutoFit/>
+          </a:bodyPr>
+          <a:lstStyle/>
+          <a:p>
+            <a:pPr algn="l">
+              <a:lnSpc>
+                <a:spcPct val="100000"/>
+              </a:lnSpc>
+            </a:pPr>
+            <a:r>
+              <a:rPr sz="1250" b="1">
+                <a:solidFill>
+                  <a:srgbClr val="F5F7FA"/>
+                </a:solidFill>
+                <a:latin typeface="Arial"/>
+              </a:rPr>
+              <a:t>VAP verification framework - S. Engelmann &amp; H. Nissenbaum  —  </a:t>
+            </a:r>
+            <a:r>
+              <a:rPr sz="1100" b="0">
+                <a:solidFill>
+                  <a:srgbClr val="00FF41"/>
+                </a:solidFill>
+                <a:latin typeface="Courier New"/>
+              </a:rPr>
+              <a:t>Cornell Tech - INFO 5010 (PiTech Ethics)</a:t>
+            </a:r>
+          </a:p>
+        </p:txBody>
+      </p:sp>
+      <p:sp>
+        <p:nvSpPr>
+          <p:cNvPr id="7" name="TextBox 6"/>
+          <p:cNvSpPr txBox="1"/>
+          <p:nvPr/>
+        </p:nvSpPr>
+        <p:spPr>
+          <a:xfrm>
+            <a:off x="640080" y="2679191"/>
+            <a:ext cx="10911535" cy="402336"/>
+          </a:xfrm>
+          <a:prstGeom prst="rect">
+            <a:avLst/>
+          </a:prstGeom>
+          <a:noFill/>
+        </p:spPr>
+        <p:txBody>
+          <a:bodyPr wrap="square" anchor="t">
+            <a:spAutoFit/>
+          </a:bodyPr>
+          <a:lstStyle/>
+          <a:p>
+            <a:pPr algn="l">
+              <a:lnSpc>
+                <a:spcPct val="100000"/>
+              </a:lnSpc>
+            </a:pPr>
+            <a:r>
+              <a:rPr sz="1250" b="1">
+                <a:solidFill>
+                  <a:srgbClr val="F5F7FA"/>
+                </a:solidFill>
+                <a:latin typeface="Arial"/>
+              </a:rPr>
+              <a:t>Google Scholar (+ AI search) - find what has been tried  —  </a:t>
+            </a:r>
+            <a:r>
+              <a:rPr sz="1100" b="0">
+                <a:solidFill>
+                  <a:srgbClr val="00FF41"/>
+                </a:solidFill>
+                <a:latin typeface="Courier New"/>
+              </a:rPr>
+              <a:t>scholar.google.com</a:t>
+            </a:r>
+          </a:p>
+        </p:txBody>
+      </p:sp>
+      <p:sp>
+        <p:nvSpPr>
+          <p:cNvPr id="8" name="TextBox 7"/>
+          <p:cNvSpPr txBox="1"/>
+          <p:nvPr/>
+        </p:nvSpPr>
+        <p:spPr>
+          <a:xfrm>
+            <a:off x="640080" y="3081527"/>
+            <a:ext cx="10911535" cy="402336"/>
+          </a:xfrm>
+          <a:prstGeom prst="rect">
+            <a:avLst/>
+          </a:prstGeom>
+          <a:noFill/>
+        </p:spPr>
+        <p:txBody>
+          <a:bodyPr wrap="square" anchor="t">
+            <a:spAutoFit/>
+          </a:bodyPr>
+          <a:lstStyle/>
+          <a:p>
+            <a:pPr algn="l">
+              <a:lnSpc>
+                <a:spcPct val="100000"/>
+              </a:lnSpc>
+            </a:pPr>
+            <a:r>
+              <a:rPr sz="1250" b="1">
+                <a:solidFill>
+                  <a:srgbClr val="F5F7FA"/>
+                </a:solidFill>
+                <a:latin typeface="Arial"/>
+              </a:rPr>
+              <a:t>Figma - design research methods library  —  </a:t>
+            </a:r>
+            <a:r>
+              <a:rPr sz="1100" b="0">
+                <a:solidFill>
+                  <a:srgbClr val="00FF41"/>
+                </a:solidFill>
+                <a:latin typeface="Courier New"/>
+              </a:rPr>
+              <a:t>figma.com/resource-library/design-research/</a:t>
+            </a:r>
+          </a:p>
+        </p:txBody>
+      </p:sp>
+      <p:sp>
+        <p:nvSpPr>
+          <p:cNvPr id="9" name="TextBox 8"/>
+          <p:cNvSpPr txBox="1"/>
+          <p:nvPr/>
+        </p:nvSpPr>
+        <p:spPr>
+          <a:xfrm>
+            <a:off x="640080" y="3483863"/>
+            <a:ext cx="10911535" cy="402336"/>
+          </a:xfrm>
+          <a:prstGeom prst="rect">
+            <a:avLst/>
+          </a:prstGeom>
+          <a:noFill/>
+        </p:spPr>
+        <p:txBody>
+          <a:bodyPr wrap="square" anchor="t">
+            <a:spAutoFit/>
+          </a:bodyPr>
+          <a:lstStyle/>
+          <a:p>
+            <a:pPr algn="l">
+              <a:lnSpc>
+                <a:spcPct val="100000"/>
+              </a:lnSpc>
+            </a:pPr>
+            <a:r>
+              <a:rPr sz="1250" b="1">
+                <a:solidFill>
+                  <a:srgbClr val="F5F7FA"/>
+                </a:solidFill>
+                <a:latin typeface="Arial"/>
+              </a:rPr>
+              <a:t>UEQ - User Experience Questionnaire  —  </a:t>
+            </a:r>
+            <a:r>
+              <a:rPr sz="1100" b="0">
+                <a:solidFill>
+                  <a:srgbClr val="00FF41"/>
+                </a:solidFill>
+                <a:latin typeface="Courier New"/>
+              </a:rPr>
+              <a:t>ueq-online.org</a:t>
+            </a:r>
+          </a:p>
+        </p:txBody>
+      </p:sp>
+      <p:sp>
+        <p:nvSpPr>
+          <p:cNvPr id="10" name="TextBox 9"/>
+          <p:cNvSpPr txBox="1"/>
+          <p:nvPr/>
+        </p:nvSpPr>
+        <p:spPr>
+          <a:xfrm>
+            <a:off x="640080" y="3886199"/>
+            <a:ext cx="10911535" cy="402336"/>
+          </a:xfrm>
+          <a:prstGeom prst="rect">
+            <a:avLst/>
+          </a:prstGeom>
+          <a:noFill/>
+        </p:spPr>
+        <p:txBody>
+          <a:bodyPr wrap="square" anchor="t">
+            <a:spAutoFit/>
+          </a:bodyPr>
+          <a:lstStyle/>
+          <a:p>
+            <a:pPr algn="l">
+              <a:lnSpc>
+                <a:spcPct val="100000"/>
+              </a:lnSpc>
+            </a:pPr>
+            <a:r>
+              <a:rPr sz="1250" b="1">
+                <a:solidFill>
+                  <a:srgbClr val="F5F7FA"/>
+                </a:solidFill>
+                <a:latin typeface="Arial"/>
+              </a:rPr>
+              <a:t>HRI Scale Database - Finding the Perfect Scale  —  </a:t>
+            </a:r>
+            <a:r>
+              <a:rPr sz="1100" b="0">
+                <a:solidFill>
+                  <a:srgbClr val="00FF41"/>
+                </a:solidFill>
+                <a:latin typeface="Courier New"/>
+              </a:rPr>
+              <a:t>hriscaledatabase.psychology.gmu.edu</a:t>
+            </a:r>
+          </a:p>
+        </p:txBody>
+      </p:sp>
+      <p:sp>
+        <p:nvSpPr>
+          <p:cNvPr id="11" name="TextBox 10"/>
+          <p:cNvSpPr txBox="1"/>
+          <p:nvPr/>
+        </p:nvSpPr>
+        <p:spPr>
+          <a:xfrm>
+            <a:off x="640080" y="4288535"/>
+            <a:ext cx="10911535" cy="402336"/>
+          </a:xfrm>
+          <a:prstGeom prst="rect">
+            <a:avLst/>
+          </a:prstGeom>
+          <a:noFill/>
+        </p:spPr>
+        <p:txBody>
+          <a:bodyPr wrap="square" anchor="t">
+            <a:spAutoFit/>
+          </a:bodyPr>
+          <a:lstStyle/>
+          <a:p>
+            <a:pPr algn="l">
+              <a:lnSpc>
+                <a:spcPct val="100000"/>
+              </a:lnSpc>
+            </a:pPr>
+            <a:r>
+              <a:rPr sz="1250" b="1">
+                <a:solidFill>
+                  <a:srgbClr val="F5F7FA"/>
+                </a:solidFill>
+                <a:latin typeface="Arial"/>
+              </a:rPr>
+              <a:t>METUX / Self-Determination scales  —  </a:t>
+            </a:r>
+            <a:r>
+              <a:rPr sz="1100" b="0">
+                <a:solidFill>
+                  <a:srgbClr val="00FF41"/>
+                </a:solidFill>
+                <a:latin typeface="Courier New"/>
+              </a:rPr>
+              <a:t>selfdeterminationtheory.org/metux-scales</a:t>
+            </a:r>
+          </a:p>
+        </p:txBody>
+      </p:sp>
+      <p:sp>
+        <p:nvSpPr>
+          <p:cNvPr id="12" name="TextBox 11"/>
+          <p:cNvSpPr txBox="1"/>
+          <p:nvPr/>
+        </p:nvSpPr>
+        <p:spPr>
+          <a:xfrm>
+            <a:off x="640080" y="4690871"/>
+            <a:ext cx="10911535" cy="402336"/>
+          </a:xfrm>
+          <a:prstGeom prst="rect">
+            <a:avLst/>
+          </a:prstGeom>
+          <a:noFill/>
+        </p:spPr>
+        <p:txBody>
+          <a:bodyPr wrap="square" anchor="t">
+            <a:spAutoFit/>
+          </a:bodyPr>
+          <a:lstStyle/>
+          <a:p>
+            <a:pPr algn="l">
+              <a:lnSpc>
+                <a:spcPct val="100000"/>
+              </a:lnSpc>
+            </a:pPr>
+            <a:r>
+              <a:rPr sz="1250" b="1">
+                <a:solidFill>
+                  <a:srgbClr val="F5F7FA"/>
+                </a:solidFill>
+                <a:latin typeface="Arial"/>
+              </a:rPr>
+              <a:t>Vibed Slop Detector + impeccable.style slop rules  —  </a:t>
+            </a:r>
+            <a:r>
+              <a:rPr sz="1100" b="0">
+                <a:solidFill>
+                  <a:srgbClr val="00FF41"/>
+                </a:solidFill>
+                <a:latin typeface="Courier New"/>
+              </a:rPr>
+              <a:t>github.com/HaukeCornell/Vibed-Slop-Detector</a:t>
             </a:r>
           </a:p>
         </p:txBody>
@@ -6079,6 +6930,54 @@
       <p:sp>
         <p:nvSpPr>
           <p:cNvPr id="13" name="TextBox 12"/>
+          <p:cNvSpPr txBox="1"/>
+          <p:nvPr/>
+        </p:nvSpPr>
+        <p:spPr>
+          <a:xfrm>
+            <a:off x="640080" y="5093207"/>
+            <a:ext cx="10911535" cy="402336"/>
+          </a:xfrm>
+          <a:prstGeom prst="rect">
+            <a:avLst/>
+          </a:prstGeom>
+          <a:noFill/>
+        </p:spPr>
+        <p:txBody>
+          <a:bodyPr wrap="square" anchor="t">
+            <a:spAutoFit/>
+          </a:bodyPr>
+          <a:lstStyle/>
+          <a:p>
+            <a:pPr algn="l">
+              <a:lnSpc>
+                <a:spcPct val="100000"/>
+              </a:lnSpc>
+            </a:pPr>
+            <a:r>
+              <a:rPr sz="1250" b="1">
+                <a:solidFill>
+                  <a:srgbClr val="F5F7FA"/>
+                </a:solidFill>
+                <a:latin typeface="Arial"/>
+              </a:rPr>
+              <a:t>Romero et al. 2026 - Usable but Conventional (UEQ-S)  —  </a:t>
+            </a:r>
+            <a:r>
+              <a:rPr sz="1100" b="0">
+                <a:solidFill>
+                  <a:srgbClr val="00FF41"/>
+                </a:solidFill>
+                <a:latin typeface="Courier New"/>
+              </a:rPr>
+              <a:t>arxiv.org/abs/2605.15124</a:t>
+            </a:r>
+          </a:p>
+        </p:txBody>
+      </p:sp>
+      <p:sp>
+        <p:nvSpPr>
+          <p:cNvPr id="14" name="TextBox 13"/>
           <p:cNvSpPr txBox="1"/>
           <p:nvPr/>
         </p:nvSpPr>
@@ -6175,7 +7074,7 @@
                 </a:solidFill>
                 <a:latin typeface="Courier New"/>
               </a:rPr>
-              <a:t>THE SECOND TEST</a:t>
+              <a:t>THE TURN</a:t>
             </a:r>
           </a:p>
         </p:txBody>
@@ -6291,49 +7190,49 @@
               </a:lnSpc>
             </a:pPr>
             <a:r>
-              <a:rPr sz="2200" b="0">
+              <a:rPr sz="2100" b="0">
                 <a:solidFill>
                   <a:srgbClr val="F5F7FA"/>
                 </a:solidFill>
                 <a:latin typeface="Arial"/>
               </a:rPr>
-              <a:t>Yesterday: can people </a:t>
-            </a:r>
-            <a:r>
-              <a:rPr sz="2200" b="1">
+              <a:t>Yesterday </a:t>
+            </a:r>
+            <a:r>
+              <a:rPr sz="2100" b="1">
                 <a:solidFill>
                   <a:srgbClr val="00FF41"/>
                 </a:solidFill>
                 <a:latin typeface="Arial"/>
               </a:rPr>
-              <a:t>use</a:t>
-            </a:r>
-            <a:r>
-              <a:rPr sz="2200" b="0">
+              <a:t>closed</a:t>
+            </a:r>
+            <a:r>
+              <a:rPr sz="2100" b="0">
                 <a:solidFill>
                   <a:srgbClr val="F5F7FA"/>
                 </a:solidFill>
                 <a:latin typeface="Arial"/>
               </a:rPr>
-              <a:t> your Project 2? Today: does it deliver the </a:t>
-            </a:r>
-            <a:r>
-              <a:rPr sz="2200" b="1">
+              <a:t> a cycle: usability testing found the nitty-gritty to fix. Today </a:t>
+            </a:r>
+            <a:r>
+              <a:rPr sz="2100" b="1">
                 <a:solidFill>
                   <a:srgbClr val="00FF41"/>
                 </a:solidFill>
                 <a:latin typeface="Arial"/>
               </a:rPr>
-              <a:t>value your team claimed</a:t>
-            </a:r>
-            <a:r>
-              <a:rPr sz="2200" b="0">
+              <a:t>opens</a:t>
+            </a:r>
+            <a:r>
+              <a:rPr sz="2100" b="0">
                 <a:solidFill>
                   <a:srgbClr val="F5F7FA"/>
                 </a:solidFill>
                 <a:latin typeface="Arial"/>
               </a:rPr>
-              <a:t> - for the person you claimed to serve?</a:t>
+              <a:t> the next one.</a:t>
             </a:r>
           </a:p>
           <a:p>
@@ -6359,13 +7258,54 @@
               </a:lnSpc>
             </a:pPr>
             <a:r>
-              <a:rPr sz="1900" b="0">
+              <a:rPr sz="2100" b="0">
+                <a:solidFill>
+                  <a:srgbClr val="F5F7FA"/>
+                </a:solidFill>
+                <a:latin typeface="Arial"/>
+              </a:rPr>
+              <a:t>Not "can they use it?" but </a:t>
+            </a:r>
+            <a:r>
+              <a:rPr sz="2100" b="1">
+                <a:solidFill>
+                  <a:srgbClr val="00FF41"/>
+                </a:solidFill>
+                <a:latin typeface="Arial"/>
+              </a:rPr>
+              <a:t>does this design actually produce the value change we claimed?</a:t>
+            </a:r>
+          </a:p>
+          <a:p>
+            <a:pPr algn="l">
+              <a:lnSpc>
+                <a:spcPct val="112000"/>
+              </a:lnSpc>
+            </a:pPr>
+            <a:r>
+              <a:rPr sz="2000" b="0">
+                <a:solidFill>
+                  <a:srgbClr val="F5F7FA"/>
+                </a:solidFill>
+                <a:latin typeface="Arial"/>
+              </a:rPr>
+              <a:t/>
+            </a:r>
+          </a:p>
+          <a:p>
+            <a:pPr algn="l">
+              <a:lnSpc>
+                <a:spcPct val="112000"/>
+              </a:lnSpc>
+            </a:pPr>
+            <a:r>
+              <a:rPr sz="1800" b="0">
                 <a:solidFill>
                   <a:srgbClr val="8A94A6"/>
                 </a:solidFill>
                 <a:latin typeface="Arial"/>
               </a:rPr>
-              <a:t>A tool can be flawless to use and still fail its value - quietly nudging, excluding, or manipulating the very person it says it helps.</a:t>
+              <a:t>The honest answer is often no - or not the way we assumed. That is exactly when you start considering other designs.</a:t>
             </a:r>
           </a:p>
         </p:txBody>
@@ -6707,7 +7647,7 @@
                 </a:solidFill>
                 <a:latin typeface="Arial"/>
               </a:rPr>
-              <a:t>"Assessing whether efforts to integrate values have succeeded." Cyclical - ask at every step.</a:t>
+              <a:t>Cyclical - verification is not the end. It feeds the next Discovery.</a:t>
             </a:r>
           </a:p>
         </p:txBody>
@@ -6894,7 +7834,7 @@
                 </a:solidFill>
                 <a:latin typeface="Courier New"/>
               </a:rPr>
-              <a:t>STEP 1 - OPERATIONALIZE</a:t>
+              <a:t>OPERATIONALIZE FIRST</a:t>
             </a:r>
           </a:p>
         </p:txBody>
@@ -7010,13 +7950,29 @@
               </a:lnSpc>
             </a:pPr>
             <a:r>
+              <a:rPr sz="2100" b="0">
+                <a:solidFill>
+                  <a:srgbClr val="F5F7FA"/>
+                </a:solidFill>
+                <a:latin typeface="Arial"/>
+              </a:rPr>
+              <a:t>A value is too abstract to test directly. Define it in operational terms first - say what is concretely true if it is present.</a:t>
+            </a:r>
+          </a:p>
+          <a:p>
+            <a:pPr algn="l">
+              <a:lnSpc>
+                <a:spcPct val="112000"/>
+              </a:lnSpc>
+            </a:pPr>
+            <a:r>
               <a:rPr sz="2000" b="0">
                 <a:solidFill>
                   <a:srgbClr val="F5F7FA"/>
                 </a:solidFill>
                 <a:latin typeface="Arial"/>
               </a:rPr>
-              <a:t>A value is too abstract to test directly. Define it in operational terms first - say what is concretely true if it is present:</a:t>
+              <a:t/>
             </a:r>
           </a:p>
           <a:p>
@@ -7026,6 +7982,22 @@
               </a:lnSpc>
             </a:pPr>
             <a:r>
+              <a:rPr sz="1900" b="0">
+                <a:solidFill>
+                  <a:srgbClr val="8A94A6"/>
+                </a:solidFill>
+                <a:latin typeface="Arial"/>
+              </a:rPr>
+              <a:t>And here is the part that decides your whole study:</a:t>
+            </a:r>
+          </a:p>
+          <a:p>
+            <a:pPr algn="l">
+              <a:lnSpc>
+                <a:spcPct val="112000"/>
+              </a:lnSpc>
+            </a:pPr>
+            <a:r>
               <a:rPr sz="2000" b="0">
                 <a:solidFill>
                   <a:srgbClr val="F5F7FA"/>
@@ -7042,104 +8014,13 @@
               </a:lnSpc>
             </a:pPr>
             <a:r>
-              <a:rPr sz="1900" b="1">
+              <a:rPr sz="2400" b="1">
                 <a:solidFill>
                   <a:srgbClr val="00FF41"/>
                 </a:solidFill>
                 <a:latin typeface="Arial"/>
               </a:rPr>
-              <a:t>Privacy</a:t>
-            </a:r>
-            <a:r>
-              <a:rPr sz="1900" b="0">
-                <a:solidFill>
-                  <a:srgbClr val="F5F7FA"/>
-                </a:solidFill>
-                <a:latin typeface="Arial"/>
-              </a:rPr>
-              <a:t> = control?  secrecy?  contextual integrity?</a:t>
-            </a:r>
-          </a:p>
-          <a:p>
-            <a:pPr algn="l">
-              <a:lnSpc>
-                <a:spcPct val="112000"/>
-              </a:lnSpc>
-            </a:pPr>
-            <a:r>
-              <a:rPr sz="1900" b="1">
-                <a:solidFill>
-                  <a:srgbClr val="00FF41"/>
-                </a:solidFill>
-                <a:latin typeface="Arial"/>
-              </a:rPr>
-              <a:t>Fairness</a:t>
-            </a:r>
-            <a:r>
-              <a:rPr sz="1900" b="0">
-                <a:solidFill>
-                  <a:srgbClr val="F5F7FA"/>
-                </a:solidFill>
-                <a:latin typeface="Arial"/>
-              </a:rPr>
-              <a:t> = equal access?  or equal outcome?</a:t>
-            </a:r>
-          </a:p>
-          <a:p>
-            <a:pPr algn="l">
-              <a:lnSpc>
-                <a:spcPct val="112000"/>
-              </a:lnSpc>
-            </a:pPr>
-            <a:r>
-              <a:rPr sz="1900" b="1">
-                <a:solidFill>
-                  <a:srgbClr val="00FF41"/>
-                </a:solidFill>
-                <a:latin typeface="Arial"/>
-              </a:rPr>
-              <a:t>Autonomy</a:t>
-            </a:r>
-            <a:r>
-              <a:rPr sz="1900" b="0">
-                <a:solidFill>
-                  <a:srgbClr val="F5F7FA"/>
-                </a:solidFill>
-                <a:latin typeface="Arial"/>
-              </a:rPr>
-              <a:t> = real choices?  no manipulation?  the freedom to leave?</a:t>
-            </a:r>
-          </a:p>
-          <a:p>
-            <a:pPr algn="l">
-              <a:lnSpc>
-                <a:spcPct val="112000"/>
-              </a:lnSpc>
-            </a:pPr>
-            <a:r>
-              <a:rPr sz="2000" b="0">
-                <a:solidFill>
-                  <a:srgbClr val="F5F7FA"/>
-                </a:solidFill>
-                <a:latin typeface="Arial"/>
-              </a:rPr>
-              <a:t/>
-            </a:r>
-          </a:p>
-          <a:p>
-            <a:pPr algn="l">
-              <a:lnSpc>
-                <a:spcPct val="112000"/>
-              </a:lnSpc>
-            </a:pPr>
-            <a:r>
-              <a:rPr sz="1700" b="0">
-                <a:solidFill>
-                  <a:srgbClr val="8A94A6"/>
-                </a:solidFill>
-                <a:latin typeface="Arial"/>
-              </a:rPr>
-              <a:t>Pick your reading. If you don't, the AI's default definition wins.</a:t>
+              <a:t>how you read the value determines how you verify it.</a:t>
             </a:r>
           </a:p>
         </p:txBody>
@@ -7243,21 +8124,65 @@
                 </a:solidFill>
                 <a:latin typeface="Courier New"/>
               </a:rPr>
-              <a:t>STEP 2 - VERIFY</a:t>
-            </a:r>
-          </a:p>
-        </p:txBody>
-      </p:sp>
-      <p:sp>
-        <p:nvSpPr>
-          <p:cNvPr id="3" name="TextBox 2"/>
+              <a:t>THE CORE MOVE</a:t>
+            </a:r>
+          </a:p>
+        </p:txBody>
+      </p:sp>
+      <p:sp>
+        <p:nvSpPr>
+          <p:cNvPr id="3" name="Rectangle 2"/>
+          <p:cNvSpPr/>
+          <p:nvPr/>
+        </p:nvSpPr>
+        <p:spPr>
+          <a:xfrm>
+            <a:off x="640080" y="932688"/>
+            <a:ext cx="822960" cy="73152"/>
+          </a:xfrm>
+          <a:prstGeom prst="rect">
+            <a:avLst/>
+          </a:prstGeom>
+          <a:solidFill>
+            <a:srgbClr val="00FF41"/>
+          </a:solidFill>
+          <a:ln>
+            <a:noFill/>
+          </a:ln>
+          <a:effectLst/>
+        </p:spPr>
+        <p:style>
+          <a:lnRef idx="1">
+            <a:schemeClr val="accent1"/>
+          </a:lnRef>
+          <a:fillRef idx="3">
+            <a:schemeClr val="accent1"/>
+          </a:fillRef>
+          <a:effectRef idx="2">
+            <a:schemeClr val="accent1"/>
+          </a:effectRef>
+          <a:fontRef idx="minor">
+            <a:schemeClr val="lt1"/>
+          </a:fontRef>
+        </p:style>
+        <p:txBody>
+          <a:bodyPr rtlCol="0" anchor="ctr"/>
+          <a:lstStyle/>
+          <a:p>
+            <a:pPr algn="ctr"/>
+          </a:p>
+        </p:txBody>
+      </p:sp>
+      <p:sp>
+        <p:nvSpPr>
+          <p:cNvPr id="4" name="TextBox 3"/>
           <p:cNvSpPr txBox="1"/>
           <p:nvPr/>
         </p:nvSpPr>
         <p:spPr>
           <a:xfrm>
-            <a:off x="1097280" y="548640"/>
-            <a:ext cx="2743200" cy="1828800"/>
+            <a:off x="640080" y="1188720"/>
+            <a:ext cx="10972800" cy="914400"/>
           </a:xfrm>
           <a:prstGeom prst="rect">
             <a:avLst/>
@@ -7276,27 +8201,115 @@
               </a:lnSpc>
             </a:pPr>
             <a:r>
-              <a:rPr sz="12000" b="1">
-                <a:solidFill>
-                  <a:srgbClr val="00FF41"/>
-                </a:solidFill>
-                <a:latin typeface="Arial"/>
-              </a:rPr>
-              <a:t>?</a:t>
-            </a:r>
-          </a:p>
-        </p:txBody>
-      </p:sp>
-      <p:sp>
-        <p:nvSpPr>
-          <p:cNvPr id="4" name="TextBox 3"/>
+              <a:rPr sz="3200" b="1">
+                <a:solidFill>
+                  <a:srgbClr val="F5F7FA"/>
+                </a:solidFill>
+                <a:latin typeface="Arial"/>
+              </a:rPr>
+              <a:t>Same value. Three readings. Three different studies.</a:t>
+            </a:r>
+          </a:p>
+        </p:txBody>
+      </p:sp>
+      <p:sp>
+        <p:nvSpPr>
+          <p:cNvPr id="5" name="Rounded Rectangle 4"/>
+          <p:cNvSpPr/>
+          <p:nvPr/>
+        </p:nvSpPr>
+        <p:spPr>
+          <a:xfrm>
+            <a:off x="640080" y="2468880"/>
+            <a:ext cx="3393338" cy="3383280"/>
+          </a:xfrm>
+          <a:prstGeom prst="roundRect">
+            <a:avLst/>
+          </a:prstGeom>
+          <a:solidFill>
+            <a:srgbClr val="151B26"/>
+          </a:solidFill>
+          <a:ln>
+            <a:noFill/>
+          </a:ln>
+          <a:effectLst/>
+        </p:spPr>
+        <p:style>
+          <a:lnRef idx="1">
+            <a:schemeClr val="accent1"/>
+          </a:lnRef>
+          <a:fillRef idx="3">
+            <a:schemeClr val="accent1"/>
+          </a:fillRef>
+          <a:effectRef idx="2">
+            <a:schemeClr val="accent1"/>
+          </a:effectRef>
+          <a:fontRef idx="minor">
+            <a:schemeClr val="lt1"/>
+          </a:fontRef>
+        </p:style>
+        <p:txBody>
+          <a:bodyPr rtlCol="0" anchor="ctr"/>
+          <a:lstStyle/>
+          <a:p>
+            <a:pPr algn="ctr"/>
+          </a:p>
+        </p:txBody>
+      </p:sp>
+      <p:sp>
+        <p:nvSpPr>
+          <p:cNvPr id="6" name="Rectangle 5"/>
+          <p:cNvSpPr/>
+          <p:nvPr/>
+        </p:nvSpPr>
+        <p:spPr>
+          <a:xfrm>
+            <a:off x="640080" y="2468880"/>
+            <a:ext cx="3393338" cy="82296"/>
+          </a:xfrm>
+          <a:prstGeom prst="rect">
+            <a:avLst/>
+          </a:prstGeom>
+          <a:solidFill>
+            <a:srgbClr val="00FF41"/>
+          </a:solidFill>
+          <a:ln>
+            <a:noFill/>
+          </a:ln>
+          <a:effectLst/>
+        </p:spPr>
+        <p:style>
+          <a:lnRef idx="1">
+            <a:schemeClr val="accent1"/>
+          </a:lnRef>
+          <a:fillRef idx="3">
+            <a:schemeClr val="accent1"/>
+          </a:fillRef>
+          <a:effectRef idx="2">
+            <a:schemeClr val="accent1"/>
+          </a:effectRef>
+          <a:fontRef idx="minor">
+            <a:schemeClr val="lt1"/>
+          </a:fontRef>
+        </p:style>
+        <p:txBody>
+          <a:bodyPr rtlCol="0" anchor="ctr"/>
+          <a:lstStyle/>
+          <a:p>
+            <a:pPr algn="ctr"/>
+          </a:p>
+        </p:txBody>
+      </p:sp>
+      <p:sp>
+        <p:nvSpPr>
+          <p:cNvPr id="7" name="TextBox 6"/>
           <p:cNvSpPr txBox="1"/>
           <p:nvPr/>
         </p:nvSpPr>
         <p:spPr>
           <a:xfrm>
-            <a:off x="1097280" y="2743200"/>
-            <a:ext cx="10058400" cy="3108960"/>
+            <a:off x="914400" y="2788920"/>
+            <a:ext cx="2844698" cy="457200"/>
           </a:xfrm>
           <a:prstGeom prst="rect">
             <a:avLst/>
@@ -7311,56 +8324,512 @@
           <a:p>
             <a:pPr algn="l">
               <a:lnSpc>
-                <a:spcPct val="112000"/>
-              </a:lnSpc>
-            </a:pPr>
-            <a:r>
-              <a:rPr sz="3000" b="1">
+                <a:spcPct val="100000"/>
+              </a:lnSpc>
+            </a:pPr>
+            <a:r>
+              <a:rPr sz="1200" b="1">
+                <a:solidFill>
+                  <a:srgbClr val="00FF41"/>
+                </a:solidFill>
+                <a:latin typeface="Courier New"/>
+              </a:rPr>
+              <a:t>PRIVACY AS CONTROL</a:t>
+            </a:r>
+          </a:p>
+        </p:txBody>
+      </p:sp>
+      <p:sp>
+        <p:nvSpPr>
+          <p:cNvPr id="8" name="TextBox 7"/>
+          <p:cNvSpPr txBox="1"/>
+          <p:nvPr/>
+        </p:nvSpPr>
+        <p:spPr>
+          <a:xfrm>
+            <a:off x="914400" y="3246120"/>
+            <a:ext cx="2844698" cy="822960"/>
+          </a:xfrm>
+          <a:prstGeom prst="rect">
+            <a:avLst/>
+          </a:prstGeom>
+          <a:noFill/>
+        </p:spPr>
+        <p:txBody>
+          <a:bodyPr wrap="square" anchor="t">
+            <a:spAutoFit/>
+          </a:bodyPr>
+          <a:lstStyle/>
+          <a:p>
+            <a:pPr algn="l">
+              <a:lnSpc>
+                <a:spcPct val="100000"/>
+              </a:lnSpc>
+            </a:pPr>
+            <a:r>
+              <a:rPr sz="2000" b="1">
                 <a:solidFill>
                   <a:srgbClr val="F5F7FA"/>
                 </a:solidFill>
                 <a:latin typeface="Arial"/>
               </a:rPr>
-              <a:t>Did it work?</a:t>
-            </a:r>
-          </a:p>
-          <a:p>
-            <a:pPr algn="l">
-              <a:lnSpc>
-                <a:spcPct val="112000"/>
-              </a:lnSpc>
-            </a:pPr>
-            <a:r>
-              <a:rPr sz="3000" b="1">
+              <a:t>Can they work the settings?</a:t>
+            </a:r>
+          </a:p>
+        </p:txBody>
+      </p:sp>
+      <p:sp>
+        <p:nvSpPr>
+          <p:cNvPr id="9" name="TextBox 8"/>
+          <p:cNvSpPr txBox="1"/>
+          <p:nvPr/>
+        </p:nvSpPr>
+        <p:spPr>
+          <a:xfrm>
+            <a:off x="914400" y="4114800"/>
+            <a:ext cx="2844698" cy="1554480"/>
+          </a:xfrm>
+          <a:prstGeom prst="rect">
+            <a:avLst/>
+          </a:prstGeom>
+          <a:noFill/>
+        </p:spPr>
+        <p:txBody>
+          <a:bodyPr wrap="square" anchor="t">
+            <a:spAutoFit/>
+          </a:bodyPr>
+          <a:lstStyle/>
+          <a:p>
+            <a:pPr algn="l">
+              <a:lnSpc>
+                <a:spcPct val="110000"/>
+              </a:lnSpc>
+            </a:pPr>
+            <a:r>
+              <a:rPr sz="1500" b="0">
+                <a:solidFill>
+                  <a:srgbClr val="8A94A6"/>
+                </a:solidFill>
+                <a:latin typeface="Arial"/>
+              </a:rPr>
+              <a:t>Verify with a usability study - can users actually find and operate the privacy controls?</a:t>
+            </a:r>
+          </a:p>
+        </p:txBody>
+      </p:sp>
+      <p:sp>
+        <p:nvSpPr>
+          <p:cNvPr id="10" name="Rounded Rectangle 9"/>
+          <p:cNvSpPr/>
+          <p:nvPr/>
+        </p:nvSpPr>
+        <p:spPr>
+          <a:xfrm>
+            <a:off x="4399178" y="2468880"/>
+            <a:ext cx="3393338" cy="3383280"/>
+          </a:xfrm>
+          <a:prstGeom prst="roundRect">
+            <a:avLst/>
+          </a:prstGeom>
+          <a:solidFill>
+            <a:srgbClr val="151B26"/>
+          </a:solidFill>
+          <a:ln>
+            <a:noFill/>
+          </a:ln>
+          <a:effectLst/>
+        </p:spPr>
+        <p:style>
+          <a:lnRef idx="1">
+            <a:schemeClr val="accent1"/>
+          </a:lnRef>
+          <a:fillRef idx="3">
+            <a:schemeClr val="accent1"/>
+          </a:fillRef>
+          <a:effectRef idx="2">
+            <a:schemeClr val="accent1"/>
+          </a:effectRef>
+          <a:fontRef idx="minor">
+            <a:schemeClr val="lt1"/>
+          </a:fontRef>
+        </p:style>
+        <p:txBody>
+          <a:bodyPr rtlCol="0" anchor="ctr"/>
+          <a:lstStyle/>
+          <a:p>
+            <a:pPr algn="ctr"/>
+          </a:p>
+        </p:txBody>
+      </p:sp>
+      <p:sp>
+        <p:nvSpPr>
+          <p:cNvPr id="11" name="Rectangle 10"/>
+          <p:cNvSpPr/>
+          <p:nvPr/>
+        </p:nvSpPr>
+        <p:spPr>
+          <a:xfrm>
+            <a:off x="4399178" y="2468880"/>
+            <a:ext cx="3393338" cy="82296"/>
+          </a:xfrm>
+          <a:prstGeom prst="rect">
+            <a:avLst/>
+          </a:prstGeom>
+          <a:solidFill>
+            <a:srgbClr val="00FF41"/>
+          </a:solidFill>
+          <a:ln>
+            <a:noFill/>
+          </a:ln>
+          <a:effectLst/>
+        </p:spPr>
+        <p:style>
+          <a:lnRef idx="1">
+            <a:schemeClr val="accent1"/>
+          </a:lnRef>
+          <a:fillRef idx="3">
+            <a:schemeClr val="accent1"/>
+          </a:fillRef>
+          <a:effectRef idx="2">
+            <a:schemeClr val="accent1"/>
+          </a:effectRef>
+          <a:fontRef idx="minor">
+            <a:schemeClr val="lt1"/>
+          </a:fontRef>
+        </p:style>
+        <p:txBody>
+          <a:bodyPr rtlCol="0" anchor="ctr"/>
+          <a:lstStyle/>
+          <a:p>
+            <a:pPr algn="ctr"/>
+          </a:p>
+        </p:txBody>
+      </p:sp>
+      <p:sp>
+        <p:nvSpPr>
+          <p:cNvPr id="12" name="TextBox 11"/>
+          <p:cNvSpPr txBox="1"/>
+          <p:nvPr/>
+        </p:nvSpPr>
+        <p:spPr>
+          <a:xfrm>
+            <a:off x="4673498" y="2788920"/>
+            <a:ext cx="2844698" cy="457200"/>
+          </a:xfrm>
+          <a:prstGeom prst="rect">
+            <a:avLst/>
+          </a:prstGeom>
+          <a:noFill/>
+        </p:spPr>
+        <p:txBody>
+          <a:bodyPr wrap="square" anchor="t">
+            <a:spAutoFit/>
+          </a:bodyPr>
+          <a:lstStyle/>
+          <a:p>
+            <a:pPr algn="l">
+              <a:lnSpc>
+                <a:spcPct val="100000"/>
+              </a:lnSpc>
+            </a:pPr>
+            <a:r>
+              <a:rPr sz="1200" b="1">
+                <a:solidFill>
+                  <a:srgbClr val="00FF41"/>
+                </a:solidFill>
+                <a:latin typeface="Courier New"/>
+              </a:rPr>
+              <a:t>PRIVACY AS SECURITY</a:t>
+            </a:r>
+          </a:p>
+        </p:txBody>
+      </p:sp>
+      <p:sp>
+        <p:nvSpPr>
+          <p:cNvPr id="13" name="TextBox 12"/>
+          <p:cNvSpPr txBox="1"/>
+          <p:nvPr/>
+        </p:nvSpPr>
+        <p:spPr>
+          <a:xfrm>
+            <a:off x="4673498" y="3246120"/>
+            <a:ext cx="2844698" cy="822960"/>
+          </a:xfrm>
+          <a:prstGeom prst="rect">
+            <a:avLst/>
+          </a:prstGeom>
+          <a:noFill/>
+        </p:spPr>
+        <p:txBody>
+          <a:bodyPr wrap="square" anchor="t">
+            <a:spAutoFit/>
+          </a:bodyPr>
+          <a:lstStyle/>
+          <a:p>
+            <a:pPr algn="l">
+              <a:lnSpc>
+                <a:spcPct val="100000"/>
+              </a:lnSpc>
+            </a:pPr>
+            <a:r>
+              <a:rPr sz="2000" b="1">
                 <a:solidFill>
                   <a:srgbClr val="F5F7FA"/>
                 </a:solidFill>
                 <a:latin typeface="Arial"/>
               </a:rPr>
-              <a:t>Three ways to ask:</a:t>
-            </a:r>
-          </a:p>
-          <a:p>
-            <a:pPr algn="l">
-              <a:lnSpc>
-                <a:spcPct val="112000"/>
-              </a:lnSpc>
-            </a:pPr>
-            <a:r>
-              <a:rPr sz="3000" b="1">
+              <a:t>Do the protections hold?</a:t>
+            </a:r>
+          </a:p>
+        </p:txBody>
+      </p:sp>
+      <p:sp>
+        <p:nvSpPr>
+          <p:cNvPr id="14" name="TextBox 13"/>
+          <p:cNvSpPr txBox="1"/>
+          <p:nvPr/>
+        </p:nvSpPr>
+        <p:spPr>
+          <a:xfrm>
+            <a:off x="4673498" y="4114800"/>
+            <a:ext cx="2844698" cy="1554480"/>
+          </a:xfrm>
+          <a:prstGeom prst="rect">
+            <a:avLst/>
+          </a:prstGeom>
+          <a:noFill/>
+        </p:spPr>
+        <p:txBody>
+          <a:bodyPr wrap="square" anchor="t">
+            <a:spAutoFit/>
+          </a:bodyPr>
+          <a:lstStyle/>
+          <a:p>
+            <a:pPr algn="l">
+              <a:lnSpc>
+                <a:spcPct val="110000"/>
+              </a:lnSpc>
+            </a:pPr>
+            <a:r>
+              <a:rPr sz="1500" b="0">
+                <a:solidFill>
+                  <a:srgbClr val="8A94A6"/>
+                </a:solidFill>
+                <a:latin typeface="Arial"/>
+              </a:rPr>
+              <a:t>Verify with adversarial / safety testing of the privacy features themselves.</a:t>
+            </a:r>
+          </a:p>
+        </p:txBody>
+      </p:sp>
+      <p:sp>
+        <p:nvSpPr>
+          <p:cNvPr id="15" name="Rounded Rectangle 14"/>
+          <p:cNvSpPr/>
+          <p:nvPr/>
+        </p:nvSpPr>
+        <p:spPr>
+          <a:xfrm>
+            <a:off x="8158276" y="2468880"/>
+            <a:ext cx="3393338" cy="3383280"/>
+          </a:xfrm>
+          <a:prstGeom prst="roundRect">
+            <a:avLst/>
+          </a:prstGeom>
+          <a:solidFill>
+            <a:srgbClr val="151B26"/>
+          </a:solidFill>
+          <a:ln>
+            <a:noFill/>
+          </a:ln>
+          <a:effectLst/>
+        </p:spPr>
+        <p:style>
+          <a:lnRef idx="1">
+            <a:schemeClr val="accent1"/>
+          </a:lnRef>
+          <a:fillRef idx="3">
+            <a:schemeClr val="accent1"/>
+          </a:fillRef>
+          <a:effectRef idx="2">
+            <a:schemeClr val="accent1"/>
+          </a:effectRef>
+          <a:fontRef idx="minor">
+            <a:schemeClr val="lt1"/>
+          </a:fontRef>
+        </p:style>
+        <p:txBody>
+          <a:bodyPr rtlCol="0" anchor="ctr"/>
+          <a:lstStyle/>
+          <a:p>
+            <a:pPr algn="ctr"/>
+          </a:p>
+        </p:txBody>
+      </p:sp>
+      <p:sp>
+        <p:nvSpPr>
+          <p:cNvPr id="16" name="Rectangle 15"/>
+          <p:cNvSpPr/>
+          <p:nvPr/>
+        </p:nvSpPr>
+        <p:spPr>
+          <a:xfrm>
+            <a:off x="8158276" y="2468880"/>
+            <a:ext cx="3393338" cy="82296"/>
+          </a:xfrm>
+          <a:prstGeom prst="rect">
+            <a:avLst/>
+          </a:prstGeom>
+          <a:solidFill>
+            <a:srgbClr val="00FF41"/>
+          </a:solidFill>
+          <a:ln>
+            <a:noFill/>
+          </a:ln>
+          <a:effectLst/>
+        </p:spPr>
+        <p:style>
+          <a:lnRef idx="1">
+            <a:schemeClr val="accent1"/>
+          </a:lnRef>
+          <a:fillRef idx="3">
+            <a:schemeClr val="accent1"/>
+          </a:fillRef>
+          <a:effectRef idx="2">
+            <a:schemeClr val="accent1"/>
+          </a:effectRef>
+          <a:fontRef idx="minor">
+            <a:schemeClr val="lt1"/>
+          </a:fontRef>
+        </p:style>
+        <p:txBody>
+          <a:bodyPr rtlCol="0" anchor="ctr"/>
+          <a:lstStyle/>
+          <a:p>
+            <a:pPr algn="ctr"/>
+          </a:p>
+        </p:txBody>
+      </p:sp>
+      <p:sp>
+        <p:nvSpPr>
+          <p:cNvPr id="17" name="TextBox 16"/>
+          <p:cNvSpPr txBox="1"/>
+          <p:nvPr/>
+        </p:nvSpPr>
+        <p:spPr>
+          <a:xfrm>
+            <a:off x="8432596" y="2788920"/>
+            <a:ext cx="2844698" cy="457200"/>
+          </a:xfrm>
+          <a:prstGeom prst="rect">
+            <a:avLst/>
+          </a:prstGeom>
+          <a:noFill/>
+        </p:spPr>
+        <p:txBody>
+          <a:bodyPr wrap="square" anchor="t">
+            <a:spAutoFit/>
+          </a:bodyPr>
+          <a:lstStyle/>
+          <a:p>
+            <a:pPr algn="l">
+              <a:lnSpc>
+                <a:spcPct val="100000"/>
+              </a:lnSpc>
+            </a:pPr>
+            <a:r>
+              <a:rPr sz="1200" b="1">
+                <a:solidFill>
+                  <a:srgbClr val="00FF41"/>
+                </a:solidFill>
+                <a:latin typeface="Courier New"/>
+              </a:rPr>
+              <a:t>AS CONTEXTUAL INTEGRITY</a:t>
+            </a:r>
+          </a:p>
+        </p:txBody>
+      </p:sp>
+      <p:sp>
+        <p:nvSpPr>
+          <p:cNvPr id="18" name="TextBox 17"/>
+          <p:cNvSpPr txBox="1"/>
+          <p:nvPr/>
+        </p:nvSpPr>
+        <p:spPr>
+          <a:xfrm>
+            <a:off x="8432596" y="3246120"/>
+            <a:ext cx="2844698" cy="822960"/>
+          </a:xfrm>
+          <a:prstGeom prst="rect">
+            <a:avLst/>
+          </a:prstGeom>
+          <a:noFill/>
+        </p:spPr>
+        <p:txBody>
+          <a:bodyPr wrap="square" anchor="t">
+            <a:spAutoFit/>
+          </a:bodyPr>
+          <a:lstStyle/>
+          <a:p>
+            <a:pPr algn="l">
+              <a:lnSpc>
+                <a:spcPct val="100000"/>
+              </a:lnSpc>
+            </a:pPr>
+            <a:r>
+              <a:rPr sz="2000" b="1">
                 <a:solidFill>
                   <a:srgbClr val="F5F7FA"/>
                 </a:solidFill>
                 <a:latin typeface="Arial"/>
               </a:rPr>
-              <a:t>behavior - understanding - affect.</a:t>
-            </a:r>
-          </a:p>
-        </p:txBody>
-      </p:sp>
-      <p:sp>
-        <p:nvSpPr>
-          <p:cNvPr id="5" name="TextBox 4"/>
+              <a:t>Do the flows fit the context?</a:t>
+            </a:r>
+          </a:p>
+        </p:txBody>
+      </p:sp>
+      <p:sp>
+        <p:nvSpPr>
+          <p:cNvPr id="19" name="TextBox 18"/>
+          <p:cNvSpPr txBox="1"/>
+          <p:nvPr/>
+        </p:nvSpPr>
+        <p:spPr>
+          <a:xfrm>
+            <a:off x="8432596" y="4114800"/>
+            <a:ext cx="2844698" cy="1554480"/>
+          </a:xfrm>
+          <a:prstGeom prst="rect">
+            <a:avLst/>
+          </a:prstGeom>
+          <a:noFill/>
+        </p:spPr>
+        <p:txBody>
+          <a:bodyPr wrap="square" anchor="t">
+            <a:spAutoFit/>
+          </a:bodyPr>
+          <a:lstStyle/>
+          <a:p>
+            <a:pPr algn="l">
+              <a:lnSpc>
+                <a:spcPct val="110000"/>
+              </a:lnSpc>
+            </a:pPr>
+            <a:r>
+              <a:rPr sz="1500" b="0">
+                <a:solidFill>
+                  <a:srgbClr val="8A94A6"/>
+                </a:solidFill>
+                <a:latin typeface="Arial"/>
+              </a:rPr>
+              <a:t>Trace the information flows - is each one appropriate to where it actually goes?</a:t>
+            </a:r>
+          </a:p>
+        </p:txBody>
+      </p:sp>
+      <p:sp>
+        <p:nvSpPr>
+          <p:cNvPr id="20" name="TextBox 19"/>
           <p:cNvSpPr txBox="1"/>
           <p:nvPr/>
         </p:nvSpPr>
@@ -7457,65 +8926,21 @@
                 </a:solidFill>
                 <a:latin typeface="Courier New"/>
               </a:rPr>
-              <a:t>THE THREE LENSES</a:t>
-            </a:r>
-          </a:p>
-        </p:txBody>
-      </p:sp>
-      <p:sp>
-        <p:nvSpPr>
-          <p:cNvPr id="3" name="Rectangle 2"/>
-          <p:cNvSpPr/>
-          <p:nvPr/>
-        </p:nvSpPr>
-        <p:spPr>
-          <a:xfrm>
-            <a:off x="640080" y="932688"/>
-            <a:ext cx="822960" cy="73152"/>
-          </a:xfrm>
-          <a:prstGeom prst="rect">
-            <a:avLst/>
-          </a:prstGeom>
-          <a:solidFill>
-            <a:srgbClr val="00FF41"/>
-          </a:solidFill>
-          <a:ln>
-            <a:noFill/>
-          </a:ln>
-          <a:effectLst/>
-        </p:spPr>
-        <p:style>
-          <a:lnRef idx="1">
-            <a:schemeClr val="accent1"/>
-          </a:lnRef>
-          <a:fillRef idx="3">
-            <a:schemeClr val="accent1"/>
-          </a:fillRef>
-          <a:effectRef idx="2">
-            <a:schemeClr val="accent1"/>
-          </a:effectRef>
-          <a:fontRef idx="minor">
-            <a:schemeClr val="lt1"/>
-          </a:fontRef>
-        </p:style>
-        <p:txBody>
-          <a:bodyPr rtlCol="0" anchor="ctr"/>
-          <a:lstStyle/>
-          <a:p>
-            <a:pPr algn="ctr"/>
-          </a:p>
-        </p:txBody>
-      </p:sp>
-      <p:sp>
-        <p:nvSpPr>
-          <p:cNvPr id="4" name="TextBox 3"/>
+              <a:t>STEP 1</a:t>
+            </a:r>
+          </a:p>
+        </p:txBody>
+      </p:sp>
+      <p:sp>
+        <p:nvSpPr>
+          <p:cNvPr id="3" name="TextBox 2"/>
           <p:cNvSpPr txBox="1"/>
           <p:nvPr/>
         </p:nvSpPr>
         <p:spPr>
           <a:xfrm>
-            <a:off x="640080" y="1188720"/>
-            <a:ext cx="10972800" cy="914400"/>
+            <a:off x="1097280" y="548640"/>
+            <a:ext cx="2743200" cy="1828800"/>
           </a:xfrm>
           <a:prstGeom prst="rect">
             <a:avLst/>
@@ -7534,115 +8959,27 @@
               </a:lnSpc>
             </a:pPr>
             <a:r>
-              <a:rPr sz="3200" b="1">
-                <a:solidFill>
-                  <a:srgbClr val="F5F7FA"/>
-                </a:solidFill>
-                <a:latin typeface="Arial"/>
-              </a:rPr>
-              <a:t>Verify a value three ways</a:t>
-            </a:r>
-          </a:p>
-        </p:txBody>
-      </p:sp>
-      <p:sp>
-        <p:nvSpPr>
-          <p:cNvPr id="5" name="Rounded Rectangle 4"/>
-          <p:cNvSpPr/>
-          <p:nvPr/>
-        </p:nvSpPr>
-        <p:spPr>
-          <a:xfrm>
-            <a:off x="640080" y="2468880"/>
-            <a:ext cx="3393338" cy="3383280"/>
-          </a:xfrm>
-          <a:prstGeom prst="roundRect">
-            <a:avLst/>
-          </a:prstGeom>
-          <a:solidFill>
-            <a:srgbClr val="151B26"/>
-          </a:solidFill>
-          <a:ln>
-            <a:noFill/>
-          </a:ln>
-          <a:effectLst/>
-        </p:spPr>
-        <p:style>
-          <a:lnRef idx="1">
-            <a:schemeClr val="accent1"/>
-          </a:lnRef>
-          <a:fillRef idx="3">
-            <a:schemeClr val="accent1"/>
-          </a:fillRef>
-          <a:effectRef idx="2">
-            <a:schemeClr val="accent1"/>
-          </a:effectRef>
-          <a:fontRef idx="minor">
-            <a:schemeClr val="lt1"/>
-          </a:fontRef>
-        </p:style>
-        <p:txBody>
-          <a:bodyPr rtlCol="0" anchor="ctr"/>
-          <a:lstStyle/>
-          <a:p>
-            <a:pPr algn="ctr"/>
-          </a:p>
-        </p:txBody>
-      </p:sp>
-      <p:sp>
-        <p:nvSpPr>
-          <p:cNvPr id="6" name="Rectangle 5"/>
-          <p:cNvSpPr/>
-          <p:nvPr/>
-        </p:nvSpPr>
-        <p:spPr>
-          <a:xfrm>
-            <a:off x="640080" y="2468880"/>
-            <a:ext cx="3393338" cy="82296"/>
-          </a:xfrm>
-          <a:prstGeom prst="rect">
-            <a:avLst/>
-          </a:prstGeom>
-          <a:solidFill>
-            <a:srgbClr val="00FF41"/>
-          </a:solidFill>
-          <a:ln>
-            <a:noFill/>
-          </a:ln>
-          <a:effectLst/>
-        </p:spPr>
-        <p:style>
-          <a:lnRef idx="1">
-            <a:schemeClr val="accent1"/>
-          </a:lnRef>
-          <a:fillRef idx="3">
-            <a:schemeClr val="accent1"/>
-          </a:fillRef>
-          <a:effectRef idx="2">
-            <a:schemeClr val="accent1"/>
-          </a:effectRef>
-          <a:fontRef idx="minor">
-            <a:schemeClr val="lt1"/>
-          </a:fontRef>
-        </p:style>
-        <p:txBody>
-          <a:bodyPr rtlCol="0" anchor="ctr"/>
-          <a:lstStyle/>
-          <a:p>
-            <a:pPr algn="ctr"/>
-          </a:p>
-        </p:txBody>
-      </p:sp>
-      <p:sp>
-        <p:nvSpPr>
-          <p:cNvPr id="7" name="TextBox 6"/>
+              <a:rPr sz="12000" b="1">
+                <a:solidFill>
+                  <a:srgbClr val="00FF41"/>
+                </a:solidFill>
+                <a:latin typeface="Arial"/>
+              </a:rPr>
+              <a:t>?</a:t>
+            </a:r>
+          </a:p>
+        </p:txBody>
+      </p:sp>
+      <p:sp>
+        <p:nvSpPr>
+          <p:cNvPr id="4" name="TextBox 3"/>
           <p:cNvSpPr txBox="1"/>
           <p:nvPr/>
         </p:nvSpPr>
         <p:spPr>
           <a:xfrm>
-            <a:off x="914400" y="2788920"/>
-            <a:ext cx="2844698" cy="457200"/>
+            <a:off x="1097280" y="2743200"/>
+            <a:ext cx="10058400" cy="3108960"/>
           </a:xfrm>
           <a:prstGeom prst="rect">
             <a:avLst/>
@@ -7657,31 +8994,63 @@
           <a:p>
             <a:pPr algn="l">
               <a:lnSpc>
-                <a:spcPct val="100000"/>
-              </a:lnSpc>
-            </a:pPr>
-            <a:r>
-              <a:rPr sz="1200" b="1">
-                <a:solidFill>
-                  <a:srgbClr val="00FF41"/>
-                </a:solidFill>
-                <a:latin typeface="Courier New"/>
-              </a:rPr>
-              <a:t>BEHAVIOR</a:t>
-            </a:r>
-          </a:p>
-        </p:txBody>
-      </p:sp>
-      <p:sp>
-        <p:nvSpPr>
-          <p:cNvPr id="8" name="TextBox 7"/>
+                <a:spcPct val="112000"/>
+              </a:lnSpc>
+            </a:pPr>
+            <a:r>
+              <a:rPr sz="3000" b="1">
+                <a:solidFill>
+                  <a:srgbClr val="F5F7FA"/>
+                </a:solidFill>
+                <a:latin typeface="Arial"/>
+              </a:rPr>
+              <a:t>Which reading did you</a:t>
+            </a:r>
+          </a:p>
+          <a:p>
+            <a:pPr algn="l">
+              <a:lnSpc>
+                <a:spcPct val="112000"/>
+              </a:lnSpc>
+            </a:pPr>
+            <a:r>
+              <a:rPr sz="3000" b="1">
+                <a:solidFill>
+                  <a:srgbClr val="F5F7FA"/>
+                </a:solidFill>
+                <a:latin typeface="Arial"/>
+              </a:rPr>
+              <a:t>actually design for?</a:t>
+            </a:r>
+          </a:p>
+          <a:p>
+            <a:pPr algn="l">
+              <a:lnSpc>
+                <a:spcPct val="112000"/>
+              </a:lnSpc>
+            </a:pPr>
+            <a:r>
+              <a:rPr sz="3000" b="1">
+                <a:solidFill>
+                  <a:srgbClr val="F5F7FA"/>
+                </a:solidFill>
+                <a:latin typeface="Arial"/>
+              </a:rPr>
+              <a:t>...and was it just the easiest one?</a:t>
+            </a:r>
+          </a:p>
+        </p:txBody>
+      </p:sp>
+      <p:sp>
+        <p:nvSpPr>
+          <p:cNvPr id="5" name="TextBox 4"/>
           <p:cNvSpPr txBox="1"/>
           <p:nvPr/>
         </p:nvSpPr>
         <p:spPr>
           <a:xfrm>
-            <a:off x="914400" y="3246120"/>
-            <a:ext cx="2844698" cy="822960"/>
+            <a:off x="640080" y="6355080"/>
+            <a:ext cx="10972800" cy="365760"/>
           </a:xfrm>
           <a:prstGeom prst="rect">
             <a:avLst/>
@@ -7700,540 +9069,13 @@
               </a:lnSpc>
             </a:pPr>
             <a:r>
-              <a:rPr sz="2000" b="1">
-                <a:solidFill>
-                  <a:srgbClr val="F5F7FA"/>
-                </a:solidFill>
-                <a:latin typeface="Arial"/>
-              </a:rPr>
-              <a:t>Do they ACT differently?</a:t>
-            </a:r>
-          </a:p>
-        </p:txBody>
-      </p:sp>
-      <p:sp>
-        <p:nvSpPr>
-          <p:cNvPr id="9" name="TextBox 8"/>
-          <p:cNvSpPr txBox="1"/>
-          <p:nvPr/>
-        </p:nvSpPr>
-        <p:spPr>
-          <a:xfrm>
-            <a:off x="914400" y="4114800"/>
-            <a:ext cx="2844698" cy="1554480"/>
-          </a:xfrm>
-          <a:prstGeom prst="rect">
-            <a:avLst/>
-          </a:prstGeom>
-          <a:noFill/>
-        </p:spPr>
-        <p:txBody>
-          <a:bodyPr wrap="square" anchor="t">
-            <a:spAutoFit/>
-          </a:bodyPr>
-          <a:lstStyle/>
-          <a:p>
-            <a:pPr algn="l">
-              <a:lnSpc>
-                <a:spcPct val="110000"/>
-              </a:lnSpc>
-            </a:pPr>
-            <a:r>
-              <a:rPr sz="1500" b="0">
-                <a:solidFill>
-                  <a:srgbClr val="8A94A6"/>
-                </a:solidFill>
-                <a:latin typeface="Arial"/>
-              </a:rPr>
-              <a:t>Action, decision, practice, outcome. Does the design change what people actually do?</a:t>
-            </a:r>
-          </a:p>
-        </p:txBody>
-      </p:sp>
-      <p:sp>
-        <p:nvSpPr>
-          <p:cNvPr id="10" name="Rounded Rectangle 9"/>
-          <p:cNvSpPr/>
-          <p:nvPr/>
-        </p:nvSpPr>
-        <p:spPr>
-          <a:xfrm>
-            <a:off x="4399178" y="2468880"/>
-            <a:ext cx="3393338" cy="3383280"/>
-          </a:xfrm>
-          <a:prstGeom prst="roundRect">
-            <a:avLst/>
-          </a:prstGeom>
-          <a:solidFill>
-            <a:srgbClr val="151B26"/>
-          </a:solidFill>
-          <a:ln>
-            <a:noFill/>
-          </a:ln>
-          <a:effectLst/>
-        </p:spPr>
-        <p:style>
-          <a:lnRef idx="1">
-            <a:schemeClr val="accent1"/>
-          </a:lnRef>
-          <a:fillRef idx="3">
-            <a:schemeClr val="accent1"/>
-          </a:fillRef>
-          <a:effectRef idx="2">
-            <a:schemeClr val="accent1"/>
-          </a:effectRef>
-          <a:fontRef idx="minor">
-            <a:schemeClr val="lt1"/>
-          </a:fontRef>
-        </p:style>
-        <p:txBody>
-          <a:bodyPr rtlCol="0" anchor="ctr"/>
-          <a:lstStyle/>
-          <a:p>
-            <a:pPr algn="ctr"/>
-          </a:p>
-        </p:txBody>
-      </p:sp>
-      <p:sp>
-        <p:nvSpPr>
-          <p:cNvPr id="11" name="Rectangle 10"/>
-          <p:cNvSpPr/>
-          <p:nvPr/>
-        </p:nvSpPr>
-        <p:spPr>
-          <a:xfrm>
-            <a:off x="4399178" y="2468880"/>
-            <a:ext cx="3393338" cy="82296"/>
-          </a:xfrm>
-          <a:prstGeom prst="rect">
-            <a:avLst/>
-          </a:prstGeom>
-          <a:solidFill>
-            <a:srgbClr val="00FF41"/>
-          </a:solidFill>
-          <a:ln>
-            <a:noFill/>
-          </a:ln>
-          <a:effectLst/>
-        </p:spPr>
-        <p:style>
-          <a:lnRef idx="1">
-            <a:schemeClr val="accent1"/>
-          </a:lnRef>
-          <a:fillRef idx="3">
-            <a:schemeClr val="accent1"/>
-          </a:fillRef>
-          <a:effectRef idx="2">
-            <a:schemeClr val="accent1"/>
-          </a:effectRef>
-          <a:fontRef idx="minor">
-            <a:schemeClr val="lt1"/>
-          </a:fontRef>
-        </p:style>
-        <p:txBody>
-          <a:bodyPr rtlCol="0" anchor="ctr"/>
-          <a:lstStyle/>
-          <a:p>
-            <a:pPr algn="ctr"/>
-          </a:p>
-        </p:txBody>
-      </p:sp>
-      <p:sp>
-        <p:nvSpPr>
-          <p:cNvPr id="12" name="TextBox 11"/>
-          <p:cNvSpPr txBox="1"/>
-          <p:nvPr/>
-        </p:nvSpPr>
-        <p:spPr>
-          <a:xfrm>
-            <a:off x="4673498" y="2788920"/>
-            <a:ext cx="2844698" cy="457200"/>
-          </a:xfrm>
-          <a:prstGeom prst="rect">
-            <a:avLst/>
-          </a:prstGeom>
-          <a:noFill/>
-        </p:spPr>
-        <p:txBody>
-          <a:bodyPr wrap="square" anchor="t">
-            <a:spAutoFit/>
-          </a:bodyPr>
-          <a:lstStyle/>
-          <a:p>
-            <a:pPr algn="l">
-              <a:lnSpc>
-                <a:spcPct val="100000"/>
-              </a:lnSpc>
-            </a:pPr>
-            <a:r>
-              <a:rPr sz="1200" b="1">
-                <a:solidFill>
-                  <a:srgbClr val="00FF41"/>
+              <a:rPr sz="1000" b="0">
+                <a:solidFill>
+                  <a:srgbClr val="5A6474"/>
                 </a:solidFill>
                 <a:latin typeface="Courier New"/>
               </a:rPr>
-              <a:t>UNDERSTANDING</a:t>
-            </a:r>
-          </a:p>
-        </p:txBody>
-      </p:sp>
-      <p:sp>
-        <p:nvSpPr>
-          <p:cNvPr id="13" name="TextBox 12"/>
-          <p:cNvSpPr txBox="1"/>
-          <p:nvPr/>
-        </p:nvSpPr>
-        <p:spPr>
-          <a:xfrm>
-            <a:off x="4673498" y="3246120"/>
-            <a:ext cx="2844698" cy="822960"/>
-          </a:xfrm>
-          <a:prstGeom prst="rect">
-            <a:avLst/>
-          </a:prstGeom>
-          <a:noFill/>
-        </p:spPr>
-        <p:txBody>
-          <a:bodyPr wrap="square" anchor="t">
-            <a:spAutoFit/>
-          </a:bodyPr>
-          <a:lstStyle/>
-          <a:p>
-            <a:pPr algn="l">
-              <a:lnSpc>
-                <a:spcPct val="100000"/>
-              </a:lnSpc>
-            </a:pPr>
-            <a:r>
-              <a:rPr sz="2000" b="1">
-                <a:solidFill>
-                  <a:srgbClr val="F5F7FA"/>
-                </a:solidFill>
-                <a:latin typeface="Arial"/>
-              </a:rPr>
-              <a:t>Do they GRASP it better?</a:t>
-            </a:r>
-          </a:p>
-        </p:txBody>
-      </p:sp>
-      <p:sp>
-        <p:nvSpPr>
-          <p:cNvPr id="14" name="TextBox 13"/>
-          <p:cNvSpPr txBox="1"/>
-          <p:nvPr/>
-        </p:nvSpPr>
-        <p:spPr>
-          <a:xfrm>
-            <a:off x="4673498" y="4114800"/>
-            <a:ext cx="2844698" cy="1554480"/>
-          </a:xfrm>
-          <a:prstGeom prst="rect">
-            <a:avLst/>
-          </a:prstGeom>
-          <a:noFill/>
-        </p:spPr>
-        <p:txBody>
-          <a:bodyPr wrap="square" anchor="t">
-            <a:spAutoFit/>
-          </a:bodyPr>
-          <a:lstStyle/>
-          <a:p>
-            <a:pPr algn="l">
-              <a:lnSpc>
-                <a:spcPct val="110000"/>
-              </a:lnSpc>
-            </a:pPr>
-            <a:r>
-              <a:rPr sz="1500" b="0">
-                <a:solidFill>
-                  <a:srgbClr val="8A94A6"/>
-                </a:solidFill>
-                <a:latin typeface="Arial"/>
-              </a:rPr>
-              <a:t>Cognition achieved, augmented, deepened. Does using it deepen understanding of the value or the harm?</a:t>
-            </a:r>
-          </a:p>
-        </p:txBody>
-      </p:sp>
-      <p:sp>
-        <p:nvSpPr>
-          <p:cNvPr id="15" name="Rounded Rectangle 14"/>
-          <p:cNvSpPr/>
-          <p:nvPr/>
-        </p:nvSpPr>
-        <p:spPr>
-          <a:xfrm>
-            <a:off x="8158276" y="2468880"/>
-            <a:ext cx="3393338" cy="3383280"/>
-          </a:xfrm>
-          <a:prstGeom prst="roundRect">
-            <a:avLst/>
-          </a:prstGeom>
-          <a:solidFill>
-            <a:srgbClr val="151B26"/>
-          </a:solidFill>
-          <a:ln>
-            <a:noFill/>
-          </a:ln>
-          <a:effectLst/>
-        </p:spPr>
-        <p:style>
-          <a:lnRef idx="1">
-            <a:schemeClr val="accent1"/>
-          </a:lnRef>
-          <a:fillRef idx="3">
-            <a:schemeClr val="accent1"/>
-          </a:fillRef>
-          <a:effectRef idx="2">
-            <a:schemeClr val="accent1"/>
-          </a:effectRef>
-          <a:fontRef idx="minor">
-            <a:schemeClr val="lt1"/>
-          </a:fontRef>
-        </p:style>
-        <p:txBody>
-          <a:bodyPr rtlCol="0" anchor="ctr"/>
-          <a:lstStyle/>
-          <a:p>
-            <a:pPr algn="ctr"/>
-          </a:p>
-        </p:txBody>
-      </p:sp>
-      <p:sp>
-        <p:nvSpPr>
-          <p:cNvPr id="16" name="Rectangle 15"/>
-          <p:cNvSpPr/>
-          <p:nvPr/>
-        </p:nvSpPr>
-        <p:spPr>
-          <a:xfrm>
-            <a:off x="8158276" y="2468880"/>
-            <a:ext cx="3393338" cy="82296"/>
-          </a:xfrm>
-          <a:prstGeom prst="rect">
-            <a:avLst/>
-          </a:prstGeom>
-          <a:solidFill>
-            <a:srgbClr val="00FF41"/>
-          </a:solidFill>
-          <a:ln>
-            <a:noFill/>
-          </a:ln>
-          <a:effectLst/>
-        </p:spPr>
-        <p:style>
-          <a:lnRef idx="1">
-            <a:schemeClr val="accent1"/>
-          </a:lnRef>
-          <a:fillRef idx="3">
-            <a:schemeClr val="accent1"/>
-          </a:fillRef>
-          <a:effectRef idx="2">
-            <a:schemeClr val="accent1"/>
-          </a:effectRef>
-          <a:fontRef idx="minor">
-            <a:schemeClr val="lt1"/>
-          </a:fontRef>
-        </p:style>
-        <p:txBody>
-          <a:bodyPr rtlCol="0" anchor="ctr"/>
-          <a:lstStyle/>
-          <a:p>
-            <a:pPr algn="ctr"/>
-          </a:p>
-        </p:txBody>
-      </p:sp>
-      <p:sp>
-        <p:nvSpPr>
-          <p:cNvPr id="17" name="TextBox 16"/>
-          <p:cNvSpPr txBox="1"/>
-          <p:nvPr/>
-        </p:nvSpPr>
-        <p:spPr>
-          <a:xfrm>
-            <a:off x="8432596" y="2788920"/>
-            <a:ext cx="2844698" cy="457200"/>
-          </a:xfrm>
-          <a:prstGeom prst="rect">
-            <a:avLst/>
-          </a:prstGeom>
-          <a:noFill/>
-        </p:spPr>
-        <p:txBody>
-          <a:bodyPr wrap="square" anchor="t">
-            <a:spAutoFit/>
-          </a:bodyPr>
-          <a:lstStyle/>
-          <a:p>
-            <a:pPr algn="l">
-              <a:lnSpc>
-                <a:spcPct val="100000"/>
-              </a:lnSpc>
-            </a:pPr>
-            <a:r>
-              <a:rPr sz="1200" b="1">
-                <a:solidFill>
-                  <a:srgbClr val="00FF41"/>
-                </a:solidFill>
-                <a:latin typeface="Courier New"/>
-              </a:rPr>
-              <a:t>AFFECT</a:t>
-            </a:r>
-          </a:p>
-        </p:txBody>
-      </p:sp>
-      <p:sp>
-        <p:nvSpPr>
-          <p:cNvPr id="18" name="TextBox 17"/>
-          <p:cNvSpPr txBox="1"/>
-          <p:nvPr/>
-        </p:nvSpPr>
-        <p:spPr>
-          <a:xfrm>
-            <a:off x="8432596" y="3246120"/>
-            <a:ext cx="2844698" cy="822960"/>
-          </a:xfrm>
-          <a:prstGeom prst="rect">
-            <a:avLst/>
-          </a:prstGeom>
-          <a:noFill/>
-        </p:spPr>
-        <p:txBody>
-          <a:bodyPr wrap="square" anchor="t">
-            <a:spAutoFit/>
-          </a:bodyPr>
-          <a:lstStyle/>
-          <a:p>
-            <a:pPr algn="l">
-              <a:lnSpc>
-                <a:spcPct val="100000"/>
-              </a:lnSpc>
-            </a:pPr>
-            <a:r>
-              <a:rPr sz="2000" b="1">
-                <a:solidFill>
-                  <a:srgbClr val="F5F7FA"/>
-                </a:solidFill>
-                <a:latin typeface="Arial"/>
-              </a:rPr>
-              <a:t>Do they FEEL differently?</a:t>
-            </a:r>
-          </a:p>
-        </p:txBody>
-      </p:sp>
-      <p:sp>
-        <p:nvSpPr>
-          <p:cNvPr id="19" name="TextBox 18"/>
-          <p:cNvSpPr txBox="1"/>
-          <p:nvPr/>
-        </p:nvSpPr>
-        <p:spPr>
-          <a:xfrm>
-            <a:off x="8432596" y="4114800"/>
-            <a:ext cx="2844698" cy="1554480"/>
-          </a:xfrm>
-          <a:prstGeom prst="rect">
-            <a:avLst/>
-          </a:prstGeom>
-          <a:noFill/>
-        </p:spPr>
-        <p:txBody>
-          <a:bodyPr wrap="square" anchor="t">
-            <a:spAutoFit/>
-          </a:bodyPr>
-          <a:lstStyle/>
-          <a:p>
-            <a:pPr algn="l">
-              <a:lnSpc>
-                <a:spcPct val="110000"/>
-              </a:lnSpc>
-            </a:pPr>
-            <a:r>
-              <a:rPr sz="1500" b="0">
-                <a:solidFill>
-                  <a:srgbClr val="8A94A6"/>
-                </a:solidFill>
-                <a:latin typeface="Arial"/>
-              </a:rPr>
-              <a:t>Attitude, empathy, preference. Does it shift how people feel or judge?</a:t>
-            </a:r>
-          </a:p>
-        </p:txBody>
-      </p:sp>
-      <p:sp>
-        <p:nvSpPr>
-          <p:cNvPr id="20" name="TextBox 19"/>
-          <p:cNvSpPr txBox="1"/>
-          <p:nvPr/>
-        </p:nvSpPr>
-        <p:spPr>
-          <a:xfrm>
-            <a:off x="640080" y="6355080"/>
-            <a:ext cx="10972800" cy="365760"/>
-          </a:xfrm>
-          <a:prstGeom prst="rect">
-            <a:avLst/>
-          </a:prstGeom>
-          <a:noFill/>
-        </p:spPr>
-        <p:txBody>
-          <a:bodyPr wrap="square" anchor="t">
-            <a:spAutoFit/>
-          </a:bodyPr>
-          <a:lstStyle/>
-          <a:p>
-            <a:pPr algn="l">
-              <a:lnSpc>
-                <a:spcPct val="100000"/>
-              </a:lnSpc>
-            </a:pPr>
-            <a:r>
-              <a:rPr sz="1000" b="0">
-                <a:solidFill>
-                  <a:srgbClr val="5A6474"/>
-                </a:solidFill>
-                <a:latin typeface="Courier New"/>
-              </a:rPr>
               <a:t>Good Code, Good Vibes · TECHIE 1121 · Cornell Tech · Summer 2026</a:t>
-            </a:r>
-          </a:p>
-        </p:txBody>
-      </p:sp>
-      <p:sp>
-        <p:nvSpPr>
-          <p:cNvPr id="21" name="TextBox 20"/>
-          <p:cNvSpPr txBox="1"/>
-          <p:nvPr/>
-        </p:nvSpPr>
-        <p:spPr>
-          <a:xfrm>
-            <a:off x="640080" y="6053328"/>
-            <a:ext cx="10972800" cy="292608"/>
-          </a:xfrm>
-          <a:prstGeom prst="rect">
-            <a:avLst/>
-          </a:prstGeom>
-          <a:noFill/>
-        </p:spPr>
-        <p:txBody>
-          <a:bodyPr wrap="square" anchor="t">
-            <a:spAutoFit/>
-          </a:bodyPr>
-          <a:lstStyle/>
-          <a:p>
-            <a:pPr algn="l">
-              <a:lnSpc>
-                <a:spcPct val="100000"/>
-              </a:lnSpc>
-            </a:pPr>
-            <a:r>
-              <a:rPr sz="950" b="0">
-                <a:solidFill>
-                  <a:srgbClr val="5A6474"/>
-                </a:solidFill>
-                <a:latin typeface="Courier New"/>
-              </a:rPr>
-              <a:t>Verification lenses adapted from Values at Play - VAP course, Engelmann &amp; Nissenbaum (Cornell Tech)</a:t>
             </a:r>
           </a:p>
         </p:txBody>
@@ -8298,7 +9140,7 @@
                 </a:solidFill>
                 <a:latin typeface="Courier New"/>
               </a:rPr>
-              <a:t>LENS 1 - BEHAVIOR</a:t>
+              <a:t>THE THREE LENSES</a:t>
             </a:r>
           </a:p>
         </p:txBody>
@@ -8347,41 +9189,16 @@
           </a:p>
         </p:txBody>
       </p:sp>
-      <p:pic>
-        <p:nvPicPr>
-          <p:cNvPr id="4" name="Picture 3" descr="smart_meter.jpg"/>
-          <p:cNvPicPr>
-            <a:picLocks noChangeAspect="1"/>
-          </p:cNvPicPr>
-          <p:nvPr/>
-        </p:nvPicPr>
-        <p:blipFill>
-          <a:blip r:embed="rId2"/>
-          <a:srcRect l="25111" r="25111"/>
-          <a:stretch>
-            <a:fillRect/>
-          </a:stretch>
-        </p:blipFill>
-        <p:spPr>
-          <a:xfrm>
-            <a:off x="7071055" y="0"/>
-            <a:ext cx="5120640" cy="6858000"/>
-          </a:xfrm>
-          <a:prstGeom prst="rect">
-            <a:avLst/>
-          </a:prstGeom>
-        </p:spPr>
-      </p:pic>
-      <p:sp>
-        <p:nvSpPr>
-          <p:cNvPr id="5" name="TextBox 4"/>
+      <p:sp>
+        <p:nvSpPr>
+          <p:cNvPr id="4" name="TextBox 3"/>
           <p:cNvSpPr txBox="1"/>
           <p:nvPr/>
         </p:nvSpPr>
         <p:spPr>
           <a:xfrm>
             <a:off x="640080" y="1188720"/>
-            <a:ext cx="6019495" cy="1280160"/>
+            <a:ext cx="10972800" cy="914400"/>
           </a:xfrm>
           <a:prstGeom prst="rect">
             <a:avLst/>
@@ -8400,138 +9217,33 @@
               </a:lnSpc>
             </a:pPr>
             <a:r>
-              <a:rPr sz="3000" b="1">
+              <a:rPr sz="3200" b="1">
                 <a:solidFill>
                   <a:srgbClr val="F5F7FA"/>
                 </a:solidFill>
                 <a:latin typeface="Arial"/>
               </a:rPr>
-              <a:t>Does the design change what people DO?</a:t>
-            </a:r>
-          </a:p>
-        </p:txBody>
-      </p:sp>
-      <p:sp>
-        <p:nvSpPr>
-          <p:cNvPr id="6" name="TextBox 5"/>
-          <p:cNvSpPr txBox="1"/>
-          <p:nvPr/>
-        </p:nvSpPr>
-        <p:spPr>
-          <a:xfrm>
-            <a:off x="640080" y="2560320"/>
-            <a:ext cx="6019495" cy="3108960"/>
-          </a:xfrm>
-          <a:prstGeom prst="rect">
-            <a:avLst/>
-          </a:prstGeom>
-          <a:noFill/>
-        </p:spPr>
-        <p:txBody>
-          <a:bodyPr wrap="square" anchor="t">
-            <a:spAutoFit/>
-          </a:bodyPr>
-          <a:lstStyle/>
-          <a:p>
-            <a:pPr algn="l">
-              <a:lnSpc>
-                <a:spcPct val="116000"/>
-              </a:lnSpc>
-            </a:pPr>
-            <a:r>
-              <a:rPr sz="1800" b="0">
-                <a:solidFill>
-                  <a:srgbClr val="F5F7FA"/>
-                </a:solidFill>
-                <a:latin typeface="Arial"/>
-              </a:rPr>
-              <a:t>The sharpest test. A smart meter that shows live energy use only "works" for sustainability if people </a:t>
-            </a:r>
-            <a:r>
-              <a:rPr sz="1800" b="1">
-                <a:solidFill>
-                  <a:srgbClr val="00FF41"/>
-                </a:solidFill>
-                <a:latin typeface="Arial"/>
-              </a:rPr>
-              <a:t>use less</a:t>
-            </a:r>
-            <a:r>
-              <a:rPr sz="1800" b="0">
-                <a:solidFill>
-                  <a:srgbClr val="F5F7FA"/>
-                </a:solidFill>
-                <a:latin typeface="Arial"/>
-              </a:rPr>
-              <a:t>.</a:t>
-            </a:r>
-          </a:p>
-          <a:p>
-            <a:pPr algn="l">
-              <a:lnSpc>
-                <a:spcPct val="116000"/>
-              </a:lnSpc>
-            </a:pPr>
-            <a:r>
-              <a:rPr sz="1900" b="0">
-                <a:solidFill>
-                  <a:srgbClr val="F5F7FA"/>
-                </a:solidFill>
-                <a:latin typeface="Arial"/>
-              </a:rPr>
-              <a:t/>
-            </a:r>
-          </a:p>
-          <a:p>
-            <a:pPr algn="l">
-              <a:lnSpc>
-                <a:spcPct val="116000"/>
-              </a:lnSpc>
-            </a:pPr>
-            <a:r>
-              <a:rPr sz="1700" b="1">
-                <a:solidFill>
-                  <a:srgbClr val="00FF41"/>
-                </a:solidFill>
-                <a:latin typeface="Arial"/>
-              </a:rPr>
-              <a:t>Verify how:</a:t>
-            </a:r>
-          </a:p>
-          <a:p>
-            <a:pPr algn="l">
-              <a:lnSpc>
-                <a:spcPct val="116000"/>
-              </a:lnSpc>
-            </a:pPr>
-            <a:r>
-              <a:rPr sz="1600" b="0">
-                <a:solidFill>
-                  <a:srgbClr val="8A94A6"/>
-                </a:solidFill>
-                <a:latin typeface="Arial"/>
-              </a:rPr>
-              <a:t>prototype - user study - before/after - A/B two versions - task completion</a:t>
-            </a:r>
-          </a:p>
-        </p:txBody>
-      </p:sp>
-      <p:sp>
-        <p:nvSpPr>
-          <p:cNvPr id="7" name="Rectangle 6"/>
+              <a:t>A menu for choosing your method</a:t>
+            </a:r>
+          </a:p>
+        </p:txBody>
+      </p:sp>
+      <p:sp>
+        <p:nvSpPr>
+          <p:cNvPr id="5" name="Rounded Rectangle 4"/>
           <p:cNvSpPr/>
           <p:nvPr/>
         </p:nvSpPr>
         <p:spPr>
           <a:xfrm>
-            <a:off x="7071055" y="6547104"/>
-            <a:ext cx="5120640" cy="310896"/>
-          </a:xfrm>
-          <a:prstGeom prst="rect">
+            <a:off x="640080" y="2468880"/>
+            <a:ext cx="3393338" cy="3383280"/>
+          </a:xfrm>
+          <a:prstGeom prst="roundRect">
             <a:avLst/>
           </a:prstGeom>
           <a:solidFill>
-            <a:srgbClr val="0B0E14"/>
+            <a:srgbClr val="151B26"/>
           </a:solidFill>
           <a:ln>
             <a:noFill/>
@@ -8562,14 +9274,58 @@
       </p:sp>
       <p:sp>
         <p:nvSpPr>
-          <p:cNvPr id="8" name="TextBox 7"/>
+          <p:cNvPr id="6" name="Rectangle 5"/>
+          <p:cNvSpPr/>
+          <p:nvPr/>
+        </p:nvSpPr>
+        <p:spPr>
+          <a:xfrm>
+            <a:off x="640080" y="2468880"/>
+            <a:ext cx="3393338" cy="82296"/>
+          </a:xfrm>
+          <a:prstGeom prst="rect">
+            <a:avLst/>
+          </a:prstGeom>
+          <a:solidFill>
+            <a:srgbClr val="00FF41"/>
+          </a:solidFill>
+          <a:ln>
+            <a:noFill/>
+          </a:ln>
+          <a:effectLst/>
+        </p:spPr>
+        <p:style>
+          <a:lnRef idx="1">
+            <a:schemeClr val="accent1"/>
+          </a:lnRef>
+          <a:fillRef idx="3">
+            <a:schemeClr val="accent1"/>
+          </a:fillRef>
+          <a:effectRef idx="2">
+            <a:schemeClr val="accent1"/>
+          </a:effectRef>
+          <a:fontRef idx="minor">
+            <a:schemeClr val="lt1"/>
+          </a:fontRef>
+        </p:style>
+        <p:txBody>
+          <a:bodyPr rtlCol="0" anchor="ctr"/>
+          <a:lstStyle/>
+          <a:p>
+            <a:pPr algn="ctr"/>
+          </a:p>
+        </p:txBody>
+      </p:sp>
+      <p:sp>
+        <p:nvSpPr>
+          <p:cNvPr id="7" name="TextBox 6"/>
           <p:cNvSpPr txBox="1"/>
           <p:nvPr/>
         </p:nvSpPr>
         <p:spPr>
           <a:xfrm>
-            <a:off x="7208215" y="6565392"/>
-            <a:ext cx="4846320" cy="274320"/>
+            <a:off x="914400" y="2788920"/>
+            <a:ext cx="2844698" cy="457200"/>
           </a:xfrm>
           <a:prstGeom prst="rect">
             <a:avLst/>
@@ -8588,27 +9344,27 @@
               </a:lnSpc>
             </a:pPr>
             <a:r>
-              <a:rPr sz="850" b="0">
-                <a:solidFill>
-                  <a:srgbClr val="8A94A6"/>
+              <a:rPr sz="1200" b="1">
+                <a:solidFill>
+                  <a:srgbClr val="00FF41"/>
                 </a:solidFill>
                 <a:latin typeface="Courier New"/>
               </a:rPr>
-              <a:t>Behavior verification (Values at Play) - smart-meter image, educational use</a:t>
-            </a:r>
-          </a:p>
-        </p:txBody>
-      </p:sp>
-      <p:sp>
-        <p:nvSpPr>
-          <p:cNvPr id="9" name="TextBox 8"/>
+              <a:t>BEHAVIOR</a:t>
+            </a:r>
+          </a:p>
+        </p:txBody>
+      </p:sp>
+      <p:sp>
+        <p:nvSpPr>
+          <p:cNvPr id="8" name="TextBox 7"/>
           <p:cNvSpPr txBox="1"/>
           <p:nvPr/>
         </p:nvSpPr>
         <p:spPr>
           <a:xfrm>
-            <a:off x="640080" y="6355080"/>
-            <a:ext cx="10972800" cy="365760"/>
+            <a:off x="914400" y="3246120"/>
+            <a:ext cx="2844698" cy="822960"/>
           </a:xfrm>
           <a:prstGeom prst="rect">
             <a:avLst/>
@@ -8627,6 +9383,494 @@
               </a:lnSpc>
             </a:pPr>
             <a:r>
+              <a:rPr sz="2000" b="1">
+                <a:solidFill>
+                  <a:srgbClr val="F5F7FA"/>
+                </a:solidFill>
+                <a:latin typeface="Arial"/>
+              </a:rPr>
+              <a:t>Do they ACT differently?</a:t>
+            </a:r>
+          </a:p>
+        </p:txBody>
+      </p:sp>
+      <p:sp>
+        <p:nvSpPr>
+          <p:cNvPr id="9" name="TextBox 8"/>
+          <p:cNvSpPr txBox="1"/>
+          <p:nvPr/>
+        </p:nvSpPr>
+        <p:spPr>
+          <a:xfrm>
+            <a:off x="914400" y="4114800"/>
+            <a:ext cx="2844698" cy="1554480"/>
+          </a:xfrm>
+          <a:prstGeom prst="rect">
+            <a:avLst/>
+          </a:prstGeom>
+          <a:noFill/>
+        </p:spPr>
+        <p:txBody>
+          <a:bodyPr wrap="square" anchor="t">
+            <a:spAutoFit/>
+          </a:bodyPr>
+          <a:lstStyle/>
+          <a:p>
+            <a:pPr algn="l">
+              <a:lnSpc>
+                <a:spcPct val="110000"/>
+              </a:lnSpc>
+            </a:pPr>
+            <a:r>
+              <a:rPr sz="1500" b="0">
+                <a:solidFill>
+                  <a:srgbClr val="8A94A6"/>
+                </a:solidFill>
+                <a:latin typeface="Arial"/>
+              </a:rPr>
+              <a:t>Action, decision, practice, outcome. Observation, A/B, before/after, task completion.</a:t>
+            </a:r>
+          </a:p>
+        </p:txBody>
+      </p:sp>
+      <p:sp>
+        <p:nvSpPr>
+          <p:cNvPr id="10" name="Rounded Rectangle 9"/>
+          <p:cNvSpPr/>
+          <p:nvPr/>
+        </p:nvSpPr>
+        <p:spPr>
+          <a:xfrm>
+            <a:off x="4399178" y="2468880"/>
+            <a:ext cx="3393338" cy="3383280"/>
+          </a:xfrm>
+          <a:prstGeom prst="roundRect">
+            <a:avLst/>
+          </a:prstGeom>
+          <a:solidFill>
+            <a:srgbClr val="151B26"/>
+          </a:solidFill>
+          <a:ln>
+            <a:noFill/>
+          </a:ln>
+          <a:effectLst/>
+        </p:spPr>
+        <p:style>
+          <a:lnRef idx="1">
+            <a:schemeClr val="accent1"/>
+          </a:lnRef>
+          <a:fillRef idx="3">
+            <a:schemeClr val="accent1"/>
+          </a:fillRef>
+          <a:effectRef idx="2">
+            <a:schemeClr val="accent1"/>
+          </a:effectRef>
+          <a:fontRef idx="minor">
+            <a:schemeClr val="lt1"/>
+          </a:fontRef>
+        </p:style>
+        <p:txBody>
+          <a:bodyPr rtlCol="0" anchor="ctr"/>
+          <a:lstStyle/>
+          <a:p>
+            <a:pPr algn="ctr"/>
+          </a:p>
+        </p:txBody>
+      </p:sp>
+      <p:sp>
+        <p:nvSpPr>
+          <p:cNvPr id="11" name="Rectangle 10"/>
+          <p:cNvSpPr/>
+          <p:nvPr/>
+        </p:nvSpPr>
+        <p:spPr>
+          <a:xfrm>
+            <a:off x="4399178" y="2468880"/>
+            <a:ext cx="3393338" cy="82296"/>
+          </a:xfrm>
+          <a:prstGeom prst="rect">
+            <a:avLst/>
+          </a:prstGeom>
+          <a:solidFill>
+            <a:srgbClr val="00FF41"/>
+          </a:solidFill>
+          <a:ln>
+            <a:noFill/>
+          </a:ln>
+          <a:effectLst/>
+        </p:spPr>
+        <p:style>
+          <a:lnRef idx="1">
+            <a:schemeClr val="accent1"/>
+          </a:lnRef>
+          <a:fillRef idx="3">
+            <a:schemeClr val="accent1"/>
+          </a:fillRef>
+          <a:effectRef idx="2">
+            <a:schemeClr val="accent1"/>
+          </a:effectRef>
+          <a:fontRef idx="minor">
+            <a:schemeClr val="lt1"/>
+          </a:fontRef>
+        </p:style>
+        <p:txBody>
+          <a:bodyPr rtlCol="0" anchor="ctr"/>
+          <a:lstStyle/>
+          <a:p>
+            <a:pPr algn="ctr"/>
+          </a:p>
+        </p:txBody>
+      </p:sp>
+      <p:sp>
+        <p:nvSpPr>
+          <p:cNvPr id="12" name="TextBox 11"/>
+          <p:cNvSpPr txBox="1"/>
+          <p:nvPr/>
+        </p:nvSpPr>
+        <p:spPr>
+          <a:xfrm>
+            <a:off x="4673498" y="2788920"/>
+            <a:ext cx="2844698" cy="457200"/>
+          </a:xfrm>
+          <a:prstGeom prst="rect">
+            <a:avLst/>
+          </a:prstGeom>
+          <a:noFill/>
+        </p:spPr>
+        <p:txBody>
+          <a:bodyPr wrap="square" anchor="t">
+            <a:spAutoFit/>
+          </a:bodyPr>
+          <a:lstStyle/>
+          <a:p>
+            <a:pPr algn="l">
+              <a:lnSpc>
+                <a:spcPct val="100000"/>
+              </a:lnSpc>
+            </a:pPr>
+            <a:r>
+              <a:rPr sz="1200" b="1">
+                <a:solidFill>
+                  <a:srgbClr val="00FF41"/>
+                </a:solidFill>
+                <a:latin typeface="Courier New"/>
+              </a:rPr>
+              <a:t>UNDERSTANDING</a:t>
+            </a:r>
+          </a:p>
+        </p:txBody>
+      </p:sp>
+      <p:sp>
+        <p:nvSpPr>
+          <p:cNvPr id="13" name="TextBox 12"/>
+          <p:cNvSpPr txBox="1"/>
+          <p:nvPr/>
+        </p:nvSpPr>
+        <p:spPr>
+          <a:xfrm>
+            <a:off x="4673498" y="3246120"/>
+            <a:ext cx="2844698" cy="822960"/>
+          </a:xfrm>
+          <a:prstGeom prst="rect">
+            <a:avLst/>
+          </a:prstGeom>
+          <a:noFill/>
+        </p:spPr>
+        <p:txBody>
+          <a:bodyPr wrap="square" anchor="t">
+            <a:spAutoFit/>
+          </a:bodyPr>
+          <a:lstStyle/>
+          <a:p>
+            <a:pPr algn="l">
+              <a:lnSpc>
+                <a:spcPct val="100000"/>
+              </a:lnSpc>
+            </a:pPr>
+            <a:r>
+              <a:rPr sz="2000" b="1">
+                <a:solidFill>
+                  <a:srgbClr val="F5F7FA"/>
+                </a:solidFill>
+                <a:latin typeface="Arial"/>
+              </a:rPr>
+              <a:t>Do they GRASP it better?</a:t>
+            </a:r>
+          </a:p>
+        </p:txBody>
+      </p:sp>
+      <p:sp>
+        <p:nvSpPr>
+          <p:cNvPr id="14" name="TextBox 13"/>
+          <p:cNvSpPr txBox="1"/>
+          <p:nvPr/>
+        </p:nvSpPr>
+        <p:spPr>
+          <a:xfrm>
+            <a:off x="4673498" y="4114800"/>
+            <a:ext cx="2844698" cy="1554480"/>
+          </a:xfrm>
+          <a:prstGeom prst="rect">
+            <a:avLst/>
+          </a:prstGeom>
+          <a:noFill/>
+        </p:spPr>
+        <p:txBody>
+          <a:bodyPr wrap="square" anchor="t">
+            <a:spAutoFit/>
+          </a:bodyPr>
+          <a:lstStyle/>
+          <a:p>
+            <a:pPr algn="l">
+              <a:lnSpc>
+                <a:spcPct val="110000"/>
+              </a:lnSpc>
+            </a:pPr>
+            <a:r>
+              <a:rPr sz="1500" b="0">
+                <a:solidFill>
+                  <a:srgbClr val="8A94A6"/>
+                </a:solidFill>
+                <a:latin typeface="Arial"/>
+              </a:rPr>
+              <a:t>Cognition achieved, augmented, deepened. Survey, interview, think-aloud, scenario.</a:t>
+            </a:r>
+          </a:p>
+        </p:txBody>
+      </p:sp>
+      <p:sp>
+        <p:nvSpPr>
+          <p:cNvPr id="15" name="Rounded Rectangle 14"/>
+          <p:cNvSpPr/>
+          <p:nvPr/>
+        </p:nvSpPr>
+        <p:spPr>
+          <a:xfrm>
+            <a:off x="8158276" y="2468880"/>
+            <a:ext cx="3393338" cy="3383280"/>
+          </a:xfrm>
+          <a:prstGeom prst="roundRect">
+            <a:avLst/>
+          </a:prstGeom>
+          <a:solidFill>
+            <a:srgbClr val="151B26"/>
+          </a:solidFill>
+          <a:ln>
+            <a:noFill/>
+          </a:ln>
+          <a:effectLst/>
+        </p:spPr>
+        <p:style>
+          <a:lnRef idx="1">
+            <a:schemeClr val="accent1"/>
+          </a:lnRef>
+          <a:fillRef idx="3">
+            <a:schemeClr val="accent1"/>
+          </a:fillRef>
+          <a:effectRef idx="2">
+            <a:schemeClr val="accent1"/>
+          </a:effectRef>
+          <a:fontRef idx="minor">
+            <a:schemeClr val="lt1"/>
+          </a:fontRef>
+        </p:style>
+        <p:txBody>
+          <a:bodyPr rtlCol="0" anchor="ctr"/>
+          <a:lstStyle/>
+          <a:p>
+            <a:pPr algn="ctr"/>
+          </a:p>
+        </p:txBody>
+      </p:sp>
+      <p:sp>
+        <p:nvSpPr>
+          <p:cNvPr id="16" name="Rectangle 15"/>
+          <p:cNvSpPr/>
+          <p:nvPr/>
+        </p:nvSpPr>
+        <p:spPr>
+          <a:xfrm>
+            <a:off x="8158276" y="2468880"/>
+            <a:ext cx="3393338" cy="82296"/>
+          </a:xfrm>
+          <a:prstGeom prst="rect">
+            <a:avLst/>
+          </a:prstGeom>
+          <a:solidFill>
+            <a:srgbClr val="00FF41"/>
+          </a:solidFill>
+          <a:ln>
+            <a:noFill/>
+          </a:ln>
+          <a:effectLst/>
+        </p:spPr>
+        <p:style>
+          <a:lnRef idx="1">
+            <a:schemeClr val="accent1"/>
+          </a:lnRef>
+          <a:fillRef idx="3">
+            <a:schemeClr val="accent1"/>
+          </a:fillRef>
+          <a:effectRef idx="2">
+            <a:schemeClr val="accent1"/>
+          </a:effectRef>
+          <a:fontRef idx="minor">
+            <a:schemeClr val="lt1"/>
+          </a:fontRef>
+        </p:style>
+        <p:txBody>
+          <a:bodyPr rtlCol="0" anchor="ctr"/>
+          <a:lstStyle/>
+          <a:p>
+            <a:pPr algn="ctr"/>
+          </a:p>
+        </p:txBody>
+      </p:sp>
+      <p:sp>
+        <p:nvSpPr>
+          <p:cNvPr id="17" name="TextBox 16"/>
+          <p:cNvSpPr txBox="1"/>
+          <p:nvPr/>
+        </p:nvSpPr>
+        <p:spPr>
+          <a:xfrm>
+            <a:off x="8432596" y="2788920"/>
+            <a:ext cx="2844698" cy="457200"/>
+          </a:xfrm>
+          <a:prstGeom prst="rect">
+            <a:avLst/>
+          </a:prstGeom>
+          <a:noFill/>
+        </p:spPr>
+        <p:txBody>
+          <a:bodyPr wrap="square" anchor="t">
+            <a:spAutoFit/>
+          </a:bodyPr>
+          <a:lstStyle/>
+          <a:p>
+            <a:pPr algn="l">
+              <a:lnSpc>
+                <a:spcPct val="100000"/>
+              </a:lnSpc>
+            </a:pPr>
+            <a:r>
+              <a:rPr sz="1200" b="1">
+                <a:solidFill>
+                  <a:srgbClr val="00FF41"/>
+                </a:solidFill>
+                <a:latin typeface="Courier New"/>
+              </a:rPr>
+              <a:t>AFFECT</a:t>
+            </a:r>
+          </a:p>
+        </p:txBody>
+      </p:sp>
+      <p:sp>
+        <p:nvSpPr>
+          <p:cNvPr id="18" name="TextBox 17"/>
+          <p:cNvSpPr txBox="1"/>
+          <p:nvPr/>
+        </p:nvSpPr>
+        <p:spPr>
+          <a:xfrm>
+            <a:off x="8432596" y="3246120"/>
+            <a:ext cx="2844698" cy="822960"/>
+          </a:xfrm>
+          <a:prstGeom prst="rect">
+            <a:avLst/>
+          </a:prstGeom>
+          <a:noFill/>
+        </p:spPr>
+        <p:txBody>
+          <a:bodyPr wrap="square" anchor="t">
+            <a:spAutoFit/>
+          </a:bodyPr>
+          <a:lstStyle/>
+          <a:p>
+            <a:pPr algn="l">
+              <a:lnSpc>
+                <a:spcPct val="100000"/>
+              </a:lnSpc>
+            </a:pPr>
+            <a:r>
+              <a:rPr sz="2000" b="1">
+                <a:solidFill>
+                  <a:srgbClr val="F5F7FA"/>
+                </a:solidFill>
+                <a:latin typeface="Arial"/>
+              </a:rPr>
+              <a:t>Do they FEEL differently?</a:t>
+            </a:r>
+          </a:p>
+        </p:txBody>
+      </p:sp>
+      <p:sp>
+        <p:nvSpPr>
+          <p:cNvPr id="19" name="TextBox 18"/>
+          <p:cNvSpPr txBox="1"/>
+          <p:nvPr/>
+        </p:nvSpPr>
+        <p:spPr>
+          <a:xfrm>
+            <a:off x="8432596" y="4114800"/>
+            <a:ext cx="2844698" cy="1554480"/>
+          </a:xfrm>
+          <a:prstGeom prst="rect">
+            <a:avLst/>
+          </a:prstGeom>
+          <a:noFill/>
+        </p:spPr>
+        <p:txBody>
+          <a:bodyPr wrap="square" anchor="t">
+            <a:spAutoFit/>
+          </a:bodyPr>
+          <a:lstStyle/>
+          <a:p>
+            <a:pPr algn="l">
+              <a:lnSpc>
+                <a:spcPct val="110000"/>
+              </a:lnSpc>
+            </a:pPr>
+            <a:r>
+              <a:rPr sz="1500" b="0">
+                <a:solidFill>
+                  <a:srgbClr val="8A94A6"/>
+                </a:solidFill>
+                <a:latin typeface="Arial"/>
+              </a:rPr>
+              <a:t>Attitude, empathy, preference. Attitude survey, diary, interview, choice under pressure.</a:t>
+            </a:r>
+          </a:p>
+        </p:txBody>
+      </p:sp>
+      <p:sp>
+        <p:nvSpPr>
+          <p:cNvPr id="20" name="TextBox 19"/>
+          <p:cNvSpPr txBox="1"/>
+          <p:nvPr/>
+        </p:nvSpPr>
+        <p:spPr>
+          <a:xfrm>
+            <a:off x="640080" y="6355080"/>
+            <a:ext cx="10972800" cy="365760"/>
+          </a:xfrm>
+          <a:prstGeom prst="rect">
+            <a:avLst/>
+          </a:prstGeom>
+          <a:noFill/>
+        </p:spPr>
+        <p:txBody>
+          <a:bodyPr wrap="square" anchor="t">
+            <a:spAutoFit/>
+          </a:bodyPr>
+          <a:lstStyle/>
+          <a:p>
+            <a:pPr algn="l">
+              <a:lnSpc>
+                <a:spcPct val="100000"/>
+              </a:lnSpc>
+            </a:pPr>
+            <a:r>
               <a:rPr sz="1000" b="0">
                 <a:solidFill>
                   <a:srgbClr val="5A6474"/>
@@ -8634,6 +9878,45 @@
                 <a:latin typeface="Courier New"/>
               </a:rPr>
               <a:t>Good Code, Good Vibes · TECHIE 1121 · Cornell Tech · Summer 2026</a:t>
+            </a:r>
+          </a:p>
+        </p:txBody>
+      </p:sp>
+      <p:sp>
+        <p:nvSpPr>
+          <p:cNvPr id="21" name="TextBox 20"/>
+          <p:cNvSpPr txBox="1"/>
+          <p:nvPr/>
+        </p:nvSpPr>
+        <p:spPr>
+          <a:xfrm>
+            <a:off x="640080" y="6053328"/>
+            <a:ext cx="10972800" cy="292608"/>
+          </a:xfrm>
+          <a:prstGeom prst="rect">
+            <a:avLst/>
+          </a:prstGeom>
+          <a:noFill/>
+        </p:spPr>
+        <p:txBody>
+          <a:bodyPr wrap="square" anchor="t">
+            <a:spAutoFit/>
+          </a:bodyPr>
+          <a:lstStyle/>
+          <a:p>
+            <a:pPr algn="l">
+              <a:lnSpc>
+                <a:spcPct val="100000"/>
+              </a:lnSpc>
+            </a:pPr>
+            <a:r>
+              <a:rPr sz="950" b="0">
+                <a:solidFill>
+                  <a:srgbClr val="5A6474"/>
+                </a:solidFill>
+                <a:latin typeface="Courier New"/>
+              </a:rPr>
+              <a:t>Not every lens fits every value - your reading decides which one matters. Lenses adapted from Values at Play (VAP course, Engelmann &amp; Nissenbaum, Cornell Tech)</a:t>
             </a:r>
           </a:p>
         </p:txBody>
@@ -8698,7 +9981,7 @@
                 </a:solidFill>
                 <a:latin typeface="Courier New"/>
               </a:rPr>
-              <a:t>LENSES 2 &amp; 3 - VERIFY HOW</a:t>
+              <a:t>EXAMPLE - BEHAVIOR</a:t>
             </a:r>
           </a:p>
         </p:txBody>
@@ -8747,16 +10030,41 @@
           </a:p>
         </p:txBody>
       </p:sp>
-      <p:sp>
-        <p:nvSpPr>
-          <p:cNvPr id="4" name="TextBox 3"/>
+      <p:pic>
+        <p:nvPicPr>
+          <p:cNvPr id="4" name="Picture 3" descr="smart_meter.jpg"/>
+          <p:cNvPicPr>
+            <a:picLocks noChangeAspect="1"/>
+          </p:cNvPicPr>
+          <p:nvPr/>
+        </p:nvPicPr>
+        <p:blipFill>
+          <a:blip r:embed="rId2"/>
+          <a:srcRect l="25111" r="25111"/>
+          <a:stretch>
+            <a:fillRect/>
+          </a:stretch>
+        </p:blipFill>
+        <p:spPr>
+          <a:xfrm>
+            <a:off x="7071055" y="0"/>
+            <a:ext cx="5120640" cy="6858000"/>
+          </a:xfrm>
+          <a:prstGeom prst="rect">
+            <a:avLst/>
+          </a:prstGeom>
+        </p:spPr>
+      </p:pic>
+      <p:sp>
+        <p:nvSpPr>
+          <p:cNvPr id="5" name="TextBox 4"/>
           <p:cNvSpPr txBox="1"/>
           <p:nvPr/>
         </p:nvSpPr>
         <p:spPr>
           <a:xfrm>
             <a:off x="640080" y="1188720"/>
-            <a:ext cx="10972800" cy="914400"/>
+            <a:ext cx="6019495" cy="1280160"/>
           </a:xfrm>
           <a:prstGeom prst="rect">
             <a:avLst/>
@@ -8775,33 +10083,138 @@
               </a:lnSpc>
             </a:pPr>
             <a:r>
-              <a:rPr sz="3200" b="1">
+              <a:rPr sz="3000" b="1">
                 <a:solidFill>
                   <a:srgbClr val="F5F7FA"/>
                 </a:solidFill>
                 <a:latin typeface="Arial"/>
               </a:rPr>
-              <a:t>Understanding &amp; affect</a:t>
-            </a:r>
-          </a:p>
-        </p:txBody>
-      </p:sp>
-      <p:sp>
-        <p:nvSpPr>
-          <p:cNvPr id="5" name="Rounded Rectangle 4"/>
+              <a:t>Does the design change what people DO?</a:t>
+            </a:r>
+          </a:p>
+        </p:txBody>
+      </p:sp>
+      <p:sp>
+        <p:nvSpPr>
+          <p:cNvPr id="6" name="TextBox 5"/>
+          <p:cNvSpPr txBox="1"/>
+          <p:nvPr/>
+        </p:nvSpPr>
+        <p:spPr>
+          <a:xfrm>
+            <a:off x="640080" y="2560320"/>
+            <a:ext cx="6019495" cy="3108960"/>
+          </a:xfrm>
+          <a:prstGeom prst="rect">
+            <a:avLst/>
+          </a:prstGeom>
+          <a:noFill/>
+        </p:spPr>
+        <p:txBody>
+          <a:bodyPr wrap="square" anchor="t">
+            <a:spAutoFit/>
+          </a:bodyPr>
+          <a:lstStyle/>
+          <a:p>
+            <a:pPr algn="l">
+              <a:lnSpc>
+                <a:spcPct val="116000"/>
+              </a:lnSpc>
+            </a:pPr>
+            <a:r>
+              <a:rPr sz="1800" b="0">
+                <a:solidFill>
+                  <a:srgbClr val="F5F7FA"/>
+                </a:solidFill>
+                <a:latin typeface="Arial"/>
+              </a:rPr>
+              <a:t>A smart meter that shows live energy use only "works" for sustainability if people </a:t>
+            </a:r>
+            <a:r>
+              <a:rPr sz="1800" b="1">
+                <a:solidFill>
+                  <a:srgbClr val="00FF41"/>
+                </a:solidFill>
+                <a:latin typeface="Arial"/>
+              </a:rPr>
+              <a:t>use less</a:t>
+            </a:r>
+            <a:r>
+              <a:rPr sz="1800" b="0">
+                <a:solidFill>
+                  <a:srgbClr val="F5F7FA"/>
+                </a:solidFill>
+                <a:latin typeface="Arial"/>
+              </a:rPr>
+              <a:t>.</a:t>
+            </a:r>
+          </a:p>
+          <a:p>
+            <a:pPr algn="l">
+              <a:lnSpc>
+                <a:spcPct val="116000"/>
+              </a:lnSpc>
+            </a:pPr>
+            <a:r>
+              <a:rPr sz="1900" b="0">
+                <a:solidFill>
+                  <a:srgbClr val="F5F7FA"/>
+                </a:solidFill>
+                <a:latin typeface="Arial"/>
+              </a:rPr>
+              <a:t/>
+            </a:r>
+          </a:p>
+          <a:p>
+            <a:pPr algn="l">
+              <a:lnSpc>
+                <a:spcPct val="116000"/>
+              </a:lnSpc>
+            </a:pPr>
+            <a:r>
+              <a:rPr sz="1700" b="1">
+                <a:solidFill>
+                  <a:srgbClr val="00FF41"/>
+                </a:solidFill>
+                <a:latin typeface="Arial"/>
+              </a:rPr>
+              <a:t>Verify how:</a:t>
+            </a:r>
+          </a:p>
+          <a:p>
+            <a:pPr algn="l">
+              <a:lnSpc>
+                <a:spcPct val="116000"/>
+              </a:lnSpc>
+            </a:pPr>
+            <a:r>
+              <a:rPr sz="1600" b="0">
+                <a:solidFill>
+                  <a:srgbClr val="8A94A6"/>
+                </a:solidFill>
+                <a:latin typeface="Arial"/>
+              </a:rPr>
+              <a:t>prototype - user study - before/after - A/B two versions - task completion</a:t>
+            </a:r>
+          </a:p>
+        </p:txBody>
+      </p:sp>
+      <p:sp>
+        <p:nvSpPr>
+          <p:cNvPr id="7" name="Rectangle 6"/>
           <p:cNvSpPr/>
           <p:nvPr/>
         </p:nvSpPr>
         <p:spPr>
           <a:xfrm>
-            <a:off x="640080" y="2468880"/>
-            <a:ext cx="3393338" cy="3383280"/>
-          </a:xfrm>
-          <a:prstGeom prst="roundRect">
+            <a:off x="7071055" y="6547104"/>
+            <a:ext cx="5120640" cy="310896"/>
+          </a:xfrm>
+          <a:prstGeom prst="rect">
             <a:avLst/>
           </a:prstGeom>
           <a:solidFill>
-            <a:srgbClr val="151B26"/>
+            <a:srgbClr val="0B0E14"/>
           </a:solidFill>
           <a:ln>
             <a:noFill/>
@@ -8832,58 +10245,14 @@
       </p:sp>
       <p:sp>
         <p:nvSpPr>
-          <p:cNvPr id="6" name="Rectangle 5"/>
-          <p:cNvSpPr/>
-          <p:nvPr/>
-        </p:nvSpPr>
-        <p:spPr>
-          <a:xfrm>
-            <a:off x="640080" y="2468880"/>
-            <a:ext cx="3393338" cy="82296"/>
-          </a:xfrm>
-          <a:prstGeom prst="rect">
-            <a:avLst/>
-          </a:prstGeom>
-          <a:solidFill>
-            <a:srgbClr val="00FF41"/>
-          </a:solidFill>
-          <a:ln>
-            <a:noFill/>
-          </a:ln>
-          <a:effectLst/>
-        </p:spPr>
-        <p:style>
-          <a:lnRef idx="1">
-            <a:schemeClr val="accent1"/>
-          </a:lnRef>
-          <a:fillRef idx="3">
-            <a:schemeClr val="accent1"/>
-          </a:fillRef>
-          <a:effectRef idx="2">
-            <a:schemeClr val="accent1"/>
-          </a:effectRef>
-          <a:fontRef idx="minor">
-            <a:schemeClr val="lt1"/>
-          </a:fontRef>
-        </p:style>
-        <p:txBody>
-          <a:bodyPr rtlCol="0" anchor="ctr"/>
-          <a:lstStyle/>
-          <a:p>
-            <a:pPr algn="ctr"/>
-          </a:p>
-        </p:txBody>
-      </p:sp>
-      <p:sp>
-        <p:nvSpPr>
-          <p:cNvPr id="7" name="TextBox 6"/>
+          <p:cNvPr id="8" name="TextBox 7"/>
           <p:cNvSpPr txBox="1"/>
           <p:nvPr/>
         </p:nvSpPr>
         <p:spPr>
           <a:xfrm>
-            <a:off x="914400" y="2788920"/>
-            <a:ext cx="2844698" cy="457200"/>
+            <a:off x="7208215" y="6565392"/>
+            <a:ext cx="4846320" cy="274320"/>
           </a:xfrm>
           <a:prstGeom prst="rect">
             <a:avLst/>
@@ -8902,52 +10271,13 @@
               </a:lnSpc>
             </a:pPr>
             <a:r>
-              <a:rPr sz="1200" b="1">
-                <a:solidFill>
-                  <a:srgbClr val="00FF41"/>
+              <a:rPr sz="850" b="0">
+                <a:solidFill>
+                  <a:srgbClr val="8A94A6"/>
                 </a:solidFill>
                 <a:latin typeface="Courier New"/>
               </a:rPr>
-              <a:t>UNDERSTANDING</a:t>
-            </a:r>
-          </a:p>
-        </p:txBody>
-      </p:sp>
-      <p:sp>
-        <p:nvSpPr>
-          <p:cNvPr id="8" name="TextBox 7"/>
-          <p:cNvSpPr txBox="1"/>
-          <p:nvPr/>
-        </p:nvSpPr>
-        <p:spPr>
-          <a:xfrm>
-            <a:off x="914400" y="3246120"/>
-            <a:ext cx="2844698" cy="822960"/>
-          </a:xfrm>
-          <a:prstGeom prst="rect">
-            <a:avLst/>
-          </a:prstGeom>
-          <a:noFill/>
-        </p:spPr>
-        <p:txBody>
-          <a:bodyPr wrap="square" anchor="t">
-            <a:spAutoFit/>
-          </a:bodyPr>
-          <a:lstStyle/>
-          <a:p>
-            <a:pPr algn="l">
-              <a:lnSpc>
-                <a:spcPct val="100000"/>
-              </a:lnSpc>
-            </a:pPr>
-            <a:r>
-              <a:rPr sz="2000" b="1">
-                <a:solidFill>
-                  <a:srgbClr val="F5F7FA"/>
-                </a:solidFill>
-                <a:latin typeface="Arial"/>
-              </a:rPr>
-              <a:t>Test comprehension</a:t>
+              <a:t>Behavior verification (Values at Play) - smart-meter image, educational use</a:t>
             </a:r>
           </a:p>
         </p:txBody>
@@ -8955,455 +10285,6 @@
       <p:sp>
         <p:nvSpPr>
           <p:cNvPr id="9" name="TextBox 8"/>
-          <p:cNvSpPr txBox="1"/>
-          <p:nvPr/>
-        </p:nvSpPr>
-        <p:spPr>
-          <a:xfrm>
-            <a:off x="914400" y="4114800"/>
-            <a:ext cx="2844698" cy="1554480"/>
-          </a:xfrm>
-          <a:prstGeom prst="rect">
-            <a:avLst/>
-          </a:prstGeom>
-          <a:noFill/>
-        </p:spPr>
-        <p:txBody>
-          <a:bodyPr wrap="square" anchor="t">
-            <a:spAutoFit/>
-          </a:bodyPr>
-          <a:lstStyle/>
-          <a:p>
-            <a:pPr algn="l">
-              <a:lnSpc>
-                <a:spcPct val="110000"/>
-              </a:lnSpc>
-            </a:pPr>
-            <a:r>
-              <a:rPr sz="1500" b="0">
-                <a:solidFill>
-                  <a:srgbClr val="8A94A6"/>
-                </a:solidFill>
-                <a:latin typeface="Arial"/>
-              </a:rPr>
-              <a:t>Survey, interview, think-aloud, scenario question, knowledge-transfer task. Do they understand the value better after using it?</a:t>
-            </a:r>
-          </a:p>
-        </p:txBody>
-      </p:sp>
-      <p:sp>
-        <p:nvSpPr>
-          <p:cNvPr id="10" name="Rounded Rectangle 9"/>
-          <p:cNvSpPr/>
-          <p:nvPr/>
-        </p:nvSpPr>
-        <p:spPr>
-          <a:xfrm>
-            <a:off x="4399178" y="2468880"/>
-            <a:ext cx="3393338" cy="3383280"/>
-          </a:xfrm>
-          <a:prstGeom prst="roundRect">
-            <a:avLst/>
-          </a:prstGeom>
-          <a:solidFill>
-            <a:srgbClr val="151B26"/>
-          </a:solidFill>
-          <a:ln>
-            <a:noFill/>
-          </a:ln>
-          <a:effectLst/>
-        </p:spPr>
-        <p:style>
-          <a:lnRef idx="1">
-            <a:schemeClr val="accent1"/>
-          </a:lnRef>
-          <a:fillRef idx="3">
-            <a:schemeClr val="accent1"/>
-          </a:fillRef>
-          <a:effectRef idx="2">
-            <a:schemeClr val="accent1"/>
-          </a:effectRef>
-          <a:fontRef idx="minor">
-            <a:schemeClr val="lt1"/>
-          </a:fontRef>
-        </p:style>
-        <p:txBody>
-          <a:bodyPr rtlCol="0" anchor="ctr"/>
-          <a:lstStyle/>
-          <a:p>
-            <a:pPr algn="ctr"/>
-          </a:p>
-        </p:txBody>
-      </p:sp>
-      <p:sp>
-        <p:nvSpPr>
-          <p:cNvPr id="11" name="Rectangle 10"/>
-          <p:cNvSpPr/>
-          <p:nvPr/>
-        </p:nvSpPr>
-        <p:spPr>
-          <a:xfrm>
-            <a:off x="4399178" y="2468880"/>
-            <a:ext cx="3393338" cy="82296"/>
-          </a:xfrm>
-          <a:prstGeom prst="rect">
-            <a:avLst/>
-          </a:prstGeom>
-          <a:solidFill>
-            <a:srgbClr val="00FF41"/>
-          </a:solidFill>
-          <a:ln>
-            <a:noFill/>
-          </a:ln>
-          <a:effectLst/>
-        </p:spPr>
-        <p:style>
-          <a:lnRef idx="1">
-            <a:schemeClr val="accent1"/>
-          </a:lnRef>
-          <a:fillRef idx="3">
-            <a:schemeClr val="accent1"/>
-          </a:fillRef>
-          <a:effectRef idx="2">
-            <a:schemeClr val="accent1"/>
-          </a:effectRef>
-          <a:fontRef idx="minor">
-            <a:schemeClr val="lt1"/>
-          </a:fontRef>
-        </p:style>
-        <p:txBody>
-          <a:bodyPr rtlCol="0" anchor="ctr"/>
-          <a:lstStyle/>
-          <a:p>
-            <a:pPr algn="ctr"/>
-          </a:p>
-        </p:txBody>
-      </p:sp>
-      <p:sp>
-        <p:nvSpPr>
-          <p:cNvPr id="12" name="TextBox 11"/>
-          <p:cNvSpPr txBox="1"/>
-          <p:nvPr/>
-        </p:nvSpPr>
-        <p:spPr>
-          <a:xfrm>
-            <a:off x="4673498" y="2788920"/>
-            <a:ext cx="2844698" cy="457200"/>
-          </a:xfrm>
-          <a:prstGeom prst="rect">
-            <a:avLst/>
-          </a:prstGeom>
-          <a:noFill/>
-        </p:spPr>
-        <p:txBody>
-          <a:bodyPr wrap="square" anchor="t">
-            <a:spAutoFit/>
-          </a:bodyPr>
-          <a:lstStyle/>
-          <a:p>
-            <a:pPr algn="l">
-              <a:lnSpc>
-                <a:spcPct val="100000"/>
-              </a:lnSpc>
-            </a:pPr>
-            <a:r>
-              <a:rPr sz="1200" b="1">
-                <a:solidFill>
-                  <a:srgbClr val="00FF41"/>
-                </a:solidFill>
-                <a:latin typeface="Courier New"/>
-              </a:rPr>
-              <a:t>AFFECT</a:t>
-            </a:r>
-          </a:p>
-        </p:txBody>
-      </p:sp>
-      <p:sp>
-        <p:nvSpPr>
-          <p:cNvPr id="13" name="TextBox 12"/>
-          <p:cNvSpPr txBox="1"/>
-          <p:nvPr/>
-        </p:nvSpPr>
-        <p:spPr>
-          <a:xfrm>
-            <a:off x="4673498" y="3246120"/>
-            <a:ext cx="2844698" cy="822960"/>
-          </a:xfrm>
-          <a:prstGeom prst="rect">
-            <a:avLst/>
-          </a:prstGeom>
-          <a:noFill/>
-        </p:spPr>
-        <p:txBody>
-          <a:bodyPr wrap="square" anchor="t">
-            <a:spAutoFit/>
-          </a:bodyPr>
-          <a:lstStyle/>
-          <a:p>
-            <a:pPr algn="l">
-              <a:lnSpc>
-                <a:spcPct val="100000"/>
-              </a:lnSpc>
-            </a:pPr>
-            <a:r>
-              <a:rPr sz="2000" b="1">
-                <a:solidFill>
-                  <a:srgbClr val="F5F7FA"/>
-                </a:solidFill>
-                <a:latin typeface="Arial"/>
-              </a:rPr>
-              <a:t>Test feeling</a:t>
-            </a:r>
-          </a:p>
-        </p:txBody>
-      </p:sp>
-      <p:sp>
-        <p:nvSpPr>
-          <p:cNvPr id="14" name="TextBox 13"/>
-          <p:cNvSpPr txBox="1"/>
-          <p:nvPr/>
-        </p:nvSpPr>
-        <p:spPr>
-          <a:xfrm>
-            <a:off x="4673498" y="4114800"/>
-            <a:ext cx="2844698" cy="1554480"/>
-          </a:xfrm>
-          <a:prstGeom prst="rect">
-            <a:avLst/>
-          </a:prstGeom>
-          <a:noFill/>
-        </p:spPr>
-        <p:txBody>
-          <a:bodyPr wrap="square" anchor="t">
-            <a:spAutoFit/>
-          </a:bodyPr>
-          <a:lstStyle/>
-          <a:p>
-            <a:pPr algn="l">
-              <a:lnSpc>
-                <a:spcPct val="110000"/>
-              </a:lnSpc>
-            </a:pPr>
-            <a:r>
-              <a:rPr sz="1500" b="0">
-                <a:solidFill>
-                  <a:srgbClr val="8A94A6"/>
-                </a:solidFill>
-                <a:latin typeface="Arial"/>
-              </a:rPr>
-              <a:t>Interview, attitude survey (pre/post), diary, empathy map, choice under pressure. Did attitudes actually move?</a:t>
-            </a:r>
-          </a:p>
-        </p:txBody>
-      </p:sp>
-      <p:sp>
-        <p:nvSpPr>
-          <p:cNvPr id="15" name="Rounded Rectangle 14"/>
-          <p:cNvSpPr/>
-          <p:nvPr/>
-        </p:nvSpPr>
-        <p:spPr>
-          <a:xfrm>
-            <a:off x="8158276" y="2468880"/>
-            <a:ext cx="3393338" cy="3383280"/>
-          </a:xfrm>
-          <a:prstGeom prst="roundRect">
-            <a:avLst/>
-          </a:prstGeom>
-          <a:solidFill>
-            <a:srgbClr val="151B26"/>
-          </a:solidFill>
-          <a:ln>
-            <a:noFill/>
-          </a:ln>
-          <a:effectLst/>
-        </p:spPr>
-        <p:style>
-          <a:lnRef idx="1">
-            <a:schemeClr val="accent1"/>
-          </a:lnRef>
-          <a:fillRef idx="3">
-            <a:schemeClr val="accent1"/>
-          </a:fillRef>
-          <a:effectRef idx="2">
-            <a:schemeClr val="accent1"/>
-          </a:effectRef>
-          <a:fontRef idx="minor">
-            <a:schemeClr val="lt1"/>
-          </a:fontRef>
-        </p:style>
-        <p:txBody>
-          <a:bodyPr rtlCol="0" anchor="ctr"/>
-          <a:lstStyle/>
-          <a:p>
-            <a:pPr algn="ctr"/>
-          </a:p>
-        </p:txBody>
-      </p:sp>
-      <p:sp>
-        <p:nvSpPr>
-          <p:cNvPr id="16" name="Rectangle 15"/>
-          <p:cNvSpPr/>
-          <p:nvPr/>
-        </p:nvSpPr>
-        <p:spPr>
-          <a:xfrm>
-            <a:off x="8158276" y="2468880"/>
-            <a:ext cx="3393338" cy="82296"/>
-          </a:xfrm>
-          <a:prstGeom prst="rect">
-            <a:avLst/>
-          </a:prstGeom>
-          <a:solidFill>
-            <a:srgbClr val="00FF41"/>
-          </a:solidFill>
-          <a:ln>
-            <a:noFill/>
-          </a:ln>
-          <a:effectLst/>
-        </p:spPr>
-        <p:style>
-          <a:lnRef idx="1">
-            <a:schemeClr val="accent1"/>
-          </a:lnRef>
-          <a:fillRef idx="3">
-            <a:schemeClr val="accent1"/>
-          </a:fillRef>
-          <a:effectRef idx="2">
-            <a:schemeClr val="accent1"/>
-          </a:effectRef>
-          <a:fontRef idx="minor">
-            <a:schemeClr val="lt1"/>
-          </a:fontRef>
-        </p:style>
-        <p:txBody>
-          <a:bodyPr rtlCol="0" anchor="ctr"/>
-          <a:lstStyle/>
-          <a:p>
-            <a:pPr algn="ctr"/>
-          </a:p>
-        </p:txBody>
-      </p:sp>
-      <p:sp>
-        <p:nvSpPr>
-          <p:cNvPr id="17" name="TextBox 16"/>
-          <p:cNvSpPr txBox="1"/>
-          <p:nvPr/>
-        </p:nvSpPr>
-        <p:spPr>
-          <a:xfrm>
-            <a:off x="8432596" y="2788920"/>
-            <a:ext cx="2844698" cy="457200"/>
-          </a:xfrm>
-          <a:prstGeom prst="rect">
-            <a:avLst/>
-          </a:prstGeom>
-          <a:noFill/>
-        </p:spPr>
-        <p:txBody>
-          <a:bodyPr wrap="square" anchor="t">
-            <a:spAutoFit/>
-          </a:bodyPr>
-          <a:lstStyle/>
-          <a:p>
-            <a:pPr algn="l">
-              <a:lnSpc>
-                <a:spcPct val="100000"/>
-              </a:lnSpc>
-            </a:pPr>
-            <a:r>
-              <a:rPr sz="1200" b="1">
-                <a:solidFill>
-                  <a:srgbClr val="00FF41"/>
-                </a:solidFill>
-                <a:latin typeface="Courier New"/>
-              </a:rPr>
-              <a:t>EVIDENCE</a:t>
-            </a:r>
-          </a:p>
-        </p:txBody>
-      </p:sp>
-      <p:sp>
-        <p:nvSpPr>
-          <p:cNvPr id="18" name="TextBox 17"/>
-          <p:cNvSpPr txBox="1"/>
-          <p:nvPr/>
-        </p:nvSpPr>
-        <p:spPr>
-          <a:xfrm>
-            <a:off x="8432596" y="3246120"/>
-            <a:ext cx="2844698" cy="822960"/>
-          </a:xfrm>
-          <a:prstGeom prst="rect">
-            <a:avLst/>
-          </a:prstGeom>
-          <a:noFill/>
-        </p:spPr>
-        <p:txBody>
-          <a:bodyPr wrap="square" anchor="t">
-            <a:spAutoFit/>
-          </a:bodyPr>
-          <a:lstStyle/>
-          <a:p>
-            <a:pPr algn="l">
-              <a:lnSpc>
-                <a:spcPct val="100000"/>
-              </a:lnSpc>
-            </a:pPr>
-            <a:r>
-              <a:rPr sz="2000" b="1">
-                <a:solidFill>
-                  <a:srgbClr val="F5F7FA"/>
-                </a:solidFill>
-                <a:latin typeface="Arial"/>
-              </a:rPr>
-              <a:t>Not opinion</a:t>
-            </a:r>
-          </a:p>
-        </p:txBody>
-      </p:sp>
-      <p:sp>
-        <p:nvSpPr>
-          <p:cNvPr id="19" name="TextBox 18"/>
-          <p:cNvSpPr txBox="1"/>
-          <p:nvPr/>
-        </p:nvSpPr>
-        <p:spPr>
-          <a:xfrm>
-            <a:off x="8432596" y="4114800"/>
-            <a:ext cx="2844698" cy="1554480"/>
-          </a:xfrm>
-          <a:prstGeom prst="rect">
-            <a:avLst/>
-          </a:prstGeom>
-          <a:noFill/>
-        </p:spPr>
-        <p:txBody>
-          <a:bodyPr wrap="square" anchor="t">
-            <a:spAutoFit/>
-          </a:bodyPr>
-          <a:lstStyle/>
-          <a:p>
-            <a:pPr algn="l">
-              <a:lnSpc>
-                <a:spcPct val="110000"/>
-              </a:lnSpc>
-            </a:pPr>
-            <a:r>
-              <a:rPr sz="1500" b="0">
-                <a:solidFill>
-                  <a:srgbClr val="8A94A6"/>
-                </a:solidFill>
-                <a:latin typeface="Arial"/>
-              </a:rPr>
-              <a:t>Record what they DID or what you measured - not "they said they liked it." A hopeful yes is not evidence.</a:t>
-            </a:r>
-          </a:p>
-        </p:txBody>
-      </p:sp>
-      <p:sp>
-        <p:nvSpPr>
-          <p:cNvPr id="20" name="TextBox 19"/>
           <p:cNvSpPr txBox="1"/>
           <p:nvPr/>
         </p:nvSpPr>
@@ -9500,7 +10381,7 @@
                 </a:solidFill>
                 <a:latin typeface="Courier New"/>
               </a:rPr>
-              <a:t>STEP 3 - USE A VALIDATED INSTRUMENT</a:t>
+              <a:t>STEP 2 - RESEARCH IT</a:t>
             </a:r>
           </a:p>
         </p:txBody>
@@ -9583,7 +10464,7 @@
                 </a:solidFill>
                 <a:latin typeface="Arial"/>
               </a:rPr>
-              <a:t>Don't invent the questions</a:t>
+              <a:t>Find out what has already been tried</a:t>
             </a:r>
           </a:p>
         </p:txBody>
@@ -9631,7 +10512,7 @@
                 </a:solidFill>
                 <a:latin typeface="Arial"/>
               </a:rPr>
-              <a:t>UEQ - measures UX beyond usability: attractiveness, novelty, stimulation. For delight / trust / craft.</a:t>
+              <a:t>Someone has tried to move this value before. Find out how it went - BEFORE you invent a metric.</a:t>
             </a:r>
           </a:p>
           <a:p>
@@ -9656,7 +10537,7 @@
                 </a:solidFill>
                 <a:latin typeface="Arial"/>
               </a:rPr>
-              <a:t>HRI Scale Database (George Mason) - browse validated scales (trust, warmth, competence, safety), rated for quality.</a:t>
+              <a:t>Google Scholar (and its AI search): how have others defined and MEASURED this value?</a:t>
             </a:r>
           </a:p>
           <a:p>
@@ -9681,7 +10562,7 @@
                 </a:solidFill>
                 <a:latin typeface="Arial"/>
               </a:rPr>
-              <a:t>METUX / Self-Determination scales - autonomy, competence, relatedness. For wellbeing &amp; empowerment values.</a:t>
+              <a:t>What interventions actually produced positive value change - and which ones FAILED?</a:t>
             </a:r>
           </a:p>
           <a:p>
@@ -9706,7 +10587,7 @@
                 </a:solidFill>
                 <a:latin typeface="Arial"/>
               </a:rPr>
-              <a:t>Vibed Slop Detector (impeccable.style rules) - generic AI "slop" is evidence craft &amp; originality didn't get in.</a:t>
+              <a:t>Figma's design-research library: how to actually run the method you picked.</a:t>
             </a:r>
           </a:p>
           <a:p>
@@ -9731,7 +10612,7 @@
                 </a:solidFill>
                 <a:latin typeface="Arial"/>
               </a:rPr>
-              <a:t>Match the instrument to the value - run the RIGHT one, not all of them.</a:t>
+              <a:t>Bring back 2-3 real sources -&gt; one instrument or task you can borrow, one failure mode to avoid.</a:t>
             </a:r>
           </a:p>
         </p:txBody>

--- a/slides/Week3-Tue-User-Testing-II.pptx
+++ b/slides/Week3-Tue-User-Testing-II.pptx
@@ -21,6 +21,8 @@
     <p:sldId id="269" r:id="rId21"/>
     <p:sldId id="270" r:id="rId22"/>
     <p:sldId id="271" r:id="rId23"/>
+    <p:sldId id="272" r:id="rId24"/>
+    <p:sldId id="273" r:id="rId25"/>
   </p:sldIdLst>
   <p:sldSz cx="12191695" cy="6858000" type="screen4x3"/>
   <p:notesSz cx="6858000" cy="9144000"/>
@@ -6978,6 +6980,653 @@
       <p:sp>
         <p:nvSpPr>
           <p:cNvPr id="14" name="TextBox 13"/>
+          <p:cNvSpPr txBox="1"/>
+          <p:nvPr/>
+        </p:nvSpPr>
+        <p:spPr>
+          <a:xfrm>
+            <a:off x="640080" y="6355080"/>
+            <a:ext cx="10972800" cy="365760"/>
+          </a:xfrm>
+          <a:prstGeom prst="rect">
+            <a:avLst/>
+          </a:prstGeom>
+          <a:noFill/>
+        </p:spPr>
+        <p:txBody>
+          <a:bodyPr wrap="square" anchor="t">
+            <a:spAutoFit/>
+          </a:bodyPr>
+          <a:lstStyle/>
+          <a:p>
+            <a:pPr algn="l">
+              <a:lnSpc>
+                <a:spcPct val="100000"/>
+              </a:lnSpc>
+            </a:pPr>
+            <a:r>
+              <a:rPr sz="1000" b="0">
+                <a:solidFill>
+                  <a:srgbClr val="5A6474"/>
+                </a:solidFill>
+                <a:latin typeface="Courier New"/>
+              </a:rPr>
+              <a:t>Good Code, Good Vibes · TECHIE 1121 · Cornell Tech · Summer 2026</a:t>
+            </a:r>
+          </a:p>
+        </p:txBody>
+      </p:sp>
+    </p:spTree>
+  </p:cSld>
+  <p:clrMapOvr>
+    <a:masterClrMapping/>
+  </p:clrMapOvr>
+</p:sld>
+</file>
+
+<file path=ppt/slides/slide17.xml><?xml version="1.0" encoding="utf-8"?>
+<p:sld xmlns:a="http://schemas.openxmlformats.org/drawingml/2006/main" xmlns:p="http://schemas.openxmlformats.org/presentationml/2006/main" xmlns:r="http://schemas.openxmlformats.org/officeDocument/2006/relationships">
+  <p:cSld>
+    <p:bg>
+      <p:bgPr>
+        <a:solidFill>
+          <a:srgbClr val="0B0E14"/>
+        </a:solidFill>
+        <a:effectLst/>
+      </p:bgPr>
+    </p:bg>
+    <p:spTree>
+      <p:nvGrpSpPr>
+        <p:cNvPr id="1" name=""/>
+        <p:cNvGrpSpPr/>
+        <p:nvPr/>
+      </p:nvGrpSpPr>
+      <p:grpSpPr/>
+      <p:sp>
+        <p:nvSpPr>
+          <p:cNvPr id="2" name="TextBox 1"/>
+          <p:cNvSpPr txBox="1"/>
+          <p:nvPr/>
+        </p:nvSpPr>
+        <p:spPr>
+          <a:xfrm>
+            <a:off x="640080" y="502920"/>
+            <a:ext cx="10058400" cy="365760"/>
+          </a:xfrm>
+          <a:prstGeom prst="rect">
+            <a:avLst/>
+          </a:prstGeom>
+          <a:noFill/>
+        </p:spPr>
+        <p:txBody>
+          <a:bodyPr wrap="square" anchor="t">
+            <a:spAutoFit/>
+          </a:bodyPr>
+          <a:lstStyle/>
+          <a:p>
+            <a:pPr algn="l">
+              <a:lnSpc>
+                <a:spcPct val="100000"/>
+              </a:lnSpc>
+            </a:pPr>
+            <a:r>
+              <a:rPr sz="1300" b="1">
+                <a:solidFill>
+                  <a:srgbClr val="00FF41"/>
+                </a:solidFill>
+                <a:latin typeface="Courier New"/>
+              </a:rPr>
+              <a:t>RESEARCH TOOLS</a:t>
+            </a:r>
+          </a:p>
+        </p:txBody>
+      </p:sp>
+      <p:sp>
+        <p:nvSpPr>
+          <p:cNvPr id="3" name="Rectangle 2"/>
+          <p:cNvSpPr/>
+          <p:nvPr/>
+        </p:nvSpPr>
+        <p:spPr>
+          <a:xfrm>
+            <a:off x="640080" y="932688"/>
+            <a:ext cx="822960" cy="73152"/>
+          </a:xfrm>
+          <a:prstGeom prst="rect">
+            <a:avLst/>
+          </a:prstGeom>
+          <a:solidFill>
+            <a:srgbClr val="00FF41"/>
+          </a:solidFill>
+          <a:ln>
+            <a:noFill/>
+          </a:ln>
+          <a:effectLst/>
+        </p:spPr>
+        <p:style>
+          <a:lnRef idx="1">
+            <a:schemeClr val="accent1"/>
+          </a:lnRef>
+          <a:fillRef idx="3">
+            <a:schemeClr val="accent1"/>
+          </a:fillRef>
+          <a:effectRef idx="2">
+            <a:schemeClr val="accent1"/>
+          </a:effectRef>
+          <a:fontRef idx="minor">
+            <a:schemeClr val="lt1"/>
+          </a:fontRef>
+        </p:style>
+        <p:txBody>
+          <a:bodyPr rtlCol="0" anchor="ctr"/>
+          <a:lstStyle/>
+          <a:p>
+            <a:pPr algn="ctr"/>
+          </a:p>
+        </p:txBody>
+      </p:sp>
+      <p:sp>
+        <p:nvSpPr>
+          <p:cNvPr id="4" name="TextBox 3"/>
+          <p:cNvSpPr txBox="1"/>
+          <p:nvPr/>
+        </p:nvSpPr>
+        <p:spPr>
+          <a:xfrm>
+            <a:off x="640080" y="1188720"/>
+            <a:ext cx="10972800" cy="1097280"/>
+          </a:xfrm>
+          <a:prstGeom prst="rect">
+            <a:avLst/>
+          </a:prstGeom>
+          <a:noFill/>
+        </p:spPr>
+        <p:txBody>
+          <a:bodyPr wrap="square" anchor="t">
+            <a:spAutoFit/>
+          </a:bodyPr>
+          <a:lstStyle/>
+          <a:p>
+            <a:pPr algn="l">
+              <a:lnSpc>
+                <a:spcPct val="100000"/>
+              </a:lnSpc>
+            </a:pPr>
+            <a:r>
+              <a:rPr sz="3400" b="1">
+                <a:solidFill>
+                  <a:srgbClr val="F5F7FA"/>
+                </a:solidFill>
+                <a:latin typeface="Arial"/>
+              </a:rPr>
+              <a:t>Find what's been tried, then measure it</a:t>
+            </a:r>
+          </a:p>
+        </p:txBody>
+      </p:sp>
+      <p:sp>
+        <p:nvSpPr>
+          <p:cNvPr id="5" name="TextBox 4"/>
+          <p:cNvSpPr txBox="1"/>
+          <p:nvPr/>
+        </p:nvSpPr>
+        <p:spPr>
+          <a:xfrm>
+            <a:off x="658368" y="2286000"/>
+            <a:ext cx="10881360" cy="3657600"/>
+          </a:xfrm>
+          <a:prstGeom prst="rect">
+            <a:avLst/>
+          </a:prstGeom>
+          <a:noFill/>
+        </p:spPr>
+        <p:txBody>
+          <a:bodyPr wrap="square" anchor="t">
+            <a:spAutoFit/>
+          </a:bodyPr>
+          <a:lstStyle/>
+          <a:p>
+            <a:pPr algn="l">
+              <a:lnSpc>
+                <a:spcPct val="112000"/>
+              </a:lnSpc>
+            </a:pPr>
+            <a:r>
+              <a:rPr sz="2000" b="1">
+                <a:solidFill>
+                  <a:srgbClr val="00FF41"/>
+                </a:solidFill>
+                <a:latin typeface="Arial"/>
+              </a:rPr>
+              <a:t>•  </a:t>
+            </a:r>
+            <a:r>
+              <a:rPr sz="2000" b="0">
+                <a:solidFill>
+                  <a:srgbClr val="F5F7FA"/>
+                </a:solidFill>
+                <a:latin typeface="Arial"/>
+              </a:rPr>
+              <a:t>Google Scholar + its AI overview - how others defined and MEASURED your value.</a:t>
+            </a:r>
+          </a:p>
+          <a:p>
+            <a:pPr algn="l">
+              <a:lnSpc>
+                <a:spcPct val="112000"/>
+              </a:lnSpc>
+            </a:pPr>
+            <a:r>
+              <a:rPr sz="2000" b="1">
+                <a:solidFill>
+                  <a:srgbClr val="00FF41"/>
+                </a:solidFill>
+                <a:latin typeface="Arial"/>
+              </a:rPr>
+              <a:t>•  </a:t>
+            </a:r>
+            <a:r>
+              <a:rPr sz="2000" b="0">
+                <a:solidFill>
+                  <a:srgbClr val="F5F7FA"/>
+                </a:solidFill>
+                <a:latin typeface="Arial"/>
+              </a:rPr>
+              <a:t>Figma's design-research library - how to actually run a concept test, interview, or survey.</a:t>
+            </a:r>
+          </a:p>
+          <a:p>
+            <a:pPr algn="l">
+              <a:lnSpc>
+                <a:spcPct val="112000"/>
+              </a:lnSpc>
+            </a:pPr>
+            <a:r>
+              <a:rPr sz="2000" b="1">
+                <a:solidFill>
+                  <a:srgbClr val="00FF41"/>
+                </a:solidFill>
+                <a:latin typeface="Arial"/>
+              </a:rPr>
+              <a:t>•  </a:t>
+            </a:r>
+            <a:r>
+              <a:rPr sz="2000" b="0">
+                <a:solidFill>
+                  <a:srgbClr val="F5F7FA"/>
+                </a:solidFill>
+                <a:latin typeface="Arial"/>
+              </a:rPr>
+              <a:t>Instruments: UEQ (ueq-online.org), the HRI Scale Database, METUX / SDT scales.</a:t>
+            </a:r>
+          </a:p>
+          <a:p>
+            <a:pPr algn="l">
+              <a:lnSpc>
+                <a:spcPct val="112000"/>
+              </a:lnSpc>
+            </a:pPr>
+            <a:r>
+              <a:rPr sz="2000" b="1">
+                <a:solidFill>
+                  <a:srgbClr val="00FF41"/>
+                </a:solidFill>
+                <a:latin typeface="Arial"/>
+              </a:rPr>
+              <a:t>•  </a:t>
+            </a:r>
+            <a:r>
+              <a:rPr sz="2000" b="0">
+                <a:solidFill>
+                  <a:srgbClr val="F5F7FA"/>
+                </a:solidFill>
+                <a:latin typeface="Arial"/>
+              </a:rPr>
+              <a:t>Vibed Slop Detector - run it on your live page for a craft / originality read.</a:t>
+            </a:r>
+          </a:p>
+          <a:p>
+            <a:pPr algn="l">
+              <a:lnSpc>
+                <a:spcPct val="112000"/>
+              </a:lnSpc>
+            </a:pPr>
+            <a:r>
+              <a:rPr sz="2000" b="1">
+                <a:solidFill>
+                  <a:srgbClr val="00FF41"/>
+                </a:solidFill>
+                <a:latin typeface="Arial"/>
+              </a:rPr>
+              <a:t>•  </a:t>
+            </a:r>
+            <a:r>
+              <a:rPr sz="2000" b="0">
+                <a:solidFill>
+                  <a:srgbClr val="F5F7FA"/>
+                </a:solidFill>
+                <a:latin typeface="Arial"/>
+              </a:rPr>
+              <a:t>Keep real citations straight (Zotero or a shared doc) - never invent one.</a:t>
+            </a:r>
+          </a:p>
+        </p:txBody>
+      </p:sp>
+      <p:sp>
+        <p:nvSpPr>
+          <p:cNvPr id="6" name="TextBox 5"/>
+          <p:cNvSpPr txBox="1"/>
+          <p:nvPr/>
+        </p:nvSpPr>
+        <p:spPr>
+          <a:xfrm>
+            <a:off x="640080" y="6355080"/>
+            <a:ext cx="10972800" cy="365760"/>
+          </a:xfrm>
+          <a:prstGeom prst="rect">
+            <a:avLst/>
+          </a:prstGeom>
+          <a:noFill/>
+        </p:spPr>
+        <p:txBody>
+          <a:bodyPr wrap="square" anchor="t">
+            <a:spAutoFit/>
+          </a:bodyPr>
+          <a:lstStyle/>
+          <a:p>
+            <a:pPr algn="l">
+              <a:lnSpc>
+                <a:spcPct val="100000"/>
+              </a:lnSpc>
+            </a:pPr>
+            <a:r>
+              <a:rPr sz="1000" b="0">
+                <a:solidFill>
+                  <a:srgbClr val="5A6474"/>
+                </a:solidFill>
+                <a:latin typeface="Courier New"/>
+              </a:rPr>
+              <a:t>Good Code, Good Vibes · TECHIE 1121 · Cornell Tech · Summer 2026</a:t>
+            </a:r>
+          </a:p>
+        </p:txBody>
+      </p:sp>
+    </p:spTree>
+  </p:cSld>
+  <p:clrMapOvr>
+    <a:masterClrMapping/>
+  </p:clrMapOvr>
+</p:sld>
+</file>
+
+<file path=ppt/slides/slide18.xml><?xml version="1.0" encoding="utf-8"?>
+<p:sld xmlns:a="http://schemas.openxmlformats.org/drawingml/2006/main" xmlns:p="http://schemas.openxmlformats.org/presentationml/2006/main" xmlns:r="http://schemas.openxmlformats.org/officeDocument/2006/relationships">
+  <p:cSld>
+    <p:bg>
+      <p:bgPr>
+        <a:solidFill>
+          <a:srgbClr val="0B0E14"/>
+        </a:solidFill>
+        <a:effectLst/>
+      </p:bgPr>
+    </p:bg>
+    <p:spTree>
+      <p:nvGrpSpPr>
+        <p:cNvPr id="1" name=""/>
+        <p:cNvGrpSpPr/>
+        <p:nvPr/>
+      </p:nvGrpSpPr>
+      <p:grpSpPr/>
+      <p:sp>
+        <p:nvSpPr>
+          <p:cNvPr id="2" name="TextBox 1"/>
+          <p:cNvSpPr txBox="1"/>
+          <p:nvPr/>
+        </p:nvSpPr>
+        <p:spPr>
+          <a:xfrm>
+            <a:off x="640080" y="502920"/>
+            <a:ext cx="10058400" cy="365760"/>
+          </a:xfrm>
+          <a:prstGeom prst="rect">
+            <a:avLst/>
+          </a:prstGeom>
+          <a:noFill/>
+        </p:spPr>
+        <p:txBody>
+          <a:bodyPr wrap="square" anchor="t">
+            <a:spAutoFit/>
+          </a:bodyPr>
+          <a:lstStyle/>
+          <a:p>
+            <a:pPr algn="l">
+              <a:lnSpc>
+                <a:spcPct val="100000"/>
+              </a:lnSpc>
+            </a:pPr>
+            <a:r>
+              <a:rPr sz="1300" b="1">
+                <a:solidFill>
+                  <a:srgbClr val="00FF41"/>
+                </a:solidFill>
+                <a:latin typeface="Courier New"/>
+              </a:rPr>
+              <a:t>SCREENSHOT SLOT</a:t>
+            </a:r>
+          </a:p>
+        </p:txBody>
+      </p:sp>
+      <p:sp>
+        <p:nvSpPr>
+          <p:cNvPr id="3" name="Rectangle 2"/>
+          <p:cNvSpPr/>
+          <p:nvPr/>
+        </p:nvSpPr>
+        <p:spPr>
+          <a:xfrm>
+            <a:off x="640080" y="932688"/>
+            <a:ext cx="822960" cy="73152"/>
+          </a:xfrm>
+          <a:prstGeom prst="rect">
+            <a:avLst/>
+          </a:prstGeom>
+          <a:solidFill>
+            <a:srgbClr val="00FF41"/>
+          </a:solidFill>
+          <a:ln>
+            <a:noFill/>
+          </a:ln>
+          <a:effectLst/>
+        </p:spPr>
+        <p:style>
+          <a:lnRef idx="1">
+            <a:schemeClr val="accent1"/>
+          </a:lnRef>
+          <a:fillRef idx="3">
+            <a:schemeClr val="accent1"/>
+          </a:fillRef>
+          <a:effectRef idx="2">
+            <a:schemeClr val="accent1"/>
+          </a:effectRef>
+          <a:fontRef idx="minor">
+            <a:schemeClr val="lt1"/>
+          </a:fontRef>
+        </p:style>
+        <p:txBody>
+          <a:bodyPr rtlCol="0" anchor="ctr"/>
+          <a:lstStyle/>
+          <a:p>
+            <a:pPr algn="ctr"/>
+          </a:p>
+        </p:txBody>
+      </p:sp>
+      <p:sp>
+        <p:nvSpPr>
+          <p:cNvPr id="4" name="TextBox 3"/>
+          <p:cNvSpPr txBox="1"/>
+          <p:nvPr/>
+        </p:nvSpPr>
+        <p:spPr>
+          <a:xfrm>
+            <a:off x="640080" y="1188720"/>
+            <a:ext cx="10972800" cy="914400"/>
+          </a:xfrm>
+          <a:prstGeom prst="rect">
+            <a:avLst/>
+          </a:prstGeom>
+          <a:noFill/>
+        </p:spPr>
+        <p:txBody>
+          <a:bodyPr wrap="square" anchor="t">
+            <a:spAutoFit/>
+          </a:bodyPr>
+          <a:lstStyle/>
+          <a:p>
+            <a:pPr algn="l">
+              <a:lnSpc>
+                <a:spcPct val="100000"/>
+              </a:lnSpc>
+            </a:pPr>
+            <a:r>
+              <a:rPr sz="3000" b="1">
+                <a:solidFill>
+                  <a:srgbClr val="F5F7FA"/>
+                </a:solidFill>
+                <a:latin typeface="Arial"/>
+              </a:rPr>
+              <a:t>Show your evidence</a:t>
+            </a:r>
+          </a:p>
+        </p:txBody>
+      </p:sp>
+      <p:sp>
+        <p:nvSpPr>
+          <p:cNvPr id="5" name="Rounded Rectangle 4"/>
+          <p:cNvSpPr/>
+          <p:nvPr/>
+        </p:nvSpPr>
+        <p:spPr>
+          <a:xfrm>
+            <a:off x="2194560" y="2331720"/>
+            <a:ext cx="7772400" cy="3566160"/>
+          </a:xfrm>
+          <a:prstGeom prst="roundRect">
+            <a:avLst/>
+          </a:prstGeom>
+          <a:solidFill>
+            <a:srgbClr val="151B26"/>
+          </a:solidFill>
+          <a:ln w="19050">
+            <a:solidFill>
+              <a:srgbClr val="00FF41"/>
+            </a:solidFill>
+            <a:prstDash val="dash"/>
+          </a:ln>
+          <a:effectLst/>
+        </p:spPr>
+        <p:style>
+          <a:lnRef idx="1">
+            <a:schemeClr val="accent1"/>
+          </a:lnRef>
+          <a:fillRef idx="3">
+            <a:schemeClr val="accent1"/>
+          </a:fillRef>
+          <a:effectRef idx="2">
+            <a:schemeClr val="accent1"/>
+          </a:effectRef>
+          <a:fontRef idx="minor">
+            <a:schemeClr val="lt1"/>
+          </a:fontRef>
+        </p:style>
+        <p:txBody>
+          <a:bodyPr rtlCol="0" anchor="ctr"/>
+          <a:lstStyle/>
+          <a:p>
+            <a:pPr algn="ctr"/>
+          </a:p>
+        </p:txBody>
+      </p:sp>
+      <p:sp>
+        <p:nvSpPr>
+          <p:cNvPr id="6" name="TextBox 5"/>
+          <p:cNvSpPr txBox="1"/>
+          <p:nvPr/>
+        </p:nvSpPr>
+        <p:spPr>
+          <a:xfrm>
+            <a:off x="2194560" y="3383280"/>
+            <a:ext cx="7772400" cy="731520"/>
+          </a:xfrm>
+          <a:prstGeom prst="rect">
+            <a:avLst/>
+          </a:prstGeom>
+          <a:noFill/>
+        </p:spPr>
+        <p:txBody>
+          <a:bodyPr wrap="square" anchor="t">
+            <a:spAutoFit/>
+          </a:bodyPr>
+          <a:lstStyle/>
+          <a:p>
+            <a:pPr algn="ctr">
+              <a:lnSpc>
+                <a:spcPct val="100000"/>
+              </a:lnSpc>
+            </a:pPr>
+            <a:r>
+              <a:rPr sz="2200" b="1">
+                <a:solidFill>
+                  <a:srgbClr val="00FF41"/>
+                </a:solidFill>
+                <a:latin typeface="Courier New"/>
+              </a:rPr>
+              <a:t>[ screenshot goes here ]</a:t>
+            </a:r>
+          </a:p>
+        </p:txBody>
+      </p:sp>
+      <p:sp>
+        <p:nvSpPr>
+          <p:cNvPr id="7" name="TextBox 6"/>
+          <p:cNvSpPr txBox="1"/>
+          <p:nvPr/>
+        </p:nvSpPr>
+        <p:spPr>
+          <a:xfrm>
+            <a:off x="2194560" y="4114800"/>
+            <a:ext cx="7772400" cy="731520"/>
+          </a:xfrm>
+          <a:prstGeom prst="rect">
+            <a:avLst/>
+          </a:prstGeom>
+          <a:noFill/>
+        </p:spPr>
+        <p:txBody>
+          <a:bodyPr wrap="square" anchor="t">
+            <a:spAutoFit/>
+          </a:bodyPr>
+          <a:lstStyle/>
+          <a:p>
+            <a:pPr algn="ctr">
+              <a:lnSpc>
+                <a:spcPct val="100000"/>
+              </a:lnSpc>
+            </a:pPr>
+            <a:r>
+              <a:rPr sz="1400" b="0">
+                <a:solidFill>
+                  <a:srgbClr val="8A94A6"/>
+                </a:solidFill>
+                <a:latin typeface="Arial"/>
+              </a:rPr>
+              <a:t>a UEQ result, a scale, a paper finding, or a slop-detector report</a:t>
+            </a:r>
+          </a:p>
+        </p:txBody>
+      </p:sp>
+      <p:sp>
+        <p:nvSpPr>
+          <p:cNvPr id="8" name="TextBox 7"/>
           <p:cNvSpPr txBox="1"/>
           <p:nvPr/>
         </p:nvSpPr>

--- a/slides/Week3-Tue-User-Testing-II.pptx
+++ b/slides/Week3-Tue-User-Testing-II.pptx
@@ -8074,7 +8074,7 @@
                 </a:solidFill>
                 <a:latin typeface="Arial"/>
               </a:rPr>
-              <a:t>From "does it work?" to "what values did we build in - and did they land?"</a:t>
+              <a:t>From "can people use it?" to "what values did we build in - and did they land?"</a:t>
             </a:r>
           </a:p>
         </p:txBody>

--- a/slides/Week3-Tue-User-Testing-II.pptx
+++ b/slides/Week3-Tue-User-Testing-II.pptx
@@ -5233,7 +5233,7 @@
                 </a:solidFill>
                 <a:latin typeface="Arial"/>
               </a:rPr>
-              <a:t>Your reading decides your design AND your test. (That is yesterday's move - and today's.)</a:t>
+              <a:t>Your operational definition decides your design AND your test. (That is yesterday's move - and today's.)</a:t>
             </a:r>
           </a:p>
         </p:txBody>
@@ -10088,7 +10088,7 @@
                 </a:solidFill>
                 <a:latin typeface="Courier New"/>
               </a:rPr>
-              <a:t>MEASURE BEYOND USABILITY</a:t>
+              <a:t>PICK THE INSTRUMENT THAT FITS YOUR VALUE</a:t>
             </a:r>
           </a:p>
         </p:txBody>
@@ -10171,7 +10171,7 @@
                 </a:solidFill>
                 <a:latin typeface="Arial"/>
               </a:rPr>
-              <a:t>Instruments that make a value legible</a:t>
+              <a:t>Examples - tie the tool to the value you are analyzing</a:t>
             </a:r>
           </a:p>
         </p:txBody>
@@ -10219,7 +10219,7 @@
                 </a:solidFill>
                 <a:latin typeface="Arial"/>
               </a:rPr>
-              <a:t>UEQ - attractiveness, novelty, stimulation, beyond just "usable".</a:t>
+              <a:t>Beauty / craft / originality -&gt; the Vibed Slop Detector (is it generic AI slop?), or UEQ attractiveness.</a:t>
             </a:r>
           </a:p>
           <a:p>
@@ -10244,7 +10244,7 @@
                 </a:solidFill>
                 <a:latin typeface="Arial"/>
               </a:rPr>
-              <a:t>HRI Scale Database / METUX + SDT scales - trust, autonomy, competence, relatedness.</a:t>
+              <a:t>Autonomy / competence / wellbeing -&gt; METUX + Self-Determination scales.</a:t>
             </a:r>
           </a:p>
           <a:p>
@@ -10269,7 +10269,7 @@
                 </a:solidFill>
                 <a:latin typeface="Arial"/>
               </a:rPr>
-              <a:t>Vibed Slop Detector - generic AI "slop" as a proxy for missing craft and care.</a:t>
+              <a:t>Trust / warmth / safety -&gt; a validated scale from the HRI Scale Database.</a:t>
             </a:r>
           </a:p>
           <a:p>
@@ -10294,7 +10294,7 @@
                 </a:solidFill>
                 <a:latin typeface="Arial"/>
               </a:rPr>
-              <a:t>Match the instrument to your reading of the value - run the right one.</a:t>
+              <a:t>Overall UX beyond usability -&gt; UEQ. The instrument has to match the value - don't default to UEQ.</a:t>
             </a:r>
           </a:p>
         </p:txBody>
@@ -11794,7 +11794,7 @@
                 </a:solidFill>
                 <a:latin typeface="Arial"/>
               </a:rPr>
-              <a:t>Pick the reading of your value you actually designed for - it decides the method.</a:t>
+              <a:t>State how you operationalize your value - that definition decides the method.</a:t>
             </a:r>
           </a:p>
           <a:p>
@@ -11819,7 +11819,7 @@
                 </a:solidFill>
                 <a:latin typeface="Arial"/>
               </a:rPr>
-              <a:t>Choose the lens + instrument that reading demands, and run a quick check.</a:t>
+              <a:t>Choose the lens + instrument that definition demands, and run a quick check.</a:t>
             </a:r>
           </a:p>
           <a:p>
@@ -11938,7 +11938,7 @@
                 </a:solidFill>
                 <a:latin typeface="Arial"/>
               </a:rPr>
-              <a:t>Team research deck + verification canvas - each person owns a named slide + a lane - due today</a:t>
+              <a:t>A value-centered user RESEARCH deck + a reflection on FigJam - each person owns a slide + a lane - due today</a:t>
             </a:r>
           </a:p>
         </p:txBody>

--- a/slides/Week3-Tue-User-Testing-II.pptx
+++ b/slides/Week3-Tue-User-Testing-II.pptx
@@ -11819,7 +11819,7 @@
                 </a:solidFill>
                 <a:latin typeface="Arial"/>
               </a:rPr>
-              <a:t>Choose the lens + instrument that definition demands, and run a quick check.</a:t>
+              <a:t>No time to run tests: RESEARCH how each lens could be verified (behavior especially) + what design interventions have worked.</a:t>
             </a:r>
           </a:p>
           <a:p>

--- a/slides/Week3-Tue-User-Testing-II.pptx
+++ b/slides/Week3-Tue-User-Testing-II.pptx
@@ -15,8 +15,8 @@
     <p:sldId id="263" r:id="rId14"/>
     <p:sldId id="264" r:id="rId15"/>
     <p:sldId id="265" r:id="rId16"/>
-    <p:sldId id="266" r:id="rId17"/>
-    <p:sldId id="267" r:id="rId18"/>
+    <p:sldId id="266" r:id="rId18"/>
+    <p:sldId id="267" r:id="rId19"/>
     <p:sldId id="268" r:id="rId20"/>
     <p:sldId id="269" r:id="rId21"/>
     <p:sldId id="270" r:id="rId22"/>
@@ -36,6 +36,8 @@
     <p:sldId id="284" r:id="rId36"/>
     <p:sldId id="285" r:id="rId37"/>
     <p:sldId id="286" r:id="rId38"/>
+    <p:sldId id="287" r:id="rId39"/>
+    <p:sldId id="288" r:id="rId40"/>
   </p:sldIdLst>
   <p:sldSz cx="12191695" cy="6858000" type="screen4x3"/>
   <p:notesSz cx="6858000" cy="9144000"/>
@@ -532,7 +534,7 @@
           <a:lstStyle/>
           <a:p>
             <a:r>
-              <a:t>Discovery I heuristic (VAP, Engelmann &amp; Nissenbaum). The upshot is a LIST OF VALUES - including 'collateral' values you didn't set out to touch.</a:t>
+              <a:t>Protected quiet reading time - keep it silent and individual. Set the exact chapter before class (VAP book is on the Drive). This grounds the operationalize + verify work that follows.</a:t>
             </a:r>
           </a:p>
         </p:txBody>
@@ -558,6 +560,76 @@
 </file>
 
 <file path=ppt/notesSlides/notesSlide2.xml><?xml version="1.0" encoding="utf-8"?>
+<p:notes xmlns:a="http://schemas.openxmlformats.org/drawingml/2006/main" xmlns:p="http://schemas.openxmlformats.org/presentationml/2006/main" xmlns:r="http://schemas.openxmlformats.org/officeDocument/2006/relationships">
+  <p:cSld>
+    <p:spTree>
+      <p:nvGrpSpPr>
+        <p:cNvPr id="1" name=""/>
+        <p:cNvGrpSpPr/>
+        <p:nvPr/>
+      </p:nvGrpSpPr>
+      <p:grpSpPr>
+        <a:xfrm>
+          <a:off x="0" y="0"/>
+          <a:ext cx="0" cy="0"/>
+          <a:chOff x="0" y="0"/>
+          <a:chExt cx="0" cy="0"/>
+        </a:xfrm>
+      </p:grpSpPr>
+      <p:sp>
+        <p:nvSpPr>
+          <p:cNvPr id="2" name="Slide Image Placeholder 1"/>
+          <p:cNvSpPr>
+            <a:spLocks noGrp="1"/>
+          </p:cNvSpPr>
+          <p:nvPr>
+            <p:ph type="sldImg" idx="2"/>
+          </p:nvPr>
+        </p:nvSpPr>
+        <p:spPr/>
+      </p:sp>
+      <p:sp>
+        <p:nvSpPr>
+          <p:cNvPr id="3" name="Notes Placeholder 2"/>
+          <p:cNvSpPr>
+            <a:spLocks noGrp="1"/>
+          </p:cNvSpPr>
+          <p:nvPr>
+            <p:ph type="body" idx="3" sz="quarter"/>
+          </p:nvPr>
+        </p:nvSpPr>
+        <p:spPr/>
+        <p:txBody>
+          <a:bodyPr/>
+          <a:lstStyle/>
+          <a:p>
+            <a:r>
+              <a:t>Discovery I heuristic (VAP, Engelmann &amp; Nissenbaum). The upshot is a LIST OF VALUES - including 'collateral' values you didn't set out to touch.</a:t>
+            </a:r>
+          </a:p>
+        </p:txBody>
+      </p:sp>
+      <p:sp>
+        <p:nvSpPr>
+          <p:cNvPr id="4" name="Slide Number Placeholder 3"/>
+          <p:cNvSpPr>
+            <a:spLocks noGrp="1"/>
+          </p:cNvSpPr>
+          <p:nvPr>
+            <p:ph type="sldNum" idx="5" sz="quarter"/>
+          </p:nvPr>
+        </p:nvSpPr>
+        <p:spPr/>
+      </p:sp>
+    </p:spTree>
+  </p:cSld>
+  <p:clrMapOvr>
+    <a:masterClrMapping/>
+  </p:clrMapOvr>
+</p:notes>
+</file>
+
+<file path=ppt/notesSlides/notesSlide3.xml><?xml version="1.0" encoding="utf-8"?>
 <p:notes xmlns:a="http://schemas.openxmlformats.org/drawingml/2006/main" xmlns:p="http://schemas.openxmlformats.org/presentationml/2006/main" xmlns:r="http://schemas.openxmlformats.org/officeDocument/2006/relationships">
   <p:cSld>
     <p:spTree>
@@ -3837,7 +3909,7 @@
                 </a:solidFill>
                 <a:latin typeface="Courier New"/>
               </a:rPr>
-              <a:t>BREAK</a:t>
+              <a:t>WHILE YOU READ</a:t>
             </a:r>
           </a:p>
         </p:txBody>
@@ -3920,7 +3992,7 @@
                 </a:solidFill>
                 <a:latin typeface="Arial"/>
               </a:rPr>
-              <a:t>~10 minutes</a:t>
+              <a:t>Read it - then we build the framework on top of it</a:t>
             </a:r>
           </a:p>
         </p:txBody>
@@ -3953,13 +4025,118 @@
               </a:lnSpc>
             </a:pPr>
             <a:r>
-              <a:rPr sz="2200" b="0">
+              <a:rPr sz="2200" b="1">
                 <a:solidFill>
                   <a:srgbClr val="F5F7FA"/>
                 </a:solidFill>
                 <a:latin typeface="Arial"/>
               </a:rPr>
-              <a:t>Stretch, water. We pick up with Discovery: what values are even in play?</a:t>
+              <a:t>Read: </a:t>
+            </a:r>
+            <a:r>
+              <a:rPr sz="2200" b="1">
+                <a:solidFill>
+                  <a:srgbClr val="00FF41"/>
+                </a:solidFill>
+                <a:latin typeface="Arial"/>
+              </a:rPr>
+              <a:t>[ Values at Play - the chapter your instructor assigns ]</a:t>
+            </a:r>
+          </a:p>
+          <a:p>
+            <a:pPr algn="l">
+              <a:lnSpc>
+                <a:spcPct val="112000"/>
+              </a:lnSpc>
+            </a:pPr>
+            <a:r>
+              <a:rPr sz="2000" b="0">
+                <a:solidFill>
+                  <a:srgbClr val="F5F7FA"/>
+                </a:solidFill>
+                <a:latin typeface="Arial"/>
+              </a:rPr>
+              <a:t/>
+            </a:r>
+          </a:p>
+          <a:p>
+            <a:pPr algn="l">
+              <a:lnSpc>
+                <a:spcPct val="112000"/>
+              </a:lnSpc>
+            </a:pPr>
+            <a:r>
+              <a:rPr sz="2000" b="0">
+                <a:solidFill>
+                  <a:srgbClr val="F5F7FA"/>
+                </a:solidFill>
+                <a:latin typeface="Arial"/>
+              </a:rPr>
+              <a:t>Mark TWO things in the margin as you go:</a:t>
+            </a:r>
+          </a:p>
+          <a:p>
+            <a:pPr algn="l">
+              <a:lnSpc>
+                <a:spcPct val="112000"/>
+              </a:lnSpc>
+            </a:pPr>
+            <a:r>
+              <a:rPr sz="1800" b="0">
+                <a:solidFill>
+                  <a:srgbClr val="8A94A6"/>
+                </a:solidFill>
+                <a:latin typeface="Arial"/>
+              </a:rPr>
+              <a:t>1.  where the author turns an abstract value into something concrete (operationalizes it)</a:t>
+            </a:r>
+          </a:p>
+          <a:p>
+            <a:pPr algn="l">
+              <a:lnSpc>
+                <a:spcPct val="112000"/>
+              </a:lnSpc>
+            </a:pPr>
+            <a:r>
+              <a:rPr sz="1800" b="0">
+                <a:solidFill>
+                  <a:srgbClr val="8A94A6"/>
+                </a:solidFill>
+                <a:latin typeface="Arial"/>
+              </a:rPr>
+              <a:t>2.  one line that fits YOUR Project 2 value - or that you disagree with</a:t>
+            </a:r>
+          </a:p>
+          <a:p>
+            <a:pPr algn="l">
+              <a:lnSpc>
+                <a:spcPct val="112000"/>
+              </a:lnSpc>
+            </a:pPr>
+            <a:r>
+              <a:rPr sz="2000" b="0">
+                <a:solidFill>
+                  <a:srgbClr val="F5F7FA"/>
+                </a:solidFill>
+                <a:latin typeface="Arial"/>
+              </a:rPr>
+              <a:t/>
+            </a:r>
+          </a:p>
+          <a:p>
+            <a:pPr algn="l">
+              <a:lnSpc>
+                <a:spcPct val="112000"/>
+              </a:lnSpc>
+            </a:pPr>
+            <a:r>
+              <a:rPr sz="1700" b="0">
+                <a:solidFill>
+                  <a:srgbClr val="5A6474"/>
+                </a:solidFill>
+                <a:latin typeface="Arial"/>
+              </a:rPr>
+              <a:t>Then 3 minutes: share one margin note with the person next to you.</a:t>
             </a:r>
           </a:p>
         </p:txBody>
@@ -4107,7 +4284,7 @@
                 </a:solidFill>
                 <a:latin typeface="Courier New"/>
               </a:rPr>
-              <a:t>PART 2 - DISCOVERY</a:t>
+              <a:t>THE HEURISTIC</a:t>
             </a:r>
           </a:p>
         </p:txBody>
@@ -4146,7 +4323,46 @@
                 </a:solidFill>
                 <a:latin typeface="Arial"/>
               </a:rPr>
-              <a:t>What values? And what do they actually mean?</a:t>
+              <a:t>Discovery -&gt; Implementation -&gt; Verification</a:t>
+            </a:r>
+          </a:p>
+        </p:txBody>
+      </p:sp>
+      <p:sp>
+        <p:nvSpPr>
+          <p:cNvPr id="5" name="TextBox 4"/>
+          <p:cNvSpPr txBox="1"/>
+          <p:nvPr/>
+        </p:nvSpPr>
+        <p:spPr>
+          <a:xfrm>
+            <a:off x="841248" y="4297680"/>
+            <a:ext cx="10058400" cy="640080"/>
+          </a:xfrm>
+          <a:prstGeom prst="rect">
+            <a:avLst/>
+          </a:prstGeom>
+          <a:noFill/>
+        </p:spPr>
+        <p:txBody>
+          <a:bodyPr wrap="square" anchor="t">
+            <a:spAutoFit/>
+          </a:bodyPr>
+          <a:lstStyle/>
+          <a:p>
+            <a:pPr algn="l">
+              <a:lnSpc>
+                <a:spcPct val="100000"/>
+              </a:lnSpc>
+            </a:pPr>
+            <a:r>
+              <a:rPr sz="1900" b="0">
+                <a:solidFill>
+                  <a:srgbClr val="8A94A6"/>
+                </a:solidFill>
+                <a:latin typeface="Arial"/>
+              </a:rPr>
+              <a:t>One loop, three moves - and it is cyclical</a:t>
             </a:r>
           </a:p>
         </p:txBody>
@@ -4211,7 +4427,7 @@
                 </a:solidFill>
                 <a:latin typeface="Courier New"/>
               </a:rPr>
-              <a:t>DISCOVERY I - CONSIDER THE SOURCES</a:t>
+              <a:t>BREAK</a:t>
             </a:r>
           </a:p>
         </p:txBody>
@@ -4269,7 +4485,7 @@
         <p:spPr>
           <a:xfrm>
             <a:off x="640080" y="1188720"/>
-            <a:ext cx="10972800" cy="914400"/>
+            <a:ext cx="10972800" cy="1097280"/>
           </a:xfrm>
           <a:prstGeom prst="rect">
             <a:avLst/>
@@ -4288,635 +4504,59 @@
               </a:lnSpc>
             </a:pPr>
             <a:r>
-              <a:rPr sz="3200" b="1">
+              <a:rPr sz="3400" b="1">
                 <a:solidFill>
                   <a:srgbClr val="F5F7FA"/>
                 </a:solidFill>
                 <a:latin typeface="Arial"/>
               </a:rPr>
-              <a:t>Where the values hide</a:t>
-            </a:r>
-          </a:p>
-        </p:txBody>
-      </p:sp>
-      <p:sp>
-        <p:nvSpPr>
-          <p:cNvPr id="5" name="Rounded Rectangle 4"/>
-          <p:cNvSpPr/>
-          <p:nvPr/>
-        </p:nvSpPr>
-        <p:spPr>
-          <a:xfrm>
-            <a:off x="640080" y="2468880"/>
-            <a:ext cx="3393338" cy="3383280"/>
-          </a:xfrm>
-          <a:prstGeom prst="roundRect">
-            <a:avLst/>
-          </a:prstGeom>
-          <a:solidFill>
-            <a:srgbClr val="151B26"/>
-          </a:solidFill>
-          <a:ln>
-            <a:noFill/>
-          </a:ln>
-          <a:effectLst/>
-        </p:spPr>
-        <p:style>
-          <a:lnRef idx="1">
-            <a:schemeClr val="accent1"/>
-          </a:lnRef>
-          <a:fillRef idx="3">
-            <a:schemeClr val="accent1"/>
-          </a:fillRef>
-          <a:effectRef idx="2">
-            <a:schemeClr val="accent1"/>
-          </a:effectRef>
-          <a:fontRef idx="minor">
-            <a:schemeClr val="lt1"/>
-          </a:fontRef>
-        </p:style>
-        <p:txBody>
-          <a:bodyPr rtlCol="0" anchor="ctr"/>
-          <a:lstStyle/>
-          <a:p>
-            <a:pPr algn="ctr"/>
-          </a:p>
-        </p:txBody>
-      </p:sp>
-      <p:sp>
-        <p:nvSpPr>
-          <p:cNvPr id="6" name="Rectangle 5"/>
-          <p:cNvSpPr/>
-          <p:nvPr/>
-        </p:nvSpPr>
-        <p:spPr>
-          <a:xfrm>
-            <a:off x="640080" y="2468880"/>
-            <a:ext cx="3393338" cy="82296"/>
-          </a:xfrm>
-          <a:prstGeom prst="rect">
-            <a:avLst/>
-          </a:prstGeom>
-          <a:solidFill>
-            <a:srgbClr val="00FF41"/>
-          </a:solidFill>
-          <a:ln>
-            <a:noFill/>
-          </a:ln>
-          <a:effectLst/>
-        </p:spPr>
-        <p:style>
-          <a:lnRef idx="1">
-            <a:schemeClr val="accent1"/>
-          </a:lnRef>
-          <a:fillRef idx="3">
-            <a:schemeClr val="accent1"/>
-          </a:fillRef>
-          <a:effectRef idx="2">
-            <a:schemeClr val="accent1"/>
-          </a:effectRef>
-          <a:fontRef idx="minor">
-            <a:schemeClr val="lt1"/>
-          </a:fontRef>
-        </p:style>
-        <p:txBody>
-          <a:bodyPr rtlCol="0" anchor="ctr"/>
-          <a:lstStyle/>
-          <a:p>
-            <a:pPr algn="ctr"/>
-          </a:p>
-        </p:txBody>
-      </p:sp>
-      <p:sp>
-        <p:nvSpPr>
-          <p:cNvPr id="7" name="TextBox 6"/>
-          <p:cNvSpPr txBox="1"/>
-          <p:nvPr/>
-        </p:nvSpPr>
-        <p:spPr>
-          <a:xfrm>
-            <a:off x="914400" y="2788920"/>
-            <a:ext cx="2844698" cy="457200"/>
-          </a:xfrm>
-          <a:prstGeom prst="rect">
-            <a:avLst/>
-          </a:prstGeom>
-          <a:noFill/>
-        </p:spPr>
-        <p:txBody>
-          <a:bodyPr wrap="square" anchor="t">
-            <a:spAutoFit/>
-          </a:bodyPr>
-          <a:lstStyle/>
-          <a:p>
-            <a:pPr algn="l">
-              <a:lnSpc>
-                <a:spcPct val="100000"/>
-              </a:lnSpc>
-            </a:pPr>
-            <a:r>
-              <a:rPr sz="1200" b="1">
-                <a:solidFill>
-                  <a:srgbClr val="00FF41"/>
-                </a:solidFill>
-                <a:latin typeface="Courier New"/>
-              </a:rPr>
-              <a:t>FUNCTIONAL DESCRIPTION</a:t>
-            </a:r>
-          </a:p>
-        </p:txBody>
-      </p:sp>
-      <p:sp>
-        <p:nvSpPr>
-          <p:cNvPr id="8" name="TextBox 7"/>
-          <p:cNvSpPr txBox="1"/>
-          <p:nvPr/>
-        </p:nvSpPr>
-        <p:spPr>
-          <a:xfrm>
-            <a:off x="914400" y="3246120"/>
-            <a:ext cx="2844698" cy="822960"/>
-          </a:xfrm>
-          <a:prstGeom prst="rect">
-            <a:avLst/>
-          </a:prstGeom>
-          <a:noFill/>
-        </p:spPr>
-        <p:txBody>
-          <a:bodyPr wrap="square" anchor="t">
-            <a:spAutoFit/>
-          </a:bodyPr>
-          <a:lstStyle/>
-          <a:p>
-            <a:pPr algn="l">
-              <a:lnSpc>
-                <a:spcPct val="100000"/>
-              </a:lnSpc>
-            </a:pPr>
-            <a:r>
-              <a:rPr sz="2000" b="1">
+              <a:t>~10 minutes</a:t>
+            </a:r>
+          </a:p>
+        </p:txBody>
+      </p:sp>
+      <p:sp>
+        <p:nvSpPr>
+          <p:cNvPr id="5" name="TextBox 4"/>
+          <p:cNvSpPr txBox="1"/>
+          <p:nvPr/>
+        </p:nvSpPr>
+        <p:spPr>
+          <a:xfrm>
+            <a:off x="658368" y="2286000"/>
+            <a:ext cx="10881360" cy="3657600"/>
+          </a:xfrm>
+          <a:prstGeom prst="rect">
+            <a:avLst/>
+          </a:prstGeom>
+          <a:noFill/>
+        </p:spPr>
+        <p:txBody>
+          <a:bodyPr wrap="square" anchor="t">
+            <a:spAutoFit/>
+          </a:bodyPr>
+          <a:lstStyle/>
+          <a:p>
+            <a:pPr algn="l">
+              <a:lnSpc>
+                <a:spcPct val="112000"/>
+              </a:lnSpc>
+            </a:pPr>
+            <a:r>
+              <a:rPr sz="2200" b="0">
                 <a:solidFill>
                   <a:srgbClr val="F5F7FA"/>
                 </a:solidFill>
                 <a:latin typeface="Arial"/>
               </a:rPr>
-              <a:t>What does it do?</a:t>
-            </a:r>
-          </a:p>
-        </p:txBody>
-      </p:sp>
-      <p:sp>
-        <p:nvSpPr>
-          <p:cNvPr id="9" name="TextBox 8"/>
-          <p:cNvSpPr txBox="1"/>
-          <p:nvPr/>
-        </p:nvSpPr>
-        <p:spPr>
-          <a:xfrm>
-            <a:off x="914400" y="4114800"/>
-            <a:ext cx="2844698" cy="1554480"/>
-          </a:xfrm>
-          <a:prstGeom prst="rect">
-            <a:avLst/>
-          </a:prstGeom>
-          <a:noFill/>
-        </p:spPr>
-        <p:txBody>
-          <a:bodyPr wrap="square" anchor="t">
-            <a:spAutoFit/>
-          </a:bodyPr>
-          <a:lstStyle/>
-          <a:p>
-            <a:pPr algn="l">
-              <a:lnSpc>
-                <a:spcPct val="110000"/>
-              </a:lnSpc>
-            </a:pPr>
-            <a:r>
-              <a:rPr sz="1500" b="0">
-                <a:solidFill>
-                  <a:srgbClr val="8A94A6"/>
-                </a:solidFill>
-                <a:latin typeface="Arial"/>
-              </a:rPr>
-              <a:t>The core function already implies values - a secure messenger implies privacy; a feed implies attention.</a:t>
-            </a:r>
-          </a:p>
-        </p:txBody>
-      </p:sp>
-      <p:sp>
-        <p:nvSpPr>
-          <p:cNvPr id="10" name="Rounded Rectangle 9"/>
-          <p:cNvSpPr/>
-          <p:nvPr/>
-        </p:nvSpPr>
-        <p:spPr>
-          <a:xfrm>
-            <a:off x="4399178" y="2468880"/>
-            <a:ext cx="3393338" cy="3383280"/>
-          </a:xfrm>
-          <a:prstGeom prst="roundRect">
-            <a:avLst/>
-          </a:prstGeom>
-          <a:solidFill>
-            <a:srgbClr val="151B26"/>
-          </a:solidFill>
-          <a:ln>
-            <a:noFill/>
-          </a:ln>
-          <a:effectLst/>
-        </p:spPr>
-        <p:style>
-          <a:lnRef idx="1">
-            <a:schemeClr val="accent1"/>
-          </a:lnRef>
-          <a:fillRef idx="3">
-            <a:schemeClr val="accent1"/>
-          </a:fillRef>
-          <a:effectRef idx="2">
-            <a:schemeClr val="accent1"/>
-          </a:effectRef>
-          <a:fontRef idx="minor">
-            <a:schemeClr val="lt1"/>
-          </a:fontRef>
-        </p:style>
-        <p:txBody>
-          <a:bodyPr rtlCol="0" anchor="ctr"/>
-          <a:lstStyle/>
-          <a:p>
-            <a:pPr algn="ctr"/>
-          </a:p>
-        </p:txBody>
-      </p:sp>
-      <p:sp>
-        <p:nvSpPr>
-          <p:cNvPr id="11" name="Rectangle 10"/>
-          <p:cNvSpPr/>
-          <p:nvPr/>
-        </p:nvSpPr>
-        <p:spPr>
-          <a:xfrm>
-            <a:off x="4399178" y="2468880"/>
-            <a:ext cx="3393338" cy="82296"/>
-          </a:xfrm>
-          <a:prstGeom prst="rect">
-            <a:avLst/>
-          </a:prstGeom>
-          <a:solidFill>
-            <a:srgbClr val="00FF41"/>
-          </a:solidFill>
-          <a:ln>
-            <a:noFill/>
-          </a:ln>
-          <a:effectLst/>
-        </p:spPr>
-        <p:style>
-          <a:lnRef idx="1">
-            <a:schemeClr val="accent1"/>
-          </a:lnRef>
-          <a:fillRef idx="3">
-            <a:schemeClr val="accent1"/>
-          </a:fillRef>
-          <a:effectRef idx="2">
-            <a:schemeClr val="accent1"/>
-          </a:effectRef>
-          <a:fontRef idx="minor">
-            <a:schemeClr val="lt1"/>
-          </a:fontRef>
-        </p:style>
-        <p:txBody>
-          <a:bodyPr rtlCol="0" anchor="ctr"/>
-          <a:lstStyle/>
-          <a:p>
-            <a:pPr algn="ctr"/>
-          </a:p>
-        </p:txBody>
-      </p:sp>
-      <p:sp>
-        <p:nvSpPr>
-          <p:cNvPr id="12" name="TextBox 11"/>
-          <p:cNvSpPr txBox="1"/>
-          <p:nvPr/>
-        </p:nvSpPr>
-        <p:spPr>
-          <a:xfrm>
-            <a:off x="4673498" y="2788920"/>
-            <a:ext cx="2844698" cy="457200"/>
-          </a:xfrm>
-          <a:prstGeom prst="rect">
-            <a:avLst/>
-          </a:prstGeom>
-          <a:noFill/>
-        </p:spPr>
-        <p:txBody>
-          <a:bodyPr wrap="square" anchor="t">
-            <a:spAutoFit/>
-          </a:bodyPr>
-          <a:lstStyle/>
-          <a:p>
-            <a:pPr algn="l">
-              <a:lnSpc>
-                <a:spcPct val="100000"/>
-              </a:lnSpc>
-            </a:pPr>
-            <a:r>
-              <a:rPr sz="1200" b="1">
-                <a:solidFill>
-                  <a:srgbClr val="00FF41"/>
-                </a:solidFill>
-                <a:latin typeface="Courier New"/>
-              </a:rPr>
-              <a:t>KEY ACTORS</a:t>
-            </a:r>
-          </a:p>
-        </p:txBody>
-      </p:sp>
-      <p:sp>
-        <p:nvSpPr>
-          <p:cNvPr id="13" name="TextBox 12"/>
-          <p:cNvSpPr txBox="1"/>
-          <p:nvPr/>
-        </p:nvSpPr>
-        <p:spPr>
-          <a:xfrm>
-            <a:off x="4673498" y="3246120"/>
-            <a:ext cx="2844698" cy="822960"/>
-          </a:xfrm>
-          <a:prstGeom prst="rect">
-            <a:avLst/>
-          </a:prstGeom>
-          <a:noFill/>
-        </p:spPr>
-        <p:txBody>
-          <a:bodyPr wrap="square" anchor="t">
-            <a:spAutoFit/>
-          </a:bodyPr>
-          <a:lstStyle/>
-          <a:p>
-            <a:pPr algn="l">
-              <a:lnSpc>
-                <a:spcPct val="100000"/>
-              </a:lnSpc>
-            </a:pPr>
-            <a:r>
-              <a:rPr sz="2000" b="1">
-                <a:solidFill>
-                  <a:srgbClr val="F5F7FA"/>
-                </a:solidFill>
-                <a:latin typeface="Arial"/>
-              </a:rPr>
-              <a:t>Who is involved?</a:t>
-            </a:r>
-          </a:p>
-        </p:txBody>
-      </p:sp>
-      <p:sp>
-        <p:nvSpPr>
-          <p:cNvPr id="14" name="TextBox 13"/>
-          <p:cNvSpPr txBox="1"/>
-          <p:nvPr/>
-        </p:nvSpPr>
-        <p:spPr>
-          <a:xfrm>
-            <a:off x="4673498" y="4114800"/>
-            <a:ext cx="2844698" cy="1554480"/>
-          </a:xfrm>
-          <a:prstGeom prst="rect">
-            <a:avLst/>
-          </a:prstGeom>
-          <a:noFill/>
-        </p:spPr>
-        <p:txBody>
-          <a:bodyPr wrap="square" anchor="t">
-            <a:spAutoFit/>
-          </a:bodyPr>
-          <a:lstStyle/>
-          <a:p>
-            <a:pPr algn="l">
-              <a:lnSpc>
-                <a:spcPct val="110000"/>
-              </a:lnSpc>
-            </a:pPr>
-            <a:r>
-              <a:rPr sz="1500" b="0">
-                <a:solidFill>
-                  <a:srgbClr val="8A94A6"/>
-                </a:solidFill>
-                <a:latin typeface="Arial"/>
-              </a:rPr>
-              <a:t>Designers, funders, users, bystanders. Whose interests are in the room - and whose are not?</a:t>
-            </a:r>
-          </a:p>
-        </p:txBody>
-      </p:sp>
-      <p:sp>
-        <p:nvSpPr>
-          <p:cNvPr id="15" name="Rounded Rectangle 14"/>
-          <p:cNvSpPr/>
-          <p:nvPr/>
-        </p:nvSpPr>
-        <p:spPr>
-          <a:xfrm>
-            <a:off x="8158276" y="2468880"/>
-            <a:ext cx="3393338" cy="3383280"/>
-          </a:xfrm>
-          <a:prstGeom prst="roundRect">
-            <a:avLst/>
-          </a:prstGeom>
-          <a:solidFill>
-            <a:srgbClr val="151B26"/>
-          </a:solidFill>
-          <a:ln>
-            <a:noFill/>
-          </a:ln>
-          <a:effectLst/>
-        </p:spPr>
-        <p:style>
-          <a:lnRef idx="1">
-            <a:schemeClr val="accent1"/>
-          </a:lnRef>
-          <a:fillRef idx="3">
-            <a:schemeClr val="accent1"/>
-          </a:fillRef>
-          <a:effectRef idx="2">
-            <a:schemeClr val="accent1"/>
-          </a:effectRef>
-          <a:fontRef idx="minor">
-            <a:schemeClr val="lt1"/>
-          </a:fontRef>
-        </p:style>
-        <p:txBody>
-          <a:bodyPr rtlCol="0" anchor="ctr"/>
-          <a:lstStyle/>
-          <a:p>
-            <a:pPr algn="ctr"/>
-          </a:p>
-        </p:txBody>
-      </p:sp>
-      <p:sp>
-        <p:nvSpPr>
-          <p:cNvPr id="16" name="Rectangle 15"/>
-          <p:cNvSpPr/>
-          <p:nvPr/>
-        </p:nvSpPr>
-        <p:spPr>
-          <a:xfrm>
-            <a:off x="8158276" y="2468880"/>
-            <a:ext cx="3393338" cy="82296"/>
-          </a:xfrm>
-          <a:prstGeom prst="rect">
-            <a:avLst/>
-          </a:prstGeom>
-          <a:solidFill>
-            <a:srgbClr val="00FF41"/>
-          </a:solidFill>
-          <a:ln>
-            <a:noFill/>
-          </a:ln>
-          <a:effectLst/>
-        </p:spPr>
-        <p:style>
-          <a:lnRef idx="1">
-            <a:schemeClr val="accent1"/>
-          </a:lnRef>
-          <a:fillRef idx="3">
-            <a:schemeClr val="accent1"/>
-          </a:fillRef>
-          <a:effectRef idx="2">
-            <a:schemeClr val="accent1"/>
-          </a:effectRef>
-          <a:fontRef idx="minor">
-            <a:schemeClr val="lt1"/>
-          </a:fontRef>
-        </p:style>
-        <p:txBody>
-          <a:bodyPr rtlCol="0" anchor="ctr"/>
-          <a:lstStyle/>
-          <a:p>
-            <a:pPr algn="ctr"/>
-          </a:p>
-        </p:txBody>
-      </p:sp>
-      <p:sp>
-        <p:nvSpPr>
-          <p:cNvPr id="17" name="TextBox 16"/>
-          <p:cNvSpPr txBox="1"/>
-          <p:nvPr/>
-        </p:nvSpPr>
-        <p:spPr>
-          <a:xfrm>
-            <a:off x="8432596" y="2788920"/>
-            <a:ext cx="2844698" cy="457200"/>
-          </a:xfrm>
-          <a:prstGeom prst="rect">
-            <a:avLst/>
-          </a:prstGeom>
-          <a:noFill/>
-        </p:spPr>
-        <p:txBody>
-          <a:bodyPr wrap="square" anchor="t">
-            <a:spAutoFit/>
-          </a:bodyPr>
-          <a:lstStyle/>
-          <a:p>
-            <a:pPr algn="l">
-              <a:lnSpc>
-                <a:spcPct val="100000"/>
-              </a:lnSpc>
-            </a:pPr>
-            <a:r>
-              <a:rPr sz="1200" b="1">
-                <a:solidFill>
-                  <a:srgbClr val="00FF41"/>
-                </a:solidFill>
-                <a:latin typeface="Courier New"/>
-              </a:rPr>
-              <a:t>CONTEXT + CONSTRAINTS</a:t>
-            </a:r>
-          </a:p>
-        </p:txBody>
-      </p:sp>
-      <p:sp>
-        <p:nvSpPr>
-          <p:cNvPr id="18" name="TextBox 17"/>
-          <p:cNvSpPr txBox="1"/>
-          <p:nvPr/>
-        </p:nvSpPr>
-        <p:spPr>
-          <a:xfrm>
-            <a:off x="8432596" y="3246120"/>
-            <a:ext cx="2844698" cy="822960"/>
-          </a:xfrm>
-          <a:prstGeom prst="rect">
-            <a:avLst/>
-          </a:prstGeom>
-          <a:noFill/>
-        </p:spPr>
-        <p:txBody>
-          <a:bodyPr wrap="square" anchor="t">
-            <a:spAutoFit/>
-          </a:bodyPr>
-          <a:lstStyle/>
-          <a:p>
-            <a:pPr algn="l">
-              <a:lnSpc>
-                <a:spcPct val="100000"/>
-              </a:lnSpc>
-            </a:pPr>
-            <a:r>
-              <a:rPr sz="2000" b="1">
-                <a:solidFill>
-                  <a:srgbClr val="F5F7FA"/>
-                </a:solidFill>
-                <a:latin typeface="Arial"/>
-              </a:rPr>
-              <a:t>Where does it live?</a:t>
-            </a:r>
-          </a:p>
-        </p:txBody>
-      </p:sp>
-      <p:sp>
-        <p:nvSpPr>
-          <p:cNvPr id="19" name="TextBox 18"/>
-          <p:cNvSpPr txBox="1"/>
-          <p:nvPr/>
-        </p:nvSpPr>
-        <p:spPr>
-          <a:xfrm>
-            <a:off x="8432596" y="4114800"/>
-            <a:ext cx="2844698" cy="1554480"/>
-          </a:xfrm>
-          <a:prstGeom prst="rect">
-            <a:avLst/>
-          </a:prstGeom>
-          <a:noFill/>
-        </p:spPr>
-        <p:txBody>
-          <a:bodyPr wrap="square" anchor="t">
-            <a:spAutoFit/>
-          </a:bodyPr>
-          <a:lstStyle/>
-          <a:p>
-            <a:pPr algn="l">
-              <a:lnSpc>
-                <a:spcPct val="110000"/>
-              </a:lnSpc>
-            </a:pPr>
-            <a:r>
-              <a:rPr sz="1500" b="0">
-                <a:solidFill>
-                  <a:srgbClr val="8A94A6"/>
-                </a:solidFill>
-                <a:latin typeface="Arial"/>
-              </a:rPr>
-              <a:t>Societal norms, laws, and technical limits (screen size, bandwidth, model context) all carry values.</a:t>
-            </a:r>
-          </a:p>
-        </p:txBody>
-      </p:sp>
-      <p:sp>
-        <p:nvSpPr>
-          <p:cNvPr id="20" name="TextBox 19"/>
+              <a:t>Stretch, water. We pick up with Discovery: what values are even in play?</a:t>
+            </a:r>
+          </a:p>
+        </p:txBody>
+      </p:sp>
+      <p:sp>
+        <p:nvSpPr>
+          <p:cNvPr id="6" name="TextBox 5"/>
           <p:cNvSpPr txBox="1"/>
           <p:nvPr/>
         </p:nvSpPr>
@@ -4981,53 +4621,14 @@
       <p:grpSpPr/>
       <p:sp>
         <p:nvSpPr>
-          <p:cNvPr id="2" name="TextBox 1"/>
-          <p:cNvSpPr txBox="1"/>
-          <p:nvPr/>
-        </p:nvSpPr>
-        <p:spPr>
-          <a:xfrm>
-            <a:off x="640080" y="502920"/>
-            <a:ext cx="10058400" cy="365760"/>
-          </a:xfrm>
-          <a:prstGeom prst="rect">
-            <a:avLst/>
-          </a:prstGeom>
-          <a:noFill/>
-        </p:spPr>
-        <p:txBody>
-          <a:bodyPr wrap="square" anchor="t">
-            <a:spAutoFit/>
-          </a:bodyPr>
-          <a:lstStyle/>
-          <a:p>
-            <a:pPr algn="l">
-              <a:lnSpc>
-                <a:spcPct val="100000"/>
-              </a:lnSpc>
-            </a:pPr>
-            <a:r>
-              <a:rPr sz="1300" b="1">
-                <a:solidFill>
-                  <a:srgbClr val="00FF41"/>
-                </a:solidFill>
-                <a:latin typeface="Courier New"/>
-              </a:rPr>
-              <a:t>DISCOVERY II - OPERATIONALIZE</a:t>
-            </a:r>
-          </a:p>
-        </p:txBody>
-      </p:sp>
-      <p:sp>
-        <p:nvSpPr>
-          <p:cNvPr id="3" name="Rectangle 2"/>
+          <p:cNvPr id="2" name="Rectangle 1"/>
           <p:cNvSpPr/>
           <p:nvPr/>
         </p:nvSpPr>
         <p:spPr>
           <a:xfrm>
-            <a:off x="640080" y="932688"/>
-            <a:ext cx="822960" cy="73152"/>
+            <a:off x="0" y="0"/>
+            <a:ext cx="256032" cy="6858000"/>
           </a:xfrm>
           <a:prstGeom prst="rect">
             <a:avLst/>
@@ -5064,14 +4665,53 @@
       </p:sp>
       <p:sp>
         <p:nvSpPr>
+          <p:cNvPr id="3" name="TextBox 2"/>
+          <p:cNvSpPr txBox="1"/>
+          <p:nvPr/>
+        </p:nvSpPr>
+        <p:spPr>
+          <a:xfrm>
+            <a:off x="822960" y="2194560"/>
+            <a:ext cx="10515600" cy="548640"/>
+          </a:xfrm>
+          <a:prstGeom prst="rect">
+            <a:avLst/>
+          </a:prstGeom>
+          <a:noFill/>
+        </p:spPr>
+        <p:txBody>
+          <a:bodyPr wrap="square" anchor="t">
+            <a:spAutoFit/>
+          </a:bodyPr>
+          <a:lstStyle/>
+          <a:p>
+            <a:pPr algn="l">
+              <a:lnSpc>
+                <a:spcPct val="100000"/>
+              </a:lnSpc>
+            </a:pPr>
+            <a:r>
+              <a:rPr sz="1800" b="1">
+                <a:solidFill>
+                  <a:srgbClr val="00FF41"/>
+                </a:solidFill>
+                <a:latin typeface="Courier New"/>
+              </a:rPr>
+              <a:t>PART 2 - DISCOVERY</a:t>
+            </a:r>
+          </a:p>
+        </p:txBody>
+      </p:sp>
+      <p:sp>
+        <p:nvSpPr>
           <p:cNvPr id="4" name="TextBox 3"/>
           <p:cNvSpPr txBox="1"/>
           <p:nvPr/>
         </p:nvSpPr>
         <p:spPr>
           <a:xfrm>
-            <a:off x="640080" y="1188720"/>
-            <a:ext cx="10972800" cy="1097280"/>
+            <a:off x="804672" y="2743200"/>
+            <a:ext cx="10515600" cy="1554480"/>
           </a:xfrm>
           <a:prstGeom prst="rect">
             <a:avLst/>
@@ -5090,189 +4730,13 @@
               </a:lnSpc>
             </a:pPr>
             <a:r>
-              <a:rPr sz="3400" b="1">
+              <a:rPr sz="4800" b="1">
                 <a:solidFill>
                   <a:srgbClr val="F5F7FA"/>
                 </a:solidFill>
                 <a:latin typeface="Arial"/>
               </a:rPr>
-              <a:t>A value is not one thing</a:t>
-            </a:r>
-          </a:p>
-        </p:txBody>
-      </p:sp>
-      <p:sp>
-        <p:nvSpPr>
-          <p:cNvPr id="5" name="TextBox 4"/>
-          <p:cNvSpPr txBox="1"/>
-          <p:nvPr/>
-        </p:nvSpPr>
-        <p:spPr>
-          <a:xfrm>
-            <a:off x="658368" y="2286000"/>
-            <a:ext cx="10881360" cy="3657600"/>
-          </a:xfrm>
-          <a:prstGeom prst="rect">
-            <a:avLst/>
-          </a:prstGeom>
-          <a:noFill/>
-        </p:spPr>
-        <p:txBody>
-          <a:bodyPr wrap="square" anchor="t">
-            <a:spAutoFit/>
-          </a:bodyPr>
-          <a:lstStyle/>
-          <a:p>
-            <a:pPr algn="l">
-              <a:lnSpc>
-                <a:spcPct val="112000"/>
-              </a:lnSpc>
-            </a:pPr>
-            <a:r>
-              <a:rPr sz="2000" b="0">
-                <a:solidFill>
-                  <a:srgbClr val="F5F7FA"/>
-                </a:solidFill>
-                <a:latin typeface="Arial"/>
-              </a:rPr>
-              <a:t>An abstract value has to be defined before you can build it or test it:</a:t>
-            </a:r>
-          </a:p>
-          <a:p>
-            <a:pPr algn="l">
-              <a:lnSpc>
-                <a:spcPct val="112000"/>
-              </a:lnSpc>
-            </a:pPr>
-            <a:r>
-              <a:rPr sz="2000" b="0">
-                <a:solidFill>
-                  <a:srgbClr val="F5F7FA"/>
-                </a:solidFill>
-                <a:latin typeface="Arial"/>
-              </a:rPr>
-              <a:t/>
-            </a:r>
-          </a:p>
-          <a:p>
-            <a:pPr algn="l">
-              <a:lnSpc>
-                <a:spcPct val="112000"/>
-              </a:lnSpc>
-            </a:pPr>
-            <a:r>
-              <a:rPr sz="1900" b="1">
-                <a:solidFill>
-                  <a:srgbClr val="00FF41"/>
-                </a:solidFill>
-                <a:latin typeface="Arial"/>
-              </a:rPr>
-              <a:t>Privacy</a:t>
-            </a:r>
-            <a:r>
-              <a:rPr sz="1900" b="0">
-                <a:solidFill>
-                  <a:srgbClr val="F5F7FA"/>
-                </a:solidFill>
-                <a:latin typeface="Arial"/>
-              </a:rPr>
-              <a:t> = control?  secrecy?  contextual integrity?</a:t>
-            </a:r>
-          </a:p>
-          <a:p>
-            <a:pPr algn="l">
-              <a:lnSpc>
-                <a:spcPct val="112000"/>
-              </a:lnSpc>
-            </a:pPr>
-            <a:r>
-              <a:rPr sz="1900" b="1">
-                <a:solidFill>
-                  <a:srgbClr val="00FF41"/>
-                </a:solidFill>
-                <a:latin typeface="Arial"/>
-              </a:rPr>
-              <a:t>Fairness</a:t>
-            </a:r>
-            <a:r>
-              <a:rPr sz="1900" b="0">
-                <a:solidFill>
-                  <a:srgbClr val="F5F7FA"/>
-                </a:solidFill>
-                <a:latin typeface="Arial"/>
-              </a:rPr>
-              <a:t> = equal shares?  or proportional to merit / need?</a:t>
-            </a:r>
-          </a:p>
-          <a:p>
-            <a:pPr algn="l">
-              <a:lnSpc>
-                <a:spcPct val="112000"/>
-              </a:lnSpc>
-            </a:pPr>
-            <a:r>
-              <a:rPr sz="2000" b="0">
-                <a:solidFill>
-                  <a:srgbClr val="F5F7FA"/>
-                </a:solidFill>
-                <a:latin typeface="Arial"/>
-              </a:rPr>
-              <a:t/>
-            </a:r>
-          </a:p>
-          <a:p>
-            <a:pPr algn="l">
-              <a:lnSpc>
-                <a:spcPct val="112000"/>
-              </a:lnSpc>
-            </a:pPr>
-            <a:r>
-              <a:rPr sz="1700" b="0">
-                <a:solidFill>
-                  <a:srgbClr val="8A94A6"/>
-                </a:solidFill>
-                <a:latin typeface="Arial"/>
-              </a:rPr>
-              <a:t>Your operational definition decides your design AND your test. (That is yesterday's move - and today's.)</a:t>
-            </a:r>
-          </a:p>
-        </p:txBody>
-      </p:sp>
-      <p:sp>
-        <p:nvSpPr>
-          <p:cNvPr id="6" name="TextBox 5"/>
-          <p:cNvSpPr txBox="1"/>
-          <p:nvPr/>
-        </p:nvSpPr>
-        <p:spPr>
-          <a:xfrm>
-            <a:off x="640080" y="6355080"/>
-            <a:ext cx="10972800" cy="365760"/>
-          </a:xfrm>
-          <a:prstGeom prst="rect">
-            <a:avLst/>
-          </a:prstGeom>
-          <a:noFill/>
-        </p:spPr>
-        <p:txBody>
-          <a:bodyPr wrap="square" anchor="t">
-            <a:spAutoFit/>
-          </a:bodyPr>
-          <a:lstStyle/>
-          <a:p>
-            <a:pPr algn="l">
-              <a:lnSpc>
-                <a:spcPct val="100000"/>
-              </a:lnSpc>
-            </a:pPr>
-            <a:r>
-              <a:rPr sz="1000" b="0">
-                <a:solidFill>
-                  <a:srgbClr val="5A6474"/>
-                </a:solidFill>
-                <a:latin typeface="Courier New"/>
-              </a:rPr>
-              <a:t>Good Code, Good Vibes · TECHIE 1121 · Cornell Tech · Summer 2026</a:t>
+              <a:t>What values? And what do they actually mean?</a:t>
             </a:r>
           </a:p>
         </p:txBody>
@@ -5337,7 +4801,7 @@
                 </a:solidFill>
                 <a:latin typeface="Courier New"/>
               </a:rPr>
-              <a:t>CASE - WHAT'S FAIR?</a:t>
+              <a:t>DISCOVERY I - CONSIDER THE SOURCES</a:t>
             </a:r>
           </a:p>
         </p:txBody>
@@ -5420,7 +4884,7 @@
                 </a:solidFill>
                 <a:latin typeface="Arial"/>
               </a:rPr>
-              <a:t>One value, incompatible definitions</a:t>
+              <a:t>Where the values hide</a:t>
             </a:r>
           </a:p>
         </p:txBody>
@@ -5547,7 +5011,7 @@
                 </a:solidFill>
                 <a:latin typeface="Courier New"/>
               </a:rPr>
-              <a:t>THE SETUP</a:t>
+              <a:t>FUNCTIONAL DESCRIPTION</a:t>
             </a:r>
           </a:p>
         </p:txBody>
@@ -5586,7 +5050,7 @@
                 </a:solidFill>
                 <a:latin typeface="Arial"/>
               </a:rPr>
-              <a:t>Split a limited loan</a:t>
+              <a:t>What does it do?</a:t>
             </a:r>
           </a:p>
         </p:txBody>
@@ -5625,7 +5089,7 @@
                 </a:solidFill>
                 <a:latin typeface="Arial"/>
               </a:rPr>
-              <a:t>Person A repays 100%, Person B repays 20%. Identical otherwise. How do you split the money?</a:t>
+              <a:t>The core function already implies values - a secure messenger implies privacy; a feed implies attention.</a:t>
             </a:r>
           </a:p>
         </p:txBody>
@@ -5752,7 +5216,7 @@
                 </a:solidFill>
                 <a:latin typeface="Courier New"/>
               </a:rPr>
-              <a:t>THE OPTIONS</a:t>
+              <a:t>KEY ACTORS</a:t>
             </a:r>
           </a:p>
         </p:txBody>
@@ -5791,7 +5255,7 @@
                 </a:solidFill>
                 <a:latin typeface="Arial"/>
               </a:rPr>
-              <a:t>All to A? Or share?</a:t>
+              <a:t>Who is involved?</a:t>
             </a:r>
           </a:p>
         </p:txBody>
@@ -5830,7 +5294,7 @@
                 </a:solidFill>
                 <a:latin typeface="Arial"/>
               </a:rPr>
-              <a:t>All to A maximizes repayment - and leaves B nothing. Proportional shares the pot but funds a worse bet.</a:t>
+              <a:t>Designers, funders, users, bystanders. Whose interests are in the room - and whose are not?</a:t>
             </a:r>
           </a:p>
         </p:txBody>
@@ -5957,7 +5421,7 @@
                 </a:solidFill>
                 <a:latin typeface="Courier New"/>
               </a:rPr>
-              <a:t>THE POINT</a:t>
+              <a:t>CONTEXT + CONSTRAINTS</a:t>
             </a:r>
           </a:p>
         </p:txBody>
@@ -5996,7 +5460,7 @@
                 </a:solidFill>
                 <a:latin typeface="Arial"/>
               </a:rPr>
-              <a:t>No free lunch</a:t>
+              <a:t>Where does it live?</a:t>
             </a:r>
           </a:p>
         </p:txBody>
@@ -6035,7 +5499,7 @@
                 </a:solidFill>
                 <a:latin typeface="Arial"/>
               </a:rPr>
-              <a:t>A single algorithm can't satisfy every definition of fairness. Someone chooses - make it conscious.</a:t>
+              <a:t>Societal norms, laws, and technical limits (screen size, bandwidth, model context) all carry values.</a:t>
             </a:r>
           </a:p>
         </p:txBody>
@@ -6139,7 +5603,7 @@
                 </a:solidFill>
                 <a:latin typeface="Courier New"/>
               </a:rPr>
-              <a:t>BREAK</a:t>
+              <a:t>DISCOVERY II - OPERATIONALIZE</a:t>
             </a:r>
           </a:p>
         </p:txBody>
@@ -6222,7 +5686,7 @@
                 </a:solidFill>
                 <a:latin typeface="Arial"/>
               </a:rPr>
-              <a:t>~10 minutes</a:t>
+              <a:t>A value is not one thing</a:t>
             </a:r>
           </a:p>
         </p:txBody>
@@ -6255,13 +5719,111 @@
               </a:lnSpc>
             </a:pPr>
             <a:r>
-              <a:rPr sz="2200" b="0">
+              <a:rPr sz="2000" b="0">
                 <a:solidFill>
                   <a:srgbClr val="F5F7FA"/>
                 </a:solidFill>
                 <a:latin typeface="Arial"/>
               </a:rPr>
-              <a:t>Back soon - next we turn values into features, and handle the clashes.</a:t>
+              <a:t>An abstract value has to be defined before you can build it or test it:</a:t>
+            </a:r>
+          </a:p>
+          <a:p>
+            <a:pPr algn="l">
+              <a:lnSpc>
+                <a:spcPct val="112000"/>
+              </a:lnSpc>
+            </a:pPr>
+            <a:r>
+              <a:rPr sz="2000" b="0">
+                <a:solidFill>
+                  <a:srgbClr val="F5F7FA"/>
+                </a:solidFill>
+                <a:latin typeface="Arial"/>
+              </a:rPr>
+              <a:t/>
+            </a:r>
+          </a:p>
+          <a:p>
+            <a:pPr algn="l">
+              <a:lnSpc>
+                <a:spcPct val="112000"/>
+              </a:lnSpc>
+            </a:pPr>
+            <a:r>
+              <a:rPr sz="1900" b="1">
+                <a:solidFill>
+                  <a:srgbClr val="00FF41"/>
+                </a:solidFill>
+                <a:latin typeface="Arial"/>
+              </a:rPr>
+              <a:t>Privacy</a:t>
+            </a:r>
+            <a:r>
+              <a:rPr sz="1900" b="0">
+                <a:solidFill>
+                  <a:srgbClr val="F5F7FA"/>
+                </a:solidFill>
+                <a:latin typeface="Arial"/>
+              </a:rPr>
+              <a:t> = control?  secrecy?  contextual integrity?</a:t>
+            </a:r>
+          </a:p>
+          <a:p>
+            <a:pPr algn="l">
+              <a:lnSpc>
+                <a:spcPct val="112000"/>
+              </a:lnSpc>
+            </a:pPr>
+            <a:r>
+              <a:rPr sz="1900" b="1">
+                <a:solidFill>
+                  <a:srgbClr val="00FF41"/>
+                </a:solidFill>
+                <a:latin typeface="Arial"/>
+              </a:rPr>
+              <a:t>Fairness</a:t>
+            </a:r>
+            <a:r>
+              <a:rPr sz="1900" b="0">
+                <a:solidFill>
+                  <a:srgbClr val="F5F7FA"/>
+                </a:solidFill>
+                <a:latin typeface="Arial"/>
+              </a:rPr>
+              <a:t> = equal shares?  or proportional to merit / need?</a:t>
+            </a:r>
+          </a:p>
+          <a:p>
+            <a:pPr algn="l">
+              <a:lnSpc>
+                <a:spcPct val="112000"/>
+              </a:lnSpc>
+            </a:pPr>
+            <a:r>
+              <a:rPr sz="2000" b="0">
+                <a:solidFill>
+                  <a:srgbClr val="F5F7FA"/>
+                </a:solidFill>
+                <a:latin typeface="Arial"/>
+              </a:rPr>
+              <a:t/>
+            </a:r>
+          </a:p>
+          <a:p>
+            <a:pPr algn="l">
+              <a:lnSpc>
+                <a:spcPct val="112000"/>
+              </a:lnSpc>
+            </a:pPr>
+            <a:r>
+              <a:rPr sz="1700" b="0">
+                <a:solidFill>
+                  <a:srgbClr val="8A94A6"/>
+                </a:solidFill>
+                <a:latin typeface="Arial"/>
+              </a:rPr>
+              <a:t>Your operational definition decides your design AND your test. (That is yesterday's move - and today's.)</a:t>
             </a:r>
           </a:p>
         </p:txBody>
@@ -6333,14 +5895,53 @@
       <p:grpSpPr/>
       <p:sp>
         <p:nvSpPr>
-          <p:cNvPr id="2" name="Rectangle 1"/>
+          <p:cNvPr id="2" name="TextBox 1"/>
+          <p:cNvSpPr txBox="1"/>
+          <p:nvPr/>
+        </p:nvSpPr>
+        <p:spPr>
+          <a:xfrm>
+            <a:off x="640080" y="502920"/>
+            <a:ext cx="10058400" cy="365760"/>
+          </a:xfrm>
+          <a:prstGeom prst="rect">
+            <a:avLst/>
+          </a:prstGeom>
+          <a:noFill/>
+        </p:spPr>
+        <p:txBody>
+          <a:bodyPr wrap="square" anchor="t">
+            <a:spAutoFit/>
+          </a:bodyPr>
+          <a:lstStyle/>
+          <a:p>
+            <a:pPr algn="l">
+              <a:lnSpc>
+                <a:spcPct val="100000"/>
+              </a:lnSpc>
+            </a:pPr>
+            <a:r>
+              <a:rPr sz="1300" b="1">
+                <a:solidFill>
+                  <a:srgbClr val="00FF41"/>
+                </a:solidFill>
+                <a:latin typeface="Courier New"/>
+              </a:rPr>
+              <a:t>CASE - WHAT'S FAIR?</a:t>
+            </a:r>
+          </a:p>
+        </p:txBody>
+      </p:sp>
+      <p:sp>
+        <p:nvSpPr>
+          <p:cNvPr id="3" name="Rectangle 2"/>
           <p:cNvSpPr/>
           <p:nvPr/>
         </p:nvSpPr>
         <p:spPr>
           <a:xfrm>
-            <a:off x="0" y="0"/>
-            <a:ext cx="256032" cy="6858000"/>
+            <a:off x="640080" y="932688"/>
+            <a:ext cx="822960" cy="73152"/>
           </a:xfrm>
           <a:prstGeom prst="rect">
             <a:avLst/>
@@ -6377,14 +5978,14 @@
       </p:sp>
       <p:sp>
         <p:nvSpPr>
-          <p:cNvPr id="3" name="TextBox 2"/>
-          <p:cNvSpPr txBox="1"/>
-          <p:nvPr/>
-        </p:nvSpPr>
-        <p:spPr>
-          <a:xfrm>
-            <a:off x="822960" y="2194560"/>
-            <a:ext cx="10515600" cy="548640"/>
+          <p:cNvPr id="4" name="TextBox 3"/>
+          <p:cNvSpPr txBox="1"/>
+          <p:nvPr/>
+        </p:nvSpPr>
+        <p:spPr>
+          <a:xfrm>
+            <a:off x="640080" y="1188720"/>
+            <a:ext cx="10972800" cy="914400"/>
           </a:xfrm>
           <a:prstGeom prst="rect">
             <a:avLst/>
@@ -6403,27 +6004,154 @@
               </a:lnSpc>
             </a:pPr>
             <a:r>
-              <a:rPr sz="1800" b="1">
+              <a:rPr sz="3200" b="1">
+                <a:solidFill>
+                  <a:srgbClr val="F5F7FA"/>
+                </a:solidFill>
+                <a:latin typeface="Arial"/>
+              </a:rPr>
+              <a:t>One value, incompatible definitions</a:t>
+            </a:r>
+          </a:p>
+        </p:txBody>
+      </p:sp>
+      <p:sp>
+        <p:nvSpPr>
+          <p:cNvPr id="5" name="Rounded Rectangle 4"/>
+          <p:cNvSpPr/>
+          <p:nvPr/>
+        </p:nvSpPr>
+        <p:spPr>
+          <a:xfrm>
+            <a:off x="640080" y="2468880"/>
+            <a:ext cx="3393338" cy="3383280"/>
+          </a:xfrm>
+          <a:prstGeom prst="roundRect">
+            <a:avLst/>
+          </a:prstGeom>
+          <a:solidFill>
+            <a:srgbClr val="151B26"/>
+          </a:solidFill>
+          <a:ln>
+            <a:noFill/>
+          </a:ln>
+          <a:effectLst/>
+        </p:spPr>
+        <p:style>
+          <a:lnRef idx="1">
+            <a:schemeClr val="accent1"/>
+          </a:lnRef>
+          <a:fillRef idx="3">
+            <a:schemeClr val="accent1"/>
+          </a:fillRef>
+          <a:effectRef idx="2">
+            <a:schemeClr val="accent1"/>
+          </a:effectRef>
+          <a:fontRef idx="minor">
+            <a:schemeClr val="lt1"/>
+          </a:fontRef>
+        </p:style>
+        <p:txBody>
+          <a:bodyPr rtlCol="0" anchor="ctr"/>
+          <a:lstStyle/>
+          <a:p>
+            <a:pPr algn="ctr"/>
+          </a:p>
+        </p:txBody>
+      </p:sp>
+      <p:sp>
+        <p:nvSpPr>
+          <p:cNvPr id="6" name="Rectangle 5"/>
+          <p:cNvSpPr/>
+          <p:nvPr/>
+        </p:nvSpPr>
+        <p:spPr>
+          <a:xfrm>
+            <a:off x="640080" y="2468880"/>
+            <a:ext cx="3393338" cy="82296"/>
+          </a:xfrm>
+          <a:prstGeom prst="rect">
+            <a:avLst/>
+          </a:prstGeom>
+          <a:solidFill>
+            <a:srgbClr val="00FF41"/>
+          </a:solidFill>
+          <a:ln>
+            <a:noFill/>
+          </a:ln>
+          <a:effectLst/>
+        </p:spPr>
+        <p:style>
+          <a:lnRef idx="1">
+            <a:schemeClr val="accent1"/>
+          </a:lnRef>
+          <a:fillRef idx="3">
+            <a:schemeClr val="accent1"/>
+          </a:fillRef>
+          <a:effectRef idx="2">
+            <a:schemeClr val="accent1"/>
+          </a:effectRef>
+          <a:fontRef idx="minor">
+            <a:schemeClr val="lt1"/>
+          </a:fontRef>
+        </p:style>
+        <p:txBody>
+          <a:bodyPr rtlCol="0" anchor="ctr"/>
+          <a:lstStyle/>
+          <a:p>
+            <a:pPr algn="ctr"/>
+          </a:p>
+        </p:txBody>
+      </p:sp>
+      <p:sp>
+        <p:nvSpPr>
+          <p:cNvPr id="7" name="TextBox 6"/>
+          <p:cNvSpPr txBox="1"/>
+          <p:nvPr/>
+        </p:nvSpPr>
+        <p:spPr>
+          <a:xfrm>
+            <a:off x="914400" y="2788920"/>
+            <a:ext cx="2844698" cy="457200"/>
+          </a:xfrm>
+          <a:prstGeom prst="rect">
+            <a:avLst/>
+          </a:prstGeom>
+          <a:noFill/>
+        </p:spPr>
+        <p:txBody>
+          <a:bodyPr wrap="square" anchor="t">
+            <a:spAutoFit/>
+          </a:bodyPr>
+          <a:lstStyle/>
+          <a:p>
+            <a:pPr algn="l">
+              <a:lnSpc>
+                <a:spcPct val="100000"/>
+              </a:lnSpc>
+            </a:pPr>
+            <a:r>
+              <a:rPr sz="1200" b="1">
                 <a:solidFill>
                   <a:srgbClr val="00FF41"/>
                 </a:solidFill>
                 <a:latin typeface="Courier New"/>
               </a:rPr>
-              <a:t>PART 3 - IMPLEMENTATION</a:t>
-            </a:r>
-          </a:p>
-        </p:txBody>
-      </p:sp>
-      <p:sp>
-        <p:nvSpPr>
-          <p:cNvPr id="4" name="TextBox 3"/>
-          <p:cNvSpPr txBox="1"/>
-          <p:nvPr/>
-        </p:nvSpPr>
-        <p:spPr>
-          <a:xfrm>
-            <a:off x="804672" y="2743200"/>
-            <a:ext cx="10515600" cy="1554480"/>
+              <a:t>THE SETUP</a:t>
+            </a:r>
+          </a:p>
+        </p:txBody>
+      </p:sp>
+      <p:sp>
+        <p:nvSpPr>
+          <p:cNvPr id="8" name="TextBox 7"/>
+          <p:cNvSpPr txBox="1"/>
+          <p:nvPr/>
+        </p:nvSpPr>
+        <p:spPr>
+          <a:xfrm>
+            <a:off x="914400" y="3246120"/>
+            <a:ext cx="2844698" cy="822960"/>
           </a:xfrm>
           <a:prstGeom prst="rect">
             <a:avLst/>
@@ -6442,13 +6170,501 @@
               </a:lnSpc>
             </a:pPr>
             <a:r>
-              <a:rPr sz="4800" b="1">
+              <a:rPr sz="2000" b="1">
                 <a:solidFill>
                   <a:srgbClr val="F5F7FA"/>
                 </a:solidFill>
                 <a:latin typeface="Arial"/>
               </a:rPr>
-              <a:t>Translate values into features - and resolve the clashes</a:t>
+              <a:t>Split a limited loan</a:t>
+            </a:r>
+          </a:p>
+        </p:txBody>
+      </p:sp>
+      <p:sp>
+        <p:nvSpPr>
+          <p:cNvPr id="9" name="TextBox 8"/>
+          <p:cNvSpPr txBox="1"/>
+          <p:nvPr/>
+        </p:nvSpPr>
+        <p:spPr>
+          <a:xfrm>
+            <a:off x="914400" y="4114800"/>
+            <a:ext cx="2844698" cy="1554480"/>
+          </a:xfrm>
+          <a:prstGeom prst="rect">
+            <a:avLst/>
+          </a:prstGeom>
+          <a:noFill/>
+        </p:spPr>
+        <p:txBody>
+          <a:bodyPr wrap="square" anchor="t">
+            <a:spAutoFit/>
+          </a:bodyPr>
+          <a:lstStyle/>
+          <a:p>
+            <a:pPr algn="l">
+              <a:lnSpc>
+                <a:spcPct val="110000"/>
+              </a:lnSpc>
+            </a:pPr>
+            <a:r>
+              <a:rPr sz="1500" b="0">
+                <a:solidFill>
+                  <a:srgbClr val="8A94A6"/>
+                </a:solidFill>
+                <a:latin typeface="Arial"/>
+              </a:rPr>
+              <a:t>Person A repays 100%, Person B repays 20%. Identical otherwise. How do you split the money?</a:t>
+            </a:r>
+          </a:p>
+        </p:txBody>
+      </p:sp>
+      <p:sp>
+        <p:nvSpPr>
+          <p:cNvPr id="10" name="Rounded Rectangle 9"/>
+          <p:cNvSpPr/>
+          <p:nvPr/>
+        </p:nvSpPr>
+        <p:spPr>
+          <a:xfrm>
+            <a:off x="4399178" y="2468880"/>
+            <a:ext cx="3393338" cy="3383280"/>
+          </a:xfrm>
+          <a:prstGeom prst="roundRect">
+            <a:avLst/>
+          </a:prstGeom>
+          <a:solidFill>
+            <a:srgbClr val="151B26"/>
+          </a:solidFill>
+          <a:ln>
+            <a:noFill/>
+          </a:ln>
+          <a:effectLst/>
+        </p:spPr>
+        <p:style>
+          <a:lnRef idx="1">
+            <a:schemeClr val="accent1"/>
+          </a:lnRef>
+          <a:fillRef idx="3">
+            <a:schemeClr val="accent1"/>
+          </a:fillRef>
+          <a:effectRef idx="2">
+            <a:schemeClr val="accent1"/>
+          </a:effectRef>
+          <a:fontRef idx="minor">
+            <a:schemeClr val="lt1"/>
+          </a:fontRef>
+        </p:style>
+        <p:txBody>
+          <a:bodyPr rtlCol="0" anchor="ctr"/>
+          <a:lstStyle/>
+          <a:p>
+            <a:pPr algn="ctr"/>
+          </a:p>
+        </p:txBody>
+      </p:sp>
+      <p:sp>
+        <p:nvSpPr>
+          <p:cNvPr id="11" name="Rectangle 10"/>
+          <p:cNvSpPr/>
+          <p:nvPr/>
+        </p:nvSpPr>
+        <p:spPr>
+          <a:xfrm>
+            <a:off x="4399178" y="2468880"/>
+            <a:ext cx="3393338" cy="82296"/>
+          </a:xfrm>
+          <a:prstGeom prst="rect">
+            <a:avLst/>
+          </a:prstGeom>
+          <a:solidFill>
+            <a:srgbClr val="00FF41"/>
+          </a:solidFill>
+          <a:ln>
+            <a:noFill/>
+          </a:ln>
+          <a:effectLst/>
+        </p:spPr>
+        <p:style>
+          <a:lnRef idx="1">
+            <a:schemeClr val="accent1"/>
+          </a:lnRef>
+          <a:fillRef idx="3">
+            <a:schemeClr val="accent1"/>
+          </a:fillRef>
+          <a:effectRef idx="2">
+            <a:schemeClr val="accent1"/>
+          </a:effectRef>
+          <a:fontRef idx="minor">
+            <a:schemeClr val="lt1"/>
+          </a:fontRef>
+        </p:style>
+        <p:txBody>
+          <a:bodyPr rtlCol="0" anchor="ctr"/>
+          <a:lstStyle/>
+          <a:p>
+            <a:pPr algn="ctr"/>
+          </a:p>
+        </p:txBody>
+      </p:sp>
+      <p:sp>
+        <p:nvSpPr>
+          <p:cNvPr id="12" name="TextBox 11"/>
+          <p:cNvSpPr txBox="1"/>
+          <p:nvPr/>
+        </p:nvSpPr>
+        <p:spPr>
+          <a:xfrm>
+            <a:off x="4673498" y="2788920"/>
+            <a:ext cx="2844698" cy="457200"/>
+          </a:xfrm>
+          <a:prstGeom prst="rect">
+            <a:avLst/>
+          </a:prstGeom>
+          <a:noFill/>
+        </p:spPr>
+        <p:txBody>
+          <a:bodyPr wrap="square" anchor="t">
+            <a:spAutoFit/>
+          </a:bodyPr>
+          <a:lstStyle/>
+          <a:p>
+            <a:pPr algn="l">
+              <a:lnSpc>
+                <a:spcPct val="100000"/>
+              </a:lnSpc>
+            </a:pPr>
+            <a:r>
+              <a:rPr sz="1200" b="1">
+                <a:solidFill>
+                  <a:srgbClr val="00FF41"/>
+                </a:solidFill>
+                <a:latin typeface="Courier New"/>
+              </a:rPr>
+              <a:t>THE OPTIONS</a:t>
+            </a:r>
+          </a:p>
+        </p:txBody>
+      </p:sp>
+      <p:sp>
+        <p:nvSpPr>
+          <p:cNvPr id="13" name="TextBox 12"/>
+          <p:cNvSpPr txBox="1"/>
+          <p:nvPr/>
+        </p:nvSpPr>
+        <p:spPr>
+          <a:xfrm>
+            <a:off x="4673498" y="3246120"/>
+            <a:ext cx="2844698" cy="822960"/>
+          </a:xfrm>
+          <a:prstGeom prst="rect">
+            <a:avLst/>
+          </a:prstGeom>
+          <a:noFill/>
+        </p:spPr>
+        <p:txBody>
+          <a:bodyPr wrap="square" anchor="t">
+            <a:spAutoFit/>
+          </a:bodyPr>
+          <a:lstStyle/>
+          <a:p>
+            <a:pPr algn="l">
+              <a:lnSpc>
+                <a:spcPct val="100000"/>
+              </a:lnSpc>
+            </a:pPr>
+            <a:r>
+              <a:rPr sz="2000" b="1">
+                <a:solidFill>
+                  <a:srgbClr val="F5F7FA"/>
+                </a:solidFill>
+                <a:latin typeface="Arial"/>
+              </a:rPr>
+              <a:t>All to A? Or share?</a:t>
+            </a:r>
+          </a:p>
+        </p:txBody>
+      </p:sp>
+      <p:sp>
+        <p:nvSpPr>
+          <p:cNvPr id="14" name="TextBox 13"/>
+          <p:cNvSpPr txBox="1"/>
+          <p:nvPr/>
+        </p:nvSpPr>
+        <p:spPr>
+          <a:xfrm>
+            <a:off x="4673498" y="4114800"/>
+            <a:ext cx="2844698" cy="1554480"/>
+          </a:xfrm>
+          <a:prstGeom prst="rect">
+            <a:avLst/>
+          </a:prstGeom>
+          <a:noFill/>
+        </p:spPr>
+        <p:txBody>
+          <a:bodyPr wrap="square" anchor="t">
+            <a:spAutoFit/>
+          </a:bodyPr>
+          <a:lstStyle/>
+          <a:p>
+            <a:pPr algn="l">
+              <a:lnSpc>
+                <a:spcPct val="110000"/>
+              </a:lnSpc>
+            </a:pPr>
+            <a:r>
+              <a:rPr sz="1500" b="0">
+                <a:solidFill>
+                  <a:srgbClr val="8A94A6"/>
+                </a:solidFill>
+                <a:latin typeface="Arial"/>
+              </a:rPr>
+              <a:t>All to A maximizes repayment - and leaves B nothing. Proportional shares the pot but funds a worse bet.</a:t>
+            </a:r>
+          </a:p>
+        </p:txBody>
+      </p:sp>
+      <p:sp>
+        <p:nvSpPr>
+          <p:cNvPr id="15" name="Rounded Rectangle 14"/>
+          <p:cNvSpPr/>
+          <p:nvPr/>
+        </p:nvSpPr>
+        <p:spPr>
+          <a:xfrm>
+            <a:off x="8158276" y="2468880"/>
+            <a:ext cx="3393338" cy="3383280"/>
+          </a:xfrm>
+          <a:prstGeom prst="roundRect">
+            <a:avLst/>
+          </a:prstGeom>
+          <a:solidFill>
+            <a:srgbClr val="151B26"/>
+          </a:solidFill>
+          <a:ln>
+            <a:noFill/>
+          </a:ln>
+          <a:effectLst/>
+        </p:spPr>
+        <p:style>
+          <a:lnRef idx="1">
+            <a:schemeClr val="accent1"/>
+          </a:lnRef>
+          <a:fillRef idx="3">
+            <a:schemeClr val="accent1"/>
+          </a:fillRef>
+          <a:effectRef idx="2">
+            <a:schemeClr val="accent1"/>
+          </a:effectRef>
+          <a:fontRef idx="minor">
+            <a:schemeClr val="lt1"/>
+          </a:fontRef>
+        </p:style>
+        <p:txBody>
+          <a:bodyPr rtlCol="0" anchor="ctr"/>
+          <a:lstStyle/>
+          <a:p>
+            <a:pPr algn="ctr"/>
+          </a:p>
+        </p:txBody>
+      </p:sp>
+      <p:sp>
+        <p:nvSpPr>
+          <p:cNvPr id="16" name="Rectangle 15"/>
+          <p:cNvSpPr/>
+          <p:nvPr/>
+        </p:nvSpPr>
+        <p:spPr>
+          <a:xfrm>
+            <a:off x="8158276" y="2468880"/>
+            <a:ext cx="3393338" cy="82296"/>
+          </a:xfrm>
+          <a:prstGeom prst="rect">
+            <a:avLst/>
+          </a:prstGeom>
+          <a:solidFill>
+            <a:srgbClr val="00FF41"/>
+          </a:solidFill>
+          <a:ln>
+            <a:noFill/>
+          </a:ln>
+          <a:effectLst/>
+        </p:spPr>
+        <p:style>
+          <a:lnRef idx="1">
+            <a:schemeClr val="accent1"/>
+          </a:lnRef>
+          <a:fillRef idx="3">
+            <a:schemeClr val="accent1"/>
+          </a:fillRef>
+          <a:effectRef idx="2">
+            <a:schemeClr val="accent1"/>
+          </a:effectRef>
+          <a:fontRef idx="minor">
+            <a:schemeClr val="lt1"/>
+          </a:fontRef>
+        </p:style>
+        <p:txBody>
+          <a:bodyPr rtlCol="0" anchor="ctr"/>
+          <a:lstStyle/>
+          <a:p>
+            <a:pPr algn="ctr"/>
+          </a:p>
+        </p:txBody>
+      </p:sp>
+      <p:sp>
+        <p:nvSpPr>
+          <p:cNvPr id="17" name="TextBox 16"/>
+          <p:cNvSpPr txBox="1"/>
+          <p:nvPr/>
+        </p:nvSpPr>
+        <p:spPr>
+          <a:xfrm>
+            <a:off x="8432596" y="2788920"/>
+            <a:ext cx="2844698" cy="457200"/>
+          </a:xfrm>
+          <a:prstGeom prst="rect">
+            <a:avLst/>
+          </a:prstGeom>
+          <a:noFill/>
+        </p:spPr>
+        <p:txBody>
+          <a:bodyPr wrap="square" anchor="t">
+            <a:spAutoFit/>
+          </a:bodyPr>
+          <a:lstStyle/>
+          <a:p>
+            <a:pPr algn="l">
+              <a:lnSpc>
+                <a:spcPct val="100000"/>
+              </a:lnSpc>
+            </a:pPr>
+            <a:r>
+              <a:rPr sz="1200" b="1">
+                <a:solidFill>
+                  <a:srgbClr val="00FF41"/>
+                </a:solidFill>
+                <a:latin typeface="Courier New"/>
+              </a:rPr>
+              <a:t>THE POINT</a:t>
+            </a:r>
+          </a:p>
+        </p:txBody>
+      </p:sp>
+      <p:sp>
+        <p:nvSpPr>
+          <p:cNvPr id="18" name="TextBox 17"/>
+          <p:cNvSpPr txBox="1"/>
+          <p:nvPr/>
+        </p:nvSpPr>
+        <p:spPr>
+          <a:xfrm>
+            <a:off x="8432596" y="3246120"/>
+            <a:ext cx="2844698" cy="822960"/>
+          </a:xfrm>
+          <a:prstGeom prst="rect">
+            <a:avLst/>
+          </a:prstGeom>
+          <a:noFill/>
+        </p:spPr>
+        <p:txBody>
+          <a:bodyPr wrap="square" anchor="t">
+            <a:spAutoFit/>
+          </a:bodyPr>
+          <a:lstStyle/>
+          <a:p>
+            <a:pPr algn="l">
+              <a:lnSpc>
+                <a:spcPct val="100000"/>
+              </a:lnSpc>
+            </a:pPr>
+            <a:r>
+              <a:rPr sz="2000" b="1">
+                <a:solidFill>
+                  <a:srgbClr val="F5F7FA"/>
+                </a:solidFill>
+                <a:latin typeface="Arial"/>
+              </a:rPr>
+              <a:t>No free lunch</a:t>
+            </a:r>
+          </a:p>
+        </p:txBody>
+      </p:sp>
+      <p:sp>
+        <p:nvSpPr>
+          <p:cNvPr id="19" name="TextBox 18"/>
+          <p:cNvSpPr txBox="1"/>
+          <p:nvPr/>
+        </p:nvSpPr>
+        <p:spPr>
+          <a:xfrm>
+            <a:off x="8432596" y="4114800"/>
+            <a:ext cx="2844698" cy="1554480"/>
+          </a:xfrm>
+          <a:prstGeom prst="rect">
+            <a:avLst/>
+          </a:prstGeom>
+          <a:noFill/>
+        </p:spPr>
+        <p:txBody>
+          <a:bodyPr wrap="square" anchor="t">
+            <a:spAutoFit/>
+          </a:bodyPr>
+          <a:lstStyle/>
+          <a:p>
+            <a:pPr algn="l">
+              <a:lnSpc>
+                <a:spcPct val="110000"/>
+              </a:lnSpc>
+            </a:pPr>
+            <a:r>
+              <a:rPr sz="1500" b="0">
+                <a:solidFill>
+                  <a:srgbClr val="8A94A6"/>
+                </a:solidFill>
+                <a:latin typeface="Arial"/>
+              </a:rPr>
+              <a:t>A single algorithm can't satisfy every definition of fairness. Someone chooses - make it conscious.</a:t>
+            </a:r>
+          </a:p>
+        </p:txBody>
+      </p:sp>
+      <p:sp>
+        <p:nvSpPr>
+          <p:cNvPr id="20" name="TextBox 19"/>
+          <p:cNvSpPr txBox="1"/>
+          <p:nvPr/>
+        </p:nvSpPr>
+        <p:spPr>
+          <a:xfrm>
+            <a:off x="640080" y="6355080"/>
+            <a:ext cx="10972800" cy="365760"/>
+          </a:xfrm>
+          <a:prstGeom prst="rect">
+            <a:avLst/>
+          </a:prstGeom>
+          <a:noFill/>
+        </p:spPr>
+        <p:txBody>
+          <a:bodyPr wrap="square" anchor="t">
+            <a:spAutoFit/>
+          </a:bodyPr>
+          <a:lstStyle/>
+          <a:p>
+            <a:pPr algn="l">
+              <a:lnSpc>
+                <a:spcPct val="100000"/>
+              </a:lnSpc>
+            </a:pPr>
+            <a:r>
+              <a:rPr sz="1000" b="0">
+                <a:solidFill>
+                  <a:srgbClr val="5A6474"/>
+                </a:solidFill>
+                <a:latin typeface="Courier New"/>
+              </a:rPr>
+              <a:t>Good Code, Good Vibes · TECHIE 1121 · Cornell Tech · Summer 2026</a:t>
             </a:r>
           </a:p>
         </p:txBody>
@@ -6513,7 +6729,7 @@
                 </a:solidFill>
                 <a:latin typeface="Courier New"/>
               </a:rPr>
-              <a:t>TRANSLATE</a:t>
+              <a:t>BREAK</a:t>
             </a:r>
           </a:p>
         </p:txBody>
@@ -6562,31 +6778,45 @@
           </a:p>
         </p:txBody>
       </p:sp>
-      <p:pic>
-        <p:nvPicPr>
-          <p:cNvPr id="4" name="Picture 3" descr="giant_joystick.png"/>
-          <p:cNvPicPr>
-            <a:picLocks noChangeAspect="1"/>
-          </p:cNvPicPr>
-          <p:nvPr/>
-        </p:nvPicPr>
-        <p:blipFill>
-          <a:blip r:embed="rId2"/>
-          <a:srcRect l="29000" r="29000"/>
-          <a:stretch>
-            <a:fillRect/>
-          </a:stretch>
-        </p:blipFill>
-        <p:spPr>
-          <a:xfrm>
-            <a:off x="7071055" y="0"/>
-            <a:ext cx="5120640" cy="6858000"/>
-          </a:xfrm>
-          <a:prstGeom prst="rect">
-            <a:avLst/>
-          </a:prstGeom>
-        </p:spPr>
-      </p:pic>
+      <p:sp>
+        <p:nvSpPr>
+          <p:cNvPr id="4" name="TextBox 3"/>
+          <p:cNvSpPr txBox="1"/>
+          <p:nvPr/>
+        </p:nvSpPr>
+        <p:spPr>
+          <a:xfrm>
+            <a:off x="640080" y="1188720"/>
+            <a:ext cx="10972800" cy="1097280"/>
+          </a:xfrm>
+          <a:prstGeom prst="rect">
+            <a:avLst/>
+          </a:prstGeom>
+          <a:noFill/>
+        </p:spPr>
+        <p:txBody>
+          <a:bodyPr wrap="square" anchor="t">
+            <a:spAutoFit/>
+          </a:bodyPr>
+          <a:lstStyle/>
+          <a:p>
+            <a:pPr algn="l">
+              <a:lnSpc>
+                <a:spcPct val="100000"/>
+              </a:lnSpc>
+            </a:pPr>
+            <a:r>
+              <a:rPr sz="3400" b="1">
+                <a:solidFill>
+                  <a:srgbClr val="F5F7FA"/>
+                </a:solidFill>
+                <a:latin typeface="Arial"/>
+              </a:rPr>
+              <a:t>~10 minutes</a:t>
+            </a:r>
+          </a:p>
+        </p:txBody>
+      </p:sp>
       <p:sp>
         <p:nvSpPr>
           <p:cNvPr id="5" name="TextBox 4"/>
@@ -6595,33 +6825,33 @@
         </p:nvSpPr>
         <p:spPr>
           <a:xfrm>
-            <a:off x="640080" y="1188720"/>
-            <a:ext cx="6019495" cy="1280160"/>
-          </a:xfrm>
-          <a:prstGeom prst="rect">
-            <a:avLst/>
-          </a:prstGeom>
-          <a:noFill/>
-        </p:spPr>
-        <p:txBody>
-          <a:bodyPr wrap="square" anchor="t">
-            <a:spAutoFit/>
-          </a:bodyPr>
-          <a:lstStyle/>
-          <a:p>
-            <a:pPr algn="l">
-              <a:lnSpc>
-                <a:spcPct val="100000"/>
-              </a:lnSpc>
-            </a:pPr>
-            <a:r>
-              <a:rPr sz="3000" b="1">
+            <a:off x="658368" y="2286000"/>
+            <a:ext cx="10881360" cy="3657600"/>
+          </a:xfrm>
+          <a:prstGeom prst="rect">
+            <a:avLst/>
+          </a:prstGeom>
+          <a:noFill/>
+        </p:spPr>
+        <p:txBody>
+          <a:bodyPr wrap="square" anchor="t">
+            <a:spAutoFit/>
+          </a:bodyPr>
+          <a:lstStyle/>
+          <a:p>
+            <a:pPr algn="l">
+              <a:lnSpc>
+                <a:spcPct val="112000"/>
+              </a:lnSpc>
+            </a:pPr>
+            <a:r>
+              <a:rPr sz="2200" b="0">
                 <a:solidFill>
                   <a:srgbClr val="F5F7FA"/>
                 </a:solidFill>
                 <a:latin typeface="Arial"/>
               </a:rPr>
-              <a:t>From a value to a spec</a:t>
+              <a:t>Back soon - next we turn values into features, and handle the clashes.</a:t>
             </a:r>
           </a:p>
         </p:txBody>
@@ -6629,160 +6859,6 @@
       <p:sp>
         <p:nvSpPr>
           <p:cNvPr id="6" name="TextBox 5"/>
-          <p:cNvSpPr txBox="1"/>
-          <p:nvPr/>
-        </p:nvSpPr>
-        <p:spPr>
-          <a:xfrm>
-            <a:off x="640080" y="2560320"/>
-            <a:ext cx="6019495" cy="3108960"/>
-          </a:xfrm>
-          <a:prstGeom prst="rect">
-            <a:avLst/>
-          </a:prstGeom>
-          <a:noFill/>
-        </p:spPr>
-        <p:txBody>
-          <a:bodyPr wrap="square" anchor="t">
-            <a:spAutoFit/>
-          </a:bodyPr>
-          <a:lstStyle/>
-          <a:p>
-            <a:pPr algn="l">
-              <a:lnSpc>
-                <a:spcPct val="116000"/>
-              </a:lnSpc>
-            </a:pPr>
-            <a:r>
-              <a:rPr sz="1900" b="0">
-                <a:solidFill>
-                  <a:srgbClr val="F5F7FA"/>
-                </a:solidFill>
-                <a:latin typeface="Arial"/>
-              </a:rPr>
-              <a:t>Implementation turns an ethical or political value into concrete requirements, features, and architecture.</a:t>
-            </a:r>
-          </a:p>
-          <a:p>
-            <a:pPr algn="l">
-              <a:lnSpc>
-                <a:spcPct val="116000"/>
-              </a:lnSpc>
-            </a:pPr>
-            <a:r>
-              <a:rPr sz="1900" b="0">
-                <a:solidFill>
-                  <a:srgbClr val="F5F7FA"/>
-                </a:solidFill>
-                <a:latin typeface="Arial"/>
-              </a:rPr>
-              <a:t/>
-            </a:r>
-          </a:p>
-          <a:p>
-            <a:pPr algn="l">
-              <a:lnSpc>
-                <a:spcPct val="116000"/>
-              </a:lnSpc>
-            </a:pPr>
-            <a:r>
-              <a:rPr sz="1700" b="0">
-                <a:solidFill>
-                  <a:srgbClr val="8A94A6"/>
-                </a:solidFill>
-                <a:latin typeface="Arial"/>
-              </a:rPr>
-              <a:t>Mary Flanagan's Giant Joystick makes "play" physical - one value, rebuilt into the hardware itself.</a:t>
-            </a:r>
-          </a:p>
-        </p:txBody>
-      </p:sp>
-      <p:sp>
-        <p:nvSpPr>
-          <p:cNvPr id="7" name="Rectangle 6"/>
-          <p:cNvSpPr/>
-          <p:nvPr/>
-        </p:nvSpPr>
-        <p:spPr>
-          <a:xfrm>
-            <a:off x="7071055" y="6547104"/>
-            <a:ext cx="5120640" cy="310896"/>
-          </a:xfrm>
-          <a:prstGeom prst="rect">
-            <a:avLst/>
-          </a:prstGeom>
-          <a:solidFill>
-            <a:srgbClr val="0B0E14"/>
-          </a:solidFill>
-          <a:ln>
-            <a:noFill/>
-          </a:ln>
-          <a:effectLst/>
-        </p:spPr>
-        <p:style>
-          <a:lnRef idx="1">
-            <a:schemeClr val="accent1"/>
-          </a:lnRef>
-          <a:fillRef idx="3">
-            <a:schemeClr val="accent1"/>
-          </a:fillRef>
-          <a:effectRef idx="2">
-            <a:schemeClr val="accent1"/>
-          </a:effectRef>
-          <a:fontRef idx="minor">
-            <a:schemeClr val="lt1"/>
-          </a:fontRef>
-        </p:style>
-        <p:txBody>
-          <a:bodyPr rtlCol="0" anchor="ctr"/>
-          <a:lstStyle/>
-          <a:p>
-            <a:pPr algn="ctr"/>
-          </a:p>
-        </p:txBody>
-      </p:sp>
-      <p:sp>
-        <p:nvSpPr>
-          <p:cNvPr id="8" name="TextBox 7"/>
-          <p:cNvSpPr txBox="1"/>
-          <p:nvPr/>
-        </p:nvSpPr>
-        <p:spPr>
-          <a:xfrm>
-            <a:off x="7208215" y="6565392"/>
-            <a:ext cx="4846320" cy="274320"/>
-          </a:xfrm>
-          <a:prstGeom prst="rect">
-            <a:avLst/>
-          </a:prstGeom>
-          <a:noFill/>
-        </p:spPr>
-        <p:txBody>
-          <a:bodyPr wrap="square" anchor="t">
-            <a:spAutoFit/>
-          </a:bodyPr>
-          <a:lstStyle/>
-          <a:p>
-            <a:pPr algn="l">
-              <a:lnSpc>
-                <a:spcPct val="100000"/>
-              </a:lnSpc>
-            </a:pPr>
-            <a:r>
-              <a:rPr sz="850" b="0">
-                <a:solidFill>
-                  <a:srgbClr val="8A94A6"/>
-                </a:solidFill>
-                <a:latin typeface="Courier New"/>
-              </a:rPr>
-              <a:t>Mary Flanagan, 'Giant Joystick' - Values at Play (educational use)</a:t>
-            </a:r>
-          </a:p>
-        </p:txBody>
-      </p:sp>
-      <p:sp>
-        <p:nvSpPr>
-          <p:cNvPr id="9" name="TextBox 8"/>
           <p:cNvSpPr txBox="1"/>
           <p:nvPr/>
         </p:nvSpPr>
@@ -6847,53 +6923,14 @@
       <p:grpSpPr/>
       <p:sp>
         <p:nvSpPr>
-          <p:cNvPr id="2" name="TextBox 1"/>
-          <p:cNvSpPr txBox="1"/>
-          <p:nvPr/>
-        </p:nvSpPr>
-        <p:spPr>
-          <a:xfrm>
-            <a:off x="640080" y="502920"/>
-            <a:ext cx="10058400" cy="365760"/>
-          </a:xfrm>
-          <a:prstGeom prst="rect">
-            <a:avLst/>
-          </a:prstGeom>
-          <a:noFill/>
-        </p:spPr>
-        <p:txBody>
-          <a:bodyPr wrap="square" anchor="t">
-            <a:spAutoFit/>
-          </a:bodyPr>
-          <a:lstStyle/>
-          <a:p>
-            <a:pPr algn="l">
-              <a:lnSpc>
-                <a:spcPct val="100000"/>
-              </a:lnSpc>
-            </a:pPr>
-            <a:r>
-              <a:rPr sz="1300" b="1">
-                <a:solidFill>
-                  <a:srgbClr val="00FF41"/>
-                </a:solidFill>
-                <a:latin typeface="Courier New"/>
-              </a:rPr>
-              <a:t>DESIGN CHOICES CARRY VALUES</a:t>
-            </a:r>
-          </a:p>
-        </p:txBody>
-      </p:sp>
-      <p:sp>
-        <p:nvSpPr>
-          <p:cNvPr id="3" name="Rectangle 2"/>
+          <p:cNvPr id="2" name="Rectangle 1"/>
           <p:cNvSpPr/>
           <p:nvPr/>
         </p:nvSpPr>
         <p:spPr>
           <a:xfrm>
-            <a:off x="640080" y="932688"/>
-            <a:ext cx="822960" cy="73152"/>
+            <a:off x="0" y="0"/>
+            <a:ext cx="256032" cy="6858000"/>
           </a:xfrm>
           <a:prstGeom prst="rect">
             <a:avLst/>
@@ -6930,14 +6967,53 @@
       </p:sp>
       <p:sp>
         <p:nvSpPr>
+          <p:cNvPr id="3" name="TextBox 2"/>
+          <p:cNvSpPr txBox="1"/>
+          <p:nvPr/>
+        </p:nvSpPr>
+        <p:spPr>
+          <a:xfrm>
+            <a:off x="822960" y="2194560"/>
+            <a:ext cx="10515600" cy="548640"/>
+          </a:xfrm>
+          <a:prstGeom prst="rect">
+            <a:avLst/>
+          </a:prstGeom>
+          <a:noFill/>
+        </p:spPr>
+        <p:txBody>
+          <a:bodyPr wrap="square" anchor="t">
+            <a:spAutoFit/>
+          </a:bodyPr>
+          <a:lstStyle/>
+          <a:p>
+            <a:pPr algn="l">
+              <a:lnSpc>
+                <a:spcPct val="100000"/>
+              </a:lnSpc>
+            </a:pPr>
+            <a:r>
+              <a:rPr sz="1800" b="1">
+                <a:solidFill>
+                  <a:srgbClr val="00FF41"/>
+                </a:solidFill>
+                <a:latin typeface="Courier New"/>
+              </a:rPr>
+              <a:t>PART 3 - IMPLEMENTATION</a:t>
+            </a:r>
+          </a:p>
+        </p:txBody>
+      </p:sp>
+      <p:sp>
+        <p:nvSpPr>
           <p:cNvPr id="4" name="TextBox 3"/>
           <p:cNvSpPr txBox="1"/>
           <p:nvPr/>
         </p:nvSpPr>
         <p:spPr>
           <a:xfrm>
-            <a:off x="640080" y="1188720"/>
-            <a:ext cx="10972800" cy="1097280"/>
+            <a:off x="804672" y="2743200"/>
+            <a:ext cx="10515600" cy="1554480"/>
           </a:xfrm>
           <a:prstGeom prst="rect">
             <a:avLst/>
@@ -6956,175 +7032,13 @@
               </a:lnSpc>
             </a:pPr>
             <a:r>
-              <a:rPr sz="3400" b="1">
+              <a:rPr sz="4800" b="1">
                 <a:solidFill>
                   <a:srgbClr val="F5F7FA"/>
                 </a:solidFill>
                 <a:latin typeface="Arial"/>
               </a:rPr>
-              <a:t>The same feed, two values</a:t>
-            </a:r>
-          </a:p>
-        </p:txBody>
-      </p:sp>
-      <p:sp>
-        <p:nvSpPr>
-          <p:cNvPr id="5" name="TextBox 4"/>
-          <p:cNvSpPr txBox="1"/>
-          <p:nvPr/>
-        </p:nvSpPr>
-        <p:spPr>
-          <a:xfrm>
-            <a:off x="658368" y="2286000"/>
-            <a:ext cx="10881360" cy="3657600"/>
-          </a:xfrm>
-          <a:prstGeom prst="rect">
-            <a:avLst/>
-          </a:prstGeom>
-          <a:noFill/>
-        </p:spPr>
-        <p:txBody>
-          <a:bodyPr wrap="square" anchor="t">
-            <a:spAutoFit/>
-          </a:bodyPr>
-          <a:lstStyle/>
-          <a:p>
-            <a:pPr algn="l">
-              <a:lnSpc>
-                <a:spcPct val="112000"/>
-              </a:lnSpc>
-            </a:pPr>
-            <a:r>
-              <a:rPr sz="2000" b="0">
-                <a:solidFill>
-                  <a:srgbClr val="F5F7FA"/>
-                </a:solidFill>
-                <a:latin typeface="Arial"/>
-              </a:rPr>
-              <a:t>Design a social-media feed for </a:t>
-            </a:r>
-            <a:r>
-              <a:rPr sz="2000" b="1">
-                <a:solidFill>
-                  <a:srgbClr val="FF4D4D"/>
-                </a:solidFill>
-                <a:latin typeface="Arial"/>
-              </a:rPr>
-              <a:t>engagement</a:t>
-            </a:r>
-            <a:r>
-              <a:rPr sz="2000" b="0">
-                <a:solidFill>
-                  <a:srgbClr val="F5F7FA"/>
-                </a:solidFill>
-                <a:latin typeface="Arial"/>
-              </a:rPr>
-              <a:t>, and you get autoplay, streaks, and notifications - "push people's buttons."</a:t>
-            </a:r>
-          </a:p>
-          <a:p>
-            <a:pPr algn="l">
-              <a:lnSpc>
-                <a:spcPct val="112000"/>
-              </a:lnSpc>
-            </a:pPr>
-            <a:r>
-              <a:rPr sz="2000" b="0">
-                <a:solidFill>
-                  <a:srgbClr val="F5F7FA"/>
-                </a:solidFill>
-                <a:latin typeface="Arial"/>
-              </a:rPr>
-              <a:t>Design it for </a:t>
-            </a:r>
-            <a:r>
-              <a:rPr sz="2000" b="1">
-                <a:solidFill>
-                  <a:srgbClr val="00FF41"/>
-                </a:solidFill>
-                <a:latin typeface="Arial"/>
-              </a:rPr>
-              <a:t>autonomy</a:t>
-            </a:r>
-            <a:r>
-              <a:rPr sz="2000" b="0">
-                <a:solidFill>
-                  <a:srgbClr val="F5F7FA"/>
-                </a:solidFill>
-                <a:latin typeface="Arial"/>
-              </a:rPr>
-              <a:t>, and you add friction, stopping points, and real user control.</a:t>
-            </a:r>
-          </a:p>
-          <a:p>
-            <a:pPr algn="l">
-              <a:lnSpc>
-                <a:spcPct val="112000"/>
-              </a:lnSpc>
-            </a:pPr>
-            <a:r>
-              <a:rPr sz="2000" b="0">
-                <a:solidFill>
-                  <a:srgbClr val="F5F7FA"/>
-                </a:solidFill>
-                <a:latin typeface="Arial"/>
-              </a:rPr>
-              <a:t/>
-            </a:r>
-          </a:p>
-          <a:p>
-            <a:pPr algn="l">
-              <a:lnSpc>
-                <a:spcPct val="112000"/>
-              </a:lnSpc>
-            </a:pPr>
-            <a:r>
-              <a:rPr sz="1700" b="0">
-                <a:solidFill>
-                  <a:srgbClr val="8A94A6"/>
-                </a:solidFill>
-                <a:latin typeface="Arial"/>
-              </a:rPr>
-              <a:t>Same product. The values show up in the defaults.</a:t>
-            </a:r>
-          </a:p>
-        </p:txBody>
-      </p:sp>
-      <p:sp>
-        <p:nvSpPr>
-          <p:cNvPr id="6" name="TextBox 5"/>
-          <p:cNvSpPr txBox="1"/>
-          <p:nvPr/>
-        </p:nvSpPr>
-        <p:spPr>
-          <a:xfrm>
-            <a:off x="640080" y="6355080"/>
-            <a:ext cx="10972800" cy="365760"/>
-          </a:xfrm>
-          <a:prstGeom prst="rect">
-            <a:avLst/>
-          </a:prstGeom>
-          <a:noFill/>
-        </p:spPr>
-        <p:txBody>
-          <a:bodyPr wrap="square" anchor="t">
-            <a:spAutoFit/>
-          </a:bodyPr>
-          <a:lstStyle/>
-          <a:p>
-            <a:pPr algn="l">
-              <a:lnSpc>
-                <a:spcPct val="100000"/>
-              </a:lnSpc>
-            </a:pPr>
-            <a:r>
-              <a:rPr sz="1000" b="0">
-                <a:solidFill>
-                  <a:srgbClr val="5A6474"/>
-                </a:solidFill>
-                <a:latin typeface="Courier New"/>
-              </a:rPr>
-              <a:t>Good Code, Good Vibes · TECHIE 1121 · Cornell Tech · Summer 2026</a:t>
+              <a:t>Translate values into features - and resolve the clashes</a:t>
             </a:r>
           </a:p>
         </p:txBody>
@@ -7189,7 +7103,7 @@
                 </a:solidFill>
                 <a:latin typeface="Courier New"/>
               </a:rPr>
-              <a:t>WHEN VALUES CLASH</a:t>
+              <a:t>TRANSLATE</a:t>
             </a:r>
           </a:p>
         </p:txBody>
@@ -7238,16 +7152,41 @@
           </a:p>
         </p:txBody>
       </p:sp>
-      <p:sp>
-        <p:nvSpPr>
-          <p:cNvPr id="4" name="TextBox 3"/>
+      <p:pic>
+        <p:nvPicPr>
+          <p:cNvPr id="4" name="Picture 3" descr="giant_joystick.png"/>
+          <p:cNvPicPr>
+            <a:picLocks noChangeAspect="1"/>
+          </p:cNvPicPr>
+          <p:nvPr/>
+        </p:nvPicPr>
+        <p:blipFill>
+          <a:blip r:embed="rId2"/>
+          <a:srcRect l="29000" r="29000"/>
+          <a:stretch>
+            <a:fillRect/>
+          </a:stretch>
+        </p:blipFill>
+        <p:spPr>
+          <a:xfrm>
+            <a:off x="7071055" y="0"/>
+            <a:ext cx="5120640" cy="6858000"/>
+          </a:xfrm>
+          <a:prstGeom prst="rect">
+            <a:avLst/>
+          </a:prstGeom>
+        </p:spPr>
+      </p:pic>
+      <p:sp>
+        <p:nvSpPr>
+          <p:cNvPr id="5" name="TextBox 4"/>
           <p:cNvSpPr txBox="1"/>
           <p:nvPr/>
         </p:nvSpPr>
         <p:spPr>
           <a:xfrm>
             <a:off x="640080" y="1188720"/>
-            <a:ext cx="10972800" cy="914400"/>
+            <a:ext cx="6019495" cy="1280160"/>
           </a:xfrm>
           <a:prstGeom prst="rect">
             <a:avLst/>
@@ -7266,33 +7205,104 @@
               </a:lnSpc>
             </a:pPr>
             <a:r>
-              <a:rPr sz="3200" b="1">
+              <a:rPr sz="3000" b="1">
                 <a:solidFill>
                   <a:srgbClr val="F5F7FA"/>
                 </a:solidFill>
                 <a:latin typeface="Arial"/>
               </a:rPr>
-              <a:t>Name the resolution - out loud</a:t>
-            </a:r>
-          </a:p>
-        </p:txBody>
-      </p:sp>
-      <p:sp>
-        <p:nvSpPr>
-          <p:cNvPr id="5" name="Rounded Rectangle 4"/>
+              <a:t>From a value to a spec</a:t>
+            </a:r>
+          </a:p>
+        </p:txBody>
+      </p:sp>
+      <p:sp>
+        <p:nvSpPr>
+          <p:cNvPr id="6" name="TextBox 5"/>
+          <p:cNvSpPr txBox="1"/>
+          <p:nvPr/>
+        </p:nvSpPr>
+        <p:spPr>
+          <a:xfrm>
+            <a:off x="640080" y="2560320"/>
+            <a:ext cx="6019495" cy="3108960"/>
+          </a:xfrm>
+          <a:prstGeom prst="rect">
+            <a:avLst/>
+          </a:prstGeom>
+          <a:noFill/>
+        </p:spPr>
+        <p:txBody>
+          <a:bodyPr wrap="square" anchor="t">
+            <a:spAutoFit/>
+          </a:bodyPr>
+          <a:lstStyle/>
+          <a:p>
+            <a:pPr algn="l">
+              <a:lnSpc>
+                <a:spcPct val="116000"/>
+              </a:lnSpc>
+            </a:pPr>
+            <a:r>
+              <a:rPr sz="1900" b="0">
+                <a:solidFill>
+                  <a:srgbClr val="F5F7FA"/>
+                </a:solidFill>
+                <a:latin typeface="Arial"/>
+              </a:rPr>
+              <a:t>Implementation turns an ethical or political value into concrete requirements, features, and architecture.</a:t>
+            </a:r>
+          </a:p>
+          <a:p>
+            <a:pPr algn="l">
+              <a:lnSpc>
+                <a:spcPct val="116000"/>
+              </a:lnSpc>
+            </a:pPr>
+            <a:r>
+              <a:rPr sz="1900" b="0">
+                <a:solidFill>
+                  <a:srgbClr val="F5F7FA"/>
+                </a:solidFill>
+                <a:latin typeface="Arial"/>
+              </a:rPr>
+              <a:t/>
+            </a:r>
+          </a:p>
+          <a:p>
+            <a:pPr algn="l">
+              <a:lnSpc>
+                <a:spcPct val="116000"/>
+              </a:lnSpc>
+            </a:pPr>
+            <a:r>
+              <a:rPr sz="1700" b="0">
+                <a:solidFill>
+                  <a:srgbClr val="8A94A6"/>
+                </a:solidFill>
+                <a:latin typeface="Arial"/>
+              </a:rPr>
+              <a:t>Mary Flanagan's Giant Joystick makes "play" physical - one value, rebuilt into the hardware itself.</a:t>
+            </a:r>
+          </a:p>
+        </p:txBody>
+      </p:sp>
+      <p:sp>
+        <p:nvSpPr>
+          <p:cNvPr id="7" name="Rectangle 6"/>
           <p:cNvSpPr/>
           <p:nvPr/>
         </p:nvSpPr>
         <p:spPr>
           <a:xfrm>
-            <a:off x="640080" y="2468880"/>
-            <a:ext cx="3393338" cy="3383280"/>
-          </a:xfrm>
-          <a:prstGeom prst="roundRect">
+            <a:off x="7071055" y="6547104"/>
+            <a:ext cx="5120640" cy="310896"/>
+          </a:xfrm>
+          <a:prstGeom prst="rect">
             <a:avLst/>
           </a:prstGeom>
           <a:solidFill>
-            <a:srgbClr val="151B26"/>
+            <a:srgbClr val="0B0E14"/>
           </a:solidFill>
           <a:ln>
             <a:noFill/>
@@ -7323,58 +7333,14 @@
       </p:sp>
       <p:sp>
         <p:nvSpPr>
-          <p:cNvPr id="6" name="Rectangle 5"/>
-          <p:cNvSpPr/>
-          <p:nvPr/>
-        </p:nvSpPr>
-        <p:spPr>
-          <a:xfrm>
-            <a:off x="640080" y="2468880"/>
-            <a:ext cx="3393338" cy="82296"/>
-          </a:xfrm>
-          <a:prstGeom prst="rect">
-            <a:avLst/>
-          </a:prstGeom>
-          <a:solidFill>
-            <a:srgbClr val="00FF41"/>
-          </a:solidFill>
-          <a:ln>
-            <a:noFill/>
-          </a:ln>
-          <a:effectLst/>
-        </p:spPr>
-        <p:style>
-          <a:lnRef idx="1">
-            <a:schemeClr val="accent1"/>
-          </a:lnRef>
-          <a:fillRef idx="3">
-            <a:schemeClr val="accent1"/>
-          </a:fillRef>
-          <a:effectRef idx="2">
-            <a:schemeClr val="accent1"/>
-          </a:effectRef>
-          <a:fontRef idx="minor">
-            <a:schemeClr val="lt1"/>
-          </a:fontRef>
-        </p:style>
-        <p:txBody>
-          <a:bodyPr rtlCol="0" anchor="ctr"/>
-          <a:lstStyle/>
-          <a:p>
-            <a:pPr algn="ctr"/>
-          </a:p>
-        </p:txBody>
-      </p:sp>
-      <p:sp>
-        <p:nvSpPr>
-          <p:cNvPr id="7" name="TextBox 6"/>
-          <p:cNvSpPr txBox="1"/>
-          <p:nvPr/>
-        </p:nvSpPr>
-        <p:spPr>
-          <a:xfrm>
-            <a:off x="914400" y="2788920"/>
-            <a:ext cx="2844698" cy="457200"/>
+          <p:cNvPr id="8" name="TextBox 7"/>
+          <p:cNvSpPr txBox="1"/>
+          <p:nvPr/>
+        </p:nvSpPr>
+        <p:spPr>
+          <a:xfrm>
+            <a:off x="7208215" y="6565392"/>
+            <a:ext cx="4846320" cy="274320"/>
           </a:xfrm>
           <a:prstGeom prst="rect">
             <a:avLst/>
@@ -7393,52 +7359,13 @@
               </a:lnSpc>
             </a:pPr>
             <a:r>
-              <a:rPr sz="1200" b="1">
-                <a:solidFill>
-                  <a:srgbClr val="00FF41"/>
+              <a:rPr sz="850" b="0">
+                <a:solidFill>
+                  <a:srgbClr val="8A94A6"/>
                 </a:solidFill>
                 <a:latin typeface="Courier New"/>
               </a:rPr>
-              <a:t>DISSOLVE</a:t>
-            </a:r>
-          </a:p>
-        </p:txBody>
-      </p:sp>
-      <p:sp>
-        <p:nvSpPr>
-          <p:cNvPr id="8" name="TextBox 7"/>
-          <p:cNvSpPr txBox="1"/>
-          <p:nvPr/>
-        </p:nvSpPr>
-        <p:spPr>
-          <a:xfrm>
-            <a:off x="914400" y="3246120"/>
-            <a:ext cx="2844698" cy="822960"/>
-          </a:xfrm>
-          <a:prstGeom prst="rect">
-            <a:avLst/>
-          </a:prstGeom>
-          <a:noFill/>
-        </p:spPr>
-        <p:txBody>
-          <a:bodyPr wrap="square" anchor="t">
-            <a:spAutoFit/>
-          </a:bodyPr>
-          <a:lstStyle/>
-          <a:p>
-            <a:pPr algn="l">
-              <a:lnSpc>
-                <a:spcPct val="100000"/>
-              </a:lnSpc>
-            </a:pPr>
-            <a:r>
-              <a:rPr sz="2000" b="1">
-                <a:solidFill>
-                  <a:srgbClr val="F5F7FA"/>
-                </a:solidFill>
-                <a:latin typeface="Arial"/>
-              </a:rPr>
-              <a:t>Redesign around it</a:t>
+              <a:t>Mary Flanagan, 'Giant Joystick' - Values at Play (educational use)</a:t>
             </a:r>
           </a:p>
         </p:txBody>
@@ -7446,455 +7373,6 @@
       <p:sp>
         <p:nvSpPr>
           <p:cNvPr id="9" name="TextBox 8"/>
-          <p:cNvSpPr txBox="1"/>
-          <p:nvPr/>
-        </p:nvSpPr>
-        <p:spPr>
-          <a:xfrm>
-            <a:off x="914400" y="4114800"/>
-            <a:ext cx="2844698" cy="1554480"/>
-          </a:xfrm>
-          <a:prstGeom prst="rect">
-            <a:avLst/>
-          </a:prstGeom>
-          <a:noFill/>
-        </p:spPr>
-        <p:txBody>
-          <a:bodyPr wrap="square" anchor="t">
-            <a:spAutoFit/>
-          </a:bodyPr>
-          <a:lstStyle/>
-          <a:p>
-            <a:pPr algn="l">
-              <a:lnSpc>
-                <a:spcPct val="110000"/>
-              </a:lnSpc>
-            </a:pPr>
-            <a:r>
-              <a:rPr sz="1500" b="0">
-                <a:solidFill>
-                  <a:srgbClr val="8A94A6"/>
-                </a:solidFill>
-                <a:latin typeface="Arial"/>
-              </a:rPr>
-              <a:t>Find a design where BOTH values hold. (Vacuum: on-device maps, nothing to the cloud.)</a:t>
-            </a:r>
-          </a:p>
-        </p:txBody>
-      </p:sp>
-      <p:sp>
-        <p:nvSpPr>
-          <p:cNvPr id="10" name="Rounded Rectangle 9"/>
-          <p:cNvSpPr/>
-          <p:nvPr/>
-        </p:nvSpPr>
-        <p:spPr>
-          <a:xfrm>
-            <a:off x="4399178" y="2468880"/>
-            <a:ext cx="3393338" cy="3383280"/>
-          </a:xfrm>
-          <a:prstGeom prst="roundRect">
-            <a:avLst/>
-          </a:prstGeom>
-          <a:solidFill>
-            <a:srgbClr val="151B26"/>
-          </a:solidFill>
-          <a:ln>
-            <a:noFill/>
-          </a:ln>
-          <a:effectLst/>
-        </p:spPr>
-        <p:style>
-          <a:lnRef idx="1">
-            <a:schemeClr val="accent1"/>
-          </a:lnRef>
-          <a:fillRef idx="3">
-            <a:schemeClr val="accent1"/>
-          </a:fillRef>
-          <a:effectRef idx="2">
-            <a:schemeClr val="accent1"/>
-          </a:effectRef>
-          <a:fontRef idx="minor">
-            <a:schemeClr val="lt1"/>
-          </a:fontRef>
-        </p:style>
-        <p:txBody>
-          <a:bodyPr rtlCol="0" anchor="ctr"/>
-          <a:lstStyle/>
-          <a:p>
-            <a:pPr algn="ctr"/>
-          </a:p>
-        </p:txBody>
-      </p:sp>
-      <p:sp>
-        <p:nvSpPr>
-          <p:cNvPr id="11" name="Rectangle 10"/>
-          <p:cNvSpPr/>
-          <p:nvPr/>
-        </p:nvSpPr>
-        <p:spPr>
-          <a:xfrm>
-            <a:off x="4399178" y="2468880"/>
-            <a:ext cx="3393338" cy="82296"/>
-          </a:xfrm>
-          <a:prstGeom prst="rect">
-            <a:avLst/>
-          </a:prstGeom>
-          <a:solidFill>
-            <a:srgbClr val="00FF41"/>
-          </a:solidFill>
-          <a:ln>
-            <a:noFill/>
-          </a:ln>
-          <a:effectLst/>
-        </p:spPr>
-        <p:style>
-          <a:lnRef idx="1">
-            <a:schemeClr val="accent1"/>
-          </a:lnRef>
-          <a:fillRef idx="3">
-            <a:schemeClr val="accent1"/>
-          </a:fillRef>
-          <a:effectRef idx="2">
-            <a:schemeClr val="accent1"/>
-          </a:effectRef>
-          <a:fontRef idx="minor">
-            <a:schemeClr val="lt1"/>
-          </a:fontRef>
-        </p:style>
-        <p:txBody>
-          <a:bodyPr rtlCol="0" anchor="ctr"/>
-          <a:lstStyle/>
-          <a:p>
-            <a:pPr algn="ctr"/>
-          </a:p>
-        </p:txBody>
-      </p:sp>
-      <p:sp>
-        <p:nvSpPr>
-          <p:cNvPr id="12" name="TextBox 11"/>
-          <p:cNvSpPr txBox="1"/>
-          <p:nvPr/>
-        </p:nvSpPr>
-        <p:spPr>
-          <a:xfrm>
-            <a:off x="4673498" y="2788920"/>
-            <a:ext cx="2844698" cy="457200"/>
-          </a:xfrm>
-          <a:prstGeom prst="rect">
-            <a:avLst/>
-          </a:prstGeom>
-          <a:noFill/>
-        </p:spPr>
-        <p:txBody>
-          <a:bodyPr wrap="square" anchor="t">
-            <a:spAutoFit/>
-          </a:bodyPr>
-          <a:lstStyle/>
-          <a:p>
-            <a:pPr algn="l">
-              <a:lnSpc>
-                <a:spcPct val="100000"/>
-              </a:lnSpc>
-            </a:pPr>
-            <a:r>
-              <a:rPr sz="1200" b="1">
-                <a:solidFill>
-                  <a:srgbClr val="00FF41"/>
-                </a:solidFill>
-                <a:latin typeface="Courier New"/>
-              </a:rPr>
-              <a:t>COMPROMISE</a:t>
-            </a:r>
-          </a:p>
-        </p:txBody>
-      </p:sp>
-      <p:sp>
-        <p:nvSpPr>
-          <p:cNvPr id="13" name="TextBox 12"/>
-          <p:cNvSpPr txBox="1"/>
-          <p:nvPr/>
-        </p:nvSpPr>
-        <p:spPr>
-          <a:xfrm>
-            <a:off x="4673498" y="3246120"/>
-            <a:ext cx="2844698" cy="822960"/>
-          </a:xfrm>
-          <a:prstGeom prst="rect">
-            <a:avLst/>
-          </a:prstGeom>
-          <a:noFill/>
-        </p:spPr>
-        <p:txBody>
-          <a:bodyPr wrap="square" anchor="t">
-            <a:spAutoFit/>
-          </a:bodyPr>
-          <a:lstStyle/>
-          <a:p>
-            <a:pPr algn="l">
-              <a:lnSpc>
-                <a:spcPct val="100000"/>
-              </a:lnSpc>
-            </a:pPr>
-            <a:r>
-              <a:rPr sz="2000" b="1">
-                <a:solidFill>
-                  <a:srgbClr val="F5F7FA"/>
-                </a:solidFill>
-                <a:latin typeface="Arial"/>
-              </a:rPr>
-              <a:t>Each in part</a:t>
-            </a:r>
-          </a:p>
-        </p:txBody>
-      </p:sp>
-      <p:sp>
-        <p:nvSpPr>
-          <p:cNvPr id="14" name="TextBox 13"/>
-          <p:cNvSpPr txBox="1"/>
-          <p:nvPr/>
-        </p:nvSpPr>
-        <p:spPr>
-          <a:xfrm>
-            <a:off x="4673498" y="4114800"/>
-            <a:ext cx="2844698" cy="1554480"/>
-          </a:xfrm>
-          <a:prstGeom prst="rect">
-            <a:avLst/>
-          </a:prstGeom>
-          <a:noFill/>
-        </p:spPr>
-        <p:txBody>
-          <a:bodyPr wrap="square" anchor="t">
-            <a:spAutoFit/>
-          </a:bodyPr>
-          <a:lstStyle/>
-          <a:p>
-            <a:pPr algn="l">
-              <a:lnSpc>
-                <a:spcPct val="110000"/>
-              </a:lnSpc>
-            </a:pPr>
-            <a:r>
-              <a:rPr sz="1500" b="0">
-                <a:solidFill>
-                  <a:srgbClr val="8A94A6"/>
-                </a:solidFill>
-                <a:latin typeface="Arial"/>
-              </a:rPr>
-              <a:t>Promote each value in less than full measure. (Vacuum: cloud data, but anonymized + opt-out.)</a:t>
-            </a:r>
-          </a:p>
-        </p:txBody>
-      </p:sp>
-      <p:sp>
-        <p:nvSpPr>
-          <p:cNvPr id="15" name="Rounded Rectangle 14"/>
-          <p:cNvSpPr/>
-          <p:nvPr/>
-        </p:nvSpPr>
-        <p:spPr>
-          <a:xfrm>
-            <a:off x="8158276" y="2468880"/>
-            <a:ext cx="3393338" cy="3383280"/>
-          </a:xfrm>
-          <a:prstGeom prst="roundRect">
-            <a:avLst/>
-          </a:prstGeom>
-          <a:solidFill>
-            <a:srgbClr val="151B26"/>
-          </a:solidFill>
-          <a:ln>
-            <a:noFill/>
-          </a:ln>
-          <a:effectLst/>
-        </p:spPr>
-        <p:style>
-          <a:lnRef idx="1">
-            <a:schemeClr val="accent1"/>
-          </a:lnRef>
-          <a:fillRef idx="3">
-            <a:schemeClr val="accent1"/>
-          </a:fillRef>
-          <a:effectRef idx="2">
-            <a:schemeClr val="accent1"/>
-          </a:effectRef>
-          <a:fontRef idx="minor">
-            <a:schemeClr val="lt1"/>
-          </a:fontRef>
-        </p:style>
-        <p:txBody>
-          <a:bodyPr rtlCol="0" anchor="ctr"/>
-          <a:lstStyle/>
-          <a:p>
-            <a:pPr algn="ctr"/>
-          </a:p>
-        </p:txBody>
-      </p:sp>
-      <p:sp>
-        <p:nvSpPr>
-          <p:cNvPr id="16" name="Rectangle 15"/>
-          <p:cNvSpPr/>
-          <p:nvPr/>
-        </p:nvSpPr>
-        <p:spPr>
-          <a:xfrm>
-            <a:off x="8158276" y="2468880"/>
-            <a:ext cx="3393338" cy="82296"/>
-          </a:xfrm>
-          <a:prstGeom prst="rect">
-            <a:avLst/>
-          </a:prstGeom>
-          <a:solidFill>
-            <a:srgbClr val="00FF41"/>
-          </a:solidFill>
-          <a:ln>
-            <a:noFill/>
-          </a:ln>
-          <a:effectLst/>
-        </p:spPr>
-        <p:style>
-          <a:lnRef idx="1">
-            <a:schemeClr val="accent1"/>
-          </a:lnRef>
-          <a:fillRef idx="3">
-            <a:schemeClr val="accent1"/>
-          </a:fillRef>
-          <a:effectRef idx="2">
-            <a:schemeClr val="accent1"/>
-          </a:effectRef>
-          <a:fontRef idx="minor">
-            <a:schemeClr val="lt1"/>
-          </a:fontRef>
-        </p:style>
-        <p:txBody>
-          <a:bodyPr rtlCol="0" anchor="ctr"/>
-          <a:lstStyle/>
-          <a:p>
-            <a:pPr algn="ctr"/>
-          </a:p>
-        </p:txBody>
-      </p:sp>
-      <p:sp>
-        <p:nvSpPr>
-          <p:cNvPr id="17" name="TextBox 16"/>
-          <p:cNvSpPr txBox="1"/>
-          <p:nvPr/>
-        </p:nvSpPr>
-        <p:spPr>
-          <a:xfrm>
-            <a:off x="8432596" y="2788920"/>
-            <a:ext cx="2844698" cy="457200"/>
-          </a:xfrm>
-          <a:prstGeom prst="rect">
-            <a:avLst/>
-          </a:prstGeom>
-          <a:noFill/>
-        </p:spPr>
-        <p:txBody>
-          <a:bodyPr wrap="square" anchor="t">
-            <a:spAutoFit/>
-          </a:bodyPr>
-          <a:lstStyle/>
-          <a:p>
-            <a:pPr algn="l">
-              <a:lnSpc>
-                <a:spcPct val="100000"/>
-              </a:lnSpc>
-            </a:pPr>
-            <a:r>
-              <a:rPr sz="1200" b="1">
-                <a:solidFill>
-                  <a:srgbClr val="00FF41"/>
-                </a:solidFill>
-                <a:latin typeface="Courier New"/>
-              </a:rPr>
-              <a:t>TRADE-OFF</a:t>
-            </a:r>
-          </a:p>
-        </p:txBody>
-      </p:sp>
-      <p:sp>
-        <p:nvSpPr>
-          <p:cNvPr id="18" name="TextBox 17"/>
-          <p:cNvSpPr txBox="1"/>
-          <p:nvPr/>
-        </p:nvSpPr>
-        <p:spPr>
-          <a:xfrm>
-            <a:off x="8432596" y="3246120"/>
-            <a:ext cx="2844698" cy="822960"/>
-          </a:xfrm>
-          <a:prstGeom prst="rect">
-            <a:avLst/>
-          </a:prstGeom>
-          <a:noFill/>
-        </p:spPr>
-        <p:txBody>
-          <a:bodyPr wrap="square" anchor="t">
-            <a:spAutoFit/>
-          </a:bodyPr>
-          <a:lstStyle/>
-          <a:p>
-            <a:pPr algn="l">
-              <a:lnSpc>
-                <a:spcPct val="100000"/>
-              </a:lnSpc>
-            </a:pPr>
-            <a:r>
-              <a:rPr sz="2000" b="1">
-                <a:solidFill>
-                  <a:srgbClr val="F5F7FA"/>
-                </a:solidFill>
-                <a:latin typeface="Arial"/>
-              </a:rPr>
-              <a:t>Sacrifice one</a:t>
-            </a:r>
-          </a:p>
-        </p:txBody>
-      </p:sp>
-      <p:sp>
-        <p:nvSpPr>
-          <p:cNvPr id="19" name="TextBox 18"/>
-          <p:cNvSpPr txBox="1"/>
-          <p:nvPr/>
-        </p:nvSpPr>
-        <p:spPr>
-          <a:xfrm>
-            <a:off x="8432596" y="4114800"/>
-            <a:ext cx="2844698" cy="1554480"/>
-          </a:xfrm>
-          <a:prstGeom prst="rect">
-            <a:avLst/>
-          </a:prstGeom>
-          <a:noFill/>
-        </p:spPr>
-        <p:txBody>
-          <a:bodyPr wrap="square" anchor="t">
-            <a:spAutoFit/>
-          </a:bodyPr>
-          <a:lstStyle/>
-          <a:p>
-            <a:pPr algn="l">
-              <a:lnSpc>
-                <a:spcPct val="110000"/>
-              </a:lnSpc>
-            </a:pPr>
-            <a:r>
-              <a:rPr sz="1500" b="0">
-                <a:solidFill>
-                  <a:srgbClr val="8A94A6"/>
-                </a:solidFill>
-                <a:latin typeface="Arial"/>
-              </a:rPr>
-              <a:t>Give one up for another - and say so out loud. (Vacuum: full collection for max automation.)</a:t>
-            </a:r>
-          </a:p>
-        </p:txBody>
-      </p:sp>
-      <p:sp>
-        <p:nvSpPr>
-          <p:cNvPr id="20" name="TextBox 19"/>
           <p:cNvSpPr txBox="1"/>
           <p:nvPr/>
         </p:nvSpPr>
@@ -8249,7 +7727,7 @@
                 </a:solidFill>
                 <a:latin typeface="Courier New"/>
               </a:rPr>
-              <a:t>BREAK</a:t>
+              <a:t>DESIGN CHOICES CARRY VALUES</a:t>
             </a:r>
           </a:p>
         </p:txBody>
@@ -8332,7 +7810,7 @@
                 </a:solidFill>
                 <a:latin typeface="Arial"/>
               </a:rPr>
-              <a:t>~10 minutes</a:t>
+              <a:t>The same feed, two values</a:t>
             </a:r>
           </a:p>
         </p:txBody>
@@ -8365,13 +7843,97 @@
               </a:lnSpc>
             </a:pPr>
             <a:r>
-              <a:rPr sz="2200" b="0">
+              <a:rPr sz="2000" b="0">
                 <a:solidFill>
                   <a:srgbClr val="F5F7FA"/>
                 </a:solidFill>
                 <a:latin typeface="Arial"/>
               </a:rPr>
-              <a:t>Last stretch. Then: did any of it actually work?</a:t>
+              <a:t>Design a social-media feed for </a:t>
+            </a:r>
+            <a:r>
+              <a:rPr sz="2000" b="1">
+                <a:solidFill>
+                  <a:srgbClr val="FF4D4D"/>
+                </a:solidFill>
+                <a:latin typeface="Arial"/>
+              </a:rPr>
+              <a:t>engagement</a:t>
+            </a:r>
+            <a:r>
+              <a:rPr sz="2000" b="0">
+                <a:solidFill>
+                  <a:srgbClr val="F5F7FA"/>
+                </a:solidFill>
+                <a:latin typeface="Arial"/>
+              </a:rPr>
+              <a:t>, and you get autoplay, streaks, and notifications - "push people's buttons."</a:t>
+            </a:r>
+          </a:p>
+          <a:p>
+            <a:pPr algn="l">
+              <a:lnSpc>
+                <a:spcPct val="112000"/>
+              </a:lnSpc>
+            </a:pPr>
+            <a:r>
+              <a:rPr sz="2000" b="0">
+                <a:solidFill>
+                  <a:srgbClr val="F5F7FA"/>
+                </a:solidFill>
+                <a:latin typeface="Arial"/>
+              </a:rPr>
+              <a:t>Design it for </a:t>
+            </a:r>
+            <a:r>
+              <a:rPr sz="2000" b="1">
+                <a:solidFill>
+                  <a:srgbClr val="00FF41"/>
+                </a:solidFill>
+                <a:latin typeface="Arial"/>
+              </a:rPr>
+              <a:t>autonomy</a:t>
+            </a:r>
+            <a:r>
+              <a:rPr sz="2000" b="0">
+                <a:solidFill>
+                  <a:srgbClr val="F5F7FA"/>
+                </a:solidFill>
+                <a:latin typeface="Arial"/>
+              </a:rPr>
+              <a:t>, and you add friction, stopping points, and real user control.</a:t>
+            </a:r>
+          </a:p>
+          <a:p>
+            <a:pPr algn="l">
+              <a:lnSpc>
+                <a:spcPct val="112000"/>
+              </a:lnSpc>
+            </a:pPr>
+            <a:r>
+              <a:rPr sz="2000" b="0">
+                <a:solidFill>
+                  <a:srgbClr val="F5F7FA"/>
+                </a:solidFill>
+                <a:latin typeface="Arial"/>
+              </a:rPr>
+              <a:t/>
+            </a:r>
+          </a:p>
+          <a:p>
+            <a:pPr algn="l">
+              <a:lnSpc>
+                <a:spcPct val="112000"/>
+              </a:lnSpc>
+            </a:pPr>
+            <a:r>
+              <a:rPr sz="1700" b="0">
+                <a:solidFill>
+                  <a:srgbClr val="8A94A6"/>
+                </a:solidFill>
+                <a:latin typeface="Arial"/>
+              </a:rPr>
+              <a:t>Same product. The values show up in the defaults.</a:t>
             </a:r>
           </a:p>
         </p:txBody>
@@ -8443,14 +8005,53 @@
       <p:grpSpPr/>
       <p:sp>
         <p:nvSpPr>
-          <p:cNvPr id="2" name="Rectangle 1"/>
+          <p:cNvPr id="2" name="TextBox 1"/>
+          <p:cNvSpPr txBox="1"/>
+          <p:nvPr/>
+        </p:nvSpPr>
+        <p:spPr>
+          <a:xfrm>
+            <a:off x="640080" y="502920"/>
+            <a:ext cx="10058400" cy="365760"/>
+          </a:xfrm>
+          <a:prstGeom prst="rect">
+            <a:avLst/>
+          </a:prstGeom>
+          <a:noFill/>
+        </p:spPr>
+        <p:txBody>
+          <a:bodyPr wrap="square" anchor="t">
+            <a:spAutoFit/>
+          </a:bodyPr>
+          <a:lstStyle/>
+          <a:p>
+            <a:pPr algn="l">
+              <a:lnSpc>
+                <a:spcPct val="100000"/>
+              </a:lnSpc>
+            </a:pPr>
+            <a:r>
+              <a:rPr sz="1300" b="1">
+                <a:solidFill>
+                  <a:srgbClr val="00FF41"/>
+                </a:solidFill>
+                <a:latin typeface="Courier New"/>
+              </a:rPr>
+              <a:t>WHEN VALUES CLASH</a:t>
+            </a:r>
+          </a:p>
+        </p:txBody>
+      </p:sp>
+      <p:sp>
+        <p:nvSpPr>
+          <p:cNvPr id="3" name="Rectangle 2"/>
           <p:cNvSpPr/>
           <p:nvPr/>
         </p:nvSpPr>
         <p:spPr>
           <a:xfrm>
-            <a:off x="0" y="0"/>
-            <a:ext cx="256032" cy="6858000"/>
+            <a:off x="640080" y="932688"/>
+            <a:ext cx="822960" cy="73152"/>
           </a:xfrm>
           <a:prstGeom prst="rect">
             <a:avLst/>
@@ -8487,14 +8088,14 @@
       </p:sp>
       <p:sp>
         <p:nvSpPr>
-          <p:cNvPr id="3" name="TextBox 2"/>
-          <p:cNvSpPr txBox="1"/>
-          <p:nvPr/>
-        </p:nvSpPr>
-        <p:spPr>
-          <a:xfrm>
-            <a:off x="822960" y="2194560"/>
-            <a:ext cx="10515600" cy="548640"/>
+          <p:cNvPr id="4" name="TextBox 3"/>
+          <p:cNvSpPr txBox="1"/>
+          <p:nvPr/>
+        </p:nvSpPr>
+        <p:spPr>
+          <a:xfrm>
+            <a:off x="640080" y="1188720"/>
+            <a:ext cx="10972800" cy="914400"/>
           </a:xfrm>
           <a:prstGeom prst="rect">
             <a:avLst/>
@@ -8513,27 +8114,154 @@
               </a:lnSpc>
             </a:pPr>
             <a:r>
-              <a:rPr sz="1800" b="1">
+              <a:rPr sz="3200" b="1">
+                <a:solidFill>
+                  <a:srgbClr val="F5F7FA"/>
+                </a:solidFill>
+                <a:latin typeface="Arial"/>
+              </a:rPr>
+              <a:t>Name the resolution - out loud</a:t>
+            </a:r>
+          </a:p>
+        </p:txBody>
+      </p:sp>
+      <p:sp>
+        <p:nvSpPr>
+          <p:cNvPr id="5" name="Rounded Rectangle 4"/>
+          <p:cNvSpPr/>
+          <p:nvPr/>
+        </p:nvSpPr>
+        <p:spPr>
+          <a:xfrm>
+            <a:off x="640080" y="2468880"/>
+            <a:ext cx="3393338" cy="3383280"/>
+          </a:xfrm>
+          <a:prstGeom prst="roundRect">
+            <a:avLst/>
+          </a:prstGeom>
+          <a:solidFill>
+            <a:srgbClr val="151B26"/>
+          </a:solidFill>
+          <a:ln>
+            <a:noFill/>
+          </a:ln>
+          <a:effectLst/>
+        </p:spPr>
+        <p:style>
+          <a:lnRef idx="1">
+            <a:schemeClr val="accent1"/>
+          </a:lnRef>
+          <a:fillRef idx="3">
+            <a:schemeClr val="accent1"/>
+          </a:fillRef>
+          <a:effectRef idx="2">
+            <a:schemeClr val="accent1"/>
+          </a:effectRef>
+          <a:fontRef idx="minor">
+            <a:schemeClr val="lt1"/>
+          </a:fontRef>
+        </p:style>
+        <p:txBody>
+          <a:bodyPr rtlCol="0" anchor="ctr"/>
+          <a:lstStyle/>
+          <a:p>
+            <a:pPr algn="ctr"/>
+          </a:p>
+        </p:txBody>
+      </p:sp>
+      <p:sp>
+        <p:nvSpPr>
+          <p:cNvPr id="6" name="Rectangle 5"/>
+          <p:cNvSpPr/>
+          <p:nvPr/>
+        </p:nvSpPr>
+        <p:spPr>
+          <a:xfrm>
+            <a:off x="640080" y="2468880"/>
+            <a:ext cx="3393338" cy="82296"/>
+          </a:xfrm>
+          <a:prstGeom prst="rect">
+            <a:avLst/>
+          </a:prstGeom>
+          <a:solidFill>
+            <a:srgbClr val="00FF41"/>
+          </a:solidFill>
+          <a:ln>
+            <a:noFill/>
+          </a:ln>
+          <a:effectLst/>
+        </p:spPr>
+        <p:style>
+          <a:lnRef idx="1">
+            <a:schemeClr val="accent1"/>
+          </a:lnRef>
+          <a:fillRef idx="3">
+            <a:schemeClr val="accent1"/>
+          </a:fillRef>
+          <a:effectRef idx="2">
+            <a:schemeClr val="accent1"/>
+          </a:effectRef>
+          <a:fontRef idx="minor">
+            <a:schemeClr val="lt1"/>
+          </a:fontRef>
+        </p:style>
+        <p:txBody>
+          <a:bodyPr rtlCol="0" anchor="ctr"/>
+          <a:lstStyle/>
+          <a:p>
+            <a:pPr algn="ctr"/>
+          </a:p>
+        </p:txBody>
+      </p:sp>
+      <p:sp>
+        <p:nvSpPr>
+          <p:cNvPr id="7" name="TextBox 6"/>
+          <p:cNvSpPr txBox="1"/>
+          <p:nvPr/>
+        </p:nvSpPr>
+        <p:spPr>
+          <a:xfrm>
+            <a:off x="914400" y="2788920"/>
+            <a:ext cx="2844698" cy="457200"/>
+          </a:xfrm>
+          <a:prstGeom prst="rect">
+            <a:avLst/>
+          </a:prstGeom>
+          <a:noFill/>
+        </p:spPr>
+        <p:txBody>
+          <a:bodyPr wrap="square" anchor="t">
+            <a:spAutoFit/>
+          </a:bodyPr>
+          <a:lstStyle/>
+          <a:p>
+            <a:pPr algn="l">
+              <a:lnSpc>
+                <a:spcPct val="100000"/>
+              </a:lnSpc>
+            </a:pPr>
+            <a:r>
+              <a:rPr sz="1200" b="1">
                 <a:solidFill>
                   <a:srgbClr val="00FF41"/>
                 </a:solidFill>
                 <a:latin typeface="Courier New"/>
               </a:rPr>
-              <a:t>PART 4 - VERIFICATION</a:t>
-            </a:r>
-          </a:p>
-        </p:txBody>
-      </p:sp>
-      <p:sp>
-        <p:nvSpPr>
-          <p:cNvPr id="4" name="TextBox 3"/>
-          <p:cNvSpPr txBox="1"/>
-          <p:nvPr/>
-        </p:nvSpPr>
-        <p:spPr>
-          <a:xfrm>
-            <a:off x="804672" y="2743200"/>
-            <a:ext cx="10515600" cy="1554480"/>
+              <a:t>DISSOLVE</a:t>
+            </a:r>
+          </a:p>
+        </p:txBody>
+      </p:sp>
+      <p:sp>
+        <p:nvSpPr>
+          <p:cNvPr id="8" name="TextBox 7"/>
+          <p:cNvSpPr txBox="1"/>
+          <p:nvPr/>
+        </p:nvSpPr>
+        <p:spPr>
+          <a:xfrm>
+            <a:off x="914400" y="3246120"/>
+            <a:ext cx="2844698" cy="822960"/>
           </a:xfrm>
           <a:prstGeom prst="rect">
             <a:avLst/>
@@ -8552,13 +8280,501 @@
               </a:lnSpc>
             </a:pPr>
             <a:r>
-              <a:rPr sz="4800" b="1">
+              <a:rPr sz="2000" b="1">
                 <a:solidFill>
                   <a:srgbClr val="F5F7FA"/>
                 </a:solidFill>
                 <a:latin typeface="Arial"/>
               </a:rPr>
-              <a:t>Did the values actually land?</a:t>
+              <a:t>Redesign around it</a:t>
+            </a:r>
+          </a:p>
+        </p:txBody>
+      </p:sp>
+      <p:sp>
+        <p:nvSpPr>
+          <p:cNvPr id="9" name="TextBox 8"/>
+          <p:cNvSpPr txBox="1"/>
+          <p:nvPr/>
+        </p:nvSpPr>
+        <p:spPr>
+          <a:xfrm>
+            <a:off x="914400" y="4114800"/>
+            <a:ext cx="2844698" cy="1554480"/>
+          </a:xfrm>
+          <a:prstGeom prst="rect">
+            <a:avLst/>
+          </a:prstGeom>
+          <a:noFill/>
+        </p:spPr>
+        <p:txBody>
+          <a:bodyPr wrap="square" anchor="t">
+            <a:spAutoFit/>
+          </a:bodyPr>
+          <a:lstStyle/>
+          <a:p>
+            <a:pPr algn="l">
+              <a:lnSpc>
+                <a:spcPct val="110000"/>
+              </a:lnSpc>
+            </a:pPr>
+            <a:r>
+              <a:rPr sz="1500" b="0">
+                <a:solidFill>
+                  <a:srgbClr val="8A94A6"/>
+                </a:solidFill>
+                <a:latin typeface="Arial"/>
+              </a:rPr>
+              <a:t>Find a design where BOTH values hold. (Vacuum: on-device maps, nothing to the cloud.)</a:t>
+            </a:r>
+          </a:p>
+        </p:txBody>
+      </p:sp>
+      <p:sp>
+        <p:nvSpPr>
+          <p:cNvPr id="10" name="Rounded Rectangle 9"/>
+          <p:cNvSpPr/>
+          <p:nvPr/>
+        </p:nvSpPr>
+        <p:spPr>
+          <a:xfrm>
+            <a:off x="4399178" y="2468880"/>
+            <a:ext cx="3393338" cy="3383280"/>
+          </a:xfrm>
+          <a:prstGeom prst="roundRect">
+            <a:avLst/>
+          </a:prstGeom>
+          <a:solidFill>
+            <a:srgbClr val="151B26"/>
+          </a:solidFill>
+          <a:ln>
+            <a:noFill/>
+          </a:ln>
+          <a:effectLst/>
+        </p:spPr>
+        <p:style>
+          <a:lnRef idx="1">
+            <a:schemeClr val="accent1"/>
+          </a:lnRef>
+          <a:fillRef idx="3">
+            <a:schemeClr val="accent1"/>
+          </a:fillRef>
+          <a:effectRef idx="2">
+            <a:schemeClr val="accent1"/>
+          </a:effectRef>
+          <a:fontRef idx="minor">
+            <a:schemeClr val="lt1"/>
+          </a:fontRef>
+        </p:style>
+        <p:txBody>
+          <a:bodyPr rtlCol="0" anchor="ctr"/>
+          <a:lstStyle/>
+          <a:p>
+            <a:pPr algn="ctr"/>
+          </a:p>
+        </p:txBody>
+      </p:sp>
+      <p:sp>
+        <p:nvSpPr>
+          <p:cNvPr id="11" name="Rectangle 10"/>
+          <p:cNvSpPr/>
+          <p:nvPr/>
+        </p:nvSpPr>
+        <p:spPr>
+          <a:xfrm>
+            <a:off x="4399178" y="2468880"/>
+            <a:ext cx="3393338" cy="82296"/>
+          </a:xfrm>
+          <a:prstGeom prst="rect">
+            <a:avLst/>
+          </a:prstGeom>
+          <a:solidFill>
+            <a:srgbClr val="00FF41"/>
+          </a:solidFill>
+          <a:ln>
+            <a:noFill/>
+          </a:ln>
+          <a:effectLst/>
+        </p:spPr>
+        <p:style>
+          <a:lnRef idx="1">
+            <a:schemeClr val="accent1"/>
+          </a:lnRef>
+          <a:fillRef idx="3">
+            <a:schemeClr val="accent1"/>
+          </a:fillRef>
+          <a:effectRef idx="2">
+            <a:schemeClr val="accent1"/>
+          </a:effectRef>
+          <a:fontRef idx="minor">
+            <a:schemeClr val="lt1"/>
+          </a:fontRef>
+        </p:style>
+        <p:txBody>
+          <a:bodyPr rtlCol="0" anchor="ctr"/>
+          <a:lstStyle/>
+          <a:p>
+            <a:pPr algn="ctr"/>
+          </a:p>
+        </p:txBody>
+      </p:sp>
+      <p:sp>
+        <p:nvSpPr>
+          <p:cNvPr id="12" name="TextBox 11"/>
+          <p:cNvSpPr txBox="1"/>
+          <p:nvPr/>
+        </p:nvSpPr>
+        <p:spPr>
+          <a:xfrm>
+            <a:off x="4673498" y="2788920"/>
+            <a:ext cx="2844698" cy="457200"/>
+          </a:xfrm>
+          <a:prstGeom prst="rect">
+            <a:avLst/>
+          </a:prstGeom>
+          <a:noFill/>
+        </p:spPr>
+        <p:txBody>
+          <a:bodyPr wrap="square" anchor="t">
+            <a:spAutoFit/>
+          </a:bodyPr>
+          <a:lstStyle/>
+          <a:p>
+            <a:pPr algn="l">
+              <a:lnSpc>
+                <a:spcPct val="100000"/>
+              </a:lnSpc>
+            </a:pPr>
+            <a:r>
+              <a:rPr sz="1200" b="1">
+                <a:solidFill>
+                  <a:srgbClr val="00FF41"/>
+                </a:solidFill>
+                <a:latin typeface="Courier New"/>
+              </a:rPr>
+              <a:t>COMPROMISE</a:t>
+            </a:r>
+          </a:p>
+        </p:txBody>
+      </p:sp>
+      <p:sp>
+        <p:nvSpPr>
+          <p:cNvPr id="13" name="TextBox 12"/>
+          <p:cNvSpPr txBox="1"/>
+          <p:nvPr/>
+        </p:nvSpPr>
+        <p:spPr>
+          <a:xfrm>
+            <a:off x="4673498" y="3246120"/>
+            <a:ext cx="2844698" cy="822960"/>
+          </a:xfrm>
+          <a:prstGeom prst="rect">
+            <a:avLst/>
+          </a:prstGeom>
+          <a:noFill/>
+        </p:spPr>
+        <p:txBody>
+          <a:bodyPr wrap="square" anchor="t">
+            <a:spAutoFit/>
+          </a:bodyPr>
+          <a:lstStyle/>
+          <a:p>
+            <a:pPr algn="l">
+              <a:lnSpc>
+                <a:spcPct val="100000"/>
+              </a:lnSpc>
+            </a:pPr>
+            <a:r>
+              <a:rPr sz="2000" b="1">
+                <a:solidFill>
+                  <a:srgbClr val="F5F7FA"/>
+                </a:solidFill>
+                <a:latin typeface="Arial"/>
+              </a:rPr>
+              <a:t>Each in part</a:t>
+            </a:r>
+          </a:p>
+        </p:txBody>
+      </p:sp>
+      <p:sp>
+        <p:nvSpPr>
+          <p:cNvPr id="14" name="TextBox 13"/>
+          <p:cNvSpPr txBox="1"/>
+          <p:nvPr/>
+        </p:nvSpPr>
+        <p:spPr>
+          <a:xfrm>
+            <a:off x="4673498" y="4114800"/>
+            <a:ext cx="2844698" cy="1554480"/>
+          </a:xfrm>
+          <a:prstGeom prst="rect">
+            <a:avLst/>
+          </a:prstGeom>
+          <a:noFill/>
+        </p:spPr>
+        <p:txBody>
+          <a:bodyPr wrap="square" anchor="t">
+            <a:spAutoFit/>
+          </a:bodyPr>
+          <a:lstStyle/>
+          <a:p>
+            <a:pPr algn="l">
+              <a:lnSpc>
+                <a:spcPct val="110000"/>
+              </a:lnSpc>
+            </a:pPr>
+            <a:r>
+              <a:rPr sz="1500" b="0">
+                <a:solidFill>
+                  <a:srgbClr val="8A94A6"/>
+                </a:solidFill>
+                <a:latin typeface="Arial"/>
+              </a:rPr>
+              <a:t>Promote each value in less than full measure. (Vacuum: cloud data, but anonymized + opt-out.)</a:t>
+            </a:r>
+          </a:p>
+        </p:txBody>
+      </p:sp>
+      <p:sp>
+        <p:nvSpPr>
+          <p:cNvPr id="15" name="Rounded Rectangle 14"/>
+          <p:cNvSpPr/>
+          <p:nvPr/>
+        </p:nvSpPr>
+        <p:spPr>
+          <a:xfrm>
+            <a:off x="8158276" y="2468880"/>
+            <a:ext cx="3393338" cy="3383280"/>
+          </a:xfrm>
+          <a:prstGeom prst="roundRect">
+            <a:avLst/>
+          </a:prstGeom>
+          <a:solidFill>
+            <a:srgbClr val="151B26"/>
+          </a:solidFill>
+          <a:ln>
+            <a:noFill/>
+          </a:ln>
+          <a:effectLst/>
+        </p:spPr>
+        <p:style>
+          <a:lnRef idx="1">
+            <a:schemeClr val="accent1"/>
+          </a:lnRef>
+          <a:fillRef idx="3">
+            <a:schemeClr val="accent1"/>
+          </a:fillRef>
+          <a:effectRef idx="2">
+            <a:schemeClr val="accent1"/>
+          </a:effectRef>
+          <a:fontRef idx="minor">
+            <a:schemeClr val="lt1"/>
+          </a:fontRef>
+        </p:style>
+        <p:txBody>
+          <a:bodyPr rtlCol="0" anchor="ctr"/>
+          <a:lstStyle/>
+          <a:p>
+            <a:pPr algn="ctr"/>
+          </a:p>
+        </p:txBody>
+      </p:sp>
+      <p:sp>
+        <p:nvSpPr>
+          <p:cNvPr id="16" name="Rectangle 15"/>
+          <p:cNvSpPr/>
+          <p:nvPr/>
+        </p:nvSpPr>
+        <p:spPr>
+          <a:xfrm>
+            <a:off x="8158276" y="2468880"/>
+            <a:ext cx="3393338" cy="82296"/>
+          </a:xfrm>
+          <a:prstGeom prst="rect">
+            <a:avLst/>
+          </a:prstGeom>
+          <a:solidFill>
+            <a:srgbClr val="00FF41"/>
+          </a:solidFill>
+          <a:ln>
+            <a:noFill/>
+          </a:ln>
+          <a:effectLst/>
+        </p:spPr>
+        <p:style>
+          <a:lnRef idx="1">
+            <a:schemeClr val="accent1"/>
+          </a:lnRef>
+          <a:fillRef idx="3">
+            <a:schemeClr val="accent1"/>
+          </a:fillRef>
+          <a:effectRef idx="2">
+            <a:schemeClr val="accent1"/>
+          </a:effectRef>
+          <a:fontRef idx="minor">
+            <a:schemeClr val="lt1"/>
+          </a:fontRef>
+        </p:style>
+        <p:txBody>
+          <a:bodyPr rtlCol="0" anchor="ctr"/>
+          <a:lstStyle/>
+          <a:p>
+            <a:pPr algn="ctr"/>
+          </a:p>
+        </p:txBody>
+      </p:sp>
+      <p:sp>
+        <p:nvSpPr>
+          <p:cNvPr id="17" name="TextBox 16"/>
+          <p:cNvSpPr txBox="1"/>
+          <p:nvPr/>
+        </p:nvSpPr>
+        <p:spPr>
+          <a:xfrm>
+            <a:off x="8432596" y="2788920"/>
+            <a:ext cx="2844698" cy="457200"/>
+          </a:xfrm>
+          <a:prstGeom prst="rect">
+            <a:avLst/>
+          </a:prstGeom>
+          <a:noFill/>
+        </p:spPr>
+        <p:txBody>
+          <a:bodyPr wrap="square" anchor="t">
+            <a:spAutoFit/>
+          </a:bodyPr>
+          <a:lstStyle/>
+          <a:p>
+            <a:pPr algn="l">
+              <a:lnSpc>
+                <a:spcPct val="100000"/>
+              </a:lnSpc>
+            </a:pPr>
+            <a:r>
+              <a:rPr sz="1200" b="1">
+                <a:solidFill>
+                  <a:srgbClr val="00FF41"/>
+                </a:solidFill>
+                <a:latin typeface="Courier New"/>
+              </a:rPr>
+              <a:t>TRADE-OFF</a:t>
+            </a:r>
+          </a:p>
+        </p:txBody>
+      </p:sp>
+      <p:sp>
+        <p:nvSpPr>
+          <p:cNvPr id="18" name="TextBox 17"/>
+          <p:cNvSpPr txBox="1"/>
+          <p:nvPr/>
+        </p:nvSpPr>
+        <p:spPr>
+          <a:xfrm>
+            <a:off x="8432596" y="3246120"/>
+            <a:ext cx="2844698" cy="822960"/>
+          </a:xfrm>
+          <a:prstGeom prst="rect">
+            <a:avLst/>
+          </a:prstGeom>
+          <a:noFill/>
+        </p:spPr>
+        <p:txBody>
+          <a:bodyPr wrap="square" anchor="t">
+            <a:spAutoFit/>
+          </a:bodyPr>
+          <a:lstStyle/>
+          <a:p>
+            <a:pPr algn="l">
+              <a:lnSpc>
+                <a:spcPct val="100000"/>
+              </a:lnSpc>
+            </a:pPr>
+            <a:r>
+              <a:rPr sz="2000" b="1">
+                <a:solidFill>
+                  <a:srgbClr val="F5F7FA"/>
+                </a:solidFill>
+                <a:latin typeface="Arial"/>
+              </a:rPr>
+              <a:t>Sacrifice one</a:t>
+            </a:r>
+          </a:p>
+        </p:txBody>
+      </p:sp>
+      <p:sp>
+        <p:nvSpPr>
+          <p:cNvPr id="19" name="TextBox 18"/>
+          <p:cNvSpPr txBox="1"/>
+          <p:nvPr/>
+        </p:nvSpPr>
+        <p:spPr>
+          <a:xfrm>
+            <a:off x="8432596" y="4114800"/>
+            <a:ext cx="2844698" cy="1554480"/>
+          </a:xfrm>
+          <a:prstGeom prst="rect">
+            <a:avLst/>
+          </a:prstGeom>
+          <a:noFill/>
+        </p:spPr>
+        <p:txBody>
+          <a:bodyPr wrap="square" anchor="t">
+            <a:spAutoFit/>
+          </a:bodyPr>
+          <a:lstStyle/>
+          <a:p>
+            <a:pPr algn="l">
+              <a:lnSpc>
+                <a:spcPct val="110000"/>
+              </a:lnSpc>
+            </a:pPr>
+            <a:r>
+              <a:rPr sz="1500" b="0">
+                <a:solidFill>
+                  <a:srgbClr val="8A94A6"/>
+                </a:solidFill>
+                <a:latin typeface="Arial"/>
+              </a:rPr>
+              <a:t>Give one up for another - and say so out loud. (Vacuum: full collection for max automation.)</a:t>
+            </a:r>
+          </a:p>
+        </p:txBody>
+      </p:sp>
+      <p:sp>
+        <p:nvSpPr>
+          <p:cNvPr id="20" name="TextBox 19"/>
+          <p:cNvSpPr txBox="1"/>
+          <p:nvPr/>
+        </p:nvSpPr>
+        <p:spPr>
+          <a:xfrm>
+            <a:off x="640080" y="6355080"/>
+            <a:ext cx="10972800" cy="365760"/>
+          </a:xfrm>
+          <a:prstGeom prst="rect">
+            <a:avLst/>
+          </a:prstGeom>
+          <a:noFill/>
+        </p:spPr>
+        <p:txBody>
+          <a:bodyPr wrap="square" anchor="t">
+            <a:spAutoFit/>
+          </a:bodyPr>
+          <a:lstStyle/>
+          <a:p>
+            <a:pPr algn="l">
+              <a:lnSpc>
+                <a:spcPct val="100000"/>
+              </a:lnSpc>
+            </a:pPr>
+            <a:r>
+              <a:rPr sz="1000" b="0">
+                <a:solidFill>
+                  <a:srgbClr val="5A6474"/>
+                </a:solidFill>
+                <a:latin typeface="Courier New"/>
+              </a:rPr>
+              <a:t>Good Code, Good Vibes · TECHIE 1121 · Cornell Tech · Summer 2026</a:t>
             </a:r>
           </a:p>
         </p:txBody>
@@ -8623,7 +8839,7 @@
                 </a:solidFill>
                 <a:latin typeface="Courier New"/>
               </a:rPr>
-              <a:t>VERIFICATION</a:t>
+              <a:t>BREAK</a:t>
             </a:r>
           </a:p>
         </p:txBody>
@@ -8706,7 +8922,7 @@
                 </a:solidFill>
                 <a:latin typeface="Arial"/>
               </a:rPr>
-              <a:t>Assessing whether the values made it in</a:t>
+              <a:t>~10 minutes</a:t>
             </a:r>
           </a:p>
         </p:txBody>
@@ -8739,45 +8955,13 @@
               </a:lnSpc>
             </a:pPr>
             <a:r>
-              <a:rPr sz="2100" b="0">
+              <a:rPr sz="2200" b="0">
                 <a:solidFill>
                   <a:srgbClr val="F5F7FA"/>
                 </a:solidFill>
                 <a:latin typeface="Arial"/>
               </a:rPr>
-              <a:t>"Verification involves assessing whether efforts to integrate values have succeeded." Cyclical - ask at every step.</a:t>
-            </a:r>
-          </a:p>
-          <a:p>
-            <a:pPr algn="l">
-              <a:lnSpc>
-                <a:spcPct val="112000"/>
-              </a:lnSpc>
-            </a:pPr>
-            <a:r>
-              <a:rPr sz="2000" b="0">
-                <a:solidFill>
-                  <a:srgbClr val="F5F7FA"/>
-                </a:solidFill>
-                <a:latin typeface="Arial"/>
-              </a:rPr>
-              <a:t/>
-            </a:r>
-          </a:p>
-          <a:p>
-            <a:pPr algn="l">
-              <a:lnSpc>
-                <a:spcPct val="112000"/>
-              </a:lnSpc>
-            </a:pPr>
-            <a:r>
-              <a:rPr sz="1700" b="0">
-                <a:solidFill>
-                  <a:srgbClr val="8A94A6"/>
-                </a:solidFill>
-                <a:latin typeface="Arial"/>
-              </a:rPr>
-              <a:t>Three ways to ask - and your operationalization decides which one fits.</a:t>
+              <a:t>Last stretch. Then: did any of it actually work?</a:t>
             </a:r>
           </a:p>
         </p:txBody>
@@ -8849,53 +9033,14 @@
       <p:grpSpPr/>
       <p:sp>
         <p:nvSpPr>
-          <p:cNvPr id="2" name="TextBox 1"/>
-          <p:cNvSpPr txBox="1"/>
-          <p:nvPr/>
-        </p:nvSpPr>
-        <p:spPr>
-          <a:xfrm>
-            <a:off x="640080" y="502920"/>
-            <a:ext cx="10058400" cy="365760"/>
-          </a:xfrm>
-          <a:prstGeom prst="rect">
-            <a:avLst/>
-          </a:prstGeom>
-          <a:noFill/>
-        </p:spPr>
-        <p:txBody>
-          <a:bodyPr wrap="square" anchor="t">
-            <a:spAutoFit/>
-          </a:bodyPr>
-          <a:lstStyle/>
-          <a:p>
-            <a:pPr algn="l">
-              <a:lnSpc>
-                <a:spcPct val="100000"/>
-              </a:lnSpc>
-            </a:pPr>
-            <a:r>
-              <a:rPr sz="1300" b="1">
-                <a:solidFill>
-                  <a:srgbClr val="00FF41"/>
-                </a:solidFill>
-                <a:latin typeface="Courier New"/>
-              </a:rPr>
-              <a:t>THE THREE LENSES</a:t>
-            </a:r>
-          </a:p>
-        </p:txBody>
-      </p:sp>
-      <p:sp>
-        <p:nvSpPr>
-          <p:cNvPr id="3" name="Rectangle 2"/>
+          <p:cNvPr id="2" name="Rectangle 1"/>
           <p:cNvSpPr/>
           <p:nvPr/>
         </p:nvSpPr>
         <p:spPr>
           <a:xfrm>
-            <a:off x="640080" y="932688"/>
-            <a:ext cx="822960" cy="73152"/>
+            <a:off x="0" y="0"/>
+            <a:ext cx="256032" cy="6858000"/>
           </a:xfrm>
           <a:prstGeom prst="rect">
             <a:avLst/>
@@ -8932,14 +9077,53 @@
       </p:sp>
       <p:sp>
         <p:nvSpPr>
+          <p:cNvPr id="3" name="TextBox 2"/>
+          <p:cNvSpPr txBox="1"/>
+          <p:nvPr/>
+        </p:nvSpPr>
+        <p:spPr>
+          <a:xfrm>
+            <a:off x="822960" y="2194560"/>
+            <a:ext cx="10515600" cy="548640"/>
+          </a:xfrm>
+          <a:prstGeom prst="rect">
+            <a:avLst/>
+          </a:prstGeom>
+          <a:noFill/>
+        </p:spPr>
+        <p:txBody>
+          <a:bodyPr wrap="square" anchor="t">
+            <a:spAutoFit/>
+          </a:bodyPr>
+          <a:lstStyle/>
+          <a:p>
+            <a:pPr algn="l">
+              <a:lnSpc>
+                <a:spcPct val="100000"/>
+              </a:lnSpc>
+            </a:pPr>
+            <a:r>
+              <a:rPr sz="1800" b="1">
+                <a:solidFill>
+                  <a:srgbClr val="00FF41"/>
+                </a:solidFill>
+                <a:latin typeface="Courier New"/>
+              </a:rPr>
+              <a:t>PART 4 - VERIFICATION</a:t>
+            </a:r>
+          </a:p>
+        </p:txBody>
+      </p:sp>
+      <p:sp>
+        <p:nvSpPr>
           <p:cNvPr id="4" name="TextBox 3"/>
           <p:cNvSpPr txBox="1"/>
           <p:nvPr/>
         </p:nvSpPr>
         <p:spPr>
           <a:xfrm>
-            <a:off x="640080" y="1188720"/>
-            <a:ext cx="10972800" cy="914400"/>
+            <a:off x="804672" y="2743200"/>
+            <a:ext cx="10515600" cy="1554480"/>
           </a:xfrm>
           <a:prstGeom prst="rect">
             <a:avLst/>
@@ -8958,706 +9142,13 @@
               </a:lnSpc>
             </a:pPr>
             <a:r>
-              <a:rPr sz="3200" b="1">
+              <a:rPr sz="4800" b="1">
                 <a:solidFill>
                   <a:srgbClr val="F5F7FA"/>
                 </a:solidFill>
                 <a:latin typeface="Arial"/>
               </a:rPr>
-              <a:t>Behavior - Understanding - Affect</a:t>
-            </a:r>
-          </a:p>
-        </p:txBody>
-      </p:sp>
-      <p:sp>
-        <p:nvSpPr>
-          <p:cNvPr id="5" name="Rounded Rectangle 4"/>
-          <p:cNvSpPr/>
-          <p:nvPr/>
-        </p:nvSpPr>
-        <p:spPr>
-          <a:xfrm>
-            <a:off x="640080" y="2468880"/>
-            <a:ext cx="3393338" cy="3383280"/>
-          </a:xfrm>
-          <a:prstGeom prst="roundRect">
-            <a:avLst/>
-          </a:prstGeom>
-          <a:solidFill>
-            <a:srgbClr val="151B26"/>
-          </a:solidFill>
-          <a:ln>
-            <a:noFill/>
-          </a:ln>
-          <a:effectLst/>
-        </p:spPr>
-        <p:style>
-          <a:lnRef idx="1">
-            <a:schemeClr val="accent1"/>
-          </a:lnRef>
-          <a:fillRef idx="3">
-            <a:schemeClr val="accent1"/>
-          </a:fillRef>
-          <a:effectRef idx="2">
-            <a:schemeClr val="accent1"/>
-          </a:effectRef>
-          <a:fontRef idx="minor">
-            <a:schemeClr val="lt1"/>
-          </a:fontRef>
-        </p:style>
-        <p:txBody>
-          <a:bodyPr rtlCol="0" anchor="ctr"/>
-          <a:lstStyle/>
-          <a:p>
-            <a:pPr algn="ctr"/>
-          </a:p>
-        </p:txBody>
-      </p:sp>
-      <p:sp>
-        <p:nvSpPr>
-          <p:cNvPr id="6" name="Rectangle 5"/>
-          <p:cNvSpPr/>
-          <p:nvPr/>
-        </p:nvSpPr>
-        <p:spPr>
-          <a:xfrm>
-            <a:off x="640080" y="2468880"/>
-            <a:ext cx="3393338" cy="82296"/>
-          </a:xfrm>
-          <a:prstGeom prst="rect">
-            <a:avLst/>
-          </a:prstGeom>
-          <a:solidFill>
-            <a:srgbClr val="00FF41"/>
-          </a:solidFill>
-          <a:ln>
-            <a:noFill/>
-          </a:ln>
-          <a:effectLst/>
-        </p:spPr>
-        <p:style>
-          <a:lnRef idx="1">
-            <a:schemeClr val="accent1"/>
-          </a:lnRef>
-          <a:fillRef idx="3">
-            <a:schemeClr val="accent1"/>
-          </a:fillRef>
-          <a:effectRef idx="2">
-            <a:schemeClr val="accent1"/>
-          </a:effectRef>
-          <a:fontRef idx="minor">
-            <a:schemeClr val="lt1"/>
-          </a:fontRef>
-        </p:style>
-        <p:txBody>
-          <a:bodyPr rtlCol="0" anchor="ctr"/>
-          <a:lstStyle/>
-          <a:p>
-            <a:pPr algn="ctr"/>
-          </a:p>
-        </p:txBody>
-      </p:sp>
-      <p:sp>
-        <p:nvSpPr>
-          <p:cNvPr id="7" name="TextBox 6"/>
-          <p:cNvSpPr txBox="1"/>
-          <p:nvPr/>
-        </p:nvSpPr>
-        <p:spPr>
-          <a:xfrm>
-            <a:off x="914400" y="2788920"/>
-            <a:ext cx="2844698" cy="457200"/>
-          </a:xfrm>
-          <a:prstGeom prst="rect">
-            <a:avLst/>
-          </a:prstGeom>
-          <a:noFill/>
-        </p:spPr>
-        <p:txBody>
-          <a:bodyPr wrap="square" anchor="t">
-            <a:spAutoFit/>
-          </a:bodyPr>
-          <a:lstStyle/>
-          <a:p>
-            <a:pPr algn="l">
-              <a:lnSpc>
-                <a:spcPct val="100000"/>
-              </a:lnSpc>
-            </a:pPr>
-            <a:r>
-              <a:rPr sz="1200" b="1">
-                <a:solidFill>
-                  <a:srgbClr val="00FF41"/>
-                </a:solidFill>
-                <a:latin typeface="Courier New"/>
-              </a:rPr>
-              <a:t>BEHAVIOR</a:t>
-            </a:r>
-          </a:p>
-        </p:txBody>
-      </p:sp>
-      <p:sp>
-        <p:nvSpPr>
-          <p:cNvPr id="8" name="TextBox 7"/>
-          <p:cNvSpPr txBox="1"/>
-          <p:nvPr/>
-        </p:nvSpPr>
-        <p:spPr>
-          <a:xfrm>
-            <a:off x="914400" y="3246120"/>
-            <a:ext cx="2844698" cy="822960"/>
-          </a:xfrm>
-          <a:prstGeom prst="rect">
-            <a:avLst/>
-          </a:prstGeom>
-          <a:noFill/>
-        </p:spPr>
-        <p:txBody>
-          <a:bodyPr wrap="square" anchor="t">
-            <a:spAutoFit/>
-          </a:bodyPr>
-          <a:lstStyle/>
-          <a:p>
-            <a:pPr algn="l">
-              <a:lnSpc>
-                <a:spcPct val="100000"/>
-              </a:lnSpc>
-            </a:pPr>
-            <a:r>
-              <a:rPr sz="2000" b="1">
-                <a:solidFill>
-                  <a:srgbClr val="F5F7FA"/>
-                </a:solidFill>
-                <a:latin typeface="Arial"/>
-              </a:rPr>
-              <a:t>Do they ACT differently?</a:t>
-            </a:r>
-          </a:p>
-        </p:txBody>
-      </p:sp>
-      <p:sp>
-        <p:nvSpPr>
-          <p:cNvPr id="9" name="TextBox 8"/>
-          <p:cNvSpPr txBox="1"/>
-          <p:nvPr/>
-        </p:nvSpPr>
-        <p:spPr>
-          <a:xfrm>
-            <a:off x="914400" y="4114800"/>
-            <a:ext cx="2844698" cy="1554480"/>
-          </a:xfrm>
-          <a:prstGeom prst="rect">
-            <a:avLst/>
-          </a:prstGeom>
-          <a:noFill/>
-        </p:spPr>
-        <p:txBody>
-          <a:bodyPr wrap="square" anchor="t">
-            <a:spAutoFit/>
-          </a:bodyPr>
-          <a:lstStyle/>
-          <a:p>
-            <a:pPr algn="l">
-              <a:lnSpc>
-                <a:spcPct val="110000"/>
-              </a:lnSpc>
-            </a:pPr>
-            <a:r>
-              <a:rPr sz="1500" b="0">
-                <a:solidFill>
-                  <a:srgbClr val="8A94A6"/>
-                </a:solidFill>
-                <a:latin typeface="Arial"/>
-              </a:rPr>
-              <a:t>Observation, A/B, before/after, task completion.</a:t>
-            </a:r>
-          </a:p>
-        </p:txBody>
-      </p:sp>
-      <p:sp>
-        <p:nvSpPr>
-          <p:cNvPr id="10" name="Rounded Rectangle 9"/>
-          <p:cNvSpPr/>
-          <p:nvPr/>
-        </p:nvSpPr>
-        <p:spPr>
-          <a:xfrm>
-            <a:off x="4399178" y="2468880"/>
-            <a:ext cx="3393338" cy="3383280"/>
-          </a:xfrm>
-          <a:prstGeom prst="roundRect">
-            <a:avLst/>
-          </a:prstGeom>
-          <a:solidFill>
-            <a:srgbClr val="151B26"/>
-          </a:solidFill>
-          <a:ln>
-            <a:noFill/>
-          </a:ln>
-          <a:effectLst/>
-        </p:spPr>
-        <p:style>
-          <a:lnRef idx="1">
-            <a:schemeClr val="accent1"/>
-          </a:lnRef>
-          <a:fillRef idx="3">
-            <a:schemeClr val="accent1"/>
-          </a:fillRef>
-          <a:effectRef idx="2">
-            <a:schemeClr val="accent1"/>
-          </a:effectRef>
-          <a:fontRef idx="minor">
-            <a:schemeClr val="lt1"/>
-          </a:fontRef>
-        </p:style>
-        <p:txBody>
-          <a:bodyPr rtlCol="0" anchor="ctr"/>
-          <a:lstStyle/>
-          <a:p>
-            <a:pPr algn="ctr"/>
-          </a:p>
-        </p:txBody>
-      </p:sp>
-      <p:sp>
-        <p:nvSpPr>
-          <p:cNvPr id="11" name="Rectangle 10"/>
-          <p:cNvSpPr/>
-          <p:nvPr/>
-        </p:nvSpPr>
-        <p:spPr>
-          <a:xfrm>
-            <a:off x="4399178" y="2468880"/>
-            <a:ext cx="3393338" cy="82296"/>
-          </a:xfrm>
-          <a:prstGeom prst="rect">
-            <a:avLst/>
-          </a:prstGeom>
-          <a:solidFill>
-            <a:srgbClr val="00FF41"/>
-          </a:solidFill>
-          <a:ln>
-            <a:noFill/>
-          </a:ln>
-          <a:effectLst/>
-        </p:spPr>
-        <p:style>
-          <a:lnRef idx="1">
-            <a:schemeClr val="accent1"/>
-          </a:lnRef>
-          <a:fillRef idx="3">
-            <a:schemeClr val="accent1"/>
-          </a:fillRef>
-          <a:effectRef idx="2">
-            <a:schemeClr val="accent1"/>
-          </a:effectRef>
-          <a:fontRef idx="minor">
-            <a:schemeClr val="lt1"/>
-          </a:fontRef>
-        </p:style>
-        <p:txBody>
-          <a:bodyPr rtlCol="0" anchor="ctr"/>
-          <a:lstStyle/>
-          <a:p>
-            <a:pPr algn="ctr"/>
-          </a:p>
-        </p:txBody>
-      </p:sp>
-      <p:sp>
-        <p:nvSpPr>
-          <p:cNvPr id="12" name="TextBox 11"/>
-          <p:cNvSpPr txBox="1"/>
-          <p:nvPr/>
-        </p:nvSpPr>
-        <p:spPr>
-          <a:xfrm>
-            <a:off x="4673498" y="2788920"/>
-            <a:ext cx="2844698" cy="457200"/>
-          </a:xfrm>
-          <a:prstGeom prst="rect">
-            <a:avLst/>
-          </a:prstGeom>
-          <a:noFill/>
-        </p:spPr>
-        <p:txBody>
-          <a:bodyPr wrap="square" anchor="t">
-            <a:spAutoFit/>
-          </a:bodyPr>
-          <a:lstStyle/>
-          <a:p>
-            <a:pPr algn="l">
-              <a:lnSpc>
-                <a:spcPct val="100000"/>
-              </a:lnSpc>
-            </a:pPr>
-            <a:r>
-              <a:rPr sz="1200" b="1">
-                <a:solidFill>
-                  <a:srgbClr val="00FF41"/>
-                </a:solidFill>
-                <a:latin typeface="Courier New"/>
-              </a:rPr>
-              <a:t>UNDERSTANDING</a:t>
-            </a:r>
-          </a:p>
-        </p:txBody>
-      </p:sp>
-      <p:sp>
-        <p:nvSpPr>
-          <p:cNvPr id="13" name="TextBox 12"/>
-          <p:cNvSpPr txBox="1"/>
-          <p:nvPr/>
-        </p:nvSpPr>
-        <p:spPr>
-          <a:xfrm>
-            <a:off x="4673498" y="3246120"/>
-            <a:ext cx="2844698" cy="822960"/>
-          </a:xfrm>
-          <a:prstGeom prst="rect">
-            <a:avLst/>
-          </a:prstGeom>
-          <a:noFill/>
-        </p:spPr>
-        <p:txBody>
-          <a:bodyPr wrap="square" anchor="t">
-            <a:spAutoFit/>
-          </a:bodyPr>
-          <a:lstStyle/>
-          <a:p>
-            <a:pPr algn="l">
-              <a:lnSpc>
-                <a:spcPct val="100000"/>
-              </a:lnSpc>
-            </a:pPr>
-            <a:r>
-              <a:rPr sz="2000" b="1">
-                <a:solidFill>
-                  <a:srgbClr val="F5F7FA"/>
-                </a:solidFill>
-                <a:latin typeface="Arial"/>
-              </a:rPr>
-              <a:t>Do they GRASP it?</a:t>
-            </a:r>
-          </a:p>
-        </p:txBody>
-      </p:sp>
-      <p:sp>
-        <p:nvSpPr>
-          <p:cNvPr id="14" name="TextBox 13"/>
-          <p:cNvSpPr txBox="1"/>
-          <p:nvPr/>
-        </p:nvSpPr>
-        <p:spPr>
-          <a:xfrm>
-            <a:off x="4673498" y="4114800"/>
-            <a:ext cx="2844698" cy="1554480"/>
-          </a:xfrm>
-          <a:prstGeom prst="rect">
-            <a:avLst/>
-          </a:prstGeom>
-          <a:noFill/>
-        </p:spPr>
-        <p:txBody>
-          <a:bodyPr wrap="square" anchor="t">
-            <a:spAutoFit/>
-          </a:bodyPr>
-          <a:lstStyle/>
-          <a:p>
-            <a:pPr algn="l">
-              <a:lnSpc>
-                <a:spcPct val="110000"/>
-              </a:lnSpc>
-            </a:pPr>
-            <a:r>
-              <a:rPr sz="1500" b="0">
-                <a:solidFill>
-                  <a:srgbClr val="8A94A6"/>
-                </a:solidFill>
-                <a:latin typeface="Arial"/>
-              </a:rPr>
-              <a:t>Survey, interview, think-aloud, scenario.</a:t>
-            </a:r>
-          </a:p>
-        </p:txBody>
-      </p:sp>
-      <p:sp>
-        <p:nvSpPr>
-          <p:cNvPr id="15" name="Rounded Rectangle 14"/>
-          <p:cNvSpPr/>
-          <p:nvPr/>
-        </p:nvSpPr>
-        <p:spPr>
-          <a:xfrm>
-            <a:off x="8158276" y="2468880"/>
-            <a:ext cx="3393338" cy="3383280"/>
-          </a:xfrm>
-          <a:prstGeom prst="roundRect">
-            <a:avLst/>
-          </a:prstGeom>
-          <a:solidFill>
-            <a:srgbClr val="151B26"/>
-          </a:solidFill>
-          <a:ln>
-            <a:noFill/>
-          </a:ln>
-          <a:effectLst/>
-        </p:spPr>
-        <p:style>
-          <a:lnRef idx="1">
-            <a:schemeClr val="accent1"/>
-          </a:lnRef>
-          <a:fillRef idx="3">
-            <a:schemeClr val="accent1"/>
-          </a:fillRef>
-          <a:effectRef idx="2">
-            <a:schemeClr val="accent1"/>
-          </a:effectRef>
-          <a:fontRef idx="minor">
-            <a:schemeClr val="lt1"/>
-          </a:fontRef>
-        </p:style>
-        <p:txBody>
-          <a:bodyPr rtlCol="0" anchor="ctr"/>
-          <a:lstStyle/>
-          <a:p>
-            <a:pPr algn="ctr"/>
-          </a:p>
-        </p:txBody>
-      </p:sp>
-      <p:sp>
-        <p:nvSpPr>
-          <p:cNvPr id="16" name="Rectangle 15"/>
-          <p:cNvSpPr/>
-          <p:nvPr/>
-        </p:nvSpPr>
-        <p:spPr>
-          <a:xfrm>
-            <a:off x="8158276" y="2468880"/>
-            <a:ext cx="3393338" cy="82296"/>
-          </a:xfrm>
-          <a:prstGeom prst="rect">
-            <a:avLst/>
-          </a:prstGeom>
-          <a:solidFill>
-            <a:srgbClr val="00FF41"/>
-          </a:solidFill>
-          <a:ln>
-            <a:noFill/>
-          </a:ln>
-          <a:effectLst/>
-        </p:spPr>
-        <p:style>
-          <a:lnRef idx="1">
-            <a:schemeClr val="accent1"/>
-          </a:lnRef>
-          <a:fillRef idx="3">
-            <a:schemeClr val="accent1"/>
-          </a:fillRef>
-          <a:effectRef idx="2">
-            <a:schemeClr val="accent1"/>
-          </a:effectRef>
-          <a:fontRef idx="minor">
-            <a:schemeClr val="lt1"/>
-          </a:fontRef>
-        </p:style>
-        <p:txBody>
-          <a:bodyPr rtlCol="0" anchor="ctr"/>
-          <a:lstStyle/>
-          <a:p>
-            <a:pPr algn="ctr"/>
-          </a:p>
-        </p:txBody>
-      </p:sp>
-      <p:sp>
-        <p:nvSpPr>
-          <p:cNvPr id="17" name="TextBox 16"/>
-          <p:cNvSpPr txBox="1"/>
-          <p:nvPr/>
-        </p:nvSpPr>
-        <p:spPr>
-          <a:xfrm>
-            <a:off x="8432596" y="2788920"/>
-            <a:ext cx="2844698" cy="457200"/>
-          </a:xfrm>
-          <a:prstGeom prst="rect">
-            <a:avLst/>
-          </a:prstGeom>
-          <a:noFill/>
-        </p:spPr>
-        <p:txBody>
-          <a:bodyPr wrap="square" anchor="t">
-            <a:spAutoFit/>
-          </a:bodyPr>
-          <a:lstStyle/>
-          <a:p>
-            <a:pPr algn="l">
-              <a:lnSpc>
-                <a:spcPct val="100000"/>
-              </a:lnSpc>
-            </a:pPr>
-            <a:r>
-              <a:rPr sz="1200" b="1">
-                <a:solidFill>
-                  <a:srgbClr val="00FF41"/>
-                </a:solidFill>
-                <a:latin typeface="Courier New"/>
-              </a:rPr>
-              <a:t>AFFECT</a:t>
-            </a:r>
-          </a:p>
-        </p:txBody>
-      </p:sp>
-      <p:sp>
-        <p:nvSpPr>
-          <p:cNvPr id="18" name="TextBox 17"/>
-          <p:cNvSpPr txBox="1"/>
-          <p:nvPr/>
-        </p:nvSpPr>
-        <p:spPr>
-          <a:xfrm>
-            <a:off x="8432596" y="3246120"/>
-            <a:ext cx="2844698" cy="822960"/>
-          </a:xfrm>
-          <a:prstGeom prst="rect">
-            <a:avLst/>
-          </a:prstGeom>
-          <a:noFill/>
-        </p:spPr>
-        <p:txBody>
-          <a:bodyPr wrap="square" anchor="t">
-            <a:spAutoFit/>
-          </a:bodyPr>
-          <a:lstStyle/>
-          <a:p>
-            <a:pPr algn="l">
-              <a:lnSpc>
-                <a:spcPct val="100000"/>
-              </a:lnSpc>
-            </a:pPr>
-            <a:r>
-              <a:rPr sz="2000" b="1">
-                <a:solidFill>
-                  <a:srgbClr val="F5F7FA"/>
-                </a:solidFill>
-                <a:latin typeface="Arial"/>
-              </a:rPr>
-              <a:t>Do they FEEL differently?</a:t>
-            </a:r>
-          </a:p>
-        </p:txBody>
-      </p:sp>
-      <p:sp>
-        <p:nvSpPr>
-          <p:cNvPr id="19" name="TextBox 18"/>
-          <p:cNvSpPr txBox="1"/>
-          <p:nvPr/>
-        </p:nvSpPr>
-        <p:spPr>
-          <a:xfrm>
-            <a:off x="8432596" y="4114800"/>
-            <a:ext cx="2844698" cy="1554480"/>
-          </a:xfrm>
-          <a:prstGeom prst="rect">
-            <a:avLst/>
-          </a:prstGeom>
-          <a:noFill/>
-        </p:spPr>
-        <p:txBody>
-          <a:bodyPr wrap="square" anchor="t">
-            <a:spAutoFit/>
-          </a:bodyPr>
-          <a:lstStyle/>
-          <a:p>
-            <a:pPr algn="l">
-              <a:lnSpc>
-                <a:spcPct val="110000"/>
-              </a:lnSpc>
-            </a:pPr>
-            <a:r>
-              <a:rPr sz="1500" b="0">
-                <a:solidFill>
-                  <a:srgbClr val="8A94A6"/>
-                </a:solidFill>
-                <a:latin typeface="Arial"/>
-              </a:rPr>
-              <a:t>Attitude survey, diary, interview, choice under pressure.</a:t>
-            </a:r>
-          </a:p>
-        </p:txBody>
-      </p:sp>
-      <p:sp>
-        <p:nvSpPr>
-          <p:cNvPr id="20" name="TextBox 19"/>
-          <p:cNvSpPr txBox="1"/>
-          <p:nvPr/>
-        </p:nvSpPr>
-        <p:spPr>
-          <a:xfrm>
-            <a:off x="640080" y="6355080"/>
-            <a:ext cx="10972800" cy="365760"/>
-          </a:xfrm>
-          <a:prstGeom prst="rect">
-            <a:avLst/>
-          </a:prstGeom>
-          <a:noFill/>
-        </p:spPr>
-        <p:txBody>
-          <a:bodyPr wrap="square" anchor="t">
-            <a:spAutoFit/>
-          </a:bodyPr>
-          <a:lstStyle/>
-          <a:p>
-            <a:pPr algn="l">
-              <a:lnSpc>
-                <a:spcPct val="100000"/>
-              </a:lnSpc>
-            </a:pPr>
-            <a:r>
-              <a:rPr sz="1000" b="0">
-                <a:solidFill>
-                  <a:srgbClr val="5A6474"/>
-                </a:solidFill>
-                <a:latin typeface="Courier New"/>
-              </a:rPr>
-              <a:t>Good Code, Good Vibes · TECHIE 1121 · Cornell Tech · Summer 2026</a:t>
-            </a:r>
-          </a:p>
-        </p:txBody>
-      </p:sp>
-      <p:sp>
-        <p:nvSpPr>
-          <p:cNvPr id="21" name="TextBox 20"/>
-          <p:cNvSpPr txBox="1"/>
-          <p:nvPr/>
-        </p:nvSpPr>
-        <p:spPr>
-          <a:xfrm>
-            <a:off x="640080" y="6053328"/>
-            <a:ext cx="10972800" cy="292608"/>
-          </a:xfrm>
-          <a:prstGeom prst="rect">
-            <a:avLst/>
-          </a:prstGeom>
-          <a:noFill/>
-        </p:spPr>
-        <p:txBody>
-          <a:bodyPr wrap="square" anchor="t">
-            <a:spAutoFit/>
-          </a:bodyPr>
-          <a:lstStyle/>
-          <a:p>
-            <a:pPr algn="l">
-              <a:lnSpc>
-                <a:spcPct val="100000"/>
-              </a:lnSpc>
-            </a:pPr>
-            <a:r>
-              <a:rPr sz="950" b="0">
-                <a:solidFill>
-                  <a:srgbClr val="5A6474"/>
-                </a:solidFill>
-                <a:latin typeface="Courier New"/>
-              </a:rPr>
-              <a:t>Verification lenses: Values at Play - VAP course, Engelmann &amp; Nissenbaum (Cornell Tech)</a:t>
+              <a:t>Did the values actually land?</a:t>
             </a:r>
           </a:p>
         </p:txBody>
@@ -9722,7 +9213,7 @@
                 </a:solidFill>
                 <a:latin typeface="Courier New"/>
               </a:rPr>
-              <a:t>EXAMPLE - BEHAVIOR</a:t>
+              <a:t>VERIFICATION</a:t>
             </a:r>
           </a:p>
         </p:txBody>
@@ -9771,31 +9262,45 @@
           </a:p>
         </p:txBody>
       </p:sp>
-      <p:pic>
-        <p:nvPicPr>
-          <p:cNvPr id="4" name="Picture 3" descr="smart_meter.jpg"/>
-          <p:cNvPicPr>
-            <a:picLocks noChangeAspect="1"/>
-          </p:cNvPicPr>
-          <p:nvPr/>
-        </p:nvPicPr>
-        <p:blipFill>
-          <a:blip r:embed="rId2"/>
-          <a:srcRect l="25111" r="25111"/>
-          <a:stretch>
-            <a:fillRect/>
-          </a:stretch>
-        </p:blipFill>
-        <p:spPr>
-          <a:xfrm>
-            <a:off x="7071055" y="0"/>
-            <a:ext cx="5120640" cy="6858000"/>
-          </a:xfrm>
-          <a:prstGeom prst="rect">
-            <a:avLst/>
-          </a:prstGeom>
-        </p:spPr>
-      </p:pic>
+      <p:sp>
+        <p:nvSpPr>
+          <p:cNvPr id="4" name="TextBox 3"/>
+          <p:cNvSpPr txBox="1"/>
+          <p:nvPr/>
+        </p:nvSpPr>
+        <p:spPr>
+          <a:xfrm>
+            <a:off x="640080" y="1188720"/>
+            <a:ext cx="10972800" cy="1097280"/>
+          </a:xfrm>
+          <a:prstGeom prst="rect">
+            <a:avLst/>
+          </a:prstGeom>
+          <a:noFill/>
+        </p:spPr>
+        <p:txBody>
+          <a:bodyPr wrap="square" anchor="t">
+            <a:spAutoFit/>
+          </a:bodyPr>
+          <a:lstStyle/>
+          <a:p>
+            <a:pPr algn="l">
+              <a:lnSpc>
+                <a:spcPct val="100000"/>
+              </a:lnSpc>
+            </a:pPr>
+            <a:r>
+              <a:rPr sz="3400" b="1">
+                <a:solidFill>
+                  <a:srgbClr val="F5F7FA"/>
+                </a:solidFill>
+                <a:latin typeface="Arial"/>
+              </a:rPr>
+              <a:t>Assessing whether the values made it in</a:t>
+            </a:r>
+          </a:p>
+        </p:txBody>
+      </p:sp>
       <p:sp>
         <p:nvSpPr>
           <p:cNvPr id="5" name="TextBox 4"/>
@@ -9804,33 +9309,65 @@
         </p:nvSpPr>
         <p:spPr>
           <a:xfrm>
-            <a:off x="640080" y="1188720"/>
-            <a:ext cx="6019495" cy="1280160"/>
-          </a:xfrm>
-          <a:prstGeom prst="rect">
-            <a:avLst/>
-          </a:prstGeom>
-          <a:noFill/>
-        </p:spPr>
-        <p:txBody>
-          <a:bodyPr wrap="square" anchor="t">
-            <a:spAutoFit/>
-          </a:bodyPr>
-          <a:lstStyle/>
-          <a:p>
-            <a:pPr algn="l">
-              <a:lnSpc>
-                <a:spcPct val="100000"/>
-              </a:lnSpc>
-            </a:pPr>
-            <a:r>
-              <a:rPr sz="3000" b="1">
+            <a:off x="658368" y="2286000"/>
+            <a:ext cx="10881360" cy="3657600"/>
+          </a:xfrm>
+          <a:prstGeom prst="rect">
+            <a:avLst/>
+          </a:prstGeom>
+          <a:noFill/>
+        </p:spPr>
+        <p:txBody>
+          <a:bodyPr wrap="square" anchor="t">
+            <a:spAutoFit/>
+          </a:bodyPr>
+          <a:lstStyle/>
+          <a:p>
+            <a:pPr algn="l">
+              <a:lnSpc>
+                <a:spcPct val="112000"/>
+              </a:lnSpc>
+            </a:pPr>
+            <a:r>
+              <a:rPr sz="2100" b="0">
                 <a:solidFill>
                   <a:srgbClr val="F5F7FA"/>
                 </a:solidFill>
                 <a:latin typeface="Arial"/>
               </a:rPr>
-              <a:t>Does the design change what people DO?</a:t>
+              <a:t>"Verification involves assessing whether efforts to integrate values have succeeded." Cyclical - ask at every step.</a:t>
+            </a:r>
+          </a:p>
+          <a:p>
+            <a:pPr algn="l">
+              <a:lnSpc>
+                <a:spcPct val="112000"/>
+              </a:lnSpc>
+            </a:pPr>
+            <a:r>
+              <a:rPr sz="2000" b="0">
+                <a:solidFill>
+                  <a:srgbClr val="F5F7FA"/>
+                </a:solidFill>
+                <a:latin typeface="Arial"/>
+              </a:rPr>
+              <a:t/>
+            </a:r>
+          </a:p>
+          <a:p>
+            <a:pPr algn="l">
+              <a:lnSpc>
+                <a:spcPct val="112000"/>
+              </a:lnSpc>
+            </a:pPr>
+            <a:r>
+              <a:rPr sz="1700" b="0">
+                <a:solidFill>
+                  <a:srgbClr val="8A94A6"/>
+                </a:solidFill>
+                <a:latin typeface="Arial"/>
+              </a:rPr>
+              <a:t>Three ways to ask - and your operationalization decides which one fits.</a:t>
             </a:r>
           </a:p>
         </p:txBody>
@@ -9838,160 +9375,6 @@
       <p:sp>
         <p:nvSpPr>
           <p:cNvPr id="6" name="TextBox 5"/>
-          <p:cNvSpPr txBox="1"/>
-          <p:nvPr/>
-        </p:nvSpPr>
-        <p:spPr>
-          <a:xfrm>
-            <a:off x="640080" y="2560320"/>
-            <a:ext cx="6019495" cy="3108960"/>
-          </a:xfrm>
-          <a:prstGeom prst="rect">
-            <a:avLst/>
-          </a:prstGeom>
-          <a:noFill/>
-        </p:spPr>
-        <p:txBody>
-          <a:bodyPr wrap="square" anchor="t">
-            <a:spAutoFit/>
-          </a:bodyPr>
-          <a:lstStyle/>
-          <a:p>
-            <a:pPr algn="l">
-              <a:lnSpc>
-                <a:spcPct val="116000"/>
-              </a:lnSpc>
-            </a:pPr>
-            <a:r>
-              <a:rPr sz="1800" b="0">
-                <a:solidFill>
-                  <a:srgbClr val="F5F7FA"/>
-                </a:solidFill>
-                <a:latin typeface="Arial"/>
-              </a:rPr>
-              <a:t>A smart meter only "works" for sustainability if people actually use less. Behavior is the sharpest test.</a:t>
-            </a:r>
-          </a:p>
-          <a:p>
-            <a:pPr algn="l">
-              <a:lnSpc>
-                <a:spcPct val="116000"/>
-              </a:lnSpc>
-            </a:pPr>
-            <a:r>
-              <a:rPr sz="1900" b="0">
-                <a:solidFill>
-                  <a:srgbClr val="F5F7FA"/>
-                </a:solidFill>
-                <a:latin typeface="Arial"/>
-              </a:rPr>
-              <a:t/>
-            </a:r>
-          </a:p>
-          <a:p>
-            <a:pPr algn="l">
-              <a:lnSpc>
-                <a:spcPct val="116000"/>
-              </a:lnSpc>
-            </a:pPr>
-            <a:r>
-              <a:rPr sz="1600" b="0">
-                <a:solidFill>
-                  <a:srgbClr val="8A94A6"/>
-                </a:solidFill>
-                <a:latin typeface="Arial"/>
-              </a:rPr>
-              <a:t>Verify how: prototype - A/B - before/after - task completion.</a:t>
-            </a:r>
-          </a:p>
-        </p:txBody>
-      </p:sp>
-      <p:sp>
-        <p:nvSpPr>
-          <p:cNvPr id="7" name="Rectangle 6"/>
-          <p:cNvSpPr/>
-          <p:nvPr/>
-        </p:nvSpPr>
-        <p:spPr>
-          <a:xfrm>
-            <a:off x="7071055" y="6547104"/>
-            <a:ext cx="5120640" cy="310896"/>
-          </a:xfrm>
-          <a:prstGeom prst="rect">
-            <a:avLst/>
-          </a:prstGeom>
-          <a:solidFill>
-            <a:srgbClr val="0B0E14"/>
-          </a:solidFill>
-          <a:ln>
-            <a:noFill/>
-          </a:ln>
-          <a:effectLst/>
-        </p:spPr>
-        <p:style>
-          <a:lnRef idx="1">
-            <a:schemeClr val="accent1"/>
-          </a:lnRef>
-          <a:fillRef idx="3">
-            <a:schemeClr val="accent1"/>
-          </a:fillRef>
-          <a:effectRef idx="2">
-            <a:schemeClr val="accent1"/>
-          </a:effectRef>
-          <a:fontRef idx="minor">
-            <a:schemeClr val="lt1"/>
-          </a:fontRef>
-        </p:style>
-        <p:txBody>
-          <a:bodyPr rtlCol="0" anchor="ctr"/>
-          <a:lstStyle/>
-          <a:p>
-            <a:pPr algn="ctr"/>
-          </a:p>
-        </p:txBody>
-      </p:sp>
-      <p:sp>
-        <p:nvSpPr>
-          <p:cNvPr id="8" name="TextBox 7"/>
-          <p:cNvSpPr txBox="1"/>
-          <p:nvPr/>
-        </p:nvSpPr>
-        <p:spPr>
-          <a:xfrm>
-            <a:off x="7208215" y="6565392"/>
-            <a:ext cx="4846320" cy="274320"/>
-          </a:xfrm>
-          <a:prstGeom prst="rect">
-            <a:avLst/>
-          </a:prstGeom>
-          <a:noFill/>
-        </p:spPr>
-        <p:txBody>
-          <a:bodyPr wrap="square" anchor="t">
-            <a:spAutoFit/>
-          </a:bodyPr>
-          <a:lstStyle/>
-          <a:p>
-            <a:pPr algn="l">
-              <a:lnSpc>
-                <a:spcPct val="100000"/>
-              </a:lnSpc>
-            </a:pPr>
-            <a:r>
-              <a:rPr sz="850" b="0">
-                <a:solidFill>
-                  <a:srgbClr val="8A94A6"/>
-                </a:solidFill>
-                <a:latin typeface="Courier New"/>
-              </a:rPr>
-              <a:t>Behavior verification (Values at Play) - smart-meter image, educational use</a:t>
-            </a:r>
-          </a:p>
-        </p:txBody>
-      </p:sp>
-      <p:sp>
-        <p:nvSpPr>
-          <p:cNvPr id="9" name="TextBox 8"/>
           <p:cNvSpPr txBox="1"/>
           <p:nvPr/>
         </p:nvSpPr>
@@ -10088,7 +9471,7 @@
                 </a:solidFill>
                 <a:latin typeface="Courier New"/>
               </a:rPr>
-              <a:t>PICK THE INSTRUMENT THAT FITS YOUR VALUE</a:t>
+              <a:t>THE THREE LENSES</a:t>
             </a:r>
           </a:p>
         </p:txBody>
@@ -10146,7 +9529,7 @@
         <p:spPr>
           <a:xfrm>
             <a:off x="640080" y="1188720"/>
-            <a:ext cx="10972800" cy="1097280"/>
+            <a:ext cx="10972800" cy="914400"/>
           </a:xfrm>
           <a:prstGeom prst="rect">
             <a:avLst/>
@@ -10165,143 +9548,635 @@
               </a:lnSpc>
             </a:pPr>
             <a:r>
-              <a:rPr sz="3400" b="1">
+              <a:rPr sz="3200" b="1">
                 <a:solidFill>
                   <a:srgbClr val="F5F7FA"/>
                 </a:solidFill>
                 <a:latin typeface="Arial"/>
               </a:rPr>
-              <a:t>Examples - tie the tool to the value you are analyzing</a:t>
-            </a:r>
-          </a:p>
-        </p:txBody>
-      </p:sp>
-      <p:sp>
-        <p:nvSpPr>
-          <p:cNvPr id="5" name="TextBox 4"/>
-          <p:cNvSpPr txBox="1"/>
-          <p:nvPr/>
-        </p:nvSpPr>
-        <p:spPr>
-          <a:xfrm>
-            <a:off x="658368" y="2286000"/>
-            <a:ext cx="10881360" cy="3657600"/>
-          </a:xfrm>
-          <a:prstGeom prst="rect">
-            <a:avLst/>
-          </a:prstGeom>
-          <a:noFill/>
-        </p:spPr>
-        <p:txBody>
-          <a:bodyPr wrap="square" anchor="t">
-            <a:spAutoFit/>
-          </a:bodyPr>
-          <a:lstStyle/>
-          <a:p>
-            <a:pPr algn="l">
-              <a:lnSpc>
-                <a:spcPct val="112000"/>
+              <a:t>Behavior - Understanding - Affect</a:t>
+            </a:r>
+          </a:p>
+        </p:txBody>
+      </p:sp>
+      <p:sp>
+        <p:nvSpPr>
+          <p:cNvPr id="5" name="Rounded Rectangle 4"/>
+          <p:cNvSpPr/>
+          <p:nvPr/>
+        </p:nvSpPr>
+        <p:spPr>
+          <a:xfrm>
+            <a:off x="640080" y="2468880"/>
+            <a:ext cx="3393338" cy="3383280"/>
+          </a:xfrm>
+          <a:prstGeom prst="roundRect">
+            <a:avLst/>
+          </a:prstGeom>
+          <a:solidFill>
+            <a:srgbClr val="151B26"/>
+          </a:solidFill>
+          <a:ln>
+            <a:noFill/>
+          </a:ln>
+          <a:effectLst/>
+        </p:spPr>
+        <p:style>
+          <a:lnRef idx="1">
+            <a:schemeClr val="accent1"/>
+          </a:lnRef>
+          <a:fillRef idx="3">
+            <a:schemeClr val="accent1"/>
+          </a:fillRef>
+          <a:effectRef idx="2">
+            <a:schemeClr val="accent1"/>
+          </a:effectRef>
+          <a:fontRef idx="minor">
+            <a:schemeClr val="lt1"/>
+          </a:fontRef>
+        </p:style>
+        <p:txBody>
+          <a:bodyPr rtlCol="0" anchor="ctr"/>
+          <a:lstStyle/>
+          <a:p>
+            <a:pPr algn="ctr"/>
+          </a:p>
+        </p:txBody>
+      </p:sp>
+      <p:sp>
+        <p:nvSpPr>
+          <p:cNvPr id="6" name="Rectangle 5"/>
+          <p:cNvSpPr/>
+          <p:nvPr/>
+        </p:nvSpPr>
+        <p:spPr>
+          <a:xfrm>
+            <a:off x="640080" y="2468880"/>
+            <a:ext cx="3393338" cy="82296"/>
+          </a:xfrm>
+          <a:prstGeom prst="rect">
+            <a:avLst/>
+          </a:prstGeom>
+          <a:solidFill>
+            <a:srgbClr val="00FF41"/>
+          </a:solidFill>
+          <a:ln>
+            <a:noFill/>
+          </a:ln>
+          <a:effectLst/>
+        </p:spPr>
+        <p:style>
+          <a:lnRef idx="1">
+            <a:schemeClr val="accent1"/>
+          </a:lnRef>
+          <a:fillRef idx="3">
+            <a:schemeClr val="accent1"/>
+          </a:fillRef>
+          <a:effectRef idx="2">
+            <a:schemeClr val="accent1"/>
+          </a:effectRef>
+          <a:fontRef idx="minor">
+            <a:schemeClr val="lt1"/>
+          </a:fontRef>
+        </p:style>
+        <p:txBody>
+          <a:bodyPr rtlCol="0" anchor="ctr"/>
+          <a:lstStyle/>
+          <a:p>
+            <a:pPr algn="ctr"/>
+          </a:p>
+        </p:txBody>
+      </p:sp>
+      <p:sp>
+        <p:nvSpPr>
+          <p:cNvPr id="7" name="TextBox 6"/>
+          <p:cNvSpPr txBox="1"/>
+          <p:nvPr/>
+        </p:nvSpPr>
+        <p:spPr>
+          <a:xfrm>
+            <a:off x="914400" y="2788920"/>
+            <a:ext cx="2844698" cy="457200"/>
+          </a:xfrm>
+          <a:prstGeom prst="rect">
+            <a:avLst/>
+          </a:prstGeom>
+          <a:noFill/>
+        </p:spPr>
+        <p:txBody>
+          <a:bodyPr wrap="square" anchor="t">
+            <a:spAutoFit/>
+          </a:bodyPr>
+          <a:lstStyle/>
+          <a:p>
+            <a:pPr algn="l">
+              <a:lnSpc>
+                <a:spcPct val="100000"/>
+              </a:lnSpc>
+            </a:pPr>
+            <a:r>
+              <a:rPr sz="1200" b="1">
+                <a:solidFill>
+                  <a:srgbClr val="00FF41"/>
+                </a:solidFill>
+                <a:latin typeface="Courier New"/>
+              </a:rPr>
+              <a:t>BEHAVIOR</a:t>
+            </a:r>
+          </a:p>
+        </p:txBody>
+      </p:sp>
+      <p:sp>
+        <p:nvSpPr>
+          <p:cNvPr id="8" name="TextBox 7"/>
+          <p:cNvSpPr txBox="1"/>
+          <p:nvPr/>
+        </p:nvSpPr>
+        <p:spPr>
+          <a:xfrm>
+            <a:off x="914400" y="3246120"/>
+            <a:ext cx="2844698" cy="822960"/>
+          </a:xfrm>
+          <a:prstGeom prst="rect">
+            <a:avLst/>
+          </a:prstGeom>
+          <a:noFill/>
+        </p:spPr>
+        <p:txBody>
+          <a:bodyPr wrap="square" anchor="t">
+            <a:spAutoFit/>
+          </a:bodyPr>
+          <a:lstStyle/>
+          <a:p>
+            <a:pPr algn="l">
+              <a:lnSpc>
+                <a:spcPct val="100000"/>
               </a:lnSpc>
             </a:pPr>
             <a:r>
               <a:rPr sz="2000" b="1">
                 <a:solidFill>
+                  <a:srgbClr val="F5F7FA"/>
+                </a:solidFill>
+                <a:latin typeface="Arial"/>
+              </a:rPr>
+              <a:t>Do they ACT differently?</a:t>
+            </a:r>
+          </a:p>
+        </p:txBody>
+      </p:sp>
+      <p:sp>
+        <p:nvSpPr>
+          <p:cNvPr id="9" name="TextBox 8"/>
+          <p:cNvSpPr txBox="1"/>
+          <p:nvPr/>
+        </p:nvSpPr>
+        <p:spPr>
+          <a:xfrm>
+            <a:off x="914400" y="4114800"/>
+            <a:ext cx="2844698" cy="1554480"/>
+          </a:xfrm>
+          <a:prstGeom prst="rect">
+            <a:avLst/>
+          </a:prstGeom>
+          <a:noFill/>
+        </p:spPr>
+        <p:txBody>
+          <a:bodyPr wrap="square" anchor="t">
+            <a:spAutoFit/>
+          </a:bodyPr>
+          <a:lstStyle/>
+          <a:p>
+            <a:pPr algn="l">
+              <a:lnSpc>
+                <a:spcPct val="110000"/>
+              </a:lnSpc>
+            </a:pPr>
+            <a:r>
+              <a:rPr sz="1500" b="0">
+                <a:solidFill>
+                  <a:srgbClr val="8A94A6"/>
+                </a:solidFill>
+                <a:latin typeface="Arial"/>
+              </a:rPr>
+              <a:t>Observation, A/B, before/after, task completion.</a:t>
+            </a:r>
+          </a:p>
+        </p:txBody>
+      </p:sp>
+      <p:sp>
+        <p:nvSpPr>
+          <p:cNvPr id="10" name="Rounded Rectangle 9"/>
+          <p:cNvSpPr/>
+          <p:nvPr/>
+        </p:nvSpPr>
+        <p:spPr>
+          <a:xfrm>
+            <a:off x="4399178" y="2468880"/>
+            <a:ext cx="3393338" cy="3383280"/>
+          </a:xfrm>
+          <a:prstGeom prst="roundRect">
+            <a:avLst/>
+          </a:prstGeom>
+          <a:solidFill>
+            <a:srgbClr val="151B26"/>
+          </a:solidFill>
+          <a:ln>
+            <a:noFill/>
+          </a:ln>
+          <a:effectLst/>
+        </p:spPr>
+        <p:style>
+          <a:lnRef idx="1">
+            <a:schemeClr val="accent1"/>
+          </a:lnRef>
+          <a:fillRef idx="3">
+            <a:schemeClr val="accent1"/>
+          </a:fillRef>
+          <a:effectRef idx="2">
+            <a:schemeClr val="accent1"/>
+          </a:effectRef>
+          <a:fontRef idx="minor">
+            <a:schemeClr val="lt1"/>
+          </a:fontRef>
+        </p:style>
+        <p:txBody>
+          <a:bodyPr rtlCol="0" anchor="ctr"/>
+          <a:lstStyle/>
+          <a:p>
+            <a:pPr algn="ctr"/>
+          </a:p>
+        </p:txBody>
+      </p:sp>
+      <p:sp>
+        <p:nvSpPr>
+          <p:cNvPr id="11" name="Rectangle 10"/>
+          <p:cNvSpPr/>
+          <p:nvPr/>
+        </p:nvSpPr>
+        <p:spPr>
+          <a:xfrm>
+            <a:off x="4399178" y="2468880"/>
+            <a:ext cx="3393338" cy="82296"/>
+          </a:xfrm>
+          <a:prstGeom prst="rect">
+            <a:avLst/>
+          </a:prstGeom>
+          <a:solidFill>
+            <a:srgbClr val="00FF41"/>
+          </a:solidFill>
+          <a:ln>
+            <a:noFill/>
+          </a:ln>
+          <a:effectLst/>
+        </p:spPr>
+        <p:style>
+          <a:lnRef idx="1">
+            <a:schemeClr val="accent1"/>
+          </a:lnRef>
+          <a:fillRef idx="3">
+            <a:schemeClr val="accent1"/>
+          </a:fillRef>
+          <a:effectRef idx="2">
+            <a:schemeClr val="accent1"/>
+          </a:effectRef>
+          <a:fontRef idx="minor">
+            <a:schemeClr val="lt1"/>
+          </a:fontRef>
+        </p:style>
+        <p:txBody>
+          <a:bodyPr rtlCol="0" anchor="ctr"/>
+          <a:lstStyle/>
+          <a:p>
+            <a:pPr algn="ctr"/>
+          </a:p>
+        </p:txBody>
+      </p:sp>
+      <p:sp>
+        <p:nvSpPr>
+          <p:cNvPr id="12" name="TextBox 11"/>
+          <p:cNvSpPr txBox="1"/>
+          <p:nvPr/>
+        </p:nvSpPr>
+        <p:spPr>
+          <a:xfrm>
+            <a:off x="4673498" y="2788920"/>
+            <a:ext cx="2844698" cy="457200"/>
+          </a:xfrm>
+          <a:prstGeom prst="rect">
+            <a:avLst/>
+          </a:prstGeom>
+          <a:noFill/>
+        </p:spPr>
+        <p:txBody>
+          <a:bodyPr wrap="square" anchor="t">
+            <a:spAutoFit/>
+          </a:bodyPr>
+          <a:lstStyle/>
+          <a:p>
+            <a:pPr algn="l">
+              <a:lnSpc>
+                <a:spcPct val="100000"/>
+              </a:lnSpc>
+            </a:pPr>
+            <a:r>
+              <a:rPr sz="1200" b="1">
+                <a:solidFill>
                   <a:srgbClr val="00FF41"/>
                 </a:solidFill>
+                <a:latin typeface="Courier New"/>
+              </a:rPr>
+              <a:t>UNDERSTANDING</a:t>
+            </a:r>
+          </a:p>
+        </p:txBody>
+      </p:sp>
+      <p:sp>
+        <p:nvSpPr>
+          <p:cNvPr id="13" name="TextBox 12"/>
+          <p:cNvSpPr txBox="1"/>
+          <p:nvPr/>
+        </p:nvSpPr>
+        <p:spPr>
+          <a:xfrm>
+            <a:off x="4673498" y="3246120"/>
+            <a:ext cx="2844698" cy="822960"/>
+          </a:xfrm>
+          <a:prstGeom prst="rect">
+            <a:avLst/>
+          </a:prstGeom>
+          <a:noFill/>
+        </p:spPr>
+        <p:txBody>
+          <a:bodyPr wrap="square" anchor="t">
+            <a:spAutoFit/>
+          </a:bodyPr>
+          <a:lstStyle/>
+          <a:p>
+            <a:pPr algn="l">
+              <a:lnSpc>
+                <a:spcPct val="100000"/>
+              </a:lnSpc>
+            </a:pPr>
+            <a:r>
+              <a:rPr sz="2000" b="1">
+                <a:solidFill>
+                  <a:srgbClr val="F5F7FA"/>
+                </a:solidFill>
                 <a:latin typeface="Arial"/>
               </a:rPr>
-              <a:t>•  </a:t>
-            </a:r>
-            <a:r>
-              <a:rPr sz="2000" b="0">
+              <a:t>Do they GRASP it?</a:t>
+            </a:r>
+          </a:p>
+        </p:txBody>
+      </p:sp>
+      <p:sp>
+        <p:nvSpPr>
+          <p:cNvPr id="14" name="TextBox 13"/>
+          <p:cNvSpPr txBox="1"/>
+          <p:nvPr/>
+        </p:nvSpPr>
+        <p:spPr>
+          <a:xfrm>
+            <a:off x="4673498" y="4114800"/>
+            <a:ext cx="2844698" cy="1554480"/>
+          </a:xfrm>
+          <a:prstGeom prst="rect">
+            <a:avLst/>
+          </a:prstGeom>
+          <a:noFill/>
+        </p:spPr>
+        <p:txBody>
+          <a:bodyPr wrap="square" anchor="t">
+            <a:spAutoFit/>
+          </a:bodyPr>
+          <a:lstStyle/>
+          <a:p>
+            <a:pPr algn="l">
+              <a:lnSpc>
+                <a:spcPct val="110000"/>
+              </a:lnSpc>
+            </a:pPr>
+            <a:r>
+              <a:rPr sz="1500" b="0">
+                <a:solidFill>
+                  <a:srgbClr val="8A94A6"/>
+                </a:solidFill>
+                <a:latin typeface="Arial"/>
+              </a:rPr>
+              <a:t>Survey, interview, think-aloud, scenario.</a:t>
+            </a:r>
+          </a:p>
+        </p:txBody>
+      </p:sp>
+      <p:sp>
+        <p:nvSpPr>
+          <p:cNvPr id="15" name="Rounded Rectangle 14"/>
+          <p:cNvSpPr/>
+          <p:nvPr/>
+        </p:nvSpPr>
+        <p:spPr>
+          <a:xfrm>
+            <a:off x="8158276" y="2468880"/>
+            <a:ext cx="3393338" cy="3383280"/>
+          </a:xfrm>
+          <a:prstGeom prst="roundRect">
+            <a:avLst/>
+          </a:prstGeom>
+          <a:solidFill>
+            <a:srgbClr val="151B26"/>
+          </a:solidFill>
+          <a:ln>
+            <a:noFill/>
+          </a:ln>
+          <a:effectLst/>
+        </p:spPr>
+        <p:style>
+          <a:lnRef idx="1">
+            <a:schemeClr val="accent1"/>
+          </a:lnRef>
+          <a:fillRef idx="3">
+            <a:schemeClr val="accent1"/>
+          </a:fillRef>
+          <a:effectRef idx="2">
+            <a:schemeClr val="accent1"/>
+          </a:effectRef>
+          <a:fontRef idx="minor">
+            <a:schemeClr val="lt1"/>
+          </a:fontRef>
+        </p:style>
+        <p:txBody>
+          <a:bodyPr rtlCol="0" anchor="ctr"/>
+          <a:lstStyle/>
+          <a:p>
+            <a:pPr algn="ctr"/>
+          </a:p>
+        </p:txBody>
+      </p:sp>
+      <p:sp>
+        <p:nvSpPr>
+          <p:cNvPr id="16" name="Rectangle 15"/>
+          <p:cNvSpPr/>
+          <p:nvPr/>
+        </p:nvSpPr>
+        <p:spPr>
+          <a:xfrm>
+            <a:off x="8158276" y="2468880"/>
+            <a:ext cx="3393338" cy="82296"/>
+          </a:xfrm>
+          <a:prstGeom prst="rect">
+            <a:avLst/>
+          </a:prstGeom>
+          <a:solidFill>
+            <a:srgbClr val="00FF41"/>
+          </a:solidFill>
+          <a:ln>
+            <a:noFill/>
+          </a:ln>
+          <a:effectLst/>
+        </p:spPr>
+        <p:style>
+          <a:lnRef idx="1">
+            <a:schemeClr val="accent1"/>
+          </a:lnRef>
+          <a:fillRef idx="3">
+            <a:schemeClr val="accent1"/>
+          </a:fillRef>
+          <a:effectRef idx="2">
+            <a:schemeClr val="accent1"/>
+          </a:effectRef>
+          <a:fontRef idx="minor">
+            <a:schemeClr val="lt1"/>
+          </a:fontRef>
+        </p:style>
+        <p:txBody>
+          <a:bodyPr rtlCol="0" anchor="ctr"/>
+          <a:lstStyle/>
+          <a:p>
+            <a:pPr algn="ctr"/>
+          </a:p>
+        </p:txBody>
+      </p:sp>
+      <p:sp>
+        <p:nvSpPr>
+          <p:cNvPr id="17" name="TextBox 16"/>
+          <p:cNvSpPr txBox="1"/>
+          <p:nvPr/>
+        </p:nvSpPr>
+        <p:spPr>
+          <a:xfrm>
+            <a:off x="8432596" y="2788920"/>
+            <a:ext cx="2844698" cy="457200"/>
+          </a:xfrm>
+          <a:prstGeom prst="rect">
+            <a:avLst/>
+          </a:prstGeom>
+          <a:noFill/>
+        </p:spPr>
+        <p:txBody>
+          <a:bodyPr wrap="square" anchor="t">
+            <a:spAutoFit/>
+          </a:bodyPr>
+          <a:lstStyle/>
+          <a:p>
+            <a:pPr algn="l">
+              <a:lnSpc>
+                <a:spcPct val="100000"/>
+              </a:lnSpc>
+            </a:pPr>
+            <a:r>
+              <a:rPr sz="1200" b="1">
+                <a:solidFill>
+                  <a:srgbClr val="00FF41"/>
+                </a:solidFill>
+                <a:latin typeface="Courier New"/>
+              </a:rPr>
+              <a:t>AFFECT</a:t>
+            </a:r>
+          </a:p>
+        </p:txBody>
+      </p:sp>
+      <p:sp>
+        <p:nvSpPr>
+          <p:cNvPr id="18" name="TextBox 17"/>
+          <p:cNvSpPr txBox="1"/>
+          <p:nvPr/>
+        </p:nvSpPr>
+        <p:spPr>
+          <a:xfrm>
+            <a:off x="8432596" y="3246120"/>
+            <a:ext cx="2844698" cy="822960"/>
+          </a:xfrm>
+          <a:prstGeom prst="rect">
+            <a:avLst/>
+          </a:prstGeom>
+          <a:noFill/>
+        </p:spPr>
+        <p:txBody>
+          <a:bodyPr wrap="square" anchor="t">
+            <a:spAutoFit/>
+          </a:bodyPr>
+          <a:lstStyle/>
+          <a:p>
+            <a:pPr algn="l">
+              <a:lnSpc>
+                <a:spcPct val="100000"/>
+              </a:lnSpc>
+            </a:pPr>
+            <a:r>
+              <a:rPr sz="2000" b="1">
                 <a:solidFill>
                   <a:srgbClr val="F5F7FA"/>
                 </a:solidFill>
                 <a:latin typeface="Arial"/>
               </a:rPr>
-              <a:t>Beauty / craft / originality -&gt; the Vibed Slop Detector (is it generic AI slop?), or UEQ attractiveness.</a:t>
-            </a:r>
-          </a:p>
-          <a:p>
-            <a:pPr algn="l">
-              <a:lnSpc>
-                <a:spcPct val="112000"/>
-              </a:lnSpc>
-            </a:pPr>
-            <a:r>
-              <a:rPr sz="2000" b="1">
-                <a:solidFill>
-                  <a:srgbClr val="00FF41"/>
+              <a:t>Do they FEEL differently?</a:t>
+            </a:r>
+          </a:p>
+        </p:txBody>
+      </p:sp>
+      <p:sp>
+        <p:nvSpPr>
+          <p:cNvPr id="19" name="TextBox 18"/>
+          <p:cNvSpPr txBox="1"/>
+          <p:nvPr/>
+        </p:nvSpPr>
+        <p:spPr>
+          <a:xfrm>
+            <a:off x="8432596" y="4114800"/>
+            <a:ext cx="2844698" cy="1554480"/>
+          </a:xfrm>
+          <a:prstGeom prst="rect">
+            <a:avLst/>
+          </a:prstGeom>
+          <a:noFill/>
+        </p:spPr>
+        <p:txBody>
+          <a:bodyPr wrap="square" anchor="t">
+            <a:spAutoFit/>
+          </a:bodyPr>
+          <a:lstStyle/>
+          <a:p>
+            <a:pPr algn="l">
+              <a:lnSpc>
+                <a:spcPct val="110000"/>
+              </a:lnSpc>
+            </a:pPr>
+            <a:r>
+              <a:rPr sz="1500" b="0">
+                <a:solidFill>
+                  <a:srgbClr val="8A94A6"/>
                 </a:solidFill>
                 <a:latin typeface="Arial"/>
               </a:rPr>
-              <a:t>•  </a:t>
-            </a:r>
-            <a:r>
-              <a:rPr sz="2000" b="0">
-                <a:solidFill>
-                  <a:srgbClr val="F5F7FA"/>
-                </a:solidFill>
-                <a:latin typeface="Arial"/>
-              </a:rPr>
-              <a:t>Autonomy / competence / wellbeing -&gt; METUX + Self-Determination scales.</a:t>
-            </a:r>
-          </a:p>
-          <a:p>
-            <a:pPr algn="l">
-              <a:lnSpc>
-                <a:spcPct val="112000"/>
-              </a:lnSpc>
-            </a:pPr>
-            <a:r>
-              <a:rPr sz="2000" b="1">
-                <a:solidFill>
-                  <a:srgbClr val="00FF41"/>
-                </a:solidFill>
-                <a:latin typeface="Arial"/>
-              </a:rPr>
-              <a:t>•  </a:t>
-            </a:r>
-            <a:r>
-              <a:rPr sz="2000" b="0">
-                <a:solidFill>
-                  <a:srgbClr val="F5F7FA"/>
-                </a:solidFill>
-                <a:latin typeface="Arial"/>
-              </a:rPr>
-              <a:t>Trust / warmth / safety -&gt; a validated scale from the HRI Scale Database.</a:t>
-            </a:r>
-          </a:p>
-          <a:p>
-            <a:pPr algn="l">
-              <a:lnSpc>
-                <a:spcPct val="112000"/>
-              </a:lnSpc>
-            </a:pPr>
-            <a:r>
-              <a:rPr sz="2000" b="1">
-                <a:solidFill>
-                  <a:srgbClr val="00FF41"/>
-                </a:solidFill>
-                <a:latin typeface="Arial"/>
-              </a:rPr>
-              <a:t>•  </a:t>
-            </a:r>
-            <a:r>
-              <a:rPr sz="2000" b="0">
-                <a:solidFill>
-                  <a:srgbClr val="F5F7FA"/>
-                </a:solidFill>
-                <a:latin typeface="Arial"/>
-              </a:rPr>
-              <a:t>Overall UX beyond usability -&gt; UEQ. The instrument has to match the value - don't default to UEQ.</a:t>
-            </a:r>
-          </a:p>
-        </p:txBody>
-      </p:sp>
-      <p:sp>
-        <p:nvSpPr>
-          <p:cNvPr id="6" name="TextBox 5"/>
+              <a:t>Attitude survey, diary, interview, choice under pressure.</a:t>
+            </a:r>
+          </a:p>
+        </p:txBody>
+      </p:sp>
+      <p:sp>
+        <p:nvSpPr>
+          <p:cNvPr id="20" name="TextBox 19"/>
           <p:cNvSpPr txBox="1"/>
           <p:nvPr/>
         </p:nvSpPr>
@@ -10334,6 +10209,45 @@
                 <a:latin typeface="Courier New"/>
               </a:rPr>
               <a:t>Good Code, Good Vibes · TECHIE 1121 · Cornell Tech · Summer 2026</a:t>
+            </a:r>
+          </a:p>
+        </p:txBody>
+      </p:sp>
+      <p:sp>
+        <p:nvSpPr>
+          <p:cNvPr id="21" name="TextBox 20"/>
+          <p:cNvSpPr txBox="1"/>
+          <p:nvPr/>
+        </p:nvSpPr>
+        <p:spPr>
+          <a:xfrm>
+            <a:off x="640080" y="6053328"/>
+            <a:ext cx="10972800" cy="292608"/>
+          </a:xfrm>
+          <a:prstGeom prst="rect">
+            <a:avLst/>
+          </a:prstGeom>
+          <a:noFill/>
+        </p:spPr>
+        <p:txBody>
+          <a:bodyPr wrap="square" anchor="t">
+            <a:spAutoFit/>
+          </a:bodyPr>
+          <a:lstStyle/>
+          <a:p>
+            <a:pPr algn="l">
+              <a:lnSpc>
+                <a:spcPct val="100000"/>
+              </a:lnSpc>
+            </a:pPr>
+            <a:r>
+              <a:rPr sz="950" b="0">
+                <a:solidFill>
+                  <a:srgbClr val="5A6474"/>
+                </a:solidFill>
+                <a:latin typeface="Courier New"/>
+              </a:rPr>
+              <a:t>Verification lenses: Values at Play - VAP course, Engelmann &amp; Nissenbaum (Cornell Tech)</a:t>
             </a:r>
           </a:p>
         </p:txBody>
@@ -10398,149 +10312,30 @@
                 </a:solidFill>
                 <a:latin typeface="Courier New"/>
               </a:rPr>
-              <a:t>FROM OUR RESEARCH</a:t>
-            </a:r>
-          </a:p>
-        </p:txBody>
-      </p:sp>
-      <p:sp>
-        <p:nvSpPr>
-          <p:cNvPr id="3" name="TextBox 2"/>
-          <p:cNvSpPr txBox="1"/>
-          <p:nvPr/>
-        </p:nvSpPr>
-        <p:spPr>
-          <a:xfrm>
-            <a:off x="914400" y="1554480"/>
-            <a:ext cx="1280160" cy="1280160"/>
-          </a:xfrm>
-          <a:prstGeom prst="rect">
-            <a:avLst/>
-          </a:prstGeom>
-          <a:noFill/>
-        </p:spPr>
-        <p:txBody>
-          <a:bodyPr wrap="square" anchor="t">
-            <a:spAutoFit/>
-          </a:bodyPr>
-          <a:lstStyle/>
-          <a:p>
-            <a:pPr algn="l">
-              <a:lnSpc>
-                <a:spcPct val="100000"/>
-              </a:lnSpc>
-            </a:pPr>
-            <a:r>
-              <a:rPr sz="9000" b="1">
-                <a:solidFill>
-                  <a:srgbClr val="00FF41"/>
-                </a:solidFill>
-                <a:latin typeface="Arial"/>
-              </a:rPr>
-              <a:t>“</a:t>
-            </a:r>
-          </a:p>
-        </p:txBody>
-      </p:sp>
-      <p:sp>
-        <p:nvSpPr>
-          <p:cNvPr id="4" name="TextBox 3"/>
-          <p:cNvSpPr txBox="1"/>
-          <p:nvPr/>
-        </p:nvSpPr>
-        <p:spPr>
-          <a:xfrm>
-            <a:off x="1188720" y="2194560"/>
-            <a:ext cx="9784080" cy="2011680"/>
-          </a:xfrm>
-          <a:prstGeom prst="rect">
-            <a:avLst/>
-          </a:prstGeom>
-          <a:noFill/>
-        </p:spPr>
-        <p:txBody>
-          <a:bodyPr wrap="square" anchor="t">
-            <a:spAutoFit/>
-          </a:bodyPr>
-          <a:lstStyle/>
-          <a:p>
-            <a:pPr algn="l">
-              <a:lnSpc>
-                <a:spcPct val="112000"/>
-              </a:lnSpc>
-            </a:pPr>
-            <a:r>
-              <a:rPr sz="3000" b="1">
-                <a:solidFill>
-                  <a:srgbClr val="F5F7FA"/>
-                </a:solidFill>
-                <a:latin typeface="Arial"/>
-              </a:rPr>
-              <a:t>Persuasion-focused evaluation nearly DOUBLED how often professional designers rejected dark-pattern designs - and shifted their reasoning from business justifications toward user autonomy and well-being.</a:t>
-            </a:r>
-          </a:p>
-        </p:txBody>
-      </p:sp>
-      <p:sp>
-        <p:nvSpPr>
-          <p:cNvPr id="5" name="TextBox 4"/>
-          <p:cNvSpPr txBox="1"/>
-          <p:nvPr/>
-        </p:nvSpPr>
-        <p:spPr>
-          <a:xfrm>
-            <a:off x="1234440" y="4297680"/>
-            <a:ext cx="9601200" cy="457200"/>
-          </a:xfrm>
-          <a:prstGeom prst="rect">
-            <a:avLst/>
-          </a:prstGeom>
-          <a:noFill/>
-        </p:spPr>
-        <p:txBody>
-          <a:bodyPr wrap="square" anchor="t">
-            <a:spAutoFit/>
-          </a:bodyPr>
-          <a:lstStyle/>
-          <a:p>
-            <a:pPr algn="l">
-              <a:lnSpc>
-                <a:spcPct val="100000"/>
-              </a:lnSpc>
-            </a:pPr>
-            <a:r>
-              <a:rPr sz="1600" b="0">
-                <a:solidFill>
-                  <a:srgbClr val="8A94A6"/>
-                </a:solidFill>
-                <a:latin typeface="Arial"/>
-              </a:rPr>
-              <a:t>— Sandhaus, Rhomberg &amp; Nissenbaum, CHIWORK 2026 - a study of 141 UX professionals</a:t>
-            </a:r>
-          </a:p>
-        </p:txBody>
-      </p:sp>
-      <p:sp>
-        <p:nvSpPr>
-          <p:cNvPr id="6" name="Rounded Rectangle 5"/>
+              <a:t>EXAMPLE - BEHAVIOR</a:t>
+            </a:r>
+          </a:p>
+        </p:txBody>
+      </p:sp>
+      <p:sp>
+        <p:nvSpPr>
+          <p:cNvPr id="3" name="Rectangle 2"/>
           <p:cNvSpPr/>
           <p:nvPr/>
         </p:nvSpPr>
         <p:spPr>
           <a:xfrm>
-            <a:off x="1188720" y="4937760"/>
-            <a:ext cx="9784080" cy="914400"/>
-          </a:xfrm>
-          <a:prstGeom prst="roundRect">
+            <a:off x="640080" y="932688"/>
+            <a:ext cx="822960" cy="73152"/>
+          </a:xfrm>
+          <a:prstGeom prst="rect">
             <a:avLst/>
           </a:prstGeom>
           <a:solidFill>
-            <a:srgbClr val="151B26"/>
+            <a:srgbClr val="00FF41"/>
           </a:solidFill>
-          <a:ln w="12700">
-            <a:solidFill>
-              <a:srgbClr val="00FF41"/>
-            </a:solidFill>
+          <a:ln>
+            <a:noFill/>
           </a:ln>
           <a:effectLst/>
         </p:spPr>
@@ -10566,24 +10361,49 @@
           </a:p>
         </p:txBody>
       </p:sp>
-      <p:sp>
-        <p:nvSpPr>
-          <p:cNvPr id="7" name="TextBox 6"/>
-          <p:cNvSpPr txBox="1"/>
-          <p:nvPr/>
-        </p:nvSpPr>
-        <p:spPr>
-          <a:xfrm>
-            <a:off x="1463040" y="5074920"/>
-            <a:ext cx="9235440" cy="731520"/>
-          </a:xfrm>
-          <a:prstGeom prst="rect">
-            <a:avLst/>
-          </a:prstGeom>
-          <a:noFill/>
-        </p:spPr>
-        <p:txBody>
-          <a:bodyPr wrap="square" anchor="ctr">
+      <p:pic>
+        <p:nvPicPr>
+          <p:cNvPr id="4" name="Picture 3" descr="smart_meter.jpg"/>
+          <p:cNvPicPr>
+            <a:picLocks noChangeAspect="1"/>
+          </p:cNvPicPr>
+          <p:nvPr/>
+        </p:nvPicPr>
+        <p:blipFill>
+          <a:blip r:embed="rId2"/>
+          <a:srcRect l="25111" r="25111"/>
+          <a:stretch>
+            <a:fillRect/>
+          </a:stretch>
+        </p:blipFill>
+        <p:spPr>
+          <a:xfrm>
+            <a:off x="7071055" y="0"/>
+            <a:ext cx="5120640" cy="6858000"/>
+          </a:xfrm>
+          <a:prstGeom prst="rect">
+            <a:avLst/>
+          </a:prstGeom>
+        </p:spPr>
+      </p:pic>
+      <p:sp>
+        <p:nvSpPr>
+          <p:cNvPr id="5" name="TextBox 4"/>
+          <p:cNvSpPr txBox="1"/>
+          <p:nvPr/>
+        </p:nvSpPr>
+        <p:spPr>
+          <a:xfrm>
+            <a:off x="640080" y="1188720"/>
+            <a:ext cx="6019495" cy="1280160"/>
+          </a:xfrm>
+          <a:prstGeom prst="rect">
+            <a:avLst/>
+          </a:prstGeom>
+          <a:noFill/>
+        </p:spPr>
+        <p:txBody>
+          <a:bodyPr wrap="square" anchor="t">
             <a:spAutoFit/>
           </a:bodyPr>
           <a:lstStyle/>
@@ -10594,20 +10414,174 @@
               </a:lnSpc>
             </a:pPr>
             <a:r>
+              <a:rPr sz="3000" b="1">
+                <a:solidFill>
+                  <a:srgbClr val="F5F7FA"/>
+                </a:solidFill>
+                <a:latin typeface="Arial"/>
+              </a:rPr>
+              <a:t>Does the design change what people DO?</a:t>
+            </a:r>
+          </a:p>
+        </p:txBody>
+      </p:sp>
+      <p:sp>
+        <p:nvSpPr>
+          <p:cNvPr id="6" name="TextBox 5"/>
+          <p:cNvSpPr txBox="1"/>
+          <p:nvPr/>
+        </p:nvSpPr>
+        <p:spPr>
+          <a:xfrm>
+            <a:off x="640080" y="2560320"/>
+            <a:ext cx="6019495" cy="3108960"/>
+          </a:xfrm>
+          <a:prstGeom prst="rect">
+            <a:avLst/>
+          </a:prstGeom>
+          <a:noFill/>
+        </p:spPr>
+        <p:txBody>
+          <a:bodyPr wrap="square" anchor="t">
+            <a:spAutoFit/>
+          </a:bodyPr>
+          <a:lstStyle/>
+          <a:p>
+            <a:pPr algn="l">
+              <a:lnSpc>
+                <a:spcPct val="116000"/>
+              </a:lnSpc>
+            </a:pPr>
+            <a:r>
               <a:rPr sz="1800" b="0">
                 <a:solidFill>
                   <a:srgbClr val="F5F7FA"/>
                 </a:solidFill>
                 <a:latin typeface="Arial"/>
               </a:rPr>
-              <a:t>Measuring a value doesn't just describe it - it changes what gets built. That is why verification is not optional.</a:t>
-            </a:r>
+              <a:t>A smart meter only "works" for sustainability if people actually use less. Behavior is the sharpest test.</a:t>
+            </a:r>
+          </a:p>
+          <a:p>
+            <a:pPr algn="l">
+              <a:lnSpc>
+                <a:spcPct val="116000"/>
+              </a:lnSpc>
+            </a:pPr>
+            <a:r>
+              <a:rPr sz="1900" b="0">
+                <a:solidFill>
+                  <a:srgbClr val="F5F7FA"/>
+                </a:solidFill>
+                <a:latin typeface="Arial"/>
+              </a:rPr>
+              <a:t/>
+            </a:r>
+          </a:p>
+          <a:p>
+            <a:pPr algn="l">
+              <a:lnSpc>
+                <a:spcPct val="116000"/>
+              </a:lnSpc>
+            </a:pPr>
+            <a:r>
+              <a:rPr sz="1600" b="0">
+                <a:solidFill>
+                  <a:srgbClr val="8A94A6"/>
+                </a:solidFill>
+                <a:latin typeface="Arial"/>
+              </a:rPr>
+              <a:t>Verify how: prototype - A/B - before/after - task completion.</a:t>
+            </a:r>
+          </a:p>
+        </p:txBody>
+      </p:sp>
+      <p:sp>
+        <p:nvSpPr>
+          <p:cNvPr id="7" name="Rectangle 6"/>
+          <p:cNvSpPr/>
+          <p:nvPr/>
+        </p:nvSpPr>
+        <p:spPr>
+          <a:xfrm>
+            <a:off x="7071055" y="6547104"/>
+            <a:ext cx="5120640" cy="310896"/>
+          </a:xfrm>
+          <a:prstGeom prst="rect">
+            <a:avLst/>
+          </a:prstGeom>
+          <a:solidFill>
+            <a:srgbClr val="0B0E14"/>
+          </a:solidFill>
+          <a:ln>
+            <a:noFill/>
+          </a:ln>
+          <a:effectLst/>
+        </p:spPr>
+        <p:style>
+          <a:lnRef idx="1">
+            <a:schemeClr val="accent1"/>
+          </a:lnRef>
+          <a:fillRef idx="3">
+            <a:schemeClr val="accent1"/>
+          </a:fillRef>
+          <a:effectRef idx="2">
+            <a:schemeClr val="accent1"/>
+          </a:effectRef>
+          <a:fontRef idx="minor">
+            <a:schemeClr val="lt1"/>
+          </a:fontRef>
+        </p:style>
+        <p:txBody>
+          <a:bodyPr rtlCol="0" anchor="ctr"/>
+          <a:lstStyle/>
+          <a:p>
+            <a:pPr algn="ctr"/>
           </a:p>
         </p:txBody>
       </p:sp>
       <p:sp>
         <p:nvSpPr>
           <p:cNvPr id="8" name="TextBox 7"/>
+          <p:cNvSpPr txBox="1"/>
+          <p:nvPr/>
+        </p:nvSpPr>
+        <p:spPr>
+          <a:xfrm>
+            <a:off x="7208215" y="6565392"/>
+            <a:ext cx="4846320" cy="274320"/>
+          </a:xfrm>
+          <a:prstGeom prst="rect">
+            <a:avLst/>
+          </a:prstGeom>
+          <a:noFill/>
+        </p:spPr>
+        <p:txBody>
+          <a:bodyPr wrap="square" anchor="t">
+            <a:spAutoFit/>
+          </a:bodyPr>
+          <a:lstStyle/>
+          <a:p>
+            <a:pPr algn="l">
+              <a:lnSpc>
+                <a:spcPct val="100000"/>
+              </a:lnSpc>
+            </a:pPr>
+            <a:r>
+              <a:rPr sz="850" b="0">
+                <a:solidFill>
+                  <a:srgbClr val="8A94A6"/>
+                </a:solidFill>
+                <a:latin typeface="Courier New"/>
+              </a:rPr>
+              <a:t>Behavior verification (Values at Play) - smart-meter image, educational use</a:t>
+            </a:r>
+          </a:p>
+        </p:txBody>
+      </p:sp>
+      <p:sp>
+        <p:nvSpPr>
+          <p:cNvPr id="9" name="TextBox 8"/>
           <p:cNvSpPr txBox="1"/>
           <p:nvPr/>
         </p:nvSpPr>
@@ -10672,14 +10646,53 @@
       <p:grpSpPr/>
       <p:sp>
         <p:nvSpPr>
-          <p:cNvPr id="2" name="Rectangle 1"/>
+          <p:cNvPr id="2" name="TextBox 1"/>
+          <p:cNvSpPr txBox="1"/>
+          <p:nvPr/>
+        </p:nvSpPr>
+        <p:spPr>
+          <a:xfrm>
+            <a:off x="640080" y="502920"/>
+            <a:ext cx="10058400" cy="365760"/>
+          </a:xfrm>
+          <a:prstGeom prst="rect">
+            <a:avLst/>
+          </a:prstGeom>
+          <a:noFill/>
+        </p:spPr>
+        <p:txBody>
+          <a:bodyPr wrap="square" anchor="t">
+            <a:spAutoFit/>
+          </a:bodyPr>
+          <a:lstStyle/>
+          <a:p>
+            <a:pPr algn="l">
+              <a:lnSpc>
+                <a:spcPct val="100000"/>
+              </a:lnSpc>
+            </a:pPr>
+            <a:r>
+              <a:rPr sz="1300" b="1">
+                <a:solidFill>
+                  <a:srgbClr val="00FF41"/>
+                </a:solidFill>
+                <a:latin typeface="Courier New"/>
+              </a:rPr>
+              <a:t>PICK THE INSTRUMENT THAT FITS YOUR VALUE</a:t>
+            </a:r>
+          </a:p>
+        </p:txBody>
+      </p:sp>
+      <p:sp>
+        <p:nvSpPr>
+          <p:cNvPr id="3" name="Rectangle 2"/>
           <p:cNvSpPr/>
           <p:nvPr/>
         </p:nvSpPr>
         <p:spPr>
           <a:xfrm>
-            <a:off x="0" y="0"/>
-            <a:ext cx="256032" cy="6858000"/>
+            <a:off x="640080" y="932688"/>
+            <a:ext cx="822960" cy="73152"/>
           </a:xfrm>
           <a:prstGeom prst="rect">
             <a:avLst/>
@@ -10716,14 +10729,14 @@
       </p:sp>
       <p:sp>
         <p:nvSpPr>
-          <p:cNvPr id="3" name="TextBox 2"/>
-          <p:cNvSpPr txBox="1"/>
-          <p:nvPr/>
-        </p:nvSpPr>
-        <p:spPr>
-          <a:xfrm>
-            <a:off x="822960" y="2194560"/>
-            <a:ext cx="10515600" cy="548640"/>
+          <p:cNvPr id="4" name="TextBox 3"/>
+          <p:cNvSpPr txBox="1"/>
+          <p:nvPr/>
+        </p:nvSpPr>
+        <p:spPr>
+          <a:xfrm>
+            <a:off x="640080" y="1188720"/>
+            <a:ext cx="10972800" cy="1097280"/>
           </a:xfrm>
           <a:prstGeom prst="rect">
             <a:avLst/>
@@ -10742,52 +10755,175 @@
               </a:lnSpc>
             </a:pPr>
             <a:r>
-              <a:rPr sz="1800" b="1">
+              <a:rPr sz="3400" b="1">
+                <a:solidFill>
+                  <a:srgbClr val="F5F7FA"/>
+                </a:solidFill>
+                <a:latin typeface="Arial"/>
+              </a:rPr>
+              <a:t>Examples - tie the tool to the value you are analyzing</a:t>
+            </a:r>
+          </a:p>
+        </p:txBody>
+      </p:sp>
+      <p:sp>
+        <p:nvSpPr>
+          <p:cNvPr id="5" name="TextBox 4"/>
+          <p:cNvSpPr txBox="1"/>
+          <p:nvPr/>
+        </p:nvSpPr>
+        <p:spPr>
+          <a:xfrm>
+            <a:off x="658368" y="2286000"/>
+            <a:ext cx="10881360" cy="3657600"/>
+          </a:xfrm>
+          <a:prstGeom prst="rect">
+            <a:avLst/>
+          </a:prstGeom>
+          <a:noFill/>
+        </p:spPr>
+        <p:txBody>
+          <a:bodyPr wrap="square" anchor="t">
+            <a:spAutoFit/>
+          </a:bodyPr>
+          <a:lstStyle/>
+          <a:p>
+            <a:pPr algn="l">
+              <a:lnSpc>
+                <a:spcPct val="112000"/>
+              </a:lnSpc>
+            </a:pPr>
+            <a:r>
+              <a:rPr sz="2000" b="1">
                 <a:solidFill>
                   <a:srgbClr val="00FF41"/>
                 </a:solidFill>
+                <a:latin typeface="Arial"/>
+              </a:rPr>
+              <a:t>•  </a:t>
+            </a:r>
+            <a:r>
+              <a:rPr sz="2000" b="0">
+                <a:solidFill>
+                  <a:srgbClr val="F5F7FA"/>
+                </a:solidFill>
+                <a:latin typeface="Arial"/>
+              </a:rPr>
+              <a:t>Beauty / craft / originality -&gt; the Vibed Slop Detector (is it generic AI slop?), or UEQ attractiveness.</a:t>
+            </a:r>
+          </a:p>
+          <a:p>
+            <a:pPr algn="l">
+              <a:lnSpc>
+                <a:spcPct val="112000"/>
+              </a:lnSpc>
+            </a:pPr>
+            <a:r>
+              <a:rPr sz="2000" b="1">
+                <a:solidFill>
+                  <a:srgbClr val="00FF41"/>
+                </a:solidFill>
+                <a:latin typeface="Arial"/>
+              </a:rPr>
+              <a:t>•  </a:t>
+            </a:r>
+            <a:r>
+              <a:rPr sz="2000" b="0">
+                <a:solidFill>
+                  <a:srgbClr val="F5F7FA"/>
+                </a:solidFill>
+                <a:latin typeface="Arial"/>
+              </a:rPr>
+              <a:t>Autonomy / competence / wellbeing -&gt; METUX + Self-Determination scales.</a:t>
+            </a:r>
+          </a:p>
+          <a:p>
+            <a:pPr algn="l">
+              <a:lnSpc>
+                <a:spcPct val="112000"/>
+              </a:lnSpc>
+            </a:pPr>
+            <a:r>
+              <a:rPr sz="2000" b="1">
+                <a:solidFill>
+                  <a:srgbClr val="00FF41"/>
+                </a:solidFill>
+                <a:latin typeface="Arial"/>
+              </a:rPr>
+              <a:t>•  </a:t>
+            </a:r>
+            <a:r>
+              <a:rPr sz="2000" b="0">
+                <a:solidFill>
+                  <a:srgbClr val="F5F7FA"/>
+                </a:solidFill>
+                <a:latin typeface="Arial"/>
+              </a:rPr>
+              <a:t>Trust / warmth / safety -&gt; a validated scale from the HRI Scale Database.</a:t>
+            </a:r>
+          </a:p>
+          <a:p>
+            <a:pPr algn="l">
+              <a:lnSpc>
+                <a:spcPct val="112000"/>
+              </a:lnSpc>
+            </a:pPr>
+            <a:r>
+              <a:rPr sz="2000" b="1">
+                <a:solidFill>
+                  <a:srgbClr val="00FF41"/>
+                </a:solidFill>
+                <a:latin typeface="Arial"/>
+              </a:rPr>
+              <a:t>•  </a:t>
+            </a:r>
+            <a:r>
+              <a:rPr sz="2000" b="0">
+                <a:solidFill>
+                  <a:srgbClr val="F5F7FA"/>
+                </a:solidFill>
+                <a:latin typeface="Arial"/>
+              </a:rPr>
+              <a:t>Overall UX beyond usability -&gt; UEQ. The instrument has to match the value - don't default to UEQ.</a:t>
+            </a:r>
+          </a:p>
+        </p:txBody>
+      </p:sp>
+      <p:sp>
+        <p:nvSpPr>
+          <p:cNvPr id="6" name="TextBox 5"/>
+          <p:cNvSpPr txBox="1"/>
+          <p:nvPr/>
+        </p:nvSpPr>
+        <p:spPr>
+          <a:xfrm>
+            <a:off x="640080" y="6355080"/>
+            <a:ext cx="10972800" cy="365760"/>
+          </a:xfrm>
+          <a:prstGeom prst="rect">
+            <a:avLst/>
+          </a:prstGeom>
+          <a:noFill/>
+        </p:spPr>
+        <p:txBody>
+          <a:bodyPr wrap="square" anchor="t">
+            <a:spAutoFit/>
+          </a:bodyPr>
+          <a:lstStyle/>
+          <a:p>
+            <a:pPr algn="l">
+              <a:lnSpc>
+                <a:spcPct val="100000"/>
+              </a:lnSpc>
+            </a:pPr>
+            <a:r>
+              <a:rPr sz="1000" b="0">
+                <a:solidFill>
+                  <a:srgbClr val="5A6474"/>
+                </a:solidFill>
                 <a:latin typeface="Courier New"/>
               </a:rPr>
-              <a:t>PART 5 - IN PRACTICE</a:t>
-            </a:r>
-          </a:p>
-        </p:txBody>
-      </p:sp>
-      <p:sp>
-        <p:nvSpPr>
-          <p:cNvPr id="4" name="TextBox 3"/>
-          <p:cNvSpPr txBox="1"/>
-          <p:nvPr/>
-        </p:nvSpPr>
-        <p:spPr>
-          <a:xfrm>
-            <a:off x="804672" y="2743200"/>
-            <a:ext cx="10515600" cy="1554480"/>
-          </a:xfrm>
-          <a:prstGeom prst="rect">
-            <a:avLst/>
-          </a:prstGeom>
-          <a:noFill/>
-        </p:spPr>
-        <p:txBody>
-          <a:bodyPr wrap="square" anchor="t">
-            <a:spAutoFit/>
-          </a:bodyPr>
-          <a:lstStyle/>
-          <a:p>
-            <a:pPr algn="l">
-              <a:lnSpc>
-                <a:spcPct val="100000"/>
-              </a:lnSpc>
-            </a:pPr>
-            <a:r>
-              <a:rPr sz="4800" b="1">
-                <a:solidFill>
-                  <a:srgbClr val="F5F7FA"/>
-                </a:solidFill>
-                <a:latin typeface="Arial"/>
-              </a:rPr>
-              <a:t>The VAP canvas + real projects</a:t>
+              <a:t>Good Code, Good Vibes · TECHIE 1121 · Cornell Tech · Summer 2026</a:t>
             </a:r>
           </a:p>
         </p:txBody>
@@ -10852,30 +10988,149 @@
                 </a:solidFill>
                 <a:latin typeface="Courier New"/>
               </a:rPr>
-              <a:t>THE FIGJAM CANVAS</a:t>
-            </a:r>
-          </a:p>
-        </p:txBody>
-      </p:sp>
-      <p:sp>
-        <p:nvSpPr>
-          <p:cNvPr id="3" name="Rectangle 2"/>
+              <a:t>FROM OUR RESEARCH</a:t>
+            </a:r>
+          </a:p>
+        </p:txBody>
+      </p:sp>
+      <p:sp>
+        <p:nvSpPr>
+          <p:cNvPr id="3" name="TextBox 2"/>
+          <p:cNvSpPr txBox="1"/>
+          <p:nvPr/>
+        </p:nvSpPr>
+        <p:spPr>
+          <a:xfrm>
+            <a:off x="914400" y="1554480"/>
+            <a:ext cx="1280160" cy="1280160"/>
+          </a:xfrm>
+          <a:prstGeom prst="rect">
+            <a:avLst/>
+          </a:prstGeom>
+          <a:noFill/>
+        </p:spPr>
+        <p:txBody>
+          <a:bodyPr wrap="square" anchor="t">
+            <a:spAutoFit/>
+          </a:bodyPr>
+          <a:lstStyle/>
+          <a:p>
+            <a:pPr algn="l">
+              <a:lnSpc>
+                <a:spcPct val="100000"/>
+              </a:lnSpc>
+            </a:pPr>
+            <a:r>
+              <a:rPr sz="9000" b="1">
+                <a:solidFill>
+                  <a:srgbClr val="00FF41"/>
+                </a:solidFill>
+                <a:latin typeface="Arial"/>
+              </a:rPr>
+              <a:t>“</a:t>
+            </a:r>
+          </a:p>
+        </p:txBody>
+      </p:sp>
+      <p:sp>
+        <p:nvSpPr>
+          <p:cNvPr id="4" name="TextBox 3"/>
+          <p:cNvSpPr txBox="1"/>
+          <p:nvPr/>
+        </p:nvSpPr>
+        <p:spPr>
+          <a:xfrm>
+            <a:off x="1188720" y="2194560"/>
+            <a:ext cx="9784080" cy="2011680"/>
+          </a:xfrm>
+          <a:prstGeom prst="rect">
+            <a:avLst/>
+          </a:prstGeom>
+          <a:noFill/>
+        </p:spPr>
+        <p:txBody>
+          <a:bodyPr wrap="square" anchor="t">
+            <a:spAutoFit/>
+          </a:bodyPr>
+          <a:lstStyle/>
+          <a:p>
+            <a:pPr algn="l">
+              <a:lnSpc>
+                <a:spcPct val="112000"/>
+              </a:lnSpc>
+            </a:pPr>
+            <a:r>
+              <a:rPr sz="3000" b="1">
+                <a:solidFill>
+                  <a:srgbClr val="F5F7FA"/>
+                </a:solidFill>
+                <a:latin typeface="Arial"/>
+              </a:rPr>
+              <a:t>Persuasion-focused evaluation nearly DOUBLED how often professional designers rejected dark-pattern designs - and shifted their reasoning from business justifications toward user autonomy and well-being.</a:t>
+            </a:r>
+          </a:p>
+        </p:txBody>
+      </p:sp>
+      <p:sp>
+        <p:nvSpPr>
+          <p:cNvPr id="5" name="TextBox 4"/>
+          <p:cNvSpPr txBox="1"/>
+          <p:nvPr/>
+        </p:nvSpPr>
+        <p:spPr>
+          <a:xfrm>
+            <a:off x="1234440" y="4297680"/>
+            <a:ext cx="9601200" cy="457200"/>
+          </a:xfrm>
+          <a:prstGeom prst="rect">
+            <a:avLst/>
+          </a:prstGeom>
+          <a:noFill/>
+        </p:spPr>
+        <p:txBody>
+          <a:bodyPr wrap="square" anchor="t">
+            <a:spAutoFit/>
+          </a:bodyPr>
+          <a:lstStyle/>
+          <a:p>
+            <a:pPr algn="l">
+              <a:lnSpc>
+                <a:spcPct val="100000"/>
+              </a:lnSpc>
+            </a:pPr>
+            <a:r>
+              <a:rPr sz="1600" b="0">
+                <a:solidFill>
+                  <a:srgbClr val="8A94A6"/>
+                </a:solidFill>
+                <a:latin typeface="Arial"/>
+              </a:rPr>
+              <a:t>— Sandhaus, Rhomberg &amp; Nissenbaum, CHIWORK 2026 - a study of 141 UX professionals</a:t>
+            </a:r>
+          </a:p>
+        </p:txBody>
+      </p:sp>
+      <p:sp>
+        <p:nvSpPr>
+          <p:cNvPr id="6" name="Rounded Rectangle 5"/>
           <p:cNvSpPr/>
           <p:nvPr/>
         </p:nvSpPr>
         <p:spPr>
           <a:xfrm>
-            <a:off x="640080" y="932688"/>
-            <a:ext cx="822960" cy="73152"/>
-          </a:xfrm>
-          <a:prstGeom prst="rect">
+            <a:off x="1188720" y="4937760"/>
+            <a:ext cx="9784080" cy="914400"/>
+          </a:xfrm>
+          <a:prstGeom prst="roundRect">
             <a:avLst/>
           </a:prstGeom>
           <a:solidFill>
-            <a:srgbClr val="00FF41"/>
+            <a:srgbClr val="151B26"/>
           </a:solidFill>
-          <a:ln>
-            <a:noFill/>
+          <a:ln w="12700">
+            <a:solidFill>
+              <a:srgbClr val="00FF41"/>
+            </a:solidFill>
           </a:ln>
           <a:effectLst/>
         </p:spPr>
@@ -10903,22 +11158,22 @@
       </p:sp>
       <p:sp>
         <p:nvSpPr>
-          <p:cNvPr id="4" name="TextBox 3"/>
-          <p:cNvSpPr txBox="1"/>
-          <p:nvPr/>
-        </p:nvSpPr>
-        <p:spPr>
-          <a:xfrm>
-            <a:off x="640080" y="1188720"/>
-            <a:ext cx="10972800" cy="914400"/>
-          </a:xfrm>
-          <a:prstGeom prst="rect">
-            <a:avLst/>
-          </a:prstGeom>
-          <a:noFill/>
-        </p:spPr>
-        <p:txBody>
-          <a:bodyPr wrap="square" anchor="t">
+          <p:cNvPr id="7" name="TextBox 6"/>
+          <p:cNvSpPr txBox="1"/>
+          <p:nvPr/>
+        </p:nvSpPr>
+        <p:spPr>
+          <a:xfrm>
+            <a:off x="1463040" y="5074920"/>
+            <a:ext cx="9235440" cy="731520"/>
+          </a:xfrm>
+          <a:prstGeom prst="rect">
+            <a:avLst/>
+          </a:prstGeom>
+          <a:noFill/>
+        </p:spPr>
+        <p:txBody>
+          <a:bodyPr wrap="square" anchor="ctr">
             <a:spAutoFit/>
           </a:bodyPr>
           <a:lstStyle/>
@@ -10929,138 +11184,13 @@
               </a:lnSpc>
             </a:pPr>
             <a:r>
-              <a:rPr sz="3000" b="1">
+              <a:rPr sz="1800" b="0">
                 <a:solidFill>
                   <a:srgbClr val="F5F7FA"/>
                 </a:solidFill>
                 <a:latin typeface="Arial"/>
               </a:rPr>
-              <a:t>One board, the whole loop</a:t>
-            </a:r>
-          </a:p>
-        </p:txBody>
-      </p:sp>
-      <p:sp>
-        <p:nvSpPr>
-          <p:cNvPr id="5" name="Rounded Rectangle 4"/>
-          <p:cNvSpPr/>
-          <p:nvPr/>
-        </p:nvSpPr>
-        <p:spPr>
-          <a:xfrm>
-            <a:off x="2194560" y="2331720"/>
-            <a:ext cx="7772400" cy="3566160"/>
-          </a:xfrm>
-          <a:prstGeom prst="roundRect">
-            <a:avLst/>
-          </a:prstGeom>
-          <a:solidFill>
-            <a:srgbClr val="151B26"/>
-          </a:solidFill>
-          <a:ln w="19050">
-            <a:solidFill>
-              <a:srgbClr val="00FF41"/>
-            </a:solidFill>
-            <a:prstDash val="dash"/>
-          </a:ln>
-          <a:effectLst/>
-        </p:spPr>
-        <p:style>
-          <a:lnRef idx="1">
-            <a:schemeClr val="accent1"/>
-          </a:lnRef>
-          <a:fillRef idx="3">
-            <a:schemeClr val="accent1"/>
-          </a:fillRef>
-          <a:effectRef idx="2">
-            <a:schemeClr val="accent1"/>
-          </a:effectRef>
-          <a:fontRef idx="minor">
-            <a:schemeClr val="lt1"/>
-          </a:fontRef>
-        </p:style>
-        <p:txBody>
-          <a:bodyPr rtlCol="0" anchor="ctr"/>
-          <a:lstStyle/>
-          <a:p>
-            <a:pPr algn="ctr"/>
-          </a:p>
-        </p:txBody>
-      </p:sp>
-      <p:sp>
-        <p:nvSpPr>
-          <p:cNvPr id="6" name="TextBox 5"/>
-          <p:cNvSpPr txBox="1"/>
-          <p:nvPr/>
-        </p:nvSpPr>
-        <p:spPr>
-          <a:xfrm>
-            <a:off x="2194560" y="3383280"/>
-            <a:ext cx="7772400" cy="731520"/>
-          </a:xfrm>
-          <a:prstGeom prst="rect">
-            <a:avLst/>
-          </a:prstGeom>
-          <a:noFill/>
-        </p:spPr>
-        <p:txBody>
-          <a:bodyPr wrap="square" anchor="t">
-            <a:spAutoFit/>
-          </a:bodyPr>
-          <a:lstStyle/>
-          <a:p>
-            <a:pPr algn="ctr">
-              <a:lnSpc>
-                <a:spcPct val="100000"/>
-              </a:lnSpc>
-            </a:pPr>
-            <a:r>
-              <a:rPr sz="2200" b="1">
-                <a:solidFill>
-                  <a:srgbClr val="00FF41"/>
-                </a:solidFill>
-                <a:latin typeface="Courier New"/>
-              </a:rPr>
-              <a:t>[ walk the 'Vibing Values' canvas live ]</a:t>
-            </a:r>
-          </a:p>
-        </p:txBody>
-      </p:sp>
-      <p:sp>
-        <p:nvSpPr>
-          <p:cNvPr id="7" name="TextBox 6"/>
-          <p:cNvSpPr txBox="1"/>
-          <p:nvPr/>
-        </p:nvSpPr>
-        <p:spPr>
-          <a:xfrm>
-            <a:off x="2194560" y="4114800"/>
-            <a:ext cx="7772400" cy="731520"/>
-          </a:xfrm>
-          <a:prstGeom prst="rect">
-            <a:avLst/>
-          </a:prstGeom>
-          <a:noFill/>
-        </p:spPr>
-        <p:txBody>
-          <a:bodyPr wrap="square" anchor="t">
-            <a:spAutoFit/>
-          </a:bodyPr>
-          <a:lstStyle/>
-          <a:p>
-            <a:pPr algn="ctr">
-              <a:lnSpc>
-                <a:spcPct val="100000"/>
-              </a:lnSpc>
-            </a:pPr>
-            <a:r>
-              <a:rPr sz="1400" b="0">
-                <a:solidFill>
-                  <a:srgbClr val="8A94A6"/>
-                </a:solidFill>
-                <a:latin typeface="Arial"/>
-              </a:rPr>
-              <a:t>figma.com/board/.../Vibing-Values - each tab is one move (Discovery / Implementation / Verification). We walk them as connected case studies.</a:t>
+              <a:t>Measuring a value doesn't just describe it - it changes what gets built. That is why verification is not optional.</a:t>
             </a:r>
           </a:p>
         </p:txBody>
@@ -11132,53 +11262,14 @@
       <p:grpSpPr/>
       <p:sp>
         <p:nvSpPr>
-          <p:cNvPr id="2" name="TextBox 1"/>
-          <p:cNvSpPr txBox="1"/>
-          <p:nvPr/>
-        </p:nvSpPr>
-        <p:spPr>
-          <a:xfrm>
-            <a:off x="640080" y="502920"/>
-            <a:ext cx="10058400" cy="365760"/>
-          </a:xfrm>
-          <a:prstGeom prst="rect">
-            <a:avLst/>
-          </a:prstGeom>
-          <a:noFill/>
-        </p:spPr>
-        <p:txBody>
-          <a:bodyPr wrap="square" anchor="t">
-            <a:spAutoFit/>
-          </a:bodyPr>
-          <a:lstStyle/>
-          <a:p>
-            <a:pPr algn="l">
-              <a:lnSpc>
-                <a:spcPct val="100000"/>
-              </a:lnSpc>
-            </a:pPr>
-            <a:r>
-              <a:rPr sz="1300" b="1">
-                <a:solidFill>
-                  <a:srgbClr val="00FF41"/>
-                </a:solidFill>
-                <a:latin typeface="Courier New"/>
-              </a:rPr>
-              <a:t>PITECH PROJECTS</a:t>
-            </a:r>
-          </a:p>
-        </p:txBody>
-      </p:sp>
-      <p:sp>
-        <p:nvSpPr>
-          <p:cNvPr id="3" name="Rectangle 2"/>
+          <p:cNvPr id="2" name="Rectangle 1"/>
           <p:cNvSpPr/>
           <p:nvPr/>
         </p:nvSpPr>
         <p:spPr>
           <a:xfrm>
-            <a:off x="640080" y="932688"/>
-            <a:ext cx="822960" cy="73152"/>
+            <a:off x="0" y="0"/>
+            <a:ext cx="256032" cy="6858000"/>
           </a:xfrm>
           <a:prstGeom prst="rect">
             <a:avLst/>
@@ -11215,14 +11306,53 @@
       </p:sp>
       <p:sp>
         <p:nvSpPr>
+          <p:cNvPr id="3" name="TextBox 2"/>
+          <p:cNvSpPr txBox="1"/>
+          <p:nvPr/>
+        </p:nvSpPr>
+        <p:spPr>
+          <a:xfrm>
+            <a:off x="822960" y="2194560"/>
+            <a:ext cx="10515600" cy="548640"/>
+          </a:xfrm>
+          <a:prstGeom prst="rect">
+            <a:avLst/>
+          </a:prstGeom>
+          <a:noFill/>
+        </p:spPr>
+        <p:txBody>
+          <a:bodyPr wrap="square" anchor="t">
+            <a:spAutoFit/>
+          </a:bodyPr>
+          <a:lstStyle/>
+          <a:p>
+            <a:pPr algn="l">
+              <a:lnSpc>
+                <a:spcPct val="100000"/>
+              </a:lnSpc>
+            </a:pPr>
+            <a:r>
+              <a:rPr sz="1800" b="1">
+                <a:solidFill>
+                  <a:srgbClr val="00FF41"/>
+                </a:solidFill>
+                <a:latin typeface="Courier New"/>
+              </a:rPr>
+              <a:t>PART 5 - IN PRACTICE</a:t>
+            </a:r>
+          </a:p>
+        </p:txBody>
+      </p:sp>
+      <p:sp>
+        <p:nvSpPr>
           <p:cNvPr id="4" name="TextBox 3"/>
           <p:cNvSpPr txBox="1"/>
           <p:nvPr/>
         </p:nvSpPr>
         <p:spPr>
           <a:xfrm>
-            <a:off x="640080" y="1188720"/>
-            <a:ext cx="10972800" cy="914400"/>
+            <a:off x="804672" y="2743200"/>
+            <a:ext cx="10515600" cy="1554480"/>
           </a:xfrm>
           <a:prstGeom prst="rect">
             <a:avLst/>
@@ -11241,177 +11371,13 @@
               </a:lnSpc>
             </a:pPr>
             <a:r>
-              <a:rPr sz="3000" b="1">
+              <a:rPr sz="4800" b="1">
                 <a:solidFill>
                   <a:srgbClr val="F5F7FA"/>
                 </a:solidFill>
                 <a:latin typeface="Arial"/>
               </a:rPr>
-              <a:t>Fellows who ran the whole framework</a:t>
-            </a:r>
-          </a:p>
-        </p:txBody>
-      </p:sp>
-      <p:sp>
-        <p:nvSpPr>
-          <p:cNvPr id="5" name="Rounded Rectangle 4"/>
-          <p:cNvSpPr/>
-          <p:nvPr/>
-        </p:nvSpPr>
-        <p:spPr>
-          <a:xfrm>
-            <a:off x="2194560" y="2331720"/>
-            <a:ext cx="7772400" cy="3566160"/>
-          </a:xfrm>
-          <a:prstGeom prst="roundRect">
-            <a:avLst/>
-          </a:prstGeom>
-          <a:solidFill>
-            <a:srgbClr val="151B26"/>
-          </a:solidFill>
-          <a:ln w="19050">
-            <a:solidFill>
-              <a:srgbClr val="00FF41"/>
-            </a:solidFill>
-            <a:prstDash val="dash"/>
-          </a:ln>
-          <a:effectLst/>
-        </p:spPr>
-        <p:style>
-          <a:lnRef idx="1">
-            <a:schemeClr val="accent1"/>
-          </a:lnRef>
-          <a:fillRef idx="3">
-            <a:schemeClr val="accent1"/>
-          </a:fillRef>
-          <a:effectRef idx="2">
-            <a:schemeClr val="accent1"/>
-          </a:effectRef>
-          <a:fontRef idx="minor">
-            <a:schemeClr val="lt1"/>
-          </a:fontRef>
-        </p:style>
-        <p:txBody>
-          <a:bodyPr rtlCol="0" anchor="ctr"/>
-          <a:lstStyle/>
-          <a:p>
-            <a:pPr algn="ctr"/>
-          </a:p>
-        </p:txBody>
-      </p:sp>
-      <p:sp>
-        <p:nvSpPr>
-          <p:cNvPr id="6" name="TextBox 5"/>
-          <p:cNvSpPr txBox="1"/>
-          <p:nvPr/>
-        </p:nvSpPr>
-        <p:spPr>
-          <a:xfrm>
-            <a:off x="2194560" y="3383280"/>
-            <a:ext cx="7772400" cy="731520"/>
-          </a:xfrm>
-          <a:prstGeom prst="rect">
-            <a:avLst/>
-          </a:prstGeom>
-          <a:noFill/>
-        </p:spPr>
-        <p:txBody>
-          <a:bodyPr wrap="square" anchor="t">
-            <a:spAutoFit/>
-          </a:bodyPr>
-          <a:lstStyle/>
-          <a:p>
-            <a:pPr algn="ctr">
-              <a:lnSpc>
-                <a:spcPct val="100000"/>
-              </a:lnSpc>
-            </a:pPr>
-            <a:r>
-              <a:rPr sz="2200" b="1">
-                <a:solidFill>
-                  <a:srgbClr val="00FF41"/>
-                </a:solidFill>
-                <a:latin typeface="Courier New"/>
-              </a:rPr>
-              <a:t>[ show the PiTech projects + website - add screenshots ]</a:t>
-            </a:r>
-          </a:p>
-        </p:txBody>
-      </p:sp>
-      <p:sp>
-        <p:nvSpPr>
-          <p:cNvPr id="7" name="TextBox 6"/>
-          <p:cNvSpPr txBox="1"/>
-          <p:nvPr/>
-        </p:nvSpPr>
-        <p:spPr>
-          <a:xfrm>
-            <a:off x="2194560" y="4114800"/>
-            <a:ext cx="7772400" cy="731520"/>
-          </a:xfrm>
-          <a:prstGeom prst="rect">
-            <a:avLst/>
-          </a:prstGeom>
-          <a:noFill/>
-        </p:spPr>
-        <p:txBody>
-          <a:bodyPr wrap="square" anchor="t">
-            <a:spAutoFit/>
-          </a:bodyPr>
-          <a:lstStyle/>
-          <a:p>
-            <a:pPr algn="ctr">
-              <a:lnSpc>
-                <a:spcPct val="100000"/>
-              </a:lnSpc>
-            </a:pPr>
-            <a:r>
-              <a:rPr sz="1400" b="0">
-                <a:solidFill>
-                  <a:srgbClr val="8A94A6"/>
-                </a:solidFill>
-                <a:latin typeface="Arial"/>
-              </a:rPr>
-              <a:t>Real value-driven projects, and what worked - and what was hard - when teams used VAP end to end.</a:t>
-            </a:r>
-          </a:p>
-        </p:txBody>
-      </p:sp>
-      <p:sp>
-        <p:nvSpPr>
-          <p:cNvPr id="8" name="TextBox 7"/>
-          <p:cNvSpPr txBox="1"/>
-          <p:nvPr/>
-        </p:nvSpPr>
-        <p:spPr>
-          <a:xfrm>
-            <a:off x="640080" y="6355080"/>
-            <a:ext cx="10972800" cy="365760"/>
-          </a:xfrm>
-          <a:prstGeom prst="rect">
-            <a:avLst/>
-          </a:prstGeom>
-          <a:noFill/>
-        </p:spPr>
-        <p:txBody>
-          <a:bodyPr wrap="square" anchor="t">
-            <a:spAutoFit/>
-          </a:bodyPr>
-          <a:lstStyle/>
-          <a:p>
-            <a:pPr algn="l">
-              <a:lnSpc>
-                <a:spcPct val="100000"/>
-              </a:lnSpc>
-            </a:pPr>
-            <a:r>
-              <a:rPr sz="1000" b="0">
-                <a:solidFill>
-                  <a:srgbClr val="5A6474"/>
-                </a:solidFill>
-                <a:latin typeface="Courier New"/>
-              </a:rPr>
-              <a:t>Good Code, Good Vibes · TECHIE 1121 · Cornell Tech · Summer 2026</a:t>
+              <a:t>The VAP canvas + real projects</a:t>
             </a:r>
           </a:p>
         </p:txBody>
@@ -11663,7 +11629,7 @@
                 </a:solidFill>
                 <a:latin typeface="Courier New"/>
               </a:rPr>
-              <a:t>NOW YOU (TEAM)</a:t>
+              <a:t>THE FIGJAM CANVAS</a:t>
             </a:r>
           </a:p>
         </p:txBody>
@@ -11720,145 +11686,47 @@
         </p:nvSpPr>
         <p:spPr>
           <a:xfrm>
-            <a:off x="640080" y="1325880"/>
-            <a:ext cx="10972800" cy="1828800"/>
-          </a:xfrm>
-          <a:prstGeom prst="rect">
-            <a:avLst/>
-          </a:prstGeom>
-          <a:noFill/>
-        </p:spPr>
-        <p:txBody>
-          <a:bodyPr wrap="square" anchor="t">
-            <a:spAutoFit/>
-          </a:bodyPr>
-          <a:lstStyle/>
-          <a:p>
-            <a:pPr algn="l">
-              <a:lnSpc>
-                <a:spcPct val="105000"/>
-              </a:lnSpc>
-            </a:pPr>
-            <a:r>
-              <a:rPr sz="3800" b="1">
+            <a:off x="640080" y="1188720"/>
+            <a:ext cx="10972800" cy="914400"/>
+          </a:xfrm>
+          <a:prstGeom prst="rect">
+            <a:avLst/>
+          </a:prstGeom>
+          <a:noFill/>
+        </p:spPr>
+        <p:txBody>
+          <a:bodyPr wrap="square" anchor="t">
+            <a:spAutoFit/>
+          </a:bodyPr>
+          <a:lstStyle/>
+          <a:p>
+            <a:pPr algn="l">
+              <a:lnSpc>
+                <a:spcPct val="100000"/>
+              </a:lnSpc>
+            </a:pPr>
+            <a:r>
+              <a:rPr sz="3000" b="1">
                 <a:solidFill>
                   <a:srgbClr val="F5F7FA"/>
                 </a:solidFill>
                 <a:latin typeface="Arial"/>
               </a:rPr>
-              <a:t>Verify the value your Project 2 claims.</a:t>
-            </a:r>
-          </a:p>
-        </p:txBody>
-      </p:sp>
-      <p:sp>
-        <p:nvSpPr>
-          <p:cNvPr id="5" name="TextBox 4"/>
-          <p:cNvSpPr txBox="1"/>
-          <p:nvPr/>
-        </p:nvSpPr>
-        <p:spPr>
-          <a:xfrm>
-            <a:off x="658368" y="3611880"/>
-            <a:ext cx="10972800" cy="1737360"/>
-          </a:xfrm>
-          <a:prstGeom prst="rect">
-            <a:avLst/>
-          </a:prstGeom>
-          <a:noFill/>
-        </p:spPr>
-        <p:txBody>
-          <a:bodyPr wrap="square" anchor="t">
-            <a:spAutoFit/>
-          </a:bodyPr>
-          <a:lstStyle/>
-          <a:p>
-            <a:pPr algn="l">
-              <a:lnSpc>
-                <a:spcPct val="135000"/>
-              </a:lnSpc>
-            </a:pPr>
-            <a:r>
-              <a:rPr sz="1900" b="1">
-                <a:solidFill>
-                  <a:srgbClr val="00FF41"/>
-                </a:solidFill>
-                <a:latin typeface="Arial"/>
-              </a:rPr>
-              <a:t>→  </a:t>
-            </a:r>
-            <a:r>
-              <a:rPr sz="1900" b="0">
-                <a:solidFill>
-                  <a:srgbClr val="8A94A6"/>
-                </a:solidFill>
-                <a:latin typeface="Arial"/>
-              </a:rPr>
-              <a:t>State how you operationalize your value - that definition decides the method.</a:t>
-            </a:r>
-          </a:p>
-          <a:p>
-            <a:pPr algn="l">
-              <a:lnSpc>
-                <a:spcPct val="135000"/>
-              </a:lnSpc>
-            </a:pPr>
-            <a:r>
-              <a:rPr sz="1900" b="1">
-                <a:solidFill>
-                  <a:srgbClr val="00FF41"/>
-                </a:solidFill>
-                <a:latin typeface="Arial"/>
-              </a:rPr>
-              <a:t>→  </a:t>
-            </a:r>
-            <a:r>
-              <a:rPr sz="1900" b="0">
-                <a:solidFill>
-                  <a:srgbClr val="8A94A6"/>
-                </a:solidFill>
-                <a:latin typeface="Arial"/>
-              </a:rPr>
-              <a:t>No time to run tests: RESEARCH how each lens could be verified (behavior especially) + what design interventions have worked.</a:t>
-            </a:r>
-          </a:p>
-          <a:p>
-            <a:pPr algn="l">
-              <a:lnSpc>
-                <a:spcPct val="135000"/>
-              </a:lnSpc>
-            </a:pPr>
-            <a:r>
-              <a:rPr sz="1900" b="1">
-                <a:solidFill>
-                  <a:srgbClr val="00FF41"/>
-                </a:solidFill>
-                <a:latin typeface="Arial"/>
-              </a:rPr>
-              <a:t>→  </a:t>
-            </a:r>
-            <a:r>
-              <a:rPr sz="1900" b="0">
-                <a:solidFill>
-                  <a:srgbClr val="8A94A6"/>
-                </a:solidFill>
-                <a:latin typeface="Arial"/>
-              </a:rPr>
-              <a:t>Does it deliver the value - for whom, and who's left out? Then: what would you change?</a:t>
-            </a:r>
-          </a:p>
-        </p:txBody>
-      </p:sp>
-      <p:sp>
-        <p:nvSpPr>
-          <p:cNvPr id="6" name="Rounded Rectangle 5"/>
+              <a:t>One board, the whole loop</a:t>
+            </a:r>
+          </a:p>
+        </p:txBody>
+      </p:sp>
+      <p:sp>
+        <p:nvSpPr>
+          <p:cNvPr id="5" name="Rounded Rectangle 4"/>
           <p:cNvSpPr/>
           <p:nvPr/>
         </p:nvSpPr>
         <p:spPr>
           <a:xfrm>
-            <a:off x="640080" y="5532120"/>
-            <a:ext cx="10911535" cy="658368"/>
+            <a:off x="2194560" y="2331720"/>
+            <a:ext cx="7772400" cy="3566160"/>
           </a:xfrm>
           <a:prstGeom prst="roundRect">
             <a:avLst/>
@@ -11870,6 +11738,7 @@
             <a:solidFill>
               <a:srgbClr val="00FF41"/>
             </a:solidFill>
+            <a:prstDash val="dash"/>
           </a:ln>
           <a:effectLst/>
         </p:spPr>
@@ -11897,48 +11766,78 @@
       </p:sp>
       <p:sp>
         <p:nvSpPr>
+          <p:cNvPr id="6" name="TextBox 5"/>
+          <p:cNvSpPr txBox="1"/>
+          <p:nvPr/>
+        </p:nvSpPr>
+        <p:spPr>
+          <a:xfrm>
+            <a:off x="2194560" y="3383280"/>
+            <a:ext cx="7772400" cy="731520"/>
+          </a:xfrm>
+          <a:prstGeom prst="rect">
+            <a:avLst/>
+          </a:prstGeom>
+          <a:noFill/>
+        </p:spPr>
+        <p:txBody>
+          <a:bodyPr wrap="square" anchor="t">
+            <a:spAutoFit/>
+          </a:bodyPr>
+          <a:lstStyle/>
+          <a:p>
+            <a:pPr algn="ctr">
+              <a:lnSpc>
+                <a:spcPct val="100000"/>
+              </a:lnSpc>
+            </a:pPr>
+            <a:r>
+              <a:rPr sz="2200" b="1">
+                <a:solidFill>
+                  <a:srgbClr val="00FF41"/>
+                </a:solidFill>
+                <a:latin typeface="Courier New"/>
+              </a:rPr>
+              <a:t>[ walk the 'Vibing Values' canvas live ]</a:t>
+            </a:r>
+          </a:p>
+        </p:txBody>
+      </p:sp>
+      <p:sp>
+        <p:nvSpPr>
           <p:cNvPr id="7" name="TextBox 6"/>
           <p:cNvSpPr txBox="1"/>
           <p:nvPr/>
         </p:nvSpPr>
         <p:spPr>
           <a:xfrm>
-            <a:off x="914400" y="5532120"/>
-            <a:ext cx="10362895" cy="658368"/>
-          </a:xfrm>
-          <a:prstGeom prst="rect">
-            <a:avLst/>
-          </a:prstGeom>
-          <a:noFill/>
-        </p:spPr>
-        <p:txBody>
-          <a:bodyPr wrap="square" anchor="ctr">
-            <a:spAutoFit/>
-          </a:bodyPr>
-          <a:lstStyle/>
-          <a:p>
-            <a:pPr algn="l">
+            <a:off x="2194560" y="4114800"/>
+            <a:ext cx="7772400" cy="731520"/>
+          </a:xfrm>
+          <a:prstGeom prst="rect">
+            <a:avLst/>
+          </a:prstGeom>
+          <a:noFill/>
+        </p:spPr>
+        <p:txBody>
+          <a:bodyPr wrap="square" anchor="t">
+            <a:spAutoFit/>
+          </a:bodyPr>
+          <a:lstStyle/>
+          <a:p>
+            <a:pPr algn="ctr">
               <a:lnSpc>
                 <a:spcPct val="100000"/>
               </a:lnSpc>
             </a:pPr>
             <a:r>
-              <a:rPr sz="1600" b="1">
-                <a:solidFill>
-                  <a:srgbClr val="00FF41"/>
+              <a:rPr sz="1400" b="0">
+                <a:solidFill>
+                  <a:srgbClr val="8A94A6"/>
                 </a:solidFill>
                 <a:latin typeface="Arial"/>
               </a:rPr>
-              <a:t>▶  </a:t>
-            </a:r>
-            <a:r>
-              <a:rPr sz="1600" b="1">
-                <a:solidFill>
-                  <a:srgbClr val="F5F7FA"/>
-                </a:solidFill>
-                <a:latin typeface="Arial"/>
-              </a:rPr>
-              <a:t>A value-centered user RESEARCH deck + a reflection on FigJam - each person owns a slide + a lane - due today</a:t>
+              <a:t>figma.com/board/.../Vibing-Values - each tab is one move (Discovery / Implementation / Verification). We walk them as connected case studies.</a:t>
             </a:r>
           </a:p>
         </p:txBody>
@@ -12042,6 +11941,697 @@
                 </a:solidFill>
                 <a:latin typeface="Courier New"/>
               </a:rPr>
+              <a:t>PITECH PROJECTS</a:t>
+            </a:r>
+          </a:p>
+        </p:txBody>
+      </p:sp>
+      <p:sp>
+        <p:nvSpPr>
+          <p:cNvPr id="3" name="Rectangle 2"/>
+          <p:cNvSpPr/>
+          <p:nvPr/>
+        </p:nvSpPr>
+        <p:spPr>
+          <a:xfrm>
+            <a:off x="640080" y="932688"/>
+            <a:ext cx="822960" cy="73152"/>
+          </a:xfrm>
+          <a:prstGeom prst="rect">
+            <a:avLst/>
+          </a:prstGeom>
+          <a:solidFill>
+            <a:srgbClr val="00FF41"/>
+          </a:solidFill>
+          <a:ln>
+            <a:noFill/>
+          </a:ln>
+          <a:effectLst/>
+        </p:spPr>
+        <p:style>
+          <a:lnRef idx="1">
+            <a:schemeClr val="accent1"/>
+          </a:lnRef>
+          <a:fillRef idx="3">
+            <a:schemeClr val="accent1"/>
+          </a:fillRef>
+          <a:effectRef idx="2">
+            <a:schemeClr val="accent1"/>
+          </a:effectRef>
+          <a:fontRef idx="minor">
+            <a:schemeClr val="lt1"/>
+          </a:fontRef>
+        </p:style>
+        <p:txBody>
+          <a:bodyPr rtlCol="0" anchor="ctr"/>
+          <a:lstStyle/>
+          <a:p>
+            <a:pPr algn="ctr"/>
+          </a:p>
+        </p:txBody>
+      </p:sp>
+      <p:sp>
+        <p:nvSpPr>
+          <p:cNvPr id="4" name="TextBox 3"/>
+          <p:cNvSpPr txBox="1"/>
+          <p:nvPr/>
+        </p:nvSpPr>
+        <p:spPr>
+          <a:xfrm>
+            <a:off x="640080" y="1188720"/>
+            <a:ext cx="10972800" cy="914400"/>
+          </a:xfrm>
+          <a:prstGeom prst="rect">
+            <a:avLst/>
+          </a:prstGeom>
+          <a:noFill/>
+        </p:spPr>
+        <p:txBody>
+          <a:bodyPr wrap="square" anchor="t">
+            <a:spAutoFit/>
+          </a:bodyPr>
+          <a:lstStyle/>
+          <a:p>
+            <a:pPr algn="l">
+              <a:lnSpc>
+                <a:spcPct val="100000"/>
+              </a:lnSpc>
+            </a:pPr>
+            <a:r>
+              <a:rPr sz="3000" b="1">
+                <a:solidFill>
+                  <a:srgbClr val="F5F7FA"/>
+                </a:solidFill>
+                <a:latin typeface="Arial"/>
+              </a:rPr>
+              <a:t>Fellows who ran the whole framework</a:t>
+            </a:r>
+          </a:p>
+        </p:txBody>
+      </p:sp>
+      <p:sp>
+        <p:nvSpPr>
+          <p:cNvPr id="5" name="Rounded Rectangle 4"/>
+          <p:cNvSpPr/>
+          <p:nvPr/>
+        </p:nvSpPr>
+        <p:spPr>
+          <a:xfrm>
+            <a:off x="2194560" y="2331720"/>
+            <a:ext cx="7772400" cy="3566160"/>
+          </a:xfrm>
+          <a:prstGeom prst="roundRect">
+            <a:avLst/>
+          </a:prstGeom>
+          <a:solidFill>
+            <a:srgbClr val="151B26"/>
+          </a:solidFill>
+          <a:ln w="19050">
+            <a:solidFill>
+              <a:srgbClr val="00FF41"/>
+            </a:solidFill>
+            <a:prstDash val="dash"/>
+          </a:ln>
+          <a:effectLst/>
+        </p:spPr>
+        <p:style>
+          <a:lnRef idx="1">
+            <a:schemeClr val="accent1"/>
+          </a:lnRef>
+          <a:fillRef idx="3">
+            <a:schemeClr val="accent1"/>
+          </a:fillRef>
+          <a:effectRef idx="2">
+            <a:schemeClr val="accent1"/>
+          </a:effectRef>
+          <a:fontRef idx="minor">
+            <a:schemeClr val="lt1"/>
+          </a:fontRef>
+        </p:style>
+        <p:txBody>
+          <a:bodyPr rtlCol="0" anchor="ctr"/>
+          <a:lstStyle/>
+          <a:p>
+            <a:pPr algn="ctr"/>
+          </a:p>
+        </p:txBody>
+      </p:sp>
+      <p:sp>
+        <p:nvSpPr>
+          <p:cNvPr id="6" name="TextBox 5"/>
+          <p:cNvSpPr txBox="1"/>
+          <p:nvPr/>
+        </p:nvSpPr>
+        <p:spPr>
+          <a:xfrm>
+            <a:off x="2194560" y="3383280"/>
+            <a:ext cx="7772400" cy="731520"/>
+          </a:xfrm>
+          <a:prstGeom prst="rect">
+            <a:avLst/>
+          </a:prstGeom>
+          <a:noFill/>
+        </p:spPr>
+        <p:txBody>
+          <a:bodyPr wrap="square" anchor="t">
+            <a:spAutoFit/>
+          </a:bodyPr>
+          <a:lstStyle/>
+          <a:p>
+            <a:pPr algn="ctr">
+              <a:lnSpc>
+                <a:spcPct val="100000"/>
+              </a:lnSpc>
+            </a:pPr>
+            <a:r>
+              <a:rPr sz="2200" b="1">
+                <a:solidFill>
+                  <a:srgbClr val="00FF41"/>
+                </a:solidFill>
+                <a:latin typeface="Courier New"/>
+              </a:rPr>
+              <a:t>[ show the PiTech projects + website - add screenshots ]</a:t>
+            </a:r>
+          </a:p>
+        </p:txBody>
+      </p:sp>
+      <p:sp>
+        <p:nvSpPr>
+          <p:cNvPr id="7" name="TextBox 6"/>
+          <p:cNvSpPr txBox="1"/>
+          <p:nvPr/>
+        </p:nvSpPr>
+        <p:spPr>
+          <a:xfrm>
+            <a:off x="2194560" y="4114800"/>
+            <a:ext cx="7772400" cy="731520"/>
+          </a:xfrm>
+          <a:prstGeom prst="rect">
+            <a:avLst/>
+          </a:prstGeom>
+          <a:noFill/>
+        </p:spPr>
+        <p:txBody>
+          <a:bodyPr wrap="square" anchor="t">
+            <a:spAutoFit/>
+          </a:bodyPr>
+          <a:lstStyle/>
+          <a:p>
+            <a:pPr algn="ctr">
+              <a:lnSpc>
+                <a:spcPct val="100000"/>
+              </a:lnSpc>
+            </a:pPr>
+            <a:r>
+              <a:rPr sz="1400" b="0">
+                <a:solidFill>
+                  <a:srgbClr val="8A94A6"/>
+                </a:solidFill>
+                <a:latin typeface="Arial"/>
+              </a:rPr>
+              <a:t>Real value-driven projects, and what worked - and what was hard - when teams used VAP end to end.</a:t>
+            </a:r>
+          </a:p>
+        </p:txBody>
+      </p:sp>
+      <p:sp>
+        <p:nvSpPr>
+          <p:cNvPr id="8" name="TextBox 7"/>
+          <p:cNvSpPr txBox="1"/>
+          <p:nvPr/>
+        </p:nvSpPr>
+        <p:spPr>
+          <a:xfrm>
+            <a:off x="640080" y="6355080"/>
+            <a:ext cx="10972800" cy="365760"/>
+          </a:xfrm>
+          <a:prstGeom prst="rect">
+            <a:avLst/>
+          </a:prstGeom>
+          <a:noFill/>
+        </p:spPr>
+        <p:txBody>
+          <a:bodyPr wrap="square" anchor="t">
+            <a:spAutoFit/>
+          </a:bodyPr>
+          <a:lstStyle/>
+          <a:p>
+            <a:pPr algn="l">
+              <a:lnSpc>
+                <a:spcPct val="100000"/>
+              </a:lnSpc>
+            </a:pPr>
+            <a:r>
+              <a:rPr sz="1000" b="0">
+                <a:solidFill>
+                  <a:srgbClr val="5A6474"/>
+                </a:solidFill>
+                <a:latin typeface="Courier New"/>
+              </a:rPr>
+              <a:t>Good Code, Good Vibes · TECHIE 1121 · Cornell Tech · Summer 2026</a:t>
+            </a:r>
+          </a:p>
+        </p:txBody>
+      </p:sp>
+    </p:spTree>
+  </p:cSld>
+  <p:clrMapOvr>
+    <a:masterClrMapping/>
+  </p:clrMapOvr>
+</p:sld>
+</file>
+
+<file path=ppt/slides/slide32.xml><?xml version="1.0" encoding="utf-8"?>
+<p:sld xmlns:a="http://schemas.openxmlformats.org/drawingml/2006/main" xmlns:p="http://schemas.openxmlformats.org/presentationml/2006/main" xmlns:r="http://schemas.openxmlformats.org/officeDocument/2006/relationships">
+  <p:cSld>
+    <p:bg>
+      <p:bgPr>
+        <a:solidFill>
+          <a:srgbClr val="0B0E14"/>
+        </a:solidFill>
+        <a:effectLst/>
+      </p:bgPr>
+    </p:bg>
+    <p:spTree>
+      <p:nvGrpSpPr>
+        <p:cNvPr id="1" name=""/>
+        <p:cNvGrpSpPr/>
+        <p:nvPr/>
+      </p:nvGrpSpPr>
+      <p:grpSpPr/>
+      <p:sp>
+        <p:nvSpPr>
+          <p:cNvPr id="2" name="TextBox 1"/>
+          <p:cNvSpPr txBox="1"/>
+          <p:nvPr/>
+        </p:nvSpPr>
+        <p:spPr>
+          <a:xfrm>
+            <a:off x="640080" y="502920"/>
+            <a:ext cx="10058400" cy="365760"/>
+          </a:xfrm>
+          <a:prstGeom prst="rect">
+            <a:avLst/>
+          </a:prstGeom>
+          <a:noFill/>
+        </p:spPr>
+        <p:txBody>
+          <a:bodyPr wrap="square" anchor="t">
+            <a:spAutoFit/>
+          </a:bodyPr>
+          <a:lstStyle/>
+          <a:p>
+            <a:pPr algn="l">
+              <a:lnSpc>
+                <a:spcPct val="100000"/>
+              </a:lnSpc>
+            </a:pPr>
+            <a:r>
+              <a:rPr sz="1300" b="1">
+                <a:solidFill>
+                  <a:srgbClr val="00FF41"/>
+                </a:solidFill>
+                <a:latin typeface="Courier New"/>
+              </a:rPr>
+              <a:t>NOW YOU (TEAM)</a:t>
+            </a:r>
+          </a:p>
+        </p:txBody>
+      </p:sp>
+      <p:sp>
+        <p:nvSpPr>
+          <p:cNvPr id="3" name="Rectangle 2"/>
+          <p:cNvSpPr/>
+          <p:nvPr/>
+        </p:nvSpPr>
+        <p:spPr>
+          <a:xfrm>
+            <a:off x="640080" y="932688"/>
+            <a:ext cx="822960" cy="73152"/>
+          </a:xfrm>
+          <a:prstGeom prst="rect">
+            <a:avLst/>
+          </a:prstGeom>
+          <a:solidFill>
+            <a:srgbClr val="00FF41"/>
+          </a:solidFill>
+          <a:ln>
+            <a:noFill/>
+          </a:ln>
+          <a:effectLst/>
+        </p:spPr>
+        <p:style>
+          <a:lnRef idx="1">
+            <a:schemeClr val="accent1"/>
+          </a:lnRef>
+          <a:fillRef idx="3">
+            <a:schemeClr val="accent1"/>
+          </a:fillRef>
+          <a:effectRef idx="2">
+            <a:schemeClr val="accent1"/>
+          </a:effectRef>
+          <a:fontRef idx="minor">
+            <a:schemeClr val="lt1"/>
+          </a:fontRef>
+        </p:style>
+        <p:txBody>
+          <a:bodyPr rtlCol="0" anchor="ctr"/>
+          <a:lstStyle/>
+          <a:p>
+            <a:pPr algn="ctr"/>
+          </a:p>
+        </p:txBody>
+      </p:sp>
+      <p:sp>
+        <p:nvSpPr>
+          <p:cNvPr id="4" name="TextBox 3"/>
+          <p:cNvSpPr txBox="1"/>
+          <p:nvPr/>
+        </p:nvSpPr>
+        <p:spPr>
+          <a:xfrm>
+            <a:off x="640080" y="1325880"/>
+            <a:ext cx="10972800" cy="1828800"/>
+          </a:xfrm>
+          <a:prstGeom prst="rect">
+            <a:avLst/>
+          </a:prstGeom>
+          <a:noFill/>
+        </p:spPr>
+        <p:txBody>
+          <a:bodyPr wrap="square" anchor="t">
+            <a:spAutoFit/>
+          </a:bodyPr>
+          <a:lstStyle/>
+          <a:p>
+            <a:pPr algn="l">
+              <a:lnSpc>
+                <a:spcPct val="105000"/>
+              </a:lnSpc>
+            </a:pPr>
+            <a:r>
+              <a:rPr sz="3800" b="1">
+                <a:solidFill>
+                  <a:srgbClr val="F5F7FA"/>
+                </a:solidFill>
+                <a:latin typeface="Arial"/>
+              </a:rPr>
+              <a:t>Verify the value your Project 2 claims.</a:t>
+            </a:r>
+          </a:p>
+        </p:txBody>
+      </p:sp>
+      <p:sp>
+        <p:nvSpPr>
+          <p:cNvPr id="5" name="TextBox 4"/>
+          <p:cNvSpPr txBox="1"/>
+          <p:nvPr/>
+        </p:nvSpPr>
+        <p:spPr>
+          <a:xfrm>
+            <a:off x="658368" y="3611880"/>
+            <a:ext cx="10972800" cy="1737360"/>
+          </a:xfrm>
+          <a:prstGeom prst="rect">
+            <a:avLst/>
+          </a:prstGeom>
+          <a:noFill/>
+        </p:spPr>
+        <p:txBody>
+          <a:bodyPr wrap="square" anchor="t">
+            <a:spAutoFit/>
+          </a:bodyPr>
+          <a:lstStyle/>
+          <a:p>
+            <a:pPr algn="l">
+              <a:lnSpc>
+                <a:spcPct val="135000"/>
+              </a:lnSpc>
+            </a:pPr>
+            <a:r>
+              <a:rPr sz="1900" b="1">
+                <a:solidFill>
+                  <a:srgbClr val="00FF41"/>
+                </a:solidFill>
+                <a:latin typeface="Arial"/>
+              </a:rPr>
+              <a:t>→  </a:t>
+            </a:r>
+            <a:r>
+              <a:rPr sz="1900" b="0">
+                <a:solidFill>
+                  <a:srgbClr val="8A94A6"/>
+                </a:solidFill>
+                <a:latin typeface="Arial"/>
+              </a:rPr>
+              <a:t>State how you operationalize your value - that definition decides the method.</a:t>
+            </a:r>
+          </a:p>
+          <a:p>
+            <a:pPr algn="l">
+              <a:lnSpc>
+                <a:spcPct val="135000"/>
+              </a:lnSpc>
+            </a:pPr>
+            <a:r>
+              <a:rPr sz="1900" b="1">
+                <a:solidFill>
+                  <a:srgbClr val="00FF41"/>
+                </a:solidFill>
+                <a:latin typeface="Arial"/>
+              </a:rPr>
+              <a:t>→  </a:t>
+            </a:r>
+            <a:r>
+              <a:rPr sz="1900" b="0">
+                <a:solidFill>
+                  <a:srgbClr val="8A94A6"/>
+                </a:solidFill>
+                <a:latin typeface="Arial"/>
+              </a:rPr>
+              <a:t>No time to run tests: RESEARCH how each lens could be verified (behavior especially) + what design interventions have worked.</a:t>
+            </a:r>
+          </a:p>
+          <a:p>
+            <a:pPr algn="l">
+              <a:lnSpc>
+                <a:spcPct val="135000"/>
+              </a:lnSpc>
+            </a:pPr>
+            <a:r>
+              <a:rPr sz="1900" b="1">
+                <a:solidFill>
+                  <a:srgbClr val="00FF41"/>
+                </a:solidFill>
+                <a:latin typeface="Arial"/>
+              </a:rPr>
+              <a:t>→  </a:t>
+            </a:r>
+            <a:r>
+              <a:rPr sz="1900" b="0">
+                <a:solidFill>
+                  <a:srgbClr val="8A94A6"/>
+                </a:solidFill>
+                <a:latin typeface="Arial"/>
+              </a:rPr>
+              <a:t>Does it deliver the value - for whom, and who's left out? Then: what would you change?</a:t>
+            </a:r>
+          </a:p>
+        </p:txBody>
+      </p:sp>
+      <p:sp>
+        <p:nvSpPr>
+          <p:cNvPr id="6" name="Rounded Rectangle 5"/>
+          <p:cNvSpPr/>
+          <p:nvPr/>
+        </p:nvSpPr>
+        <p:spPr>
+          <a:xfrm>
+            <a:off x="640080" y="5532120"/>
+            <a:ext cx="10911535" cy="658368"/>
+          </a:xfrm>
+          <a:prstGeom prst="roundRect">
+            <a:avLst/>
+          </a:prstGeom>
+          <a:solidFill>
+            <a:srgbClr val="151B26"/>
+          </a:solidFill>
+          <a:ln w="19050">
+            <a:solidFill>
+              <a:srgbClr val="00FF41"/>
+            </a:solidFill>
+          </a:ln>
+          <a:effectLst/>
+        </p:spPr>
+        <p:style>
+          <a:lnRef idx="1">
+            <a:schemeClr val="accent1"/>
+          </a:lnRef>
+          <a:fillRef idx="3">
+            <a:schemeClr val="accent1"/>
+          </a:fillRef>
+          <a:effectRef idx="2">
+            <a:schemeClr val="accent1"/>
+          </a:effectRef>
+          <a:fontRef idx="minor">
+            <a:schemeClr val="lt1"/>
+          </a:fontRef>
+        </p:style>
+        <p:txBody>
+          <a:bodyPr rtlCol="0" anchor="ctr"/>
+          <a:lstStyle/>
+          <a:p>
+            <a:pPr algn="ctr"/>
+          </a:p>
+        </p:txBody>
+      </p:sp>
+      <p:sp>
+        <p:nvSpPr>
+          <p:cNvPr id="7" name="TextBox 6"/>
+          <p:cNvSpPr txBox="1"/>
+          <p:nvPr/>
+        </p:nvSpPr>
+        <p:spPr>
+          <a:xfrm>
+            <a:off x="914400" y="5532120"/>
+            <a:ext cx="10362895" cy="658368"/>
+          </a:xfrm>
+          <a:prstGeom prst="rect">
+            <a:avLst/>
+          </a:prstGeom>
+          <a:noFill/>
+        </p:spPr>
+        <p:txBody>
+          <a:bodyPr wrap="square" anchor="ctr">
+            <a:spAutoFit/>
+          </a:bodyPr>
+          <a:lstStyle/>
+          <a:p>
+            <a:pPr algn="l">
+              <a:lnSpc>
+                <a:spcPct val="100000"/>
+              </a:lnSpc>
+            </a:pPr>
+            <a:r>
+              <a:rPr sz="1600" b="1">
+                <a:solidFill>
+                  <a:srgbClr val="00FF41"/>
+                </a:solidFill>
+                <a:latin typeface="Arial"/>
+              </a:rPr>
+              <a:t>▶  </a:t>
+            </a:r>
+            <a:r>
+              <a:rPr sz="1600" b="1">
+                <a:solidFill>
+                  <a:srgbClr val="F5F7FA"/>
+                </a:solidFill>
+                <a:latin typeface="Arial"/>
+              </a:rPr>
+              <a:t>A value-centered user RESEARCH deck + a reflection on FigJam - each person owns a slide + a lane - due today</a:t>
+            </a:r>
+          </a:p>
+        </p:txBody>
+      </p:sp>
+      <p:sp>
+        <p:nvSpPr>
+          <p:cNvPr id="8" name="TextBox 7"/>
+          <p:cNvSpPr txBox="1"/>
+          <p:nvPr/>
+        </p:nvSpPr>
+        <p:spPr>
+          <a:xfrm>
+            <a:off x="640080" y="6355080"/>
+            <a:ext cx="10972800" cy="365760"/>
+          </a:xfrm>
+          <a:prstGeom prst="rect">
+            <a:avLst/>
+          </a:prstGeom>
+          <a:noFill/>
+        </p:spPr>
+        <p:txBody>
+          <a:bodyPr wrap="square" anchor="t">
+            <a:spAutoFit/>
+          </a:bodyPr>
+          <a:lstStyle/>
+          <a:p>
+            <a:pPr algn="l">
+              <a:lnSpc>
+                <a:spcPct val="100000"/>
+              </a:lnSpc>
+            </a:pPr>
+            <a:r>
+              <a:rPr sz="1000" b="0">
+                <a:solidFill>
+                  <a:srgbClr val="5A6474"/>
+                </a:solidFill>
+                <a:latin typeface="Courier New"/>
+              </a:rPr>
+              <a:t>Good Code, Good Vibes · TECHIE 1121 · Cornell Tech · Summer 2026</a:t>
+            </a:r>
+          </a:p>
+        </p:txBody>
+      </p:sp>
+    </p:spTree>
+  </p:cSld>
+  <p:clrMapOvr>
+    <a:masterClrMapping/>
+  </p:clrMapOvr>
+</p:sld>
+</file>
+
+<file path=ppt/slides/slide33.xml><?xml version="1.0" encoding="utf-8"?>
+<p:sld xmlns:a="http://schemas.openxmlformats.org/drawingml/2006/main" xmlns:p="http://schemas.openxmlformats.org/presentationml/2006/main" xmlns:r="http://schemas.openxmlformats.org/officeDocument/2006/relationships">
+  <p:cSld>
+    <p:bg>
+      <p:bgPr>
+        <a:solidFill>
+          <a:srgbClr val="0B0E14"/>
+        </a:solidFill>
+        <a:effectLst/>
+      </p:bgPr>
+    </p:bg>
+    <p:spTree>
+      <p:nvGrpSpPr>
+        <p:cNvPr id="1" name=""/>
+        <p:cNvGrpSpPr/>
+        <p:nvPr/>
+      </p:nvGrpSpPr>
+      <p:grpSpPr/>
+      <p:sp>
+        <p:nvSpPr>
+          <p:cNvPr id="2" name="TextBox 1"/>
+          <p:cNvSpPr txBox="1"/>
+          <p:nvPr/>
+        </p:nvSpPr>
+        <p:spPr>
+          <a:xfrm>
+            <a:off x="640080" y="502920"/>
+            <a:ext cx="10058400" cy="365760"/>
+          </a:xfrm>
+          <a:prstGeom prst="rect">
+            <a:avLst/>
+          </a:prstGeom>
+          <a:noFill/>
+        </p:spPr>
+        <p:txBody>
+          <a:bodyPr wrap="square" anchor="t">
+            <a:spAutoFit/>
+          </a:bodyPr>
+          <a:lstStyle/>
+          <a:p>
+            <a:pPr algn="l">
+              <a:lnSpc>
+                <a:spcPct val="100000"/>
+              </a:lnSpc>
+            </a:pPr>
+            <a:r>
+              <a:rPr sz="1300" b="1">
+                <a:solidFill>
+                  <a:srgbClr val="00FF41"/>
+                </a:solidFill>
+                <a:latin typeface="Courier New"/>
+              </a:rPr>
               <a:t>SOURCES</a:t>
             </a:r>
           </a:p>
@@ -14055,7 +14645,7 @@
                 </a:solidFill>
                 <a:latin typeface="Courier New"/>
               </a:rPr>
-              <a:t>THE HEURISTIC</a:t>
+              <a:t>QUIET READING</a:t>
             </a:r>
           </a:p>
         </p:txBody>
@@ -14094,7 +14684,7 @@
                 </a:solidFill>
                 <a:latin typeface="Arial"/>
               </a:rPr>
-              <a:t>Discovery -&gt; Implementation -&gt; Verification</a:t>
+              <a:t>20 minutes - read it yourself</a:t>
             </a:r>
           </a:p>
         </p:txBody>
@@ -14133,7 +14723,7 @@
                 </a:solidFill>
                 <a:latin typeface="Arial"/>
               </a:rPr>
-              <a:t>One loop, three moves - and it is cyclical</a:t>
+              <a:t>Phones away. No talking. This is protected, individual reading time.</a:t>
             </a:r>
           </a:p>
         </p:txBody>

--- a/slides/Week3-Tue-User-Testing-II.pptx
+++ b/slides/Week3-Tue-User-Testing-II.pptx
@@ -536,7 +536,7 @@
           <a:lstStyle/>
           <a:p>
             <a:r>
-              <a:t>Two 'Sustainability' teams - check the second word (Trust vs Transparency). Full join table + links on the Final Project page: vibe-coding-ethics.tech.cornell.edu/projects/final.html</a:t>
+              <a:t>Two 'Sustainability' teams - check the second word (Trust vs Transparency). Accept + join: classroom.github.com/a/VTWqWkXg. Final Project page (per-team showcase): cornell-tech-vibe-coding-summer-2026.github.io/cornell-tech-vibe-coding-summer-2026-final-project-template/</a:t>
             </a:r>
           </a:p>
         </p:txBody>

--- a/slides/Week3-Tue-User-Testing-II.pptx
+++ b/slides/Week3-Tue-User-Testing-II.pptx
@@ -40,6 +40,7 @@
     <p:sldId id="288" r:id="rId40"/>
     <p:sldId id="289" r:id="rId41"/>
     <p:sldId id="290" r:id="rId42"/>
+    <p:sldId id="291" r:id="rId43"/>
   </p:sldIdLst>
   <p:sldSz cx="12191695" cy="6858000" type="screen4x3"/>
   <p:notesSz cx="6858000" cy="9144000"/>
@@ -606,7 +607,7 @@
           <a:lstStyle/>
           <a:p>
             <a:r>
-              <a:t>Protected quiet reading time - keep it silent and individual. Set the exact chapter before class (VAP book is on the Drive). This grounds the operationalize + verify work that follows.</a:t>
+              <a:t>Discovery I heuristic (VAP, Engelmann &amp; Nissenbaum). The upshot is a LIST OF VALUES - including 'collateral' values you didn't set out to touch.</a:t>
             </a:r>
           </a:p>
         </p:txBody>
@@ -676,7 +677,7 @@
           <a:lstStyle/>
           <a:p>
             <a:r>
-              <a:t>Discovery I heuristic (VAP, Engelmann &amp; Nissenbaum). The upshot is a LIST OF VALUES - including 'collateral' values you didn't set out to touch.</a:t>
+              <a:t>Hand back to the activity. Language note: no 'verdict' - just 'does it deliver the value, and for whom?'</a:t>
             </a:r>
           </a:p>
         </p:txBody>
@@ -746,7 +747,7 @@
           <a:lstStyle/>
           <a:p>
             <a:r>
-              <a:t>Hand back to the activity. Language note: no 'verdict' - just 'does it deliver the value, and for whom?'</a:t>
+              <a:t>Protected, individual reading of the paper each person found via AI academic search (Claude / ChatGPT / Elicit / Semantic Scholar / Google Scholar Labs). This is the discovery reading the timer is built around - keep it silent.</a:t>
             </a:r>
           </a:p>
         </p:txBody>
@@ -4391,7 +4392,7 @@
                 </a:solidFill>
                 <a:latin typeface="Courier New"/>
               </a:rPr>
-              <a:t>QUIET READING</a:t>
+              <a:t>THE HEURISTIC</a:t>
             </a:r>
           </a:p>
         </p:txBody>
@@ -4430,7 +4431,7 @@
                 </a:solidFill>
                 <a:latin typeface="Arial"/>
               </a:rPr>
-              <a:t>20 minutes - read it yourself</a:t>
+              <a:t>Discovery -&gt; Implementation -&gt; Verification</a:t>
             </a:r>
           </a:p>
         </p:txBody>
@@ -4469,7 +4470,7 @@
                 </a:solidFill>
                 <a:latin typeface="Arial"/>
               </a:rPr>
-              <a:t>Phones away. No talking. This is protected, individual reading time.</a:t>
+              <a:t>One loop, three moves - and it is cyclical</a:t>
             </a:r>
           </a:p>
         </p:txBody>
@@ -4534,7 +4535,7 @@
                 </a:solidFill>
                 <a:latin typeface="Courier New"/>
               </a:rPr>
-              <a:t>WHILE YOU READ</a:t>
+              <a:t>BREAK</a:t>
             </a:r>
           </a:p>
         </p:txBody>
@@ -4617,7 +4618,7 @@
                 </a:solidFill>
                 <a:latin typeface="Arial"/>
               </a:rPr>
-              <a:t>Read it - then we build the framework on top of it</a:t>
+              <a:t>~10 minutes</a:t>
             </a:r>
           </a:p>
         </p:txBody>
@@ -4650,118 +4651,13 @@
               </a:lnSpc>
             </a:pPr>
             <a:r>
-              <a:rPr sz="2200" b="1">
+              <a:rPr sz="2200" b="0">
                 <a:solidFill>
                   <a:srgbClr val="F5F7FA"/>
                 </a:solidFill>
                 <a:latin typeface="Arial"/>
               </a:rPr>
-              <a:t>Read: </a:t>
-            </a:r>
-            <a:r>
-              <a:rPr sz="2200" b="1">
-                <a:solidFill>
-                  <a:srgbClr val="00FF41"/>
-                </a:solidFill>
-                <a:latin typeface="Arial"/>
-              </a:rPr>
-              <a:t>[ Values at Play - the chapter your instructor assigns ]</a:t>
-            </a:r>
-          </a:p>
-          <a:p>
-            <a:pPr algn="l">
-              <a:lnSpc>
-                <a:spcPct val="112000"/>
-              </a:lnSpc>
-            </a:pPr>
-            <a:r>
-              <a:rPr sz="2000" b="0">
-                <a:solidFill>
-                  <a:srgbClr val="F5F7FA"/>
-                </a:solidFill>
-                <a:latin typeface="Arial"/>
-              </a:rPr>
-              <a:t/>
-            </a:r>
-          </a:p>
-          <a:p>
-            <a:pPr algn="l">
-              <a:lnSpc>
-                <a:spcPct val="112000"/>
-              </a:lnSpc>
-            </a:pPr>
-            <a:r>
-              <a:rPr sz="2000" b="0">
-                <a:solidFill>
-                  <a:srgbClr val="F5F7FA"/>
-                </a:solidFill>
-                <a:latin typeface="Arial"/>
-              </a:rPr>
-              <a:t>Mark TWO things in the margin as you go:</a:t>
-            </a:r>
-          </a:p>
-          <a:p>
-            <a:pPr algn="l">
-              <a:lnSpc>
-                <a:spcPct val="112000"/>
-              </a:lnSpc>
-            </a:pPr>
-            <a:r>
-              <a:rPr sz="1800" b="0">
-                <a:solidFill>
-                  <a:srgbClr val="8A94A6"/>
-                </a:solidFill>
-                <a:latin typeface="Arial"/>
-              </a:rPr>
-              <a:t>1.  where the author turns an abstract value into something concrete (operationalizes it)</a:t>
-            </a:r>
-          </a:p>
-          <a:p>
-            <a:pPr algn="l">
-              <a:lnSpc>
-                <a:spcPct val="112000"/>
-              </a:lnSpc>
-            </a:pPr>
-            <a:r>
-              <a:rPr sz="1800" b="0">
-                <a:solidFill>
-                  <a:srgbClr val="8A94A6"/>
-                </a:solidFill>
-                <a:latin typeface="Arial"/>
-              </a:rPr>
-              <a:t>2.  one line that fits YOUR Project 2 value - or that you disagree with</a:t>
-            </a:r>
-          </a:p>
-          <a:p>
-            <a:pPr algn="l">
-              <a:lnSpc>
-                <a:spcPct val="112000"/>
-              </a:lnSpc>
-            </a:pPr>
-            <a:r>
-              <a:rPr sz="2000" b="0">
-                <a:solidFill>
-                  <a:srgbClr val="F5F7FA"/>
-                </a:solidFill>
-                <a:latin typeface="Arial"/>
-              </a:rPr>
-              <a:t/>
-            </a:r>
-          </a:p>
-          <a:p>
-            <a:pPr algn="l">
-              <a:lnSpc>
-                <a:spcPct val="112000"/>
-              </a:lnSpc>
-            </a:pPr>
-            <a:r>
-              <a:rPr sz="1700" b="0">
-                <a:solidFill>
-                  <a:srgbClr val="5A6474"/>
-                </a:solidFill>
-                <a:latin typeface="Arial"/>
-              </a:rPr>
-              <a:t>Then 3 minutes: share one margin note with the person next to you.</a:t>
+              <a:t>Stretch, water. We pick up with Discovery: what values are even in play?</a:t>
             </a:r>
           </a:p>
         </p:txBody>
@@ -4909,7 +4805,7 @@
                 </a:solidFill>
                 <a:latin typeface="Courier New"/>
               </a:rPr>
-              <a:t>THE HEURISTIC</a:t>
+              <a:t>PART 2 - DISCOVERY</a:t>
             </a:r>
           </a:p>
         </p:txBody>
@@ -4948,46 +4844,7 @@
                 </a:solidFill>
                 <a:latin typeface="Arial"/>
               </a:rPr>
-              <a:t>Discovery -&gt; Implementation -&gt; Verification</a:t>
-            </a:r>
-          </a:p>
-        </p:txBody>
-      </p:sp>
-      <p:sp>
-        <p:nvSpPr>
-          <p:cNvPr id="5" name="TextBox 4"/>
-          <p:cNvSpPr txBox="1"/>
-          <p:nvPr/>
-        </p:nvSpPr>
-        <p:spPr>
-          <a:xfrm>
-            <a:off x="841248" y="4297680"/>
-            <a:ext cx="10058400" cy="640080"/>
-          </a:xfrm>
-          <a:prstGeom prst="rect">
-            <a:avLst/>
-          </a:prstGeom>
-          <a:noFill/>
-        </p:spPr>
-        <p:txBody>
-          <a:bodyPr wrap="square" anchor="t">
-            <a:spAutoFit/>
-          </a:bodyPr>
-          <a:lstStyle/>
-          <a:p>
-            <a:pPr algn="l">
-              <a:lnSpc>
-                <a:spcPct val="100000"/>
-              </a:lnSpc>
-            </a:pPr>
-            <a:r>
-              <a:rPr sz="1900" b="0">
-                <a:solidFill>
-                  <a:srgbClr val="8A94A6"/>
-                </a:solidFill>
-                <a:latin typeface="Arial"/>
-              </a:rPr>
-              <a:t>One loop, three moves - and it is cyclical</a:t>
+              <a:t>What values? And what do they actually mean?</a:t>
             </a:r>
           </a:p>
         </p:txBody>
@@ -5052,7 +4909,7 @@
                 </a:solidFill>
                 <a:latin typeface="Courier New"/>
               </a:rPr>
-              <a:t>BREAK</a:t>
+              <a:t>DISCOVERY I - CONSIDER THE SOURCES</a:t>
             </a:r>
           </a:p>
         </p:txBody>
@@ -5110,7 +4967,7 @@
         <p:spPr>
           <a:xfrm>
             <a:off x="640080" y="1188720"/>
-            <a:ext cx="10972800" cy="1097280"/>
+            <a:ext cx="10972800" cy="914400"/>
           </a:xfrm>
           <a:prstGeom prst="rect">
             <a:avLst/>
@@ -5129,59 +4986,635 @@
               </a:lnSpc>
             </a:pPr>
             <a:r>
-              <a:rPr sz="3400" b="1">
+              <a:rPr sz="3200" b="1">
                 <a:solidFill>
                   <a:srgbClr val="F5F7FA"/>
                 </a:solidFill>
                 <a:latin typeface="Arial"/>
               </a:rPr>
-              <a:t>~10 minutes</a:t>
-            </a:r>
-          </a:p>
-        </p:txBody>
-      </p:sp>
-      <p:sp>
-        <p:nvSpPr>
-          <p:cNvPr id="5" name="TextBox 4"/>
-          <p:cNvSpPr txBox="1"/>
-          <p:nvPr/>
-        </p:nvSpPr>
-        <p:spPr>
-          <a:xfrm>
-            <a:off x="658368" y="2286000"/>
-            <a:ext cx="10881360" cy="3657600"/>
-          </a:xfrm>
-          <a:prstGeom prst="rect">
-            <a:avLst/>
-          </a:prstGeom>
-          <a:noFill/>
-        </p:spPr>
-        <p:txBody>
-          <a:bodyPr wrap="square" anchor="t">
-            <a:spAutoFit/>
-          </a:bodyPr>
-          <a:lstStyle/>
-          <a:p>
-            <a:pPr algn="l">
-              <a:lnSpc>
-                <a:spcPct val="112000"/>
-              </a:lnSpc>
-            </a:pPr>
-            <a:r>
-              <a:rPr sz="2200" b="0">
+              <a:t>Where the values hide</a:t>
+            </a:r>
+          </a:p>
+        </p:txBody>
+      </p:sp>
+      <p:sp>
+        <p:nvSpPr>
+          <p:cNvPr id="5" name="Rounded Rectangle 4"/>
+          <p:cNvSpPr/>
+          <p:nvPr/>
+        </p:nvSpPr>
+        <p:spPr>
+          <a:xfrm>
+            <a:off x="640080" y="2468880"/>
+            <a:ext cx="3393338" cy="3383280"/>
+          </a:xfrm>
+          <a:prstGeom prst="roundRect">
+            <a:avLst/>
+          </a:prstGeom>
+          <a:solidFill>
+            <a:srgbClr val="151B26"/>
+          </a:solidFill>
+          <a:ln>
+            <a:noFill/>
+          </a:ln>
+          <a:effectLst/>
+        </p:spPr>
+        <p:style>
+          <a:lnRef idx="1">
+            <a:schemeClr val="accent1"/>
+          </a:lnRef>
+          <a:fillRef idx="3">
+            <a:schemeClr val="accent1"/>
+          </a:fillRef>
+          <a:effectRef idx="2">
+            <a:schemeClr val="accent1"/>
+          </a:effectRef>
+          <a:fontRef idx="minor">
+            <a:schemeClr val="lt1"/>
+          </a:fontRef>
+        </p:style>
+        <p:txBody>
+          <a:bodyPr rtlCol="0" anchor="ctr"/>
+          <a:lstStyle/>
+          <a:p>
+            <a:pPr algn="ctr"/>
+          </a:p>
+        </p:txBody>
+      </p:sp>
+      <p:sp>
+        <p:nvSpPr>
+          <p:cNvPr id="6" name="Rectangle 5"/>
+          <p:cNvSpPr/>
+          <p:nvPr/>
+        </p:nvSpPr>
+        <p:spPr>
+          <a:xfrm>
+            <a:off x="640080" y="2468880"/>
+            <a:ext cx="3393338" cy="82296"/>
+          </a:xfrm>
+          <a:prstGeom prst="rect">
+            <a:avLst/>
+          </a:prstGeom>
+          <a:solidFill>
+            <a:srgbClr val="00FF41"/>
+          </a:solidFill>
+          <a:ln>
+            <a:noFill/>
+          </a:ln>
+          <a:effectLst/>
+        </p:spPr>
+        <p:style>
+          <a:lnRef idx="1">
+            <a:schemeClr val="accent1"/>
+          </a:lnRef>
+          <a:fillRef idx="3">
+            <a:schemeClr val="accent1"/>
+          </a:fillRef>
+          <a:effectRef idx="2">
+            <a:schemeClr val="accent1"/>
+          </a:effectRef>
+          <a:fontRef idx="minor">
+            <a:schemeClr val="lt1"/>
+          </a:fontRef>
+        </p:style>
+        <p:txBody>
+          <a:bodyPr rtlCol="0" anchor="ctr"/>
+          <a:lstStyle/>
+          <a:p>
+            <a:pPr algn="ctr"/>
+          </a:p>
+        </p:txBody>
+      </p:sp>
+      <p:sp>
+        <p:nvSpPr>
+          <p:cNvPr id="7" name="TextBox 6"/>
+          <p:cNvSpPr txBox="1"/>
+          <p:nvPr/>
+        </p:nvSpPr>
+        <p:spPr>
+          <a:xfrm>
+            <a:off x="914400" y="2788920"/>
+            <a:ext cx="2844698" cy="457200"/>
+          </a:xfrm>
+          <a:prstGeom prst="rect">
+            <a:avLst/>
+          </a:prstGeom>
+          <a:noFill/>
+        </p:spPr>
+        <p:txBody>
+          <a:bodyPr wrap="square" anchor="t">
+            <a:spAutoFit/>
+          </a:bodyPr>
+          <a:lstStyle/>
+          <a:p>
+            <a:pPr algn="l">
+              <a:lnSpc>
+                <a:spcPct val="100000"/>
+              </a:lnSpc>
+            </a:pPr>
+            <a:r>
+              <a:rPr sz="1200" b="1">
+                <a:solidFill>
+                  <a:srgbClr val="00FF41"/>
+                </a:solidFill>
+                <a:latin typeface="Courier New"/>
+              </a:rPr>
+              <a:t>FUNCTIONAL DESCRIPTION</a:t>
+            </a:r>
+          </a:p>
+        </p:txBody>
+      </p:sp>
+      <p:sp>
+        <p:nvSpPr>
+          <p:cNvPr id="8" name="TextBox 7"/>
+          <p:cNvSpPr txBox="1"/>
+          <p:nvPr/>
+        </p:nvSpPr>
+        <p:spPr>
+          <a:xfrm>
+            <a:off x="914400" y="3246120"/>
+            <a:ext cx="2844698" cy="822960"/>
+          </a:xfrm>
+          <a:prstGeom prst="rect">
+            <a:avLst/>
+          </a:prstGeom>
+          <a:noFill/>
+        </p:spPr>
+        <p:txBody>
+          <a:bodyPr wrap="square" anchor="t">
+            <a:spAutoFit/>
+          </a:bodyPr>
+          <a:lstStyle/>
+          <a:p>
+            <a:pPr algn="l">
+              <a:lnSpc>
+                <a:spcPct val="100000"/>
+              </a:lnSpc>
+            </a:pPr>
+            <a:r>
+              <a:rPr sz="2000" b="1">
                 <a:solidFill>
                   <a:srgbClr val="F5F7FA"/>
                 </a:solidFill>
                 <a:latin typeface="Arial"/>
               </a:rPr>
-              <a:t>Stretch, water. We pick up with Discovery: what values are even in play?</a:t>
-            </a:r>
-          </a:p>
-        </p:txBody>
-      </p:sp>
-      <p:sp>
-        <p:nvSpPr>
-          <p:cNvPr id="6" name="TextBox 5"/>
+              <a:t>What does it do?</a:t>
+            </a:r>
+          </a:p>
+        </p:txBody>
+      </p:sp>
+      <p:sp>
+        <p:nvSpPr>
+          <p:cNvPr id="9" name="TextBox 8"/>
+          <p:cNvSpPr txBox="1"/>
+          <p:nvPr/>
+        </p:nvSpPr>
+        <p:spPr>
+          <a:xfrm>
+            <a:off x="914400" y="4114800"/>
+            <a:ext cx="2844698" cy="1554480"/>
+          </a:xfrm>
+          <a:prstGeom prst="rect">
+            <a:avLst/>
+          </a:prstGeom>
+          <a:noFill/>
+        </p:spPr>
+        <p:txBody>
+          <a:bodyPr wrap="square" anchor="t">
+            <a:spAutoFit/>
+          </a:bodyPr>
+          <a:lstStyle/>
+          <a:p>
+            <a:pPr algn="l">
+              <a:lnSpc>
+                <a:spcPct val="110000"/>
+              </a:lnSpc>
+            </a:pPr>
+            <a:r>
+              <a:rPr sz="1500" b="0">
+                <a:solidFill>
+                  <a:srgbClr val="8A94A6"/>
+                </a:solidFill>
+                <a:latin typeface="Arial"/>
+              </a:rPr>
+              <a:t>The core function already implies values - a secure messenger implies privacy; a feed implies attention.</a:t>
+            </a:r>
+          </a:p>
+        </p:txBody>
+      </p:sp>
+      <p:sp>
+        <p:nvSpPr>
+          <p:cNvPr id="10" name="Rounded Rectangle 9"/>
+          <p:cNvSpPr/>
+          <p:nvPr/>
+        </p:nvSpPr>
+        <p:spPr>
+          <a:xfrm>
+            <a:off x="4399178" y="2468880"/>
+            <a:ext cx="3393338" cy="3383280"/>
+          </a:xfrm>
+          <a:prstGeom prst="roundRect">
+            <a:avLst/>
+          </a:prstGeom>
+          <a:solidFill>
+            <a:srgbClr val="151B26"/>
+          </a:solidFill>
+          <a:ln>
+            <a:noFill/>
+          </a:ln>
+          <a:effectLst/>
+        </p:spPr>
+        <p:style>
+          <a:lnRef idx="1">
+            <a:schemeClr val="accent1"/>
+          </a:lnRef>
+          <a:fillRef idx="3">
+            <a:schemeClr val="accent1"/>
+          </a:fillRef>
+          <a:effectRef idx="2">
+            <a:schemeClr val="accent1"/>
+          </a:effectRef>
+          <a:fontRef idx="minor">
+            <a:schemeClr val="lt1"/>
+          </a:fontRef>
+        </p:style>
+        <p:txBody>
+          <a:bodyPr rtlCol="0" anchor="ctr"/>
+          <a:lstStyle/>
+          <a:p>
+            <a:pPr algn="ctr"/>
+          </a:p>
+        </p:txBody>
+      </p:sp>
+      <p:sp>
+        <p:nvSpPr>
+          <p:cNvPr id="11" name="Rectangle 10"/>
+          <p:cNvSpPr/>
+          <p:nvPr/>
+        </p:nvSpPr>
+        <p:spPr>
+          <a:xfrm>
+            <a:off x="4399178" y="2468880"/>
+            <a:ext cx="3393338" cy="82296"/>
+          </a:xfrm>
+          <a:prstGeom prst="rect">
+            <a:avLst/>
+          </a:prstGeom>
+          <a:solidFill>
+            <a:srgbClr val="00FF41"/>
+          </a:solidFill>
+          <a:ln>
+            <a:noFill/>
+          </a:ln>
+          <a:effectLst/>
+        </p:spPr>
+        <p:style>
+          <a:lnRef idx="1">
+            <a:schemeClr val="accent1"/>
+          </a:lnRef>
+          <a:fillRef idx="3">
+            <a:schemeClr val="accent1"/>
+          </a:fillRef>
+          <a:effectRef idx="2">
+            <a:schemeClr val="accent1"/>
+          </a:effectRef>
+          <a:fontRef idx="minor">
+            <a:schemeClr val="lt1"/>
+          </a:fontRef>
+        </p:style>
+        <p:txBody>
+          <a:bodyPr rtlCol="0" anchor="ctr"/>
+          <a:lstStyle/>
+          <a:p>
+            <a:pPr algn="ctr"/>
+          </a:p>
+        </p:txBody>
+      </p:sp>
+      <p:sp>
+        <p:nvSpPr>
+          <p:cNvPr id="12" name="TextBox 11"/>
+          <p:cNvSpPr txBox="1"/>
+          <p:nvPr/>
+        </p:nvSpPr>
+        <p:spPr>
+          <a:xfrm>
+            <a:off x="4673498" y="2788920"/>
+            <a:ext cx="2844698" cy="457200"/>
+          </a:xfrm>
+          <a:prstGeom prst="rect">
+            <a:avLst/>
+          </a:prstGeom>
+          <a:noFill/>
+        </p:spPr>
+        <p:txBody>
+          <a:bodyPr wrap="square" anchor="t">
+            <a:spAutoFit/>
+          </a:bodyPr>
+          <a:lstStyle/>
+          <a:p>
+            <a:pPr algn="l">
+              <a:lnSpc>
+                <a:spcPct val="100000"/>
+              </a:lnSpc>
+            </a:pPr>
+            <a:r>
+              <a:rPr sz="1200" b="1">
+                <a:solidFill>
+                  <a:srgbClr val="00FF41"/>
+                </a:solidFill>
+                <a:latin typeface="Courier New"/>
+              </a:rPr>
+              <a:t>KEY ACTORS</a:t>
+            </a:r>
+          </a:p>
+        </p:txBody>
+      </p:sp>
+      <p:sp>
+        <p:nvSpPr>
+          <p:cNvPr id="13" name="TextBox 12"/>
+          <p:cNvSpPr txBox="1"/>
+          <p:nvPr/>
+        </p:nvSpPr>
+        <p:spPr>
+          <a:xfrm>
+            <a:off x="4673498" y="3246120"/>
+            <a:ext cx="2844698" cy="822960"/>
+          </a:xfrm>
+          <a:prstGeom prst="rect">
+            <a:avLst/>
+          </a:prstGeom>
+          <a:noFill/>
+        </p:spPr>
+        <p:txBody>
+          <a:bodyPr wrap="square" anchor="t">
+            <a:spAutoFit/>
+          </a:bodyPr>
+          <a:lstStyle/>
+          <a:p>
+            <a:pPr algn="l">
+              <a:lnSpc>
+                <a:spcPct val="100000"/>
+              </a:lnSpc>
+            </a:pPr>
+            <a:r>
+              <a:rPr sz="2000" b="1">
+                <a:solidFill>
+                  <a:srgbClr val="F5F7FA"/>
+                </a:solidFill>
+                <a:latin typeface="Arial"/>
+              </a:rPr>
+              <a:t>Who is involved?</a:t>
+            </a:r>
+          </a:p>
+        </p:txBody>
+      </p:sp>
+      <p:sp>
+        <p:nvSpPr>
+          <p:cNvPr id="14" name="TextBox 13"/>
+          <p:cNvSpPr txBox="1"/>
+          <p:nvPr/>
+        </p:nvSpPr>
+        <p:spPr>
+          <a:xfrm>
+            <a:off x="4673498" y="4114800"/>
+            <a:ext cx="2844698" cy="1554480"/>
+          </a:xfrm>
+          <a:prstGeom prst="rect">
+            <a:avLst/>
+          </a:prstGeom>
+          <a:noFill/>
+        </p:spPr>
+        <p:txBody>
+          <a:bodyPr wrap="square" anchor="t">
+            <a:spAutoFit/>
+          </a:bodyPr>
+          <a:lstStyle/>
+          <a:p>
+            <a:pPr algn="l">
+              <a:lnSpc>
+                <a:spcPct val="110000"/>
+              </a:lnSpc>
+            </a:pPr>
+            <a:r>
+              <a:rPr sz="1500" b="0">
+                <a:solidFill>
+                  <a:srgbClr val="8A94A6"/>
+                </a:solidFill>
+                <a:latin typeface="Arial"/>
+              </a:rPr>
+              <a:t>Designers, funders, users, bystanders. Whose interests are in the room - and whose are not?</a:t>
+            </a:r>
+          </a:p>
+        </p:txBody>
+      </p:sp>
+      <p:sp>
+        <p:nvSpPr>
+          <p:cNvPr id="15" name="Rounded Rectangle 14"/>
+          <p:cNvSpPr/>
+          <p:nvPr/>
+        </p:nvSpPr>
+        <p:spPr>
+          <a:xfrm>
+            <a:off x="8158276" y="2468880"/>
+            <a:ext cx="3393338" cy="3383280"/>
+          </a:xfrm>
+          <a:prstGeom prst="roundRect">
+            <a:avLst/>
+          </a:prstGeom>
+          <a:solidFill>
+            <a:srgbClr val="151B26"/>
+          </a:solidFill>
+          <a:ln>
+            <a:noFill/>
+          </a:ln>
+          <a:effectLst/>
+        </p:spPr>
+        <p:style>
+          <a:lnRef idx="1">
+            <a:schemeClr val="accent1"/>
+          </a:lnRef>
+          <a:fillRef idx="3">
+            <a:schemeClr val="accent1"/>
+          </a:fillRef>
+          <a:effectRef idx="2">
+            <a:schemeClr val="accent1"/>
+          </a:effectRef>
+          <a:fontRef idx="minor">
+            <a:schemeClr val="lt1"/>
+          </a:fontRef>
+        </p:style>
+        <p:txBody>
+          <a:bodyPr rtlCol="0" anchor="ctr"/>
+          <a:lstStyle/>
+          <a:p>
+            <a:pPr algn="ctr"/>
+          </a:p>
+        </p:txBody>
+      </p:sp>
+      <p:sp>
+        <p:nvSpPr>
+          <p:cNvPr id="16" name="Rectangle 15"/>
+          <p:cNvSpPr/>
+          <p:nvPr/>
+        </p:nvSpPr>
+        <p:spPr>
+          <a:xfrm>
+            <a:off x="8158276" y="2468880"/>
+            <a:ext cx="3393338" cy="82296"/>
+          </a:xfrm>
+          <a:prstGeom prst="rect">
+            <a:avLst/>
+          </a:prstGeom>
+          <a:solidFill>
+            <a:srgbClr val="00FF41"/>
+          </a:solidFill>
+          <a:ln>
+            <a:noFill/>
+          </a:ln>
+          <a:effectLst/>
+        </p:spPr>
+        <p:style>
+          <a:lnRef idx="1">
+            <a:schemeClr val="accent1"/>
+          </a:lnRef>
+          <a:fillRef idx="3">
+            <a:schemeClr val="accent1"/>
+          </a:fillRef>
+          <a:effectRef idx="2">
+            <a:schemeClr val="accent1"/>
+          </a:effectRef>
+          <a:fontRef idx="minor">
+            <a:schemeClr val="lt1"/>
+          </a:fontRef>
+        </p:style>
+        <p:txBody>
+          <a:bodyPr rtlCol="0" anchor="ctr"/>
+          <a:lstStyle/>
+          <a:p>
+            <a:pPr algn="ctr"/>
+          </a:p>
+        </p:txBody>
+      </p:sp>
+      <p:sp>
+        <p:nvSpPr>
+          <p:cNvPr id="17" name="TextBox 16"/>
+          <p:cNvSpPr txBox="1"/>
+          <p:nvPr/>
+        </p:nvSpPr>
+        <p:spPr>
+          <a:xfrm>
+            <a:off x="8432596" y="2788920"/>
+            <a:ext cx="2844698" cy="457200"/>
+          </a:xfrm>
+          <a:prstGeom prst="rect">
+            <a:avLst/>
+          </a:prstGeom>
+          <a:noFill/>
+        </p:spPr>
+        <p:txBody>
+          <a:bodyPr wrap="square" anchor="t">
+            <a:spAutoFit/>
+          </a:bodyPr>
+          <a:lstStyle/>
+          <a:p>
+            <a:pPr algn="l">
+              <a:lnSpc>
+                <a:spcPct val="100000"/>
+              </a:lnSpc>
+            </a:pPr>
+            <a:r>
+              <a:rPr sz="1200" b="1">
+                <a:solidFill>
+                  <a:srgbClr val="00FF41"/>
+                </a:solidFill>
+                <a:latin typeface="Courier New"/>
+              </a:rPr>
+              <a:t>CONTEXT + CONSTRAINTS</a:t>
+            </a:r>
+          </a:p>
+        </p:txBody>
+      </p:sp>
+      <p:sp>
+        <p:nvSpPr>
+          <p:cNvPr id="18" name="TextBox 17"/>
+          <p:cNvSpPr txBox="1"/>
+          <p:nvPr/>
+        </p:nvSpPr>
+        <p:spPr>
+          <a:xfrm>
+            <a:off x="8432596" y="3246120"/>
+            <a:ext cx="2844698" cy="822960"/>
+          </a:xfrm>
+          <a:prstGeom prst="rect">
+            <a:avLst/>
+          </a:prstGeom>
+          <a:noFill/>
+        </p:spPr>
+        <p:txBody>
+          <a:bodyPr wrap="square" anchor="t">
+            <a:spAutoFit/>
+          </a:bodyPr>
+          <a:lstStyle/>
+          <a:p>
+            <a:pPr algn="l">
+              <a:lnSpc>
+                <a:spcPct val="100000"/>
+              </a:lnSpc>
+            </a:pPr>
+            <a:r>
+              <a:rPr sz="2000" b="1">
+                <a:solidFill>
+                  <a:srgbClr val="F5F7FA"/>
+                </a:solidFill>
+                <a:latin typeface="Arial"/>
+              </a:rPr>
+              <a:t>Where does it live?</a:t>
+            </a:r>
+          </a:p>
+        </p:txBody>
+      </p:sp>
+      <p:sp>
+        <p:nvSpPr>
+          <p:cNvPr id="19" name="TextBox 18"/>
+          <p:cNvSpPr txBox="1"/>
+          <p:nvPr/>
+        </p:nvSpPr>
+        <p:spPr>
+          <a:xfrm>
+            <a:off x="8432596" y="4114800"/>
+            <a:ext cx="2844698" cy="1554480"/>
+          </a:xfrm>
+          <a:prstGeom prst="rect">
+            <a:avLst/>
+          </a:prstGeom>
+          <a:noFill/>
+        </p:spPr>
+        <p:txBody>
+          <a:bodyPr wrap="square" anchor="t">
+            <a:spAutoFit/>
+          </a:bodyPr>
+          <a:lstStyle/>
+          <a:p>
+            <a:pPr algn="l">
+              <a:lnSpc>
+                <a:spcPct val="110000"/>
+              </a:lnSpc>
+            </a:pPr>
+            <a:r>
+              <a:rPr sz="1500" b="0">
+                <a:solidFill>
+                  <a:srgbClr val="8A94A6"/>
+                </a:solidFill>
+                <a:latin typeface="Arial"/>
+              </a:rPr>
+              <a:t>Societal norms, laws, and technical limits (screen size, bandwidth, model context) all carry values.</a:t>
+            </a:r>
+          </a:p>
+        </p:txBody>
+      </p:sp>
+      <p:sp>
+        <p:nvSpPr>
+          <p:cNvPr id="20" name="TextBox 19"/>
           <p:cNvSpPr txBox="1"/>
           <p:nvPr/>
         </p:nvSpPr>
@@ -5246,14 +5679,53 @@
       <p:grpSpPr/>
       <p:sp>
         <p:nvSpPr>
-          <p:cNvPr id="2" name="Rectangle 1"/>
+          <p:cNvPr id="2" name="TextBox 1"/>
+          <p:cNvSpPr txBox="1"/>
+          <p:nvPr/>
+        </p:nvSpPr>
+        <p:spPr>
+          <a:xfrm>
+            <a:off x="640080" y="502920"/>
+            <a:ext cx="10058400" cy="365760"/>
+          </a:xfrm>
+          <a:prstGeom prst="rect">
+            <a:avLst/>
+          </a:prstGeom>
+          <a:noFill/>
+        </p:spPr>
+        <p:txBody>
+          <a:bodyPr wrap="square" anchor="t">
+            <a:spAutoFit/>
+          </a:bodyPr>
+          <a:lstStyle/>
+          <a:p>
+            <a:pPr algn="l">
+              <a:lnSpc>
+                <a:spcPct val="100000"/>
+              </a:lnSpc>
+            </a:pPr>
+            <a:r>
+              <a:rPr sz="1300" b="1">
+                <a:solidFill>
+                  <a:srgbClr val="00FF41"/>
+                </a:solidFill>
+                <a:latin typeface="Courier New"/>
+              </a:rPr>
+              <a:t>DISCOVERY II - OPERATIONALIZE</a:t>
+            </a:r>
+          </a:p>
+        </p:txBody>
+      </p:sp>
+      <p:sp>
+        <p:nvSpPr>
+          <p:cNvPr id="3" name="Rectangle 2"/>
           <p:cNvSpPr/>
           <p:nvPr/>
         </p:nvSpPr>
         <p:spPr>
           <a:xfrm>
-            <a:off x="0" y="0"/>
-            <a:ext cx="256032" cy="6858000"/>
+            <a:off x="640080" y="932688"/>
+            <a:ext cx="822960" cy="73152"/>
           </a:xfrm>
           <a:prstGeom prst="rect">
             <a:avLst/>
@@ -5290,14 +5762,14 @@
       </p:sp>
       <p:sp>
         <p:nvSpPr>
-          <p:cNvPr id="3" name="TextBox 2"/>
-          <p:cNvSpPr txBox="1"/>
-          <p:nvPr/>
-        </p:nvSpPr>
-        <p:spPr>
-          <a:xfrm>
-            <a:off x="822960" y="2194560"/>
-            <a:ext cx="10515600" cy="548640"/>
+          <p:cNvPr id="4" name="TextBox 3"/>
+          <p:cNvSpPr txBox="1"/>
+          <p:nvPr/>
+        </p:nvSpPr>
+        <p:spPr>
+          <a:xfrm>
+            <a:off x="640080" y="1188720"/>
+            <a:ext cx="10972800" cy="1097280"/>
           </a:xfrm>
           <a:prstGeom prst="rect">
             <a:avLst/>
@@ -5316,52 +5788,189 @@
               </a:lnSpc>
             </a:pPr>
             <a:r>
-              <a:rPr sz="1800" b="1">
+              <a:rPr sz="3400" b="1">
+                <a:solidFill>
+                  <a:srgbClr val="F5F7FA"/>
+                </a:solidFill>
+                <a:latin typeface="Arial"/>
+              </a:rPr>
+              <a:t>A value is not one thing</a:t>
+            </a:r>
+          </a:p>
+        </p:txBody>
+      </p:sp>
+      <p:sp>
+        <p:nvSpPr>
+          <p:cNvPr id="5" name="TextBox 4"/>
+          <p:cNvSpPr txBox="1"/>
+          <p:nvPr/>
+        </p:nvSpPr>
+        <p:spPr>
+          <a:xfrm>
+            <a:off x="658368" y="2286000"/>
+            <a:ext cx="10881360" cy="3657600"/>
+          </a:xfrm>
+          <a:prstGeom prst="rect">
+            <a:avLst/>
+          </a:prstGeom>
+          <a:noFill/>
+        </p:spPr>
+        <p:txBody>
+          <a:bodyPr wrap="square" anchor="t">
+            <a:spAutoFit/>
+          </a:bodyPr>
+          <a:lstStyle/>
+          <a:p>
+            <a:pPr algn="l">
+              <a:lnSpc>
+                <a:spcPct val="112000"/>
+              </a:lnSpc>
+            </a:pPr>
+            <a:r>
+              <a:rPr sz="2000" b="0">
+                <a:solidFill>
+                  <a:srgbClr val="F5F7FA"/>
+                </a:solidFill>
+                <a:latin typeface="Arial"/>
+              </a:rPr>
+              <a:t>An abstract value has to be defined before you can build it or test it:</a:t>
+            </a:r>
+          </a:p>
+          <a:p>
+            <a:pPr algn="l">
+              <a:lnSpc>
+                <a:spcPct val="112000"/>
+              </a:lnSpc>
+            </a:pPr>
+            <a:r>
+              <a:rPr sz="2000" b="0">
+                <a:solidFill>
+                  <a:srgbClr val="F5F7FA"/>
+                </a:solidFill>
+                <a:latin typeface="Arial"/>
+              </a:rPr>
+              <a:t/>
+            </a:r>
+          </a:p>
+          <a:p>
+            <a:pPr algn="l">
+              <a:lnSpc>
+                <a:spcPct val="112000"/>
+              </a:lnSpc>
+            </a:pPr>
+            <a:r>
+              <a:rPr sz="1900" b="1">
                 <a:solidFill>
                   <a:srgbClr val="00FF41"/>
                 </a:solidFill>
+                <a:latin typeface="Arial"/>
+              </a:rPr>
+              <a:t>Privacy</a:t>
+            </a:r>
+            <a:r>
+              <a:rPr sz="1900" b="0">
+                <a:solidFill>
+                  <a:srgbClr val="F5F7FA"/>
+                </a:solidFill>
+                <a:latin typeface="Arial"/>
+              </a:rPr>
+              <a:t> = control?  secrecy?  contextual integrity?</a:t>
+            </a:r>
+          </a:p>
+          <a:p>
+            <a:pPr algn="l">
+              <a:lnSpc>
+                <a:spcPct val="112000"/>
+              </a:lnSpc>
+            </a:pPr>
+            <a:r>
+              <a:rPr sz="1900" b="1">
+                <a:solidFill>
+                  <a:srgbClr val="00FF41"/>
+                </a:solidFill>
+                <a:latin typeface="Arial"/>
+              </a:rPr>
+              <a:t>Fairness</a:t>
+            </a:r>
+            <a:r>
+              <a:rPr sz="1900" b="0">
+                <a:solidFill>
+                  <a:srgbClr val="F5F7FA"/>
+                </a:solidFill>
+                <a:latin typeface="Arial"/>
+              </a:rPr>
+              <a:t> = equal shares?  or proportional to merit / need?</a:t>
+            </a:r>
+          </a:p>
+          <a:p>
+            <a:pPr algn="l">
+              <a:lnSpc>
+                <a:spcPct val="112000"/>
+              </a:lnSpc>
+            </a:pPr>
+            <a:r>
+              <a:rPr sz="2000" b="0">
+                <a:solidFill>
+                  <a:srgbClr val="F5F7FA"/>
+                </a:solidFill>
+                <a:latin typeface="Arial"/>
+              </a:rPr>
+              <a:t/>
+            </a:r>
+          </a:p>
+          <a:p>
+            <a:pPr algn="l">
+              <a:lnSpc>
+                <a:spcPct val="112000"/>
+              </a:lnSpc>
+            </a:pPr>
+            <a:r>
+              <a:rPr sz="1700" b="0">
+                <a:solidFill>
+                  <a:srgbClr val="8A94A6"/>
+                </a:solidFill>
+                <a:latin typeface="Arial"/>
+              </a:rPr>
+              <a:t>Your operational definition decides your design AND your test. (That is yesterday's move - and today's.)</a:t>
+            </a:r>
+          </a:p>
+        </p:txBody>
+      </p:sp>
+      <p:sp>
+        <p:nvSpPr>
+          <p:cNvPr id="6" name="TextBox 5"/>
+          <p:cNvSpPr txBox="1"/>
+          <p:nvPr/>
+        </p:nvSpPr>
+        <p:spPr>
+          <a:xfrm>
+            <a:off x="640080" y="6355080"/>
+            <a:ext cx="10972800" cy="365760"/>
+          </a:xfrm>
+          <a:prstGeom prst="rect">
+            <a:avLst/>
+          </a:prstGeom>
+          <a:noFill/>
+        </p:spPr>
+        <p:txBody>
+          <a:bodyPr wrap="square" anchor="t">
+            <a:spAutoFit/>
+          </a:bodyPr>
+          <a:lstStyle/>
+          <a:p>
+            <a:pPr algn="l">
+              <a:lnSpc>
+                <a:spcPct val="100000"/>
+              </a:lnSpc>
+            </a:pPr>
+            <a:r>
+              <a:rPr sz="1000" b="0">
+                <a:solidFill>
+                  <a:srgbClr val="5A6474"/>
+                </a:solidFill>
                 <a:latin typeface="Courier New"/>
               </a:rPr>
-              <a:t>PART 2 - DISCOVERY</a:t>
-            </a:r>
-          </a:p>
-        </p:txBody>
-      </p:sp>
-      <p:sp>
-        <p:nvSpPr>
-          <p:cNvPr id="4" name="TextBox 3"/>
-          <p:cNvSpPr txBox="1"/>
-          <p:nvPr/>
-        </p:nvSpPr>
-        <p:spPr>
-          <a:xfrm>
-            <a:off x="804672" y="2743200"/>
-            <a:ext cx="10515600" cy="1554480"/>
-          </a:xfrm>
-          <a:prstGeom prst="rect">
-            <a:avLst/>
-          </a:prstGeom>
-          <a:noFill/>
-        </p:spPr>
-        <p:txBody>
-          <a:bodyPr wrap="square" anchor="t">
-            <a:spAutoFit/>
-          </a:bodyPr>
-          <a:lstStyle/>
-          <a:p>
-            <a:pPr algn="l">
-              <a:lnSpc>
-                <a:spcPct val="100000"/>
-              </a:lnSpc>
-            </a:pPr>
-            <a:r>
-              <a:rPr sz="4800" b="1">
-                <a:solidFill>
-                  <a:srgbClr val="F5F7FA"/>
-                </a:solidFill>
-                <a:latin typeface="Arial"/>
-              </a:rPr>
-              <a:t>What values? And what do they actually mean?</a:t>
+              <a:t>Good Code, Good Vibes · TECHIE 1121 · Cornell Tech · Summer 2026</a:t>
             </a:r>
           </a:p>
         </p:txBody>
@@ -5426,7 +6035,7 @@
                 </a:solidFill>
                 <a:latin typeface="Courier New"/>
               </a:rPr>
-              <a:t>DISCOVERY I - CONSIDER THE SOURCES</a:t>
+              <a:t>CASE - WHAT'S FAIR?</a:t>
             </a:r>
           </a:p>
         </p:txBody>
@@ -5509,7 +6118,7 @@
                 </a:solidFill>
                 <a:latin typeface="Arial"/>
               </a:rPr>
-              <a:t>Where the values hide</a:t>
+              <a:t>One value, incompatible definitions</a:t>
             </a:r>
           </a:p>
         </p:txBody>
@@ -5636,7 +6245,7 @@
                 </a:solidFill>
                 <a:latin typeface="Courier New"/>
               </a:rPr>
-              <a:t>FUNCTIONAL DESCRIPTION</a:t>
+              <a:t>THE SETUP</a:t>
             </a:r>
           </a:p>
         </p:txBody>
@@ -5675,7 +6284,7 @@
                 </a:solidFill>
                 <a:latin typeface="Arial"/>
               </a:rPr>
-              <a:t>What does it do?</a:t>
+              <a:t>Split a limited loan</a:t>
             </a:r>
           </a:p>
         </p:txBody>
@@ -5714,7 +6323,7 @@
                 </a:solidFill>
                 <a:latin typeface="Arial"/>
               </a:rPr>
-              <a:t>The core function already implies values - a secure messenger implies privacy; a feed implies attention.</a:t>
+              <a:t>Person A repays 100%, Person B repays 20%. Identical otherwise. How do you split the money?</a:t>
             </a:r>
           </a:p>
         </p:txBody>
@@ -5841,7 +6450,7 @@
                 </a:solidFill>
                 <a:latin typeface="Courier New"/>
               </a:rPr>
-              <a:t>KEY ACTORS</a:t>
+              <a:t>THE OPTIONS</a:t>
             </a:r>
           </a:p>
         </p:txBody>
@@ -5880,7 +6489,7 @@
                 </a:solidFill>
                 <a:latin typeface="Arial"/>
               </a:rPr>
-              <a:t>Who is involved?</a:t>
+              <a:t>All to A? Or share?</a:t>
             </a:r>
           </a:p>
         </p:txBody>
@@ -5919,7 +6528,7 @@
                 </a:solidFill>
                 <a:latin typeface="Arial"/>
               </a:rPr>
-              <a:t>Designers, funders, users, bystanders. Whose interests are in the room - and whose are not?</a:t>
+              <a:t>All to A maximizes repayment - and leaves B nothing. Proportional shares the pot but funds a worse bet.</a:t>
             </a:r>
           </a:p>
         </p:txBody>
@@ -6046,7 +6655,7 @@
                 </a:solidFill>
                 <a:latin typeface="Courier New"/>
               </a:rPr>
-              <a:t>CONTEXT + CONSTRAINTS</a:t>
+              <a:t>THE POINT</a:t>
             </a:r>
           </a:p>
         </p:txBody>
@@ -6085,7 +6694,7 @@
                 </a:solidFill>
                 <a:latin typeface="Arial"/>
               </a:rPr>
-              <a:t>Where does it live?</a:t>
+              <a:t>No free lunch</a:t>
             </a:r>
           </a:p>
         </p:txBody>
@@ -6124,7 +6733,7 @@
                 </a:solidFill>
                 <a:latin typeface="Arial"/>
               </a:rPr>
-              <a:t>Societal norms, laws, and technical limits (screen size, bandwidth, model context) all carry values.</a:t>
+              <a:t>A single algorithm can't satisfy every definition of fairness. Someone chooses - make it conscious.</a:t>
             </a:r>
           </a:p>
         </p:txBody>
@@ -6228,7 +6837,7 @@
                 </a:solidFill>
                 <a:latin typeface="Courier New"/>
               </a:rPr>
-              <a:t>DISCOVERY II - OPERATIONALIZE</a:t>
+              <a:t>BREAK</a:t>
             </a:r>
           </a:p>
         </p:txBody>
@@ -6311,7 +6920,7 @@
                 </a:solidFill>
                 <a:latin typeface="Arial"/>
               </a:rPr>
-              <a:t>A value is not one thing</a:t>
+              <a:t>~10 minutes</a:t>
             </a:r>
           </a:p>
         </p:txBody>
@@ -6344,111 +6953,13 @@
               </a:lnSpc>
             </a:pPr>
             <a:r>
-              <a:rPr sz="2000" b="0">
+              <a:rPr sz="2200" b="0">
                 <a:solidFill>
                   <a:srgbClr val="F5F7FA"/>
                 </a:solidFill>
                 <a:latin typeface="Arial"/>
               </a:rPr>
-              <a:t>An abstract value has to be defined before you can build it or test it:</a:t>
-            </a:r>
-          </a:p>
-          <a:p>
-            <a:pPr algn="l">
-              <a:lnSpc>
-                <a:spcPct val="112000"/>
-              </a:lnSpc>
-            </a:pPr>
-            <a:r>
-              <a:rPr sz="2000" b="0">
-                <a:solidFill>
-                  <a:srgbClr val="F5F7FA"/>
-                </a:solidFill>
-                <a:latin typeface="Arial"/>
-              </a:rPr>
-              <a:t/>
-            </a:r>
-          </a:p>
-          <a:p>
-            <a:pPr algn="l">
-              <a:lnSpc>
-                <a:spcPct val="112000"/>
-              </a:lnSpc>
-            </a:pPr>
-            <a:r>
-              <a:rPr sz="1900" b="1">
-                <a:solidFill>
-                  <a:srgbClr val="00FF41"/>
-                </a:solidFill>
-                <a:latin typeface="Arial"/>
-              </a:rPr>
-              <a:t>Privacy</a:t>
-            </a:r>
-            <a:r>
-              <a:rPr sz="1900" b="0">
-                <a:solidFill>
-                  <a:srgbClr val="F5F7FA"/>
-                </a:solidFill>
-                <a:latin typeface="Arial"/>
-              </a:rPr>
-              <a:t> = control?  secrecy?  contextual integrity?</a:t>
-            </a:r>
-          </a:p>
-          <a:p>
-            <a:pPr algn="l">
-              <a:lnSpc>
-                <a:spcPct val="112000"/>
-              </a:lnSpc>
-            </a:pPr>
-            <a:r>
-              <a:rPr sz="1900" b="1">
-                <a:solidFill>
-                  <a:srgbClr val="00FF41"/>
-                </a:solidFill>
-                <a:latin typeface="Arial"/>
-              </a:rPr>
-              <a:t>Fairness</a:t>
-            </a:r>
-            <a:r>
-              <a:rPr sz="1900" b="0">
-                <a:solidFill>
-                  <a:srgbClr val="F5F7FA"/>
-                </a:solidFill>
-                <a:latin typeface="Arial"/>
-              </a:rPr>
-              <a:t> = equal shares?  or proportional to merit / need?</a:t>
-            </a:r>
-          </a:p>
-          <a:p>
-            <a:pPr algn="l">
-              <a:lnSpc>
-                <a:spcPct val="112000"/>
-              </a:lnSpc>
-            </a:pPr>
-            <a:r>
-              <a:rPr sz="2000" b="0">
-                <a:solidFill>
-                  <a:srgbClr val="F5F7FA"/>
-                </a:solidFill>
-                <a:latin typeface="Arial"/>
-              </a:rPr>
-              <a:t/>
-            </a:r>
-          </a:p>
-          <a:p>
-            <a:pPr algn="l">
-              <a:lnSpc>
-                <a:spcPct val="112000"/>
-              </a:lnSpc>
-            </a:pPr>
-            <a:r>
-              <a:rPr sz="1700" b="0">
-                <a:solidFill>
-                  <a:srgbClr val="8A94A6"/>
-                </a:solidFill>
-                <a:latin typeface="Arial"/>
-              </a:rPr>
-              <a:t>Your operational definition decides your design AND your test. (That is yesterday's move - and today's.)</a:t>
+              <a:t>Back soon - next we turn values into features, and handle the clashes.</a:t>
             </a:r>
           </a:p>
         </p:txBody>
@@ -6520,53 +7031,14 @@
       <p:grpSpPr/>
       <p:sp>
         <p:nvSpPr>
-          <p:cNvPr id="2" name="TextBox 1"/>
-          <p:cNvSpPr txBox="1"/>
-          <p:nvPr/>
-        </p:nvSpPr>
-        <p:spPr>
-          <a:xfrm>
-            <a:off x="640080" y="502920"/>
-            <a:ext cx="10058400" cy="365760"/>
-          </a:xfrm>
-          <a:prstGeom prst="rect">
-            <a:avLst/>
-          </a:prstGeom>
-          <a:noFill/>
-        </p:spPr>
-        <p:txBody>
-          <a:bodyPr wrap="square" anchor="t">
-            <a:spAutoFit/>
-          </a:bodyPr>
-          <a:lstStyle/>
-          <a:p>
-            <a:pPr algn="l">
-              <a:lnSpc>
-                <a:spcPct val="100000"/>
-              </a:lnSpc>
-            </a:pPr>
-            <a:r>
-              <a:rPr sz="1300" b="1">
-                <a:solidFill>
-                  <a:srgbClr val="00FF41"/>
-                </a:solidFill>
-                <a:latin typeface="Courier New"/>
-              </a:rPr>
-              <a:t>CASE - WHAT'S FAIR?</a:t>
-            </a:r>
-          </a:p>
-        </p:txBody>
-      </p:sp>
-      <p:sp>
-        <p:nvSpPr>
-          <p:cNvPr id="3" name="Rectangle 2"/>
+          <p:cNvPr id="2" name="Rectangle 1"/>
           <p:cNvSpPr/>
           <p:nvPr/>
         </p:nvSpPr>
         <p:spPr>
           <a:xfrm>
-            <a:off x="640080" y="932688"/>
-            <a:ext cx="822960" cy="73152"/>
+            <a:off x="0" y="0"/>
+            <a:ext cx="256032" cy="6858000"/>
           </a:xfrm>
           <a:prstGeom prst="rect">
             <a:avLst/>
@@ -6603,14 +7075,53 @@
       </p:sp>
       <p:sp>
         <p:nvSpPr>
+          <p:cNvPr id="3" name="TextBox 2"/>
+          <p:cNvSpPr txBox="1"/>
+          <p:nvPr/>
+        </p:nvSpPr>
+        <p:spPr>
+          <a:xfrm>
+            <a:off x="822960" y="2194560"/>
+            <a:ext cx="10515600" cy="548640"/>
+          </a:xfrm>
+          <a:prstGeom prst="rect">
+            <a:avLst/>
+          </a:prstGeom>
+          <a:noFill/>
+        </p:spPr>
+        <p:txBody>
+          <a:bodyPr wrap="square" anchor="t">
+            <a:spAutoFit/>
+          </a:bodyPr>
+          <a:lstStyle/>
+          <a:p>
+            <a:pPr algn="l">
+              <a:lnSpc>
+                <a:spcPct val="100000"/>
+              </a:lnSpc>
+            </a:pPr>
+            <a:r>
+              <a:rPr sz="1800" b="1">
+                <a:solidFill>
+                  <a:srgbClr val="00FF41"/>
+                </a:solidFill>
+                <a:latin typeface="Courier New"/>
+              </a:rPr>
+              <a:t>PART 3 - IMPLEMENTATION</a:t>
+            </a:r>
+          </a:p>
+        </p:txBody>
+      </p:sp>
+      <p:sp>
+        <p:nvSpPr>
           <p:cNvPr id="4" name="TextBox 3"/>
           <p:cNvSpPr txBox="1"/>
           <p:nvPr/>
         </p:nvSpPr>
         <p:spPr>
           <a:xfrm>
-            <a:off x="640080" y="1188720"/>
-            <a:ext cx="10972800" cy="914400"/>
+            <a:off x="804672" y="2743200"/>
+            <a:ext cx="10515600" cy="1554480"/>
           </a:xfrm>
           <a:prstGeom prst="rect">
             <a:avLst/>
@@ -6629,667 +7140,13 @@
               </a:lnSpc>
             </a:pPr>
             <a:r>
-              <a:rPr sz="3200" b="1">
+              <a:rPr sz="4800" b="1">
                 <a:solidFill>
                   <a:srgbClr val="F5F7FA"/>
                 </a:solidFill>
                 <a:latin typeface="Arial"/>
               </a:rPr>
-              <a:t>One value, incompatible definitions</a:t>
-            </a:r>
-          </a:p>
-        </p:txBody>
-      </p:sp>
-      <p:sp>
-        <p:nvSpPr>
-          <p:cNvPr id="5" name="Rounded Rectangle 4"/>
-          <p:cNvSpPr/>
-          <p:nvPr/>
-        </p:nvSpPr>
-        <p:spPr>
-          <a:xfrm>
-            <a:off x="640080" y="2468880"/>
-            <a:ext cx="3393338" cy="3383280"/>
-          </a:xfrm>
-          <a:prstGeom prst="roundRect">
-            <a:avLst/>
-          </a:prstGeom>
-          <a:solidFill>
-            <a:srgbClr val="151B26"/>
-          </a:solidFill>
-          <a:ln>
-            <a:noFill/>
-          </a:ln>
-          <a:effectLst/>
-        </p:spPr>
-        <p:style>
-          <a:lnRef idx="1">
-            <a:schemeClr val="accent1"/>
-          </a:lnRef>
-          <a:fillRef idx="3">
-            <a:schemeClr val="accent1"/>
-          </a:fillRef>
-          <a:effectRef idx="2">
-            <a:schemeClr val="accent1"/>
-          </a:effectRef>
-          <a:fontRef idx="minor">
-            <a:schemeClr val="lt1"/>
-          </a:fontRef>
-        </p:style>
-        <p:txBody>
-          <a:bodyPr rtlCol="0" anchor="ctr"/>
-          <a:lstStyle/>
-          <a:p>
-            <a:pPr algn="ctr"/>
-          </a:p>
-        </p:txBody>
-      </p:sp>
-      <p:sp>
-        <p:nvSpPr>
-          <p:cNvPr id="6" name="Rectangle 5"/>
-          <p:cNvSpPr/>
-          <p:nvPr/>
-        </p:nvSpPr>
-        <p:spPr>
-          <a:xfrm>
-            <a:off x="640080" y="2468880"/>
-            <a:ext cx="3393338" cy="82296"/>
-          </a:xfrm>
-          <a:prstGeom prst="rect">
-            <a:avLst/>
-          </a:prstGeom>
-          <a:solidFill>
-            <a:srgbClr val="00FF41"/>
-          </a:solidFill>
-          <a:ln>
-            <a:noFill/>
-          </a:ln>
-          <a:effectLst/>
-        </p:spPr>
-        <p:style>
-          <a:lnRef idx="1">
-            <a:schemeClr val="accent1"/>
-          </a:lnRef>
-          <a:fillRef idx="3">
-            <a:schemeClr val="accent1"/>
-          </a:fillRef>
-          <a:effectRef idx="2">
-            <a:schemeClr val="accent1"/>
-          </a:effectRef>
-          <a:fontRef idx="minor">
-            <a:schemeClr val="lt1"/>
-          </a:fontRef>
-        </p:style>
-        <p:txBody>
-          <a:bodyPr rtlCol="0" anchor="ctr"/>
-          <a:lstStyle/>
-          <a:p>
-            <a:pPr algn="ctr"/>
-          </a:p>
-        </p:txBody>
-      </p:sp>
-      <p:sp>
-        <p:nvSpPr>
-          <p:cNvPr id="7" name="TextBox 6"/>
-          <p:cNvSpPr txBox="1"/>
-          <p:nvPr/>
-        </p:nvSpPr>
-        <p:spPr>
-          <a:xfrm>
-            <a:off x="914400" y="2788920"/>
-            <a:ext cx="2844698" cy="457200"/>
-          </a:xfrm>
-          <a:prstGeom prst="rect">
-            <a:avLst/>
-          </a:prstGeom>
-          <a:noFill/>
-        </p:spPr>
-        <p:txBody>
-          <a:bodyPr wrap="square" anchor="t">
-            <a:spAutoFit/>
-          </a:bodyPr>
-          <a:lstStyle/>
-          <a:p>
-            <a:pPr algn="l">
-              <a:lnSpc>
-                <a:spcPct val="100000"/>
-              </a:lnSpc>
-            </a:pPr>
-            <a:r>
-              <a:rPr sz="1200" b="1">
-                <a:solidFill>
-                  <a:srgbClr val="00FF41"/>
-                </a:solidFill>
-                <a:latin typeface="Courier New"/>
-              </a:rPr>
-              <a:t>THE SETUP</a:t>
-            </a:r>
-          </a:p>
-        </p:txBody>
-      </p:sp>
-      <p:sp>
-        <p:nvSpPr>
-          <p:cNvPr id="8" name="TextBox 7"/>
-          <p:cNvSpPr txBox="1"/>
-          <p:nvPr/>
-        </p:nvSpPr>
-        <p:spPr>
-          <a:xfrm>
-            <a:off x="914400" y="3246120"/>
-            <a:ext cx="2844698" cy="822960"/>
-          </a:xfrm>
-          <a:prstGeom prst="rect">
-            <a:avLst/>
-          </a:prstGeom>
-          <a:noFill/>
-        </p:spPr>
-        <p:txBody>
-          <a:bodyPr wrap="square" anchor="t">
-            <a:spAutoFit/>
-          </a:bodyPr>
-          <a:lstStyle/>
-          <a:p>
-            <a:pPr algn="l">
-              <a:lnSpc>
-                <a:spcPct val="100000"/>
-              </a:lnSpc>
-            </a:pPr>
-            <a:r>
-              <a:rPr sz="2000" b="1">
-                <a:solidFill>
-                  <a:srgbClr val="F5F7FA"/>
-                </a:solidFill>
-                <a:latin typeface="Arial"/>
-              </a:rPr>
-              <a:t>Split a limited loan</a:t>
-            </a:r>
-          </a:p>
-        </p:txBody>
-      </p:sp>
-      <p:sp>
-        <p:nvSpPr>
-          <p:cNvPr id="9" name="TextBox 8"/>
-          <p:cNvSpPr txBox="1"/>
-          <p:nvPr/>
-        </p:nvSpPr>
-        <p:spPr>
-          <a:xfrm>
-            <a:off x="914400" y="4114800"/>
-            <a:ext cx="2844698" cy="1554480"/>
-          </a:xfrm>
-          <a:prstGeom prst="rect">
-            <a:avLst/>
-          </a:prstGeom>
-          <a:noFill/>
-        </p:spPr>
-        <p:txBody>
-          <a:bodyPr wrap="square" anchor="t">
-            <a:spAutoFit/>
-          </a:bodyPr>
-          <a:lstStyle/>
-          <a:p>
-            <a:pPr algn="l">
-              <a:lnSpc>
-                <a:spcPct val="110000"/>
-              </a:lnSpc>
-            </a:pPr>
-            <a:r>
-              <a:rPr sz="1500" b="0">
-                <a:solidFill>
-                  <a:srgbClr val="8A94A6"/>
-                </a:solidFill>
-                <a:latin typeface="Arial"/>
-              </a:rPr>
-              <a:t>Person A repays 100%, Person B repays 20%. Identical otherwise. How do you split the money?</a:t>
-            </a:r>
-          </a:p>
-        </p:txBody>
-      </p:sp>
-      <p:sp>
-        <p:nvSpPr>
-          <p:cNvPr id="10" name="Rounded Rectangle 9"/>
-          <p:cNvSpPr/>
-          <p:nvPr/>
-        </p:nvSpPr>
-        <p:spPr>
-          <a:xfrm>
-            <a:off x="4399178" y="2468880"/>
-            <a:ext cx="3393338" cy="3383280"/>
-          </a:xfrm>
-          <a:prstGeom prst="roundRect">
-            <a:avLst/>
-          </a:prstGeom>
-          <a:solidFill>
-            <a:srgbClr val="151B26"/>
-          </a:solidFill>
-          <a:ln>
-            <a:noFill/>
-          </a:ln>
-          <a:effectLst/>
-        </p:spPr>
-        <p:style>
-          <a:lnRef idx="1">
-            <a:schemeClr val="accent1"/>
-          </a:lnRef>
-          <a:fillRef idx="3">
-            <a:schemeClr val="accent1"/>
-          </a:fillRef>
-          <a:effectRef idx="2">
-            <a:schemeClr val="accent1"/>
-          </a:effectRef>
-          <a:fontRef idx="minor">
-            <a:schemeClr val="lt1"/>
-          </a:fontRef>
-        </p:style>
-        <p:txBody>
-          <a:bodyPr rtlCol="0" anchor="ctr"/>
-          <a:lstStyle/>
-          <a:p>
-            <a:pPr algn="ctr"/>
-          </a:p>
-        </p:txBody>
-      </p:sp>
-      <p:sp>
-        <p:nvSpPr>
-          <p:cNvPr id="11" name="Rectangle 10"/>
-          <p:cNvSpPr/>
-          <p:nvPr/>
-        </p:nvSpPr>
-        <p:spPr>
-          <a:xfrm>
-            <a:off x="4399178" y="2468880"/>
-            <a:ext cx="3393338" cy="82296"/>
-          </a:xfrm>
-          <a:prstGeom prst="rect">
-            <a:avLst/>
-          </a:prstGeom>
-          <a:solidFill>
-            <a:srgbClr val="00FF41"/>
-          </a:solidFill>
-          <a:ln>
-            <a:noFill/>
-          </a:ln>
-          <a:effectLst/>
-        </p:spPr>
-        <p:style>
-          <a:lnRef idx="1">
-            <a:schemeClr val="accent1"/>
-          </a:lnRef>
-          <a:fillRef idx="3">
-            <a:schemeClr val="accent1"/>
-          </a:fillRef>
-          <a:effectRef idx="2">
-            <a:schemeClr val="accent1"/>
-          </a:effectRef>
-          <a:fontRef idx="minor">
-            <a:schemeClr val="lt1"/>
-          </a:fontRef>
-        </p:style>
-        <p:txBody>
-          <a:bodyPr rtlCol="0" anchor="ctr"/>
-          <a:lstStyle/>
-          <a:p>
-            <a:pPr algn="ctr"/>
-          </a:p>
-        </p:txBody>
-      </p:sp>
-      <p:sp>
-        <p:nvSpPr>
-          <p:cNvPr id="12" name="TextBox 11"/>
-          <p:cNvSpPr txBox="1"/>
-          <p:nvPr/>
-        </p:nvSpPr>
-        <p:spPr>
-          <a:xfrm>
-            <a:off x="4673498" y="2788920"/>
-            <a:ext cx="2844698" cy="457200"/>
-          </a:xfrm>
-          <a:prstGeom prst="rect">
-            <a:avLst/>
-          </a:prstGeom>
-          <a:noFill/>
-        </p:spPr>
-        <p:txBody>
-          <a:bodyPr wrap="square" anchor="t">
-            <a:spAutoFit/>
-          </a:bodyPr>
-          <a:lstStyle/>
-          <a:p>
-            <a:pPr algn="l">
-              <a:lnSpc>
-                <a:spcPct val="100000"/>
-              </a:lnSpc>
-            </a:pPr>
-            <a:r>
-              <a:rPr sz="1200" b="1">
-                <a:solidFill>
-                  <a:srgbClr val="00FF41"/>
-                </a:solidFill>
-                <a:latin typeface="Courier New"/>
-              </a:rPr>
-              <a:t>THE OPTIONS</a:t>
-            </a:r>
-          </a:p>
-        </p:txBody>
-      </p:sp>
-      <p:sp>
-        <p:nvSpPr>
-          <p:cNvPr id="13" name="TextBox 12"/>
-          <p:cNvSpPr txBox="1"/>
-          <p:nvPr/>
-        </p:nvSpPr>
-        <p:spPr>
-          <a:xfrm>
-            <a:off x="4673498" y="3246120"/>
-            <a:ext cx="2844698" cy="822960"/>
-          </a:xfrm>
-          <a:prstGeom prst="rect">
-            <a:avLst/>
-          </a:prstGeom>
-          <a:noFill/>
-        </p:spPr>
-        <p:txBody>
-          <a:bodyPr wrap="square" anchor="t">
-            <a:spAutoFit/>
-          </a:bodyPr>
-          <a:lstStyle/>
-          <a:p>
-            <a:pPr algn="l">
-              <a:lnSpc>
-                <a:spcPct val="100000"/>
-              </a:lnSpc>
-            </a:pPr>
-            <a:r>
-              <a:rPr sz="2000" b="1">
-                <a:solidFill>
-                  <a:srgbClr val="F5F7FA"/>
-                </a:solidFill>
-                <a:latin typeface="Arial"/>
-              </a:rPr>
-              <a:t>All to A? Or share?</a:t>
-            </a:r>
-          </a:p>
-        </p:txBody>
-      </p:sp>
-      <p:sp>
-        <p:nvSpPr>
-          <p:cNvPr id="14" name="TextBox 13"/>
-          <p:cNvSpPr txBox="1"/>
-          <p:nvPr/>
-        </p:nvSpPr>
-        <p:spPr>
-          <a:xfrm>
-            <a:off x="4673498" y="4114800"/>
-            <a:ext cx="2844698" cy="1554480"/>
-          </a:xfrm>
-          <a:prstGeom prst="rect">
-            <a:avLst/>
-          </a:prstGeom>
-          <a:noFill/>
-        </p:spPr>
-        <p:txBody>
-          <a:bodyPr wrap="square" anchor="t">
-            <a:spAutoFit/>
-          </a:bodyPr>
-          <a:lstStyle/>
-          <a:p>
-            <a:pPr algn="l">
-              <a:lnSpc>
-                <a:spcPct val="110000"/>
-              </a:lnSpc>
-            </a:pPr>
-            <a:r>
-              <a:rPr sz="1500" b="0">
-                <a:solidFill>
-                  <a:srgbClr val="8A94A6"/>
-                </a:solidFill>
-                <a:latin typeface="Arial"/>
-              </a:rPr>
-              <a:t>All to A maximizes repayment - and leaves B nothing. Proportional shares the pot but funds a worse bet.</a:t>
-            </a:r>
-          </a:p>
-        </p:txBody>
-      </p:sp>
-      <p:sp>
-        <p:nvSpPr>
-          <p:cNvPr id="15" name="Rounded Rectangle 14"/>
-          <p:cNvSpPr/>
-          <p:nvPr/>
-        </p:nvSpPr>
-        <p:spPr>
-          <a:xfrm>
-            <a:off x="8158276" y="2468880"/>
-            <a:ext cx="3393338" cy="3383280"/>
-          </a:xfrm>
-          <a:prstGeom prst="roundRect">
-            <a:avLst/>
-          </a:prstGeom>
-          <a:solidFill>
-            <a:srgbClr val="151B26"/>
-          </a:solidFill>
-          <a:ln>
-            <a:noFill/>
-          </a:ln>
-          <a:effectLst/>
-        </p:spPr>
-        <p:style>
-          <a:lnRef idx="1">
-            <a:schemeClr val="accent1"/>
-          </a:lnRef>
-          <a:fillRef idx="3">
-            <a:schemeClr val="accent1"/>
-          </a:fillRef>
-          <a:effectRef idx="2">
-            <a:schemeClr val="accent1"/>
-          </a:effectRef>
-          <a:fontRef idx="minor">
-            <a:schemeClr val="lt1"/>
-          </a:fontRef>
-        </p:style>
-        <p:txBody>
-          <a:bodyPr rtlCol="0" anchor="ctr"/>
-          <a:lstStyle/>
-          <a:p>
-            <a:pPr algn="ctr"/>
-          </a:p>
-        </p:txBody>
-      </p:sp>
-      <p:sp>
-        <p:nvSpPr>
-          <p:cNvPr id="16" name="Rectangle 15"/>
-          <p:cNvSpPr/>
-          <p:nvPr/>
-        </p:nvSpPr>
-        <p:spPr>
-          <a:xfrm>
-            <a:off x="8158276" y="2468880"/>
-            <a:ext cx="3393338" cy="82296"/>
-          </a:xfrm>
-          <a:prstGeom prst="rect">
-            <a:avLst/>
-          </a:prstGeom>
-          <a:solidFill>
-            <a:srgbClr val="00FF41"/>
-          </a:solidFill>
-          <a:ln>
-            <a:noFill/>
-          </a:ln>
-          <a:effectLst/>
-        </p:spPr>
-        <p:style>
-          <a:lnRef idx="1">
-            <a:schemeClr val="accent1"/>
-          </a:lnRef>
-          <a:fillRef idx="3">
-            <a:schemeClr val="accent1"/>
-          </a:fillRef>
-          <a:effectRef idx="2">
-            <a:schemeClr val="accent1"/>
-          </a:effectRef>
-          <a:fontRef idx="minor">
-            <a:schemeClr val="lt1"/>
-          </a:fontRef>
-        </p:style>
-        <p:txBody>
-          <a:bodyPr rtlCol="0" anchor="ctr"/>
-          <a:lstStyle/>
-          <a:p>
-            <a:pPr algn="ctr"/>
-          </a:p>
-        </p:txBody>
-      </p:sp>
-      <p:sp>
-        <p:nvSpPr>
-          <p:cNvPr id="17" name="TextBox 16"/>
-          <p:cNvSpPr txBox="1"/>
-          <p:nvPr/>
-        </p:nvSpPr>
-        <p:spPr>
-          <a:xfrm>
-            <a:off x="8432596" y="2788920"/>
-            <a:ext cx="2844698" cy="457200"/>
-          </a:xfrm>
-          <a:prstGeom prst="rect">
-            <a:avLst/>
-          </a:prstGeom>
-          <a:noFill/>
-        </p:spPr>
-        <p:txBody>
-          <a:bodyPr wrap="square" anchor="t">
-            <a:spAutoFit/>
-          </a:bodyPr>
-          <a:lstStyle/>
-          <a:p>
-            <a:pPr algn="l">
-              <a:lnSpc>
-                <a:spcPct val="100000"/>
-              </a:lnSpc>
-            </a:pPr>
-            <a:r>
-              <a:rPr sz="1200" b="1">
-                <a:solidFill>
-                  <a:srgbClr val="00FF41"/>
-                </a:solidFill>
-                <a:latin typeface="Courier New"/>
-              </a:rPr>
-              <a:t>THE POINT</a:t>
-            </a:r>
-          </a:p>
-        </p:txBody>
-      </p:sp>
-      <p:sp>
-        <p:nvSpPr>
-          <p:cNvPr id="18" name="TextBox 17"/>
-          <p:cNvSpPr txBox="1"/>
-          <p:nvPr/>
-        </p:nvSpPr>
-        <p:spPr>
-          <a:xfrm>
-            <a:off x="8432596" y="3246120"/>
-            <a:ext cx="2844698" cy="822960"/>
-          </a:xfrm>
-          <a:prstGeom prst="rect">
-            <a:avLst/>
-          </a:prstGeom>
-          <a:noFill/>
-        </p:spPr>
-        <p:txBody>
-          <a:bodyPr wrap="square" anchor="t">
-            <a:spAutoFit/>
-          </a:bodyPr>
-          <a:lstStyle/>
-          <a:p>
-            <a:pPr algn="l">
-              <a:lnSpc>
-                <a:spcPct val="100000"/>
-              </a:lnSpc>
-            </a:pPr>
-            <a:r>
-              <a:rPr sz="2000" b="1">
-                <a:solidFill>
-                  <a:srgbClr val="F5F7FA"/>
-                </a:solidFill>
-                <a:latin typeface="Arial"/>
-              </a:rPr>
-              <a:t>No free lunch</a:t>
-            </a:r>
-          </a:p>
-        </p:txBody>
-      </p:sp>
-      <p:sp>
-        <p:nvSpPr>
-          <p:cNvPr id="19" name="TextBox 18"/>
-          <p:cNvSpPr txBox="1"/>
-          <p:nvPr/>
-        </p:nvSpPr>
-        <p:spPr>
-          <a:xfrm>
-            <a:off x="8432596" y="4114800"/>
-            <a:ext cx="2844698" cy="1554480"/>
-          </a:xfrm>
-          <a:prstGeom prst="rect">
-            <a:avLst/>
-          </a:prstGeom>
-          <a:noFill/>
-        </p:spPr>
-        <p:txBody>
-          <a:bodyPr wrap="square" anchor="t">
-            <a:spAutoFit/>
-          </a:bodyPr>
-          <a:lstStyle/>
-          <a:p>
-            <a:pPr algn="l">
-              <a:lnSpc>
-                <a:spcPct val="110000"/>
-              </a:lnSpc>
-            </a:pPr>
-            <a:r>
-              <a:rPr sz="1500" b="0">
-                <a:solidFill>
-                  <a:srgbClr val="8A94A6"/>
-                </a:solidFill>
-                <a:latin typeface="Arial"/>
-              </a:rPr>
-              <a:t>A single algorithm can't satisfy every definition of fairness. Someone chooses - make it conscious.</a:t>
-            </a:r>
-          </a:p>
-        </p:txBody>
-      </p:sp>
-      <p:sp>
-        <p:nvSpPr>
-          <p:cNvPr id="20" name="TextBox 19"/>
-          <p:cNvSpPr txBox="1"/>
-          <p:nvPr/>
-        </p:nvSpPr>
-        <p:spPr>
-          <a:xfrm>
-            <a:off x="640080" y="6355080"/>
-            <a:ext cx="10972800" cy="365760"/>
-          </a:xfrm>
-          <a:prstGeom prst="rect">
-            <a:avLst/>
-          </a:prstGeom>
-          <a:noFill/>
-        </p:spPr>
-        <p:txBody>
-          <a:bodyPr wrap="square" anchor="t">
-            <a:spAutoFit/>
-          </a:bodyPr>
-          <a:lstStyle/>
-          <a:p>
-            <a:pPr algn="l">
-              <a:lnSpc>
-                <a:spcPct val="100000"/>
-              </a:lnSpc>
-            </a:pPr>
-            <a:r>
-              <a:rPr sz="1000" b="0">
-                <a:solidFill>
-                  <a:srgbClr val="5A6474"/>
-                </a:solidFill>
-                <a:latin typeface="Courier New"/>
-              </a:rPr>
-              <a:t>Good Code, Good Vibes · TECHIE 1121 · Cornell Tech · Summer 2026</a:t>
+              <a:t>Translate values into features - and resolve the clashes</a:t>
             </a:r>
           </a:p>
         </p:txBody>
@@ -7354,7 +7211,7 @@
                 </a:solidFill>
                 <a:latin typeface="Courier New"/>
               </a:rPr>
-              <a:t>BREAK</a:t>
+              <a:t>TRANSLATE</a:t>
             </a:r>
           </a:p>
         </p:txBody>
@@ -7403,16 +7260,41 @@
           </a:p>
         </p:txBody>
       </p:sp>
-      <p:sp>
-        <p:nvSpPr>
-          <p:cNvPr id="4" name="TextBox 3"/>
+      <p:pic>
+        <p:nvPicPr>
+          <p:cNvPr id="4" name="Picture 3" descr="giant_joystick.png"/>
+          <p:cNvPicPr>
+            <a:picLocks noChangeAspect="1"/>
+          </p:cNvPicPr>
+          <p:nvPr/>
+        </p:nvPicPr>
+        <p:blipFill>
+          <a:blip r:embed="rId2"/>
+          <a:srcRect l="29000" r="29000"/>
+          <a:stretch>
+            <a:fillRect/>
+          </a:stretch>
+        </p:blipFill>
+        <p:spPr>
+          <a:xfrm>
+            <a:off x="7071055" y="0"/>
+            <a:ext cx="5120640" cy="6858000"/>
+          </a:xfrm>
+          <a:prstGeom prst="rect">
+            <a:avLst/>
+          </a:prstGeom>
+        </p:spPr>
+      </p:pic>
+      <p:sp>
+        <p:nvSpPr>
+          <p:cNvPr id="5" name="TextBox 4"/>
           <p:cNvSpPr txBox="1"/>
           <p:nvPr/>
         </p:nvSpPr>
         <p:spPr>
           <a:xfrm>
             <a:off x="640080" y="1188720"/>
-            <a:ext cx="10972800" cy="1097280"/>
+            <a:ext cx="6019495" cy="1280160"/>
           </a:xfrm>
           <a:prstGeom prst="rect">
             <a:avLst/>
@@ -7431,59 +7313,174 @@
               </a:lnSpc>
             </a:pPr>
             <a:r>
-              <a:rPr sz="3400" b="1">
+              <a:rPr sz="3000" b="1">
                 <a:solidFill>
                   <a:srgbClr val="F5F7FA"/>
                 </a:solidFill>
                 <a:latin typeface="Arial"/>
               </a:rPr>
-              <a:t>~10 minutes</a:t>
-            </a:r>
-          </a:p>
-        </p:txBody>
-      </p:sp>
-      <p:sp>
-        <p:nvSpPr>
-          <p:cNvPr id="5" name="TextBox 4"/>
-          <p:cNvSpPr txBox="1"/>
-          <p:nvPr/>
-        </p:nvSpPr>
-        <p:spPr>
-          <a:xfrm>
-            <a:off x="658368" y="2286000"/>
-            <a:ext cx="10881360" cy="3657600"/>
-          </a:xfrm>
-          <a:prstGeom prst="rect">
-            <a:avLst/>
-          </a:prstGeom>
-          <a:noFill/>
-        </p:spPr>
-        <p:txBody>
-          <a:bodyPr wrap="square" anchor="t">
-            <a:spAutoFit/>
-          </a:bodyPr>
-          <a:lstStyle/>
-          <a:p>
-            <a:pPr algn="l">
-              <a:lnSpc>
-                <a:spcPct val="112000"/>
-              </a:lnSpc>
-            </a:pPr>
-            <a:r>
-              <a:rPr sz="2200" b="0">
+              <a:t>From a value to a spec</a:t>
+            </a:r>
+          </a:p>
+        </p:txBody>
+      </p:sp>
+      <p:sp>
+        <p:nvSpPr>
+          <p:cNvPr id="6" name="TextBox 5"/>
+          <p:cNvSpPr txBox="1"/>
+          <p:nvPr/>
+        </p:nvSpPr>
+        <p:spPr>
+          <a:xfrm>
+            <a:off x="640080" y="2560320"/>
+            <a:ext cx="6019495" cy="3108960"/>
+          </a:xfrm>
+          <a:prstGeom prst="rect">
+            <a:avLst/>
+          </a:prstGeom>
+          <a:noFill/>
+        </p:spPr>
+        <p:txBody>
+          <a:bodyPr wrap="square" anchor="t">
+            <a:spAutoFit/>
+          </a:bodyPr>
+          <a:lstStyle/>
+          <a:p>
+            <a:pPr algn="l">
+              <a:lnSpc>
+                <a:spcPct val="116000"/>
+              </a:lnSpc>
+            </a:pPr>
+            <a:r>
+              <a:rPr sz="1900" b="0">
                 <a:solidFill>
                   <a:srgbClr val="F5F7FA"/>
                 </a:solidFill>
                 <a:latin typeface="Arial"/>
               </a:rPr>
-              <a:t>Back soon - next we turn values into features, and handle the clashes.</a:t>
-            </a:r>
-          </a:p>
-        </p:txBody>
-      </p:sp>
-      <p:sp>
-        <p:nvSpPr>
-          <p:cNvPr id="6" name="TextBox 5"/>
+              <a:t>Implementation turns an ethical or political value into concrete requirements, features, and architecture.</a:t>
+            </a:r>
+          </a:p>
+          <a:p>
+            <a:pPr algn="l">
+              <a:lnSpc>
+                <a:spcPct val="116000"/>
+              </a:lnSpc>
+            </a:pPr>
+            <a:r>
+              <a:rPr sz="1900" b="0">
+                <a:solidFill>
+                  <a:srgbClr val="F5F7FA"/>
+                </a:solidFill>
+                <a:latin typeface="Arial"/>
+              </a:rPr>
+              <a:t/>
+            </a:r>
+          </a:p>
+          <a:p>
+            <a:pPr algn="l">
+              <a:lnSpc>
+                <a:spcPct val="116000"/>
+              </a:lnSpc>
+            </a:pPr>
+            <a:r>
+              <a:rPr sz="1700" b="0">
+                <a:solidFill>
+                  <a:srgbClr val="8A94A6"/>
+                </a:solidFill>
+                <a:latin typeface="Arial"/>
+              </a:rPr>
+              <a:t>Mary Flanagan's Giant Joystick makes "play" physical - one value, rebuilt into the hardware itself.</a:t>
+            </a:r>
+          </a:p>
+        </p:txBody>
+      </p:sp>
+      <p:sp>
+        <p:nvSpPr>
+          <p:cNvPr id="7" name="Rectangle 6"/>
+          <p:cNvSpPr/>
+          <p:nvPr/>
+        </p:nvSpPr>
+        <p:spPr>
+          <a:xfrm>
+            <a:off x="7071055" y="6547104"/>
+            <a:ext cx="5120640" cy="310896"/>
+          </a:xfrm>
+          <a:prstGeom prst="rect">
+            <a:avLst/>
+          </a:prstGeom>
+          <a:solidFill>
+            <a:srgbClr val="0B0E14"/>
+          </a:solidFill>
+          <a:ln>
+            <a:noFill/>
+          </a:ln>
+          <a:effectLst/>
+        </p:spPr>
+        <p:style>
+          <a:lnRef idx="1">
+            <a:schemeClr val="accent1"/>
+          </a:lnRef>
+          <a:fillRef idx="3">
+            <a:schemeClr val="accent1"/>
+          </a:fillRef>
+          <a:effectRef idx="2">
+            <a:schemeClr val="accent1"/>
+          </a:effectRef>
+          <a:fontRef idx="minor">
+            <a:schemeClr val="lt1"/>
+          </a:fontRef>
+        </p:style>
+        <p:txBody>
+          <a:bodyPr rtlCol="0" anchor="ctr"/>
+          <a:lstStyle/>
+          <a:p>
+            <a:pPr algn="ctr"/>
+          </a:p>
+        </p:txBody>
+      </p:sp>
+      <p:sp>
+        <p:nvSpPr>
+          <p:cNvPr id="8" name="TextBox 7"/>
+          <p:cNvSpPr txBox="1"/>
+          <p:nvPr/>
+        </p:nvSpPr>
+        <p:spPr>
+          <a:xfrm>
+            <a:off x="7208215" y="6565392"/>
+            <a:ext cx="4846320" cy="274320"/>
+          </a:xfrm>
+          <a:prstGeom prst="rect">
+            <a:avLst/>
+          </a:prstGeom>
+          <a:noFill/>
+        </p:spPr>
+        <p:txBody>
+          <a:bodyPr wrap="square" anchor="t">
+            <a:spAutoFit/>
+          </a:bodyPr>
+          <a:lstStyle/>
+          <a:p>
+            <a:pPr algn="l">
+              <a:lnSpc>
+                <a:spcPct val="100000"/>
+              </a:lnSpc>
+            </a:pPr>
+            <a:r>
+              <a:rPr sz="850" b="0">
+                <a:solidFill>
+                  <a:srgbClr val="8A94A6"/>
+                </a:solidFill>
+                <a:latin typeface="Courier New"/>
+              </a:rPr>
+              <a:t>Mary Flanagan, 'Giant Joystick' - Values at Play (educational use)</a:t>
+            </a:r>
+          </a:p>
+        </p:txBody>
+      </p:sp>
+      <p:sp>
+        <p:nvSpPr>
+          <p:cNvPr id="9" name="TextBox 8"/>
           <p:cNvSpPr txBox="1"/>
           <p:nvPr/>
         </p:nvSpPr>
@@ -7806,14 +7803,53 @@
       <p:grpSpPr/>
       <p:sp>
         <p:nvSpPr>
-          <p:cNvPr id="2" name="Rectangle 1"/>
+          <p:cNvPr id="2" name="TextBox 1"/>
+          <p:cNvSpPr txBox="1"/>
+          <p:nvPr/>
+        </p:nvSpPr>
+        <p:spPr>
+          <a:xfrm>
+            <a:off x="640080" y="502920"/>
+            <a:ext cx="10058400" cy="365760"/>
+          </a:xfrm>
+          <a:prstGeom prst="rect">
+            <a:avLst/>
+          </a:prstGeom>
+          <a:noFill/>
+        </p:spPr>
+        <p:txBody>
+          <a:bodyPr wrap="square" anchor="t">
+            <a:spAutoFit/>
+          </a:bodyPr>
+          <a:lstStyle/>
+          <a:p>
+            <a:pPr algn="l">
+              <a:lnSpc>
+                <a:spcPct val="100000"/>
+              </a:lnSpc>
+            </a:pPr>
+            <a:r>
+              <a:rPr sz="1300" b="1">
+                <a:solidFill>
+                  <a:srgbClr val="00FF41"/>
+                </a:solidFill>
+                <a:latin typeface="Courier New"/>
+              </a:rPr>
+              <a:t>DESIGN CHOICES CARRY VALUES</a:t>
+            </a:r>
+          </a:p>
+        </p:txBody>
+      </p:sp>
+      <p:sp>
+        <p:nvSpPr>
+          <p:cNvPr id="3" name="Rectangle 2"/>
           <p:cNvSpPr/>
           <p:nvPr/>
         </p:nvSpPr>
         <p:spPr>
           <a:xfrm>
-            <a:off x="0" y="0"/>
-            <a:ext cx="256032" cy="6858000"/>
+            <a:off x="640080" y="932688"/>
+            <a:ext cx="822960" cy="73152"/>
           </a:xfrm>
           <a:prstGeom prst="rect">
             <a:avLst/>
@@ -7850,14 +7886,14 @@
       </p:sp>
       <p:sp>
         <p:nvSpPr>
-          <p:cNvPr id="3" name="TextBox 2"/>
-          <p:cNvSpPr txBox="1"/>
-          <p:nvPr/>
-        </p:nvSpPr>
-        <p:spPr>
-          <a:xfrm>
-            <a:off x="822960" y="2194560"/>
-            <a:ext cx="10515600" cy="548640"/>
+          <p:cNvPr id="4" name="TextBox 3"/>
+          <p:cNvSpPr txBox="1"/>
+          <p:nvPr/>
+        </p:nvSpPr>
+        <p:spPr>
+          <a:xfrm>
+            <a:off x="640080" y="1188720"/>
+            <a:ext cx="10972800" cy="1097280"/>
           </a:xfrm>
           <a:prstGeom prst="rect">
             <a:avLst/>
@@ -7876,52 +7912,175 @@
               </a:lnSpc>
             </a:pPr>
             <a:r>
-              <a:rPr sz="1800" b="1">
+              <a:rPr sz="3400" b="1">
+                <a:solidFill>
+                  <a:srgbClr val="F5F7FA"/>
+                </a:solidFill>
+                <a:latin typeface="Arial"/>
+              </a:rPr>
+              <a:t>The same feed, two values</a:t>
+            </a:r>
+          </a:p>
+        </p:txBody>
+      </p:sp>
+      <p:sp>
+        <p:nvSpPr>
+          <p:cNvPr id="5" name="TextBox 4"/>
+          <p:cNvSpPr txBox="1"/>
+          <p:nvPr/>
+        </p:nvSpPr>
+        <p:spPr>
+          <a:xfrm>
+            <a:off x="658368" y="2286000"/>
+            <a:ext cx="10881360" cy="3657600"/>
+          </a:xfrm>
+          <a:prstGeom prst="rect">
+            <a:avLst/>
+          </a:prstGeom>
+          <a:noFill/>
+        </p:spPr>
+        <p:txBody>
+          <a:bodyPr wrap="square" anchor="t">
+            <a:spAutoFit/>
+          </a:bodyPr>
+          <a:lstStyle/>
+          <a:p>
+            <a:pPr algn="l">
+              <a:lnSpc>
+                <a:spcPct val="112000"/>
+              </a:lnSpc>
+            </a:pPr>
+            <a:r>
+              <a:rPr sz="2000" b="0">
+                <a:solidFill>
+                  <a:srgbClr val="F5F7FA"/>
+                </a:solidFill>
+                <a:latin typeface="Arial"/>
+              </a:rPr>
+              <a:t>Design a social-media feed for </a:t>
+            </a:r>
+            <a:r>
+              <a:rPr sz="2000" b="1">
+                <a:solidFill>
+                  <a:srgbClr val="FF4D4D"/>
+                </a:solidFill>
+                <a:latin typeface="Arial"/>
+              </a:rPr>
+              <a:t>engagement</a:t>
+            </a:r>
+            <a:r>
+              <a:rPr sz="2000" b="0">
+                <a:solidFill>
+                  <a:srgbClr val="F5F7FA"/>
+                </a:solidFill>
+                <a:latin typeface="Arial"/>
+              </a:rPr>
+              <a:t>, and you get autoplay, streaks, and notifications - "push people's buttons."</a:t>
+            </a:r>
+          </a:p>
+          <a:p>
+            <a:pPr algn="l">
+              <a:lnSpc>
+                <a:spcPct val="112000"/>
+              </a:lnSpc>
+            </a:pPr>
+            <a:r>
+              <a:rPr sz="2000" b="0">
+                <a:solidFill>
+                  <a:srgbClr val="F5F7FA"/>
+                </a:solidFill>
+                <a:latin typeface="Arial"/>
+              </a:rPr>
+              <a:t>Design it for </a:t>
+            </a:r>
+            <a:r>
+              <a:rPr sz="2000" b="1">
                 <a:solidFill>
                   <a:srgbClr val="00FF41"/>
                 </a:solidFill>
+                <a:latin typeface="Arial"/>
+              </a:rPr>
+              <a:t>autonomy</a:t>
+            </a:r>
+            <a:r>
+              <a:rPr sz="2000" b="0">
+                <a:solidFill>
+                  <a:srgbClr val="F5F7FA"/>
+                </a:solidFill>
+                <a:latin typeface="Arial"/>
+              </a:rPr>
+              <a:t>, and you add friction, stopping points, and real user control.</a:t>
+            </a:r>
+          </a:p>
+          <a:p>
+            <a:pPr algn="l">
+              <a:lnSpc>
+                <a:spcPct val="112000"/>
+              </a:lnSpc>
+            </a:pPr>
+            <a:r>
+              <a:rPr sz="2000" b="0">
+                <a:solidFill>
+                  <a:srgbClr val="F5F7FA"/>
+                </a:solidFill>
+                <a:latin typeface="Arial"/>
+              </a:rPr>
+              <a:t/>
+            </a:r>
+          </a:p>
+          <a:p>
+            <a:pPr algn="l">
+              <a:lnSpc>
+                <a:spcPct val="112000"/>
+              </a:lnSpc>
+            </a:pPr>
+            <a:r>
+              <a:rPr sz="1700" b="0">
+                <a:solidFill>
+                  <a:srgbClr val="8A94A6"/>
+                </a:solidFill>
+                <a:latin typeface="Arial"/>
+              </a:rPr>
+              <a:t>Same product. The values show up in the defaults.</a:t>
+            </a:r>
+          </a:p>
+        </p:txBody>
+      </p:sp>
+      <p:sp>
+        <p:nvSpPr>
+          <p:cNvPr id="6" name="TextBox 5"/>
+          <p:cNvSpPr txBox="1"/>
+          <p:nvPr/>
+        </p:nvSpPr>
+        <p:spPr>
+          <a:xfrm>
+            <a:off x="640080" y="6355080"/>
+            <a:ext cx="10972800" cy="365760"/>
+          </a:xfrm>
+          <a:prstGeom prst="rect">
+            <a:avLst/>
+          </a:prstGeom>
+          <a:noFill/>
+        </p:spPr>
+        <p:txBody>
+          <a:bodyPr wrap="square" anchor="t">
+            <a:spAutoFit/>
+          </a:bodyPr>
+          <a:lstStyle/>
+          <a:p>
+            <a:pPr algn="l">
+              <a:lnSpc>
+                <a:spcPct val="100000"/>
+              </a:lnSpc>
+            </a:pPr>
+            <a:r>
+              <a:rPr sz="1000" b="0">
+                <a:solidFill>
+                  <a:srgbClr val="5A6474"/>
+                </a:solidFill>
                 <a:latin typeface="Courier New"/>
               </a:rPr>
-              <a:t>PART 3 - IMPLEMENTATION</a:t>
-            </a:r>
-          </a:p>
-        </p:txBody>
-      </p:sp>
-      <p:sp>
-        <p:nvSpPr>
-          <p:cNvPr id="4" name="TextBox 3"/>
-          <p:cNvSpPr txBox="1"/>
-          <p:nvPr/>
-        </p:nvSpPr>
-        <p:spPr>
-          <a:xfrm>
-            <a:off x="804672" y="2743200"/>
-            <a:ext cx="10515600" cy="1554480"/>
-          </a:xfrm>
-          <a:prstGeom prst="rect">
-            <a:avLst/>
-          </a:prstGeom>
-          <a:noFill/>
-        </p:spPr>
-        <p:txBody>
-          <a:bodyPr wrap="square" anchor="t">
-            <a:spAutoFit/>
-          </a:bodyPr>
-          <a:lstStyle/>
-          <a:p>
-            <a:pPr algn="l">
-              <a:lnSpc>
-                <a:spcPct val="100000"/>
-              </a:lnSpc>
-            </a:pPr>
-            <a:r>
-              <a:rPr sz="4800" b="1">
-                <a:solidFill>
-                  <a:srgbClr val="F5F7FA"/>
-                </a:solidFill>
-                <a:latin typeface="Arial"/>
-              </a:rPr>
-              <a:t>Translate values into features - and resolve the clashes</a:t>
+              <a:t>Good Code, Good Vibes · TECHIE 1121 · Cornell Tech · Summer 2026</a:t>
             </a:r>
           </a:p>
         </p:txBody>
@@ -7986,7 +8145,7 @@
                 </a:solidFill>
                 <a:latin typeface="Courier New"/>
               </a:rPr>
-              <a:t>TRANSLATE</a:t>
+              <a:t>WHEN VALUES CLASH</a:t>
             </a:r>
           </a:p>
         </p:txBody>
@@ -8035,41 +8194,16 @@
           </a:p>
         </p:txBody>
       </p:sp>
-      <p:pic>
-        <p:nvPicPr>
-          <p:cNvPr id="4" name="Picture 3" descr="giant_joystick.png"/>
-          <p:cNvPicPr>
-            <a:picLocks noChangeAspect="1"/>
-          </p:cNvPicPr>
-          <p:nvPr/>
-        </p:nvPicPr>
-        <p:blipFill>
-          <a:blip r:embed="rId2"/>
-          <a:srcRect l="29000" r="29000"/>
-          <a:stretch>
-            <a:fillRect/>
-          </a:stretch>
-        </p:blipFill>
-        <p:spPr>
-          <a:xfrm>
-            <a:off x="7071055" y="0"/>
-            <a:ext cx="5120640" cy="6858000"/>
-          </a:xfrm>
-          <a:prstGeom prst="rect">
-            <a:avLst/>
-          </a:prstGeom>
-        </p:spPr>
-      </p:pic>
-      <p:sp>
-        <p:nvSpPr>
-          <p:cNvPr id="5" name="TextBox 4"/>
+      <p:sp>
+        <p:nvSpPr>
+          <p:cNvPr id="4" name="TextBox 3"/>
           <p:cNvSpPr txBox="1"/>
           <p:nvPr/>
         </p:nvSpPr>
         <p:spPr>
           <a:xfrm>
             <a:off x="640080" y="1188720"/>
-            <a:ext cx="6019495" cy="1280160"/>
+            <a:ext cx="10972800" cy="914400"/>
           </a:xfrm>
           <a:prstGeom prst="rect">
             <a:avLst/>
@@ -8088,104 +8222,33 @@
               </a:lnSpc>
             </a:pPr>
             <a:r>
-              <a:rPr sz="3000" b="1">
+              <a:rPr sz="3200" b="1">
                 <a:solidFill>
                   <a:srgbClr val="F5F7FA"/>
                 </a:solidFill>
                 <a:latin typeface="Arial"/>
               </a:rPr>
-              <a:t>From a value to a spec</a:t>
-            </a:r>
-          </a:p>
-        </p:txBody>
-      </p:sp>
-      <p:sp>
-        <p:nvSpPr>
-          <p:cNvPr id="6" name="TextBox 5"/>
-          <p:cNvSpPr txBox="1"/>
-          <p:nvPr/>
-        </p:nvSpPr>
-        <p:spPr>
-          <a:xfrm>
-            <a:off x="640080" y="2560320"/>
-            <a:ext cx="6019495" cy="3108960"/>
-          </a:xfrm>
-          <a:prstGeom prst="rect">
-            <a:avLst/>
-          </a:prstGeom>
-          <a:noFill/>
-        </p:spPr>
-        <p:txBody>
-          <a:bodyPr wrap="square" anchor="t">
-            <a:spAutoFit/>
-          </a:bodyPr>
-          <a:lstStyle/>
-          <a:p>
-            <a:pPr algn="l">
-              <a:lnSpc>
-                <a:spcPct val="116000"/>
-              </a:lnSpc>
-            </a:pPr>
-            <a:r>
-              <a:rPr sz="1900" b="0">
-                <a:solidFill>
-                  <a:srgbClr val="F5F7FA"/>
-                </a:solidFill>
-                <a:latin typeface="Arial"/>
-              </a:rPr>
-              <a:t>Implementation turns an ethical or political value into concrete requirements, features, and architecture.</a:t>
-            </a:r>
-          </a:p>
-          <a:p>
-            <a:pPr algn="l">
-              <a:lnSpc>
-                <a:spcPct val="116000"/>
-              </a:lnSpc>
-            </a:pPr>
-            <a:r>
-              <a:rPr sz="1900" b="0">
-                <a:solidFill>
-                  <a:srgbClr val="F5F7FA"/>
-                </a:solidFill>
-                <a:latin typeface="Arial"/>
-              </a:rPr>
-              <a:t/>
-            </a:r>
-          </a:p>
-          <a:p>
-            <a:pPr algn="l">
-              <a:lnSpc>
-                <a:spcPct val="116000"/>
-              </a:lnSpc>
-            </a:pPr>
-            <a:r>
-              <a:rPr sz="1700" b="0">
-                <a:solidFill>
-                  <a:srgbClr val="8A94A6"/>
-                </a:solidFill>
-                <a:latin typeface="Arial"/>
-              </a:rPr>
-              <a:t>Mary Flanagan's Giant Joystick makes "play" physical - one value, rebuilt into the hardware itself.</a:t>
-            </a:r>
-          </a:p>
-        </p:txBody>
-      </p:sp>
-      <p:sp>
-        <p:nvSpPr>
-          <p:cNvPr id="7" name="Rectangle 6"/>
+              <a:t>Name the resolution - out loud</a:t>
+            </a:r>
+          </a:p>
+        </p:txBody>
+      </p:sp>
+      <p:sp>
+        <p:nvSpPr>
+          <p:cNvPr id="5" name="Rounded Rectangle 4"/>
           <p:cNvSpPr/>
           <p:nvPr/>
         </p:nvSpPr>
         <p:spPr>
           <a:xfrm>
-            <a:off x="7071055" y="6547104"/>
-            <a:ext cx="5120640" cy="310896"/>
-          </a:xfrm>
-          <a:prstGeom prst="rect">
+            <a:off x="640080" y="2468880"/>
+            <a:ext cx="3393338" cy="3383280"/>
+          </a:xfrm>
+          <a:prstGeom prst="roundRect">
             <a:avLst/>
           </a:prstGeom>
           <a:solidFill>
-            <a:srgbClr val="0B0E14"/>
+            <a:srgbClr val="151B26"/>
           </a:solidFill>
           <a:ln>
             <a:noFill/>
@@ -8216,14 +8279,97 @@
       </p:sp>
       <p:sp>
         <p:nvSpPr>
+          <p:cNvPr id="6" name="Rectangle 5"/>
+          <p:cNvSpPr/>
+          <p:nvPr/>
+        </p:nvSpPr>
+        <p:spPr>
+          <a:xfrm>
+            <a:off x="640080" y="2468880"/>
+            <a:ext cx="3393338" cy="82296"/>
+          </a:xfrm>
+          <a:prstGeom prst="rect">
+            <a:avLst/>
+          </a:prstGeom>
+          <a:solidFill>
+            <a:srgbClr val="00FF41"/>
+          </a:solidFill>
+          <a:ln>
+            <a:noFill/>
+          </a:ln>
+          <a:effectLst/>
+        </p:spPr>
+        <p:style>
+          <a:lnRef idx="1">
+            <a:schemeClr val="accent1"/>
+          </a:lnRef>
+          <a:fillRef idx="3">
+            <a:schemeClr val="accent1"/>
+          </a:fillRef>
+          <a:effectRef idx="2">
+            <a:schemeClr val="accent1"/>
+          </a:effectRef>
+          <a:fontRef idx="minor">
+            <a:schemeClr val="lt1"/>
+          </a:fontRef>
+        </p:style>
+        <p:txBody>
+          <a:bodyPr rtlCol="0" anchor="ctr"/>
+          <a:lstStyle/>
+          <a:p>
+            <a:pPr algn="ctr"/>
+          </a:p>
+        </p:txBody>
+      </p:sp>
+      <p:sp>
+        <p:nvSpPr>
+          <p:cNvPr id="7" name="TextBox 6"/>
+          <p:cNvSpPr txBox="1"/>
+          <p:nvPr/>
+        </p:nvSpPr>
+        <p:spPr>
+          <a:xfrm>
+            <a:off x="914400" y="2788920"/>
+            <a:ext cx="2844698" cy="457200"/>
+          </a:xfrm>
+          <a:prstGeom prst="rect">
+            <a:avLst/>
+          </a:prstGeom>
+          <a:noFill/>
+        </p:spPr>
+        <p:txBody>
+          <a:bodyPr wrap="square" anchor="t">
+            <a:spAutoFit/>
+          </a:bodyPr>
+          <a:lstStyle/>
+          <a:p>
+            <a:pPr algn="l">
+              <a:lnSpc>
+                <a:spcPct val="100000"/>
+              </a:lnSpc>
+            </a:pPr>
+            <a:r>
+              <a:rPr sz="1200" b="1">
+                <a:solidFill>
+                  <a:srgbClr val="00FF41"/>
+                </a:solidFill>
+                <a:latin typeface="Courier New"/>
+              </a:rPr>
+              <a:t>DISSOLVE</a:t>
+            </a:r>
+          </a:p>
+        </p:txBody>
+      </p:sp>
+      <p:sp>
+        <p:nvSpPr>
           <p:cNvPr id="8" name="TextBox 7"/>
           <p:cNvSpPr txBox="1"/>
           <p:nvPr/>
         </p:nvSpPr>
         <p:spPr>
           <a:xfrm>
-            <a:off x="7208215" y="6565392"/>
-            <a:ext cx="4846320" cy="274320"/>
+            <a:off x="914400" y="3246120"/>
+            <a:ext cx="2844698" cy="822960"/>
           </a:xfrm>
           <a:prstGeom prst="rect">
             <a:avLst/>
@@ -8242,20 +8388,469 @@
               </a:lnSpc>
             </a:pPr>
             <a:r>
-              <a:rPr sz="850" b="0">
+              <a:rPr sz="2000" b="1">
+                <a:solidFill>
+                  <a:srgbClr val="F5F7FA"/>
+                </a:solidFill>
+                <a:latin typeface="Arial"/>
+              </a:rPr>
+              <a:t>Redesign around it</a:t>
+            </a:r>
+          </a:p>
+        </p:txBody>
+      </p:sp>
+      <p:sp>
+        <p:nvSpPr>
+          <p:cNvPr id="9" name="TextBox 8"/>
+          <p:cNvSpPr txBox="1"/>
+          <p:nvPr/>
+        </p:nvSpPr>
+        <p:spPr>
+          <a:xfrm>
+            <a:off x="914400" y="4114800"/>
+            <a:ext cx="2844698" cy="1554480"/>
+          </a:xfrm>
+          <a:prstGeom prst="rect">
+            <a:avLst/>
+          </a:prstGeom>
+          <a:noFill/>
+        </p:spPr>
+        <p:txBody>
+          <a:bodyPr wrap="square" anchor="t">
+            <a:spAutoFit/>
+          </a:bodyPr>
+          <a:lstStyle/>
+          <a:p>
+            <a:pPr algn="l">
+              <a:lnSpc>
+                <a:spcPct val="110000"/>
+              </a:lnSpc>
+            </a:pPr>
+            <a:r>
+              <a:rPr sz="1500" b="0">
                 <a:solidFill>
                   <a:srgbClr val="8A94A6"/>
                 </a:solidFill>
+                <a:latin typeface="Arial"/>
+              </a:rPr>
+              <a:t>Find a design where BOTH values hold. (Vacuum: on-device maps, nothing to the cloud.)</a:t>
+            </a:r>
+          </a:p>
+        </p:txBody>
+      </p:sp>
+      <p:sp>
+        <p:nvSpPr>
+          <p:cNvPr id="10" name="Rounded Rectangle 9"/>
+          <p:cNvSpPr/>
+          <p:nvPr/>
+        </p:nvSpPr>
+        <p:spPr>
+          <a:xfrm>
+            <a:off x="4399178" y="2468880"/>
+            <a:ext cx="3393338" cy="3383280"/>
+          </a:xfrm>
+          <a:prstGeom prst="roundRect">
+            <a:avLst/>
+          </a:prstGeom>
+          <a:solidFill>
+            <a:srgbClr val="151B26"/>
+          </a:solidFill>
+          <a:ln>
+            <a:noFill/>
+          </a:ln>
+          <a:effectLst/>
+        </p:spPr>
+        <p:style>
+          <a:lnRef idx="1">
+            <a:schemeClr val="accent1"/>
+          </a:lnRef>
+          <a:fillRef idx="3">
+            <a:schemeClr val="accent1"/>
+          </a:fillRef>
+          <a:effectRef idx="2">
+            <a:schemeClr val="accent1"/>
+          </a:effectRef>
+          <a:fontRef idx="minor">
+            <a:schemeClr val="lt1"/>
+          </a:fontRef>
+        </p:style>
+        <p:txBody>
+          <a:bodyPr rtlCol="0" anchor="ctr"/>
+          <a:lstStyle/>
+          <a:p>
+            <a:pPr algn="ctr"/>
+          </a:p>
+        </p:txBody>
+      </p:sp>
+      <p:sp>
+        <p:nvSpPr>
+          <p:cNvPr id="11" name="Rectangle 10"/>
+          <p:cNvSpPr/>
+          <p:nvPr/>
+        </p:nvSpPr>
+        <p:spPr>
+          <a:xfrm>
+            <a:off x="4399178" y="2468880"/>
+            <a:ext cx="3393338" cy="82296"/>
+          </a:xfrm>
+          <a:prstGeom prst="rect">
+            <a:avLst/>
+          </a:prstGeom>
+          <a:solidFill>
+            <a:srgbClr val="00FF41"/>
+          </a:solidFill>
+          <a:ln>
+            <a:noFill/>
+          </a:ln>
+          <a:effectLst/>
+        </p:spPr>
+        <p:style>
+          <a:lnRef idx="1">
+            <a:schemeClr val="accent1"/>
+          </a:lnRef>
+          <a:fillRef idx="3">
+            <a:schemeClr val="accent1"/>
+          </a:fillRef>
+          <a:effectRef idx="2">
+            <a:schemeClr val="accent1"/>
+          </a:effectRef>
+          <a:fontRef idx="minor">
+            <a:schemeClr val="lt1"/>
+          </a:fontRef>
+        </p:style>
+        <p:txBody>
+          <a:bodyPr rtlCol="0" anchor="ctr"/>
+          <a:lstStyle/>
+          <a:p>
+            <a:pPr algn="ctr"/>
+          </a:p>
+        </p:txBody>
+      </p:sp>
+      <p:sp>
+        <p:nvSpPr>
+          <p:cNvPr id="12" name="TextBox 11"/>
+          <p:cNvSpPr txBox="1"/>
+          <p:nvPr/>
+        </p:nvSpPr>
+        <p:spPr>
+          <a:xfrm>
+            <a:off x="4673498" y="2788920"/>
+            <a:ext cx="2844698" cy="457200"/>
+          </a:xfrm>
+          <a:prstGeom prst="rect">
+            <a:avLst/>
+          </a:prstGeom>
+          <a:noFill/>
+        </p:spPr>
+        <p:txBody>
+          <a:bodyPr wrap="square" anchor="t">
+            <a:spAutoFit/>
+          </a:bodyPr>
+          <a:lstStyle/>
+          <a:p>
+            <a:pPr algn="l">
+              <a:lnSpc>
+                <a:spcPct val="100000"/>
+              </a:lnSpc>
+            </a:pPr>
+            <a:r>
+              <a:rPr sz="1200" b="1">
+                <a:solidFill>
+                  <a:srgbClr val="00FF41"/>
+                </a:solidFill>
                 <a:latin typeface="Courier New"/>
               </a:rPr>
-              <a:t>Mary Flanagan, 'Giant Joystick' - Values at Play (educational use)</a:t>
-            </a:r>
-          </a:p>
-        </p:txBody>
-      </p:sp>
-      <p:sp>
-        <p:nvSpPr>
-          <p:cNvPr id="9" name="TextBox 8"/>
+              <a:t>COMPROMISE</a:t>
+            </a:r>
+          </a:p>
+        </p:txBody>
+      </p:sp>
+      <p:sp>
+        <p:nvSpPr>
+          <p:cNvPr id="13" name="TextBox 12"/>
+          <p:cNvSpPr txBox="1"/>
+          <p:nvPr/>
+        </p:nvSpPr>
+        <p:spPr>
+          <a:xfrm>
+            <a:off x="4673498" y="3246120"/>
+            <a:ext cx="2844698" cy="822960"/>
+          </a:xfrm>
+          <a:prstGeom prst="rect">
+            <a:avLst/>
+          </a:prstGeom>
+          <a:noFill/>
+        </p:spPr>
+        <p:txBody>
+          <a:bodyPr wrap="square" anchor="t">
+            <a:spAutoFit/>
+          </a:bodyPr>
+          <a:lstStyle/>
+          <a:p>
+            <a:pPr algn="l">
+              <a:lnSpc>
+                <a:spcPct val="100000"/>
+              </a:lnSpc>
+            </a:pPr>
+            <a:r>
+              <a:rPr sz="2000" b="1">
+                <a:solidFill>
+                  <a:srgbClr val="F5F7FA"/>
+                </a:solidFill>
+                <a:latin typeface="Arial"/>
+              </a:rPr>
+              <a:t>Each in part</a:t>
+            </a:r>
+          </a:p>
+        </p:txBody>
+      </p:sp>
+      <p:sp>
+        <p:nvSpPr>
+          <p:cNvPr id="14" name="TextBox 13"/>
+          <p:cNvSpPr txBox="1"/>
+          <p:nvPr/>
+        </p:nvSpPr>
+        <p:spPr>
+          <a:xfrm>
+            <a:off x="4673498" y="4114800"/>
+            <a:ext cx="2844698" cy="1554480"/>
+          </a:xfrm>
+          <a:prstGeom prst="rect">
+            <a:avLst/>
+          </a:prstGeom>
+          <a:noFill/>
+        </p:spPr>
+        <p:txBody>
+          <a:bodyPr wrap="square" anchor="t">
+            <a:spAutoFit/>
+          </a:bodyPr>
+          <a:lstStyle/>
+          <a:p>
+            <a:pPr algn="l">
+              <a:lnSpc>
+                <a:spcPct val="110000"/>
+              </a:lnSpc>
+            </a:pPr>
+            <a:r>
+              <a:rPr sz="1500" b="0">
+                <a:solidFill>
+                  <a:srgbClr val="8A94A6"/>
+                </a:solidFill>
+                <a:latin typeface="Arial"/>
+              </a:rPr>
+              <a:t>Promote each value in less than full measure. (Vacuum: cloud data, but anonymized + opt-out.)</a:t>
+            </a:r>
+          </a:p>
+        </p:txBody>
+      </p:sp>
+      <p:sp>
+        <p:nvSpPr>
+          <p:cNvPr id="15" name="Rounded Rectangle 14"/>
+          <p:cNvSpPr/>
+          <p:nvPr/>
+        </p:nvSpPr>
+        <p:spPr>
+          <a:xfrm>
+            <a:off x="8158276" y="2468880"/>
+            <a:ext cx="3393338" cy="3383280"/>
+          </a:xfrm>
+          <a:prstGeom prst="roundRect">
+            <a:avLst/>
+          </a:prstGeom>
+          <a:solidFill>
+            <a:srgbClr val="151B26"/>
+          </a:solidFill>
+          <a:ln>
+            <a:noFill/>
+          </a:ln>
+          <a:effectLst/>
+        </p:spPr>
+        <p:style>
+          <a:lnRef idx="1">
+            <a:schemeClr val="accent1"/>
+          </a:lnRef>
+          <a:fillRef idx="3">
+            <a:schemeClr val="accent1"/>
+          </a:fillRef>
+          <a:effectRef idx="2">
+            <a:schemeClr val="accent1"/>
+          </a:effectRef>
+          <a:fontRef idx="minor">
+            <a:schemeClr val="lt1"/>
+          </a:fontRef>
+        </p:style>
+        <p:txBody>
+          <a:bodyPr rtlCol="0" anchor="ctr"/>
+          <a:lstStyle/>
+          <a:p>
+            <a:pPr algn="ctr"/>
+          </a:p>
+        </p:txBody>
+      </p:sp>
+      <p:sp>
+        <p:nvSpPr>
+          <p:cNvPr id="16" name="Rectangle 15"/>
+          <p:cNvSpPr/>
+          <p:nvPr/>
+        </p:nvSpPr>
+        <p:spPr>
+          <a:xfrm>
+            <a:off x="8158276" y="2468880"/>
+            <a:ext cx="3393338" cy="82296"/>
+          </a:xfrm>
+          <a:prstGeom prst="rect">
+            <a:avLst/>
+          </a:prstGeom>
+          <a:solidFill>
+            <a:srgbClr val="00FF41"/>
+          </a:solidFill>
+          <a:ln>
+            <a:noFill/>
+          </a:ln>
+          <a:effectLst/>
+        </p:spPr>
+        <p:style>
+          <a:lnRef idx="1">
+            <a:schemeClr val="accent1"/>
+          </a:lnRef>
+          <a:fillRef idx="3">
+            <a:schemeClr val="accent1"/>
+          </a:fillRef>
+          <a:effectRef idx="2">
+            <a:schemeClr val="accent1"/>
+          </a:effectRef>
+          <a:fontRef idx="minor">
+            <a:schemeClr val="lt1"/>
+          </a:fontRef>
+        </p:style>
+        <p:txBody>
+          <a:bodyPr rtlCol="0" anchor="ctr"/>
+          <a:lstStyle/>
+          <a:p>
+            <a:pPr algn="ctr"/>
+          </a:p>
+        </p:txBody>
+      </p:sp>
+      <p:sp>
+        <p:nvSpPr>
+          <p:cNvPr id="17" name="TextBox 16"/>
+          <p:cNvSpPr txBox="1"/>
+          <p:nvPr/>
+        </p:nvSpPr>
+        <p:spPr>
+          <a:xfrm>
+            <a:off x="8432596" y="2788920"/>
+            <a:ext cx="2844698" cy="457200"/>
+          </a:xfrm>
+          <a:prstGeom prst="rect">
+            <a:avLst/>
+          </a:prstGeom>
+          <a:noFill/>
+        </p:spPr>
+        <p:txBody>
+          <a:bodyPr wrap="square" anchor="t">
+            <a:spAutoFit/>
+          </a:bodyPr>
+          <a:lstStyle/>
+          <a:p>
+            <a:pPr algn="l">
+              <a:lnSpc>
+                <a:spcPct val="100000"/>
+              </a:lnSpc>
+            </a:pPr>
+            <a:r>
+              <a:rPr sz="1200" b="1">
+                <a:solidFill>
+                  <a:srgbClr val="00FF41"/>
+                </a:solidFill>
+                <a:latin typeface="Courier New"/>
+              </a:rPr>
+              <a:t>TRADE-OFF</a:t>
+            </a:r>
+          </a:p>
+        </p:txBody>
+      </p:sp>
+      <p:sp>
+        <p:nvSpPr>
+          <p:cNvPr id="18" name="TextBox 17"/>
+          <p:cNvSpPr txBox="1"/>
+          <p:nvPr/>
+        </p:nvSpPr>
+        <p:spPr>
+          <a:xfrm>
+            <a:off x="8432596" y="3246120"/>
+            <a:ext cx="2844698" cy="822960"/>
+          </a:xfrm>
+          <a:prstGeom prst="rect">
+            <a:avLst/>
+          </a:prstGeom>
+          <a:noFill/>
+        </p:spPr>
+        <p:txBody>
+          <a:bodyPr wrap="square" anchor="t">
+            <a:spAutoFit/>
+          </a:bodyPr>
+          <a:lstStyle/>
+          <a:p>
+            <a:pPr algn="l">
+              <a:lnSpc>
+                <a:spcPct val="100000"/>
+              </a:lnSpc>
+            </a:pPr>
+            <a:r>
+              <a:rPr sz="2000" b="1">
+                <a:solidFill>
+                  <a:srgbClr val="F5F7FA"/>
+                </a:solidFill>
+                <a:latin typeface="Arial"/>
+              </a:rPr>
+              <a:t>Sacrifice one</a:t>
+            </a:r>
+          </a:p>
+        </p:txBody>
+      </p:sp>
+      <p:sp>
+        <p:nvSpPr>
+          <p:cNvPr id="19" name="TextBox 18"/>
+          <p:cNvSpPr txBox="1"/>
+          <p:nvPr/>
+        </p:nvSpPr>
+        <p:spPr>
+          <a:xfrm>
+            <a:off x="8432596" y="4114800"/>
+            <a:ext cx="2844698" cy="1554480"/>
+          </a:xfrm>
+          <a:prstGeom prst="rect">
+            <a:avLst/>
+          </a:prstGeom>
+          <a:noFill/>
+        </p:spPr>
+        <p:txBody>
+          <a:bodyPr wrap="square" anchor="t">
+            <a:spAutoFit/>
+          </a:bodyPr>
+          <a:lstStyle/>
+          <a:p>
+            <a:pPr algn="l">
+              <a:lnSpc>
+                <a:spcPct val="110000"/>
+              </a:lnSpc>
+            </a:pPr>
+            <a:r>
+              <a:rPr sz="1500" b="0">
+                <a:solidFill>
+                  <a:srgbClr val="8A94A6"/>
+                </a:solidFill>
+                <a:latin typeface="Arial"/>
+              </a:rPr>
+              <a:t>Give one up for another - and say so out loud. (Vacuum: full collection for max automation.)</a:t>
+            </a:r>
+          </a:p>
+        </p:txBody>
+      </p:sp>
+      <p:sp>
+        <p:nvSpPr>
+          <p:cNvPr id="20" name="TextBox 19"/>
           <p:cNvSpPr txBox="1"/>
           <p:nvPr/>
         </p:nvSpPr>
@@ -8352,7 +8947,7 @@
                 </a:solidFill>
                 <a:latin typeface="Courier New"/>
               </a:rPr>
-              <a:t>DESIGN CHOICES CARRY VALUES</a:t>
+              <a:t>BREAK</a:t>
             </a:r>
           </a:p>
         </p:txBody>
@@ -8435,7 +9030,7 @@
                 </a:solidFill>
                 <a:latin typeface="Arial"/>
               </a:rPr>
-              <a:t>The same feed, two values</a:t>
+              <a:t>~10 minutes</a:t>
             </a:r>
           </a:p>
         </p:txBody>
@@ -8468,97 +9063,13 @@
               </a:lnSpc>
             </a:pPr>
             <a:r>
-              <a:rPr sz="2000" b="0">
+              <a:rPr sz="2200" b="0">
                 <a:solidFill>
                   <a:srgbClr val="F5F7FA"/>
                 </a:solidFill>
                 <a:latin typeface="Arial"/>
               </a:rPr>
-              <a:t>Design a social-media feed for </a:t>
-            </a:r>
-            <a:r>
-              <a:rPr sz="2000" b="1">
-                <a:solidFill>
-                  <a:srgbClr val="FF4D4D"/>
-                </a:solidFill>
-                <a:latin typeface="Arial"/>
-              </a:rPr>
-              <a:t>engagement</a:t>
-            </a:r>
-            <a:r>
-              <a:rPr sz="2000" b="0">
-                <a:solidFill>
-                  <a:srgbClr val="F5F7FA"/>
-                </a:solidFill>
-                <a:latin typeface="Arial"/>
-              </a:rPr>
-              <a:t>, and you get autoplay, streaks, and notifications - "push people's buttons."</a:t>
-            </a:r>
-          </a:p>
-          <a:p>
-            <a:pPr algn="l">
-              <a:lnSpc>
-                <a:spcPct val="112000"/>
-              </a:lnSpc>
-            </a:pPr>
-            <a:r>
-              <a:rPr sz="2000" b="0">
-                <a:solidFill>
-                  <a:srgbClr val="F5F7FA"/>
-                </a:solidFill>
-                <a:latin typeface="Arial"/>
-              </a:rPr>
-              <a:t>Design it for </a:t>
-            </a:r>
-            <a:r>
-              <a:rPr sz="2000" b="1">
-                <a:solidFill>
-                  <a:srgbClr val="00FF41"/>
-                </a:solidFill>
-                <a:latin typeface="Arial"/>
-              </a:rPr>
-              <a:t>autonomy</a:t>
-            </a:r>
-            <a:r>
-              <a:rPr sz="2000" b="0">
-                <a:solidFill>
-                  <a:srgbClr val="F5F7FA"/>
-                </a:solidFill>
-                <a:latin typeface="Arial"/>
-              </a:rPr>
-              <a:t>, and you add friction, stopping points, and real user control.</a:t>
-            </a:r>
-          </a:p>
-          <a:p>
-            <a:pPr algn="l">
-              <a:lnSpc>
-                <a:spcPct val="112000"/>
-              </a:lnSpc>
-            </a:pPr>
-            <a:r>
-              <a:rPr sz="2000" b="0">
-                <a:solidFill>
-                  <a:srgbClr val="F5F7FA"/>
-                </a:solidFill>
-                <a:latin typeface="Arial"/>
-              </a:rPr>
-              <a:t/>
-            </a:r>
-          </a:p>
-          <a:p>
-            <a:pPr algn="l">
-              <a:lnSpc>
-                <a:spcPct val="112000"/>
-              </a:lnSpc>
-            </a:pPr>
-            <a:r>
-              <a:rPr sz="1700" b="0">
-                <a:solidFill>
-                  <a:srgbClr val="8A94A6"/>
-                </a:solidFill>
-                <a:latin typeface="Arial"/>
-              </a:rPr>
-              <a:t>Same product. The values show up in the defaults.</a:t>
+              <a:t>Last stretch. Then: did any of it actually work?</a:t>
             </a:r>
           </a:p>
         </p:txBody>
@@ -8630,53 +9141,14 @@
       <p:grpSpPr/>
       <p:sp>
         <p:nvSpPr>
-          <p:cNvPr id="2" name="TextBox 1"/>
-          <p:cNvSpPr txBox="1"/>
-          <p:nvPr/>
-        </p:nvSpPr>
-        <p:spPr>
-          <a:xfrm>
-            <a:off x="640080" y="502920"/>
-            <a:ext cx="10058400" cy="365760"/>
-          </a:xfrm>
-          <a:prstGeom prst="rect">
-            <a:avLst/>
-          </a:prstGeom>
-          <a:noFill/>
-        </p:spPr>
-        <p:txBody>
-          <a:bodyPr wrap="square" anchor="t">
-            <a:spAutoFit/>
-          </a:bodyPr>
-          <a:lstStyle/>
-          <a:p>
-            <a:pPr algn="l">
-              <a:lnSpc>
-                <a:spcPct val="100000"/>
-              </a:lnSpc>
-            </a:pPr>
-            <a:r>
-              <a:rPr sz="1300" b="1">
-                <a:solidFill>
-                  <a:srgbClr val="00FF41"/>
-                </a:solidFill>
-                <a:latin typeface="Courier New"/>
-              </a:rPr>
-              <a:t>WHEN VALUES CLASH</a:t>
-            </a:r>
-          </a:p>
-        </p:txBody>
-      </p:sp>
-      <p:sp>
-        <p:nvSpPr>
-          <p:cNvPr id="3" name="Rectangle 2"/>
+          <p:cNvPr id="2" name="Rectangle 1"/>
           <p:cNvSpPr/>
           <p:nvPr/>
         </p:nvSpPr>
         <p:spPr>
           <a:xfrm>
-            <a:off x="640080" y="932688"/>
-            <a:ext cx="822960" cy="73152"/>
+            <a:off x="0" y="0"/>
+            <a:ext cx="256032" cy="6858000"/>
           </a:xfrm>
           <a:prstGeom prst="rect">
             <a:avLst/>
@@ -8713,14 +9185,53 @@
       </p:sp>
       <p:sp>
         <p:nvSpPr>
+          <p:cNvPr id="3" name="TextBox 2"/>
+          <p:cNvSpPr txBox="1"/>
+          <p:nvPr/>
+        </p:nvSpPr>
+        <p:spPr>
+          <a:xfrm>
+            <a:off x="822960" y="2194560"/>
+            <a:ext cx="10515600" cy="548640"/>
+          </a:xfrm>
+          <a:prstGeom prst="rect">
+            <a:avLst/>
+          </a:prstGeom>
+          <a:noFill/>
+        </p:spPr>
+        <p:txBody>
+          <a:bodyPr wrap="square" anchor="t">
+            <a:spAutoFit/>
+          </a:bodyPr>
+          <a:lstStyle/>
+          <a:p>
+            <a:pPr algn="l">
+              <a:lnSpc>
+                <a:spcPct val="100000"/>
+              </a:lnSpc>
+            </a:pPr>
+            <a:r>
+              <a:rPr sz="1800" b="1">
+                <a:solidFill>
+                  <a:srgbClr val="00FF41"/>
+                </a:solidFill>
+                <a:latin typeface="Courier New"/>
+              </a:rPr>
+              <a:t>PART 4 - VERIFICATION</a:t>
+            </a:r>
+          </a:p>
+        </p:txBody>
+      </p:sp>
+      <p:sp>
+        <p:nvSpPr>
           <p:cNvPr id="4" name="TextBox 3"/>
           <p:cNvSpPr txBox="1"/>
           <p:nvPr/>
         </p:nvSpPr>
         <p:spPr>
           <a:xfrm>
-            <a:off x="640080" y="1188720"/>
-            <a:ext cx="10972800" cy="914400"/>
+            <a:off x="804672" y="2743200"/>
+            <a:ext cx="10515600" cy="1554480"/>
           </a:xfrm>
           <a:prstGeom prst="rect">
             <a:avLst/>
@@ -8739,667 +9250,13 @@
               </a:lnSpc>
             </a:pPr>
             <a:r>
-              <a:rPr sz="3200" b="1">
+              <a:rPr sz="4800" b="1">
                 <a:solidFill>
                   <a:srgbClr val="F5F7FA"/>
                 </a:solidFill>
                 <a:latin typeface="Arial"/>
               </a:rPr>
-              <a:t>Name the resolution - out loud</a:t>
-            </a:r>
-          </a:p>
-        </p:txBody>
-      </p:sp>
-      <p:sp>
-        <p:nvSpPr>
-          <p:cNvPr id="5" name="Rounded Rectangle 4"/>
-          <p:cNvSpPr/>
-          <p:nvPr/>
-        </p:nvSpPr>
-        <p:spPr>
-          <a:xfrm>
-            <a:off x="640080" y="2468880"/>
-            <a:ext cx="3393338" cy="3383280"/>
-          </a:xfrm>
-          <a:prstGeom prst="roundRect">
-            <a:avLst/>
-          </a:prstGeom>
-          <a:solidFill>
-            <a:srgbClr val="151B26"/>
-          </a:solidFill>
-          <a:ln>
-            <a:noFill/>
-          </a:ln>
-          <a:effectLst/>
-        </p:spPr>
-        <p:style>
-          <a:lnRef idx="1">
-            <a:schemeClr val="accent1"/>
-          </a:lnRef>
-          <a:fillRef idx="3">
-            <a:schemeClr val="accent1"/>
-          </a:fillRef>
-          <a:effectRef idx="2">
-            <a:schemeClr val="accent1"/>
-          </a:effectRef>
-          <a:fontRef idx="minor">
-            <a:schemeClr val="lt1"/>
-          </a:fontRef>
-        </p:style>
-        <p:txBody>
-          <a:bodyPr rtlCol="0" anchor="ctr"/>
-          <a:lstStyle/>
-          <a:p>
-            <a:pPr algn="ctr"/>
-          </a:p>
-        </p:txBody>
-      </p:sp>
-      <p:sp>
-        <p:nvSpPr>
-          <p:cNvPr id="6" name="Rectangle 5"/>
-          <p:cNvSpPr/>
-          <p:nvPr/>
-        </p:nvSpPr>
-        <p:spPr>
-          <a:xfrm>
-            <a:off x="640080" y="2468880"/>
-            <a:ext cx="3393338" cy="82296"/>
-          </a:xfrm>
-          <a:prstGeom prst="rect">
-            <a:avLst/>
-          </a:prstGeom>
-          <a:solidFill>
-            <a:srgbClr val="00FF41"/>
-          </a:solidFill>
-          <a:ln>
-            <a:noFill/>
-          </a:ln>
-          <a:effectLst/>
-        </p:spPr>
-        <p:style>
-          <a:lnRef idx="1">
-            <a:schemeClr val="accent1"/>
-          </a:lnRef>
-          <a:fillRef idx="3">
-            <a:schemeClr val="accent1"/>
-          </a:fillRef>
-          <a:effectRef idx="2">
-            <a:schemeClr val="accent1"/>
-          </a:effectRef>
-          <a:fontRef idx="minor">
-            <a:schemeClr val="lt1"/>
-          </a:fontRef>
-        </p:style>
-        <p:txBody>
-          <a:bodyPr rtlCol="0" anchor="ctr"/>
-          <a:lstStyle/>
-          <a:p>
-            <a:pPr algn="ctr"/>
-          </a:p>
-        </p:txBody>
-      </p:sp>
-      <p:sp>
-        <p:nvSpPr>
-          <p:cNvPr id="7" name="TextBox 6"/>
-          <p:cNvSpPr txBox="1"/>
-          <p:nvPr/>
-        </p:nvSpPr>
-        <p:spPr>
-          <a:xfrm>
-            <a:off x="914400" y="2788920"/>
-            <a:ext cx="2844698" cy="457200"/>
-          </a:xfrm>
-          <a:prstGeom prst="rect">
-            <a:avLst/>
-          </a:prstGeom>
-          <a:noFill/>
-        </p:spPr>
-        <p:txBody>
-          <a:bodyPr wrap="square" anchor="t">
-            <a:spAutoFit/>
-          </a:bodyPr>
-          <a:lstStyle/>
-          <a:p>
-            <a:pPr algn="l">
-              <a:lnSpc>
-                <a:spcPct val="100000"/>
-              </a:lnSpc>
-            </a:pPr>
-            <a:r>
-              <a:rPr sz="1200" b="1">
-                <a:solidFill>
-                  <a:srgbClr val="00FF41"/>
-                </a:solidFill>
-                <a:latin typeface="Courier New"/>
-              </a:rPr>
-              <a:t>DISSOLVE</a:t>
-            </a:r>
-          </a:p>
-        </p:txBody>
-      </p:sp>
-      <p:sp>
-        <p:nvSpPr>
-          <p:cNvPr id="8" name="TextBox 7"/>
-          <p:cNvSpPr txBox="1"/>
-          <p:nvPr/>
-        </p:nvSpPr>
-        <p:spPr>
-          <a:xfrm>
-            <a:off x="914400" y="3246120"/>
-            <a:ext cx="2844698" cy="822960"/>
-          </a:xfrm>
-          <a:prstGeom prst="rect">
-            <a:avLst/>
-          </a:prstGeom>
-          <a:noFill/>
-        </p:spPr>
-        <p:txBody>
-          <a:bodyPr wrap="square" anchor="t">
-            <a:spAutoFit/>
-          </a:bodyPr>
-          <a:lstStyle/>
-          <a:p>
-            <a:pPr algn="l">
-              <a:lnSpc>
-                <a:spcPct val="100000"/>
-              </a:lnSpc>
-            </a:pPr>
-            <a:r>
-              <a:rPr sz="2000" b="1">
-                <a:solidFill>
-                  <a:srgbClr val="F5F7FA"/>
-                </a:solidFill>
-                <a:latin typeface="Arial"/>
-              </a:rPr>
-              <a:t>Redesign around it</a:t>
-            </a:r>
-          </a:p>
-        </p:txBody>
-      </p:sp>
-      <p:sp>
-        <p:nvSpPr>
-          <p:cNvPr id="9" name="TextBox 8"/>
-          <p:cNvSpPr txBox="1"/>
-          <p:nvPr/>
-        </p:nvSpPr>
-        <p:spPr>
-          <a:xfrm>
-            <a:off x="914400" y="4114800"/>
-            <a:ext cx="2844698" cy="1554480"/>
-          </a:xfrm>
-          <a:prstGeom prst="rect">
-            <a:avLst/>
-          </a:prstGeom>
-          <a:noFill/>
-        </p:spPr>
-        <p:txBody>
-          <a:bodyPr wrap="square" anchor="t">
-            <a:spAutoFit/>
-          </a:bodyPr>
-          <a:lstStyle/>
-          <a:p>
-            <a:pPr algn="l">
-              <a:lnSpc>
-                <a:spcPct val="110000"/>
-              </a:lnSpc>
-            </a:pPr>
-            <a:r>
-              <a:rPr sz="1500" b="0">
-                <a:solidFill>
-                  <a:srgbClr val="8A94A6"/>
-                </a:solidFill>
-                <a:latin typeface="Arial"/>
-              </a:rPr>
-              <a:t>Find a design where BOTH values hold. (Vacuum: on-device maps, nothing to the cloud.)</a:t>
-            </a:r>
-          </a:p>
-        </p:txBody>
-      </p:sp>
-      <p:sp>
-        <p:nvSpPr>
-          <p:cNvPr id="10" name="Rounded Rectangle 9"/>
-          <p:cNvSpPr/>
-          <p:nvPr/>
-        </p:nvSpPr>
-        <p:spPr>
-          <a:xfrm>
-            <a:off x="4399178" y="2468880"/>
-            <a:ext cx="3393338" cy="3383280"/>
-          </a:xfrm>
-          <a:prstGeom prst="roundRect">
-            <a:avLst/>
-          </a:prstGeom>
-          <a:solidFill>
-            <a:srgbClr val="151B26"/>
-          </a:solidFill>
-          <a:ln>
-            <a:noFill/>
-          </a:ln>
-          <a:effectLst/>
-        </p:spPr>
-        <p:style>
-          <a:lnRef idx="1">
-            <a:schemeClr val="accent1"/>
-          </a:lnRef>
-          <a:fillRef idx="3">
-            <a:schemeClr val="accent1"/>
-          </a:fillRef>
-          <a:effectRef idx="2">
-            <a:schemeClr val="accent1"/>
-          </a:effectRef>
-          <a:fontRef idx="minor">
-            <a:schemeClr val="lt1"/>
-          </a:fontRef>
-        </p:style>
-        <p:txBody>
-          <a:bodyPr rtlCol="0" anchor="ctr"/>
-          <a:lstStyle/>
-          <a:p>
-            <a:pPr algn="ctr"/>
-          </a:p>
-        </p:txBody>
-      </p:sp>
-      <p:sp>
-        <p:nvSpPr>
-          <p:cNvPr id="11" name="Rectangle 10"/>
-          <p:cNvSpPr/>
-          <p:nvPr/>
-        </p:nvSpPr>
-        <p:spPr>
-          <a:xfrm>
-            <a:off x="4399178" y="2468880"/>
-            <a:ext cx="3393338" cy="82296"/>
-          </a:xfrm>
-          <a:prstGeom prst="rect">
-            <a:avLst/>
-          </a:prstGeom>
-          <a:solidFill>
-            <a:srgbClr val="00FF41"/>
-          </a:solidFill>
-          <a:ln>
-            <a:noFill/>
-          </a:ln>
-          <a:effectLst/>
-        </p:spPr>
-        <p:style>
-          <a:lnRef idx="1">
-            <a:schemeClr val="accent1"/>
-          </a:lnRef>
-          <a:fillRef idx="3">
-            <a:schemeClr val="accent1"/>
-          </a:fillRef>
-          <a:effectRef idx="2">
-            <a:schemeClr val="accent1"/>
-          </a:effectRef>
-          <a:fontRef idx="minor">
-            <a:schemeClr val="lt1"/>
-          </a:fontRef>
-        </p:style>
-        <p:txBody>
-          <a:bodyPr rtlCol="0" anchor="ctr"/>
-          <a:lstStyle/>
-          <a:p>
-            <a:pPr algn="ctr"/>
-          </a:p>
-        </p:txBody>
-      </p:sp>
-      <p:sp>
-        <p:nvSpPr>
-          <p:cNvPr id="12" name="TextBox 11"/>
-          <p:cNvSpPr txBox="1"/>
-          <p:nvPr/>
-        </p:nvSpPr>
-        <p:spPr>
-          <a:xfrm>
-            <a:off x="4673498" y="2788920"/>
-            <a:ext cx="2844698" cy="457200"/>
-          </a:xfrm>
-          <a:prstGeom prst="rect">
-            <a:avLst/>
-          </a:prstGeom>
-          <a:noFill/>
-        </p:spPr>
-        <p:txBody>
-          <a:bodyPr wrap="square" anchor="t">
-            <a:spAutoFit/>
-          </a:bodyPr>
-          <a:lstStyle/>
-          <a:p>
-            <a:pPr algn="l">
-              <a:lnSpc>
-                <a:spcPct val="100000"/>
-              </a:lnSpc>
-            </a:pPr>
-            <a:r>
-              <a:rPr sz="1200" b="1">
-                <a:solidFill>
-                  <a:srgbClr val="00FF41"/>
-                </a:solidFill>
-                <a:latin typeface="Courier New"/>
-              </a:rPr>
-              <a:t>COMPROMISE</a:t>
-            </a:r>
-          </a:p>
-        </p:txBody>
-      </p:sp>
-      <p:sp>
-        <p:nvSpPr>
-          <p:cNvPr id="13" name="TextBox 12"/>
-          <p:cNvSpPr txBox="1"/>
-          <p:nvPr/>
-        </p:nvSpPr>
-        <p:spPr>
-          <a:xfrm>
-            <a:off x="4673498" y="3246120"/>
-            <a:ext cx="2844698" cy="822960"/>
-          </a:xfrm>
-          <a:prstGeom prst="rect">
-            <a:avLst/>
-          </a:prstGeom>
-          <a:noFill/>
-        </p:spPr>
-        <p:txBody>
-          <a:bodyPr wrap="square" anchor="t">
-            <a:spAutoFit/>
-          </a:bodyPr>
-          <a:lstStyle/>
-          <a:p>
-            <a:pPr algn="l">
-              <a:lnSpc>
-                <a:spcPct val="100000"/>
-              </a:lnSpc>
-            </a:pPr>
-            <a:r>
-              <a:rPr sz="2000" b="1">
-                <a:solidFill>
-                  <a:srgbClr val="F5F7FA"/>
-                </a:solidFill>
-                <a:latin typeface="Arial"/>
-              </a:rPr>
-              <a:t>Each in part</a:t>
-            </a:r>
-          </a:p>
-        </p:txBody>
-      </p:sp>
-      <p:sp>
-        <p:nvSpPr>
-          <p:cNvPr id="14" name="TextBox 13"/>
-          <p:cNvSpPr txBox="1"/>
-          <p:nvPr/>
-        </p:nvSpPr>
-        <p:spPr>
-          <a:xfrm>
-            <a:off x="4673498" y="4114800"/>
-            <a:ext cx="2844698" cy="1554480"/>
-          </a:xfrm>
-          <a:prstGeom prst="rect">
-            <a:avLst/>
-          </a:prstGeom>
-          <a:noFill/>
-        </p:spPr>
-        <p:txBody>
-          <a:bodyPr wrap="square" anchor="t">
-            <a:spAutoFit/>
-          </a:bodyPr>
-          <a:lstStyle/>
-          <a:p>
-            <a:pPr algn="l">
-              <a:lnSpc>
-                <a:spcPct val="110000"/>
-              </a:lnSpc>
-            </a:pPr>
-            <a:r>
-              <a:rPr sz="1500" b="0">
-                <a:solidFill>
-                  <a:srgbClr val="8A94A6"/>
-                </a:solidFill>
-                <a:latin typeface="Arial"/>
-              </a:rPr>
-              <a:t>Promote each value in less than full measure. (Vacuum: cloud data, but anonymized + opt-out.)</a:t>
-            </a:r>
-          </a:p>
-        </p:txBody>
-      </p:sp>
-      <p:sp>
-        <p:nvSpPr>
-          <p:cNvPr id="15" name="Rounded Rectangle 14"/>
-          <p:cNvSpPr/>
-          <p:nvPr/>
-        </p:nvSpPr>
-        <p:spPr>
-          <a:xfrm>
-            <a:off x="8158276" y="2468880"/>
-            <a:ext cx="3393338" cy="3383280"/>
-          </a:xfrm>
-          <a:prstGeom prst="roundRect">
-            <a:avLst/>
-          </a:prstGeom>
-          <a:solidFill>
-            <a:srgbClr val="151B26"/>
-          </a:solidFill>
-          <a:ln>
-            <a:noFill/>
-          </a:ln>
-          <a:effectLst/>
-        </p:spPr>
-        <p:style>
-          <a:lnRef idx="1">
-            <a:schemeClr val="accent1"/>
-          </a:lnRef>
-          <a:fillRef idx="3">
-            <a:schemeClr val="accent1"/>
-          </a:fillRef>
-          <a:effectRef idx="2">
-            <a:schemeClr val="accent1"/>
-          </a:effectRef>
-          <a:fontRef idx="minor">
-            <a:schemeClr val="lt1"/>
-          </a:fontRef>
-        </p:style>
-        <p:txBody>
-          <a:bodyPr rtlCol="0" anchor="ctr"/>
-          <a:lstStyle/>
-          <a:p>
-            <a:pPr algn="ctr"/>
-          </a:p>
-        </p:txBody>
-      </p:sp>
-      <p:sp>
-        <p:nvSpPr>
-          <p:cNvPr id="16" name="Rectangle 15"/>
-          <p:cNvSpPr/>
-          <p:nvPr/>
-        </p:nvSpPr>
-        <p:spPr>
-          <a:xfrm>
-            <a:off x="8158276" y="2468880"/>
-            <a:ext cx="3393338" cy="82296"/>
-          </a:xfrm>
-          <a:prstGeom prst="rect">
-            <a:avLst/>
-          </a:prstGeom>
-          <a:solidFill>
-            <a:srgbClr val="00FF41"/>
-          </a:solidFill>
-          <a:ln>
-            <a:noFill/>
-          </a:ln>
-          <a:effectLst/>
-        </p:spPr>
-        <p:style>
-          <a:lnRef idx="1">
-            <a:schemeClr val="accent1"/>
-          </a:lnRef>
-          <a:fillRef idx="3">
-            <a:schemeClr val="accent1"/>
-          </a:fillRef>
-          <a:effectRef idx="2">
-            <a:schemeClr val="accent1"/>
-          </a:effectRef>
-          <a:fontRef idx="minor">
-            <a:schemeClr val="lt1"/>
-          </a:fontRef>
-        </p:style>
-        <p:txBody>
-          <a:bodyPr rtlCol="0" anchor="ctr"/>
-          <a:lstStyle/>
-          <a:p>
-            <a:pPr algn="ctr"/>
-          </a:p>
-        </p:txBody>
-      </p:sp>
-      <p:sp>
-        <p:nvSpPr>
-          <p:cNvPr id="17" name="TextBox 16"/>
-          <p:cNvSpPr txBox="1"/>
-          <p:nvPr/>
-        </p:nvSpPr>
-        <p:spPr>
-          <a:xfrm>
-            <a:off x="8432596" y="2788920"/>
-            <a:ext cx="2844698" cy="457200"/>
-          </a:xfrm>
-          <a:prstGeom prst="rect">
-            <a:avLst/>
-          </a:prstGeom>
-          <a:noFill/>
-        </p:spPr>
-        <p:txBody>
-          <a:bodyPr wrap="square" anchor="t">
-            <a:spAutoFit/>
-          </a:bodyPr>
-          <a:lstStyle/>
-          <a:p>
-            <a:pPr algn="l">
-              <a:lnSpc>
-                <a:spcPct val="100000"/>
-              </a:lnSpc>
-            </a:pPr>
-            <a:r>
-              <a:rPr sz="1200" b="1">
-                <a:solidFill>
-                  <a:srgbClr val="00FF41"/>
-                </a:solidFill>
-                <a:latin typeface="Courier New"/>
-              </a:rPr>
-              <a:t>TRADE-OFF</a:t>
-            </a:r>
-          </a:p>
-        </p:txBody>
-      </p:sp>
-      <p:sp>
-        <p:nvSpPr>
-          <p:cNvPr id="18" name="TextBox 17"/>
-          <p:cNvSpPr txBox="1"/>
-          <p:nvPr/>
-        </p:nvSpPr>
-        <p:spPr>
-          <a:xfrm>
-            <a:off x="8432596" y="3246120"/>
-            <a:ext cx="2844698" cy="822960"/>
-          </a:xfrm>
-          <a:prstGeom prst="rect">
-            <a:avLst/>
-          </a:prstGeom>
-          <a:noFill/>
-        </p:spPr>
-        <p:txBody>
-          <a:bodyPr wrap="square" anchor="t">
-            <a:spAutoFit/>
-          </a:bodyPr>
-          <a:lstStyle/>
-          <a:p>
-            <a:pPr algn="l">
-              <a:lnSpc>
-                <a:spcPct val="100000"/>
-              </a:lnSpc>
-            </a:pPr>
-            <a:r>
-              <a:rPr sz="2000" b="1">
-                <a:solidFill>
-                  <a:srgbClr val="F5F7FA"/>
-                </a:solidFill>
-                <a:latin typeface="Arial"/>
-              </a:rPr>
-              <a:t>Sacrifice one</a:t>
-            </a:r>
-          </a:p>
-        </p:txBody>
-      </p:sp>
-      <p:sp>
-        <p:nvSpPr>
-          <p:cNvPr id="19" name="TextBox 18"/>
-          <p:cNvSpPr txBox="1"/>
-          <p:nvPr/>
-        </p:nvSpPr>
-        <p:spPr>
-          <a:xfrm>
-            <a:off x="8432596" y="4114800"/>
-            <a:ext cx="2844698" cy="1554480"/>
-          </a:xfrm>
-          <a:prstGeom prst="rect">
-            <a:avLst/>
-          </a:prstGeom>
-          <a:noFill/>
-        </p:spPr>
-        <p:txBody>
-          <a:bodyPr wrap="square" anchor="t">
-            <a:spAutoFit/>
-          </a:bodyPr>
-          <a:lstStyle/>
-          <a:p>
-            <a:pPr algn="l">
-              <a:lnSpc>
-                <a:spcPct val="110000"/>
-              </a:lnSpc>
-            </a:pPr>
-            <a:r>
-              <a:rPr sz="1500" b="0">
-                <a:solidFill>
-                  <a:srgbClr val="8A94A6"/>
-                </a:solidFill>
-                <a:latin typeface="Arial"/>
-              </a:rPr>
-              <a:t>Give one up for another - and say so out loud. (Vacuum: full collection for max automation.)</a:t>
-            </a:r>
-          </a:p>
-        </p:txBody>
-      </p:sp>
-      <p:sp>
-        <p:nvSpPr>
-          <p:cNvPr id="20" name="TextBox 19"/>
-          <p:cNvSpPr txBox="1"/>
-          <p:nvPr/>
-        </p:nvSpPr>
-        <p:spPr>
-          <a:xfrm>
-            <a:off x="640080" y="6355080"/>
-            <a:ext cx="10972800" cy="365760"/>
-          </a:xfrm>
-          <a:prstGeom prst="rect">
-            <a:avLst/>
-          </a:prstGeom>
-          <a:noFill/>
-        </p:spPr>
-        <p:txBody>
-          <a:bodyPr wrap="square" anchor="t">
-            <a:spAutoFit/>
-          </a:bodyPr>
-          <a:lstStyle/>
-          <a:p>
-            <a:pPr algn="l">
-              <a:lnSpc>
-                <a:spcPct val="100000"/>
-              </a:lnSpc>
-            </a:pPr>
-            <a:r>
-              <a:rPr sz="1000" b="0">
-                <a:solidFill>
-                  <a:srgbClr val="5A6474"/>
-                </a:solidFill>
-                <a:latin typeface="Courier New"/>
-              </a:rPr>
-              <a:t>Good Code, Good Vibes · TECHIE 1121 · Cornell Tech · Summer 2026</a:t>
+              <a:t>Did the values actually land?</a:t>
             </a:r>
           </a:p>
         </p:txBody>
@@ -9464,7 +9321,7 @@
                 </a:solidFill>
                 <a:latin typeface="Courier New"/>
               </a:rPr>
-              <a:t>BREAK</a:t>
+              <a:t>VERIFICATION</a:t>
             </a:r>
           </a:p>
         </p:txBody>
@@ -9547,7 +9404,7 @@
                 </a:solidFill>
                 <a:latin typeface="Arial"/>
               </a:rPr>
-              <a:t>~10 minutes</a:t>
+              <a:t>Assessing whether the values made it in</a:t>
             </a:r>
           </a:p>
         </p:txBody>
@@ -9580,13 +9437,45 @@
               </a:lnSpc>
             </a:pPr>
             <a:r>
-              <a:rPr sz="2200" b="0">
+              <a:rPr sz="2100" b="0">
                 <a:solidFill>
                   <a:srgbClr val="F5F7FA"/>
                 </a:solidFill>
                 <a:latin typeface="Arial"/>
               </a:rPr>
-              <a:t>Last stretch. Then: did any of it actually work?</a:t>
+              <a:t>"Verification involves assessing whether efforts to integrate values have succeeded." Cyclical - ask at every step.</a:t>
+            </a:r>
+          </a:p>
+          <a:p>
+            <a:pPr algn="l">
+              <a:lnSpc>
+                <a:spcPct val="112000"/>
+              </a:lnSpc>
+            </a:pPr>
+            <a:r>
+              <a:rPr sz="2000" b="0">
+                <a:solidFill>
+                  <a:srgbClr val="F5F7FA"/>
+                </a:solidFill>
+                <a:latin typeface="Arial"/>
+              </a:rPr>
+              <a:t/>
+            </a:r>
+          </a:p>
+          <a:p>
+            <a:pPr algn="l">
+              <a:lnSpc>
+                <a:spcPct val="112000"/>
+              </a:lnSpc>
+            </a:pPr>
+            <a:r>
+              <a:rPr sz="1700" b="0">
+                <a:solidFill>
+                  <a:srgbClr val="8A94A6"/>
+                </a:solidFill>
+                <a:latin typeface="Arial"/>
+              </a:rPr>
+              <a:t>Three ways to ask - and your operationalization decides which one fits.</a:t>
             </a:r>
           </a:p>
         </p:txBody>
@@ -9658,14 +9547,53 @@
       <p:grpSpPr/>
       <p:sp>
         <p:nvSpPr>
-          <p:cNvPr id="2" name="Rectangle 1"/>
+          <p:cNvPr id="2" name="TextBox 1"/>
+          <p:cNvSpPr txBox="1"/>
+          <p:nvPr/>
+        </p:nvSpPr>
+        <p:spPr>
+          <a:xfrm>
+            <a:off x="640080" y="502920"/>
+            <a:ext cx="10058400" cy="365760"/>
+          </a:xfrm>
+          <a:prstGeom prst="rect">
+            <a:avLst/>
+          </a:prstGeom>
+          <a:noFill/>
+        </p:spPr>
+        <p:txBody>
+          <a:bodyPr wrap="square" anchor="t">
+            <a:spAutoFit/>
+          </a:bodyPr>
+          <a:lstStyle/>
+          <a:p>
+            <a:pPr algn="l">
+              <a:lnSpc>
+                <a:spcPct val="100000"/>
+              </a:lnSpc>
+            </a:pPr>
+            <a:r>
+              <a:rPr sz="1300" b="1">
+                <a:solidFill>
+                  <a:srgbClr val="00FF41"/>
+                </a:solidFill>
+                <a:latin typeface="Courier New"/>
+              </a:rPr>
+              <a:t>THE THREE LENSES</a:t>
+            </a:r>
+          </a:p>
+        </p:txBody>
+      </p:sp>
+      <p:sp>
+        <p:nvSpPr>
+          <p:cNvPr id="3" name="Rectangle 2"/>
           <p:cNvSpPr/>
           <p:nvPr/>
         </p:nvSpPr>
         <p:spPr>
           <a:xfrm>
-            <a:off x="0" y="0"/>
-            <a:ext cx="256032" cy="6858000"/>
+            <a:off x="640080" y="932688"/>
+            <a:ext cx="822960" cy="73152"/>
           </a:xfrm>
           <a:prstGeom prst="rect">
             <a:avLst/>
@@ -9702,14 +9630,14 @@
       </p:sp>
       <p:sp>
         <p:nvSpPr>
-          <p:cNvPr id="3" name="TextBox 2"/>
-          <p:cNvSpPr txBox="1"/>
-          <p:nvPr/>
-        </p:nvSpPr>
-        <p:spPr>
-          <a:xfrm>
-            <a:off x="822960" y="2194560"/>
-            <a:ext cx="10515600" cy="548640"/>
+          <p:cNvPr id="4" name="TextBox 3"/>
+          <p:cNvSpPr txBox="1"/>
+          <p:nvPr/>
+        </p:nvSpPr>
+        <p:spPr>
+          <a:xfrm>
+            <a:off x="640080" y="1188720"/>
+            <a:ext cx="10972800" cy="914400"/>
           </a:xfrm>
           <a:prstGeom prst="rect">
             <a:avLst/>
@@ -9728,27 +9656,154 @@
               </a:lnSpc>
             </a:pPr>
             <a:r>
-              <a:rPr sz="1800" b="1">
+              <a:rPr sz="3200" b="1">
+                <a:solidFill>
+                  <a:srgbClr val="F5F7FA"/>
+                </a:solidFill>
+                <a:latin typeface="Arial"/>
+              </a:rPr>
+              <a:t>Behavior - Understanding - Affect</a:t>
+            </a:r>
+          </a:p>
+        </p:txBody>
+      </p:sp>
+      <p:sp>
+        <p:nvSpPr>
+          <p:cNvPr id="5" name="Rounded Rectangle 4"/>
+          <p:cNvSpPr/>
+          <p:nvPr/>
+        </p:nvSpPr>
+        <p:spPr>
+          <a:xfrm>
+            <a:off x="640080" y="2468880"/>
+            <a:ext cx="3393338" cy="3383280"/>
+          </a:xfrm>
+          <a:prstGeom prst="roundRect">
+            <a:avLst/>
+          </a:prstGeom>
+          <a:solidFill>
+            <a:srgbClr val="151B26"/>
+          </a:solidFill>
+          <a:ln>
+            <a:noFill/>
+          </a:ln>
+          <a:effectLst/>
+        </p:spPr>
+        <p:style>
+          <a:lnRef idx="1">
+            <a:schemeClr val="accent1"/>
+          </a:lnRef>
+          <a:fillRef idx="3">
+            <a:schemeClr val="accent1"/>
+          </a:fillRef>
+          <a:effectRef idx="2">
+            <a:schemeClr val="accent1"/>
+          </a:effectRef>
+          <a:fontRef idx="minor">
+            <a:schemeClr val="lt1"/>
+          </a:fontRef>
+        </p:style>
+        <p:txBody>
+          <a:bodyPr rtlCol="0" anchor="ctr"/>
+          <a:lstStyle/>
+          <a:p>
+            <a:pPr algn="ctr"/>
+          </a:p>
+        </p:txBody>
+      </p:sp>
+      <p:sp>
+        <p:nvSpPr>
+          <p:cNvPr id="6" name="Rectangle 5"/>
+          <p:cNvSpPr/>
+          <p:nvPr/>
+        </p:nvSpPr>
+        <p:spPr>
+          <a:xfrm>
+            <a:off x="640080" y="2468880"/>
+            <a:ext cx="3393338" cy="82296"/>
+          </a:xfrm>
+          <a:prstGeom prst="rect">
+            <a:avLst/>
+          </a:prstGeom>
+          <a:solidFill>
+            <a:srgbClr val="00FF41"/>
+          </a:solidFill>
+          <a:ln>
+            <a:noFill/>
+          </a:ln>
+          <a:effectLst/>
+        </p:spPr>
+        <p:style>
+          <a:lnRef idx="1">
+            <a:schemeClr val="accent1"/>
+          </a:lnRef>
+          <a:fillRef idx="3">
+            <a:schemeClr val="accent1"/>
+          </a:fillRef>
+          <a:effectRef idx="2">
+            <a:schemeClr val="accent1"/>
+          </a:effectRef>
+          <a:fontRef idx="minor">
+            <a:schemeClr val="lt1"/>
+          </a:fontRef>
+        </p:style>
+        <p:txBody>
+          <a:bodyPr rtlCol="0" anchor="ctr"/>
+          <a:lstStyle/>
+          <a:p>
+            <a:pPr algn="ctr"/>
+          </a:p>
+        </p:txBody>
+      </p:sp>
+      <p:sp>
+        <p:nvSpPr>
+          <p:cNvPr id="7" name="TextBox 6"/>
+          <p:cNvSpPr txBox="1"/>
+          <p:nvPr/>
+        </p:nvSpPr>
+        <p:spPr>
+          <a:xfrm>
+            <a:off x="914400" y="2788920"/>
+            <a:ext cx="2844698" cy="457200"/>
+          </a:xfrm>
+          <a:prstGeom prst="rect">
+            <a:avLst/>
+          </a:prstGeom>
+          <a:noFill/>
+        </p:spPr>
+        <p:txBody>
+          <a:bodyPr wrap="square" anchor="t">
+            <a:spAutoFit/>
+          </a:bodyPr>
+          <a:lstStyle/>
+          <a:p>
+            <a:pPr algn="l">
+              <a:lnSpc>
+                <a:spcPct val="100000"/>
+              </a:lnSpc>
+            </a:pPr>
+            <a:r>
+              <a:rPr sz="1200" b="1">
                 <a:solidFill>
                   <a:srgbClr val="00FF41"/>
                 </a:solidFill>
                 <a:latin typeface="Courier New"/>
               </a:rPr>
-              <a:t>PART 4 - VERIFICATION</a:t>
-            </a:r>
-          </a:p>
-        </p:txBody>
-      </p:sp>
-      <p:sp>
-        <p:nvSpPr>
-          <p:cNvPr id="4" name="TextBox 3"/>
-          <p:cNvSpPr txBox="1"/>
-          <p:nvPr/>
-        </p:nvSpPr>
-        <p:spPr>
-          <a:xfrm>
-            <a:off x="804672" y="2743200"/>
-            <a:ext cx="10515600" cy="1554480"/>
+              <a:t>BEHAVIOR</a:t>
+            </a:r>
+          </a:p>
+        </p:txBody>
+      </p:sp>
+      <p:sp>
+        <p:nvSpPr>
+          <p:cNvPr id="8" name="TextBox 7"/>
+          <p:cNvSpPr txBox="1"/>
+          <p:nvPr/>
+        </p:nvSpPr>
+        <p:spPr>
+          <a:xfrm>
+            <a:off x="914400" y="3246120"/>
+            <a:ext cx="2844698" cy="822960"/>
           </a:xfrm>
           <a:prstGeom prst="rect">
             <a:avLst/>
@@ -9767,13 +9822,540 @@
               </a:lnSpc>
             </a:pPr>
             <a:r>
-              <a:rPr sz="4800" b="1">
+              <a:rPr sz="2000" b="1">
                 <a:solidFill>
                   <a:srgbClr val="F5F7FA"/>
                 </a:solidFill>
                 <a:latin typeface="Arial"/>
               </a:rPr>
-              <a:t>Did the values actually land?</a:t>
+              <a:t>Do they ACT differently?</a:t>
+            </a:r>
+          </a:p>
+        </p:txBody>
+      </p:sp>
+      <p:sp>
+        <p:nvSpPr>
+          <p:cNvPr id="9" name="TextBox 8"/>
+          <p:cNvSpPr txBox="1"/>
+          <p:nvPr/>
+        </p:nvSpPr>
+        <p:spPr>
+          <a:xfrm>
+            <a:off x="914400" y="4114800"/>
+            <a:ext cx="2844698" cy="1554480"/>
+          </a:xfrm>
+          <a:prstGeom prst="rect">
+            <a:avLst/>
+          </a:prstGeom>
+          <a:noFill/>
+        </p:spPr>
+        <p:txBody>
+          <a:bodyPr wrap="square" anchor="t">
+            <a:spAutoFit/>
+          </a:bodyPr>
+          <a:lstStyle/>
+          <a:p>
+            <a:pPr algn="l">
+              <a:lnSpc>
+                <a:spcPct val="110000"/>
+              </a:lnSpc>
+            </a:pPr>
+            <a:r>
+              <a:rPr sz="1500" b="0">
+                <a:solidFill>
+                  <a:srgbClr val="8A94A6"/>
+                </a:solidFill>
+                <a:latin typeface="Arial"/>
+              </a:rPr>
+              <a:t>Observation, A/B, before/after, task completion.</a:t>
+            </a:r>
+          </a:p>
+        </p:txBody>
+      </p:sp>
+      <p:sp>
+        <p:nvSpPr>
+          <p:cNvPr id="10" name="Rounded Rectangle 9"/>
+          <p:cNvSpPr/>
+          <p:nvPr/>
+        </p:nvSpPr>
+        <p:spPr>
+          <a:xfrm>
+            <a:off x="4399178" y="2468880"/>
+            <a:ext cx="3393338" cy="3383280"/>
+          </a:xfrm>
+          <a:prstGeom prst="roundRect">
+            <a:avLst/>
+          </a:prstGeom>
+          <a:solidFill>
+            <a:srgbClr val="151B26"/>
+          </a:solidFill>
+          <a:ln>
+            <a:noFill/>
+          </a:ln>
+          <a:effectLst/>
+        </p:spPr>
+        <p:style>
+          <a:lnRef idx="1">
+            <a:schemeClr val="accent1"/>
+          </a:lnRef>
+          <a:fillRef idx="3">
+            <a:schemeClr val="accent1"/>
+          </a:fillRef>
+          <a:effectRef idx="2">
+            <a:schemeClr val="accent1"/>
+          </a:effectRef>
+          <a:fontRef idx="minor">
+            <a:schemeClr val="lt1"/>
+          </a:fontRef>
+        </p:style>
+        <p:txBody>
+          <a:bodyPr rtlCol="0" anchor="ctr"/>
+          <a:lstStyle/>
+          <a:p>
+            <a:pPr algn="ctr"/>
+          </a:p>
+        </p:txBody>
+      </p:sp>
+      <p:sp>
+        <p:nvSpPr>
+          <p:cNvPr id="11" name="Rectangle 10"/>
+          <p:cNvSpPr/>
+          <p:nvPr/>
+        </p:nvSpPr>
+        <p:spPr>
+          <a:xfrm>
+            <a:off x="4399178" y="2468880"/>
+            <a:ext cx="3393338" cy="82296"/>
+          </a:xfrm>
+          <a:prstGeom prst="rect">
+            <a:avLst/>
+          </a:prstGeom>
+          <a:solidFill>
+            <a:srgbClr val="00FF41"/>
+          </a:solidFill>
+          <a:ln>
+            <a:noFill/>
+          </a:ln>
+          <a:effectLst/>
+        </p:spPr>
+        <p:style>
+          <a:lnRef idx="1">
+            <a:schemeClr val="accent1"/>
+          </a:lnRef>
+          <a:fillRef idx="3">
+            <a:schemeClr val="accent1"/>
+          </a:fillRef>
+          <a:effectRef idx="2">
+            <a:schemeClr val="accent1"/>
+          </a:effectRef>
+          <a:fontRef idx="minor">
+            <a:schemeClr val="lt1"/>
+          </a:fontRef>
+        </p:style>
+        <p:txBody>
+          <a:bodyPr rtlCol="0" anchor="ctr"/>
+          <a:lstStyle/>
+          <a:p>
+            <a:pPr algn="ctr"/>
+          </a:p>
+        </p:txBody>
+      </p:sp>
+      <p:sp>
+        <p:nvSpPr>
+          <p:cNvPr id="12" name="TextBox 11"/>
+          <p:cNvSpPr txBox="1"/>
+          <p:nvPr/>
+        </p:nvSpPr>
+        <p:spPr>
+          <a:xfrm>
+            <a:off x="4673498" y="2788920"/>
+            <a:ext cx="2844698" cy="457200"/>
+          </a:xfrm>
+          <a:prstGeom prst="rect">
+            <a:avLst/>
+          </a:prstGeom>
+          <a:noFill/>
+        </p:spPr>
+        <p:txBody>
+          <a:bodyPr wrap="square" anchor="t">
+            <a:spAutoFit/>
+          </a:bodyPr>
+          <a:lstStyle/>
+          <a:p>
+            <a:pPr algn="l">
+              <a:lnSpc>
+                <a:spcPct val="100000"/>
+              </a:lnSpc>
+            </a:pPr>
+            <a:r>
+              <a:rPr sz="1200" b="1">
+                <a:solidFill>
+                  <a:srgbClr val="00FF41"/>
+                </a:solidFill>
+                <a:latin typeface="Courier New"/>
+              </a:rPr>
+              <a:t>UNDERSTANDING</a:t>
+            </a:r>
+          </a:p>
+        </p:txBody>
+      </p:sp>
+      <p:sp>
+        <p:nvSpPr>
+          <p:cNvPr id="13" name="TextBox 12"/>
+          <p:cNvSpPr txBox="1"/>
+          <p:nvPr/>
+        </p:nvSpPr>
+        <p:spPr>
+          <a:xfrm>
+            <a:off x="4673498" y="3246120"/>
+            <a:ext cx="2844698" cy="822960"/>
+          </a:xfrm>
+          <a:prstGeom prst="rect">
+            <a:avLst/>
+          </a:prstGeom>
+          <a:noFill/>
+        </p:spPr>
+        <p:txBody>
+          <a:bodyPr wrap="square" anchor="t">
+            <a:spAutoFit/>
+          </a:bodyPr>
+          <a:lstStyle/>
+          <a:p>
+            <a:pPr algn="l">
+              <a:lnSpc>
+                <a:spcPct val="100000"/>
+              </a:lnSpc>
+            </a:pPr>
+            <a:r>
+              <a:rPr sz="2000" b="1">
+                <a:solidFill>
+                  <a:srgbClr val="F5F7FA"/>
+                </a:solidFill>
+                <a:latin typeface="Arial"/>
+              </a:rPr>
+              <a:t>Do they GRASP it?</a:t>
+            </a:r>
+          </a:p>
+        </p:txBody>
+      </p:sp>
+      <p:sp>
+        <p:nvSpPr>
+          <p:cNvPr id="14" name="TextBox 13"/>
+          <p:cNvSpPr txBox="1"/>
+          <p:nvPr/>
+        </p:nvSpPr>
+        <p:spPr>
+          <a:xfrm>
+            <a:off x="4673498" y="4114800"/>
+            <a:ext cx="2844698" cy="1554480"/>
+          </a:xfrm>
+          <a:prstGeom prst="rect">
+            <a:avLst/>
+          </a:prstGeom>
+          <a:noFill/>
+        </p:spPr>
+        <p:txBody>
+          <a:bodyPr wrap="square" anchor="t">
+            <a:spAutoFit/>
+          </a:bodyPr>
+          <a:lstStyle/>
+          <a:p>
+            <a:pPr algn="l">
+              <a:lnSpc>
+                <a:spcPct val="110000"/>
+              </a:lnSpc>
+            </a:pPr>
+            <a:r>
+              <a:rPr sz="1500" b="0">
+                <a:solidFill>
+                  <a:srgbClr val="8A94A6"/>
+                </a:solidFill>
+                <a:latin typeface="Arial"/>
+              </a:rPr>
+              <a:t>Survey, interview, think-aloud, scenario.</a:t>
+            </a:r>
+          </a:p>
+        </p:txBody>
+      </p:sp>
+      <p:sp>
+        <p:nvSpPr>
+          <p:cNvPr id="15" name="Rounded Rectangle 14"/>
+          <p:cNvSpPr/>
+          <p:nvPr/>
+        </p:nvSpPr>
+        <p:spPr>
+          <a:xfrm>
+            <a:off x="8158276" y="2468880"/>
+            <a:ext cx="3393338" cy="3383280"/>
+          </a:xfrm>
+          <a:prstGeom prst="roundRect">
+            <a:avLst/>
+          </a:prstGeom>
+          <a:solidFill>
+            <a:srgbClr val="151B26"/>
+          </a:solidFill>
+          <a:ln>
+            <a:noFill/>
+          </a:ln>
+          <a:effectLst/>
+        </p:spPr>
+        <p:style>
+          <a:lnRef idx="1">
+            <a:schemeClr val="accent1"/>
+          </a:lnRef>
+          <a:fillRef idx="3">
+            <a:schemeClr val="accent1"/>
+          </a:fillRef>
+          <a:effectRef idx="2">
+            <a:schemeClr val="accent1"/>
+          </a:effectRef>
+          <a:fontRef idx="minor">
+            <a:schemeClr val="lt1"/>
+          </a:fontRef>
+        </p:style>
+        <p:txBody>
+          <a:bodyPr rtlCol="0" anchor="ctr"/>
+          <a:lstStyle/>
+          <a:p>
+            <a:pPr algn="ctr"/>
+          </a:p>
+        </p:txBody>
+      </p:sp>
+      <p:sp>
+        <p:nvSpPr>
+          <p:cNvPr id="16" name="Rectangle 15"/>
+          <p:cNvSpPr/>
+          <p:nvPr/>
+        </p:nvSpPr>
+        <p:spPr>
+          <a:xfrm>
+            <a:off x="8158276" y="2468880"/>
+            <a:ext cx="3393338" cy="82296"/>
+          </a:xfrm>
+          <a:prstGeom prst="rect">
+            <a:avLst/>
+          </a:prstGeom>
+          <a:solidFill>
+            <a:srgbClr val="00FF41"/>
+          </a:solidFill>
+          <a:ln>
+            <a:noFill/>
+          </a:ln>
+          <a:effectLst/>
+        </p:spPr>
+        <p:style>
+          <a:lnRef idx="1">
+            <a:schemeClr val="accent1"/>
+          </a:lnRef>
+          <a:fillRef idx="3">
+            <a:schemeClr val="accent1"/>
+          </a:fillRef>
+          <a:effectRef idx="2">
+            <a:schemeClr val="accent1"/>
+          </a:effectRef>
+          <a:fontRef idx="minor">
+            <a:schemeClr val="lt1"/>
+          </a:fontRef>
+        </p:style>
+        <p:txBody>
+          <a:bodyPr rtlCol="0" anchor="ctr"/>
+          <a:lstStyle/>
+          <a:p>
+            <a:pPr algn="ctr"/>
+          </a:p>
+        </p:txBody>
+      </p:sp>
+      <p:sp>
+        <p:nvSpPr>
+          <p:cNvPr id="17" name="TextBox 16"/>
+          <p:cNvSpPr txBox="1"/>
+          <p:nvPr/>
+        </p:nvSpPr>
+        <p:spPr>
+          <a:xfrm>
+            <a:off x="8432596" y="2788920"/>
+            <a:ext cx="2844698" cy="457200"/>
+          </a:xfrm>
+          <a:prstGeom prst="rect">
+            <a:avLst/>
+          </a:prstGeom>
+          <a:noFill/>
+        </p:spPr>
+        <p:txBody>
+          <a:bodyPr wrap="square" anchor="t">
+            <a:spAutoFit/>
+          </a:bodyPr>
+          <a:lstStyle/>
+          <a:p>
+            <a:pPr algn="l">
+              <a:lnSpc>
+                <a:spcPct val="100000"/>
+              </a:lnSpc>
+            </a:pPr>
+            <a:r>
+              <a:rPr sz="1200" b="1">
+                <a:solidFill>
+                  <a:srgbClr val="00FF41"/>
+                </a:solidFill>
+                <a:latin typeface="Courier New"/>
+              </a:rPr>
+              <a:t>AFFECT</a:t>
+            </a:r>
+          </a:p>
+        </p:txBody>
+      </p:sp>
+      <p:sp>
+        <p:nvSpPr>
+          <p:cNvPr id="18" name="TextBox 17"/>
+          <p:cNvSpPr txBox="1"/>
+          <p:nvPr/>
+        </p:nvSpPr>
+        <p:spPr>
+          <a:xfrm>
+            <a:off x="8432596" y="3246120"/>
+            <a:ext cx="2844698" cy="822960"/>
+          </a:xfrm>
+          <a:prstGeom prst="rect">
+            <a:avLst/>
+          </a:prstGeom>
+          <a:noFill/>
+        </p:spPr>
+        <p:txBody>
+          <a:bodyPr wrap="square" anchor="t">
+            <a:spAutoFit/>
+          </a:bodyPr>
+          <a:lstStyle/>
+          <a:p>
+            <a:pPr algn="l">
+              <a:lnSpc>
+                <a:spcPct val="100000"/>
+              </a:lnSpc>
+            </a:pPr>
+            <a:r>
+              <a:rPr sz="2000" b="1">
+                <a:solidFill>
+                  <a:srgbClr val="F5F7FA"/>
+                </a:solidFill>
+                <a:latin typeface="Arial"/>
+              </a:rPr>
+              <a:t>Do they FEEL differently?</a:t>
+            </a:r>
+          </a:p>
+        </p:txBody>
+      </p:sp>
+      <p:sp>
+        <p:nvSpPr>
+          <p:cNvPr id="19" name="TextBox 18"/>
+          <p:cNvSpPr txBox="1"/>
+          <p:nvPr/>
+        </p:nvSpPr>
+        <p:spPr>
+          <a:xfrm>
+            <a:off x="8432596" y="4114800"/>
+            <a:ext cx="2844698" cy="1554480"/>
+          </a:xfrm>
+          <a:prstGeom prst="rect">
+            <a:avLst/>
+          </a:prstGeom>
+          <a:noFill/>
+        </p:spPr>
+        <p:txBody>
+          <a:bodyPr wrap="square" anchor="t">
+            <a:spAutoFit/>
+          </a:bodyPr>
+          <a:lstStyle/>
+          <a:p>
+            <a:pPr algn="l">
+              <a:lnSpc>
+                <a:spcPct val="110000"/>
+              </a:lnSpc>
+            </a:pPr>
+            <a:r>
+              <a:rPr sz="1500" b="0">
+                <a:solidFill>
+                  <a:srgbClr val="8A94A6"/>
+                </a:solidFill>
+                <a:latin typeface="Arial"/>
+              </a:rPr>
+              <a:t>Attitude survey, diary, interview, choice under pressure.</a:t>
+            </a:r>
+          </a:p>
+        </p:txBody>
+      </p:sp>
+      <p:sp>
+        <p:nvSpPr>
+          <p:cNvPr id="20" name="TextBox 19"/>
+          <p:cNvSpPr txBox="1"/>
+          <p:nvPr/>
+        </p:nvSpPr>
+        <p:spPr>
+          <a:xfrm>
+            <a:off x="640080" y="6355080"/>
+            <a:ext cx="10972800" cy="365760"/>
+          </a:xfrm>
+          <a:prstGeom prst="rect">
+            <a:avLst/>
+          </a:prstGeom>
+          <a:noFill/>
+        </p:spPr>
+        <p:txBody>
+          <a:bodyPr wrap="square" anchor="t">
+            <a:spAutoFit/>
+          </a:bodyPr>
+          <a:lstStyle/>
+          <a:p>
+            <a:pPr algn="l">
+              <a:lnSpc>
+                <a:spcPct val="100000"/>
+              </a:lnSpc>
+            </a:pPr>
+            <a:r>
+              <a:rPr sz="1000" b="0">
+                <a:solidFill>
+                  <a:srgbClr val="5A6474"/>
+                </a:solidFill>
+                <a:latin typeface="Courier New"/>
+              </a:rPr>
+              <a:t>Good Code, Good Vibes · TECHIE 1121 · Cornell Tech · Summer 2026</a:t>
+            </a:r>
+          </a:p>
+        </p:txBody>
+      </p:sp>
+      <p:sp>
+        <p:nvSpPr>
+          <p:cNvPr id="21" name="TextBox 20"/>
+          <p:cNvSpPr txBox="1"/>
+          <p:nvPr/>
+        </p:nvSpPr>
+        <p:spPr>
+          <a:xfrm>
+            <a:off x="640080" y="6053328"/>
+            <a:ext cx="10972800" cy="292608"/>
+          </a:xfrm>
+          <a:prstGeom prst="rect">
+            <a:avLst/>
+          </a:prstGeom>
+          <a:noFill/>
+        </p:spPr>
+        <p:txBody>
+          <a:bodyPr wrap="square" anchor="t">
+            <a:spAutoFit/>
+          </a:bodyPr>
+          <a:lstStyle/>
+          <a:p>
+            <a:pPr algn="l">
+              <a:lnSpc>
+                <a:spcPct val="100000"/>
+              </a:lnSpc>
+            </a:pPr>
+            <a:r>
+              <a:rPr sz="950" b="0">
+                <a:solidFill>
+                  <a:srgbClr val="5A6474"/>
+                </a:solidFill>
+                <a:latin typeface="Courier New"/>
+              </a:rPr>
+              <a:t>Verification lenses: Values at Play - VAP course, Engelmann &amp; Nissenbaum (Cornell Tech)</a:t>
             </a:r>
           </a:p>
         </p:txBody>
@@ -9838,7 +10420,7 @@
                 </a:solidFill>
                 <a:latin typeface="Courier New"/>
               </a:rPr>
-              <a:t>VERIFICATION</a:t>
+              <a:t>EXAMPLE - BEHAVIOR</a:t>
             </a:r>
           </a:p>
         </p:txBody>
@@ -9887,16 +10469,41 @@
           </a:p>
         </p:txBody>
       </p:sp>
-      <p:sp>
-        <p:nvSpPr>
-          <p:cNvPr id="4" name="TextBox 3"/>
+      <p:pic>
+        <p:nvPicPr>
+          <p:cNvPr id="4" name="Picture 3" descr="smart_meter.jpg"/>
+          <p:cNvPicPr>
+            <a:picLocks noChangeAspect="1"/>
+          </p:cNvPicPr>
+          <p:nvPr/>
+        </p:nvPicPr>
+        <p:blipFill>
+          <a:blip r:embed="rId2"/>
+          <a:srcRect l="25111" r="25111"/>
+          <a:stretch>
+            <a:fillRect/>
+          </a:stretch>
+        </p:blipFill>
+        <p:spPr>
+          <a:xfrm>
+            <a:off x="7071055" y="0"/>
+            <a:ext cx="5120640" cy="6858000"/>
+          </a:xfrm>
+          <a:prstGeom prst="rect">
+            <a:avLst/>
+          </a:prstGeom>
+        </p:spPr>
+      </p:pic>
+      <p:sp>
+        <p:nvSpPr>
+          <p:cNvPr id="5" name="TextBox 4"/>
           <p:cNvSpPr txBox="1"/>
           <p:nvPr/>
         </p:nvSpPr>
         <p:spPr>
           <a:xfrm>
             <a:off x="640080" y="1188720"/>
-            <a:ext cx="10972800" cy="1097280"/>
+            <a:ext cx="6019495" cy="1280160"/>
           </a:xfrm>
           <a:prstGeom prst="rect">
             <a:avLst/>
@@ -9915,62 +10522,62 @@
               </a:lnSpc>
             </a:pPr>
             <a:r>
-              <a:rPr sz="3400" b="1">
+              <a:rPr sz="3000" b="1">
                 <a:solidFill>
                   <a:srgbClr val="F5F7FA"/>
                 </a:solidFill>
                 <a:latin typeface="Arial"/>
               </a:rPr>
-              <a:t>Assessing whether the values made it in</a:t>
-            </a:r>
-          </a:p>
-        </p:txBody>
-      </p:sp>
-      <p:sp>
-        <p:nvSpPr>
-          <p:cNvPr id="5" name="TextBox 4"/>
-          <p:cNvSpPr txBox="1"/>
-          <p:nvPr/>
-        </p:nvSpPr>
-        <p:spPr>
-          <a:xfrm>
-            <a:off x="658368" y="2286000"/>
-            <a:ext cx="10881360" cy="3657600"/>
-          </a:xfrm>
-          <a:prstGeom prst="rect">
-            <a:avLst/>
-          </a:prstGeom>
-          <a:noFill/>
-        </p:spPr>
-        <p:txBody>
-          <a:bodyPr wrap="square" anchor="t">
-            <a:spAutoFit/>
-          </a:bodyPr>
-          <a:lstStyle/>
-          <a:p>
-            <a:pPr algn="l">
-              <a:lnSpc>
-                <a:spcPct val="112000"/>
-              </a:lnSpc>
-            </a:pPr>
-            <a:r>
-              <a:rPr sz="2100" b="0">
+              <a:t>Does the design change what people DO?</a:t>
+            </a:r>
+          </a:p>
+        </p:txBody>
+      </p:sp>
+      <p:sp>
+        <p:nvSpPr>
+          <p:cNvPr id="6" name="TextBox 5"/>
+          <p:cNvSpPr txBox="1"/>
+          <p:nvPr/>
+        </p:nvSpPr>
+        <p:spPr>
+          <a:xfrm>
+            <a:off x="640080" y="2560320"/>
+            <a:ext cx="6019495" cy="3108960"/>
+          </a:xfrm>
+          <a:prstGeom prst="rect">
+            <a:avLst/>
+          </a:prstGeom>
+          <a:noFill/>
+        </p:spPr>
+        <p:txBody>
+          <a:bodyPr wrap="square" anchor="t">
+            <a:spAutoFit/>
+          </a:bodyPr>
+          <a:lstStyle/>
+          <a:p>
+            <a:pPr algn="l">
+              <a:lnSpc>
+                <a:spcPct val="116000"/>
+              </a:lnSpc>
+            </a:pPr>
+            <a:r>
+              <a:rPr sz="1800" b="0">
                 <a:solidFill>
                   <a:srgbClr val="F5F7FA"/>
                 </a:solidFill>
                 <a:latin typeface="Arial"/>
               </a:rPr>
-              <a:t>"Verification involves assessing whether efforts to integrate values have succeeded." Cyclical - ask at every step.</a:t>
-            </a:r>
-          </a:p>
-          <a:p>
-            <a:pPr algn="l">
-              <a:lnSpc>
-                <a:spcPct val="112000"/>
-              </a:lnSpc>
-            </a:pPr>
-            <a:r>
-              <a:rPr sz="2000" b="0">
+              <a:t>A smart meter only "works" for sustainability if people actually use less. Behavior is the sharpest test.</a:t>
+            </a:r>
+          </a:p>
+          <a:p>
+            <a:pPr algn="l">
+              <a:lnSpc>
+                <a:spcPct val="116000"/>
+              </a:lnSpc>
+            </a:pPr>
+            <a:r>
+              <a:rPr sz="1900" b="0">
                 <a:solidFill>
                   <a:srgbClr val="F5F7FA"/>
                 </a:solidFill>
@@ -9982,24 +10589,107 @@
           <a:p>
             <a:pPr algn="l">
               <a:lnSpc>
-                <a:spcPct val="112000"/>
-              </a:lnSpc>
-            </a:pPr>
-            <a:r>
-              <a:rPr sz="1700" b="0">
+                <a:spcPct val="116000"/>
+              </a:lnSpc>
+            </a:pPr>
+            <a:r>
+              <a:rPr sz="1600" b="0">
                 <a:solidFill>
                   <a:srgbClr val="8A94A6"/>
                 </a:solidFill>
                 <a:latin typeface="Arial"/>
               </a:rPr>
-              <a:t>Three ways to ask - and your operationalization decides which one fits.</a:t>
-            </a:r>
-          </a:p>
-        </p:txBody>
-      </p:sp>
-      <p:sp>
-        <p:nvSpPr>
-          <p:cNvPr id="6" name="TextBox 5"/>
+              <a:t>Verify how: prototype - A/B - before/after - task completion.</a:t>
+            </a:r>
+          </a:p>
+        </p:txBody>
+      </p:sp>
+      <p:sp>
+        <p:nvSpPr>
+          <p:cNvPr id="7" name="Rectangle 6"/>
+          <p:cNvSpPr/>
+          <p:nvPr/>
+        </p:nvSpPr>
+        <p:spPr>
+          <a:xfrm>
+            <a:off x="7071055" y="6547104"/>
+            <a:ext cx="5120640" cy="310896"/>
+          </a:xfrm>
+          <a:prstGeom prst="rect">
+            <a:avLst/>
+          </a:prstGeom>
+          <a:solidFill>
+            <a:srgbClr val="0B0E14"/>
+          </a:solidFill>
+          <a:ln>
+            <a:noFill/>
+          </a:ln>
+          <a:effectLst/>
+        </p:spPr>
+        <p:style>
+          <a:lnRef idx="1">
+            <a:schemeClr val="accent1"/>
+          </a:lnRef>
+          <a:fillRef idx="3">
+            <a:schemeClr val="accent1"/>
+          </a:fillRef>
+          <a:effectRef idx="2">
+            <a:schemeClr val="accent1"/>
+          </a:effectRef>
+          <a:fontRef idx="minor">
+            <a:schemeClr val="lt1"/>
+          </a:fontRef>
+        </p:style>
+        <p:txBody>
+          <a:bodyPr rtlCol="0" anchor="ctr"/>
+          <a:lstStyle/>
+          <a:p>
+            <a:pPr algn="ctr"/>
+          </a:p>
+        </p:txBody>
+      </p:sp>
+      <p:sp>
+        <p:nvSpPr>
+          <p:cNvPr id="8" name="TextBox 7"/>
+          <p:cNvSpPr txBox="1"/>
+          <p:nvPr/>
+        </p:nvSpPr>
+        <p:spPr>
+          <a:xfrm>
+            <a:off x="7208215" y="6565392"/>
+            <a:ext cx="4846320" cy="274320"/>
+          </a:xfrm>
+          <a:prstGeom prst="rect">
+            <a:avLst/>
+          </a:prstGeom>
+          <a:noFill/>
+        </p:spPr>
+        <p:txBody>
+          <a:bodyPr wrap="square" anchor="t">
+            <a:spAutoFit/>
+          </a:bodyPr>
+          <a:lstStyle/>
+          <a:p>
+            <a:pPr algn="l">
+              <a:lnSpc>
+                <a:spcPct val="100000"/>
+              </a:lnSpc>
+            </a:pPr>
+            <a:r>
+              <a:rPr sz="850" b="0">
+                <a:solidFill>
+                  <a:srgbClr val="8A94A6"/>
+                </a:solidFill>
+                <a:latin typeface="Courier New"/>
+              </a:rPr>
+              <a:t>Behavior verification (Values at Play) - smart-meter image, educational use</a:t>
+            </a:r>
+          </a:p>
+        </p:txBody>
+      </p:sp>
+      <p:sp>
+        <p:nvSpPr>
+          <p:cNvPr id="9" name="TextBox 8"/>
           <p:cNvSpPr txBox="1"/>
           <p:nvPr/>
         </p:nvSpPr>
@@ -10096,7 +10786,7 @@
                 </a:solidFill>
                 <a:latin typeface="Courier New"/>
               </a:rPr>
-              <a:t>THE THREE LENSES</a:t>
+              <a:t>PICK THE INSTRUMENT THAT FITS YOUR VALUE</a:t>
             </a:r>
           </a:p>
         </p:txBody>
@@ -10154,7 +10844,7 @@
         <p:spPr>
           <a:xfrm>
             <a:off x="640080" y="1188720"/>
-            <a:ext cx="10972800" cy="914400"/>
+            <a:ext cx="10972800" cy="1097280"/>
           </a:xfrm>
           <a:prstGeom prst="rect">
             <a:avLst/>
@@ -10173,635 +10863,143 @@
               </a:lnSpc>
             </a:pPr>
             <a:r>
-              <a:rPr sz="3200" b="1">
+              <a:rPr sz="3400" b="1">
                 <a:solidFill>
                   <a:srgbClr val="F5F7FA"/>
                 </a:solidFill>
                 <a:latin typeface="Arial"/>
               </a:rPr>
-              <a:t>Behavior - Understanding - Affect</a:t>
-            </a:r>
-          </a:p>
-        </p:txBody>
-      </p:sp>
-      <p:sp>
-        <p:nvSpPr>
-          <p:cNvPr id="5" name="Rounded Rectangle 4"/>
-          <p:cNvSpPr/>
-          <p:nvPr/>
-        </p:nvSpPr>
-        <p:spPr>
-          <a:xfrm>
-            <a:off x="640080" y="2468880"/>
-            <a:ext cx="3393338" cy="3383280"/>
-          </a:xfrm>
-          <a:prstGeom prst="roundRect">
-            <a:avLst/>
-          </a:prstGeom>
-          <a:solidFill>
-            <a:srgbClr val="151B26"/>
-          </a:solidFill>
-          <a:ln>
-            <a:noFill/>
-          </a:ln>
-          <a:effectLst/>
-        </p:spPr>
-        <p:style>
-          <a:lnRef idx="1">
-            <a:schemeClr val="accent1"/>
-          </a:lnRef>
-          <a:fillRef idx="3">
-            <a:schemeClr val="accent1"/>
-          </a:fillRef>
-          <a:effectRef idx="2">
-            <a:schemeClr val="accent1"/>
-          </a:effectRef>
-          <a:fontRef idx="minor">
-            <a:schemeClr val="lt1"/>
-          </a:fontRef>
-        </p:style>
-        <p:txBody>
-          <a:bodyPr rtlCol="0" anchor="ctr"/>
-          <a:lstStyle/>
-          <a:p>
-            <a:pPr algn="ctr"/>
-          </a:p>
-        </p:txBody>
-      </p:sp>
-      <p:sp>
-        <p:nvSpPr>
-          <p:cNvPr id="6" name="Rectangle 5"/>
-          <p:cNvSpPr/>
-          <p:nvPr/>
-        </p:nvSpPr>
-        <p:spPr>
-          <a:xfrm>
-            <a:off x="640080" y="2468880"/>
-            <a:ext cx="3393338" cy="82296"/>
-          </a:xfrm>
-          <a:prstGeom prst="rect">
-            <a:avLst/>
-          </a:prstGeom>
-          <a:solidFill>
-            <a:srgbClr val="00FF41"/>
-          </a:solidFill>
-          <a:ln>
-            <a:noFill/>
-          </a:ln>
-          <a:effectLst/>
-        </p:spPr>
-        <p:style>
-          <a:lnRef idx="1">
-            <a:schemeClr val="accent1"/>
-          </a:lnRef>
-          <a:fillRef idx="3">
-            <a:schemeClr val="accent1"/>
-          </a:fillRef>
-          <a:effectRef idx="2">
-            <a:schemeClr val="accent1"/>
-          </a:effectRef>
-          <a:fontRef idx="minor">
-            <a:schemeClr val="lt1"/>
-          </a:fontRef>
-        </p:style>
-        <p:txBody>
-          <a:bodyPr rtlCol="0" anchor="ctr"/>
-          <a:lstStyle/>
-          <a:p>
-            <a:pPr algn="ctr"/>
-          </a:p>
-        </p:txBody>
-      </p:sp>
-      <p:sp>
-        <p:nvSpPr>
-          <p:cNvPr id="7" name="TextBox 6"/>
-          <p:cNvSpPr txBox="1"/>
-          <p:nvPr/>
-        </p:nvSpPr>
-        <p:spPr>
-          <a:xfrm>
-            <a:off x="914400" y="2788920"/>
-            <a:ext cx="2844698" cy="457200"/>
-          </a:xfrm>
-          <a:prstGeom prst="rect">
-            <a:avLst/>
-          </a:prstGeom>
-          <a:noFill/>
-        </p:spPr>
-        <p:txBody>
-          <a:bodyPr wrap="square" anchor="t">
-            <a:spAutoFit/>
-          </a:bodyPr>
-          <a:lstStyle/>
-          <a:p>
-            <a:pPr algn="l">
-              <a:lnSpc>
-                <a:spcPct val="100000"/>
-              </a:lnSpc>
-            </a:pPr>
-            <a:r>
-              <a:rPr sz="1200" b="1">
+              <a:t>Examples - tie the tool to the value you are analyzing</a:t>
+            </a:r>
+          </a:p>
+        </p:txBody>
+      </p:sp>
+      <p:sp>
+        <p:nvSpPr>
+          <p:cNvPr id="5" name="TextBox 4"/>
+          <p:cNvSpPr txBox="1"/>
+          <p:nvPr/>
+        </p:nvSpPr>
+        <p:spPr>
+          <a:xfrm>
+            <a:off x="658368" y="2286000"/>
+            <a:ext cx="10881360" cy="3657600"/>
+          </a:xfrm>
+          <a:prstGeom prst="rect">
+            <a:avLst/>
+          </a:prstGeom>
+          <a:noFill/>
+        </p:spPr>
+        <p:txBody>
+          <a:bodyPr wrap="square" anchor="t">
+            <a:spAutoFit/>
+          </a:bodyPr>
+          <a:lstStyle/>
+          <a:p>
+            <a:pPr algn="l">
+              <a:lnSpc>
+                <a:spcPct val="112000"/>
+              </a:lnSpc>
+            </a:pPr>
+            <a:r>
+              <a:rPr sz="2000" b="1">
                 <a:solidFill>
                   <a:srgbClr val="00FF41"/>
                 </a:solidFill>
-                <a:latin typeface="Courier New"/>
-              </a:rPr>
-              <a:t>BEHAVIOR</a:t>
-            </a:r>
-          </a:p>
-        </p:txBody>
-      </p:sp>
-      <p:sp>
-        <p:nvSpPr>
-          <p:cNvPr id="8" name="TextBox 7"/>
-          <p:cNvSpPr txBox="1"/>
-          <p:nvPr/>
-        </p:nvSpPr>
-        <p:spPr>
-          <a:xfrm>
-            <a:off x="914400" y="3246120"/>
-            <a:ext cx="2844698" cy="822960"/>
-          </a:xfrm>
-          <a:prstGeom prst="rect">
-            <a:avLst/>
-          </a:prstGeom>
-          <a:noFill/>
-        </p:spPr>
-        <p:txBody>
-          <a:bodyPr wrap="square" anchor="t">
-            <a:spAutoFit/>
-          </a:bodyPr>
-          <a:lstStyle/>
-          <a:p>
-            <a:pPr algn="l">
-              <a:lnSpc>
-                <a:spcPct val="100000"/>
+                <a:latin typeface="Arial"/>
+              </a:rPr>
+              <a:t>•  </a:t>
+            </a:r>
+            <a:r>
+              <a:rPr sz="2000" b="0">
+                <a:solidFill>
+                  <a:srgbClr val="F5F7FA"/>
+                </a:solidFill>
+                <a:latin typeface="Arial"/>
+              </a:rPr>
+              <a:t>Beauty / craft / originality -&gt; the Vibed Slop Detector (is it generic AI slop?), or UEQ attractiveness.</a:t>
+            </a:r>
+          </a:p>
+          <a:p>
+            <a:pPr algn="l">
+              <a:lnSpc>
+                <a:spcPct val="112000"/>
               </a:lnSpc>
             </a:pPr>
             <a:r>
               <a:rPr sz="2000" b="1">
                 <a:solidFill>
+                  <a:srgbClr val="00FF41"/>
+                </a:solidFill>
+                <a:latin typeface="Arial"/>
+              </a:rPr>
+              <a:t>•  </a:t>
+            </a:r>
+            <a:r>
+              <a:rPr sz="2000" b="0">
+                <a:solidFill>
                   <a:srgbClr val="F5F7FA"/>
                 </a:solidFill>
                 <a:latin typeface="Arial"/>
               </a:rPr>
-              <a:t>Do they ACT differently?</a:t>
-            </a:r>
-          </a:p>
-        </p:txBody>
-      </p:sp>
-      <p:sp>
-        <p:nvSpPr>
-          <p:cNvPr id="9" name="TextBox 8"/>
-          <p:cNvSpPr txBox="1"/>
-          <p:nvPr/>
-        </p:nvSpPr>
-        <p:spPr>
-          <a:xfrm>
-            <a:off x="914400" y="4114800"/>
-            <a:ext cx="2844698" cy="1554480"/>
-          </a:xfrm>
-          <a:prstGeom prst="rect">
-            <a:avLst/>
-          </a:prstGeom>
-          <a:noFill/>
-        </p:spPr>
-        <p:txBody>
-          <a:bodyPr wrap="square" anchor="t">
-            <a:spAutoFit/>
-          </a:bodyPr>
-          <a:lstStyle/>
-          <a:p>
-            <a:pPr algn="l">
-              <a:lnSpc>
-                <a:spcPct val="110000"/>
-              </a:lnSpc>
-            </a:pPr>
-            <a:r>
-              <a:rPr sz="1500" b="0">
-                <a:solidFill>
-                  <a:srgbClr val="8A94A6"/>
+              <a:t>Autonomy / competence / wellbeing -&gt; METUX + Self-Determination scales.</a:t>
+            </a:r>
+          </a:p>
+          <a:p>
+            <a:pPr algn="l">
+              <a:lnSpc>
+                <a:spcPct val="112000"/>
+              </a:lnSpc>
+            </a:pPr>
+            <a:r>
+              <a:rPr sz="2000" b="1">
+                <a:solidFill>
+                  <a:srgbClr val="00FF41"/>
                 </a:solidFill>
                 <a:latin typeface="Arial"/>
               </a:rPr>
-              <a:t>Observation, A/B, before/after, task completion.</a:t>
-            </a:r>
-          </a:p>
-        </p:txBody>
-      </p:sp>
-      <p:sp>
-        <p:nvSpPr>
-          <p:cNvPr id="10" name="Rounded Rectangle 9"/>
-          <p:cNvSpPr/>
-          <p:nvPr/>
-        </p:nvSpPr>
-        <p:spPr>
-          <a:xfrm>
-            <a:off x="4399178" y="2468880"/>
-            <a:ext cx="3393338" cy="3383280"/>
-          </a:xfrm>
-          <a:prstGeom prst="roundRect">
-            <a:avLst/>
-          </a:prstGeom>
-          <a:solidFill>
-            <a:srgbClr val="151B26"/>
-          </a:solidFill>
-          <a:ln>
-            <a:noFill/>
-          </a:ln>
-          <a:effectLst/>
-        </p:spPr>
-        <p:style>
-          <a:lnRef idx="1">
-            <a:schemeClr val="accent1"/>
-          </a:lnRef>
-          <a:fillRef idx="3">
-            <a:schemeClr val="accent1"/>
-          </a:fillRef>
-          <a:effectRef idx="2">
-            <a:schemeClr val="accent1"/>
-          </a:effectRef>
-          <a:fontRef idx="minor">
-            <a:schemeClr val="lt1"/>
-          </a:fontRef>
-        </p:style>
-        <p:txBody>
-          <a:bodyPr rtlCol="0" anchor="ctr"/>
-          <a:lstStyle/>
-          <a:p>
-            <a:pPr algn="ctr"/>
-          </a:p>
-        </p:txBody>
-      </p:sp>
-      <p:sp>
-        <p:nvSpPr>
-          <p:cNvPr id="11" name="Rectangle 10"/>
-          <p:cNvSpPr/>
-          <p:nvPr/>
-        </p:nvSpPr>
-        <p:spPr>
-          <a:xfrm>
-            <a:off x="4399178" y="2468880"/>
-            <a:ext cx="3393338" cy="82296"/>
-          </a:xfrm>
-          <a:prstGeom prst="rect">
-            <a:avLst/>
-          </a:prstGeom>
-          <a:solidFill>
-            <a:srgbClr val="00FF41"/>
-          </a:solidFill>
-          <a:ln>
-            <a:noFill/>
-          </a:ln>
-          <a:effectLst/>
-        </p:spPr>
-        <p:style>
-          <a:lnRef idx="1">
-            <a:schemeClr val="accent1"/>
-          </a:lnRef>
-          <a:fillRef idx="3">
-            <a:schemeClr val="accent1"/>
-          </a:fillRef>
-          <a:effectRef idx="2">
-            <a:schemeClr val="accent1"/>
-          </a:effectRef>
-          <a:fontRef idx="minor">
-            <a:schemeClr val="lt1"/>
-          </a:fontRef>
-        </p:style>
-        <p:txBody>
-          <a:bodyPr rtlCol="0" anchor="ctr"/>
-          <a:lstStyle/>
-          <a:p>
-            <a:pPr algn="ctr"/>
-          </a:p>
-        </p:txBody>
-      </p:sp>
-      <p:sp>
-        <p:nvSpPr>
-          <p:cNvPr id="12" name="TextBox 11"/>
-          <p:cNvSpPr txBox="1"/>
-          <p:nvPr/>
-        </p:nvSpPr>
-        <p:spPr>
-          <a:xfrm>
-            <a:off x="4673498" y="2788920"/>
-            <a:ext cx="2844698" cy="457200"/>
-          </a:xfrm>
-          <a:prstGeom prst="rect">
-            <a:avLst/>
-          </a:prstGeom>
-          <a:noFill/>
-        </p:spPr>
-        <p:txBody>
-          <a:bodyPr wrap="square" anchor="t">
-            <a:spAutoFit/>
-          </a:bodyPr>
-          <a:lstStyle/>
-          <a:p>
-            <a:pPr algn="l">
-              <a:lnSpc>
-                <a:spcPct val="100000"/>
-              </a:lnSpc>
-            </a:pPr>
-            <a:r>
-              <a:rPr sz="1200" b="1">
+              <a:t>•  </a:t>
+            </a:r>
+            <a:r>
+              <a:rPr sz="2000" b="0">
+                <a:solidFill>
+                  <a:srgbClr val="F5F7FA"/>
+                </a:solidFill>
+                <a:latin typeface="Arial"/>
+              </a:rPr>
+              <a:t>Trust / warmth / safety -&gt; a validated scale from the HRI Scale Database.</a:t>
+            </a:r>
+          </a:p>
+          <a:p>
+            <a:pPr algn="l">
+              <a:lnSpc>
+                <a:spcPct val="112000"/>
+              </a:lnSpc>
+            </a:pPr>
+            <a:r>
+              <a:rPr sz="2000" b="1">
                 <a:solidFill>
                   <a:srgbClr val="00FF41"/>
                 </a:solidFill>
-                <a:latin typeface="Courier New"/>
-              </a:rPr>
-              <a:t>UNDERSTANDING</a:t>
-            </a:r>
-          </a:p>
-        </p:txBody>
-      </p:sp>
-      <p:sp>
-        <p:nvSpPr>
-          <p:cNvPr id="13" name="TextBox 12"/>
-          <p:cNvSpPr txBox="1"/>
-          <p:nvPr/>
-        </p:nvSpPr>
-        <p:spPr>
-          <a:xfrm>
-            <a:off x="4673498" y="3246120"/>
-            <a:ext cx="2844698" cy="822960"/>
-          </a:xfrm>
-          <a:prstGeom prst="rect">
-            <a:avLst/>
-          </a:prstGeom>
-          <a:noFill/>
-        </p:spPr>
-        <p:txBody>
-          <a:bodyPr wrap="square" anchor="t">
-            <a:spAutoFit/>
-          </a:bodyPr>
-          <a:lstStyle/>
-          <a:p>
-            <a:pPr algn="l">
-              <a:lnSpc>
-                <a:spcPct val="100000"/>
-              </a:lnSpc>
-            </a:pPr>
-            <a:r>
-              <a:rPr sz="2000" b="1">
+                <a:latin typeface="Arial"/>
+              </a:rPr>
+              <a:t>•  </a:t>
+            </a:r>
+            <a:r>
+              <a:rPr sz="2000" b="0">
                 <a:solidFill>
                   <a:srgbClr val="F5F7FA"/>
                 </a:solidFill>
                 <a:latin typeface="Arial"/>
               </a:rPr>
-              <a:t>Do they GRASP it?</a:t>
-            </a:r>
-          </a:p>
-        </p:txBody>
-      </p:sp>
-      <p:sp>
-        <p:nvSpPr>
-          <p:cNvPr id="14" name="TextBox 13"/>
-          <p:cNvSpPr txBox="1"/>
-          <p:nvPr/>
-        </p:nvSpPr>
-        <p:spPr>
-          <a:xfrm>
-            <a:off x="4673498" y="4114800"/>
-            <a:ext cx="2844698" cy="1554480"/>
-          </a:xfrm>
-          <a:prstGeom prst="rect">
-            <a:avLst/>
-          </a:prstGeom>
-          <a:noFill/>
-        </p:spPr>
-        <p:txBody>
-          <a:bodyPr wrap="square" anchor="t">
-            <a:spAutoFit/>
-          </a:bodyPr>
-          <a:lstStyle/>
-          <a:p>
-            <a:pPr algn="l">
-              <a:lnSpc>
-                <a:spcPct val="110000"/>
-              </a:lnSpc>
-            </a:pPr>
-            <a:r>
-              <a:rPr sz="1500" b="0">
-                <a:solidFill>
-                  <a:srgbClr val="8A94A6"/>
-                </a:solidFill>
-                <a:latin typeface="Arial"/>
-              </a:rPr>
-              <a:t>Survey, interview, think-aloud, scenario.</a:t>
-            </a:r>
-          </a:p>
-        </p:txBody>
-      </p:sp>
-      <p:sp>
-        <p:nvSpPr>
-          <p:cNvPr id="15" name="Rounded Rectangle 14"/>
-          <p:cNvSpPr/>
-          <p:nvPr/>
-        </p:nvSpPr>
-        <p:spPr>
-          <a:xfrm>
-            <a:off x="8158276" y="2468880"/>
-            <a:ext cx="3393338" cy="3383280"/>
-          </a:xfrm>
-          <a:prstGeom prst="roundRect">
-            <a:avLst/>
-          </a:prstGeom>
-          <a:solidFill>
-            <a:srgbClr val="151B26"/>
-          </a:solidFill>
-          <a:ln>
-            <a:noFill/>
-          </a:ln>
-          <a:effectLst/>
-        </p:spPr>
-        <p:style>
-          <a:lnRef idx="1">
-            <a:schemeClr val="accent1"/>
-          </a:lnRef>
-          <a:fillRef idx="3">
-            <a:schemeClr val="accent1"/>
-          </a:fillRef>
-          <a:effectRef idx="2">
-            <a:schemeClr val="accent1"/>
-          </a:effectRef>
-          <a:fontRef idx="minor">
-            <a:schemeClr val="lt1"/>
-          </a:fontRef>
-        </p:style>
-        <p:txBody>
-          <a:bodyPr rtlCol="0" anchor="ctr"/>
-          <a:lstStyle/>
-          <a:p>
-            <a:pPr algn="ctr"/>
-          </a:p>
-        </p:txBody>
-      </p:sp>
-      <p:sp>
-        <p:nvSpPr>
-          <p:cNvPr id="16" name="Rectangle 15"/>
-          <p:cNvSpPr/>
-          <p:nvPr/>
-        </p:nvSpPr>
-        <p:spPr>
-          <a:xfrm>
-            <a:off x="8158276" y="2468880"/>
-            <a:ext cx="3393338" cy="82296"/>
-          </a:xfrm>
-          <a:prstGeom prst="rect">
-            <a:avLst/>
-          </a:prstGeom>
-          <a:solidFill>
-            <a:srgbClr val="00FF41"/>
-          </a:solidFill>
-          <a:ln>
-            <a:noFill/>
-          </a:ln>
-          <a:effectLst/>
-        </p:spPr>
-        <p:style>
-          <a:lnRef idx="1">
-            <a:schemeClr val="accent1"/>
-          </a:lnRef>
-          <a:fillRef idx="3">
-            <a:schemeClr val="accent1"/>
-          </a:fillRef>
-          <a:effectRef idx="2">
-            <a:schemeClr val="accent1"/>
-          </a:effectRef>
-          <a:fontRef idx="minor">
-            <a:schemeClr val="lt1"/>
-          </a:fontRef>
-        </p:style>
-        <p:txBody>
-          <a:bodyPr rtlCol="0" anchor="ctr"/>
-          <a:lstStyle/>
-          <a:p>
-            <a:pPr algn="ctr"/>
-          </a:p>
-        </p:txBody>
-      </p:sp>
-      <p:sp>
-        <p:nvSpPr>
-          <p:cNvPr id="17" name="TextBox 16"/>
-          <p:cNvSpPr txBox="1"/>
-          <p:nvPr/>
-        </p:nvSpPr>
-        <p:spPr>
-          <a:xfrm>
-            <a:off x="8432596" y="2788920"/>
-            <a:ext cx="2844698" cy="457200"/>
-          </a:xfrm>
-          <a:prstGeom prst="rect">
-            <a:avLst/>
-          </a:prstGeom>
-          <a:noFill/>
-        </p:spPr>
-        <p:txBody>
-          <a:bodyPr wrap="square" anchor="t">
-            <a:spAutoFit/>
-          </a:bodyPr>
-          <a:lstStyle/>
-          <a:p>
-            <a:pPr algn="l">
-              <a:lnSpc>
-                <a:spcPct val="100000"/>
-              </a:lnSpc>
-            </a:pPr>
-            <a:r>
-              <a:rPr sz="1200" b="1">
-                <a:solidFill>
-                  <a:srgbClr val="00FF41"/>
-                </a:solidFill>
-                <a:latin typeface="Courier New"/>
-              </a:rPr>
-              <a:t>AFFECT</a:t>
-            </a:r>
-          </a:p>
-        </p:txBody>
-      </p:sp>
-      <p:sp>
-        <p:nvSpPr>
-          <p:cNvPr id="18" name="TextBox 17"/>
-          <p:cNvSpPr txBox="1"/>
-          <p:nvPr/>
-        </p:nvSpPr>
-        <p:spPr>
-          <a:xfrm>
-            <a:off x="8432596" y="3246120"/>
-            <a:ext cx="2844698" cy="822960"/>
-          </a:xfrm>
-          <a:prstGeom prst="rect">
-            <a:avLst/>
-          </a:prstGeom>
-          <a:noFill/>
-        </p:spPr>
-        <p:txBody>
-          <a:bodyPr wrap="square" anchor="t">
-            <a:spAutoFit/>
-          </a:bodyPr>
-          <a:lstStyle/>
-          <a:p>
-            <a:pPr algn="l">
-              <a:lnSpc>
-                <a:spcPct val="100000"/>
-              </a:lnSpc>
-            </a:pPr>
-            <a:r>
-              <a:rPr sz="2000" b="1">
-                <a:solidFill>
-                  <a:srgbClr val="F5F7FA"/>
-                </a:solidFill>
-                <a:latin typeface="Arial"/>
-              </a:rPr>
-              <a:t>Do they FEEL differently?</a:t>
-            </a:r>
-          </a:p>
-        </p:txBody>
-      </p:sp>
-      <p:sp>
-        <p:nvSpPr>
-          <p:cNvPr id="19" name="TextBox 18"/>
-          <p:cNvSpPr txBox="1"/>
-          <p:nvPr/>
-        </p:nvSpPr>
-        <p:spPr>
-          <a:xfrm>
-            <a:off x="8432596" y="4114800"/>
-            <a:ext cx="2844698" cy="1554480"/>
-          </a:xfrm>
-          <a:prstGeom prst="rect">
-            <a:avLst/>
-          </a:prstGeom>
-          <a:noFill/>
-        </p:spPr>
-        <p:txBody>
-          <a:bodyPr wrap="square" anchor="t">
-            <a:spAutoFit/>
-          </a:bodyPr>
-          <a:lstStyle/>
-          <a:p>
-            <a:pPr algn="l">
-              <a:lnSpc>
-                <a:spcPct val="110000"/>
-              </a:lnSpc>
-            </a:pPr>
-            <a:r>
-              <a:rPr sz="1500" b="0">
-                <a:solidFill>
-                  <a:srgbClr val="8A94A6"/>
-                </a:solidFill>
-                <a:latin typeface="Arial"/>
-              </a:rPr>
-              <a:t>Attitude survey, diary, interview, choice under pressure.</a:t>
-            </a:r>
-          </a:p>
-        </p:txBody>
-      </p:sp>
-      <p:sp>
-        <p:nvSpPr>
-          <p:cNvPr id="20" name="TextBox 19"/>
+              <a:t>Overall UX beyond usability -&gt; UEQ. The instrument has to match the value - don't default to UEQ.</a:t>
+            </a:r>
+          </a:p>
+        </p:txBody>
+      </p:sp>
+      <p:sp>
+        <p:nvSpPr>
+          <p:cNvPr id="6" name="TextBox 5"/>
           <p:cNvSpPr txBox="1"/>
           <p:nvPr/>
         </p:nvSpPr>
@@ -10834,45 +11032,6 @@
                 <a:latin typeface="Courier New"/>
               </a:rPr>
               <a:t>Good Code, Good Vibes · TECHIE 1121 · Cornell Tech · Summer 2026</a:t>
-            </a:r>
-          </a:p>
-        </p:txBody>
-      </p:sp>
-      <p:sp>
-        <p:nvSpPr>
-          <p:cNvPr id="21" name="TextBox 20"/>
-          <p:cNvSpPr txBox="1"/>
-          <p:nvPr/>
-        </p:nvSpPr>
-        <p:spPr>
-          <a:xfrm>
-            <a:off x="640080" y="6053328"/>
-            <a:ext cx="10972800" cy="292608"/>
-          </a:xfrm>
-          <a:prstGeom prst="rect">
-            <a:avLst/>
-          </a:prstGeom>
-          <a:noFill/>
-        </p:spPr>
-        <p:txBody>
-          <a:bodyPr wrap="square" anchor="t">
-            <a:spAutoFit/>
-          </a:bodyPr>
-          <a:lstStyle/>
-          <a:p>
-            <a:pPr algn="l">
-              <a:lnSpc>
-                <a:spcPct val="100000"/>
-              </a:lnSpc>
-            </a:pPr>
-            <a:r>
-              <a:rPr sz="950" b="0">
-                <a:solidFill>
-                  <a:srgbClr val="5A6474"/>
-                </a:solidFill>
-                <a:latin typeface="Courier New"/>
-              </a:rPr>
-              <a:t>Verification lenses: Values at Play - VAP course, Engelmann &amp; Nissenbaum (Cornell Tech)</a:t>
             </a:r>
           </a:p>
         </p:txBody>
@@ -10937,30 +11096,149 @@
                 </a:solidFill>
                 <a:latin typeface="Courier New"/>
               </a:rPr>
-              <a:t>EXAMPLE - BEHAVIOR</a:t>
-            </a:r>
-          </a:p>
-        </p:txBody>
-      </p:sp>
-      <p:sp>
-        <p:nvSpPr>
-          <p:cNvPr id="3" name="Rectangle 2"/>
+              <a:t>FROM OUR RESEARCH</a:t>
+            </a:r>
+          </a:p>
+        </p:txBody>
+      </p:sp>
+      <p:sp>
+        <p:nvSpPr>
+          <p:cNvPr id="3" name="TextBox 2"/>
+          <p:cNvSpPr txBox="1"/>
+          <p:nvPr/>
+        </p:nvSpPr>
+        <p:spPr>
+          <a:xfrm>
+            <a:off x="914400" y="1554480"/>
+            <a:ext cx="1280160" cy="1280160"/>
+          </a:xfrm>
+          <a:prstGeom prst="rect">
+            <a:avLst/>
+          </a:prstGeom>
+          <a:noFill/>
+        </p:spPr>
+        <p:txBody>
+          <a:bodyPr wrap="square" anchor="t">
+            <a:spAutoFit/>
+          </a:bodyPr>
+          <a:lstStyle/>
+          <a:p>
+            <a:pPr algn="l">
+              <a:lnSpc>
+                <a:spcPct val="100000"/>
+              </a:lnSpc>
+            </a:pPr>
+            <a:r>
+              <a:rPr sz="9000" b="1">
+                <a:solidFill>
+                  <a:srgbClr val="00FF41"/>
+                </a:solidFill>
+                <a:latin typeface="Arial"/>
+              </a:rPr>
+              <a:t>“</a:t>
+            </a:r>
+          </a:p>
+        </p:txBody>
+      </p:sp>
+      <p:sp>
+        <p:nvSpPr>
+          <p:cNvPr id="4" name="TextBox 3"/>
+          <p:cNvSpPr txBox="1"/>
+          <p:nvPr/>
+        </p:nvSpPr>
+        <p:spPr>
+          <a:xfrm>
+            <a:off x="1188720" y="2194560"/>
+            <a:ext cx="9784080" cy="2011680"/>
+          </a:xfrm>
+          <a:prstGeom prst="rect">
+            <a:avLst/>
+          </a:prstGeom>
+          <a:noFill/>
+        </p:spPr>
+        <p:txBody>
+          <a:bodyPr wrap="square" anchor="t">
+            <a:spAutoFit/>
+          </a:bodyPr>
+          <a:lstStyle/>
+          <a:p>
+            <a:pPr algn="l">
+              <a:lnSpc>
+                <a:spcPct val="112000"/>
+              </a:lnSpc>
+            </a:pPr>
+            <a:r>
+              <a:rPr sz="3000" b="1">
+                <a:solidFill>
+                  <a:srgbClr val="F5F7FA"/>
+                </a:solidFill>
+                <a:latin typeface="Arial"/>
+              </a:rPr>
+              <a:t>Persuasion-focused evaluation nearly DOUBLED how often professional designers rejected dark-pattern designs - and shifted their reasoning from business justifications toward user autonomy and well-being.</a:t>
+            </a:r>
+          </a:p>
+        </p:txBody>
+      </p:sp>
+      <p:sp>
+        <p:nvSpPr>
+          <p:cNvPr id="5" name="TextBox 4"/>
+          <p:cNvSpPr txBox="1"/>
+          <p:nvPr/>
+        </p:nvSpPr>
+        <p:spPr>
+          <a:xfrm>
+            <a:off x="1234440" y="4297680"/>
+            <a:ext cx="9601200" cy="457200"/>
+          </a:xfrm>
+          <a:prstGeom prst="rect">
+            <a:avLst/>
+          </a:prstGeom>
+          <a:noFill/>
+        </p:spPr>
+        <p:txBody>
+          <a:bodyPr wrap="square" anchor="t">
+            <a:spAutoFit/>
+          </a:bodyPr>
+          <a:lstStyle/>
+          <a:p>
+            <a:pPr algn="l">
+              <a:lnSpc>
+                <a:spcPct val="100000"/>
+              </a:lnSpc>
+            </a:pPr>
+            <a:r>
+              <a:rPr sz="1600" b="0">
+                <a:solidFill>
+                  <a:srgbClr val="8A94A6"/>
+                </a:solidFill>
+                <a:latin typeface="Arial"/>
+              </a:rPr>
+              <a:t>— Sandhaus, Rhomberg &amp; Nissenbaum, CHIWORK 2026 - a study of 141 UX professionals</a:t>
+            </a:r>
+          </a:p>
+        </p:txBody>
+      </p:sp>
+      <p:sp>
+        <p:nvSpPr>
+          <p:cNvPr id="6" name="Rounded Rectangle 5"/>
           <p:cNvSpPr/>
           <p:nvPr/>
         </p:nvSpPr>
         <p:spPr>
           <a:xfrm>
-            <a:off x="640080" y="932688"/>
-            <a:ext cx="822960" cy="73152"/>
-          </a:xfrm>
-          <a:prstGeom prst="rect">
+            <a:off x="1188720" y="4937760"/>
+            <a:ext cx="9784080" cy="914400"/>
+          </a:xfrm>
+          <a:prstGeom prst="roundRect">
             <a:avLst/>
           </a:prstGeom>
           <a:solidFill>
-            <a:srgbClr val="00FF41"/>
+            <a:srgbClr val="151B26"/>
           </a:solidFill>
-          <a:ln>
-            <a:noFill/>
+          <a:ln w="12700">
+            <a:solidFill>
+              <a:srgbClr val="00FF41"/>
+            </a:solidFill>
           </a:ln>
           <a:effectLst/>
         </p:spPr>
@@ -10986,49 +11264,24 @@
           </a:p>
         </p:txBody>
       </p:sp>
-      <p:pic>
-        <p:nvPicPr>
-          <p:cNvPr id="4" name="Picture 3" descr="smart_meter.jpg"/>
-          <p:cNvPicPr>
-            <a:picLocks noChangeAspect="1"/>
-          </p:cNvPicPr>
-          <p:nvPr/>
-        </p:nvPicPr>
-        <p:blipFill>
-          <a:blip r:embed="rId2"/>
-          <a:srcRect l="25111" r="25111"/>
-          <a:stretch>
-            <a:fillRect/>
-          </a:stretch>
-        </p:blipFill>
-        <p:spPr>
-          <a:xfrm>
-            <a:off x="7071055" y="0"/>
-            <a:ext cx="5120640" cy="6858000"/>
-          </a:xfrm>
-          <a:prstGeom prst="rect">
-            <a:avLst/>
-          </a:prstGeom>
-        </p:spPr>
-      </p:pic>
-      <p:sp>
-        <p:nvSpPr>
-          <p:cNvPr id="5" name="TextBox 4"/>
-          <p:cNvSpPr txBox="1"/>
-          <p:nvPr/>
-        </p:nvSpPr>
-        <p:spPr>
-          <a:xfrm>
-            <a:off x="640080" y="1188720"/>
-            <a:ext cx="6019495" cy="1280160"/>
-          </a:xfrm>
-          <a:prstGeom prst="rect">
-            <a:avLst/>
-          </a:prstGeom>
-          <a:noFill/>
-        </p:spPr>
-        <p:txBody>
-          <a:bodyPr wrap="square" anchor="t">
+      <p:sp>
+        <p:nvSpPr>
+          <p:cNvPr id="7" name="TextBox 6"/>
+          <p:cNvSpPr txBox="1"/>
+          <p:nvPr/>
+        </p:nvSpPr>
+        <p:spPr>
+          <a:xfrm>
+            <a:off x="1463040" y="5074920"/>
+            <a:ext cx="9235440" cy="731520"/>
+          </a:xfrm>
+          <a:prstGeom prst="rect">
+            <a:avLst/>
+          </a:prstGeom>
+          <a:noFill/>
+        </p:spPr>
+        <p:txBody>
+          <a:bodyPr wrap="square" anchor="ctr">
             <a:spAutoFit/>
           </a:bodyPr>
           <a:lstStyle/>
@@ -11039,174 +11292,20 @@
               </a:lnSpc>
             </a:pPr>
             <a:r>
-              <a:rPr sz="3000" b="1">
+              <a:rPr sz="1800" b="0">
                 <a:solidFill>
                   <a:srgbClr val="F5F7FA"/>
                 </a:solidFill>
                 <a:latin typeface="Arial"/>
               </a:rPr>
-              <a:t>Does the design change what people DO?</a:t>
-            </a:r>
-          </a:p>
-        </p:txBody>
-      </p:sp>
-      <p:sp>
-        <p:nvSpPr>
-          <p:cNvPr id="6" name="TextBox 5"/>
-          <p:cNvSpPr txBox="1"/>
-          <p:nvPr/>
-        </p:nvSpPr>
-        <p:spPr>
-          <a:xfrm>
-            <a:off x="640080" y="2560320"/>
-            <a:ext cx="6019495" cy="3108960"/>
-          </a:xfrm>
-          <a:prstGeom prst="rect">
-            <a:avLst/>
-          </a:prstGeom>
-          <a:noFill/>
-        </p:spPr>
-        <p:txBody>
-          <a:bodyPr wrap="square" anchor="t">
-            <a:spAutoFit/>
-          </a:bodyPr>
-          <a:lstStyle/>
-          <a:p>
-            <a:pPr algn="l">
-              <a:lnSpc>
-                <a:spcPct val="116000"/>
-              </a:lnSpc>
-            </a:pPr>
-            <a:r>
-              <a:rPr sz="1800" b="0">
-                <a:solidFill>
-                  <a:srgbClr val="F5F7FA"/>
-                </a:solidFill>
-                <a:latin typeface="Arial"/>
-              </a:rPr>
-              <a:t>A smart meter only "works" for sustainability if people actually use less. Behavior is the sharpest test.</a:t>
-            </a:r>
-          </a:p>
-          <a:p>
-            <a:pPr algn="l">
-              <a:lnSpc>
-                <a:spcPct val="116000"/>
-              </a:lnSpc>
-            </a:pPr>
-            <a:r>
-              <a:rPr sz="1900" b="0">
-                <a:solidFill>
-                  <a:srgbClr val="F5F7FA"/>
-                </a:solidFill>
-                <a:latin typeface="Arial"/>
-              </a:rPr>
-              <a:t/>
-            </a:r>
-          </a:p>
-          <a:p>
-            <a:pPr algn="l">
-              <a:lnSpc>
-                <a:spcPct val="116000"/>
-              </a:lnSpc>
-            </a:pPr>
-            <a:r>
-              <a:rPr sz="1600" b="0">
-                <a:solidFill>
-                  <a:srgbClr val="8A94A6"/>
-                </a:solidFill>
-                <a:latin typeface="Arial"/>
-              </a:rPr>
-              <a:t>Verify how: prototype - A/B - before/after - task completion.</a:t>
-            </a:r>
-          </a:p>
-        </p:txBody>
-      </p:sp>
-      <p:sp>
-        <p:nvSpPr>
-          <p:cNvPr id="7" name="Rectangle 6"/>
-          <p:cNvSpPr/>
-          <p:nvPr/>
-        </p:nvSpPr>
-        <p:spPr>
-          <a:xfrm>
-            <a:off x="7071055" y="6547104"/>
-            <a:ext cx="5120640" cy="310896"/>
-          </a:xfrm>
-          <a:prstGeom prst="rect">
-            <a:avLst/>
-          </a:prstGeom>
-          <a:solidFill>
-            <a:srgbClr val="0B0E14"/>
-          </a:solidFill>
-          <a:ln>
-            <a:noFill/>
-          </a:ln>
-          <a:effectLst/>
-        </p:spPr>
-        <p:style>
-          <a:lnRef idx="1">
-            <a:schemeClr val="accent1"/>
-          </a:lnRef>
-          <a:fillRef idx="3">
-            <a:schemeClr val="accent1"/>
-          </a:fillRef>
-          <a:effectRef idx="2">
-            <a:schemeClr val="accent1"/>
-          </a:effectRef>
-          <a:fontRef idx="minor">
-            <a:schemeClr val="lt1"/>
-          </a:fontRef>
-        </p:style>
-        <p:txBody>
-          <a:bodyPr rtlCol="0" anchor="ctr"/>
-          <a:lstStyle/>
-          <a:p>
-            <a:pPr algn="ctr"/>
+              <a:t>Measuring a value doesn't just describe it - it changes what gets built. That is why verification is not optional.</a:t>
+            </a:r>
           </a:p>
         </p:txBody>
       </p:sp>
       <p:sp>
         <p:nvSpPr>
           <p:cNvPr id="8" name="TextBox 7"/>
-          <p:cNvSpPr txBox="1"/>
-          <p:nvPr/>
-        </p:nvSpPr>
-        <p:spPr>
-          <a:xfrm>
-            <a:off x="7208215" y="6565392"/>
-            <a:ext cx="4846320" cy="274320"/>
-          </a:xfrm>
-          <a:prstGeom prst="rect">
-            <a:avLst/>
-          </a:prstGeom>
-          <a:noFill/>
-        </p:spPr>
-        <p:txBody>
-          <a:bodyPr wrap="square" anchor="t">
-            <a:spAutoFit/>
-          </a:bodyPr>
-          <a:lstStyle/>
-          <a:p>
-            <a:pPr algn="l">
-              <a:lnSpc>
-                <a:spcPct val="100000"/>
-              </a:lnSpc>
-            </a:pPr>
-            <a:r>
-              <a:rPr sz="850" b="0">
-                <a:solidFill>
-                  <a:srgbClr val="8A94A6"/>
-                </a:solidFill>
-                <a:latin typeface="Courier New"/>
-              </a:rPr>
-              <a:t>Behavior verification (Values at Play) - smart-meter image, educational use</a:t>
-            </a:r>
-          </a:p>
-        </p:txBody>
-      </p:sp>
-      <p:sp>
-        <p:nvSpPr>
-          <p:cNvPr id="9" name="TextBox 8"/>
           <p:cNvSpPr txBox="1"/>
           <p:nvPr/>
         </p:nvSpPr>
@@ -11271,53 +11370,14 @@
       <p:grpSpPr/>
       <p:sp>
         <p:nvSpPr>
-          <p:cNvPr id="2" name="TextBox 1"/>
-          <p:cNvSpPr txBox="1"/>
-          <p:nvPr/>
-        </p:nvSpPr>
-        <p:spPr>
-          <a:xfrm>
-            <a:off x="640080" y="502920"/>
-            <a:ext cx="10058400" cy="365760"/>
-          </a:xfrm>
-          <a:prstGeom prst="rect">
-            <a:avLst/>
-          </a:prstGeom>
-          <a:noFill/>
-        </p:spPr>
-        <p:txBody>
-          <a:bodyPr wrap="square" anchor="t">
-            <a:spAutoFit/>
-          </a:bodyPr>
-          <a:lstStyle/>
-          <a:p>
-            <a:pPr algn="l">
-              <a:lnSpc>
-                <a:spcPct val="100000"/>
-              </a:lnSpc>
-            </a:pPr>
-            <a:r>
-              <a:rPr sz="1300" b="1">
-                <a:solidFill>
-                  <a:srgbClr val="00FF41"/>
-                </a:solidFill>
-                <a:latin typeface="Courier New"/>
-              </a:rPr>
-              <a:t>PICK THE INSTRUMENT THAT FITS YOUR VALUE</a:t>
-            </a:r>
-          </a:p>
-        </p:txBody>
-      </p:sp>
-      <p:sp>
-        <p:nvSpPr>
-          <p:cNvPr id="3" name="Rectangle 2"/>
+          <p:cNvPr id="2" name="Rectangle 1"/>
           <p:cNvSpPr/>
           <p:nvPr/>
         </p:nvSpPr>
         <p:spPr>
           <a:xfrm>
-            <a:off x="640080" y="932688"/>
-            <a:ext cx="822960" cy="73152"/>
+            <a:off x="0" y="0"/>
+            <a:ext cx="256032" cy="6858000"/>
           </a:xfrm>
           <a:prstGeom prst="rect">
             <a:avLst/>
@@ -11354,14 +11414,53 @@
       </p:sp>
       <p:sp>
         <p:nvSpPr>
+          <p:cNvPr id="3" name="TextBox 2"/>
+          <p:cNvSpPr txBox="1"/>
+          <p:nvPr/>
+        </p:nvSpPr>
+        <p:spPr>
+          <a:xfrm>
+            <a:off x="822960" y="2194560"/>
+            <a:ext cx="10515600" cy="548640"/>
+          </a:xfrm>
+          <a:prstGeom prst="rect">
+            <a:avLst/>
+          </a:prstGeom>
+          <a:noFill/>
+        </p:spPr>
+        <p:txBody>
+          <a:bodyPr wrap="square" anchor="t">
+            <a:spAutoFit/>
+          </a:bodyPr>
+          <a:lstStyle/>
+          <a:p>
+            <a:pPr algn="l">
+              <a:lnSpc>
+                <a:spcPct val="100000"/>
+              </a:lnSpc>
+            </a:pPr>
+            <a:r>
+              <a:rPr sz="1800" b="1">
+                <a:solidFill>
+                  <a:srgbClr val="00FF41"/>
+                </a:solidFill>
+                <a:latin typeface="Courier New"/>
+              </a:rPr>
+              <a:t>PART 5 - IN PRACTICE</a:t>
+            </a:r>
+          </a:p>
+        </p:txBody>
+      </p:sp>
+      <p:sp>
+        <p:nvSpPr>
           <p:cNvPr id="4" name="TextBox 3"/>
           <p:cNvSpPr txBox="1"/>
           <p:nvPr/>
         </p:nvSpPr>
         <p:spPr>
           <a:xfrm>
-            <a:off x="640080" y="1188720"/>
-            <a:ext cx="10972800" cy="1097280"/>
+            <a:off x="804672" y="2743200"/>
+            <a:ext cx="10515600" cy="1554480"/>
           </a:xfrm>
           <a:prstGeom prst="rect">
             <a:avLst/>
@@ -11380,175 +11479,13 @@
               </a:lnSpc>
             </a:pPr>
             <a:r>
-              <a:rPr sz="3400" b="1">
+              <a:rPr sz="4800" b="1">
                 <a:solidFill>
                   <a:srgbClr val="F5F7FA"/>
                 </a:solidFill>
                 <a:latin typeface="Arial"/>
               </a:rPr>
-              <a:t>Examples - tie the tool to the value you are analyzing</a:t>
-            </a:r>
-          </a:p>
-        </p:txBody>
-      </p:sp>
-      <p:sp>
-        <p:nvSpPr>
-          <p:cNvPr id="5" name="TextBox 4"/>
-          <p:cNvSpPr txBox="1"/>
-          <p:nvPr/>
-        </p:nvSpPr>
-        <p:spPr>
-          <a:xfrm>
-            <a:off x="658368" y="2286000"/>
-            <a:ext cx="10881360" cy="3657600"/>
-          </a:xfrm>
-          <a:prstGeom prst="rect">
-            <a:avLst/>
-          </a:prstGeom>
-          <a:noFill/>
-        </p:spPr>
-        <p:txBody>
-          <a:bodyPr wrap="square" anchor="t">
-            <a:spAutoFit/>
-          </a:bodyPr>
-          <a:lstStyle/>
-          <a:p>
-            <a:pPr algn="l">
-              <a:lnSpc>
-                <a:spcPct val="112000"/>
-              </a:lnSpc>
-            </a:pPr>
-            <a:r>
-              <a:rPr sz="2000" b="1">
-                <a:solidFill>
-                  <a:srgbClr val="00FF41"/>
-                </a:solidFill>
-                <a:latin typeface="Arial"/>
-              </a:rPr>
-              <a:t>•  </a:t>
-            </a:r>
-            <a:r>
-              <a:rPr sz="2000" b="0">
-                <a:solidFill>
-                  <a:srgbClr val="F5F7FA"/>
-                </a:solidFill>
-                <a:latin typeface="Arial"/>
-              </a:rPr>
-              <a:t>Beauty / craft / originality -&gt; the Vibed Slop Detector (is it generic AI slop?), or UEQ attractiveness.</a:t>
-            </a:r>
-          </a:p>
-          <a:p>
-            <a:pPr algn="l">
-              <a:lnSpc>
-                <a:spcPct val="112000"/>
-              </a:lnSpc>
-            </a:pPr>
-            <a:r>
-              <a:rPr sz="2000" b="1">
-                <a:solidFill>
-                  <a:srgbClr val="00FF41"/>
-                </a:solidFill>
-                <a:latin typeface="Arial"/>
-              </a:rPr>
-              <a:t>•  </a:t>
-            </a:r>
-            <a:r>
-              <a:rPr sz="2000" b="0">
-                <a:solidFill>
-                  <a:srgbClr val="F5F7FA"/>
-                </a:solidFill>
-                <a:latin typeface="Arial"/>
-              </a:rPr>
-              <a:t>Autonomy / competence / wellbeing -&gt; METUX + Self-Determination scales.</a:t>
-            </a:r>
-          </a:p>
-          <a:p>
-            <a:pPr algn="l">
-              <a:lnSpc>
-                <a:spcPct val="112000"/>
-              </a:lnSpc>
-            </a:pPr>
-            <a:r>
-              <a:rPr sz="2000" b="1">
-                <a:solidFill>
-                  <a:srgbClr val="00FF41"/>
-                </a:solidFill>
-                <a:latin typeface="Arial"/>
-              </a:rPr>
-              <a:t>•  </a:t>
-            </a:r>
-            <a:r>
-              <a:rPr sz="2000" b="0">
-                <a:solidFill>
-                  <a:srgbClr val="F5F7FA"/>
-                </a:solidFill>
-                <a:latin typeface="Arial"/>
-              </a:rPr>
-              <a:t>Trust / warmth / safety -&gt; a validated scale from the HRI Scale Database.</a:t>
-            </a:r>
-          </a:p>
-          <a:p>
-            <a:pPr algn="l">
-              <a:lnSpc>
-                <a:spcPct val="112000"/>
-              </a:lnSpc>
-            </a:pPr>
-            <a:r>
-              <a:rPr sz="2000" b="1">
-                <a:solidFill>
-                  <a:srgbClr val="00FF41"/>
-                </a:solidFill>
-                <a:latin typeface="Arial"/>
-              </a:rPr>
-              <a:t>•  </a:t>
-            </a:r>
-            <a:r>
-              <a:rPr sz="2000" b="0">
-                <a:solidFill>
-                  <a:srgbClr val="F5F7FA"/>
-                </a:solidFill>
-                <a:latin typeface="Arial"/>
-              </a:rPr>
-              <a:t>Overall UX beyond usability -&gt; UEQ. The instrument has to match the value - don't default to UEQ.</a:t>
-            </a:r>
-          </a:p>
-        </p:txBody>
-      </p:sp>
-      <p:sp>
-        <p:nvSpPr>
-          <p:cNvPr id="6" name="TextBox 5"/>
-          <p:cNvSpPr txBox="1"/>
-          <p:nvPr/>
-        </p:nvSpPr>
-        <p:spPr>
-          <a:xfrm>
-            <a:off x="640080" y="6355080"/>
-            <a:ext cx="10972800" cy="365760"/>
-          </a:xfrm>
-          <a:prstGeom prst="rect">
-            <a:avLst/>
-          </a:prstGeom>
-          <a:noFill/>
-        </p:spPr>
-        <p:txBody>
-          <a:bodyPr wrap="square" anchor="t">
-            <a:spAutoFit/>
-          </a:bodyPr>
-          <a:lstStyle/>
-          <a:p>
-            <a:pPr algn="l">
-              <a:lnSpc>
-                <a:spcPct val="100000"/>
-              </a:lnSpc>
-            </a:pPr>
-            <a:r>
-              <a:rPr sz="1000" b="0">
-                <a:solidFill>
-                  <a:srgbClr val="5A6474"/>
-                </a:solidFill>
-                <a:latin typeface="Courier New"/>
-              </a:rPr>
-              <a:t>Good Code, Good Vibes · TECHIE 1121 · Cornell Tech · Summer 2026</a:t>
+              <a:t>The VAP canvas + real projects</a:t>
             </a:r>
           </a:p>
         </p:txBody>
@@ -11871,149 +11808,30 @@
                 </a:solidFill>
                 <a:latin typeface="Courier New"/>
               </a:rPr>
-              <a:t>FROM OUR RESEARCH</a:t>
-            </a:r>
-          </a:p>
-        </p:txBody>
-      </p:sp>
-      <p:sp>
-        <p:nvSpPr>
-          <p:cNvPr id="3" name="TextBox 2"/>
-          <p:cNvSpPr txBox="1"/>
-          <p:nvPr/>
-        </p:nvSpPr>
-        <p:spPr>
-          <a:xfrm>
-            <a:off x="914400" y="1554480"/>
-            <a:ext cx="1280160" cy="1280160"/>
-          </a:xfrm>
-          <a:prstGeom prst="rect">
-            <a:avLst/>
-          </a:prstGeom>
-          <a:noFill/>
-        </p:spPr>
-        <p:txBody>
-          <a:bodyPr wrap="square" anchor="t">
-            <a:spAutoFit/>
-          </a:bodyPr>
-          <a:lstStyle/>
-          <a:p>
-            <a:pPr algn="l">
-              <a:lnSpc>
-                <a:spcPct val="100000"/>
-              </a:lnSpc>
-            </a:pPr>
-            <a:r>
-              <a:rPr sz="9000" b="1">
-                <a:solidFill>
-                  <a:srgbClr val="00FF41"/>
-                </a:solidFill>
-                <a:latin typeface="Arial"/>
-              </a:rPr>
-              <a:t>“</a:t>
-            </a:r>
-          </a:p>
-        </p:txBody>
-      </p:sp>
-      <p:sp>
-        <p:nvSpPr>
-          <p:cNvPr id="4" name="TextBox 3"/>
-          <p:cNvSpPr txBox="1"/>
-          <p:nvPr/>
-        </p:nvSpPr>
-        <p:spPr>
-          <a:xfrm>
-            <a:off x="1188720" y="2194560"/>
-            <a:ext cx="9784080" cy="2011680"/>
-          </a:xfrm>
-          <a:prstGeom prst="rect">
-            <a:avLst/>
-          </a:prstGeom>
-          <a:noFill/>
-        </p:spPr>
-        <p:txBody>
-          <a:bodyPr wrap="square" anchor="t">
-            <a:spAutoFit/>
-          </a:bodyPr>
-          <a:lstStyle/>
-          <a:p>
-            <a:pPr algn="l">
-              <a:lnSpc>
-                <a:spcPct val="112000"/>
-              </a:lnSpc>
-            </a:pPr>
-            <a:r>
-              <a:rPr sz="3000" b="1">
-                <a:solidFill>
-                  <a:srgbClr val="F5F7FA"/>
-                </a:solidFill>
-                <a:latin typeface="Arial"/>
-              </a:rPr>
-              <a:t>Persuasion-focused evaluation nearly DOUBLED how often professional designers rejected dark-pattern designs - and shifted their reasoning from business justifications toward user autonomy and well-being.</a:t>
-            </a:r>
-          </a:p>
-        </p:txBody>
-      </p:sp>
-      <p:sp>
-        <p:nvSpPr>
-          <p:cNvPr id="5" name="TextBox 4"/>
-          <p:cNvSpPr txBox="1"/>
-          <p:nvPr/>
-        </p:nvSpPr>
-        <p:spPr>
-          <a:xfrm>
-            <a:off x="1234440" y="4297680"/>
-            <a:ext cx="9601200" cy="457200"/>
-          </a:xfrm>
-          <a:prstGeom prst="rect">
-            <a:avLst/>
-          </a:prstGeom>
-          <a:noFill/>
-        </p:spPr>
-        <p:txBody>
-          <a:bodyPr wrap="square" anchor="t">
-            <a:spAutoFit/>
-          </a:bodyPr>
-          <a:lstStyle/>
-          <a:p>
-            <a:pPr algn="l">
-              <a:lnSpc>
-                <a:spcPct val="100000"/>
-              </a:lnSpc>
-            </a:pPr>
-            <a:r>
-              <a:rPr sz="1600" b="0">
-                <a:solidFill>
-                  <a:srgbClr val="8A94A6"/>
-                </a:solidFill>
-                <a:latin typeface="Arial"/>
-              </a:rPr>
-              <a:t>— Sandhaus, Rhomberg &amp; Nissenbaum, CHIWORK 2026 - a study of 141 UX professionals</a:t>
-            </a:r>
-          </a:p>
-        </p:txBody>
-      </p:sp>
-      <p:sp>
-        <p:nvSpPr>
-          <p:cNvPr id="6" name="Rounded Rectangle 5"/>
+              <a:t>THE FIGJAM CANVAS</a:t>
+            </a:r>
+          </a:p>
+        </p:txBody>
+      </p:sp>
+      <p:sp>
+        <p:nvSpPr>
+          <p:cNvPr id="3" name="Rectangle 2"/>
           <p:cNvSpPr/>
           <p:nvPr/>
         </p:nvSpPr>
         <p:spPr>
           <a:xfrm>
-            <a:off x="1188720" y="4937760"/>
-            <a:ext cx="9784080" cy="914400"/>
-          </a:xfrm>
-          <a:prstGeom prst="roundRect">
+            <a:off x="640080" y="932688"/>
+            <a:ext cx="822960" cy="73152"/>
+          </a:xfrm>
+          <a:prstGeom prst="rect">
             <a:avLst/>
           </a:prstGeom>
           <a:solidFill>
-            <a:srgbClr val="151B26"/>
+            <a:srgbClr val="00FF41"/>
           </a:solidFill>
-          <a:ln w="12700">
-            <a:solidFill>
-              <a:srgbClr val="00FF41"/>
-            </a:solidFill>
+          <a:ln>
+            <a:noFill/>
           </a:ln>
           <a:effectLst/>
         </p:spPr>
@@ -12041,39 +11859,164 @@
       </p:sp>
       <p:sp>
         <p:nvSpPr>
+          <p:cNvPr id="4" name="TextBox 3"/>
+          <p:cNvSpPr txBox="1"/>
+          <p:nvPr/>
+        </p:nvSpPr>
+        <p:spPr>
+          <a:xfrm>
+            <a:off x="640080" y="1188720"/>
+            <a:ext cx="10972800" cy="914400"/>
+          </a:xfrm>
+          <a:prstGeom prst="rect">
+            <a:avLst/>
+          </a:prstGeom>
+          <a:noFill/>
+        </p:spPr>
+        <p:txBody>
+          <a:bodyPr wrap="square" anchor="t">
+            <a:spAutoFit/>
+          </a:bodyPr>
+          <a:lstStyle/>
+          <a:p>
+            <a:pPr algn="l">
+              <a:lnSpc>
+                <a:spcPct val="100000"/>
+              </a:lnSpc>
+            </a:pPr>
+            <a:r>
+              <a:rPr sz="3000" b="1">
+                <a:solidFill>
+                  <a:srgbClr val="F5F7FA"/>
+                </a:solidFill>
+                <a:latin typeface="Arial"/>
+              </a:rPr>
+              <a:t>One board, the whole loop</a:t>
+            </a:r>
+          </a:p>
+        </p:txBody>
+      </p:sp>
+      <p:sp>
+        <p:nvSpPr>
+          <p:cNvPr id="5" name="Rounded Rectangle 4"/>
+          <p:cNvSpPr/>
+          <p:nvPr/>
+        </p:nvSpPr>
+        <p:spPr>
+          <a:xfrm>
+            <a:off x="2194560" y="2331720"/>
+            <a:ext cx="7772400" cy="3566160"/>
+          </a:xfrm>
+          <a:prstGeom prst="roundRect">
+            <a:avLst/>
+          </a:prstGeom>
+          <a:solidFill>
+            <a:srgbClr val="151B26"/>
+          </a:solidFill>
+          <a:ln w="19050">
+            <a:solidFill>
+              <a:srgbClr val="00FF41"/>
+            </a:solidFill>
+            <a:prstDash val="dash"/>
+          </a:ln>
+          <a:effectLst/>
+        </p:spPr>
+        <p:style>
+          <a:lnRef idx="1">
+            <a:schemeClr val="accent1"/>
+          </a:lnRef>
+          <a:fillRef idx="3">
+            <a:schemeClr val="accent1"/>
+          </a:fillRef>
+          <a:effectRef idx="2">
+            <a:schemeClr val="accent1"/>
+          </a:effectRef>
+          <a:fontRef idx="minor">
+            <a:schemeClr val="lt1"/>
+          </a:fontRef>
+        </p:style>
+        <p:txBody>
+          <a:bodyPr rtlCol="0" anchor="ctr"/>
+          <a:lstStyle/>
+          <a:p>
+            <a:pPr algn="ctr"/>
+          </a:p>
+        </p:txBody>
+      </p:sp>
+      <p:sp>
+        <p:nvSpPr>
+          <p:cNvPr id="6" name="TextBox 5"/>
+          <p:cNvSpPr txBox="1"/>
+          <p:nvPr/>
+        </p:nvSpPr>
+        <p:spPr>
+          <a:xfrm>
+            <a:off x="2194560" y="3383280"/>
+            <a:ext cx="7772400" cy="731520"/>
+          </a:xfrm>
+          <a:prstGeom prst="rect">
+            <a:avLst/>
+          </a:prstGeom>
+          <a:noFill/>
+        </p:spPr>
+        <p:txBody>
+          <a:bodyPr wrap="square" anchor="t">
+            <a:spAutoFit/>
+          </a:bodyPr>
+          <a:lstStyle/>
+          <a:p>
+            <a:pPr algn="ctr">
+              <a:lnSpc>
+                <a:spcPct val="100000"/>
+              </a:lnSpc>
+            </a:pPr>
+            <a:r>
+              <a:rPr sz="2200" b="1">
+                <a:solidFill>
+                  <a:srgbClr val="00FF41"/>
+                </a:solidFill>
+                <a:latin typeface="Courier New"/>
+              </a:rPr>
+              <a:t>[ walk the 'Vibing Values' canvas live ]</a:t>
+            </a:r>
+          </a:p>
+        </p:txBody>
+      </p:sp>
+      <p:sp>
+        <p:nvSpPr>
           <p:cNvPr id="7" name="TextBox 6"/>
           <p:cNvSpPr txBox="1"/>
           <p:nvPr/>
         </p:nvSpPr>
         <p:spPr>
           <a:xfrm>
-            <a:off x="1463040" y="5074920"/>
-            <a:ext cx="9235440" cy="731520"/>
-          </a:xfrm>
-          <a:prstGeom prst="rect">
-            <a:avLst/>
-          </a:prstGeom>
-          <a:noFill/>
-        </p:spPr>
-        <p:txBody>
-          <a:bodyPr wrap="square" anchor="ctr">
-            <a:spAutoFit/>
-          </a:bodyPr>
-          <a:lstStyle/>
-          <a:p>
-            <a:pPr algn="l">
+            <a:off x="2194560" y="4114800"/>
+            <a:ext cx="7772400" cy="731520"/>
+          </a:xfrm>
+          <a:prstGeom prst="rect">
+            <a:avLst/>
+          </a:prstGeom>
+          <a:noFill/>
+        </p:spPr>
+        <p:txBody>
+          <a:bodyPr wrap="square" anchor="t">
+            <a:spAutoFit/>
+          </a:bodyPr>
+          <a:lstStyle/>
+          <a:p>
+            <a:pPr algn="ctr">
               <a:lnSpc>
                 <a:spcPct val="100000"/>
               </a:lnSpc>
             </a:pPr>
             <a:r>
-              <a:rPr sz="1800" b="0">
-                <a:solidFill>
-                  <a:srgbClr val="F5F7FA"/>
+              <a:rPr sz="1400" b="0">
+                <a:solidFill>
+                  <a:srgbClr val="8A94A6"/>
                 </a:solidFill>
                 <a:latin typeface="Arial"/>
               </a:rPr>
-              <a:t>Measuring a value doesn't just describe it - it changes what gets built. That is why verification is not optional.</a:t>
+              <a:t>figma.com/board/.../Vibing-Values - each tab is one move (Discovery / Implementation / Verification). We walk them as connected case studies.</a:t>
             </a:r>
           </a:p>
         </p:txBody>
@@ -12145,14 +12088,53 @@
       <p:grpSpPr/>
       <p:sp>
         <p:nvSpPr>
-          <p:cNvPr id="2" name="Rectangle 1"/>
+          <p:cNvPr id="2" name="TextBox 1"/>
+          <p:cNvSpPr txBox="1"/>
+          <p:nvPr/>
+        </p:nvSpPr>
+        <p:spPr>
+          <a:xfrm>
+            <a:off x="640080" y="502920"/>
+            <a:ext cx="10058400" cy="365760"/>
+          </a:xfrm>
+          <a:prstGeom prst="rect">
+            <a:avLst/>
+          </a:prstGeom>
+          <a:noFill/>
+        </p:spPr>
+        <p:txBody>
+          <a:bodyPr wrap="square" anchor="t">
+            <a:spAutoFit/>
+          </a:bodyPr>
+          <a:lstStyle/>
+          <a:p>
+            <a:pPr algn="l">
+              <a:lnSpc>
+                <a:spcPct val="100000"/>
+              </a:lnSpc>
+            </a:pPr>
+            <a:r>
+              <a:rPr sz="1300" b="1">
+                <a:solidFill>
+                  <a:srgbClr val="00FF41"/>
+                </a:solidFill>
+                <a:latin typeface="Courier New"/>
+              </a:rPr>
+              <a:t>PITECH PROJECTS</a:t>
+            </a:r>
+          </a:p>
+        </p:txBody>
+      </p:sp>
+      <p:sp>
+        <p:nvSpPr>
+          <p:cNvPr id="3" name="Rectangle 2"/>
           <p:cNvSpPr/>
           <p:nvPr/>
         </p:nvSpPr>
         <p:spPr>
           <a:xfrm>
-            <a:off x="0" y="0"/>
-            <a:ext cx="256032" cy="6858000"/>
+            <a:off x="640080" y="932688"/>
+            <a:ext cx="822960" cy="73152"/>
           </a:xfrm>
           <a:prstGeom prst="rect">
             <a:avLst/>
@@ -12189,14 +12171,14 @@
       </p:sp>
       <p:sp>
         <p:nvSpPr>
-          <p:cNvPr id="3" name="TextBox 2"/>
-          <p:cNvSpPr txBox="1"/>
-          <p:nvPr/>
-        </p:nvSpPr>
-        <p:spPr>
-          <a:xfrm>
-            <a:off x="822960" y="2194560"/>
-            <a:ext cx="10515600" cy="548640"/>
+          <p:cNvPr id="4" name="TextBox 3"/>
+          <p:cNvSpPr txBox="1"/>
+          <p:nvPr/>
+        </p:nvSpPr>
+        <p:spPr>
+          <a:xfrm>
+            <a:off x="640080" y="1188720"/>
+            <a:ext cx="10972800" cy="914400"/>
           </a:xfrm>
           <a:prstGeom prst="rect">
             <a:avLst/>
@@ -12215,52 +12197,177 @@
               </a:lnSpc>
             </a:pPr>
             <a:r>
-              <a:rPr sz="1800" b="1">
+              <a:rPr sz="3000" b="1">
+                <a:solidFill>
+                  <a:srgbClr val="F5F7FA"/>
+                </a:solidFill>
+                <a:latin typeface="Arial"/>
+              </a:rPr>
+              <a:t>Fellows who ran the whole framework</a:t>
+            </a:r>
+          </a:p>
+        </p:txBody>
+      </p:sp>
+      <p:sp>
+        <p:nvSpPr>
+          <p:cNvPr id="5" name="Rounded Rectangle 4"/>
+          <p:cNvSpPr/>
+          <p:nvPr/>
+        </p:nvSpPr>
+        <p:spPr>
+          <a:xfrm>
+            <a:off x="2194560" y="2331720"/>
+            <a:ext cx="7772400" cy="3566160"/>
+          </a:xfrm>
+          <a:prstGeom prst="roundRect">
+            <a:avLst/>
+          </a:prstGeom>
+          <a:solidFill>
+            <a:srgbClr val="151B26"/>
+          </a:solidFill>
+          <a:ln w="19050">
+            <a:solidFill>
+              <a:srgbClr val="00FF41"/>
+            </a:solidFill>
+            <a:prstDash val="dash"/>
+          </a:ln>
+          <a:effectLst/>
+        </p:spPr>
+        <p:style>
+          <a:lnRef idx="1">
+            <a:schemeClr val="accent1"/>
+          </a:lnRef>
+          <a:fillRef idx="3">
+            <a:schemeClr val="accent1"/>
+          </a:fillRef>
+          <a:effectRef idx="2">
+            <a:schemeClr val="accent1"/>
+          </a:effectRef>
+          <a:fontRef idx="minor">
+            <a:schemeClr val="lt1"/>
+          </a:fontRef>
+        </p:style>
+        <p:txBody>
+          <a:bodyPr rtlCol="0" anchor="ctr"/>
+          <a:lstStyle/>
+          <a:p>
+            <a:pPr algn="ctr"/>
+          </a:p>
+        </p:txBody>
+      </p:sp>
+      <p:sp>
+        <p:nvSpPr>
+          <p:cNvPr id="6" name="TextBox 5"/>
+          <p:cNvSpPr txBox="1"/>
+          <p:nvPr/>
+        </p:nvSpPr>
+        <p:spPr>
+          <a:xfrm>
+            <a:off x="2194560" y="3383280"/>
+            <a:ext cx="7772400" cy="731520"/>
+          </a:xfrm>
+          <a:prstGeom prst="rect">
+            <a:avLst/>
+          </a:prstGeom>
+          <a:noFill/>
+        </p:spPr>
+        <p:txBody>
+          <a:bodyPr wrap="square" anchor="t">
+            <a:spAutoFit/>
+          </a:bodyPr>
+          <a:lstStyle/>
+          <a:p>
+            <a:pPr algn="ctr">
+              <a:lnSpc>
+                <a:spcPct val="100000"/>
+              </a:lnSpc>
+            </a:pPr>
+            <a:r>
+              <a:rPr sz="2200" b="1">
                 <a:solidFill>
                   <a:srgbClr val="00FF41"/>
                 </a:solidFill>
                 <a:latin typeface="Courier New"/>
               </a:rPr>
-              <a:t>PART 5 - IN PRACTICE</a:t>
-            </a:r>
-          </a:p>
-        </p:txBody>
-      </p:sp>
-      <p:sp>
-        <p:nvSpPr>
-          <p:cNvPr id="4" name="TextBox 3"/>
-          <p:cNvSpPr txBox="1"/>
-          <p:nvPr/>
-        </p:nvSpPr>
-        <p:spPr>
-          <a:xfrm>
-            <a:off x="804672" y="2743200"/>
-            <a:ext cx="10515600" cy="1554480"/>
-          </a:xfrm>
-          <a:prstGeom prst="rect">
-            <a:avLst/>
-          </a:prstGeom>
-          <a:noFill/>
-        </p:spPr>
-        <p:txBody>
-          <a:bodyPr wrap="square" anchor="t">
-            <a:spAutoFit/>
-          </a:bodyPr>
-          <a:lstStyle/>
-          <a:p>
-            <a:pPr algn="l">
+              <a:t>[ show the PiTech projects + website - add screenshots ]</a:t>
+            </a:r>
+          </a:p>
+        </p:txBody>
+      </p:sp>
+      <p:sp>
+        <p:nvSpPr>
+          <p:cNvPr id="7" name="TextBox 6"/>
+          <p:cNvSpPr txBox="1"/>
+          <p:nvPr/>
+        </p:nvSpPr>
+        <p:spPr>
+          <a:xfrm>
+            <a:off x="2194560" y="4114800"/>
+            <a:ext cx="7772400" cy="731520"/>
+          </a:xfrm>
+          <a:prstGeom prst="rect">
+            <a:avLst/>
+          </a:prstGeom>
+          <a:noFill/>
+        </p:spPr>
+        <p:txBody>
+          <a:bodyPr wrap="square" anchor="t">
+            <a:spAutoFit/>
+          </a:bodyPr>
+          <a:lstStyle/>
+          <a:p>
+            <a:pPr algn="ctr">
               <a:lnSpc>
                 <a:spcPct val="100000"/>
               </a:lnSpc>
             </a:pPr>
             <a:r>
-              <a:rPr sz="4800" b="1">
-                <a:solidFill>
-                  <a:srgbClr val="F5F7FA"/>
+              <a:rPr sz="1400" b="0">
+                <a:solidFill>
+                  <a:srgbClr val="8A94A6"/>
                 </a:solidFill>
                 <a:latin typeface="Arial"/>
               </a:rPr>
-              <a:t>The VAP canvas + real projects</a:t>
+              <a:t>Real value-driven projects, and what worked - and what was hard - when teams used VAP end to end.</a:t>
+            </a:r>
+          </a:p>
+        </p:txBody>
+      </p:sp>
+      <p:sp>
+        <p:nvSpPr>
+          <p:cNvPr id="8" name="TextBox 7"/>
+          <p:cNvSpPr txBox="1"/>
+          <p:nvPr/>
+        </p:nvSpPr>
+        <p:spPr>
+          <a:xfrm>
+            <a:off x="640080" y="6355080"/>
+            <a:ext cx="10972800" cy="365760"/>
+          </a:xfrm>
+          <a:prstGeom prst="rect">
+            <a:avLst/>
+          </a:prstGeom>
+          <a:noFill/>
+        </p:spPr>
+        <p:txBody>
+          <a:bodyPr wrap="square" anchor="t">
+            <a:spAutoFit/>
+          </a:bodyPr>
+          <a:lstStyle/>
+          <a:p>
+            <a:pPr algn="l">
+              <a:lnSpc>
+                <a:spcPct val="100000"/>
+              </a:lnSpc>
+            </a:pPr>
+            <a:r>
+              <a:rPr sz="1000" b="0">
+                <a:solidFill>
+                  <a:srgbClr val="5A6474"/>
+                </a:solidFill>
+                <a:latin typeface="Courier New"/>
+              </a:rPr>
+              <a:t>Good Code, Good Vibes · TECHIE 1121 · Cornell Tech · Summer 2026</a:t>
             </a:r>
           </a:p>
         </p:txBody>
@@ -12325,7 +12432,7 @@
                 </a:solidFill>
                 <a:latin typeface="Courier New"/>
               </a:rPr>
-              <a:t>THE FIGJAM CANVAS</a:t>
+              <a:t>NOW YOU (TEAM)</a:t>
             </a:r>
           </a:p>
         </p:txBody>
@@ -12382,47 +12489,145 @@
         </p:nvSpPr>
         <p:spPr>
           <a:xfrm>
-            <a:off x="640080" y="1188720"/>
-            <a:ext cx="10972800" cy="914400"/>
-          </a:xfrm>
-          <a:prstGeom prst="rect">
-            <a:avLst/>
-          </a:prstGeom>
-          <a:noFill/>
-        </p:spPr>
-        <p:txBody>
-          <a:bodyPr wrap="square" anchor="t">
-            <a:spAutoFit/>
-          </a:bodyPr>
-          <a:lstStyle/>
-          <a:p>
-            <a:pPr algn="l">
-              <a:lnSpc>
-                <a:spcPct val="100000"/>
-              </a:lnSpc>
-            </a:pPr>
-            <a:r>
-              <a:rPr sz="3000" b="1">
+            <a:off x="640080" y="1325880"/>
+            <a:ext cx="10972800" cy="1828800"/>
+          </a:xfrm>
+          <a:prstGeom prst="rect">
+            <a:avLst/>
+          </a:prstGeom>
+          <a:noFill/>
+        </p:spPr>
+        <p:txBody>
+          <a:bodyPr wrap="square" anchor="t">
+            <a:spAutoFit/>
+          </a:bodyPr>
+          <a:lstStyle/>
+          <a:p>
+            <a:pPr algn="l">
+              <a:lnSpc>
+                <a:spcPct val="105000"/>
+              </a:lnSpc>
+            </a:pPr>
+            <a:r>
+              <a:rPr sz="3800" b="1">
                 <a:solidFill>
                   <a:srgbClr val="F5F7FA"/>
                 </a:solidFill>
                 <a:latin typeface="Arial"/>
               </a:rPr>
-              <a:t>One board, the whole loop</a:t>
-            </a:r>
-          </a:p>
-        </p:txBody>
-      </p:sp>
-      <p:sp>
-        <p:nvSpPr>
-          <p:cNvPr id="5" name="Rounded Rectangle 4"/>
+              <a:t>Verify the value your Project 2 claims.</a:t>
+            </a:r>
+          </a:p>
+        </p:txBody>
+      </p:sp>
+      <p:sp>
+        <p:nvSpPr>
+          <p:cNvPr id="5" name="TextBox 4"/>
+          <p:cNvSpPr txBox="1"/>
+          <p:nvPr/>
+        </p:nvSpPr>
+        <p:spPr>
+          <a:xfrm>
+            <a:off x="658368" y="3611880"/>
+            <a:ext cx="10972800" cy="1737360"/>
+          </a:xfrm>
+          <a:prstGeom prst="rect">
+            <a:avLst/>
+          </a:prstGeom>
+          <a:noFill/>
+        </p:spPr>
+        <p:txBody>
+          <a:bodyPr wrap="square" anchor="t">
+            <a:spAutoFit/>
+          </a:bodyPr>
+          <a:lstStyle/>
+          <a:p>
+            <a:pPr algn="l">
+              <a:lnSpc>
+                <a:spcPct val="135000"/>
+              </a:lnSpc>
+            </a:pPr>
+            <a:r>
+              <a:rPr sz="1900" b="1">
+                <a:solidFill>
+                  <a:srgbClr val="00FF41"/>
+                </a:solidFill>
+                <a:latin typeface="Arial"/>
+              </a:rPr>
+              <a:t>→  </a:t>
+            </a:r>
+            <a:r>
+              <a:rPr sz="1900" b="0">
+                <a:solidFill>
+                  <a:srgbClr val="8A94A6"/>
+                </a:solidFill>
+                <a:latin typeface="Arial"/>
+              </a:rPr>
+              <a:t>State how you operationalize your value - that definition decides the method.</a:t>
+            </a:r>
+          </a:p>
+          <a:p>
+            <a:pPr algn="l">
+              <a:lnSpc>
+                <a:spcPct val="135000"/>
+              </a:lnSpc>
+            </a:pPr>
+            <a:r>
+              <a:rPr sz="1900" b="1">
+                <a:solidFill>
+                  <a:srgbClr val="00FF41"/>
+                </a:solidFill>
+                <a:latin typeface="Arial"/>
+              </a:rPr>
+              <a:t>→  </a:t>
+            </a:r>
+            <a:r>
+              <a:rPr sz="1900" b="0">
+                <a:solidFill>
+                  <a:srgbClr val="8A94A6"/>
+                </a:solidFill>
+                <a:latin typeface="Arial"/>
+              </a:rPr>
+              <a:t>No time to run tests: RESEARCH how each lens could be verified (behavior especially) + what design interventions have worked.</a:t>
+            </a:r>
+          </a:p>
+          <a:p>
+            <a:pPr algn="l">
+              <a:lnSpc>
+                <a:spcPct val="135000"/>
+              </a:lnSpc>
+            </a:pPr>
+            <a:r>
+              <a:rPr sz="1900" b="1">
+                <a:solidFill>
+                  <a:srgbClr val="00FF41"/>
+                </a:solidFill>
+                <a:latin typeface="Arial"/>
+              </a:rPr>
+              <a:t>→  </a:t>
+            </a:r>
+            <a:r>
+              <a:rPr sz="1900" b="0">
+                <a:solidFill>
+                  <a:srgbClr val="8A94A6"/>
+                </a:solidFill>
+                <a:latin typeface="Arial"/>
+              </a:rPr>
+              <a:t>Does it deliver the value - for whom, and who's left out? Then: what would you change?</a:t>
+            </a:r>
+          </a:p>
+        </p:txBody>
+      </p:sp>
+      <p:sp>
+        <p:nvSpPr>
+          <p:cNvPr id="6" name="Rounded Rectangle 5"/>
           <p:cNvSpPr/>
           <p:nvPr/>
         </p:nvSpPr>
         <p:spPr>
           <a:xfrm>
-            <a:off x="2194560" y="2331720"/>
-            <a:ext cx="7772400" cy="3566160"/>
+            <a:off x="640080" y="5532120"/>
+            <a:ext cx="10911535" cy="658368"/>
           </a:xfrm>
           <a:prstGeom prst="roundRect">
             <a:avLst/>
@@ -12434,7 +12639,6 @@
             <a:solidFill>
               <a:srgbClr val="00FF41"/>
             </a:solidFill>
-            <a:prstDash val="dash"/>
           </a:ln>
           <a:effectLst/>
         </p:spPr>
@@ -12462,78 +12666,48 @@
       </p:sp>
       <p:sp>
         <p:nvSpPr>
-          <p:cNvPr id="6" name="TextBox 5"/>
-          <p:cNvSpPr txBox="1"/>
-          <p:nvPr/>
-        </p:nvSpPr>
-        <p:spPr>
-          <a:xfrm>
-            <a:off x="2194560" y="3383280"/>
-            <a:ext cx="7772400" cy="731520"/>
-          </a:xfrm>
-          <a:prstGeom prst="rect">
-            <a:avLst/>
-          </a:prstGeom>
-          <a:noFill/>
-        </p:spPr>
-        <p:txBody>
-          <a:bodyPr wrap="square" anchor="t">
-            <a:spAutoFit/>
-          </a:bodyPr>
-          <a:lstStyle/>
-          <a:p>
-            <a:pPr algn="ctr">
+          <p:cNvPr id="7" name="TextBox 6"/>
+          <p:cNvSpPr txBox="1"/>
+          <p:nvPr/>
+        </p:nvSpPr>
+        <p:spPr>
+          <a:xfrm>
+            <a:off x="914400" y="5532120"/>
+            <a:ext cx="10362895" cy="658368"/>
+          </a:xfrm>
+          <a:prstGeom prst="rect">
+            <a:avLst/>
+          </a:prstGeom>
+          <a:noFill/>
+        </p:spPr>
+        <p:txBody>
+          <a:bodyPr wrap="square" anchor="ctr">
+            <a:spAutoFit/>
+          </a:bodyPr>
+          <a:lstStyle/>
+          <a:p>
+            <a:pPr algn="l">
               <a:lnSpc>
                 <a:spcPct val="100000"/>
               </a:lnSpc>
             </a:pPr>
             <a:r>
-              <a:rPr sz="2200" b="1">
+              <a:rPr sz="1600" b="1">
                 <a:solidFill>
                   <a:srgbClr val="00FF41"/>
                 </a:solidFill>
-                <a:latin typeface="Courier New"/>
-              </a:rPr>
-              <a:t>[ walk the 'Vibing Values' canvas live ]</a:t>
-            </a:r>
-          </a:p>
-        </p:txBody>
-      </p:sp>
-      <p:sp>
-        <p:nvSpPr>
-          <p:cNvPr id="7" name="TextBox 6"/>
-          <p:cNvSpPr txBox="1"/>
-          <p:nvPr/>
-        </p:nvSpPr>
-        <p:spPr>
-          <a:xfrm>
-            <a:off x="2194560" y="4114800"/>
-            <a:ext cx="7772400" cy="731520"/>
-          </a:xfrm>
-          <a:prstGeom prst="rect">
-            <a:avLst/>
-          </a:prstGeom>
-          <a:noFill/>
-        </p:spPr>
-        <p:txBody>
-          <a:bodyPr wrap="square" anchor="t">
-            <a:spAutoFit/>
-          </a:bodyPr>
-          <a:lstStyle/>
-          <a:p>
-            <a:pPr algn="ctr">
-              <a:lnSpc>
-                <a:spcPct val="100000"/>
-              </a:lnSpc>
-            </a:pPr>
-            <a:r>
-              <a:rPr sz="1400" b="0">
-                <a:solidFill>
-                  <a:srgbClr val="8A94A6"/>
-                </a:solidFill>
                 <a:latin typeface="Arial"/>
               </a:rPr>
-              <a:t>figma.com/board/.../Vibing-Values - each tab is one move (Discovery / Implementation / Verification). We walk them as connected case studies.</a:t>
+              <a:t>▶  </a:t>
+            </a:r>
+            <a:r>
+              <a:rPr sz="1600" b="1">
+                <a:solidFill>
+                  <a:srgbClr val="F5F7FA"/>
+                </a:solidFill>
+                <a:latin typeface="Arial"/>
+              </a:rPr>
+              <a:t>A value-centered user RESEARCH deck + a reflection on FigJam - each person owns a slide + a lane - due today</a:t>
             </a:r>
           </a:p>
         </p:txBody>
@@ -12637,7 +12811,7 @@
                 </a:solidFill>
                 <a:latin typeface="Courier New"/>
               </a:rPr>
-              <a:t>PITECH PROJECTS</a:t>
+              <a:t>FIND YOUR PAPER - EACH PERSON</a:t>
             </a:r>
           </a:p>
         </p:txBody>
@@ -12695,7 +12869,7 @@
         <p:spPr>
           <a:xfrm>
             <a:off x="640080" y="1188720"/>
-            <a:ext cx="10972800" cy="914400"/>
+            <a:ext cx="10972800" cy="1097280"/>
           </a:xfrm>
           <a:prstGeom prst="rect">
             <a:avLst/>
@@ -12714,145 +12888,123 @@
               </a:lnSpc>
             </a:pPr>
             <a:r>
-              <a:rPr sz="3000" b="1">
+              <a:rPr sz="3400" b="1">
                 <a:solidFill>
                   <a:srgbClr val="F5F7FA"/>
                 </a:solidFill>
                 <a:latin typeface="Arial"/>
               </a:rPr>
-              <a:t>Fellows who ran the whole framework</a:t>
-            </a:r>
-          </a:p>
-        </p:txBody>
-      </p:sp>
-      <p:sp>
-        <p:nvSpPr>
-          <p:cNvPr id="5" name="Rounded Rectangle 4"/>
-          <p:cNvSpPr/>
-          <p:nvPr/>
-        </p:nvSpPr>
-        <p:spPr>
-          <a:xfrm>
-            <a:off x="2194560" y="2331720"/>
-            <a:ext cx="7772400" cy="3566160"/>
-          </a:xfrm>
-          <a:prstGeom prst="roundRect">
-            <a:avLst/>
-          </a:prstGeom>
-          <a:solidFill>
-            <a:srgbClr val="151B26"/>
-          </a:solidFill>
-          <a:ln w="19050">
-            <a:solidFill>
-              <a:srgbClr val="00FF41"/>
-            </a:solidFill>
-            <a:prstDash val="dash"/>
-          </a:ln>
-          <a:effectLst/>
-        </p:spPr>
-        <p:style>
-          <a:lnRef idx="1">
-            <a:schemeClr val="accent1"/>
-          </a:lnRef>
-          <a:fillRef idx="3">
-            <a:schemeClr val="accent1"/>
-          </a:fillRef>
-          <a:effectRef idx="2">
-            <a:schemeClr val="accent1"/>
-          </a:effectRef>
-          <a:fontRef idx="minor">
-            <a:schemeClr val="lt1"/>
-          </a:fontRef>
-        </p:style>
-        <p:txBody>
-          <a:bodyPr rtlCol="0" anchor="ctr"/>
-          <a:lstStyle/>
-          <a:p>
-            <a:pPr algn="ctr"/>
+              <a:t>Section 03 is individual: real evidence, found with AI search</a:t>
+            </a:r>
+          </a:p>
+        </p:txBody>
+      </p:sp>
+      <p:sp>
+        <p:nvSpPr>
+          <p:cNvPr id="5" name="TextBox 4"/>
+          <p:cNvSpPr txBox="1"/>
+          <p:nvPr/>
+        </p:nvSpPr>
+        <p:spPr>
+          <a:xfrm>
+            <a:off x="658368" y="2286000"/>
+            <a:ext cx="10881360" cy="3657600"/>
+          </a:xfrm>
+          <a:prstGeom prst="rect">
+            <a:avLst/>
+          </a:prstGeom>
+          <a:noFill/>
+        </p:spPr>
+        <p:txBody>
+          <a:bodyPr wrap="square" anchor="t">
+            <a:spAutoFit/>
+          </a:bodyPr>
+          <a:lstStyle/>
+          <a:p>
+            <a:pPr algn="l">
+              <a:lnSpc>
+                <a:spcPct val="112000"/>
+              </a:lnSpc>
+            </a:pPr>
+            <a:r>
+              <a:rPr sz="2000" b="0">
+                <a:solidFill>
+                  <a:srgbClr val="F5F7FA"/>
+                </a:solidFill>
+                <a:latin typeface="Arial"/>
+              </a:rPr>
+              <a:t>For your named slide, find ONE real paper on a design intervention that tried to move your value:</a:t>
+            </a:r>
+          </a:p>
+          <a:p>
+            <a:pPr algn="l">
+              <a:lnSpc>
+                <a:spcPct val="112000"/>
+              </a:lnSpc>
+            </a:pPr>
+            <a:r>
+              <a:rPr sz="2000" b="0">
+                <a:solidFill>
+                  <a:srgbClr val="F5F7FA"/>
+                </a:solidFill>
+                <a:latin typeface="Arial"/>
+              </a:rPr>
+              <a:t/>
+            </a:r>
+          </a:p>
+          <a:p>
+            <a:pPr algn="l">
+              <a:lnSpc>
+                <a:spcPct val="112000"/>
+              </a:lnSpc>
+            </a:pPr>
+            <a:r>
+              <a:rPr sz="1900" b="1">
+                <a:solidFill>
+                  <a:srgbClr val="00FF41"/>
+                </a:solidFill>
+                <a:latin typeface="Arial"/>
+              </a:rPr>
+              <a:t>Claude / ChatGPT (ask for real, citable papers - then open + check them), Elicit, Semantic Scholar, Google Scholar - and its new Scholar Labs.</a:t>
+            </a:r>
+          </a:p>
+          <a:p>
+            <a:pPr algn="l">
+              <a:lnSpc>
+                <a:spcPct val="112000"/>
+              </a:lnSpc>
+            </a:pPr>
+            <a:r>
+              <a:rPr sz="2000" b="0">
+                <a:solidFill>
+                  <a:srgbClr val="F5F7FA"/>
+                </a:solidFill>
+                <a:latin typeface="Arial"/>
+              </a:rPr>
+              <a:t/>
+            </a:r>
+          </a:p>
+          <a:p>
+            <a:pPr algn="l">
+              <a:lnSpc>
+                <a:spcPct val="112000"/>
+              </a:lnSpc>
+            </a:pPr>
+            <a:r>
+              <a:rPr sz="1700" b="0">
+                <a:solidFill>
+                  <a:srgbClr val="8A94A6"/>
+                </a:solidFill>
+                <a:latin typeface="Arial"/>
+              </a:rPr>
+              <a:t>Never invent a citation. Open the actual paper and confirm it says what you think.</a:t>
+            </a:r>
           </a:p>
         </p:txBody>
       </p:sp>
       <p:sp>
         <p:nvSpPr>
           <p:cNvPr id="6" name="TextBox 5"/>
-          <p:cNvSpPr txBox="1"/>
-          <p:nvPr/>
-        </p:nvSpPr>
-        <p:spPr>
-          <a:xfrm>
-            <a:off x="2194560" y="3383280"/>
-            <a:ext cx="7772400" cy="731520"/>
-          </a:xfrm>
-          <a:prstGeom prst="rect">
-            <a:avLst/>
-          </a:prstGeom>
-          <a:noFill/>
-        </p:spPr>
-        <p:txBody>
-          <a:bodyPr wrap="square" anchor="t">
-            <a:spAutoFit/>
-          </a:bodyPr>
-          <a:lstStyle/>
-          <a:p>
-            <a:pPr algn="ctr">
-              <a:lnSpc>
-                <a:spcPct val="100000"/>
-              </a:lnSpc>
-            </a:pPr>
-            <a:r>
-              <a:rPr sz="2200" b="1">
-                <a:solidFill>
-                  <a:srgbClr val="00FF41"/>
-                </a:solidFill>
-                <a:latin typeface="Courier New"/>
-              </a:rPr>
-              <a:t>[ show the PiTech projects + website - add screenshots ]</a:t>
-            </a:r>
-          </a:p>
-        </p:txBody>
-      </p:sp>
-      <p:sp>
-        <p:nvSpPr>
-          <p:cNvPr id="7" name="TextBox 6"/>
-          <p:cNvSpPr txBox="1"/>
-          <p:nvPr/>
-        </p:nvSpPr>
-        <p:spPr>
-          <a:xfrm>
-            <a:off x="2194560" y="4114800"/>
-            <a:ext cx="7772400" cy="731520"/>
-          </a:xfrm>
-          <a:prstGeom prst="rect">
-            <a:avLst/>
-          </a:prstGeom>
-          <a:noFill/>
-        </p:spPr>
-        <p:txBody>
-          <a:bodyPr wrap="square" anchor="t">
-            <a:spAutoFit/>
-          </a:bodyPr>
-          <a:lstStyle/>
-          <a:p>
-            <a:pPr algn="ctr">
-              <a:lnSpc>
-                <a:spcPct val="100000"/>
-              </a:lnSpc>
-            </a:pPr>
-            <a:r>
-              <a:rPr sz="1400" b="0">
-                <a:solidFill>
-                  <a:srgbClr val="8A94A6"/>
-                </a:solidFill>
-                <a:latin typeface="Arial"/>
-              </a:rPr>
-              <a:t>Real value-driven projects, and what worked - and what was hard - when teams used VAP end to end.</a:t>
-            </a:r>
-          </a:p>
-        </p:txBody>
-      </p:sp>
-      <p:sp>
-        <p:nvSpPr>
-          <p:cNvPr id="8" name="TextBox 7"/>
           <p:cNvSpPr txBox="1"/>
           <p:nvPr/>
         </p:nvSpPr>
@@ -12917,53 +13069,14 @@
       <p:grpSpPr/>
       <p:sp>
         <p:nvSpPr>
-          <p:cNvPr id="2" name="TextBox 1"/>
-          <p:cNvSpPr txBox="1"/>
-          <p:nvPr/>
-        </p:nvSpPr>
-        <p:spPr>
-          <a:xfrm>
-            <a:off x="640080" y="502920"/>
-            <a:ext cx="10058400" cy="365760"/>
-          </a:xfrm>
-          <a:prstGeom prst="rect">
-            <a:avLst/>
-          </a:prstGeom>
-          <a:noFill/>
-        </p:spPr>
-        <p:txBody>
-          <a:bodyPr wrap="square" anchor="t">
-            <a:spAutoFit/>
-          </a:bodyPr>
-          <a:lstStyle/>
-          <a:p>
-            <a:pPr algn="l">
-              <a:lnSpc>
-                <a:spcPct val="100000"/>
-              </a:lnSpc>
-            </a:pPr>
-            <a:r>
-              <a:rPr sz="1300" b="1">
-                <a:solidFill>
-                  <a:srgbClr val="00FF41"/>
-                </a:solidFill>
-                <a:latin typeface="Courier New"/>
-              </a:rPr>
-              <a:t>NOW YOU (TEAM)</a:t>
-            </a:r>
-          </a:p>
-        </p:txBody>
-      </p:sp>
-      <p:sp>
-        <p:nvSpPr>
-          <p:cNvPr id="3" name="Rectangle 2"/>
+          <p:cNvPr id="2" name="Rectangle 1"/>
           <p:cNvSpPr/>
           <p:nvPr/>
         </p:nvSpPr>
         <p:spPr>
           <a:xfrm>
-            <a:off x="640080" y="932688"/>
-            <a:ext cx="822960" cy="73152"/>
+            <a:off x="0" y="0"/>
+            <a:ext cx="256032" cy="6858000"/>
           </a:xfrm>
           <a:prstGeom prst="rect">
             <a:avLst/>
@@ -13000,39 +13113,78 @@
       </p:sp>
       <p:sp>
         <p:nvSpPr>
+          <p:cNvPr id="3" name="TextBox 2"/>
+          <p:cNvSpPr txBox="1"/>
+          <p:nvPr/>
+        </p:nvSpPr>
+        <p:spPr>
+          <a:xfrm>
+            <a:off x="822960" y="2194560"/>
+            <a:ext cx="10515600" cy="548640"/>
+          </a:xfrm>
+          <a:prstGeom prst="rect">
+            <a:avLst/>
+          </a:prstGeom>
+          <a:noFill/>
+        </p:spPr>
+        <p:txBody>
+          <a:bodyPr wrap="square" anchor="t">
+            <a:spAutoFit/>
+          </a:bodyPr>
+          <a:lstStyle/>
+          <a:p>
+            <a:pPr algn="l">
+              <a:lnSpc>
+                <a:spcPct val="100000"/>
+              </a:lnSpc>
+            </a:pPr>
+            <a:r>
+              <a:rPr sz="1800" b="1">
+                <a:solidFill>
+                  <a:srgbClr val="00FF41"/>
+                </a:solidFill>
+                <a:latin typeface="Courier New"/>
+              </a:rPr>
+              <a:t>QUIET READING</a:t>
+            </a:r>
+          </a:p>
+        </p:txBody>
+      </p:sp>
+      <p:sp>
+        <p:nvSpPr>
           <p:cNvPr id="4" name="TextBox 3"/>
           <p:cNvSpPr txBox="1"/>
           <p:nvPr/>
         </p:nvSpPr>
         <p:spPr>
           <a:xfrm>
-            <a:off x="640080" y="1325880"/>
-            <a:ext cx="10972800" cy="1828800"/>
-          </a:xfrm>
-          <a:prstGeom prst="rect">
-            <a:avLst/>
-          </a:prstGeom>
-          <a:noFill/>
-        </p:spPr>
-        <p:txBody>
-          <a:bodyPr wrap="square" anchor="t">
-            <a:spAutoFit/>
-          </a:bodyPr>
-          <a:lstStyle/>
-          <a:p>
-            <a:pPr algn="l">
-              <a:lnSpc>
-                <a:spcPct val="105000"/>
-              </a:lnSpc>
-            </a:pPr>
-            <a:r>
-              <a:rPr sz="3800" b="1">
+            <a:off x="804672" y="2743200"/>
+            <a:ext cx="10515600" cy="1554480"/>
+          </a:xfrm>
+          <a:prstGeom prst="rect">
+            <a:avLst/>
+          </a:prstGeom>
+          <a:noFill/>
+        </p:spPr>
+        <p:txBody>
+          <a:bodyPr wrap="square" anchor="t">
+            <a:spAutoFit/>
+          </a:bodyPr>
+          <a:lstStyle/>
+          <a:p>
+            <a:pPr algn="l">
+              <a:lnSpc>
+                <a:spcPct val="100000"/>
+              </a:lnSpc>
+            </a:pPr>
+            <a:r>
+              <a:rPr sz="4800" b="1">
                 <a:solidFill>
                   <a:srgbClr val="F5F7FA"/>
                 </a:solidFill>
                 <a:latin typeface="Arial"/>
               </a:rPr>
-              <a:t>Verify the value your Project 2 claims.</a:t>
+              <a:t>15 minutes - read the paper YOU found</a:t>
             </a:r>
           </a:p>
         </p:txBody>
@@ -13045,225 +13197,33 @@
         </p:nvSpPr>
         <p:spPr>
           <a:xfrm>
-            <a:off x="658368" y="3611880"/>
-            <a:ext cx="10972800" cy="1737360"/>
-          </a:xfrm>
-          <a:prstGeom prst="rect">
-            <a:avLst/>
-          </a:prstGeom>
-          <a:noFill/>
-        </p:spPr>
-        <p:txBody>
-          <a:bodyPr wrap="square" anchor="t">
-            <a:spAutoFit/>
-          </a:bodyPr>
-          <a:lstStyle/>
-          <a:p>
-            <a:pPr algn="l">
-              <a:lnSpc>
-                <a:spcPct val="135000"/>
-              </a:lnSpc>
-            </a:pPr>
-            <a:r>
-              <a:rPr sz="1900" b="1">
-                <a:solidFill>
-                  <a:srgbClr val="00FF41"/>
+            <a:off x="841248" y="4297680"/>
+            <a:ext cx="10058400" cy="640080"/>
+          </a:xfrm>
+          <a:prstGeom prst="rect">
+            <a:avLst/>
+          </a:prstGeom>
+          <a:noFill/>
+        </p:spPr>
+        <p:txBody>
+          <a:bodyPr wrap="square" anchor="t">
+            <a:spAutoFit/>
+          </a:bodyPr>
+          <a:lstStyle/>
+          <a:p>
+            <a:pPr algn="l">
+              <a:lnSpc>
+                <a:spcPct val="100000"/>
+              </a:lnSpc>
+            </a:pPr>
+            <a:r>
+              <a:rPr sz="1900" b="0">
+                <a:solidFill>
+                  <a:srgbClr val="8A94A6"/>
                 </a:solidFill>
                 <a:latin typeface="Arial"/>
               </a:rPr>
-              <a:t>→  </a:t>
-            </a:r>
-            <a:r>
-              <a:rPr sz="1900" b="0">
-                <a:solidFill>
-                  <a:srgbClr val="8A94A6"/>
-                </a:solidFill>
-                <a:latin typeface="Arial"/>
-              </a:rPr>
-              <a:t>State how you operationalize your value - that definition decides the method.</a:t>
-            </a:r>
-          </a:p>
-          <a:p>
-            <a:pPr algn="l">
-              <a:lnSpc>
-                <a:spcPct val="135000"/>
-              </a:lnSpc>
-            </a:pPr>
-            <a:r>
-              <a:rPr sz="1900" b="1">
-                <a:solidFill>
-                  <a:srgbClr val="00FF41"/>
-                </a:solidFill>
-                <a:latin typeface="Arial"/>
-              </a:rPr>
-              <a:t>→  </a:t>
-            </a:r>
-            <a:r>
-              <a:rPr sz="1900" b="0">
-                <a:solidFill>
-                  <a:srgbClr val="8A94A6"/>
-                </a:solidFill>
-                <a:latin typeface="Arial"/>
-              </a:rPr>
-              <a:t>No time to run tests: RESEARCH how each lens could be verified (behavior especially) + what design interventions have worked.</a:t>
-            </a:r>
-          </a:p>
-          <a:p>
-            <a:pPr algn="l">
-              <a:lnSpc>
-                <a:spcPct val="135000"/>
-              </a:lnSpc>
-            </a:pPr>
-            <a:r>
-              <a:rPr sz="1900" b="1">
-                <a:solidFill>
-                  <a:srgbClr val="00FF41"/>
-                </a:solidFill>
-                <a:latin typeface="Arial"/>
-              </a:rPr>
-              <a:t>→  </a:t>
-            </a:r>
-            <a:r>
-              <a:rPr sz="1900" b="0">
-                <a:solidFill>
-                  <a:srgbClr val="8A94A6"/>
-                </a:solidFill>
-                <a:latin typeface="Arial"/>
-              </a:rPr>
-              <a:t>Does it deliver the value - for whom, and who's left out? Then: what would you change?</a:t>
-            </a:r>
-          </a:p>
-        </p:txBody>
-      </p:sp>
-      <p:sp>
-        <p:nvSpPr>
-          <p:cNvPr id="6" name="Rounded Rectangle 5"/>
-          <p:cNvSpPr/>
-          <p:nvPr/>
-        </p:nvSpPr>
-        <p:spPr>
-          <a:xfrm>
-            <a:off x="640080" y="5532120"/>
-            <a:ext cx="10911535" cy="658368"/>
-          </a:xfrm>
-          <a:prstGeom prst="roundRect">
-            <a:avLst/>
-          </a:prstGeom>
-          <a:solidFill>
-            <a:srgbClr val="151B26"/>
-          </a:solidFill>
-          <a:ln w="19050">
-            <a:solidFill>
-              <a:srgbClr val="00FF41"/>
-            </a:solidFill>
-          </a:ln>
-          <a:effectLst/>
-        </p:spPr>
-        <p:style>
-          <a:lnRef idx="1">
-            <a:schemeClr val="accent1"/>
-          </a:lnRef>
-          <a:fillRef idx="3">
-            <a:schemeClr val="accent1"/>
-          </a:fillRef>
-          <a:effectRef idx="2">
-            <a:schemeClr val="accent1"/>
-          </a:effectRef>
-          <a:fontRef idx="minor">
-            <a:schemeClr val="lt1"/>
-          </a:fontRef>
-        </p:style>
-        <p:txBody>
-          <a:bodyPr rtlCol="0" anchor="ctr"/>
-          <a:lstStyle/>
-          <a:p>
-            <a:pPr algn="ctr"/>
-          </a:p>
-        </p:txBody>
-      </p:sp>
-      <p:sp>
-        <p:nvSpPr>
-          <p:cNvPr id="7" name="TextBox 6"/>
-          <p:cNvSpPr txBox="1"/>
-          <p:nvPr/>
-        </p:nvSpPr>
-        <p:spPr>
-          <a:xfrm>
-            <a:off x="914400" y="5532120"/>
-            <a:ext cx="10362895" cy="658368"/>
-          </a:xfrm>
-          <a:prstGeom prst="rect">
-            <a:avLst/>
-          </a:prstGeom>
-          <a:noFill/>
-        </p:spPr>
-        <p:txBody>
-          <a:bodyPr wrap="square" anchor="ctr">
-            <a:spAutoFit/>
-          </a:bodyPr>
-          <a:lstStyle/>
-          <a:p>
-            <a:pPr algn="l">
-              <a:lnSpc>
-                <a:spcPct val="100000"/>
-              </a:lnSpc>
-            </a:pPr>
-            <a:r>
-              <a:rPr sz="1600" b="1">
-                <a:solidFill>
-                  <a:srgbClr val="00FF41"/>
-                </a:solidFill>
-                <a:latin typeface="Arial"/>
-              </a:rPr>
-              <a:t>▶  </a:t>
-            </a:r>
-            <a:r>
-              <a:rPr sz="1600" b="1">
-                <a:solidFill>
-                  <a:srgbClr val="F5F7FA"/>
-                </a:solidFill>
-                <a:latin typeface="Arial"/>
-              </a:rPr>
-              <a:t>A value-centered user RESEARCH deck + a reflection on FigJam - each person owns a slide + a lane - due today</a:t>
-            </a:r>
-          </a:p>
-        </p:txBody>
-      </p:sp>
-      <p:sp>
-        <p:nvSpPr>
-          <p:cNvPr id="8" name="TextBox 7"/>
-          <p:cNvSpPr txBox="1"/>
-          <p:nvPr/>
-        </p:nvSpPr>
-        <p:spPr>
-          <a:xfrm>
-            <a:off x="640080" y="6355080"/>
-            <a:ext cx="10972800" cy="365760"/>
-          </a:xfrm>
-          <a:prstGeom prst="rect">
-            <a:avLst/>
-          </a:prstGeom>
-          <a:noFill/>
-        </p:spPr>
-        <p:txBody>
-          <a:bodyPr wrap="square" anchor="t">
-            <a:spAutoFit/>
-          </a:bodyPr>
-          <a:lstStyle/>
-          <a:p>
-            <a:pPr algn="l">
-              <a:lnSpc>
-                <a:spcPct val="100000"/>
-              </a:lnSpc>
-            </a:pPr>
-            <a:r>
-              <a:rPr sz="1000" b="0">
-                <a:solidFill>
-                  <a:srgbClr val="5A6474"/>
-                </a:solidFill>
-                <a:latin typeface="Courier New"/>
-              </a:rPr>
-              <a:t>Good Code, Good Vibes · TECHIE 1121 · Cornell Tech · Summer 2026</a:t>
+              <a:t>Phones away. Individual. This is the discovery reading - it fills your section-03 slide.</a:t>
             </a:r>
           </a:p>
         </p:txBody>
@@ -13277,6 +13237,312 @@
 </file>
 
 <file path=ppt/slides/slide35.xml><?xml version="1.0" encoding="utf-8"?>
+<p:sld xmlns:a="http://schemas.openxmlformats.org/drawingml/2006/main" xmlns:p="http://schemas.openxmlformats.org/presentationml/2006/main" xmlns:r="http://schemas.openxmlformats.org/officeDocument/2006/relationships">
+  <p:cSld>
+    <p:bg>
+      <p:bgPr>
+        <a:solidFill>
+          <a:srgbClr val="0B0E14"/>
+        </a:solidFill>
+        <a:effectLst/>
+      </p:bgPr>
+    </p:bg>
+    <p:spTree>
+      <p:nvGrpSpPr>
+        <p:cNvPr id="1" name=""/>
+        <p:cNvGrpSpPr/>
+        <p:nvPr/>
+      </p:nvGrpSpPr>
+      <p:grpSpPr/>
+      <p:sp>
+        <p:nvSpPr>
+          <p:cNvPr id="2" name="TextBox 1"/>
+          <p:cNvSpPr txBox="1"/>
+          <p:nvPr/>
+        </p:nvSpPr>
+        <p:spPr>
+          <a:xfrm>
+            <a:off x="640080" y="502920"/>
+            <a:ext cx="10058400" cy="365760"/>
+          </a:xfrm>
+          <a:prstGeom prst="rect">
+            <a:avLst/>
+          </a:prstGeom>
+          <a:noFill/>
+        </p:spPr>
+        <p:txBody>
+          <a:bodyPr wrap="square" anchor="t">
+            <a:spAutoFit/>
+          </a:bodyPr>
+          <a:lstStyle/>
+          <a:p>
+            <a:pPr algn="l">
+              <a:lnSpc>
+                <a:spcPct val="100000"/>
+              </a:lnSpc>
+            </a:pPr>
+            <a:r>
+              <a:rPr sz="1300" b="1">
+                <a:solidFill>
+                  <a:srgbClr val="00FF41"/>
+                </a:solidFill>
+                <a:latin typeface="Courier New"/>
+              </a:rPr>
+              <a:t>WHILE YOU READ</a:t>
+            </a:r>
+          </a:p>
+        </p:txBody>
+      </p:sp>
+      <p:sp>
+        <p:nvSpPr>
+          <p:cNvPr id="3" name="Rectangle 2"/>
+          <p:cNvSpPr/>
+          <p:nvPr/>
+        </p:nvSpPr>
+        <p:spPr>
+          <a:xfrm>
+            <a:off x="640080" y="932688"/>
+            <a:ext cx="822960" cy="73152"/>
+          </a:xfrm>
+          <a:prstGeom prst="rect">
+            <a:avLst/>
+          </a:prstGeom>
+          <a:solidFill>
+            <a:srgbClr val="00FF41"/>
+          </a:solidFill>
+          <a:ln>
+            <a:noFill/>
+          </a:ln>
+          <a:effectLst/>
+        </p:spPr>
+        <p:style>
+          <a:lnRef idx="1">
+            <a:schemeClr val="accent1"/>
+          </a:lnRef>
+          <a:fillRef idx="3">
+            <a:schemeClr val="accent1"/>
+          </a:fillRef>
+          <a:effectRef idx="2">
+            <a:schemeClr val="accent1"/>
+          </a:effectRef>
+          <a:fontRef idx="minor">
+            <a:schemeClr val="lt1"/>
+          </a:fontRef>
+        </p:style>
+        <p:txBody>
+          <a:bodyPr rtlCol="0" anchor="ctr"/>
+          <a:lstStyle/>
+          <a:p>
+            <a:pPr algn="ctr"/>
+          </a:p>
+        </p:txBody>
+      </p:sp>
+      <p:sp>
+        <p:nvSpPr>
+          <p:cNvPr id="4" name="TextBox 3"/>
+          <p:cNvSpPr txBox="1"/>
+          <p:nvPr/>
+        </p:nvSpPr>
+        <p:spPr>
+          <a:xfrm>
+            <a:off x="640080" y="1188720"/>
+            <a:ext cx="10972800" cy="1097280"/>
+          </a:xfrm>
+          <a:prstGeom prst="rect">
+            <a:avLst/>
+          </a:prstGeom>
+          <a:noFill/>
+        </p:spPr>
+        <p:txBody>
+          <a:bodyPr wrap="square" anchor="t">
+            <a:spAutoFit/>
+          </a:bodyPr>
+          <a:lstStyle/>
+          <a:p>
+            <a:pPr algn="l">
+              <a:lnSpc>
+                <a:spcPct val="100000"/>
+              </a:lnSpc>
+            </a:pPr>
+            <a:r>
+              <a:rPr sz="3400" b="1">
+                <a:solidFill>
+                  <a:srgbClr val="F5F7FA"/>
+                </a:solidFill>
+                <a:latin typeface="Arial"/>
+              </a:rPr>
+              <a:t>Pull out what your slide needs</a:t>
+            </a:r>
+          </a:p>
+        </p:txBody>
+      </p:sp>
+      <p:sp>
+        <p:nvSpPr>
+          <p:cNvPr id="5" name="TextBox 4"/>
+          <p:cNvSpPr txBox="1"/>
+          <p:nvPr/>
+        </p:nvSpPr>
+        <p:spPr>
+          <a:xfrm>
+            <a:off x="658368" y="2286000"/>
+            <a:ext cx="10881360" cy="3657600"/>
+          </a:xfrm>
+          <a:prstGeom prst="rect">
+            <a:avLst/>
+          </a:prstGeom>
+          <a:noFill/>
+        </p:spPr>
+        <p:txBody>
+          <a:bodyPr wrap="square" anchor="t">
+            <a:spAutoFit/>
+          </a:bodyPr>
+          <a:lstStyle/>
+          <a:p>
+            <a:pPr algn="l">
+              <a:lnSpc>
+                <a:spcPct val="112000"/>
+              </a:lnSpc>
+            </a:pPr>
+            <a:r>
+              <a:rPr sz="2000" b="0">
+                <a:solidFill>
+                  <a:srgbClr val="F5F7FA"/>
+                </a:solidFill>
+                <a:latin typeface="Arial"/>
+              </a:rPr>
+              <a:t>From the paper you found, mark:</a:t>
+            </a:r>
+          </a:p>
+          <a:p>
+            <a:pPr algn="l">
+              <a:lnSpc>
+                <a:spcPct val="112000"/>
+              </a:lnSpc>
+            </a:pPr>
+            <a:r>
+              <a:rPr sz="1800" b="0">
+                <a:solidFill>
+                  <a:srgbClr val="8A94A6"/>
+                </a:solidFill>
+                <a:latin typeface="Arial"/>
+              </a:rPr>
+              <a:t>1.  the design intervention they tried - what exactly did they change?</a:t>
+            </a:r>
+          </a:p>
+          <a:p>
+            <a:pPr algn="l">
+              <a:lnSpc>
+                <a:spcPct val="112000"/>
+              </a:lnSpc>
+            </a:pPr>
+            <a:r>
+              <a:rPr sz="1800" b="0">
+                <a:solidFill>
+                  <a:srgbClr val="8A94A6"/>
+                </a:solidFill>
+                <a:latin typeface="Arial"/>
+              </a:rPr>
+              <a:t>2.  the result - did it move the value? worked / mixed / failed</a:t>
+            </a:r>
+          </a:p>
+          <a:p>
+            <a:pPr algn="l">
+              <a:lnSpc>
+                <a:spcPct val="112000"/>
+              </a:lnSpc>
+            </a:pPr>
+            <a:r>
+              <a:rPr sz="1800" b="0">
+                <a:solidFill>
+                  <a:srgbClr val="8A94A6"/>
+                </a:solidFill>
+                <a:latin typeface="Arial"/>
+              </a:rPr>
+              <a:t>3.  whether it supports OUR design direction</a:t>
+            </a:r>
+          </a:p>
+          <a:p>
+            <a:pPr algn="l">
+              <a:lnSpc>
+                <a:spcPct val="112000"/>
+              </a:lnSpc>
+            </a:pPr>
+            <a:r>
+              <a:rPr sz="2000" b="0">
+                <a:solidFill>
+                  <a:srgbClr val="F5F7FA"/>
+                </a:solidFill>
+                <a:latin typeface="Arial"/>
+              </a:rPr>
+              <a:t/>
+            </a:r>
+          </a:p>
+          <a:p>
+            <a:pPr algn="l">
+              <a:lnSpc>
+                <a:spcPct val="112000"/>
+              </a:lnSpc>
+            </a:pPr>
+            <a:r>
+              <a:rPr sz="1700" b="0">
+                <a:solidFill>
+                  <a:srgbClr val="5A6474"/>
+                </a:solidFill>
+                <a:latin typeface="Arial"/>
+              </a:rPr>
+              <a:t>Then put it on your named slide (03), with the citation.</a:t>
+            </a:r>
+          </a:p>
+        </p:txBody>
+      </p:sp>
+      <p:sp>
+        <p:nvSpPr>
+          <p:cNvPr id="6" name="TextBox 5"/>
+          <p:cNvSpPr txBox="1"/>
+          <p:nvPr/>
+        </p:nvSpPr>
+        <p:spPr>
+          <a:xfrm>
+            <a:off x="640080" y="6355080"/>
+            <a:ext cx="10972800" cy="365760"/>
+          </a:xfrm>
+          <a:prstGeom prst="rect">
+            <a:avLst/>
+          </a:prstGeom>
+          <a:noFill/>
+        </p:spPr>
+        <p:txBody>
+          <a:bodyPr wrap="square" anchor="t">
+            <a:spAutoFit/>
+          </a:bodyPr>
+          <a:lstStyle/>
+          <a:p>
+            <a:pPr algn="l">
+              <a:lnSpc>
+                <a:spcPct val="100000"/>
+              </a:lnSpc>
+            </a:pPr>
+            <a:r>
+              <a:rPr sz="1000" b="0">
+                <a:solidFill>
+                  <a:srgbClr val="5A6474"/>
+                </a:solidFill>
+                <a:latin typeface="Courier New"/>
+              </a:rPr>
+              <a:t>Good Code, Good Vibes · TECHIE 1121 · Cornell Tech · Summer 2026</a:t>
+            </a:r>
+          </a:p>
+        </p:txBody>
+      </p:sp>
+    </p:spTree>
+  </p:cSld>
+  <p:clrMapOvr>
+    <a:masterClrMapping/>
+  </p:clrMapOvr>
+</p:sld>
+</file>
+
+<file path=ppt/slides/slide36.xml><?xml version="1.0" encoding="utf-8"?>
 <p:sld xmlns:a="http://schemas.openxmlformats.org/drawingml/2006/main" xmlns:p="http://schemas.openxmlformats.org/presentationml/2006/main" xmlns:r="http://schemas.openxmlformats.org/officeDocument/2006/relationships">
   <p:cSld>
     <p:bg>

--- a/slides/Week3-Tue-User-Testing-II.pptx
+++ b/slides/Week3-Tue-User-Testing-II.pptx
@@ -12894,7 +12894,7 @@
                 </a:solidFill>
                 <a:latin typeface="Arial"/>
               </a:rPr>
-              <a:t>Section 03 is individual: real evidence, found with AI search</a:t>
+              <a:t>Section 04 is individual: real evidence, found with AI search</a:t>
             </a:r>
           </a:p>
         </p:txBody>
@@ -13223,7 +13223,7 @@
                 </a:solidFill>
                 <a:latin typeface="Arial"/>
               </a:rPr>
-              <a:t>Phones away. Individual. This is the discovery reading - it fills your section-03 slide.</a:t>
+              <a:t>Phones away. Individual. This is the discovery reading - it fills your section-04 slide (FigJam: 04 Outlook).</a:t>
             </a:r>
           </a:p>
         </p:txBody>
@@ -13490,7 +13490,7 @@
                 </a:solidFill>
                 <a:latin typeface="Arial"/>
               </a:rPr>
-              <a:t>Then put it on your named slide (03), with the citation.</a:t>
+              <a:t>Then put it on your named slide (section 04), with the citation.</a:t>
             </a:r>
           </a:p>
         </p:txBody>
